--- a/samples/VK_WorkSpace_Клиентская_конференция_Шабл__classic.pptx
+++ b/samples/VK_WorkSpace_Клиентская_конференция_Шабл__classic.pptx
@@ -15,8 +15,6 @@
     <p:sldId id="289" r:id="rId42"/>
     <p:sldId id="290" r:id="rId43"/>
     <p:sldId id="291" r:id="rId44"/>
-    <p:sldId id="292" r:id="rId45"/>
-    <p:sldId id="293" r:id="rId46"/>
   </p:sldIdLst>
   <p:sldSz cy="6858000" cx="12192000"/>
   <p:notesSz cx="6858000" cy="9144000"/>
@@ -303,7 +301,7 @@
               <c:strCache>
                 <c:ptCount val="1"/>
                 <c:pt idx="0">
-                  <c:v>Время</c:v>
+                  <c:v>Время (мин)</c:v>
                 </c:pt>
               </c:strCache>
             </c:strRef>
@@ -324,10 +322,10 @@
               <c:strCache>
                 <c:ptCount val="2"/>
                 <c:pt idx="0">
-                  <c:v>Текущее время</c:v>
+                  <c:v>Ручной</c:v>
                 </c:pt>
                 <c:pt idx="1">
-                  <c:v>Автоматизированное время</c:v>
+                  <c:v>Автоматический</c:v>
                 </c:pt>
               </c:strCache>
             </c:strRef>
@@ -416,7 +414,381 @@
                   </a:defRPr>
                 </a:pPr>
                 <a:r>
-                  <a:t>минут</a:t>
+                  <a:t>мин</a:t>
+                </a:r>
+              </a:p>
+            </c:rich>
+          </c:tx>
+          <c:layout/>
+          <c:overlay val="0"/>
+        </c:title>
+        <c:majorTickMark val="out"/>
+        <c:minorTickMark val="none"/>
+        <c:tickLblPos val="nextTo"/>
+        <c:txPr>
+          <a:bodyPr/>
+          <a:lstStyle/>
+          <a:p>
+            <a:pPr>
+              <a:defRPr sz="1100" b="0">
+                <a:solidFill>
+                  <a:srgbClr val="FFFFFF"/>
+                </a:solidFill>
+                <a:latin typeface="Play"/>
+                <a:ea typeface="Play"/>
+                <a:cs typeface="Play"/>
+              </a:defRPr>
+            </a:pPr>
+          </a:p>
+        </c:txPr>
+        <c:crossAx val="-2068027336"/>
+        <c:crosses val="autoZero"/>
+      </c:valAx>
+    </c:plotArea>
+    <c:dispBlanksAs val="gap"/>
+  </c:chart>
+  <c:txPr>
+    <a:bodyPr/>
+    <a:lstStyle/>
+    <a:p>
+      <a:pPr>
+        <a:defRPr sz="1200" b="0">
+          <a:solidFill>
+            <a:srgbClr val="FFFFFF"/>
+          </a:solidFill>
+          <a:latin typeface="Play"/>
+          <a:ea typeface="Play"/>
+          <a:cs typeface="Play"/>
+        </a:defRPr>
+      </a:pPr>
+      <a:endParaRPr lang="en-US"/>
+    </a:p>
+  </c:txPr>
+  <c:externalData r:id="rId1">
+    <c:autoUpdate val="0"/>
+  </c:externalData>
+</c:chartSpace>
+</file>
+
+<file path=ppt/charts/chart2.xml><?xml version="1.0" encoding="utf-8"?>
+<c:chartSpace xmlns:c="http://schemas.openxmlformats.org/drawingml/2006/chart" xmlns:a="http://schemas.openxmlformats.org/drawingml/2006/main" xmlns:r="http://schemas.openxmlformats.org/officeDocument/2006/relationships">
+  <c:date1904 val="0"/>
+  <c:chart>
+    <c:autoTitleDeleted val="1"/>
+    <c:plotArea>
+      <c:barChart>
+        <c:barDir val="col"/>
+        <c:grouping val="clustered"/>
+        <c:ser>
+          <c:idx val="0"/>
+          <c:order val="0"/>
+          <c:tx>
+            <c:strRef>
+              <c:f>Sheet1!$B$1</c:f>
+              <c:strCache>
+                <c:ptCount val="1"/>
+                <c:pt idx="0">
+                  <c:v>Время (мин)</c:v>
+                </c:pt>
+              </c:strCache>
+            </c:strRef>
+          </c:tx>
+          <c:spPr>
+            <a:solidFill>
+              <a:srgbClr val="0077FF"/>
+            </a:solidFill>
+            <a:ln>
+              <a:solidFill>
+                <a:srgbClr val="0077FF"/>
+              </a:solidFill>
+            </a:ln>
+          </c:spPr>
+          <c:cat>
+            <c:strRef>
+              <c:f>Sheet1!$A$2:$A$3</c:f>
+              <c:strCache>
+                <c:ptCount val="2"/>
+                <c:pt idx="0">
+                  <c:v>Ручной</c:v>
+                </c:pt>
+                <c:pt idx="1">
+                  <c:v>Автоматический</c:v>
+                </c:pt>
+              </c:strCache>
+            </c:strRef>
+          </c:cat>
+          <c:val>
+            <c:numRef>
+              <c:f>Sheet1!$B$2:$B$3</c:f>
+              <c:numCache>
+                <c:formatCode>General</c:formatCode>
+                <c:ptCount val="2"/>
+                <c:pt idx="0">
+                  <c:v>186.0</c:v>
+                </c:pt>
+                <c:pt idx="1">
+                  <c:v>4.0</c:v>
+                </c:pt>
+              </c:numCache>
+            </c:numRef>
+          </c:val>
+        </c:ser>
+        <c:gapWidth val="60"/>
+        <c:axId val="-2068027336"/>
+        <c:axId val="-2113994440"/>
+      </c:barChart>
+      <c:catAx>
+        <c:axId val="-2068027336"/>
+        <c:scaling>
+          <c:orientation val="minMax"/>
+        </c:scaling>
+        <c:delete val="0"/>
+        <c:axPos val="b"/>
+        <c:majorTickMark val="out"/>
+        <c:minorTickMark val="none"/>
+        <c:tickLblPos val="nextTo"/>
+        <c:txPr>
+          <a:bodyPr/>
+          <a:lstStyle/>
+          <a:p>
+            <a:pPr>
+              <a:defRPr sz="1100" b="0">
+                <a:solidFill>
+                  <a:srgbClr val="FFFFFF"/>
+                </a:solidFill>
+                <a:latin typeface="Play"/>
+                <a:ea typeface="Play"/>
+                <a:cs typeface="Play"/>
+              </a:defRPr>
+            </a:pPr>
+          </a:p>
+        </c:txPr>
+        <c:crossAx val="-2113994440"/>
+        <c:crosses val="autoZero"/>
+        <c:auto val="1"/>
+        <c:lblAlgn val="ctr"/>
+        <c:lblOffset val="100"/>
+        <c:noMultiLvlLbl val="0"/>
+      </c:catAx>
+      <c:valAx>
+        <c:axId val="-2113994440"/>
+        <c:scaling/>
+        <c:delete val="0"/>
+        <c:axPos val="l"/>
+        <c:majorGridlines>
+          <c:spPr>
+            <a:ln w="9525">
+              <a:solidFill>
+                <a:srgbClr val="3C3C3C"/>
+              </a:solidFill>
+            </a:ln>
+          </c:spPr>
+        </c:majorGridlines>
+        <c:title>
+          <c:tx>
+            <c:rich>
+              <a:bodyPr/>
+              <a:lstStyle/>
+              <a:p>
+                <a:pPr>
+                  <a:defRPr sz="1100" b="0">
+                    <a:solidFill>
+                      <a:srgbClr val="FFFFFF"/>
+                    </a:solidFill>
+                    <a:latin typeface="Play"/>
+                    <a:ea typeface="Play"/>
+                    <a:cs typeface="Play"/>
+                  </a:defRPr>
+                </a:pPr>
+                <a:r>
+                  <a:t>мин</a:t>
+                </a:r>
+              </a:p>
+            </c:rich>
+          </c:tx>
+          <c:layout/>
+          <c:overlay val="0"/>
+        </c:title>
+        <c:majorTickMark val="out"/>
+        <c:minorTickMark val="none"/>
+        <c:tickLblPos val="nextTo"/>
+        <c:txPr>
+          <a:bodyPr/>
+          <a:lstStyle/>
+          <a:p>
+            <a:pPr>
+              <a:defRPr sz="1100" b="0">
+                <a:solidFill>
+                  <a:srgbClr val="FFFFFF"/>
+                </a:solidFill>
+                <a:latin typeface="Play"/>
+                <a:ea typeface="Play"/>
+                <a:cs typeface="Play"/>
+              </a:defRPr>
+            </a:pPr>
+          </a:p>
+        </c:txPr>
+        <c:crossAx val="-2068027336"/>
+        <c:crosses val="autoZero"/>
+      </c:valAx>
+    </c:plotArea>
+    <c:dispBlanksAs val="gap"/>
+  </c:chart>
+  <c:txPr>
+    <a:bodyPr/>
+    <a:lstStyle/>
+    <a:p>
+      <a:pPr>
+        <a:defRPr sz="1200" b="0">
+          <a:solidFill>
+            <a:srgbClr val="FFFFFF"/>
+          </a:solidFill>
+          <a:latin typeface="Play"/>
+          <a:ea typeface="Play"/>
+          <a:cs typeface="Play"/>
+        </a:defRPr>
+      </a:pPr>
+      <a:endParaRPr lang="en-US"/>
+    </a:p>
+  </c:txPr>
+  <c:externalData r:id="rId1">
+    <c:autoUpdate val="0"/>
+  </c:externalData>
+</c:chartSpace>
+</file>
+
+<file path=ppt/charts/chart3.xml><?xml version="1.0" encoding="utf-8"?>
+<c:chartSpace xmlns:c="http://schemas.openxmlformats.org/drawingml/2006/chart" xmlns:a="http://schemas.openxmlformats.org/drawingml/2006/main" xmlns:r="http://schemas.openxmlformats.org/officeDocument/2006/relationships">
+  <c:date1904 val="0"/>
+  <c:chart>
+    <c:autoTitleDeleted val="1"/>
+    <c:plotArea>
+      <c:barChart>
+        <c:barDir val="col"/>
+        <c:grouping val="clustered"/>
+        <c:ser>
+          <c:idx val="0"/>
+          <c:order val="0"/>
+          <c:tx>
+            <c:strRef>
+              <c:f>Sheet1!$B$1</c:f>
+              <c:strCache>
+                <c:ptCount val="1"/>
+                <c:pt idx="0">
+                  <c:v>Нарушения (колоды)</c:v>
+                </c:pt>
+              </c:strCache>
+            </c:strRef>
+          </c:tx>
+          <c:spPr>
+            <a:solidFill>
+              <a:srgbClr val="0077FF"/>
+            </a:solidFill>
+            <a:ln>
+              <a:solidFill>
+                <a:srgbClr val="0077FF"/>
+              </a:solidFill>
+            </a:ln>
+          </c:spPr>
+          <c:cat>
+            <c:strRef>
+              <c:f>Sheet1!$A$2:$A$3</c:f>
+              <c:strCache>
+                <c:ptCount val="2"/>
+                <c:pt idx="0">
+                  <c:v>Ручной</c:v>
+                </c:pt>
+                <c:pt idx="1">
+                  <c:v>Автоматический</c:v>
+                </c:pt>
+              </c:strCache>
+            </c:strRef>
+          </c:cat>
+          <c:val>
+            <c:numRef>
+              <c:f>Sheet1!$B$2:$B$3</c:f>
+              <c:numCache>
+                <c:formatCode>General</c:formatCode>
+                <c:ptCount val="2"/>
+                <c:pt idx="0">
+                  <c:v>19.0</c:v>
+                </c:pt>
+                <c:pt idx="1">
+                  <c:v>2.0</c:v>
+                </c:pt>
+              </c:numCache>
+            </c:numRef>
+          </c:val>
+        </c:ser>
+        <c:gapWidth val="60"/>
+        <c:axId val="-2068027336"/>
+        <c:axId val="-2113994440"/>
+      </c:barChart>
+      <c:catAx>
+        <c:axId val="-2068027336"/>
+        <c:scaling>
+          <c:orientation val="minMax"/>
+        </c:scaling>
+        <c:delete val="0"/>
+        <c:axPos val="b"/>
+        <c:majorTickMark val="out"/>
+        <c:minorTickMark val="none"/>
+        <c:tickLblPos val="nextTo"/>
+        <c:txPr>
+          <a:bodyPr/>
+          <a:lstStyle/>
+          <a:p>
+            <a:pPr>
+              <a:defRPr sz="1100" b="0">
+                <a:solidFill>
+                  <a:srgbClr val="FFFFFF"/>
+                </a:solidFill>
+                <a:latin typeface="Play"/>
+                <a:ea typeface="Play"/>
+                <a:cs typeface="Play"/>
+              </a:defRPr>
+            </a:pPr>
+          </a:p>
+        </c:txPr>
+        <c:crossAx val="-2113994440"/>
+        <c:crosses val="autoZero"/>
+        <c:auto val="1"/>
+        <c:lblAlgn val="ctr"/>
+        <c:lblOffset val="100"/>
+        <c:noMultiLvlLbl val="0"/>
+      </c:catAx>
+      <c:valAx>
+        <c:axId val="-2113994440"/>
+        <c:scaling/>
+        <c:delete val="0"/>
+        <c:axPos val="l"/>
+        <c:majorGridlines>
+          <c:spPr>
+            <a:ln w="9525">
+              <a:solidFill>
+                <a:srgbClr val="3C3C3C"/>
+              </a:solidFill>
+            </a:ln>
+          </c:spPr>
+        </c:majorGridlines>
+        <c:title>
+          <c:tx>
+            <c:rich>
+              <a:bodyPr/>
+              <a:lstStyle/>
+              <a:p>
+                <a:pPr>
+                  <a:defRPr sz="1100" b="0">
+                    <a:solidFill>
+                      <a:srgbClr val="FFFFFF"/>
+                    </a:solidFill>
+                    <a:latin typeface="Play"/>
+                    <a:ea typeface="Play"/>
+                    <a:cs typeface="Play"/>
+                  </a:defRPr>
+                </a:pPr>
+                <a:r>
+                  <a:t>колоды</a:t>
                 </a:r>
               </a:p>
             </c:rich>
@@ -2102,1006 +2474,6 @@
 </p:notes>
 </file>
 
-<file path=ppt/notesSlides/notesSlide37.xml><?xml version="1.0" encoding="utf-8"?>
-<p:notes xmlns:a="http://schemas.openxmlformats.org/drawingml/2006/main" xmlns:p="http://schemas.openxmlformats.org/presentationml/2006/main" xmlns:r="http://schemas.openxmlformats.org/officeDocument/2006/relationships">
-  <p:cSld>
-    <p:spTree>
-      <p:nvGrpSpPr>
-        <p:cNvPr id="1" name=""/>
-        <p:cNvGrpSpPr/>
-        <p:nvPr/>
-      </p:nvGrpSpPr>
-      <p:grpSpPr>
-        <a:xfrm>
-          <a:off x="0" y="0"/>
-          <a:ext cx="0" cy="0"/>
-          <a:chOff x="0" y="0"/>
-          <a:chExt cx="0" cy="0"/>
-        </a:xfrm>
-      </p:grpSpPr>
-      <p:sp>
-        <p:nvSpPr>
-          <p:cNvPr id="2" name="Slide Image Placeholder 1"/>
-          <p:cNvSpPr>
-            <a:spLocks noGrp="1"/>
-          </p:cNvSpPr>
-          <p:nvPr>
-            <p:ph type="sldImg" idx="3"/>
-          </p:nvPr>
-        </p:nvSpPr>
-        <p:spPr/>
-      </p:sp>
-      <p:sp>
-        <p:nvSpPr>
-          <p:cNvPr id="3" name="Notes Placeholder 2"/>
-          <p:cNvSpPr>
-            <a:spLocks noGrp="1"/>
-          </p:cNvSpPr>
-          <p:nvPr>
-            <p:ph type="body" idx="1"/>
-          </p:nvPr>
-        </p:nvSpPr>
-        <p:spPr/>
-        <p:txBody>
-          <a:bodyPr/>
-          <a:lstStyle/>
-          <a:p/>
-        </p:txBody>
-      </p:sp>
-      <p:sp>
-        <p:nvSpPr>
-          <p:cNvPr id="4" name="Slide Number Placeholder 3"/>
-          <p:cNvSpPr>
-            <a:spLocks noGrp="1"/>
-          </p:cNvSpPr>
-          <p:nvPr>
-            <p:ph type="sldNum" idx="12"/>
-          </p:nvPr>
-        </p:nvSpPr>
-        <p:spPr/>
-      </p:sp>
-    </p:spTree>
-  </p:cSld>
-  <p:clrMapOvr>
-    <a:masterClrMapping/>
-  </p:clrMapOvr>
-</p:notes>
-</file>
-
-<file path=ppt/notesSlides/notesSlide38.xml><?xml version="1.0" encoding="utf-8"?>
-<p:notes xmlns:a="http://schemas.openxmlformats.org/drawingml/2006/main" xmlns:p="http://schemas.openxmlformats.org/presentationml/2006/main" xmlns:r="http://schemas.openxmlformats.org/officeDocument/2006/relationships">
-  <p:cSld>
-    <p:spTree>
-      <p:nvGrpSpPr>
-        <p:cNvPr id="1" name=""/>
-        <p:cNvGrpSpPr/>
-        <p:nvPr/>
-      </p:nvGrpSpPr>
-      <p:grpSpPr>
-        <a:xfrm>
-          <a:off x="0" y="0"/>
-          <a:ext cx="0" cy="0"/>
-          <a:chOff x="0" y="0"/>
-          <a:chExt cx="0" cy="0"/>
-        </a:xfrm>
-      </p:grpSpPr>
-      <p:sp>
-        <p:nvSpPr>
-          <p:cNvPr id="2" name="Slide Image Placeholder 1"/>
-          <p:cNvSpPr>
-            <a:spLocks noGrp="1"/>
-          </p:cNvSpPr>
-          <p:nvPr>
-            <p:ph type="sldImg" idx="3"/>
-          </p:nvPr>
-        </p:nvSpPr>
-        <p:spPr/>
-      </p:sp>
-      <p:sp>
-        <p:nvSpPr>
-          <p:cNvPr id="3" name="Notes Placeholder 2"/>
-          <p:cNvSpPr>
-            <a:spLocks noGrp="1"/>
-          </p:cNvSpPr>
-          <p:nvPr>
-            <p:ph type="body" idx="1"/>
-          </p:nvPr>
-        </p:nvSpPr>
-        <p:spPr/>
-        <p:txBody>
-          <a:bodyPr/>
-          <a:lstStyle/>
-          <a:p/>
-        </p:txBody>
-      </p:sp>
-      <p:sp>
-        <p:nvSpPr>
-          <p:cNvPr id="4" name="Slide Number Placeholder 3"/>
-          <p:cNvSpPr>
-            <a:spLocks noGrp="1"/>
-          </p:cNvSpPr>
-          <p:nvPr>
-            <p:ph type="sldNum" idx="12"/>
-          </p:nvPr>
-        </p:nvSpPr>
-        <p:spPr/>
-      </p:sp>
-    </p:spTree>
-  </p:cSld>
-  <p:clrMapOvr>
-    <a:masterClrMapping/>
-  </p:clrMapOvr>
-</p:notes>
-</file>
-
-<file path=ppt/slideLayouts/slideLayout14.xml><?xml version="1.0" encoding="utf-8"?>
-<p:sldLayout xmlns:a="http://schemas.openxmlformats.org/drawingml/2006/main" xmlns:r="http://schemas.openxmlformats.org/officeDocument/2006/relationships" xmlns:mc="http://schemas.openxmlformats.org/markup-compatibility/2006" xmlns:mv="urn:schemas-microsoft-com:mac:vml" xmlns:p="http://schemas.openxmlformats.org/presentationml/2006/main" xmlns:c="http://schemas.openxmlformats.org/drawingml/2006/chart" xmlns:dgm="http://schemas.openxmlformats.org/drawingml/2006/diagram" xmlns:o="urn:schemas-microsoft-com:office:office" xmlns:v="urn:schemas-microsoft-com:vml" xmlns:pvml="urn:schemas-microsoft-com:office:powerpoint" xmlns:com="http://schemas.openxmlformats.org/drawingml/2006/compatibility" xmlns:p14="http://schemas.microsoft.com/office/powerpoint/2010/main" xmlns:p15="http://schemas.microsoft.com/office/powerpoint/2012/main" xmlns:ahyp="http://schemas.microsoft.com/office/drawing/2018/hyperlinkcolor" matchingName="12_Титульный слайд">
-  <p:cSld name="12_Титульный слайд">
-    <p:bg>
-      <p:bgPr>
-        <a:solidFill>
-          <a:schemeClr val="dk1"/>
-        </a:solidFill>
-      </p:bgPr>
-    </p:bg>
-    <p:spTree>
-      <p:nvGrpSpPr>
-        <p:cNvPr id="326" name="Shape 326"/>
-        <p:cNvGrpSpPr/>
-        <p:nvPr/>
-      </p:nvGrpSpPr>
-      <p:grpSpPr>
-        <a:xfrm>
-          <a:off x="0" y="0"/>
-          <a:ext cx="0" cy="0"/>
-          <a:chOff x="0" y="0"/>
-          <a:chExt cx="0" cy="0"/>
-        </a:xfrm>
-      </p:grpSpPr>
-      <p:pic>
-        <p:nvPicPr>
-          <p:cNvPr descr=" " id="327" name="Google Shape;327;p15"/>
-          <p:cNvPicPr preferRelativeResize="0"/>
-          <p:nvPr/>
-        </p:nvPicPr>
-        <p:blipFill rotWithShape="1">
-          <a:blip r:embed="rId2">
-            <a:alphaModFix/>
-          </a:blip>
-          <a:srcRect b="0" l="0" r="0" t="0"/>
-          <a:stretch/>
-        </p:blipFill>
-        <p:spPr>
-          <a:xfrm>
-            <a:off x="0" y="0"/>
-            <a:ext cx="12191979" cy="6857131"/>
-          </a:xfrm>
-          <a:prstGeom prst="rect">
-            <a:avLst/>
-          </a:prstGeom>
-          <a:noFill/>
-          <a:ln>
-            <a:noFill/>
-          </a:ln>
-        </p:spPr>
-      </p:pic>
-      <p:sp>
-        <p:nvSpPr>
-          <p:cNvPr id="328" name="Google Shape;328;p15"/>
-          <p:cNvSpPr/>
-          <p:nvPr/>
-        </p:nvSpPr>
-        <p:spPr>
-          <a:xfrm>
-            <a:off x="0" y="4499104"/>
-            <a:ext cx="6792686" cy="1661684"/>
-          </a:xfrm>
-          <a:prstGeom prst="rect">
-            <a:avLst/>
-          </a:prstGeom>
-          <a:solidFill>
-            <a:srgbClr val="000000"/>
-          </a:solidFill>
-          <a:ln>
-            <a:noFill/>
-          </a:ln>
-        </p:spPr>
-        <p:txBody>
-          <a:bodyPr anchorCtr="0" anchor="ctr" bIns="45700" lIns="91425" spcFirstLastPara="1" rIns="91425" wrap="square" tIns="45700">
-            <a:noAutofit/>
-          </a:bodyPr>
-          <a:lstStyle/>
-          <a:p>
-            <a:pPr indent="0" lvl="0" marL="0" marR="0" rtl="0" algn="ctr">
-              <a:spcBef>
-                <a:spcPts val="0"/>
-              </a:spcBef>
-              <a:spcAft>
-                <a:spcPts val="0"/>
-              </a:spcAft>
-              <a:buNone/>
-            </a:pPr>
-            <a:r>
-              <a:t/>
-            </a:r>
-            <a:endParaRPr sz="1800">
-              <a:solidFill>
-                <a:schemeClr val="lt1"/>
-              </a:solidFill>
-              <a:latin typeface="Arial"/>
-              <a:ea typeface="Arial"/>
-              <a:cs typeface="Arial"/>
-              <a:sym typeface="Arial"/>
-            </a:endParaRPr>
-          </a:p>
-        </p:txBody>
-      </p:sp>
-      <p:sp>
-        <p:nvSpPr>
-          <p:cNvPr id="329" name="Google Shape;329;p15"/>
-          <p:cNvSpPr/>
-          <p:nvPr/>
-        </p:nvSpPr>
-        <p:spPr>
-          <a:xfrm>
-            <a:off x="1" y="5501389"/>
-            <a:ext cx="4811842" cy="1356609"/>
-          </a:xfrm>
-          <a:prstGeom prst="rect">
-            <a:avLst/>
-          </a:prstGeom>
-          <a:solidFill>
-            <a:srgbClr val="000000"/>
-          </a:solidFill>
-          <a:ln>
-            <a:noFill/>
-          </a:ln>
-        </p:spPr>
-        <p:txBody>
-          <a:bodyPr anchorCtr="0" anchor="ctr" bIns="45700" lIns="91425" spcFirstLastPara="1" rIns="91425" wrap="square" tIns="45700">
-            <a:noAutofit/>
-          </a:bodyPr>
-          <a:lstStyle/>
-          <a:p>
-            <a:pPr indent="0" lvl="0" marL="0" marR="0" rtl="0" algn="ctr">
-              <a:spcBef>
-                <a:spcPts val="0"/>
-              </a:spcBef>
-              <a:spcAft>
-                <a:spcPts val="0"/>
-              </a:spcAft>
-              <a:buNone/>
-            </a:pPr>
-            <a:r>
-              <a:t/>
-            </a:r>
-            <a:endParaRPr sz="1800">
-              <a:solidFill>
-                <a:schemeClr val="lt1"/>
-              </a:solidFill>
-              <a:latin typeface="Arial"/>
-              <a:ea typeface="Arial"/>
-              <a:cs typeface="Arial"/>
-              <a:sym typeface="Arial"/>
-            </a:endParaRPr>
-          </a:p>
-        </p:txBody>
-      </p:sp>
-      <p:grpSp>
-        <p:nvGrpSpPr>
-          <p:cNvPr id="330" name="Google Shape;330;p15"/>
-          <p:cNvGrpSpPr/>
-          <p:nvPr/>
-        </p:nvGrpSpPr>
-        <p:grpSpPr>
-          <a:xfrm>
-            <a:off x="224842" y="-74145"/>
-            <a:ext cx="12188171" cy="64326"/>
-            <a:chOff x="-2" y="-2"/>
-            <a:chExt cx="12188169" cy="64324"/>
-          </a:xfrm>
-        </p:grpSpPr>
-        <p:cxnSp>
-          <p:nvCxnSpPr>
-            <p:cNvPr id="331" name="Google Shape;331;p15"/>
-            <p:cNvCxnSpPr/>
-            <p:nvPr/>
-          </p:nvCxnSpPr>
-          <p:spPr>
-            <a:xfrm flipH="1">
-              <a:off x="-2" y="-2"/>
-              <a:ext cx="7" cy="64324"/>
-            </a:xfrm>
-            <a:prstGeom prst="straightConnector1">
-              <a:avLst/>
-            </a:prstGeom>
-            <a:noFill/>
-            <a:ln cap="flat" cmpd="sng" w="9525">
-              <a:solidFill>
-                <a:srgbClr val="808080"/>
-              </a:solidFill>
-              <a:prstDash val="solid"/>
-              <a:miter lim="8000"/>
-              <a:headEnd len="sm" w="sm" type="none"/>
-              <a:tailEnd len="sm" w="sm" type="none"/>
-            </a:ln>
-          </p:spPr>
-        </p:cxnSp>
-        <p:cxnSp>
-          <p:nvCxnSpPr>
-            <p:cNvPr id="332" name="Google Shape;332;p15"/>
-            <p:cNvCxnSpPr/>
-            <p:nvPr/>
-          </p:nvCxnSpPr>
-          <p:spPr>
-            <a:xfrm>
-              <a:off x="677118" y="-2"/>
-              <a:ext cx="7" cy="64324"/>
-            </a:xfrm>
-            <a:prstGeom prst="straightConnector1">
-              <a:avLst/>
-            </a:prstGeom>
-            <a:noFill/>
-            <a:ln cap="flat" cmpd="sng" w="9525">
-              <a:solidFill>
-                <a:srgbClr val="808080"/>
-              </a:solidFill>
-              <a:prstDash val="solid"/>
-              <a:miter lim="8000"/>
-              <a:headEnd len="sm" w="sm" type="none"/>
-              <a:tailEnd len="sm" w="sm" type="none"/>
-            </a:ln>
-          </p:spPr>
-        </p:cxnSp>
-        <p:cxnSp>
-          <p:nvCxnSpPr>
-            <p:cNvPr id="333" name="Google Shape;333;p15"/>
-            <p:cNvCxnSpPr/>
-            <p:nvPr/>
-          </p:nvCxnSpPr>
-          <p:spPr>
-            <a:xfrm>
-              <a:off x="1354241" y="-2"/>
-              <a:ext cx="7" cy="64324"/>
-            </a:xfrm>
-            <a:prstGeom prst="straightConnector1">
-              <a:avLst/>
-            </a:prstGeom>
-            <a:noFill/>
-            <a:ln cap="flat" cmpd="sng" w="9525">
-              <a:solidFill>
-                <a:srgbClr val="808080"/>
-              </a:solidFill>
-              <a:prstDash val="solid"/>
-              <a:miter lim="8000"/>
-              <a:headEnd len="sm" w="sm" type="none"/>
-              <a:tailEnd len="sm" w="sm" type="none"/>
-            </a:ln>
-          </p:spPr>
-        </p:cxnSp>
-        <p:cxnSp>
-          <p:nvCxnSpPr>
-            <p:cNvPr id="334" name="Google Shape;334;p15"/>
-            <p:cNvCxnSpPr/>
-            <p:nvPr/>
-          </p:nvCxnSpPr>
-          <p:spPr>
-            <a:xfrm>
-              <a:off x="2031360" y="-2"/>
-              <a:ext cx="7" cy="64324"/>
-            </a:xfrm>
-            <a:prstGeom prst="straightConnector1">
-              <a:avLst/>
-            </a:prstGeom>
-            <a:noFill/>
-            <a:ln cap="flat" cmpd="sng" w="9525">
-              <a:solidFill>
-                <a:srgbClr val="808080"/>
-              </a:solidFill>
-              <a:prstDash val="solid"/>
-              <a:miter lim="8000"/>
-              <a:headEnd len="sm" w="sm" type="none"/>
-              <a:tailEnd len="sm" w="sm" type="none"/>
-            </a:ln>
-          </p:spPr>
-        </p:cxnSp>
-        <p:cxnSp>
-          <p:nvCxnSpPr>
-            <p:cNvPr id="335" name="Google Shape;335;p15"/>
-            <p:cNvCxnSpPr/>
-            <p:nvPr/>
-          </p:nvCxnSpPr>
-          <p:spPr>
-            <a:xfrm>
-              <a:off x="2708479" y="-2"/>
-              <a:ext cx="7" cy="64324"/>
-            </a:xfrm>
-            <a:prstGeom prst="straightConnector1">
-              <a:avLst/>
-            </a:prstGeom>
-            <a:noFill/>
-            <a:ln cap="flat" cmpd="sng" w="9525">
-              <a:solidFill>
-                <a:srgbClr val="808080"/>
-              </a:solidFill>
-              <a:prstDash val="solid"/>
-              <a:miter lim="8000"/>
-              <a:headEnd len="sm" w="sm" type="none"/>
-              <a:tailEnd len="sm" w="sm" type="none"/>
-            </a:ln>
-          </p:spPr>
-        </p:cxnSp>
-        <p:cxnSp>
-          <p:nvCxnSpPr>
-            <p:cNvPr id="336" name="Google Shape;336;p15"/>
-            <p:cNvCxnSpPr/>
-            <p:nvPr/>
-          </p:nvCxnSpPr>
-          <p:spPr>
-            <a:xfrm>
-              <a:off x="3385598" y="-2"/>
-              <a:ext cx="7" cy="64324"/>
-            </a:xfrm>
-            <a:prstGeom prst="straightConnector1">
-              <a:avLst/>
-            </a:prstGeom>
-            <a:noFill/>
-            <a:ln cap="flat" cmpd="sng" w="9525">
-              <a:solidFill>
-                <a:srgbClr val="808080"/>
-              </a:solidFill>
-              <a:prstDash val="solid"/>
-              <a:miter lim="8000"/>
-              <a:headEnd len="sm" w="sm" type="none"/>
-              <a:tailEnd len="sm" w="sm" type="none"/>
-            </a:ln>
-          </p:spPr>
-        </p:cxnSp>
-        <p:cxnSp>
-          <p:nvCxnSpPr>
-            <p:cNvPr id="337" name="Google Shape;337;p15"/>
-            <p:cNvCxnSpPr/>
-            <p:nvPr/>
-          </p:nvCxnSpPr>
-          <p:spPr>
-            <a:xfrm>
-              <a:off x="4062717" y="-2"/>
-              <a:ext cx="7" cy="64324"/>
-            </a:xfrm>
-            <a:prstGeom prst="straightConnector1">
-              <a:avLst/>
-            </a:prstGeom>
-            <a:noFill/>
-            <a:ln cap="flat" cmpd="sng" w="9525">
-              <a:solidFill>
-                <a:srgbClr val="808080"/>
-              </a:solidFill>
-              <a:prstDash val="solid"/>
-              <a:miter lim="8000"/>
-              <a:headEnd len="sm" w="sm" type="none"/>
-              <a:tailEnd len="sm" w="sm" type="none"/>
-            </a:ln>
-          </p:spPr>
-        </p:cxnSp>
-        <p:cxnSp>
-          <p:nvCxnSpPr>
-            <p:cNvPr id="338" name="Google Shape;338;p15"/>
-            <p:cNvCxnSpPr/>
-            <p:nvPr/>
-          </p:nvCxnSpPr>
-          <p:spPr>
-            <a:xfrm>
-              <a:off x="4739836" y="-2"/>
-              <a:ext cx="7" cy="64324"/>
-            </a:xfrm>
-            <a:prstGeom prst="straightConnector1">
-              <a:avLst/>
-            </a:prstGeom>
-            <a:noFill/>
-            <a:ln cap="flat" cmpd="sng" w="9525">
-              <a:solidFill>
-                <a:srgbClr val="808080"/>
-              </a:solidFill>
-              <a:prstDash val="solid"/>
-              <a:miter lim="8000"/>
-              <a:headEnd len="sm" w="sm" type="none"/>
-              <a:tailEnd len="sm" w="sm" type="none"/>
-            </a:ln>
-          </p:spPr>
-        </p:cxnSp>
-        <p:cxnSp>
-          <p:nvCxnSpPr>
-            <p:cNvPr id="339" name="Google Shape;339;p15"/>
-            <p:cNvCxnSpPr/>
-            <p:nvPr/>
-          </p:nvCxnSpPr>
-          <p:spPr>
-            <a:xfrm>
-              <a:off x="5416955" y="-2"/>
-              <a:ext cx="7" cy="64324"/>
-            </a:xfrm>
-            <a:prstGeom prst="straightConnector1">
-              <a:avLst/>
-            </a:prstGeom>
-            <a:noFill/>
-            <a:ln cap="flat" cmpd="sng" w="9525">
-              <a:solidFill>
-                <a:srgbClr val="808080"/>
-              </a:solidFill>
-              <a:prstDash val="solid"/>
-              <a:miter lim="8000"/>
-              <a:headEnd len="sm" w="sm" type="none"/>
-              <a:tailEnd len="sm" w="sm" type="none"/>
-            </a:ln>
-          </p:spPr>
-        </p:cxnSp>
-        <p:cxnSp>
-          <p:nvCxnSpPr>
-            <p:cNvPr id="340" name="Google Shape;340;p15"/>
-            <p:cNvCxnSpPr/>
-            <p:nvPr/>
-          </p:nvCxnSpPr>
-          <p:spPr>
-            <a:xfrm>
-              <a:off x="6094077" y="-2"/>
-              <a:ext cx="7" cy="64324"/>
-            </a:xfrm>
-            <a:prstGeom prst="straightConnector1">
-              <a:avLst/>
-            </a:prstGeom>
-            <a:noFill/>
-            <a:ln cap="flat" cmpd="sng" w="9525">
-              <a:solidFill>
-                <a:srgbClr val="808080"/>
-              </a:solidFill>
-              <a:prstDash val="solid"/>
-              <a:miter lim="8000"/>
-              <a:headEnd len="sm" w="sm" type="none"/>
-              <a:tailEnd len="sm" w="sm" type="none"/>
-            </a:ln>
-          </p:spPr>
-        </p:cxnSp>
-        <p:cxnSp>
-          <p:nvCxnSpPr>
-            <p:cNvPr id="341" name="Google Shape;341;p15"/>
-            <p:cNvCxnSpPr/>
-            <p:nvPr/>
-          </p:nvCxnSpPr>
-          <p:spPr>
-            <a:xfrm>
-              <a:off x="6771195" y="-2"/>
-              <a:ext cx="7" cy="64324"/>
-            </a:xfrm>
-            <a:prstGeom prst="straightConnector1">
-              <a:avLst/>
-            </a:prstGeom>
-            <a:noFill/>
-            <a:ln cap="flat" cmpd="sng" w="9525">
-              <a:solidFill>
-                <a:srgbClr val="808080"/>
-              </a:solidFill>
-              <a:prstDash val="solid"/>
-              <a:miter lim="8000"/>
-              <a:headEnd len="sm" w="sm" type="none"/>
-              <a:tailEnd len="sm" w="sm" type="none"/>
-            </a:ln>
-          </p:spPr>
-        </p:cxnSp>
-        <p:cxnSp>
-          <p:nvCxnSpPr>
-            <p:cNvPr id="342" name="Google Shape;342;p15"/>
-            <p:cNvCxnSpPr/>
-            <p:nvPr/>
-          </p:nvCxnSpPr>
-          <p:spPr>
-            <a:xfrm>
-              <a:off x="7448315" y="-2"/>
-              <a:ext cx="7" cy="64324"/>
-            </a:xfrm>
-            <a:prstGeom prst="straightConnector1">
-              <a:avLst/>
-            </a:prstGeom>
-            <a:noFill/>
-            <a:ln cap="flat" cmpd="sng" w="9525">
-              <a:solidFill>
-                <a:srgbClr val="808080"/>
-              </a:solidFill>
-              <a:prstDash val="solid"/>
-              <a:miter lim="8000"/>
-              <a:headEnd len="sm" w="sm" type="none"/>
-              <a:tailEnd len="sm" w="sm" type="none"/>
-            </a:ln>
-          </p:spPr>
-        </p:cxnSp>
-        <p:cxnSp>
-          <p:nvCxnSpPr>
-            <p:cNvPr id="343" name="Google Shape;343;p15"/>
-            <p:cNvCxnSpPr/>
-            <p:nvPr/>
-          </p:nvCxnSpPr>
-          <p:spPr>
-            <a:xfrm>
-              <a:off x="8125435" y="-2"/>
-              <a:ext cx="7" cy="64324"/>
-            </a:xfrm>
-            <a:prstGeom prst="straightConnector1">
-              <a:avLst/>
-            </a:prstGeom>
-            <a:noFill/>
-            <a:ln cap="flat" cmpd="sng" w="9525">
-              <a:solidFill>
-                <a:srgbClr val="808080"/>
-              </a:solidFill>
-              <a:prstDash val="solid"/>
-              <a:miter lim="8000"/>
-              <a:headEnd len="sm" w="sm" type="none"/>
-              <a:tailEnd len="sm" w="sm" type="none"/>
-            </a:ln>
-          </p:spPr>
-        </p:cxnSp>
-        <p:cxnSp>
-          <p:nvCxnSpPr>
-            <p:cNvPr id="344" name="Google Shape;344;p15"/>
-            <p:cNvCxnSpPr/>
-            <p:nvPr/>
-          </p:nvCxnSpPr>
-          <p:spPr>
-            <a:xfrm>
-              <a:off x="8802554" y="-2"/>
-              <a:ext cx="7" cy="64324"/>
-            </a:xfrm>
-            <a:prstGeom prst="straightConnector1">
-              <a:avLst/>
-            </a:prstGeom>
-            <a:noFill/>
-            <a:ln cap="flat" cmpd="sng" w="9525">
-              <a:solidFill>
-                <a:srgbClr val="808080"/>
-              </a:solidFill>
-              <a:prstDash val="solid"/>
-              <a:miter lim="8000"/>
-              <a:headEnd len="sm" w="sm" type="none"/>
-              <a:tailEnd len="sm" w="sm" type="none"/>
-            </a:ln>
-          </p:spPr>
-        </p:cxnSp>
-        <p:cxnSp>
-          <p:nvCxnSpPr>
-            <p:cNvPr id="345" name="Google Shape;345;p15"/>
-            <p:cNvCxnSpPr/>
-            <p:nvPr/>
-          </p:nvCxnSpPr>
-          <p:spPr>
-            <a:xfrm>
-              <a:off x="9479673" y="-2"/>
-              <a:ext cx="7" cy="64324"/>
-            </a:xfrm>
-            <a:prstGeom prst="straightConnector1">
-              <a:avLst/>
-            </a:prstGeom>
-            <a:noFill/>
-            <a:ln cap="flat" cmpd="sng" w="9525">
-              <a:solidFill>
-                <a:srgbClr val="808080"/>
-              </a:solidFill>
-              <a:prstDash val="solid"/>
-              <a:miter lim="8000"/>
-              <a:headEnd len="sm" w="sm" type="none"/>
-              <a:tailEnd len="sm" w="sm" type="none"/>
-            </a:ln>
-          </p:spPr>
-        </p:cxnSp>
-        <p:cxnSp>
-          <p:nvCxnSpPr>
-            <p:cNvPr id="346" name="Google Shape;346;p15"/>
-            <p:cNvCxnSpPr/>
-            <p:nvPr/>
-          </p:nvCxnSpPr>
-          <p:spPr>
-            <a:xfrm>
-              <a:off x="10156792" y="-2"/>
-              <a:ext cx="7" cy="64324"/>
-            </a:xfrm>
-            <a:prstGeom prst="straightConnector1">
-              <a:avLst/>
-            </a:prstGeom>
-            <a:noFill/>
-            <a:ln cap="flat" cmpd="sng" w="9525">
-              <a:solidFill>
-                <a:srgbClr val="808080"/>
-              </a:solidFill>
-              <a:prstDash val="solid"/>
-              <a:miter lim="8000"/>
-              <a:headEnd len="sm" w="sm" type="none"/>
-              <a:tailEnd len="sm" w="sm" type="none"/>
-            </a:ln>
-          </p:spPr>
-        </p:cxnSp>
-        <p:cxnSp>
-          <p:nvCxnSpPr>
-            <p:cNvPr id="347" name="Google Shape;347;p15"/>
-            <p:cNvCxnSpPr/>
-            <p:nvPr/>
-          </p:nvCxnSpPr>
-          <p:spPr>
-            <a:xfrm>
-              <a:off x="10833914" y="-2"/>
-              <a:ext cx="7" cy="64324"/>
-            </a:xfrm>
-            <a:prstGeom prst="straightConnector1">
-              <a:avLst/>
-            </a:prstGeom>
-            <a:noFill/>
-            <a:ln cap="flat" cmpd="sng" w="9525">
-              <a:solidFill>
-                <a:srgbClr val="808080"/>
-              </a:solidFill>
-              <a:prstDash val="solid"/>
-              <a:miter lim="8000"/>
-              <a:headEnd len="sm" w="sm" type="none"/>
-              <a:tailEnd len="sm" w="sm" type="none"/>
-            </a:ln>
-          </p:spPr>
-        </p:cxnSp>
-        <p:cxnSp>
-          <p:nvCxnSpPr>
-            <p:cNvPr id="348" name="Google Shape;348;p15"/>
-            <p:cNvCxnSpPr/>
-            <p:nvPr/>
-          </p:nvCxnSpPr>
-          <p:spPr>
-            <a:xfrm>
-              <a:off x="11511034" y="-2"/>
-              <a:ext cx="7" cy="64324"/>
-            </a:xfrm>
-            <a:prstGeom prst="straightConnector1">
-              <a:avLst/>
-            </a:prstGeom>
-            <a:noFill/>
-            <a:ln cap="flat" cmpd="sng" w="9525">
-              <a:solidFill>
-                <a:srgbClr val="808080"/>
-              </a:solidFill>
-              <a:prstDash val="solid"/>
-              <a:miter lim="8000"/>
-              <a:headEnd len="sm" w="sm" type="none"/>
-              <a:tailEnd len="sm" w="sm" type="none"/>
-            </a:ln>
-          </p:spPr>
-        </p:cxnSp>
-        <p:cxnSp>
-          <p:nvCxnSpPr>
-            <p:cNvPr id="349" name="Google Shape;349;p15"/>
-            <p:cNvCxnSpPr/>
-            <p:nvPr/>
-          </p:nvCxnSpPr>
-          <p:spPr>
-            <a:xfrm>
-              <a:off x="12188160" y="-2"/>
-              <a:ext cx="7" cy="64324"/>
-            </a:xfrm>
-            <a:prstGeom prst="straightConnector1">
-              <a:avLst/>
-            </a:prstGeom>
-            <a:noFill/>
-            <a:ln cap="flat" cmpd="sng" w="9525">
-              <a:solidFill>
-                <a:srgbClr val="808080"/>
-              </a:solidFill>
-              <a:prstDash val="solid"/>
-              <a:miter lim="8000"/>
-              <a:headEnd len="sm" w="sm" type="none"/>
-              <a:tailEnd len="sm" w="sm" type="none"/>
-            </a:ln>
-          </p:spPr>
-        </p:cxnSp>
-      </p:grpSp>
-      <p:sp>
-        <p:nvSpPr>
-          <p:cNvPr id="350" name="Google Shape;350;p15"/>
-          <p:cNvSpPr txBox="1"/>
-          <p:nvPr>
-            <p:ph type="title"/>
-          </p:nvPr>
-        </p:nvSpPr>
-        <p:spPr>
-          <a:xfrm>
-            <a:off x="429253" y="2291422"/>
-            <a:ext cx="7827335" cy="1876890"/>
-          </a:xfrm>
-          <a:prstGeom prst="rect">
-            <a:avLst/>
-          </a:prstGeom>
-          <a:noFill/>
-          <a:ln>
-            <a:noFill/>
-          </a:ln>
-        </p:spPr>
-        <p:txBody>
-          <a:bodyPr anchorCtr="0" anchor="ctr" bIns="0" lIns="0" spcFirstLastPara="1" rIns="0" wrap="square" tIns="0">
-            <a:noAutofit/>
-          </a:bodyPr>
-          <a:lstStyle>
-            <a:lvl1pPr lvl="0" algn="l">
-              <a:lnSpc>
-                <a:spcPct val="90000"/>
-              </a:lnSpc>
-              <a:spcBef>
-                <a:spcPts val="0"/>
-              </a:spcBef>
-              <a:spcAft>
-                <a:spcPts val="0"/>
-              </a:spcAft>
-              <a:buClr>
-                <a:schemeClr val="lt1"/>
-              </a:buClr>
-              <a:buSzPts val="5400"/>
-              <a:buFont typeface="Play"/>
-              <a:buNone/>
-              <a:defRPr b="0" i="0" sz="5400">
-                <a:solidFill>
-                  <a:schemeClr val="lt1"/>
-                </a:solidFill>
-                <a:latin typeface="Play"/>
-                <a:ea typeface="Play"/>
-                <a:cs typeface="Play"/>
-                <a:sym typeface="Play"/>
-              </a:defRPr>
-            </a:lvl1pPr>
-            <a:lvl2pPr lvl="1">
-              <a:spcBef>
-                <a:spcPts val="0"/>
-              </a:spcBef>
-              <a:spcAft>
-                <a:spcPts val="0"/>
-              </a:spcAft>
-              <a:buSzPts val="1400"/>
-              <a:buNone/>
-              <a:defRPr/>
-            </a:lvl2pPr>
-            <a:lvl3pPr lvl="2">
-              <a:spcBef>
-                <a:spcPts val="0"/>
-              </a:spcBef>
-              <a:spcAft>
-                <a:spcPts val="0"/>
-              </a:spcAft>
-              <a:buSzPts val="1400"/>
-              <a:buNone/>
-              <a:defRPr/>
-            </a:lvl3pPr>
-            <a:lvl4pPr lvl="3">
-              <a:spcBef>
-                <a:spcPts val="0"/>
-              </a:spcBef>
-              <a:spcAft>
-                <a:spcPts val="0"/>
-              </a:spcAft>
-              <a:buSzPts val="1400"/>
-              <a:buNone/>
-              <a:defRPr/>
-            </a:lvl4pPr>
-            <a:lvl5pPr lvl="4">
-              <a:spcBef>
-                <a:spcPts val="0"/>
-              </a:spcBef>
-              <a:spcAft>
-                <a:spcPts val="0"/>
-              </a:spcAft>
-              <a:buSzPts val="1400"/>
-              <a:buNone/>
-              <a:defRPr/>
-            </a:lvl5pPr>
-            <a:lvl6pPr lvl="5">
-              <a:spcBef>
-                <a:spcPts val="0"/>
-              </a:spcBef>
-              <a:spcAft>
-                <a:spcPts val="0"/>
-              </a:spcAft>
-              <a:buSzPts val="1400"/>
-              <a:buNone/>
-              <a:defRPr/>
-            </a:lvl6pPr>
-            <a:lvl7pPr lvl="6">
-              <a:spcBef>
-                <a:spcPts val="0"/>
-              </a:spcBef>
-              <a:spcAft>
-                <a:spcPts val="0"/>
-              </a:spcAft>
-              <a:buSzPts val="1400"/>
-              <a:buNone/>
-              <a:defRPr/>
-            </a:lvl7pPr>
-            <a:lvl8pPr lvl="7">
-              <a:spcBef>
-                <a:spcPts val="0"/>
-              </a:spcBef>
-              <a:spcAft>
-                <a:spcPts val="0"/>
-              </a:spcAft>
-              <a:buSzPts val="1400"/>
-              <a:buNone/>
-              <a:defRPr/>
-            </a:lvl8pPr>
-            <a:lvl9pPr lvl="8">
-              <a:spcBef>
-                <a:spcPts val="0"/>
-              </a:spcBef>
-              <a:spcAft>
-                <a:spcPts val="0"/>
-              </a:spcAft>
-              <a:buSzPts val="1400"/>
-              <a:buNone/>
-              <a:defRPr/>
-            </a:lvl9pPr>
-          </a:lstStyle>
-          <a:p/>
-        </p:txBody>
-      </p:sp>
-      <p:pic>
-        <p:nvPicPr>
-          <p:cNvPr id="351" name="Google Shape;351;p15"/>
-          <p:cNvPicPr preferRelativeResize="0"/>
-          <p:nvPr/>
-        </p:nvPicPr>
-        <p:blipFill rotWithShape="1">
-          <a:blip r:embed="rId3">
-            <a:alphaModFix/>
-          </a:blip>
-          <a:srcRect b="0" l="0" r="0" t="0"/>
-          <a:stretch/>
-        </p:blipFill>
-        <p:spPr>
-          <a:xfrm>
-            <a:off x="398723" y="5895936"/>
-            <a:ext cx="3536690" cy="557252"/>
-          </a:xfrm>
-          <a:prstGeom prst="rect">
-            <a:avLst/>
-          </a:prstGeom>
-          <a:noFill/>
-          <a:ln>
-            <a:noFill/>
-          </a:ln>
-        </p:spPr>
-      </p:pic>
-      <p:pic>
-        <p:nvPicPr>
-          <p:cNvPr descr=" " id="352" name="Google Shape;352;p15"/>
-          <p:cNvPicPr preferRelativeResize="0"/>
-          <p:nvPr/>
-        </p:nvPicPr>
-        <p:blipFill rotWithShape="1">
-          <a:blip r:embed="rId4">
-            <a:alphaModFix/>
-          </a:blip>
-          <a:srcRect b="0" l="0" r="0" t="0"/>
-          <a:stretch/>
-        </p:blipFill>
-        <p:spPr>
-          <a:xfrm>
-            <a:off x="10858522" y="6160788"/>
-            <a:ext cx="934755" cy="292400"/>
-          </a:xfrm>
-          <a:prstGeom prst="rect">
-            <a:avLst/>
-          </a:prstGeom>
-          <a:noFill/>
-          <a:ln>
-            <a:noFill/>
-          </a:ln>
-        </p:spPr>
-      </p:pic>
-    </p:spTree>
-  </p:cSld>
-  <p:clrMapOvr>
-    <a:masterClrMapping/>
-  </p:clrMapOvr>
-</p:sldLayout>
-</file>
-
 <file path=ppt/slideLayouts/slideLayout6.xml><?xml version="1.0" encoding="utf-8"?>
 <p:sldLayout xmlns:a="http://schemas.openxmlformats.org/drawingml/2006/main" xmlns:r="http://schemas.openxmlformats.org/officeDocument/2006/relationships" xmlns:mc="http://schemas.openxmlformats.org/markup-compatibility/2006" xmlns:mv="urn:schemas-microsoft-com:mac:vml" xmlns:p="http://schemas.openxmlformats.org/presentationml/2006/main" xmlns:c="http://schemas.openxmlformats.org/drawingml/2006/chart" xmlns:dgm="http://schemas.openxmlformats.org/drawingml/2006/diagram" xmlns:o="urn:schemas-microsoft-com:office:office" xmlns:v="urn:schemas-microsoft-com:vml" xmlns:pvml="urn:schemas-microsoft-com:office:powerpoint" xmlns:com="http://schemas.openxmlformats.org/drawingml/2006/compatibility" xmlns:p14="http://schemas.microsoft.com/office/powerpoint/2010/main" xmlns:p15="http://schemas.microsoft.com/office/powerpoint/2012/main" xmlns:ahyp="http://schemas.microsoft.com/office/drawing/2018/hyperlinkcolor" matchingName="13_Титульный слайд">
   <p:cSld name="13_Титульный слайд">
@@ -6570,7 +5942,6 @@
   <p:sldLayoutIdLst>
     <p:sldLayoutId id="2147483653" r:id="rId7"/>
     <p:sldLayoutId id="2147483655" r:id="rId9"/>
-    <p:sldLayoutId id="2147483661" r:id="rId15"/>
   </p:sldLayoutIdLst>
   <p:hf dt="0" ftr="0" hdr="0" sldNum="0"/>
   <p:txStyles>
@@ -7345,7 +6716,7 @@
         <p:spPr>
           <a:xfrm>
             <a:off x="429280" y="424715"/>
-            <a:ext cx="7827264" cy="1183640"/>
+            <a:ext cx="7827264" cy="1067996"/>
           </a:xfrm>
           <a:prstGeom prst="rect">
             <a:avLst/>
@@ -7362,7 +6733,7 @@
               <a:spcAft>
                 <a:spcPts val="300"/>
               </a:spcAft>
-              <a:defRPr sz="3200">
+              <a:defRPr sz="2800">
                 <a:solidFill>
                   <a:srgbClr val="FFFFFF"/>
                 </a:solidFill>
@@ -7372,7 +6743,7 @@
               </a:defRPr>
             </a:pPr>
             <a:r>
-              <a:rPr sz="3200">
+              <a:rPr sz="2800">
                 <a:solidFill>
                   <a:srgbClr val="FFFFFF"/>
                 </a:solidFill>
@@ -7380,7 +6751,7 @@
                 <a:ea typeface="Play"/>
                 <a:cs typeface="Play"/>
               </a:rPr>
-              <a:t>Автоматическая вёрстка презентаций: ускоряем работу команды</a:t>
+              <a:t>Защита инициативы: сервис автоматической вёрстки презентаций</a:t>
             </a:r>
           </a:p>
         </p:txBody>
@@ -7394,6 +6765,244 @@
 </file>
 
 <file path=ppt/slides/slide31.xml><?xml version="1.0" encoding="utf-8"?>
+<p:sld xmlns:a="http://schemas.openxmlformats.org/drawingml/2006/main" xmlns:p="http://schemas.openxmlformats.org/presentationml/2006/main" xmlns:r="http://schemas.openxmlformats.org/officeDocument/2006/relationships">
+  <p:cSld>
+    <p:spTree>
+      <p:nvGrpSpPr>
+        <p:cNvPr id="1" name=""/>
+        <p:cNvGrpSpPr/>
+        <p:nvPr/>
+      </p:nvGrpSpPr>
+      <p:grpSpPr/>
+      <p:sp>
+        <p:nvSpPr>
+          <p:cNvPr id="2" name="title"/>
+          <p:cNvSpPr txBox="1"/>
+          <p:nvPr/>
+        </p:nvSpPr>
+        <p:spPr>
+          <a:xfrm>
+            <a:off x="429280" y="424715"/>
+            <a:ext cx="7827264" cy="822960"/>
+          </a:xfrm>
+          <a:prstGeom prst="rect">
+            <a:avLst/>
+          </a:prstGeom>
+          <a:noFill/>
+        </p:spPr>
+        <p:txBody>
+          <a:bodyPr wrap="square" lIns="76200" rIns="76200" tIns="50800" bIns="50800">
+            <a:spAutoFit/>
+          </a:bodyPr>
+          <a:lstStyle/>
+          <a:p>
+            <a:pPr algn="l">
+              <a:spcAft>
+                <a:spcPts val="300"/>
+              </a:spcAft>
+              <a:defRPr sz="3200">
+                <a:solidFill>
+                  <a:srgbClr val="FFFFFF"/>
+                </a:solidFill>
+                <a:latin typeface="Play"/>
+                <a:ea typeface="Play"/>
+                <a:cs typeface="Play"/>
+              </a:defRPr>
+            </a:pPr>
+            <a:r>
+              <a:rPr sz="3200">
+                <a:solidFill>
+                  <a:srgbClr val="FFFFFF"/>
+                </a:solidFill>
+                <a:latin typeface="Play"/>
+                <a:ea typeface="Play"/>
+                <a:cs typeface="Play"/>
+              </a:rPr>
+              <a:t>Контекст и возможность</a:t>
+            </a:r>
+          </a:p>
+        </p:txBody>
+      </p:sp>
+      <p:sp>
+        <p:nvSpPr>
+          <p:cNvPr id="3" name="body"/>
+          <p:cNvSpPr txBox="1"/>
+          <p:nvPr/>
+        </p:nvSpPr>
+        <p:spPr>
+          <a:xfrm>
+            <a:off x="429280" y="1592290"/>
+            <a:ext cx="11310884" cy="1672529"/>
+          </a:xfrm>
+          <a:prstGeom prst="rect">
+            <a:avLst/>
+          </a:prstGeom>
+          <a:noFill/>
+        </p:spPr>
+        <p:txBody>
+          <a:bodyPr wrap="square" lIns="76200" rIns="76200" tIns="50800" bIns="50800">
+            <a:spAutoFit/>
+          </a:bodyPr>
+          <a:lstStyle/>
+          <a:p>
+            <a:pPr algn="l">
+              <a:spcAft>
+                <a:spcPts val="300"/>
+              </a:spcAft>
+              <a:defRPr sz="1600">
+                <a:solidFill>
+                  <a:srgbClr val="FFFFFF"/>
+                </a:solidFill>
+                <a:latin typeface="Play"/>
+                <a:ea typeface="Play"/>
+                <a:cs typeface="Play"/>
+              </a:defRPr>
+            </a:pPr>
+            <a:r>
+              <a:rPr sz="1600">
+                <a:solidFill>
+                  <a:srgbClr val="FFFFFF"/>
+                </a:solidFill>
+                <a:latin typeface="Play"/>
+                <a:ea typeface="Play"/>
+                <a:cs typeface="Play"/>
+              </a:rPr>
+              <a:t>• 12‑слайдная колода занимает 186 мин</a:t>
+            </a:r>
+          </a:p>
+          <a:p>
+            <a:pPr algn="l">
+              <a:spcAft>
+                <a:spcPts val="300"/>
+              </a:spcAft>
+              <a:defRPr sz="1600">
+                <a:solidFill>
+                  <a:srgbClr val="FFFFFF"/>
+                </a:solidFill>
+                <a:latin typeface="Play"/>
+                <a:ea typeface="Play"/>
+                <a:cs typeface="Play"/>
+              </a:defRPr>
+            </a:pPr>
+            <a:r>
+              <a:rPr sz="1600">
+                <a:solidFill>
+                  <a:srgbClr val="FFFFFF"/>
+                </a:solidFill>
+                <a:latin typeface="Play"/>
+                <a:ea typeface="Play"/>
+                <a:cs typeface="Play"/>
+              </a:rPr>
+              <a:t>• 74 мин на правки после ревью</a:t>
+            </a:r>
+          </a:p>
+          <a:p>
+            <a:pPr algn="l">
+              <a:spcAft>
+                <a:spcPts val="300"/>
+              </a:spcAft>
+              <a:defRPr sz="1600">
+                <a:solidFill>
+                  <a:srgbClr val="FFFFFF"/>
+                </a:solidFill>
+                <a:latin typeface="Play"/>
+                <a:ea typeface="Play"/>
+                <a:cs typeface="Play"/>
+              </a:defRPr>
+            </a:pPr>
+            <a:r>
+              <a:rPr sz="1600">
+                <a:solidFill>
+                  <a:srgbClr val="FFFFFF"/>
+                </a:solidFill>
+                <a:latin typeface="Play"/>
+                <a:ea typeface="Play"/>
+                <a:cs typeface="Play"/>
+              </a:rPr>
+              <a:t>• 19 из 42 колод нарушают фирменный стиль</a:t>
+            </a:r>
+          </a:p>
+          <a:p>
+            <a:pPr algn="l">
+              <a:spcAft>
+                <a:spcPts val="300"/>
+              </a:spcAft>
+              <a:defRPr sz="1600">
+                <a:solidFill>
+                  <a:srgbClr val="FFFFFF"/>
+                </a:solidFill>
+                <a:latin typeface="Play"/>
+                <a:ea typeface="Play"/>
+                <a:cs typeface="Play"/>
+              </a:defRPr>
+            </a:pPr>
+            <a:r>
+              <a:rPr sz="1600">
+                <a:solidFill>
+                  <a:srgbClr val="FFFFFF"/>
+                </a:solidFill>
+                <a:latin typeface="Play"/>
+                <a:ea typeface="Play"/>
+                <a:cs typeface="Play"/>
+              </a:rPr>
+              <a:t>• 4 чел. закрывают 11 запросов/нед</a:t>
+            </a:r>
+          </a:p>
+          <a:p>
+            <a:pPr algn="l">
+              <a:spcAft>
+                <a:spcPts val="300"/>
+              </a:spcAft>
+              <a:defRPr sz="1600">
+                <a:solidFill>
+                  <a:srgbClr val="FFFFFF"/>
+                </a:solidFill>
+                <a:latin typeface="Play"/>
+                <a:ea typeface="Play"/>
+                <a:cs typeface="Play"/>
+              </a:defRPr>
+            </a:pPr>
+            <a:r>
+              <a:rPr sz="1600">
+                <a:solidFill>
+                  <a:srgbClr val="FFFFFF"/>
+                </a:solidFill>
+                <a:latin typeface="Play"/>
+                <a:ea typeface="Play"/>
+                <a:cs typeface="Play"/>
+              </a:rPr>
+              <a:t>• Средний срок ожидания 6 рабочих дней</a:t>
+            </a:r>
+          </a:p>
+        </p:txBody>
+      </p:sp>
+      <p:graphicFrame>
+        <p:nvGraphicFramePr>
+          <p:cNvPr id="4" name="Chart 3"/>
+          <p:cNvGraphicFramePr>
+            <a:graphicFrameLocks noGrp="1"/>
+          </p:cNvGraphicFramePr>
+          <p:nvPr/>
+        </p:nvGraphicFramePr>
+        <p:xfrm>
+          <a:off x="429280" y="3436269"/>
+          <a:ext cx="11310884" cy="2337343"/>
+        </p:xfrm>
+        <a:graphic>
+          <a:graphicData uri="http://schemas.openxmlformats.org/drawingml/2006/chart">
+            <c:chart xmlns:c="http://schemas.openxmlformats.org/drawingml/2006/chart" r:id="rId2"/>
+          </a:graphicData>
+        </a:graphic>
+      </p:graphicFrame>
+    </p:spTree>
+  </p:cSld>
+  <p:clrMapOvr>
+    <a:masterClrMapping/>
+  </p:clrMapOvr>
+</p:sld>
+</file>
+
+<file path=ppt/slides/slide32.xml><?xml version="1.0" encoding="utf-8"?>
 <p:sld xmlns:a="http://schemas.openxmlformats.org/drawingml/2006/main" xmlns:p="http://schemas.openxmlformats.org/presentationml/2006/main" xmlns:r="http://schemas.openxmlformats.org/officeDocument/2006/relationships">
   <p:cSld>
     <p:spTree>
@@ -7476,499 +7085,7 @@
         <p:spPr>
           <a:xfrm>
             <a:off x="300817" y="297715"/>
-            <a:ext cx="11317142" cy="3307176"/>
-          </a:xfrm>
-          <a:prstGeom prst="roundRect">
-            <a:avLst/>
-          </a:prstGeom>
-          <a:solidFill>
-            <a:srgbClr val="111111">
-              <a:alpha val="85000"/>
-            </a:srgbClr>
-          </a:solidFill>
-          <a:ln>
-            <a:noFill/>
-          </a:ln>
-          <a:effectLst/>
-        </p:spPr>
-        <p:style>
-          <a:lnRef idx="1">
-            <a:schemeClr val="accent1"/>
-          </a:lnRef>
-          <a:fillRef idx="3">
-            <a:schemeClr val="accent1"/>
-          </a:fillRef>
-          <a:effectRef idx="2">
-            <a:schemeClr val="accent1"/>
-          </a:effectRef>
-          <a:fontRef idx="minor">
-            <a:schemeClr val="lt1"/>
-          </a:fontRef>
-        </p:style>
-        <p:txBody>
-          <a:bodyPr rtlCol="0" anchor="ctr"/>
-          <a:lstStyle/>
-          <a:p>
-            <a:pPr algn="ctr"/>
-          </a:p>
-        </p:txBody>
-      </p:sp>
-      <p:sp>
-        <p:nvSpPr>
-          <p:cNvPr id="681" name="title"/>
-          <p:cNvSpPr txBox="1"/>
-          <p:nvPr/>
-        </p:nvSpPr>
-        <p:spPr>
-          <a:xfrm>
-            <a:off x="427817" y="424715"/>
-            <a:ext cx="7827264" cy="1183640"/>
-          </a:xfrm>
-          <a:prstGeom prst="rect">
-            <a:avLst/>
-          </a:prstGeom>
-          <a:noFill/>
-        </p:spPr>
-        <p:txBody>
-          <a:bodyPr wrap="square" lIns="76200" rIns="76200" tIns="50800" bIns="50800">
-            <a:spAutoFit/>
-          </a:bodyPr>
-          <a:lstStyle/>
-          <a:p>
-            <a:pPr algn="l">
-              <a:spcAft>
-                <a:spcPts val="300"/>
-              </a:spcAft>
-              <a:defRPr sz="3200">
-                <a:solidFill>
-                  <a:srgbClr val="FFFFFF"/>
-                </a:solidFill>
-                <a:latin typeface="Play"/>
-                <a:ea typeface="Play"/>
-                <a:cs typeface="Play"/>
-              </a:defRPr>
-            </a:pPr>
-            <a:r>
-              <a:rPr sz="3200">
-                <a:solidFill>
-                  <a:srgbClr val="FFFFFF"/>
-                </a:solidFill>
-                <a:latin typeface="Play"/>
-                <a:ea typeface="Play"/>
-                <a:cs typeface="Play"/>
-              </a:rPr>
-              <a:t>Текущие затраты времени на создание колод</a:t>
-            </a:r>
-          </a:p>
-        </p:txBody>
-      </p:sp>
-      <p:sp>
-        <p:nvSpPr>
-          <p:cNvPr id="682" name="card_0"/>
-          <p:cNvSpPr txBox="1"/>
-          <p:nvPr/>
-        </p:nvSpPr>
-        <p:spPr>
-          <a:xfrm>
-            <a:off x="580217" y="1989452"/>
-            <a:ext cx="3331220" cy="1717212"/>
-          </a:xfrm>
-          <a:prstGeom prst="rect">
-            <a:avLst/>
-          </a:prstGeom>
-          <a:noFill/>
-        </p:spPr>
-        <p:txBody>
-          <a:bodyPr wrap="square" lIns="76200" rIns="76200" tIns="50800" bIns="50800">
-            <a:spAutoFit/>
-          </a:bodyPr>
-          <a:lstStyle/>
-          <a:p>
-            <a:pPr algn="l">
-              <a:spcAft>
-                <a:spcPts val="300"/>
-              </a:spcAft>
-              <a:defRPr sz="2800" b="0">
-                <a:solidFill>
-                  <a:srgbClr val="FFFFFF"/>
-                </a:solidFill>
-                <a:latin typeface="Play"/>
-                <a:ea typeface="Play"/>
-                <a:cs typeface="Play"/>
-              </a:defRPr>
-            </a:pPr>
-            <a:r>
-              <a:rPr sz="2800" b="0">
-                <a:solidFill>
-                  <a:srgbClr val="FFFFFF"/>
-                </a:solidFill>
-                <a:latin typeface="Play"/>
-                <a:ea typeface="Play"/>
-                <a:cs typeface="Play"/>
-              </a:rPr>
-              <a:t>42 колоды за Q1 2026: 186 минут на 12 слайдов</a:t>
-            </a:r>
-          </a:p>
-        </p:txBody>
-      </p:sp>
-      <p:sp>
-        <p:nvSpPr>
-          <p:cNvPr id="683" name="card_1"/>
-          <p:cNvSpPr txBox="1"/>
-          <p:nvPr/>
-        </p:nvSpPr>
-        <p:spPr>
-          <a:xfrm>
-            <a:off x="4369978" y="1989452"/>
-            <a:ext cx="3331220" cy="1717212"/>
-          </a:xfrm>
-          <a:prstGeom prst="rect">
-            <a:avLst/>
-          </a:prstGeom>
-          <a:noFill/>
-        </p:spPr>
-        <p:txBody>
-          <a:bodyPr wrap="square" lIns="76200" rIns="76200" tIns="50800" bIns="50800">
-            <a:spAutoFit/>
-          </a:bodyPr>
-          <a:lstStyle/>
-          <a:p>
-            <a:pPr algn="l">
-              <a:spcAft>
-                <a:spcPts val="300"/>
-              </a:spcAft>
-              <a:defRPr sz="2800" b="0">
-                <a:solidFill>
-                  <a:srgbClr val="FFFFFF"/>
-                </a:solidFill>
-                <a:latin typeface="Play"/>
-                <a:ea typeface="Play"/>
-                <a:cs typeface="Play"/>
-              </a:defRPr>
-            </a:pPr>
-            <a:r>
-              <a:rPr sz="2800" b="0">
-                <a:solidFill>
-                  <a:srgbClr val="FFFFFF"/>
-                </a:solidFill>
-                <a:latin typeface="Play"/>
-                <a:ea typeface="Play"/>
-                <a:cs typeface="Play"/>
-              </a:rPr>
-              <a:t>74 минуты на правки после ревью</a:t>
-            </a:r>
-          </a:p>
-        </p:txBody>
-      </p:sp>
-      <p:sp>
-        <p:nvSpPr>
-          <p:cNvPr id="684" name="card_2"/>
-          <p:cNvSpPr txBox="1"/>
-          <p:nvPr/>
-        </p:nvSpPr>
-        <p:spPr>
-          <a:xfrm>
-            <a:off x="8159739" y="1989452"/>
-            <a:ext cx="3331220" cy="1717212"/>
-          </a:xfrm>
-          <a:prstGeom prst="rect">
-            <a:avLst/>
-          </a:prstGeom>
-          <a:noFill/>
-        </p:spPr>
-        <p:txBody>
-          <a:bodyPr wrap="square" lIns="76200" rIns="76200" tIns="50800" bIns="50800">
-            <a:spAutoFit/>
-          </a:bodyPr>
-          <a:lstStyle/>
-          <a:p>
-            <a:pPr algn="l">
-              <a:spcAft>
-                <a:spcPts val="300"/>
-              </a:spcAft>
-              <a:defRPr sz="2800" b="0">
-                <a:solidFill>
-                  <a:srgbClr val="FFFFFF"/>
-                </a:solidFill>
-                <a:latin typeface="Play"/>
-                <a:ea typeface="Play"/>
-                <a:cs typeface="Play"/>
-              </a:defRPr>
-            </a:pPr>
-            <a:r>
-              <a:rPr sz="2800" b="0">
-                <a:solidFill>
-                  <a:srgbClr val="FFFFFF"/>
-                </a:solidFill>
-                <a:latin typeface="Play"/>
-                <a:ea typeface="Play"/>
-                <a:cs typeface="Play"/>
-              </a:rPr>
-              <a:t>19 колод нарушили фирменный стиль</a:t>
-            </a:r>
-          </a:p>
-        </p:txBody>
-      </p:sp>
-    </p:spTree>
-  </p:cSld>
-  <p:clrMapOvr>
-    <a:masterClrMapping/>
-  </p:clrMapOvr>
-</p:sld>
-</file>
-
-<file path=ppt/slides/slide32.xml><?xml version="1.0" encoding="utf-8"?>
-<p:sld xmlns:a="http://schemas.openxmlformats.org/drawingml/2006/main" xmlns:p="http://schemas.openxmlformats.org/presentationml/2006/main" xmlns:r="http://schemas.openxmlformats.org/officeDocument/2006/relationships">
-  <p:cSld>
-    <p:spTree>
-      <p:nvGrpSpPr>
-        <p:cNvPr id="1" name=""/>
-        <p:cNvGrpSpPr/>
-        <p:nvPr/>
-      </p:nvGrpSpPr>
-      <p:grpSpPr/>
-      <p:sp>
-        <p:nvSpPr>
-          <p:cNvPr id="2" name="title"/>
-          <p:cNvSpPr txBox="1"/>
-          <p:nvPr/>
-        </p:nvSpPr>
-        <p:spPr>
-          <a:xfrm>
-            <a:off x="429280" y="424715"/>
-            <a:ext cx="7827264" cy="822960"/>
-          </a:xfrm>
-          <a:prstGeom prst="rect">
-            <a:avLst/>
-          </a:prstGeom>
-          <a:noFill/>
-        </p:spPr>
-        <p:txBody>
-          <a:bodyPr wrap="square" lIns="76200" rIns="76200" tIns="50800" bIns="50800">
-            <a:spAutoFit/>
-          </a:bodyPr>
-          <a:lstStyle/>
-          <a:p>
-            <a:pPr algn="l">
-              <a:spcAft>
-                <a:spcPts val="300"/>
-              </a:spcAft>
-              <a:defRPr sz="3200">
-                <a:solidFill>
-                  <a:srgbClr val="FFFFFF"/>
-                </a:solidFill>
-                <a:latin typeface="Play"/>
-                <a:ea typeface="Play"/>
-                <a:cs typeface="Play"/>
-              </a:defRPr>
-            </a:pPr>
-            <a:r>
-              <a:rPr sz="3200">
-                <a:solidFill>
-                  <a:srgbClr val="FFFFFF"/>
-                </a:solidFill>
-                <a:latin typeface="Play"/>
-                <a:ea typeface="Play"/>
-                <a:cs typeface="Play"/>
-              </a:rPr>
-              <a:t>Проблемы дизайна и ожидания</a:t>
-            </a:r>
-          </a:p>
-        </p:txBody>
-      </p:sp>
-      <p:sp>
-        <p:nvSpPr>
-          <p:cNvPr id="3" name="body"/>
-          <p:cNvSpPr txBox="1"/>
-          <p:nvPr/>
-        </p:nvSpPr>
-        <p:spPr>
-          <a:xfrm>
-            <a:off x="429280" y="2335824"/>
-            <a:ext cx="11310884" cy="1950720"/>
-          </a:xfrm>
-          <a:prstGeom prst="rect">
-            <a:avLst/>
-          </a:prstGeom>
-          <a:noFill/>
-        </p:spPr>
-        <p:txBody>
-          <a:bodyPr wrap="square" lIns="76200" rIns="76200" tIns="50800" bIns="50800">
-            <a:spAutoFit/>
-          </a:bodyPr>
-          <a:lstStyle/>
-          <a:p>
-            <a:pPr algn="l">
-              <a:spcAft>
-                <a:spcPts val="300"/>
-              </a:spcAft>
-              <a:defRPr sz="2800">
-                <a:solidFill>
-                  <a:srgbClr val="FFFFFF"/>
-                </a:solidFill>
-                <a:latin typeface="Play"/>
-                <a:ea typeface="Play"/>
-                <a:cs typeface="Play"/>
-              </a:defRPr>
-            </a:pPr>
-            <a:r>
-              <a:rPr sz="2800">
-                <a:solidFill>
-                  <a:srgbClr val="FFFFFF"/>
-                </a:solidFill>
-                <a:latin typeface="Play"/>
-                <a:ea typeface="Play"/>
-                <a:cs typeface="Play"/>
-              </a:rPr>
-              <a:t>• Дизайн-отдел из 4 человек закрывает 11 запросов/неделю из 27</a:t>
-            </a:r>
-          </a:p>
-          <a:p>
-            <a:pPr algn="l">
-              <a:spcAft>
-                <a:spcPts val="300"/>
-              </a:spcAft>
-              <a:defRPr sz="2800">
-                <a:solidFill>
-                  <a:srgbClr val="FFFFFF"/>
-                </a:solidFill>
-                <a:latin typeface="Play"/>
-                <a:ea typeface="Play"/>
-                <a:cs typeface="Play"/>
-              </a:defRPr>
-            </a:pPr>
-            <a:r>
-              <a:rPr sz="2800">
-                <a:solidFill>
-                  <a:srgbClr val="FFFFFF"/>
-                </a:solidFill>
-                <a:latin typeface="Play"/>
-                <a:ea typeface="Play"/>
-                <a:cs typeface="Play"/>
-              </a:rPr>
-              <a:t>• Средний срок ожидания 6 рабочих дней</a:t>
-            </a:r>
-          </a:p>
-          <a:p>
-            <a:pPr algn="l">
-              <a:spcAft>
-                <a:spcPts val="300"/>
-              </a:spcAft>
-              <a:defRPr sz="2800">
-                <a:solidFill>
-                  <a:srgbClr val="FFFFFF"/>
-                </a:solidFill>
-                <a:latin typeface="Play"/>
-                <a:ea typeface="Play"/>
-                <a:cs typeface="Play"/>
-              </a:defRPr>
-            </a:pPr>
-            <a:r>
-              <a:rPr sz="2800">
-                <a:solidFill>
-                  <a:srgbClr val="FFFFFF"/>
-                </a:solidFill>
-                <a:latin typeface="Play"/>
-                <a:ea typeface="Play"/>
-                <a:cs typeface="Play"/>
-              </a:rPr>
-              <a:t>• 19 колод с нарушением стиля</a:t>
-            </a:r>
-          </a:p>
-        </p:txBody>
-      </p:sp>
-    </p:spTree>
-  </p:cSld>
-  <p:clrMapOvr>
-    <a:masterClrMapping/>
-  </p:clrMapOvr>
-</p:sld>
-</file>
-
-<file path=ppt/slides/slide33.xml><?xml version="1.0" encoding="utf-8"?>
-<p:sld xmlns:a="http://schemas.openxmlformats.org/drawingml/2006/main" xmlns:p="http://schemas.openxmlformats.org/presentationml/2006/main" xmlns:r="http://schemas.openxmlformats.org/officeDocument/2006/relationships">
-  <p:cSld>
-    <p:spTree>
-      <p:nvGrpSpPr>
-        <p:cNvPr id="1" name=""/>
-        <p:cNvGrpSpPr/>
-        <p:nvPr/>
-      </p:nvGrpSpPr>
-      <p:grpSpPr/>
-      <p:sp>
-        <p:nvSpPr>
-          <p:cNvPr id="679" name="Google Shape;679;p31"/>
-          <p:cNvSpPr/>
-          <p:nvPr/>
-        </p:nvSpPr>
-        <p:spPr>
-          <a:xfrm>
-            <a:off x="0" y="4748271"/>
-            <a:ext cx="12192000" cy="2109730"/>
-          </a:xfrm>
-          <a:prstGeom prst="rect">
-            <a:avLst/>
-          </a:prstGeom>
-          <a:gradFill>
-            <a:gsLst>
-              <a:gs pos="0">
-                <a:srgbClr val="0077FF">
-                  <a:alpha val="61961"/>
-                </a:srgbClr>
-              </a:gs>
-              <a:gs pos="99000">
-                <a:srgbClr val="00AEE8"/>
-              </a:gs>
-              <a:gs pos="100000">
-                <a:srgbClr val="00AEE8"/>
-              </a:gs>
-            </a:gsLst>
-            <a:lin ang="14400000" scaled="0"/>
-          </a:gradFill>
-          <a:ln>
-            <a:noFill/>
-          </a:ln>
-        </p:spPr>
-        <p:txBody>
-          <a:bodyPr anchorCtr="0" anchor="ctr" bIns="0" lIns="108000" spcFirstLastPara="1" rIns="91425" wrap="square" tIns="0">
-            <a:noAutofit/>
-          </a:bodyPr>
-          <a:lstStyle/>
-          <a:p>
-            <a:pPr indent="0" lvl="0" marL="0" marR="0" rtl="0" algn="l">
-              <a:spcBef>
-                <a:spcPts val="0"/>
-              </a:spcBef>
-              <a:spcAft>
-                <a:spcPts val="0"/>
-              </a:spcAft>
-              <a:buNone/>
-            </a:pPr>
-            <a:r>
-              <a:t/>
-            </a:r>
-            <a:endParaRPr sz="1100">
-              <a:solidFill>
-                <a:schemeClr val="lt1"/>
-              </a:solidFill>
-              <a:latin typeface="Play"/>
-              <a:ea typeface="Play"/>
-              <a:cs typeface="Play"/>
-              <a:sym typeface="Play"/>
-            </a:endParaRPr>
-          </a:p>
-        </p:txBody>
-      </p:sp>
-      <p:sp>
-        <p:nvSpPr>
-          <p:cNvPr id="680" name="Rounded Rectangle 679"/>
-          <p:cNvSpPr/>
-          <p:nvPr/>
-        </p:nvSpPr>
-        <p:spPr>
-          <a:xfrm>
-            <a:off x="300817" y="297715"/>
-            <a:ext cx="11317142" cy="3307176"/>
+            <a:ext cx="11566347" cy="5758505"/>
           </a:xfrm>
           <a:prstGeom prst="roundRect">
             <a:avLst/>
@@ -8049,21 +7166,21 @@
                 <a:ea typeface="Play"/>
                 <a:cs typeface="Play"/>
               </a:rPr>
-              <a:t>Сервис автоматической вёрстки</a:t>
+              <a:t>Предложение</a:t>
             </a:r>
           </a:p>
         </p:txBody>
       </p:sp>
       <p:sp>
         <p:nvSpPr>
-          <p:cNvPr id="682" name="card_0"/>
+          <p:cNvPr id="682" name="body"/>
           <p:cNvSpPr txBox="1"/>
           <p:nvPr/>
         </p:nvSpPr>
         <p:spPr>
           <a:xfrm>
-            <a:off x="580217" y="1989452"/>
-            <a:ext cx="3331220" cy="1717212"/>
+            <a:off x="427817" y="1837052"/>
+            <a:ext cx="11312347" cy="1636867"/>
           </a:xfrm>
           <a:prstGeom prst="rect">
             <a:avLst/>
@@ -8080,7 +7197,7 @@
               <a:spcAft>
                 <a:spcPts val="300"/>
               </a:spcAft>
-              <a:defRPr sz="2800" b="0">
+              <a:defRPr sz="1800">
                 <a:solidFill>
                   <a:srgbClr val="FFFFFF"/>
                 </a:solidFill>
@@ -8090,7 +7207,7 @@
               </a:defRPr>
             </a:pPr>
             <a:r>
-              <a:rPr sz="2800" b="0">
+              <a:rPr sz="1800">
                 <a:solidFill>
                   <a:srgbClr val="FFFFFF"/>
                 </a:solidFill>
@@ -8098,38 +7215,130 @@
                 <a:ea typeface="Play"/>
                 <a:cs typeface="Play"/>
               </a:rPr>
-              <a:t>Принимает шаблон pptx и материалы</a:t>
+              <a:t>• Сервис принимает pptx, документы, таблицы, заметки</a:t>
+            </a:r>
+          </a:p>
+          <a:p>
+            <a:pPr algn="l">
+              <a:spcAft>
+                <a:spcPts val="300"/>
+              </a:spcAft>
+              <a:defRPr sz="1800">
+                <a:solidFill>
+                  <a:srgbClr val="FFFFFF"/>
+                </a:solidFill>
+                <a:latin typeface="Play"/>
+                <a:ea typeface="Play"/>
+                <a:cs typeface="Play"/>
+              </a:defRPr>
+            </a:pPr>
+            <a:r>
+              <a:rPr sz="1800">
+                <a:solidFill>
+                  <a:srgbClr val="FFFFFF"/>
+                </a:solidFill>
+                <a:latin typeface="Play"/>
+                <a:ea typeface="Play"/>
+                <a:cs typeface="Play"/>
+              </a:rPr>
+              <a:t>• Автоматически строит дизайн‑систему и план колоды</a:t>
+            </a:r>
+          </a:p>
+          <a:p>
+            <a:pPr algn="l">
+              <a:spcAft>
+                <a:spcPts val="300"/>
+              </a:spcAft>
+              <a:defRPr sz="1800">
+                <a:solidFill>
+                  <a:srgbClr val="FFFFFF"/>
+                </a:solidFill>
+                <a:latin typeface="Play"/>
+                <a:ea typeface="Play"/>
+                <a:cs typeface="Play"/>
+              </a:defRPr>
+            </a:pPr>
+            <a:r>
+              <a:rPr sz="1800">
+                <a:solidFill>
+                  <a:srgbClr val="FFFFFF"/>
+                </a:solidFill>
+                <a:latin typeface="Play"/>
+                <a:ea typeface="Play"/>
+                <a:cs typeface="Play"/>
+              </a:rPr>
+              <a:t>• Экспорт в pptx, pdf, html с редактируемыми слайдами</a:t>
+            </a:r>
+          </a:p>
+          <a:p>
+            <a:pPr algn="l">
+              <a:spcAft>
+                <a:spcPts val="300"/>
+              </a:spcAft>
+              <a:defRPr sz="1800">
+                <a:solidFill>
+                  <a:srgbClr val="FFFFFF"/>
+                </a:solidFill>
+                <a:latin typeface="Play"/>
+                <a:ea typeface="Play"/>
+                <a:cs typeface="Play"/>
+              </a:defRPr>
+            </a:pPr>
+            <a:r>
+              <a:rPr sz="1800">
+                <a:solidFill>
+                  <a:srgbClr val="FFFFFF"/>
+                </a:solidFill>
+                <a:latin typeface="Play"/>
+                <a:ea typeface="Play"/>
+                <a:cs typeface="Play"/>
+              </a:rPr>
+              <a:t>• Аудит качества проверяет стиль и данные до выдачи</a:t>
             </a:r>
           </a:p>
         </p:txBody>
       </p:sp>
       <p:sp>
         <p:nvSpPr>
-          <p:cNvPr id="683" name="card_1"/>
-          <p:cNvSpPr txBox="1"/>
+          <p:cNvPr id="683" name="Pentagon 682"/>
+          <p:cNvSpPr/>
           <p:nvPr/>
         </p:nvSpPr>
         <p:spPr>
           <a:xfrm>
-            <a:off x="4369978" y="1989452"/>
-            <a:ext cx="3331220" cy="1717212"/>
+            <a:off x="427817" y="4237891"/>
+            <a:ext cx="1772267" cy="1098805"/>
           </a:xfrm>
-          <a:prstGeom prst="rect">
+          <a:prstGeom prst="homePlate">
             <a:avLst/>
           </a:prstGeom>
-          <a:noFill/>
+          <a:solidFill>
+            <a:srgbClr val="0077FF"/>
+          </a:solidFill>
+          <a:ln>
+            <a:noFill/>
+          </a:ln>
         </p:spPr>
+        <p:style>
+          <a:lnRef idx="1">
+            <a:schemeClr val="accent1"/>
+          </a:lnRef>
+          <a:fillRef idx="3">
+            <a:schemeClr val="accent1"/>
+          </a:fillRef>
+          <a:effectRef idx="2">
+            <a:schemeClr val="accent1"/>
+          </a:effectRef>
+          <a:fontRef idx="minor">
+            <a:schemeClr val="lt1"/>
+          </a:fontRef>
+        </p:style>
         <p:txBody>
-          <a:bodyPr wrap="square" lIns="76200" rIns="76200" tIns="50800" bIns="50800">
-            <a:spAutoFit/>
-          </a:bodyPr>
+          <a:bodyPr rtlCol="0" anchor="ctr" wrap="square" lIns="12700" rIns="12700" tIns="12700" bIns="12700"/>
           <a:lstStyle/>
           <a:p>
-            <a:pPr algn="l">
-              <a:spcAft>
-                <a:spcPts val="300"/>
-              </a:spcAft>
-              <a:defRPr sz="2800" b="0">
+            <a:pPr algn="ctr">
+              <a:defRPr sz="868" b="0">
                 <a:solidFill>
                   <a:srgbClr val="FFFFFF"/>
                 </a:solidFill>
@@ -8139,7 +7348,7 @@
               </a:defRPr>
             </a:pPr>
             <a:r>
-              <a:rPr sz="2800" b="0">
+              <a:rPr sz="868" b="0">
                 <a:solidFill>
                   <a:srgbClr val="FFFFFF"/>
                 </a:solidFill>
@@ -8147,38 +7356,52 @@
                 <a:ea typeface="Play"/>
                 <a:cs typeface="Play"/>
               </a:rPr>
-              <a:t>Автоматически формирует план колоды и вёрстку</a:t>
+              <a:t>Загрузка шаблона</a:t>
             </a:r>
           </a:p>
         </p:txBody>
       </p:sp>
       <p:sp>
         <p:nvSpPr>
-          <p:cNvPr id="684" name="card_2"/>
-          <p:cNvSpPr txBox="1"/>
+          <p:cNvPr id="684" name="Chevron 683"/>
+          <p:cNvSpPr/>
           <p:nvPr/>
         </p:nvSpPr>
         <p:spPr>
           <a:xfrm>
-            <a:off x="8159739" y="1989452"/>
-            <a:ext cx="3331220" cy="1717212"/>
+            <a:off x="2335832" y="4237891"/>
+            <a:ext cx="1772267" cy="1098805"/>
           </a:xfrm>
-          <a:prstGeom prst="rect">
+          <a:prstGeom prst="chevron">
             <a:avLst/>
           </a:prstGeom>
-          <a:noFill/>
+          <a:solidFill>
+            <a:srgbClr val="0077FF"/>
+          </a:solidFill>
+          <a:ln>
+            <a:noFill/>
+          </a:ln>
         </p:spPr>
+        <p:style>
+          <a:lnRef idx="1">
+            <a:schemeClr val="accent1"/>
+          </a:lnRef>
+          <a:fillRef idx="3">
+            <a:schemeClr val="accent1"/>
+          </a:fillRef>
+          <a:effectRef idx="2">
+            <a:schemeClr val="accent1"/>
+          </a:effectRef>
+          <a:fontRef idx="minor">
+            <a:schemeClr val="lt1"/>
+          </a:fontRef>
+        </p:style>
         <p:txBody>
-          <a:bodyPr wrap="square" lIns="76200" rIns="76200" tIns="50800" bIns="50800">
-            <a:spAutoFit/>
-          </a:bodyPr>
+          <a:bodyPr rtlCol="0" anchor="ctr" wrap="square" lIns="12700" rIns="12700" tIns="12700" bIns="12700"/>
           <a:lstStyle/>
           <a:p>
-            <a:pPr algn="l">
-              <a:spcAft>
-                <a:spcPts val="300"/>
-              </a:spcAft>
-              <a:defRPr sz="2800" b="0">
+            <a:pPr algn="ctr">
+              <a:defRPr sz="600" b="0">
                 <a:solidFill>
                   <a:srgbClr val="FFFFFF"/>
                 </a:solidFill>
@@ -8188,7 +7411,7 @@
               </a:defRPr>
             </a:pPr>
             <a:r>
-              <a:rPr sz="2800" b="0">
+              <a:rPr sz="600" b="0">
                 <a:solidFill>
                   <a:srgbClr val="FFFFFF"/>
                 </a:solidFill>
@@ -8196,7 +7419,259 @@
                 <a:ea typeface="Play"/>
                 <a:cs typeface="Play"/>
               </a:rPr>
-              <a:t>Экспорт в pptx, pdf, html</a:t>
+              <a:t>Разбор дизайн‑системы</a:t>
+            </a:r>
+          </a:p>
+        </p:txBody>
+      </p:sp>
+      <p:sp>
+        <p:nvSpPr>
+          <p:cNvPr id="685" name="Chevron 684"/>
+          <p:cNvSpPr/>
+          <p:nvPr/>
+        </p:nvSpPr>
+        <p:spPr>
+          <a:xfrm>
+            <a:off x="4243848" y="4237891"/>
+            <a:ext cx="1772267" cy="1098805"/>
+          </a:xfrm>
+          <a:prstGeom prst="chevron">
+            <a:avLst/>
+          </a:prstGeom>
+          <a:solidFill>
+            <a:srgbClr val="0077FF"/>
+          </a:solidFill>
+          <a:ln>
+            <a:noFill/>
+          </a:ln>
+        </p:spPr>
+        <p:style>
+          <a:lnRef idx="1">
+            <a:schemeClr val="accent1"/>
+          </a:lnRef>
+          <a:fillRef idx="3">
+            <a:schemeClr val="accent1"/>
+          </a:fillRef>
+          <a:effectRef idx="2">
+            <a:schemeClr val="accent1"/>
+          </a:effectRef>
+          <a:fontRef idx="minor">
+            <a:schemeClr val="lt1"/>
+          </a:fontRef>
+        </p:style>
+        <p:txBody>
+          <a:bodyPr rtlCol="0" anchor="ctr" wrap="square" lIns="12700" rIns="12700" tIns="12700" bIns="12700"/>
+          <a:lstStyle/>
+          <a:p>
+            <a:pPr algn="ctr">
+              <a:defRPr sz="694" b="0">
+                <a:solidFill>
+                  <a:srgbClr val="FFFFFF"/>
+                </a:solidFill>
+                <a:latin typeface="Play"/>
+                <a:ea typeface="Play"/>
+                <a:cs typeface="Play"/>
+              </a:defRPr>
+            </a:pPr>
+            <a:r>
+              <a:rPr sz="694" b="0">
+                <a:solidFill>
+                  <a:srgbClr val="FFFFFF"/>
+                </a:solidFill>
+                <a:latin typeface="Play"/>
+                <a:ea typeface="Play"/>
+                <a:cs typeface="Play"/>
+              </a:rPr>
+              <a:t>Построение плана колоды</a:t>
+            </a:r>
+          </a:p>
+        </p:txBody>
+      </p:sp>
+      <p:sp>
+        <p:nvSpPr>
+          <p:cNvPr id="686" name="Chevron 685"/>
+          <p:cNvSpPr/>
+          <p:nvPr/>
+        </p:nvSpPr>
+        <p:spPr>
+          <a:xfrm>
+            <a:off x="6151864" y="4237891"/>
+            <a:ext cx="1772267" cy="1098805"/>
+          </a:xfrm>
+          <a:prstGeom prst="chevron">
+            <a:avLst/>
+          </a:prstGeom>
+          <a:solidFill>
+            <a:srgbClr val="0077FF"/>
+          </a:solidFill>
+          <a:ln>
+            <a:noFill/>
+          </a:ln>
+        </p:spPr>
+        <p:style>
+          <a:lnRef idx="1">
+            <a:schemeClr val="accent1"/>
+          </a:lnRef>
+          <a:fillRef idx="3">
+            <a:schemeClr val="accent1"/>
+          </a:fillRef>
+          <a:effectRef idx="2">
+            <a:schemeClr val="accent1"/>
+          </a:effectRef>
+          <a:fontRef idx="minor">
+            <a:schemeClr val="lt1"/>
+          </a:fontRef>
+        </p:style>
+        <p:txBody>
+          <a:bodyPr rtlCol="0" anchor="ctr" wrap="square" lIns="12700" rIns="12700" tIns="12700" bIns="12700"/>
+          <a:lstStyle/>
+          <a:p>
+            <a:pPr algn="ctr">
+              <a:defRPr sz="600" b="0">
+                <a:solidFill>
+                  <a:srgbClr val="FFFFFF"/>
+                </a:solidFill>
+                <a:latin typeface="Play"/>
+                <a:ea typeface="Play"/>
+                <a:cs typeface="Play"/>
+              </a:defRPr>
+            </a:pPr>
+            <a:r>
+              <a:rPr sz="600" b="0">
+                <a:solidFill>
+                  <a:srgbClr val="FFFFFF"/>
+                </a:solidFill>
+                <a:latin typeface="Play"/>
+                <a:ea typeface="Play"/>
+                <a:cs typeface="Play"/>
+              </a:rPr>
+              <a:t>Авто‑верстка</a:t>
+            </a:r>
+          </a:p>
+        </p:txBody>
+      </p:sp>
+      <p:sp>
+        <p:nvSpPr>
+          <p:cNvPr id="687" name="Chevron 686"/>
+          <p:cNvSpPr/>
+          <p:nvPr/>
+        </p:nvSpPr>
+        <p:spPr>
+          <a:xfrm>
+            <a:off x="8059880" y="4237891"/>
+            <a:ext cx="1772267" cy="1098805"/>
+          </a:xfrm>
+          <a:prstGeom prst="chevron">
+            <a:avLst/>
+          </a:prstGeom>
+          <a:solidFill>
+            <a:srgbClr val="0077FF"/>
+          </a:solidFill>
+          <a:ln>
+            <a:noFill/>
+          </a:ln>
+        </p:spPr>
+        <p:style>
+          <a:lnRef idx="1">
+            <a:schemeClr val="accent1"/>
+          </a:lnRef>
+          <a:fillRef idx="3">
+            <a:schemeClr val="accent1"/>
+          </a:fillRef>
+          <a:effectRef idx="2">
+            <a:schemeClr val="accent1"/>
+          </a:effectRef>
+          <a:fontRef idx="minor">
+            <a:schemeClr val="lt1"/>
+          </a:fontRef>
+        </p:style>
+        <p:txBody>
+          <a:bodyPr rtlCol="0" anchor="ctr" wrap="square" lIns="12700" rIns="12700" tIns="12700" bIns="12700"/>
+          <a:lstStyle/>
+          <a:p>
+            <a:pPr algn="ctr">
+              <a:defRPr sz="868" b="0">
+                <a:solidFill>
+                  <a:srgbClr val="FFFFFF"/>
+                </a:solidFill>
+                <a:latin typeface="Play"/>
+                <a:ea typeface="Play"/>
+                <a:cs typeface="Play"/>
+              </a:defRPr>
+            </a:pPr>
+            <a:r>
+              <a:rPr sz="868" b="0">
+                <a:solidFill>
+                  <a:srgbClr val="FFFFFF"/>
+                </a:solidFill>
+                <a:latin typeface="Play"/>
+                <a:ea typeface="Play"/>
+                <a:cs typeface="Play"/>
+              </a:rPr>
+              <a:t>Аудит качества</a:t>
+            </a:r>
+          </a:p>
+        </p:txBody>
+      </p:sp>
+      <p:sp>
+        <p:nvSpPr>
+          <p:cNvPr id="688" name="Chevron 687"/>
+          <p:cNvSpPr/>
+          <p:nvPr/>
+        </p:nvSpPr>
+        <p:spPr>
+          <a:xfrm>
+            <a:off x="9967896" y="4237891"/>
+            <a:ext cx="1772267" cy="1098805"/>
+          </a:xfrm>
+          <a:prstGeom prst="chevron">
+            <a:avLst/>
+          </a:prstGeom>
+          <a:solidFill>
+            <a:srgbClr val="0077FF"/>
+          </a:solidFill>
+          <a:ln>
+            <a:noFill/>
+          </a:ln>
+        </p:spPr>
+        <p:style>
+          <a:lnRef idx="1">
+            <a:schemeClr val="accent1"/>
+          </a:lnRef>
+          <a:fillRef idx="3">
+            <a:schemeClr val="accent1"/>
+          </a:fillRef>
+          <a:effectRef idx="2">
+            <a:schemeClr val="accent1"/>
+          </a:effectRef>
+          <a:fontRef idx="minor">
+            <a:schemeClr val="lt1"/>
+          </a:fontRef>
+        </p:style>
+        <p:txBody>
+          <a:bodyPr rtlCol="0" anchor="ctr" wrap="square" lIns="12700" rIns="12700" tIns="12700" bIns="12700"/>
+          <a:lstStyle/>
+          <a:p>
+            <a:pPr algn="ctr">
+              <a:defRPr sz="694" b="0">
+                <a:solidFill>
+                  <a:srgbClr val="FFFFFF"/>
+                </a:solidFill>
+                <a:latin typeface="Play"/>
+                <a:ea typeface="Play"/>
+                <a:cs typeface="Play"/>
+              </a:defRPr>
+            </a:pPr>
+            <a:r>
+              <a:rPr sz="694" b="0">
+                <a:solidFill>
+                  <a:srgbClr val="FFFFFF"/>
+                </a:solidFill>
+                <a:latin typeface="Play"/>
+                <a:ea typeface="Play"/>
+                <a:cs typeface="Play"/>
+              </a:rPr>
+              <a:t>Экспорт результата</a:t>
             </a:r>
           </a:p>
         </p:txBody>
@@ -8209,7 +7684,7 @@
 </p:sld>
 </file>
 
-<file path=ppt/slides/slide34.xml><?xml version="1.0" encoding="utf-8"?>
+<file path=ppt/slides/slide33.xml><?xml version="1.0" encoding="utf-8"?>
 <p:sld xmlns:a="http://schemas.openxmlformats.org/drawingml/2006/main" xmlns:p="http://schemas.openxmlformats.org/presentationml/2006/main" xmlns:r="http://schemas.openxmlformats.org/officeDocument/2006/relationships">
   <p:cSld>
     <p:spTree>
@@ -8219,117 +7694,6 @@
         <p:nvPr/>
       </p:nvGrpSpPr>
       <p:grpSpPr/>
-      <p:grpSp>
-        <p:nvGrpSpPr>
-          <p:cNvPr id="617" name="Google Shape;617;p28"/>
-          <p:cNvGrpSpPr/>
-          <p:nvPr/>
-        </p:nvGrpSpPr>
-        <p:grpSpPr>
-          <a:xfrm>
-            <a:off x="427865" y="1988423"/>
-            <a:ext cx="476638" cy="474884"/>
-            <a:chOff x="427865" y="2634106"/>
-            <a:chExt cx="476638" cy="474884"/>
-          </a:xfrm>
-        </p:grpSpPr>
-        <p:sp>
-          <p:nvSpPr>
-            <p:cNvPr id="618" name="Google Shape;618;p28"/>
-            <p:cNvSpPr/>
-            <p:nvPr/>
-          </p:nvSpPr>
-          <p:spPr>
-            <a:xfrm>
-              <a:off x="427865" y="2634106"/>
-              <a:ext cx="476638" cy="474884"/>
-            </a:xfrm>
-            <a:prstGeom prst="roundRect">
-              <a:avLst>
-                <a:gd fmla="val 30745" name="adj"/>
-              </a:avLst>
-            </a:prstGeom>
-            <a:gradFill>
-              <a:gsLst>
-                <a:gs pos="0">
-                  <a:srgbClr val="00AEE8"/>
-                </a:gs>
-                <a:gs pos="100000">
-                  <a:srgbClr val="0077FF"/>
-                </a:gs>
-              </a:gsLst>
-              <a:lin ang="8100000" scaled="0"/>
-            </a:gradFill>
-            <a:ln>
-              <a:noFill/>
-            </a:ln>
-          </p:spPr>
-          <p:txBody>
-            <a:bodyPr anchorCtr="0" anchor="ctr" bIns="45700" lIns="36000" spcFirstLastPara="1" rIns="36000" wrap="square" tIns="45700">
-              <a:noAutofit/>
-            </a:bodyPr>
-            <a:lstStyle/>
-            <a:p>
-              <a:pPr indent="0" lvl="0" marL="0" marR="0" rtl="0" algn="ctr">
-                <a:lnSpc>
-                  <a:spcPct val="100000"/>
-                </a:lnSpc>
-                <a:spcBef>
-                  <a:spcPts val="0"/>
-                </a:spcBef>
-                <a:spcAft>
-                  <a:spcPts val="0"/>
-                </a:spcAft>
-                <a:buClr>
-                  <a:srgbClr val="000000"/>
-                </a:buClr>
-                <a:buSzPts val="1200"/>
-                <a:buFont typeface="Arial"/>
-                <a:buNone/>
-              </a:pPr>
-              <a:r>
-                <a:t/>
-              </a:r>
-              <a:endParaRPr sz="1400" u="none" cap="none" strike="noStrike">
-                <a:solidFill>
-                  <a:srgbClr val="00D3E3"/>
-                </a:solidFill>
-                <a:latin typeface="Play"/>
-                <a:ea typeface="Play"/>
-                <a:cs typeface="Play"/>
-                <a:sym typeface="Play"/>
-              </a:endParaRPr>
-            </a:p>
-          </p:txBody>
-        </p:sp>
-        <p:pic>
-          <p:nvPicPr>
-            <p:cNvPr id="619" name="Google Shape;619;p28"/>
-            <p:cNvPicPr preferRelativeResize="0"/>
-            <p:nvPr/>
-          </p:nvPicPr>
-          <p:blipFill rotWithShape="1">
-            <a:blip r:embed="rId2">
-              <a:alphaModFix/>
-            </a:blip>
-            <a:srcRect b="0" l="0" r="0" t="0"/>
-            <a:stretch/>
-          </p:blipFill>
-          <p:spPr>
-            <a:xfrm>
-              <a:off x="558184" y="2763548"/>
-              <a:ext cx="216000" cy="216000"/>
-            </a:xfrm>
-            <a:prstGeom prst="rect">
-              <a:avLst/>
-            </a:prstGeom>
-            <a:noFill/>
-            <a:ln>
-              <a:noFill/>
-            </a:ln>
-          </p:spPr>
-        </p:pic>
-      </p:grpSp>
       <p:pic>
         <p:nvPicPr>
           <p:cNvPr id="620" name="Google Shape;620;p28"/>
@@ -8384,342 +7748,9 @@
           </a:ln>
         </p:spPr>
       </p:pic>
-      <p:grpSp>
-        <p:nvGrpSpPr>
-          <p:cNvPr id="633" name="Google Shape;633;p28"/>
-          <p:cNvGrpSpPr/>
-          <p:nvPr/>
-        </p:nvGrpSpPr>
-        <p:grpSpPr>
-          <a:xfrm>
-            <a:off x="3323465" y="1988423"/>
-            <a:ext cx="476638" cy="474884"/>
-            <a:chOff x="427865" y="2634106"/>
-            <a:chExt cx="476638" cy="474884"/>
-          </a:xfrm>
-        </p:grpSpPr>
-        <p:sp>
-          <p:nvSpPr>
-            <p:cNvPr id="634" name="Google Shape;634;p28"/>
-            <p:cNvSpPr/>
-            <p:nvPr/>
-          </p:nvSpPr>
-          <p:spPr>
-            <a:xfrm>
-              <a:off x="427865" y="2634106"/>
-              <a:ext cx="476638" cy="474884"/>
-            </a:xfrm>
-            <a:prstGeom prst="roundRect">
-              <a:avLst>
-                <a:gd fmla="val 30745" name="adj"/>
-              </a:avLst>
-            </a:prstGeom>
-            <a:gradFill>
-              <a:gsLst>
-                <a:gs pos="0">
-                  <a:srgbClr val="00AEE8"/>
-                </a:gs>
-                <a:gs pos="100000">
-                  <a:srgbClr val="0077FF"/>
-                </a:gs>
-              </a:gsLst>
-              <a:lin ang="8100000" scaled="0"/>
-            </a:gradFill>
-            <a:ln>
-              <a:noFill/>
-            </a:ln>
-          </p:spPr>
-          <p:txBody>
-            <a:bodyPr anchorCtr="0" anchor="ctr" bIns="45700" lIns="36000" spcFirstLastPara="1" rIns="36000" wrap="square" tIns="45700">
-              <a:noAutofit/>
-            </a:bodyPr>
-            <a:lstStyle/>
-            <a:p>
-              <a:pPr indent="0" lvl="0" marL="0" marR="0" rtl="0" algn="ctr">
-                <a:lnSpc>
-                  <a:spcPct val="100000"/>
-                </a:lnSpc>
-                <a:spcBef>
-                  <a:spcPts val="0"/>
-                </a:spcBef>
-                <a:spcAft>
-                  <a:spcPts val="0"/>
-                </a:spcAft>
-                <a:buClr>
-                  <a:srgbClr val="000000"/>
-                </a:buClr>
-                <a:buSzPts val="1200"/>
-                <a:buFont typeface="Arial"/>
-                <a:buNone/>
-              </a:pPr>
-              <a:r>
-                <a:t/>
-              </a:r>
-              <a:endParaRPr sz="1400" u="none" cap="none" strike="noStrike">
-                <a:solidFill>
-                  <a:srgbClr val="00D3E3"/>
-                </a:solidFill>
-                <a:latin typeface="Play"/>
-                <a:ea typeface="Play"/>
-                <a:cs typeface="Play"/>
-                <a:sym typeface="Play"/>
-              </a:endParaRPr>
-            </a:p>
-          </p:txBody>
-        </p:sp>
-        <p:pic>
-          <p:nvPicPr>
-            <p:cNvPr id="635" name="Google Shape;635;p28"/>
-            <p:cNvPicPr preferRelativeResize="0"/>
-            <p:nvPr/>
-          </p:nvPicPr>
-          <p:blipFill rotWithShape="1">
-            <a:blip r:embed="rId2">
-              <a:alphaModFix/>
-            </a:blip>
-            <a:srcRect b="0" l="0" r="0" t="0"/>
-            <a:stretch/>
-          </p:blipFill>
-          <p:spPr>
-            <a:xfrm>
-              <a:off x="558184" y="2763548"/>
-              <a:ext cx="216000" cy="216000"/>
-            </a:xfrm>
-            <a:prstGeom prst="rect">
-              <a:avLst/>
-            </a:prstGeom>
-            <a:noFill/>
-            <a:ln>
-              <a:noFill/>
-            </a:ln>
-          </p:spPr>
-        </p:pic>
-      </p:grpSp>
-      <p:grpSp>
-        <p:nvGrpSpPr>
-          <p:cNvPr id="636" name="Google Shape;636;p28"/>
-          <p:cNvGrpSpPr/>
-          <p:nvPr/>
-        </p:nvGrpSpPr>
-        <p:grpSpPr>
-          <a:xfrm>
-            <a:off x="6094374" y="1988423"/>
-            <a:ext cx="476638" cy="474884"/>
-            <a:chOff x="427865" y="2634106"/>
-            <a:chExt cx="476638" cy="474884"/>
-          </a:xfrm>
-        </p:grpSpPr>
-        <p:sp>
-          <p:nvSpPr>
-            <p:cNvPr id="637" name="Google Shape;637;p28"/>
-            <p:cNvSpPr/>
-            <p:nvPr/>
-          </p:nvSpPr>
-          <p:spPr>
-            <a:xfrm>
-              <a:off x="427865" y="2634106"/>
-              <a:ext cx="476638" cy="474884"/>
-            </a:xfrm>
-            <a:prstGeom prst="roundRect">
-              <a:avLst>
-                <a:gd fmla="val 30745" name="adj"/>
-              </a:avLst>
-            </a:prstGeom>
-            <a:gradFill>
-              <a:gsLst>
-                <a:gs pos="0">
-                  <a:srgbClr val="00AEE8"/>
-                </a:gs>
-                <a:gs pos="100000">
-                  <a:srgbClr val="0077FF"/>
-                </a:gs>
-              </a:gsLst>
-              <a:lin ang="8100000" scaled="0"/>
-            </a:gradFill>
-            <a:ln>
-              <a:noFill/>
-            </a:ln>
-          </p:spPr>
-          <p:txBody>
-            <a:bodyPr anchorCtr="0" anchor="ctr" bIns="45700" lIns="36000" spcFirstLastPara="1" rIns="36000" wrap="square" tIns="45700">
-              <a:noAutofit/>
-            </a:bodyPr>
-            <a:lstStyle/>
-            <a:p>
-              <a:pPr indent="0" lvl="0" marL="0" marR="0" rtl="0" algn="ctr">
-                <a:lnSpc>
-                  <a:spcPct val="100000"/>
-                </a:lnSpc>
-                <a:spcBef>
-                  <a:spcPts val="0"/>
-                </a:spcBef>
-                <a:spcAft>
-                  <a:spcPts val="0"/>
-                </a:spcAft>
-                <a:buClr>
-                  <a:srgbClr val="000000"/>
-                </a:buClr>
-                <a:buSzPts val="1200"/>
-                <a:buFont typeface="Arial"/>
-                <a:buNone/>
-              </a:pPr>
-              <a:r>
-                <a:t/>
-              </a:r>
-              <a:endParaRPr sz="1400" u="none" cap="none" strike="noStrike">
-                <a:solidFill>
-                  <a:srgbClr val="00D3E3"/>
-                </a:solidFill>
-                <a:latin typeface="Play"/>
-                <a:ea typeface="Play"/>
-                <a:cs typeface="Play"/>
-                <a:sym typeface="Play"/>
-              </a:endParaRPr>
-            </a:p>
-          </p:txBody>
-        </p:sp>
-        <p:pic>
-          <p:nvPicPr>
-            <p:cNvPr id="638" name="Google Shape;638;p28"/>
-            <p:cNvPicPr preferRelativeResize="0"/>
-            <p:nvPr/>
-          </p:nvPicPr>
-          <p:blipFill rotWithShape="1">
-            <a:blip r:embed="rId2">
-              <a:alphaModFix/>
-            </a:blip>
-            <a:srcRect b="0" l="0" r="0" t="0"/>
-            <a:stretch/>
-          </p:blipFill>
-          <p:spPr>
-            <a:xfrm>
-              <a:off x="558184" y="2763548"/>
-              <a:ext cx="216000" cy="216000"/>
-            </a:xfrm>
-            <a:prstGeom prst="rect">
-              <a:avLst/>
-            </a:prstGeom>
-            <a:noFill/>
-            <a:ln>
-              <a:noFill/>
-            </a:ln>
-          </p:spPr>
-        </p:pic>
-      </p:grpSp>
-      <p:grpSp>
-        <p:nvGrpSpPr>
-          <p:cNvPr id="639" name="Google Shape;639;p28"/>
-          <p:cNvGrpSpPr/>
-          <p:nvPr/>
-        </p:nvGrpSpPr>
-        <p:grpSpPr>
-          <a:xfrm>
-            <a:off x="8989974" y="1988423"/>
-            <a:ext cx="476638" cy="474884"/>
-            <a:chOff x="427865" y="2634106"/>
-            <a:chExt cx="476638" cy="474884"/>
-          </a:xfrm>
-        </p:grpSpPr>
-        <p:sp>
-          <p:nvSpPr>
-            <p:cNvPr id="640" name="Google Shape;640;p28"/>
-            <p:cNvSpPr/>
-            <p:nvPr/>
-          </p:nvSpPr>
-          <p:spPr>
-            <a:xfrm>
-              <a:off x="427865" y="2634106"/>
-              <a:ext cx="476638" cy="474884"/>
-            </a:xfrm>
-            <a:prstGeom prst="roundRect">
-              <a:avLst>
-                <a:gd fmla="val 30745" name="adj"/>
-              </a:avLst>
-            </a:prstGeom>
-            <a:gradFill>
-              <a:gsLst>
-                <a:gs pos="0">
-                  <a:srgbClr val="00AEE8"/>
-                </a:gs>
-                <a:gs pos="100000">
-                  <a:srgbClr val="0077FF"/>
-                </a:gs>
-              </a:gsLst>
-              <a:lin ang="8100000" scaled="0"/>
-            </a:gradFill>
-            <a:ln>
-              <a:noFill/>
-            </a:ln>
-          </p:spPr>
-          <p:txBody>
-            <a:bodyPr anchorCtr="0" anchor="ctr" bIns="45700" lIns="36000" spcFirstLastPara="1" rIns="36000" wrap="square" tIns="45700">
-              <a:noAutofit/>
-            </a:bodyPr>
-            <a:lstStyle/>
-            <a:p>
-              <a:pPr indent="0" lvl="0" marL="0" marR="0" rtl="0" algn="ctr">
-                <a:lnSpc>
-                  <a:spcPct val="100000"/>
-                </a:lnSpc>
-                <a:spcBef>
-                  <a:spcPts val="0"/>
-                </a:spcBef>
-                <a:spcAft>
-                  <a:spcPts val="0"/>
-                </a:spcAft>
-                <a:buClr>
-                  <a:srgbClr val="000000"/>
-                </a:buClr>
-                <a:buSzPts val="1200"/>
-                <a:buFont typeface="Arial"/>
-                <a:buNone/>
-              </a:pPr>
-              <a:r>
-                <a:t/>
-              </a:r>
-              <a:endParaRPr sz="1400" u="none" cap="none" strike="noStrike">
-                <a:solidFill>
-                  <a:srgbClr val="00D3E3"/>
-                </a:solidFill>
-                <a:latin typeface="Play"/>
-                <a:ea typeface="Play"/>
-                <a:cs typeface="Play"/>
-                <a:sym typeface="Play"/>
-              </a:endParaRPr>
-            </a:p>
-          </p:txBody>
-        </p:sp>
-        <p:pic>
-          <p:nvPicPr>
-            <p:cNvPr id="641" name="Google Shape;641;p28"/>
-            <p:cNvPicPr preferRelativeResize="0"/>
-            <p:nvPr/>
-          </p:nvPicPr>
-          <p:blipFill rotWithShape="1">
-            <a:blip r:embed="rId2">
-              <a:alphaModFix/>
-            </a:blip>
-            <a:srcRect b="0" l="0" r="0" t="0"/>
-            <a:stretch/>
-          </p:blipFill>
-          <p:spPr>
-            <a:xfrm>
-              <a:off x="558184" y="2763548"/>
-              <a:ext cx="216000" cy="216000"/>
-            </a:xfrm>
-            <a:prstGeom prst="rect">
-              <a:avLst/>
-            </a:prstGeom>
-            <a:noFill/>
-            <a:ln>
-              <a:noFill/>
-            </a:ln>
-          </p:spPr>
-        </p:pic>
-      </p:grpSp>
       <p:sp>
         <p:nvSpPr>
-          <p:cNvPr id="642" name="title"/>
+          <p:cNvPr id="622" name="title"/>
           <p:cNvSpPr txBox="1"/>
           <p:nvPr/>
         </p:nvSpPr>
@@ -8761,21 +7792,21 @@
                 <a:ea typeface="Play"/>
                 <a:cs typeface="Play"/>
               </a:rPr>
-              <a:t>Качество и аудит</a:t>
+              <a:t>Ожидаемый эффект – Время</a:t>
             </a:r>
           </a:p>
         </p:txBody>
       </p:sp>
       <p:sp>
         <p:nvSpPr>
-          <p:cNvPr id="643" name="body"/>
+          <p:cNvPr id="623" name="body"/>
           <p:cNvSpPr txBox="1"/>
           <p:nvPr/>
         </p:nvSpPr>
         <p:spPr>
           <a:xfrm>
-            <a:off x="429280" y="2310261"/>
-            <a:ext cx="11310884" cy="1488440"/>
+            <a:off x="429280" y="1504165"/>
+            <a:ext cx="11310884" cy="944880"/>
           </a:xfrm>
           <a:prstGeom prst="rect">
             <a:avLst/>
@@ -8792,7 +7823,7 @@
               <a:spcAft>
                 <a:spcPts val="300"/>
               </a:spcAft>
-              <a:defRPr sz="2800">
+              <a:defRPr sz="2000">
                 <a:solidFill>
                   <a:srgbClr val="FFFFFF"/>
                 </a:solidFill>
@@ -8802,7 +7833,7 @@
               </a:defRPr>
             </a:pPr>
             <a:r>
-              <a:rPr sz="2800">
+              <a:rPr sz="2000">
                 <a:solidFill>
                   <a:srgbClr val="FFFFFF"/>
                 </a:solidFill>
@@ -8810,7 +7841,7 @@
                 <a:ea typeface="Play"/>
                 <a:cs typeface="Play"/>
               </a:rPr>
-              <a:t>• Аудит качества до публикации</a:t>
+              <a:t>• Время сборки колоды 12 слайдов сократилось с 186 до 4 мин</a:t>
             </a:r>
           </a:p>
           <a:p>
@@ -8818,7 +7849,7 @@
               <a:spcAft>
                 <a:spcPts val="300"/>
               </a:spcAft>
-              <a:defRPr sz="2800">
+              <a:defRPr sz="2000">
                 <a:solidFill>
                   <a:srgbClr val="FFFFFF"/>
                 </a:solidFill>
@@ -8828,7 +7859,7 @@
               </a:defRPr>
             </a:pPr>
             <a:r>
-              <a:rPr sz="2800">
+              <a:rPr sz="2000">
                 <a:solidFill>
                   <a:srgbClr val="FFFFFF"/>
                 </a:solidFill>
@@ -8836,37 +7867,29 @@
                 <a:ea typeface="Play"/>
                 <a:cs typeface="Play"/>
               </a:rPr>
-              <a:t>• Автоматические правки нарушений стиля</a:t>
-            </a:r>
-          </a:p>
-          <a:p>
-            <a:pPr algn="l">
-              <a:spcAft>
-                <a:spcPts val="300"/>
-              </a:spcAft>
-              <a:defRPr sz="2800">
-                <a:solidFill>
-                  <a:srgbClr val="FFFFFF"/>
-                </a:solidFill>
-                <a:latin typeface="Play"/>
-                <a:ea typeface="Play"/>
-                <a:cs typeface="Play"/>
-              </a:defRPr>
-            </a:pPr>
-            <a:r>
-              <a:rPr sz="2800">
-                <a:solidFill>
-                  <a:srgbClr val="FFFFFF"/>
-                </a:solidFill>
-                <a:latin typeface="Play"/>
-                <a:ea typeface="Play"/>
-                <a:cs typeface="Play"/>
-              </a:rPr>
-              <a:t>• Слайды остаются редактируемыми</a:t>
+              <a:t>• Первый готовый вариант доступен за 1 день вместо 6</a:t>
             </a:r>
           </a:p>
         </p:txBody>
       </p:sp>
+      <p:graphicFrame>
+        <p:nvGraphicFramePr>
+          <p:cNvPr id="624" name="Chart 623"/>
+          <p:cNvGraphicFramePr>
+            <a:graphicFrameLocks noGrp="1"/>
+          </p:cNvGraphicFramePr>
+          <p:nvPr/>
+        </p:nvGraphicFramePr>
+        <p:xfrm>
+          <a:off x="429280" y="2620495"/>
+          <a:ext cx="11310884" cy="2790398"/>
+        </p:xfrm>
+        <a:graphic>
+          <a:graphicData uri="http://schemas.openxmlformats.org/drawingml/2006/chart">
+            <c:chart xmlns:c="http://schemas.openxmlformats.org/drawingml/2006/chart" r:id="rId5"/>
+          </a:graphicData>
+        </a:graphic>
+      </p:graphicFrame>
     </p:spTree>
   </p:cSld>
   <p:clrMapOvr>
@@ -8875,7 +7898,7 @@
 </p:sld>
 </file>
 
-<file path=ppt/slides/slide35.xml><?xml version="1.0" encoding="utf-8"?>
+<file path=ppt/slides/slide34.xml><?xml version="1.0" encoding="utf-8"?>
 <p:sld xmlns:a="http://schemas.openxmlformats.org/drawingml/2006/main" xmlns:p="http://schemas.openxmlformats.org/presentationml/2006/main" xmlns:r="http://schemas.openxmlformats.org/officeDocument/2006/relationships">
   <p:cSld>
     <p:spTree>
@@ -8929,7 +7952,7 @@
                 <a:ea typeface="Play"/>
                 <a:cs typeface="Play"/>
               </a:rPr>
-              <a:t>Эффект пилота</a:t>
+              <a:t>Ожидаемый эффект – Нарушения</a:t>
             </a:r>
           </a:p>
         </p:txBody>
@@ -8943,7 +7966,7 @@
         <p:spPr>
           <a:xfrm>
             <a:off x="429280" y="1492575"/>
-            <a:ext cx="11310884" cy="1605841"/>
+            <a:ext cx="11310884" cy="944880"/>
           </a:xfrm>
           <a:prstGeom prst="rect">
             <a:avLst/>
@@ -8978,7 +8001,7 @@
                 <a:ea typeface="Play"/>
                 <a:cs typeface="Play"/>
               </a:rPr>
-              <a:t>• Средняя сборка 4 минуты вместо 186</a:t>
+              <a:t>• Нарушений фирменного стиля в пилоте – 2 из 68 колод</a:t>
             </a:r>
           </a:p>
           <a:p>
@@ -9004,59 +8027,7 @@
                 <a:ea typeface="Play"/>
                 <a:cs typeface="Play"/>
               </a:rPr>
-              <a:t>• Время до первой версии сократилось с 6 дней до 1</a:t>
-            </a:r>
-          </a:p>
-          <a:p>
-            <a:pPr algn="l">
-              <a:spcAft>
-                <a:spcPts val="300"/>
-              </a:spcAft>
-              <a:defRPr sz="1600">
-                <a:solidFill>
-                  <a:srgbClr val="FFFFFF"/>
-                </a:solidFill>
-                <a:latin typeface="Play"/>
-                <a:ea typeface="Play"/>
-                <a:cs typeface="Play"/>
-              </a:defRPr>
-            </a:pPr>
-            <a:r>
-              <a:rPr sz="1600">
-                <a:solidFill>
-                  <a:srgbClr val="FFFFFF"/>
-                </a:solidFill>
-                <a:latin typeface="Play"/>
-                <a:ea typeface="Play"/>
-                <a:cs typeface="Play"/>
-              </a:rPr>
-              <a:t>• Нарушений стиля 2 из 68</a:t>
-            </a:r>
-          </a:p>
-          <a:p>
-            <a:pPr algn="l">
-              <a:spcAft>
-                <a:spcPts val="300"/>
-              </a:spcAft>
-              <a:defRPr sz="1600">
-                <a:solidFill>
-                  <a:srgbClr val="FFFFFF"/>
-                </a:solidFill>
-                <a:latin typeface="Play"/>
-                <a:ea typeface="Play"/>
-                <a:cs typeface="Play"/>
-              </a:defRPr>
-            </a:pPr>
-            <a:r>
-              <a:rPr sz="1600">
-                <a:solidFill>
-                  <a:srgbClr val="FFFFFF"/>
-                </a:solidFill>
-                <a:latin typeface="Play"/>
-                <a:ea typeface="Play"/>
-                <a:cs typeface="Play"/>
-              </a:rPr>
-              <a:t>• Дизайнеры закрыли 38 запросов вместо 11</a:t>
+              <a:t>• Все нарушения автоматически исправлены аудитором</a:t>
             </a:r>
           </a:p>
         </p:txBody>
@@ -9070,8 +8041,8 @@
           <p:nvPr/>
         </p:nvGraphicFramePr>
         <p:xfrm>
-          <a:off x="429280" y="3269866"/>
-          <a:ext cx="11310884" cy="2237312"/>
+          <a:off x="429280" y="2608905"/>
+          <a:ext cx="11310884" cy="2898274"/>
         </p:xfrm>
         <a:graphic>
           <a:graphicData uri="http://schemas.openxmlformats.org/drawingml/2006/chart">
@@ -9087,7 +8058,7 @@
 </p:sld>
 </file>
 
-<file path=ppt/slides/slide36.xml><?xml version="1.0" encoding="utf-8"?>
+<file path=ppt/slides/slide35.xml><?xml version="1.0" encoding="utf-8"?>
 <p:sld xmlns:a="http://schemas.openxmlformats.org/drawingml/2006/main" xmlns:p="http://schemas.openxmlformats.org/presentationml/2006/main" xmlns:r="http://schemas.openxmlformats.org/officeDocument/2006/relationships">
   <p:cSld>
     <p:spTree>
@@ -9099,91 +8070,226 @@
       <p:grpSpPr/>
       <p:sp>
         <p:nvSpPr>
-          <p:cNvPr id="679" name="Google Shape;679;p31"/>
+          <p:cNvPr id="2" name="title"/>
+          <p:cNvSpPr txBox="1"/>
+          <p:nvPr/>
+        </p:nvSpPr>
+        <p:spPr>
+          <a:xfrm>
+            <a:off x="429280" y="424715"/>
+            <a:ext cx="7827264" cy="1183640"/>
+          </a:xfrm>
+          <a:prstGeom prst="rect">
+            <a:avLst/>
+          </a:prstGeom>
+          <a:noFill/>
+        </p:spPr>
+        <p:txBody>
+          <a:bodyPr wrap="square" lIns="76200" rIns="76200" tIns="50800" bIns="50800">
+            <a:spAutoFit/>
+          </a:bodyPr>
+          <a:lstStyle/>
+          <a:p>
+            <a:pPr algn="l">
+              <a:spcAft>
+                <a:spcPts val="300"/>
+              </a:spcAft>
+              <a:defRPr sz="3200">
+                <a:solidFill>
+                  <a:srgbClr val="FFFFFF"/>
+                </a:solidFill>
+                <a:latin typeface="Play"/>
+                <a:ea typeface="Play"/>
+                <a:cs typeface="Play"/>
+              </a:defRPr>
+            </a:pPr>
+            <a:r>
+              <a:rPr sz="3200">
+                <a:solidFill>
+                  <a:srgbClr val="FFFFFF"/>
+                </a:solidFill>
+                <a:latin typeface="Play"/>
+                <a:ea typeface="Play"/>
+                <a:cs typeface="Play"/>
+              </a:rPr>
+              <a:t>Что потребуется: ресурсы и сроки</a:t>
+            </a:r>
+          </a:p>
+        </p:txBody>
+      </p:sp>
+      <p:sp>
+        <p:nvSpPr>
+          <p:cNvPr id="3" name="body"/>
+          <p:cNvSpPr txBox="1"/>
+          <p:nvPr/>
+        </p:nvSpPr>
+        <p:spPr>
+          <a:xfrm>
+            <a:off x="429280" y="1745515"/>
+            <a:ext cx="11310884" cy="1468894"/>
+          </a:xfrm>
+          <a:prstGeom prst="rect">
+            <a:avLst/>
+          </a:prstGeom>
+          <a:noFill/>
+        </p:spPr>
+        <p:txBody>
+          <a:bodyPr wrap="square" lIns="76200" rIns="76200" tIns="50800" bIns="50800">
+            <a:spAutoFit/>
+          </a:bodyPr>
+          <a:lstStyle/>
+          <a:p>
+            <a:pPr algn="l">
+              <a:spcAft>
+                <a:spcPts val="300"/>
+              </a:spcAft>
+              <a:defRPr sz="1600">
+                <a:solidFill>
+                  <a:srgbClr val="FFFFFF"/>
+                </a:solidFill>
+                <a:latin typeface="Play"/>
+                <a:ea typeface="Play"/>
+                <a:cs typeface="Play"/>
+              </a:defRPr>
+            </a:pPr>
+            <a:r>
+              <a:rPr sz="1600">
+                <a:solidFill>
+                  <a:srgbClr val="FFFFFF"/>
+                </a:solidFill>
+                <a:latin typeface="Play"/>
+                <a:ea typeface="Play"/>
+                <a:cs typeface="Play"/>
+              </a:rPr>
+              <a:t>• Сервис работает на 2 vCPU / 2 GB RAM</a:t>
+            </a:r>
+          </a:p>
+          <a:p>
+            <a:pPr algn="l">
+              <a:spcAft>
+                <a:spcPts val="300"/>
+              </a:spcAft>
+              <a:defRPr sz="1600">
+                <a:solidFill>
+                  <a:srgbClr val="FFFFFF"/>
+                </a:solidFill>
+                <a:latin typeface="Play"/>
+                <a:ea typeface="Play"/>
+                <a:cs typeface="Play"/>
+              </a:defRPr>
+            </a:pPr>
+            <a:r>
+              <a:rPr sz="1600">
+                <a:solidFill>
+                  <a:srgbClr val="FFFFFF"/>
+                </a:solidFill>
+                <a:latin typeface="Play"/>
+                <a:ea typeface="Play"/>
+                <a:cs typeface="Play"/>
+              </a:rPr>
+              <a:t>• Инференс за 6 недель пилота – 1 400 руб</a:t>
+            </a:r>
+          </a:p>
+          <a:p>
+            <a:pPr algn="l">
+              <a:spcAft>
+                <a:spcPts val="300"/>
+              </a:spcAft>
+              <a:defRPr sz="1600">
+                <a:solidFill>
+                  <a:srgbClr val="FFFFFF"/>
+                </a:solidFill>
+                <a:latin typeface="Play"/>
+                <a:ea typeface="Play"/>
+                <a:cs typeface="Play"/>
+              </a:defRPr>
+            </a:pPr>
+            <a:r>
+              <a:rPr sz="1600">
+                <a:solidFill>
+                  <a:srgbClr val="FFFFFF"/>
+                </a:solidFill>
+                <a:latin typeface="Play"/>
+                <a:ea typeface="Play"/>
+                <a:cs typeface="Play"/>
+              </a:rPr>
+              <a:t>• 3 квартал 2026: подключение 4 команд</a:t>
+            </a:r>
+          </a:p>
+          <a:p>
+            <a:pPr algn="l">
+              <a:spcAft>
+                <a:spcPts val="300"/>
+              </a:spcAft>
+              <a:defRPr sz="1600">
+                <a:solidFill>
+                  <a:srgbClr val="FFFFFF"/>
+                </a:solidFill>
+                <a:latin typeface="Play"/>
+                <a:ea typeface="Play"/>
+                <a:cs typeface="Play"/>
+              </a:defRPr>
+            </a:pPr>
+            <a:r>
+              <a:rPr sz="1600">
+                <a:solidFill>
+                  <a:srgbClr val="FFFFFF"/>
+                </a:solidFill>
+                <a:latin typeface="Play"/>
+                <a:ea typeface="Play"/>
+                <a:cs typeface="Play"/>
+              </a:rPr>
+              <a:t>• 4 квартал 2026: доступ для всей компании</a:t>
+            </a:r>
+          </a:p>
+          <a:p>
+            <a:pPr algn="l">
+              <a:spcAft>
+                <a:spcPts val="300"/>
+              </a:spcAft>
+              <a:defRPr sz="1600">
+                <a:solidFill>
+                  <a:srgbClr val="FFFFFF"/>
+                </a:solidFill>
+                <a:latin typeface="Play"/>
+                <a:ea typeface="Play"/>
+                <a:cs typeface="Play"/>
+              </a:defRPr>
+            </a:pPr>
+            <a:r>
+              <a:rPr sz="1600">
+                <a:solidFill>
+                  <a:srgbClr val="FFFFFF"/>
+                </a:solidFill>
+                <a:latin typeface="Play"/>
+                <a:ea typeface="Play"/>
+                <a:cs typeface="Play"/>
+              </a:rPr>
+              <a:t>• 1 квартал 2027: генерация иллюстраций</a:t>
+            </a:r>
+          </a:p>
+        </p:txBody>
+      </p:sp>
+      <p:sp>
+        <p:nvSpPr>
+          <p:cNvPr id="4" name="Rectangle 3"/>
           <p:cNvSpPr/>
           <p:nvPr/>
         </p:nvSpPr>
         <p:spPr>
           <a:xfrm>
-            <a:off x="0" y="4748271"/>
-            <a:ext cx="12192000" cy="2109730"/>
+            <a:off x="429280" y="4320529"/>
+            <a:ext cx="11310884" cy="60956"/>
           </a:xfrm>
           <a:prstGeom prst="rect">
             <a:avLst/>
           </a:prstGeom>
-          <a:gradFill>
-            <a:gsLst>
-              <a:gs pos="0">
-                <a:srgbClr val="0077FF">
-                  <a:alpha val="61961"/>
-                </a:srgbClr>
-              </a:gs>
-              <a:gs pos="99000">
-                <a:srgbClr val="00AEE8"/>
-              </a:gs>
-              <a:gs pos="100000">
-                <a:srgbClr val="00AEE8"/>
-              </a:gs>
-            </a:gsLst>
-            <a:lin ang="14400000" scaled="0"/>
-          </a:gradFill>
-          <a:ln>
-            <a:noFill/>
-          </a:ln>
-        </p:spPr>
-        <p:txBody>
-          <a:bodyPr anchorCtr="0" anchor="ctr" bIns="0" lIns="108000" spcFirstLastPara="1" rIns="91425" wrap="square" tIns="0">
-            <a:noAutofit/>
-          </a:bodyPr>
-          <a:lstStyle/>
-          <a:p>
-            <a:pPr indent="0" lvl="0" marL="0" marR="0" rtl="0" algn="l">
-              <a:spcBef>
-                <a:spcPts val="0"/>
-              </a:spcBef>
-              <a:spcAft>
-                <a:spcPts val="0"/>
-              </a:spcAft>
-              <a:buNone/>
-            </a:pPr>
-            <a:r>
-              <a:t/>
-            </a:r>
-            <a:endParaRPr sz="1100">
-              <a:solidFill>
-                <a:schemeClr val="lt1"/>
-              </a:solidFill>
-              <a:latin typeface="Play"/>
-              <a:ea typeface="Play"/>
-              <a:cs typeface="Play"/>
-              <a:sym typeface="Play"/>
-            </a:endParaRPr>
-          </a:p>
-        </p:txBody>
-      </p:sp>
-      <p:sp>
-        <p:nvSpPr>
-          <p:cNvPr id="680" name="Rounded Rectangle 679"/>
-          <p:cNvSpPr/>
-          <p:nvPr/>
-        </p:nvSpPr>
-        <p:spPr>
-          <a:xfrm>
-            <a:off x="300817" y="297715"/>
-            <a:ext cx="11317142" cy="3505296"/>
-          </a:xfrm>
-          <a:prstGeom prst="roundRect">
-            <a:avLst/>
-          </a:prstGeom>
           <a:solidFill>
-            <a:srgbClr val="111111">
-              <a:alpha val="85000"/>
-            </a:srgbClr>
+            <a:srgbClr val="0077FF"/>
           </a:solidFill>
           <a:ln>
             <a:noFill/>
           </a:ln>
-          <a:effectLst/>
         </p:spPr>
         <p:style>
           <a:lnRef idx="1">
@@ -9209,14 +8315,57 @@
       </p:sp>
       <p:sp>
         <p:nvSpPr>
-          <p:cNvPr id="681" name="title"/>
+          <p:cNvPr id="5" name="Oval 4"/>
+          <p:cNvSpPr/>
+          <p:nvPr/>
+        </p:nvSpPr>
+        <p:spPr>
+          <a:xfrm>
+            <a:off x="2090919" y="4127500"/>
+            <a:ext cx="447016" cy="447016"/>
+          </a:xfrm>
+          <a:prstGeom prst="ellipse">
+            <a:avLst/>
+          </a:prstGeom>
+          <a:solidFill>
+            <a:srgbClr val="0077FF"/>
+          </a:solidFill>
+          <a:ln>
+            <a:noFill/>
+          </a:ln>
+        </p:spPr>
+        <p:style>
+          <a:lnRef idx="1">
+            <a:schemeClr val="accent1"/>
+          </a:lnRef>
+          <a:fillRef idx="3">
+            <a:schemeClr val="accent1"/>
+          </a:fillRef>
+          <a:effectRef idx="2">
+            <a:schemeClr val="accent1"/>
+          </a:effectRef>
+          <a:fontRef idx="minor">
+            <a:schemeClr val="lt1"/>
+          </a:fontRef>
+        </p:style>
+        <p:txBody>
+          <a:bodyPr rtlCol="0" anchor="ctr"/>
+          <a:lstStyle/>
+          <a:p>
+            <a:pPr algn="ctr"/>
+          </a:p>
+        </p:txBody>
+      </p:sp>
+      <p:sp>
+        <p:nvSpPr>
+          <p:cNvPr id="6" name="TextBox 5"/>
           <p:cNvSpPr txBox="1"/>
           <p:nvPr/>
         </p:nvSpPr>
         <p:spPr>
           <a:xfrm>
-            <a:off x="427817" y="424715"/>
-            <a:ext cx="7827264" cy="822960"/>
+            <a:off x="429279" y="3385860"/>
+            <a:ext cx="3770294" cy="772118"/>
           </a:xfrm>
           <a:prstGeom prst="rect">
             <a:avLst/>
@@ -9224,16 +8373,13 @@
           <a:noFill/>
         </p:spPr>
         <p:txBody>
-          <a:bodyPr wrap="square" lIns="76200" rIns="76200" tIns="50800" bIns="50800">
+          <a:bodyPr wrap="square">
             <a:spAutoFit/>
           </a:bodyPr>
           <a:lstStyle/>
           <a:p>
-            <a:pPr algn="l">
-              <a:spcAft>
-                <a:spcPts val="300"/>
-              </a:spcAft>
-              <a:defRPr sz="3200">
+            <a:pPr algn="ctr">
+              <a:defRPr sz="1200" b="0">
                 <a:solidFill>
                   <a:srgbClr val="FFFFFF"/>
                 </a:solidFill>
@@ -9243,7 +8389,7 @@
               </a:defRPr>
             </a:pPr>
             <a:r>
-              <a:rPr sz="3200">
+              <a:rPr sz="1200" b="0">
                 <a:solidFill>
                   <a:srgbClr val="FFFFFF"/>
                 </a:solidFill>
@@ -9251,21 +8397,64 @@
                 <a:ea typeface="Play"/>
                 <a:cs typeface="Play"/>
               </a:rPr>
-              <a:t>Ресурсы и сроки</a:t>
+              <a:t>3 квартал 2026: подключение 4 команд</a:t>
             </a:r>
           </a:p>
         </p:txBody>
       </p:sp>
       <p:sp>
         <p:nvSpPr>
-          <p:cNvPr id="682" name="card_0"/>
+          <p:cNvPr id="7" name="Oval 6"/>
+          <p:cNvSpPr/>
+          <p:nvPr/>
+        </p:nvSpPr>
+        <p:spPr>
+          <a:xfrm>
+            <a:off x="5861213" y="4127500"/>
+            <a:ext cx="447016" cy="447016"/>
+          </a:xfrm>
+          <a:prstGeom prst="ellipse">
+            <a:avLst/>
+          </a:prstGeom>
+          <a:solidFill>
+            <a:srgbClr val="0077FF"/>
+          </a:solidFill>
+          <a:ln>
+            <a:noFill/>
+          </a:ln>
+        </p:spPr>
+        <p:style>
+          <a:lnRef idx="1">
+            <a:schemeClr val="accent1"/>
+          </a:lnRef>
+          <a:fillRef idx="3">
+            <a:schemeClr val="accent1"/>
+          </a:fillRef>
+          <a:effectRef idx="2">
+            <a:schemeClr val="accent1"/>
+          </a:effectRef>
+          <a:fontRef idx="minor">
+            <a:schemeClr val="lt1"/>
+          </a:fontRef>
+        </p:style>
+        <p:txBody>
+          <a:bodyPr rtlCol="0" anchor="ctr"/>
+          <a:lstStyle/>
+          <a:p>
+            <a:pPr algn="ctr"/>
+          </a:p>
+        </p:txBody>
+      </p:sp>
+      <p:sp>
+        <p:nvSpPr>
+          <p:cNvPr id="8" name="TextBox 7"/>
           <p:cNvSpPr txBox="1"/>
           <p:nvPr/>
         </p:nvSpPr>
         <p:spPr>
           <a:xfrm>
-            <a:off x="580217" y="1989452"/>
-            <a:ext cx="3331220" cy="1717212"/>
+            <a:off x="4199574" y="4767545"/>
+            <a:ext cx="3770294" cy="772118"/>
           </a:xfrm>
           <a:prstGeom prst="rect">
             <a:avLst/>
@@ -9273,16 +8462,13 @@
           <a:noFill/>
         </p:spPr>
         <p:txBody>
-          <a:bodyPr wrap="square" lIns="76200" rIns="76200" tIns="50800" bIns="50800">
+          <a:bodyPr wrap="square">
             <a:spAutoFit/>
           </a:bodyPr>
           <a:lstStyle/>
           <a:p>
-            <a:pPr algn="l">
-              <a:spcAft>
-                <a:spcPts val="300"/>
-              </a:spcAft>
-              <a:defRPr sz="2800" b="0">
+            <a:pPr algn="ctr">
+              <a:defRPr sz="1200" b="0">
                 <a:solidFill>
                   <a:srgbClr val="FFFFFF"/>
                 </a:solidFill>
@@ -9292,7 +8478,7 @@
               </a:defRPr>
             </a:pPr>
             <a:r>
-              <a:rPr sz="2800" b="0">
+              <a:rPr sz="1200" b="0">
                 <a:solidFill>
                   <a:srgbClr val="FFFFFF"/>
                 </a:solidFill>
@@ -9300,21 +8486,64 @@
                 <a:ea typeface="Play"/>
                 <a:cs typeface="Play"/>
               </a:rPr>
-              <a:t>Сервис работает на 2 vCPU / 2 GB RAM</a:t>
+              <a:t>4 квартал 2026: доступ для всей компании</a:t>
             </a:r>
           </a:p>
         </p:txBody>
       </p:sp>
       <p:sp>
         <p:nvSpPr>
-          <p:cNvPr id="683" name="card_1"/>
+          <p:cNvPr id="9" name="Oval 8"/>
+          <p:cNvSpPr/>
+          <p:nvPr/>
+        </p:nvSpPr>
+        <p:spPr>
+          <a:xfrm>
+            <a:off x="9631508" y="4127500"/>
+            <a:ext cx="447016" cy="447016"/>
+          </a:xfrm>
+          <a:prstGeom prst="ellipse">
+            <a:avLst/>
+          </a:prstGeom>
+          <a:solidFill>
+            <a:srgbClr val="0077FF"/>
+          </a:solidFill>
+          <a:ln>
+            <a:noFill/>
+          </a:ln>
+        </p:spPr>
+        <p:style>
+          <a:lnRef idx="1">
+            <a:schemeClr val="accent1"/>
+          </a:lnRef>
+          <a:fillRef idx="3">
+            <a:schemeClr val="accent1"/>
+          </a:fillRef>
+          <a:effectRef idx="2">
+            <a:schemeClr val="accent1"/>
+          </a:effectRef>
+          <a:fontRef idx="minor">
+            <a:schemeClr val="lt1"/>
+          </a:fontRef>
+        </p:style>
+        <p:txBody>
+          <a:bodyPr rtlCol="0" anchor="ctr"/>
+          <a:lstStyle/>
+          <a:p>
+            <a:pPr algn="ctr"/>
+          </a:p>
+        </p:txBody>
+      </p:sp>
+      <p:sp>
+        <p:nvSpPr>
+          <p:cNvPr id="10" name="TextBox 9"/>
           <p:cNvSpPr txBox="1"/>
           <p:nvPr/>
         </p:nvSpPr>
         <p:spPr>
           <a:xfrm>
-            <a:off x="4369978" y="1989452"/>
-            <a:ext cx="3331220" cy="1717212"/>
+            <a:off x="7969869" y="3385860"/>
+            <a:ext cx="3770294" cy="772118"/>
           </a:xfrm>
           <a:prstGeom prst="rect">
             <a:avLst/>
@@ -9322,16 +8551,13 @@
           <a:noFill/>
         </p:spPr>
         <p:txBody>
-          <a:bodyPr wrap="square" lIns="76200" rIns="76200" tIns="50800" bIns="50800">
+          <a:bodyPr wrap="square">
             <a:spAutoFit/>
           </a:bodyPr>
           <a:lstStyle/>
           <a:p>
-            <a:pPr algn="l">
-              <a:spcAft>
-                <a:spcPts val="300"/>
-              </a:spcAft>
-              <a:defRPr sz="2800" b="0">
+            <a:pPr algn="ctr">
+              <a:defRPr sz="1200" b="0">
                 <a:solidFill>
                   <a:srgbClr val="FFFFFF"/>
                 </a:solidFill>
@@ -9341,7 +8567,7 @@
               </a:defRPr>
             </a:pPr>
             <a:r>
-              <a:rPr sz="2800" b="0">
+              <a:rPr sz="1200" b="0">
                 <a:solidFill>
                   <a:srgbClr val="FFFFFF"/>
                 </a:solidFill>
@@ -9349,56 +8575,7 @@
                 <a:ea typeface="Play"/>
                 <a:cs typeface="Play"/>
               </a:rPr>
-              <a:t>Стоимость инференса 1 400 рублей за 6 недель</a:t>
-            </a:r>
-          </a:p>
-        </p:txBody>
-      </p:sp>
-      <p:sp>
-        <p:nvSpPr>
-          <p:cNvPr id="684" name="card_2"/>
-          <p:cNvSpPr txBox="1"/>
-          <p:nvPr/>
-        </p:nvSpPr>
-        <p:spPr>
-          <a:xfrm>
-            <a:off x="8159739" y="1989452"/>
-            <a:ext cx="3331220" cy="1717212"/>
-          </a:xfrm>
-          <a:prstGeom prst="rect">
-            <a:avLst/>
-          </a:prstGeom>
-          <a:noFill/>
-        </p:spPr>
-        <p:txBody>
-          <a:bodyPr wrap="square" lIns="76200" rIns="76200" tIns="50800" bIns="50800">
-            <a:spAutoFit/>
-          </a:bodyPr>
-          <a:lstStyle/>
-          <a:p>
-            <a:pPr algn="l">
-              <a:spcAft>
-                <a:spcPts val="300"/>
-              </a:spcAft>
-              <a:defRPr sz="2400" b="0">
-                <a:solidFill>
-                  <a:srgbClr val="FFFFFF"/>
-                </a:solidFill>
-                <a:latin typeface="Play"/>
-                <a:ea typeface="Play"/>
-                <a:cs typeface="Play"/>
-              </a:defRPr>
-            </a:pPr>
-            <a:r>
-              <a:rPr sz="2400" b="0">
-                <a:solidFill>
-                  <a:srgbClr val="FFFFFF"/>
-                </a:solidFill>
-                <a:latin typeface="Play"/>
-                <a:ea typeface="Play"/>
-                <a:cs typeface="Play"/>
-              </a:rPr>
-              <a:t>План: Q3 2026 подключение 4 команд, Q4 2026 доступ для всей компании</a:t>
+              <a:t>1 квартал 2027: генерация иллюстраций</a:t>
             </a:r>
           </a:p>
         </p:txBody>
@@ -9411,7 +8588,7 @@
 </p:sld>
 </file>
 
-<file path=ppt/slides/slide37.xml><?xml version="1.0" encoding="utf-8"?>
+<file path=ppt/slides/slide36.xml><?xml version="1.0" encoding="utf-8"?>
 <p:sld xmlns:a="http://schemas.openxmlformats.org/drawingml/2006/main" xmlns:p="http://schemas.openxmlformats.org/presentationml/2006/main" xmlns:r="http://schemas.openxmlformats.org/officeDocument/2006/relationships">
   <p:cSld>
     <p:spTree>
@@ -9478,8 +8655,8 @@
         </p:nvSpPr>
         <p:spPr>
           <a:xfrm>
-            <a:off x="429280" y="2489917"/>
-            <a:ext cx="11310884" cy="1488440"/>
+            <a:off x="429280" y="1592290"/>
+            <a:ext cx="11310884" cy="1341120"/>
           </a:xfrm>
           <a:prstGeom prst="rect">
             <a:avLst/>
@@ -9496,7 +8673,7 @@
               <a:spcAft>
                 <a:spcPts val="300"/>
               </a:spcAft>
-              <a:defRPr sz="2800">
+              <a:defRPr sz="1600">
                 <a:solidFill>
                   <a:srgbClr val="FFFFFF"/>
                 </a:solidFill>
@@ -9506,7 +8683,7 @@
               </a:defRPr>
             </a:pPr>
             <a:r>
-              <a:rPr sz="2800">
+              <a:rPr sz="1600">
                 <a:solidFill>
                   <a:srgbClr val="FFFFFF"/>
                 </a:solidFill>
@@ -9514,7 +8691,7 @@
                 <a:ea typeface="Play"/>
                 <a:cs typeface="Play"/>
               </a:rPr>
-              <a:t>• 6 недель на 2 командах, 68 презентаций</a:t>
+              <a:t>• 6 недель, 2 команды, 68 презентаций</a:t>
             </a:r>
           </a:p>
           <a:p>
@@ -9522,7 +8699,7 @@
               <a:spcAft>
                 <a:spcPts val="300"/>
               </a:spcAft>
-              <a:defRPr sz="2800">
+              <a:defRPr sz="1600">
                 <a:solidFill>
                   <a:srgbClr val="FFFFFF"/>
                 </a:solidFill>
@@ -9532,7 +8709,7 @@
               </a:defRPr>
             </a:pPr>
             <a:r>
-              <a:rPr sz="2800">
+              <a:rPr sz="1600">
                 <a:solidFill>
                   <a:srgbClr val="FFFFFF"/>
                 </a:solidFill>
@@ -9540,7 +8717,7 @@
                 <a:ea typeface="Play"/>
                 <a:cs typeface="Play"/>
               </a:rPr>
-              <a:t>• План колоды из 12 слайдов</a:t>
+              <a:t>• Время сборки 4 мин, 38 запросов закрыто</a:t>
             </a:r>
           </a:p>
           <a:p>
@@ -9548,7 +8725,7 @@
               <a:spcAft>
                 <a:spcPts val="300"/>
               </a:spcAft>
-              <a:defRPr sz="2800">
+              <a:defRPr sz="1600">
                 <a:solidFill>
                   <a:srgbClr val="FFFFFF"/>
                 </a:solidFill>
@@ -9558,7 +8735,7 @@
               </a:defRPr>
             </a:pPr>
             <a:r>
-              <a:rPr sz="2800">
+              <a:rPr sz="1600">
                 <a:solidFill>
                   <a:srgbClr val="FFFFFF"/>
                 </a:solidFill>
@@ -9566,225 +8743,438 @@
                 <a:ea typeface="Play"/>
                 <a:cs typeface="Play"/>
               </a:rPr>
-              <a:t>• Автоматический аудит</a:t>
+              <a:t>• Нарушений – 2 из 68</a:t>
             </a:r>
           </a:p>
         </p:txBody>
       </p:sp>
-    </p:spTree>
-  </p:cSld>
-  <p:clrMapOvr>
-    <a:masterClrMapping/>
-  </p:clrMapOvr>
-</p:sld>
-</file>
-
-<file path=ppt/slides/slide38.xml><?xml version="1.0" encoding="utf-8"?>
-<p:sld xmlns:a="http://schemas.openxmlformats.org/drawingml/2006/main" xmlns:p="http://schemas.openxmlformats.org/presentationml/2006/main" xmlns:r="http://schemas.openxmlformats.org/officeDocument/2006/relationships">
-  <p:cSld>
-    <p:spTree>
-      <p:nvGrpSpPr>
-        <p:cNvPr id="1" name=""/>
-        <p:cNvGrpSpPr/>
-        <p:nvPr/>
-      </p:nvGrpSpPr>
-      <p:grpSpPr/>
-      <p:sp>
-        <p:nvSpPr>
-          <p:cNvPr id="2" name="Rounded Rectangle 1"/>
-          <p:cNvSpPr/>
+      <p:graphicFrame>
+        <p:nvGraphicFramePr>
+          <p:cNvPr id="4" name="Table 3"/>
+          <p:cNvGraphicFramePr>
+            <a:graphicFrameLocks noGrp="1"/>
+          </p:cNvGraphicFramePr>
           <p:nvPr/>
-        </p:nvSpPr>
-        <p:spPr>
-          <a:xfrm>
-            <a:off x="302280" y="2164394"/>
-            <a:ext cx="11564884" cy="2901949"/>
-          </a:xfrm>
-          <a:prstGeom prst="roundRect">
-            <a:avLst/>
-          </a:prstGeom>
-          <a:solidFill>
-            <a:srgbClr val="111111">
-              <a:alpha val="85000"/>
-            </a:srgbClr>
-          </a:solidFill>
-          <a:ln>
-            <a:noFill/>
-          </a:ln>
-          <a:effectLst/>
-        </p:spPr>
-        <p:style>
-          <a:lnRef idx="1">
-            <a:schemeClr val="accent1"/>
-          </a:lnRef>
-          <a:fillRef idx="3">
-            <a:schemeClr val="accent1"/>
-          </a:fillRef>
-          <a:effectRef idx="2">
-            <a:schemeClr val="accent1"/>
-          </a:effectRef>
-          <a:fontRef idx="minor">
-            <a:schemeClr val="lt1"/>
-          </a:fontRef>
-        </p:style>
-        <p:txBody>
-          <a:bodyPr rtlCol="0" anchor="ctr"/>
-          <a:lstStyle/>
-          <a:p>
-            <a:pPr algn="ctr"/>
-          </a:p>
-        </p:txBody>
-      </p:sp>
-      <p:sp>
-        <p:nvSpPr>
-          <p:cNvPr id="3" name="title"/>
-          <p:cNvSpPr txBox="1"/>
-          <p:nvPr/>
-        </p:nvSpPr>
-        <p:spPr>
-          <a:xfrm>
-            <a:off x="429280" y="2291394"/>
-            <a:ext cx="7827385" cy="919480"/>
-          </a:xfrm>
-          <a:prstGeom prst="rect">
-            <a:avLst/>
-          </a:prstGeom>
-          <a:noFill/>
-        </p:spPr>
-        <p:txBody>
-          <a:bodyPr wrap="square" lIns="76200" rIns="76200" tIns="50800" bIns="50800">
-            <a:spAutoFit/>
-          </a:bodyPr>
-          <a:lstStyle/>
-          <a:p>
-            <a:pPr algn="l">
-              <a:spcAft>
-                <a:spcPts val="300"/>
-              </a:spcAft>
-              <a:defRPr sz="4800">
-                <a:solidFill>
-                  <a:srgbClr val="FFFFFF"/>
-                </a:solidFill>
-                <a:latin typeface="Play"/>
-                <a:ea typeface="Play"/>
-                <a:cs typeface="Play"/>
-              </a:defRPr>
-            </a:pPr>
-            <a:r>
-              <a:rPr sz="4800">
-                <a:solidFill>
-                  <a:srgbClr val="FFFFFF"/>
-                </a:solidFill>
-                <a:latin typeface="Play"/>
-                <a:ea typeface="Play"/>
-                <a:cs typeface="Play"/>
-              </a:rPr>
-              <a:t>Что мы просим решить</a:t>
-            </a:r>
-          </a:p>
-        </p:txBody>
-      </p:sp>
-      <p:sp>
-        <p:nvSpPr>
-          <p:cNvPr id="4" name="body"/>
-          <p:cNvSpPr txBox="1"/>
-          <p:nvPr/>
-        </p:nvSpPr>
-        <p:spPr>
-          <a:xfrm>
-            <a:off x="429280" y="3450904"/>
-            <a:ext cx="11310884" cy="2446975"/>
-          </a:xfrm>
-          <a:prstGeom prst="rect">
-            <a:avLst/>
-          </a:prstGeom>
-          <a:noFill/>
-        </p:spPr>
-        <p:txBody>
-          <a:bodyPr wrap="square" lIns="76200" rIns="76200" tIns="50800" bIns="50800">
-            <a:spAutoFit/>
-          </a:bodyPr>
-          <a:lstStyle/>
-          <a:p>
-            <a:pPr algn="l">
-              <a:spcAft>
-                <a:spcPts val="300"/>
-              </a:spcAft>
-              <a:defRPr sz="2800" b="1">
-                <a:solidFill>
-                  <a:srgbClr val="FFFFFF"/>
-                </a:solidFill>
-                <a:latin typeface="Play"/>
-                <a:ea typeface="Play"/>
-                <a:cs typeface="Play"/>
-              </a:defRPr>
-            </a:pPr>
-            <a:r>
-              <a:rPr sz="2800" b="1">
-                <a:solidFill>
-                  <a:srgbClr val="FFFFFF"/>
-                </a:solidFill>
-                <a:latin typeface="Play"/>
-                <a:ea typeface="Play"/>
-                <a:cs typeface="Play"/>
-              </a:rPr>
-              <a:t>• Одобрить запуск сервиса на всю компанию</a:t>
-            </a:r>
-          </a:p>
-          <a:p>
-            <a:pPr algn="l">
-              <a:spcAft>
-                <a:spcPts val="300"/>
-              </a:spcAft>
-              <a:defRPr sz="2800" b="1">
-                <a:solidFill>
-                  <a:srgbClr val="FFFFFF"/>
-                </a:solidFill>
-                <a:latin typeface="Play"/>
-                <a:ea typeface="Play"/>
-                <a:cs typeface="Play"/>
-              </a:defRPr>
-            </a:pPr>
-            <a:r>
-              <a:rPr sz="2800" b="1">
-                <a:solidFill>
-                  <a:srgbClr val="FFFFFF"/>
-                </a:solidFill>
-                <a:latin typeface="Play"/>
-                <a:ea typeface="Play"/>
-                <a:cs typeface="Play"/>
-              </a:rPr>
-              <a:t>• Предоставить ресурсы для масштабирования</a:t>
-            </a:r>
-          </a:p>
-          <a:p>
-            <a:pPr algn="l">
-              <a:spcAft>
-                <a:spcPts val="300"/>
-              </a:spcAft>
-              <a:defRPr sz="2800" b="1">
-                <a:solidFill>
-                  <a:srgbClr val="FFFFFF"/>
-                </a:solidFill>
-                <a:latin typeface="Play"/>
-                <a:ea typeface="Play"/>
-                <a:cs typeface="Play"/>
-              </a:defRPr>
-            </a:pPr>
-            <a:r>
-              <a:rPr sz="2800" b="1">
-                <a:solidFill>
-                  <a:srgbClr val="FFFFFF"/>
-                </a:solidFill>
-                <a:latin typeface="Play"/>
-                <a:ea typeface="Play"/>
-                <a:cs typeface="Play"/>
-              </a:rPr>
-              <a:t>• Поддержать интеграцию с хранилищем документов</a:t>
-            </a:r>
-          </a:p>
-        </p:txBody>
-      </p:sp>
+        </p:nvGraphicFramePr>
+        <p:xfrm>
+          <a:off x="429280" y="3104860"/>
+          <a:ext cx="11310884" cy="2668752"/>
+        </p:xfrm>
+        <a:graphic>
+          <a:graphicData uri="http://schemas.openxmlformats.org/drawingml/2006/table">
+            <a:tbl>
+              <a:tblPr firstRow="1" bandRow="1">
+                <a:tableStyleId>{5C22544A-7EE6-4342-B048-85BDC9FD1C3A}</a:tableStyleId>
+              </a:tblPr>
+              <a:tblGrid>
+                <a:gridCol w="3770294"/>
+                <a:gridCol w="3770294"/>
+                <a:gridCol w="3770296"/>
+              </a:tblGrid>
+              <a:tr h="533750">
+                <a:tc>
+                  <a:txBody>
+                    <a:bodyPr/>
+                    <a:lstStyle/>
+                    <a:p>
+                      <a:pPr>
+                        <a:defRPr sz="1300" b="1">
+                          <a:solidFill>
+                            <a:srgbClr val="FFFFFF"/>
+                          </a:solidFill>
+                          <a:latin typeface="Play"/>
+                          <a:ea typeface="Play"/>
+                          <a:cs typeface="Play"/>
+                        </a:defRPr>
+                      </a:pPr>
+                      <a:r>
+                        <a:t>Метрика</a:t>
+                      </a:r>
+                    </a:p>
+                  </a:txBody>
+                  <a:tcPr>
+                    <a:solidFill>
+                      <a:srgbClr val="0077FF"/>
+                    </a:solidFill>
+                  </a:tcPr>
+                </a:tc>
+                <a:tc>
+                  <a:txBody>
+                    <a:bodyPr/>
+                    <a:lstStyle/>
+                    <a:p>
+                      <a:pPr>
+                        <a:defRPr sz="1300" b="1">
+                          <a:solidFill>
+                            <a:srgbClr val="FFFFFF"/>
+                          </a:solidFill>
+                          <a:latin typeface="Play"/>
+                          <a:ea typeface="Play"/>
+                          <a:cs typeface="Play"/>
+                        </a:defRPr>
+                      </a:pPr>
+                      <a:r>
+                        <a:t>Ручной</a:t>
+                      </a:r>
+                    </a:p>
+                  </a:txBody>
+                  <a:tcPr>
+                    <a:solidFill>
+                      <a:srgbClr val="0077FF"/>
+                    </a:solidFill>
+                  </a:tcPr>
+                </a:tc>
+                <a:tc>
+                  <a:txBody>
+                    <a:bodyPr/>
+                    <a:lstStyle/>
+                    <a:p>
+                      <a:pPr>
+                        <a:defRPr sz="1300" b="1">
+                          <a:solidFill>
+                            <a:srgbClr val="FFFFFF"/>
+                          </a:solidFill>
+                          <a:latin typeface="Play"/>
+                          <a:ea typeface="Play"/>
+                          <a:cs typeface="Play"/>
+                        </a:defRPr>
+                      </a:pPr>
+                      <a:r>
+                        <a:t>Пилот</a:t>
+                      </a:r>
+                    </a:p>
+                  </a:txBody>
+                  <a:tcPr>
+                    <a:solidFill>
+                      <a:srgbClr val="0077FF"/>
+                    </a:solidFill>
+                  </a:tcPr>
+                </a:tc>
+              </a:tr>
+              <a:tr h="533750">
+                <a:tc>
+                  <a:txBody>
+                    <a:bodyPr/>
+                    <a:lstStyle/>
+                    <a:p>
+                      <a:pPr>
+                        <a:defRPr sz="1300" b="0">
+                          <a:solidFill>
+                            <a:srgbClr val="FFFFFF"/>
+                          </a:solidFill>
+                          <a:latin typeface="Play"/>
+                          <a:ea typeface="Play"/>
+                          <a:cs typeface="Play"/>
+                        </a:defRPr>
+                      </a:pPr>
+                      <a:r>
+                        <a:t>Кол-во презентаций</a:t>
+                      </a:r>
+                    </a:p>
+                  </a:txBody>
+                  <a:tcPr>
+                    <a:solidFill>
+                      <a:srgbClr val="111111"/>
+                    </a:solidFill>
+                  </a:tcPr>
+                </a:tc>
+                <a:tc>
+                  <a:txBody>
+                    <a:bodyPr/>
+                    <a:lstStyle/>
+                    <a:p>
+                      <a:pPr>
+                        <a:defRPr sz="1300" b="0">
+                          <a:solidFill>
+                            <a:srgbClr val="FFFFFF"/>
+                          </a:solidFill>
+                          <a:latin typeface="Play"/>
+                          <a:ea typeface="Play"/>
+                          <a:cs typeface="Play"/>
+                        </a:defRPr>
+                      </a:pPr>
+                      <a:r>
+                        <a:t>42</a:t>
+                      </a:r>
+                    </a:p>
+                  </a:txBody>
+                  <a:tcPr>
+                    <a:solidFill>
+                      <a:srgbClr val="111111"/>
+                    </a:solidFill>
+                  </a:tcPr>
+                </a:tc>
+                <a:tc>
+                  <a:txBody>
+                    <a:bodyPr/>
+                    <a:lstStyle/>
+                    <a:p>
+                      <a:pPr>
+                        <a:defRPr sz="1300" b="0">
+                          <a:solidFill>
+                            <a:srgbClr val="FFFFFF"/>
+                          </a:solidFill>
+                          <a:latin typeface="Play"/>
+                          <a:ea typeface="Play"/>
+                          <a:cs typeface="Play"/>
+                        </a:defRPr>
+                      </a:pPr>
+                      <a:r>
+                        <a:t>68</a:t>
+                      </a:r>
+                    </a:p>
+                  </a:txBody>
+                  <a:tcPr>
+                    <a:solidFill>
+                      <a:srgbClr val="111111"/>
+                    </a:solidFill>
+                  </a:tcPr>
+                </a:tc>
+              </a:tr>
+              <a:tr h="533750">
+                <a:tc>
+                  <a:txBody>
+                    <a:bodyPr/>
+                    <a:lstStyle/>
+                    <a:p>
+                      <a:pPr>
+                        <a:defRPr sz="1300" b="0">
+                          <a:solidFill>
+                            <a:srgbClr val="FFFFFF"/>
+                          </a:solidFill>
+                          <a:latin typeface="Play"/>
+                          <a:ea typeface="Play"/>
+                          <a:cs typeface="Play"/>
+                        </a:defRPr>
+                      </a:pPr>
+                      <a:r>
+                        <a:t>Время сборки (мин)</a:t>
+                      </a:r>
+                    </a:p>
+                  </a:txBody>
+                  <a:tcPr>
+                    <a:solidFill>
+                      <a:srgbClr val="111111"/>
+                    </a:solidFill>
+                  </a:tcPr>
+                </a:tc>
+                <a:tc>
+                  <a:txBody>
+                    <a:bodyPr/>
+                    <a:lstStyle/>
+                    <a:p>
+                      <a:pPr>
+                        <a:defRPr sz="1300" b="0">
+                          <a:solidFill>
+                            <a:srgbClr val="FFFFFF"/>
+                          </a:solidFill>
+                          <a:latin typeface="Play"/>
+                          <a:ea typeface="Play"/>
+                          <a:cs typeface="Play"/>
+                        </a:defRPr>
+                      </a:pPr>
+                      <a:r>
+                        <a:t>186</a:t>
+                      </a:r>
+                    </a:p>
+                  </a:txBody>
+                  <a:tcPr>
+                    <a:solidFill>
+                      <a:srgbClr val="111111"/>
+                    </a:solidFill>
+                  </a:tcPr>
+                </a:tc>
+                <a:tc>
+                  <a:txBody>
+                    <a:bodyPr/>
+                    <a:lstStyle/>
+                    <a:p>
+                      <a:pPr>
+                        <a:defRPr sz="1300" b="0">
+                          <a:solidFill>
+                            <a:srgbClr val="FFFFFF"/>
+                          </a:solidFill>
+                          <a:latin typeface="Play"/>
+                          <a:ea typeface="Play"/>
+                          <a:cs typeface="Play"/>
+                        </a:defRPr>
+                      </a:pPr>
+                      <a:r>
+                        <a:t>4</a:t>
+                      </a:r>
+                    </a:p>
+                  </a:txBody>
+                  <a:tcPr>
+                    <a:solidFill>
+                      <a:srgbClr val="111111"/>
+                    </a:solidFill>
+                  </a:tcPr>
+                </a:tc>
+              </a:tr>
+              <a:tr h="533750">
+                <a:tc>
+                  <a:txBody>
+                    <a:bodyPr/>
+                    <a:lstStyle/>
+                    <a:p>
+                      <a:pPr>
+                        <a:defRPr sz="1300" b="0">
+                          <a:solidFill>
+                            <a:srgbClr val="FFFFFF"/>
+                          </a:solidFill>
+                          <a:latin typeface="Play"/>
+                          <a:ea typeface="Play"/>
+                          <a:cs typeface="Play"/>
+                        </a:defRPr>
+                      </a:pPr>
+                      <a:r>
+                        <a:t>Запросы на вёрстку/нед</a:t>
+                      </a:r>
+                    </a:p>
+                  </a:txBody>
+                  <a:tcPr>
+                    <a:solidFill>
+                      <a:srgbClr val="111111"/>
+                    </a:solidFill>
+                  </a:tcPr>
+                </a:tc>
+                <a:tc>
+                  <a:txBody>
+                    <a:bodyPr/>
+                    <a:lstStyle/>
+                    <a:p>
+                      <a:pPr>
+                        <a:defRPr sz="1300" b="0">
+                          <a:solidFill>
+                            <a:srgbClr val="FFFFFF"/>
+                          </a:solidFill>
+                          <a:latin typeface="Play"/>
+                          <a:ea typeface="Play"/>
+                          <a:cs typeface="Play"/>
+                        </a:defRPr>
+                      </a:pPr>
+                      <a:r>
+                        <a:t>11</a:t>
+                      </a:r>
+                    </a:p>
+                  </a:txBody>
+                  <a:tcPr>
+                    <a:solidFill>
+                      <a:srgbClr val="111111"/>
+                    </a:solidFill>
+                  </a:tcPr>
+                </a:tc>
+                <a:tc>
+                  <a:txBody>
+                    <a:bodyPr/>
+                    <a:lstStyle/>
+                    <a:p>
+                      <a:pPr>
+                        <a:defRPr sz="1300" b="0">
+                          <a:solidFill>
+                            <a:srgbClr val="FFFFFF"/>
+                          </a:solidFill>
+                          <a:latin typeface="Play"/>
+                          <a:ea typeface="Play"/>
+                          <a:cs typeface="Play"/>
+                        </a:defRPr>
+                      </a:pPr>
+                      <a:r>
+                        <a:t>38</a:t>
+                      </a:r>
+                    </a:p>
+                  </a:txBody>
+                  <a:tcPr>
+                    <a:solidFill>
+                      <a:srgbClr val="111111"/>
+                    </a:solidFill>
+                  </a:tcPr>
+                </a:tc>
+              </a:tr>
+              <a:tr h="533752">
+                <a:tc>
+                  <a:txBody>
+                    <a:bodyPr/>
+                    <a:lstStyle/>
+                    <a:p>
+                      <a:pPr>
+                        <a:defRPr sz="1300" b="0">
+                          <a:solidFill>
+                            <a:srgbClr val="FFFFFF"/>
+                          </a:solidFill>
+                          <a:latin typeface="Play"/>
+                          <a:ea typeface="Play"/>
+                          <a:cs typeface="Play"/>
+                        </a:defRPr>
+                      </a:pPr>
+                      <a:r>
+                        <a:t>Нарушения стиля</a:t>
+                      </a:r>
+                    </a:p>
+                  </a:txBody>
+                  <a:tcPr>
+                    <a:solidFill>
+                      <a:srgbClr val="111111"/>
+                    </a:solidFill>
+                  </a:tcPr>
+                </a:tc>
+                <a:tc>
+                  <a:txBody>
+                    <a:bodyPr/>
+                    <a:lstStyle/>
+                    <a:p>
+                      <a:pPr>
+                        <a:defRPr sz="1300" b="0">
+                          <a:solidFill>
+                            <a:srgbClr val="FFFFFF"/>
+                          </a:solidFill>
+                          <a:latin typeface="Play"/>
+                          <a:ea typeface="Play"/>
+                          <a:cs typeface="Play"/>
+                        </a:defRPr>
+                      </a:pPr>
+                      <a:r>
+                        <a:t>19</a:t>
+                      </a:r>
+                    </a:p>
+                  </a:txBody>
+                  <a:tcPr>
+                    <a:solidFill>
+                      <a:srgbClr val="111111"/>
+                    </a:solidFill>
+                  </a:tcPr>
+                </a:tc>
+                <a:tc>
+                  <a:txBody>
+                    <a:bodyPr/>
+                    <a:lstStyle/>
+                    <a:p>
+                      <a:pPr>
+                        <a:defRPr sz="1300" b="0">
+                          <a:solidFill>
+                            <a:srgbClr val="FFFFFF"/>
+                          </a:solidFill>
+                          <a:latin typeface="Play"/>
+                          <a:ea typeface="Play"/>
+                          <a:cs typeface="Play"/>
+                        </a:defRPr>
+                      </a:pPr>
+                      <a:r>
+                        <a:t>2</a:t>
+                      </a:r>
+                    </a:p>
+                  </a:txBody>
+                  <a:tcPr>
+                    <a:solidFill>
+                      <a:srgbClr val="111111"/>
+                    </a:solidFill>
+                  </a:tcPr>
+                </a:tc>
+              </a:tr>
+            </a:tbl>
+          </a:graphicData>
+        </a:graphic>
+      </p:graphicFrame>
     </p:spTree>
   </p:cSld>
   <p:clrMapOvr>

--- a/samples/VK_WorkSpace_Клиентская_конференция_Шабл__classic.pptx
+++ b/samples/VK_WorkSpace_Клиентская_конференция_Шабл__classic.pptx
@@ -15,6 +15,9 @@
     <p:sldId id="289" r:id="rId42"/>
     <p:sldId id="290" r:id="rId43"/>
     <p:sldId id="291" r:id="rId44"/>
+    <p:sldId id="292" r:id="rId45"/>
+    <p:sldId id="293" r:id="rId46"/>
+    <p:sldId id="294" r:id="rId47"/>
   </p:sldIdLst>
   <p:sldSz cy="6858000" cx="12192000"/>
   <p:notesSz cx="6858000" cy="9144000"/>
@@ -281,567 +284,6 @@
     </p:ext>
   </p:extLst>
 </p:presentation>
-</file>
-
-<file path=ppt/charts/chart1.xml><?xml version="1.0" encoding="utf-8"?>
-<c:chartSpace xmlns:c="http://schemas.openxmlformats.org/drawingml/2006/chart" xmlns:a="http://schemas.openxmlformats.org/drawingml/2006/main" xmlns:r="http://schemas.openxmlformats.org/officeDocument/2006/relationships">
-  <c:date1904 val="0"/>
-  <c:chart>
-    <c:autoTitleDeleted val="1"/>
-    <c:plotArea>
-      <c:barChart>
-        <c:barDir val="col"/>
-        <c:grouping val="clustered"/>
-        <c:ser>
-          <c:idx val="0"/>
-          <c:order val="0"/>
-          <c:tx>
-            <c:strRef>
-              <c:f>Sheet1!$B$1</c:f>
-              <c:strCache>
-                <c:ptCount val="1"/>
-                <c:pt idx="0">
-                  <c:v>Время (мин)</c:v>
-                </c:pt>
-              </c:strCache>
-            </c:strRef>
-          </c:tx>
-          <c:spPr>
-            <a:solidFill>
-              <a:srgbClr val="0077FF"/>
-            </a:solidFill>
-            <a:ln>
-              <a:solidFill>
-                <a:srgbClr val="0077FF"/>
-              </a:solidFill>
-            </a:ln>
-          </c:spPr>
-          <c:cat>
-            <c:strRef>
-              <c:f>Sheet1!$A$2:$A$3</c:f>
-              <c:strCache>
-                <c:ptCount val="2"/>
-                <c:pt idx="0">
-                  <c:v>Ручной</c:v>
-                </c:pt>
-                <c:pt idx="1">
-                  <c:v>Автоматический</c:v>
-                </c:pt>
-              </c:strCache>
-            </c:strRef>
-          </c:cat>
-          <c:val>
-            <c:numRef>
-              <c:f>Sheet1!$B$2:$B$3</c:f>
-              <c:numCache>
-                <c:formatCode>General</c:formatCode>
-                <c:ptCount val="2"/>
-                <c:pt idx="0">
-                  <c:v>186.0</c:v>
-                </c:pt>
-                <c:pt idx="1">
-                  <c:v>4.0</c:v>
-                </c:pt>
-              </c:numCache>
-            </c:numRef>
-          </c:val>
-        </c:ser>
-        <c:gapWidth val="60"/>
-        <c:axId val="-2068027336"/>
-        <c:axId val="-2113994440"/>
-      </c:barChart>
-      <c:catAx>
-        <c:axId val="-2068027336"/>
-        <c:scaling>
-          <c:orientation val="minMax"/>
-        </c:scaling>
-        <c:delete val="0"/>
-        <c:axPos val="b"/>
-        <c:majorTickMark val="out"/>
-        <c:minorTickMark val="none"/>
-        <c:tickLblPos val="nextTo"/>
-        <c:txPr>
-          <a:bodyPr/>
-          <a:lstStyle/>
-          <a:p>
-            <a:pPr>
-              <a:defRPr sz="1100" b="0">
-                <a:solidFill>
-                  <a:srgbClr val="FFFFFF"/>
-                </a:solidFill>
-                <a:latin typeface="Play"/>
-                <a:ea typeface="Play"/>
-                <a:cs typeface="Play"/>
-              </a:defRPr>
-            </a:pPr>
-          </a:p>
-        </c:txPr>
-        <c:crossAx val="-2113994440"/>
-        <c:crosses val="autoZero"/>
-        <c:auto val="1"/>
-        <c:lblAlgn val="ctr"/>
-        <c:lblOffset val="100"/>
-        <c:noMultiLvlLbl val="0"/>
-      </c:catAx>
-      <c:valAx>
-        <c:axId val="-2113994440"/>
-        <c:scaling/>
-        <c:delete val="0"/>
-        <c:axPos val="l"/>
-        <c:majorGridlines>
-          <c:spPr>
-            <a:ln w="9525">
-              <a:solidFill>
-                <a:srgbClr val="3C3C3C"/>
-              </a:solidFill>
-            </a:ln>
-          </c:spPr>
-        </c:majorGridlines>
-        <c:title>
-          <c:tx>
-            <c:rich>
-              <a:bodyPr/>
-              <a:lstStyle/>
-              <a:p>
-                <a:pPr>
-                  <a:defRPr sz="1100" b="0">
-                    <a:solidFill>
-                      <a:srgbClr val="FFFFFF"/>
-                    </a:solidFill>
-                    <a:latin typeface="Play"/>
-                    <a:ea typeface="Play"/>
-                    <a:cs typeface="Play"/>
-                  </a:defRPr>
-                </a:pPr>
-                <a:r>
-                  <a:t>мин</a:t>
-                </a:r>
-              </a:p>
-            </c:rich>
-          </c:tx>
-          <c:layout/>
-          <c:overlay val="0"/>
-        </c:title>
-        <c:majorTickMark val="out"/>
-        <c:minorTickMark val="none"/>
-        <c:tickLblPos val="nextTo"/>
-        <c:txPr>
-          <a:bodyPr/>
-          <a:lstStyle/>
-          <a:p>
-            <a:pPr>
-              <a:defRPr sz="1100" b="0">
-                <a:solidFill>
-                  <a:srgbClr val="FFFFFF"/>
-                </a:solidFill>
-                <a:latin typeface="Play"/>
-                <a:ea typeface="Play"/>
-                <a:cs typeface="Play"/>
-              </a:defRPr>
-            </a:pPr>
-          </a:p>
-        </c:txPr>
-        <c:crossAx val="-2068027336"/>
-        <c:crosses val="autoZero"/>
-      </c:valAx>
-    </c:plotArea>
-    <c:dispBlanksAs val="gap"/>
-  </c:chart>
-  <c:txPr>
-    <a:bodyPr/>
-    <a:lstStyle/>
-    <a:p>
-      <a:pPr>
-        <a:defRPr sz="1200" b="0">
-          <a:solidFill>
-            <a:srgbClr val="FFFFFF"/>
-          </a:solidFill>
-          <a:latin typeface="Play"/>
-          <a:ea typeface="Play"/>
-          <a:cs typeface="Play"/>
-        </a:defRPr>
-      </a:pPr>
-      <a:endParaRPr lang="en-US"/>
-    </a:p>
-  </c:txPr>
-  <c:externalData r:id="rId1">
-    <c:autoUpdate val="0"/>
-  </c:externalData>
-</c:chartSpace>
-</file>
-
-<file path=ppt/charts/chart2.xml><?xml version="1.0" encoding="utf-8"?>
-<c:chartSpace xmlns:c="http://schemas.openxmlformats.org/drawingml/2006/chart" xmlns:a="http://schemas.openxmlformats.org/drawingml/2006/main" xmlns:r="http://schemas.openxmlformats.org/officeDocument/2006/relationships">
-  <c:date1904 val="0"/>
-  <c:chart>
-    <c:autoTitleDeleted val="1"/>
-    <c:plotArea>
-      <c:barChart>
-        <c:barDir val="col"/>
-        <c:grouping val="clustered"/>
-        <c:ser>
-          <c:idx val="0"/>
-          <c:order val="0"/>
-          <c:tx>
-            <c:strRef>
-              <c:f>Sheet1!$B$1</c:f>
-              <c:strCache>
-                <c:ptCount val="1"/>
-                <c:pt idx="0">
-                  <c:v>Время (мин)</c:v>
-                </c:pt>
-              </c:strCache>
-            </c:strRef>
-          </c:tx>
-          <c:spPr>
-            <a:solidFill>
-              <a:srgbClr val="0077FF"/>
-            </a:solidFill>
-            <a:ln>
-              <a:solidFill>
-                <a:srgbClr val="0077FF"/>
-              </a:solidFill>
-            </a:ln>
-          </c:spPr>
-          <c:cat>
-            <c:strRef>
-              <c:f>Sheet1!$A$2:$A$3</c:f>
-              <c:strCache>
-                <c:ptCount val="2"/>
-                <c:pt idx="0">
-                  <c:v>Ручной</c:v>
-                </c:pt>
-                <c:pt idx="1">
-                  <c:v>Автоматический</c:v>
-                </c:pt>
-              </c:strCache>
-            </c:strRef>
-          </c:cat>
-          <c:val>
-            <c:numRef>
-              <c:f>Sheet1!$B$2:$B$3</c:f>
-              <c:numCache>
-                <c:formatCode>General</c:formatCode>
-                <c:ptCount val="2"/>
-                <c:pt idx="0">
-                  <c:v>186.0</c:v>
-                </c:pt>
-                <c:pt idx="1">
-                  <c:v>4.0</c:v>
-                </c:pt>
-              </c:numCache>
-            </c:numRef>
-          </c:val>
-        </c:ser>
-        <c:gapWidth val="60"/>
-        <c:axId val="-2068027336"/>
-        <c:axId val="-2113994440"/>
-      </c:barChart>
-      <c:catAx>
-        <c:axId val="-2068027336"/>
-        <c:scaling>
-          <c:orientation val="minMax"/>
-        </c:scaling>
-        <c:delete val="0"/>
-        <c:axPos val="b"/>
-        <c:majorTickMark val="out"/>
-        <c:minorTickMark val="none"/>
-        <c:tickLblPos val="nextTo"/>
-        <c:txPr>
-          <a:bodyPr/>
-          <a:lstStyle/>
-          <a:p>
-            <a:pPr>
-              <a:defRPr sz="1100" b="0">
-                <a:solidFill>
-                  <a:srgbClr val="FFFFFF"/>
-                </a:solidFill>
-                <a:latin typeface="Play"/>
-                <a:ea typeface="Play"/>
-                <a:cs typeface="Play"/>
-              </a:defRPr>
-            </a:pPr>
-          </a:p>
-        </c:txPr>
-        <c:crossAx val="-2113994440"/>
-        <c:crosses val="autoZero"/>
-        <c:auto val="1"/>
-        <c:lblAlgn val="ctr"/>
-        <c:lblOffset val="100"/>
-        <c:noMultiLvlLbl val="0"/>
-      </c:catAx>
-      <c:valAx>
-        <c:axId val="-2113994440"/>
-        <c:scaling/>
-        <c:delete val="0"/>
-        <c:axPos val="l"/>
-        <c:majorGridlines>
-          <c:spPr>
-            <a:ln w="9525">
-              <a:solidFill>
-                <a:srgbClr val="3C3C3C"/>
-              </a:solidFill>
-            </a:ln>
-          </c:spPr>
-        </c:majorGridlines>
-        <c:title>
-          <c:tx>
-            <c:rich>
-              <a:bodyPr/>
-              <a:lstStyle/>
-              <a:p>
-                <a:pPr>
-                  <a:defRPr sz="1100" b="0">
-                    <a:solidFill>
-                      <a:srgbClr val="FFFFFF"/>
-                    </a:solidFill>
-                    <a:latin typeface="Play"/>
-                    <a:ea typeface="Play"/>
-                    <a:cs typeface="Play"/>
-                  </a:defRPr>
-                </a:pPr>
-                <a:r>
-                  <a:t>мин</a:t>
-                </a:r>
-              </a:p>
-            </c:rich>
-          </c:tx>
-          <c:layout/>
-          <c:overlay val="0"/>
-        </c:title>
-        <c:majorTickMark val="out"/>
-        <c:minorTickMark val="none"/>
-        <c:tickLblPos val="nextTo"/>
-        <c:txPr>
-          <a:bodyPr/>
-          <a:lstStyle/>
-          <a:p>
-            <a:pPr>
-              <a:defRPr sz="1100" b="0">
-                <a:solidFill>
-                  <a:srgbClr val="FFFFFF"/>
-                </a:solidFill>
-                <a:latin typeface="Play"/>
-                <a:ea typeface="Play"/>
-                <a:cs typeface="Play"/>
-              </a:defRPr>
-            </a:pPr>
-          </a:p>
-        </c:txPr>
-        <c:crossAx val="-2068027336"/>
-        <c:crosses val="autoZero"/>
-      </c:valAx>
-    </c:plotArea>
-    <c:dispBlanksAs val="gap"/>
-  </c:chart>
-  <c:txPr>
-    <a:bodyPr/>
-    <a:lstStyle/>
-    <a:p>
-      <a:pPr>
-        <a:defRPr sz="1200" b="0">
-          <a:solidFill>
-            <a:srgbClr val="FFFFFF"/>
-          </a:solidFill>
-          <a:latin typeface="Play"/>
-          <a:ea typeface="Play"/>
-          <a:cs typeface="Play"/>
-        </a:defRPr>
-      </a:pPr>
-      <a:endParaRPr lang="en-US"/>
-    </a:p>
-  </c:txPr>
-  <c:externalData r:id="rId1">
-    <c:autoUpdate val="0"/>
-  </c:externalData>
-</c:chartSpace>
-</file>
-
-<file path=ppt/charts/chart3.xml><?xml version="1.0" encoding="utf-8"?>
-<c:chartSpace xmlns:c="http://schemas.openxmlformats.org/drawingml/2006/chart" xmlns:a="http://schemas.openxmlformats.org/drawingml/2006/main" xmlns:r="http://schemas.openxmlformats.org/officeDocument/2006/relationships">
-  <c:date1904 val="0"/>
-  <c:chart>
-    <c:autoTitleDeleted val="1"/>
-    <c:plotArea>
-      <c:barChart>
-        <c:barDir val="col"/>
-        <c:grouping val="clustered"/>
-        <c:ser>
-          <c:idx val="0"/>
-          <c:order val="0"/>
-          <c:tx>
-            <c:strRef>
-              <c:f>Sheet1!$B$1</c:f>
-              <c:strCache>
-                <c:ptCount val="1"/>
-                <c:pt idx="0">
-                  <c:v>Нарушения (колоды)</c:v>
-                </c:pt>
-              </c:strCache>
-            </c:strRef>
-          </c:tx>
-          <c:spPr>
-            <a:solidFill>
-              <a:srgbClr val="0077FF"/>
-            </a:solidFill>
-            <a:ln>
-              <a:solidFill>
-                <a:srgbClr val="0077FF"/>
-              </a:solidFill>
-            </a:ln>
-          </c:spPr>
-          <c:cat>
-            <c:strRef>
-              <c:f>Sheet1!$A$2:$A$3</c:f>
-              <c:strCache>
-                <c:ptCount val="2"/>
-                <c:pt idx="0">
-                  <c:v>Ручной</c:v>
-                </c:pt>
-                <c:pt idx="1">
-                  <c:v>Автоматический</c:v>
-                </c:pt>
-              </c:strCache>
-            </c:strRef>
-          </c:cat>
-          <c:val>
-            <c:numRef>
-              <c:f>Sheet1!$B$2:$B$3</c:f>
-              <c:numCache>
-                <c:formatCode>General</c:formatCode>
-                <c:ptCount val="2"/>
-                <c:pt idx="0">
-                  <c:v>19.0</c:v>
-                </c:pt>
-                <c:pt idx="1">
-                  <c:v>2.0</c:v>
-                </c:pt>
-              </c:numCache>
-            </c:numRef>
-          </c:val>
-        </c:ser>
-        <c:gapWidth val="60"/>
-        <c:axId val="-2068027336"/>
-        <c:axId val="-2113994440"/>
-      </c:barChart>
-      <c:catAx>
-        <c:axId val="-2068027336"/>
-        <c:scaling>
-          <c:orientation val="minMax"/>
-        </c:scaling>
-        <c:delete val="0"/>
-        <c:axPos val="b"/>
-        <c:majorTickMark val="out"/>
-        <c:minorTickMark val="none"/>
-        <c:tickLblPos val="nextTo"/>
-        <c:txPr>
-          <a:bodyPr/>
-          <a:lstStyle/>
-          <a:p>
-            <a:pPr>
-              <a:defRPr sz="1100" b="0">
-                <a:solidFill>
-                  <a:srgbClr val="FFFFFF"/>
-                </a:solidFill>
-                <a:latin typeface="Play"/>
-                <a:ea typeface="Play"/>
-                <a:cs typeface="Play"/>
-              </a:defRPr>
-            </a:pPr>
-          </a:p>
-        </c:txPr>
-        <c:crossAx val="-2113994440"/>
-        <c:crosses val="autoZero"/>
-        <c:auto val="1"/>
-        <c:lblAlgn val="ctr"/>
-        <c:lblOffset val="100"/>
-        <c:noMultiLvlLbl val="0"/>
-      </c:catAx>
-      <c:valAx>
-        <c:axId val="-2113994440"/>
-        <c:scaling/>
-        <c:delete val="0"/>
-        <c:axPos val="l"/>
-        <c:majorGridlines>
-          <c:spPr>
-            <a:ln w="9525">
-              <a:solidFill>
-                <a:srgbClr val="3C3C3C"/>
-              </a:solidFill>
-            </a:ln>
-          </c:spPr>
-        </c:majorGridlines>
-        <c:title>
-          <c:tx>
-            <c:rich>
-              <a:bodyPr/>
-              <a:lstStyle/>
-              <a:p>
-                <a:pPr>
-                  <a:defRPr sz="1100" b="0">
-                    <a:solidFill>
-                      <a:srgbClr val="FFFFFF"/>
-                    </a:solidFill>
-                    <a:latin typeface="Play"/>
-                    <a:ea typeface="Play"/>
-                    <a:cs typeface="Play"/>
-                  </a:defRPr>
-                </a:pPr>
-                <a:r>
-                  <a:t>колоды</a:t>
-                </a:r>
-              </a:p>
-            </c:rich>
-          </c:tx>
-          <c:layout/>
-          <c:overlay val="0"/>
-        </c:title>
-        <c:majorTickMark val="out"/>
-        <c:minorTickMark val="none"/>
-        <c:tickLblPos val="nextTo"/>
-        <c:txPr>
-          <a:bodyPr/>
-          <a:lstStyle/>
-          <a:p>
-            <a:pPr>
-              <a:defRPr sz="1100" b="0">
-                <a:solidFill>
-                  <a:srgbClr val="FFFFFF"/>
-                </a:solidFill>
-                <a:latin typeface="Play"/>
-                <a:ea typeface="Play"/>
-                <a:cs typeface="Play"/>
-              </a:defRPr>
-            </a:pPr>
-          </a:p>
-        </c:txPr>
-        <c:crossAx val="-2068027336"/>
-        <c:crosses val="autoZero"/>
-      </c:valAx>
-    </c:plotArea>
-    <c:dispBlanksAs val="gap"/>
-  </c:chart>
-  <c:txPr>
-    <a:bodyPr/>
-    <a:lstStyle/>
-    <a:p>
-      <a:pPr>
-        <a:defRPr sz="1200" b="0">
-          <a:solidFill>
-            <a:srgbClr val="FFFFFF"/>
-          </a:solidFill>
-          <a:latin typeface="Play"/>
-          <a:ea typeface="Play"/>
-          <a:cs typeface="Play"/>
-        </a:defRPr>
-      </a:pPr>
-      <a:endParaRPr lang="en-US"/>
-    </a:p>
-  </c:txPr>
-  <c:externalData r:id="rId1">
-    <c:autoUpdate val="0"/>
-  </c:externalData>
-</c:chartSpace>
 </file>
 
 <file path=ppt/notesMasters/notesMaster1.xml><?xml version="1.0" encoding="utf-8"?>
@@ -2409,6 +1851,204 @@
 </file>
 
 <file path=ppt/notesSlides/notesSlide36.xml><?xml version="1.0" encoding="utf-8"?>
+<p:notes xmlns:a="http://schemas.openxmlformats.org/drawingml/2006/main" xmlns:p="http://schemas.openxmlformats.org/presentationml/2006/main" xmlns:r="http://schemas.openxmlformats.org/officeDocument/2006/relationships">
+  <p:cSld>
+    <p:spTree>
+      <p:nvGrpSpPr>
+        <p:cNvPr id="1" name=""/>
+        <p:cNvGrpSpPr/>
+        <p:nvPr/>
+      </p:nvGrpSpPr>
+      <p:grpSpPr>
+        <a:xfrm>
+          <a:off x="0" y="0"/>
+          <a:ext cx="0" cy="0"/>
+          <a:chOff x="0" y="0"/>
+          <a:chExt cx="0" cy="0"/>
+        </a:xfrm>
+      </p:grpSpPr>
+      <p:sp>
+        <p:nvSpPr>
+          <p:cNvPr id="2" name="Slide Image Placeholder 1"/>
+          <p:cNvSpPr>
+            <a:spLocks noGrp="1"/>
+          </p:cNvSpPr>
+          <p:nvPr>
+            <p:ph type="sldImg" idx="3"/>
+          </p:nvPr>
+        </p:nvSpPr>
+        <p:spPr/>
+      </p:sp>
+      <p:sp>
+        <p:nvSpPr>
+          <p:cNvPr id="3" name="Notes Placeholder 2"/>
+          <p:cNvSpPr>
+            <a:spLocks noGrp="1"/>
+          </p:cNvSpPr>
+          <p:nvPr>
+            <p:ph type="body" idx="1"/>
+          </p:nvPr>
+        </p:nvSpPr>
+        <p:spPr/>
+        <p:txBody>
+          <a:bodyPr/>
+          <a:lstStyle/>
+          <a:p/>
+        </p:txBody>
+      </p:sp>
+      <p:sp>
+        <p:nvSpPr>
+          <p:cNvPr id="4" name="Slide Number Placeholder 3"/>
+          <p:cNvSpPr>
+            <a:spLocks noGrp="1"/>
+          </p:cNvSpPr>
+          <p:nvPr>
+            <p:ph type="sldNum" idx="12"/>
+          </p:nvPr>
+        </p:nvSpPr>
+        <p:spPr/>
+      </p:sp>
+    </p:spTree>
+  </p:cSld>
+  <p:clrMapOvr>
+    <a:masterClrMapping/>
+  </p:clrMapOvr>
+</p:notes>
+</file>
+
+<file path=ppt/notesSlides/notesSlide37.xml><?xml version="1.0" encoding="utf-8"?>
+<p:notes xmlns:a="http://schemas.openxmlformats.org/drawingml/2006/main" xmlns:p="http://schemas.openxmlformats.org/presentationml/2006/main" xmlns:r="http://schemas.openxmlformats.org/officeDocument/2006/relationships">
+  <p:cSld>
+    <p:spTree>
+      <p:nvGrpSpPr>
+        <p:cNvPr id="1" name=""/>
+        <p:cNvGrpSpPr/>
+        <p:nvPr/>
+      </p:nvGrpSpPr>
+      <p:grpSpPr>
+        <a:xfrm>
+          <a:off x="0" y="0"/>
+          <a:ext cx="0" cy="0"/>
+          <a:chOff x="0" y="0"/>
+          <a:chExt cx="0" cy="0"/>
+        </a:xfrm>
+      </p:grpSpPr>
+      <p:sp>
+        <p:nvSpPr>
+          <p:cNvPr id="2" name="Slide Image Placeholder 1"/>
+          <p:cNvSpPr>
+            <a:spLocks noGrp="1"/>
+          </p:cNvSpPr>
+          <p:nvPr>
+            <p:ph type="sldImg" idx="3"/>
+          </p:nvPr>
+        </p:nvSpPr>
+        <p:spPr/>
+      </p:sp>
+      <p:sp>
+        <p:nvSpPr>
+          <p:cNvPr id="3" name="Notes Placeholder 2"/>
+          <p:cNvSpPr>
+            <a:spLocks noGrp="1"/>
+          </p:cNvSpPr>
+          <p:nvPr>
+            <p:ph type="body" idx="1"/>
+          </p:nvPr>
+        </p:nvSpPr>
+        <p:spPr/>
+        <p:txBody>
+          <a:bodyPr/>
+          <a:lstStyle/>
+          <a:p/>
+        </p:txBody>
+      </p:sp>
+      <p:sp>
+        <p:nvSpPr>
+          <p:cNvPr id="4" name="Slide Number Placeholder 3"/>
+          <p:cNvSpPr>
+            <a:spLocks noGrp="1"/>
+          </p:cNvSpPr>
+          <p:nvPr>
+            <p:ph type="sldNum" idx="12"/>
+          </p:nvPr>
+        </p:nvSpPr>
+        <p:spPr/>
+      </p:sp>
+    </p:spTree>
+  </p:cSld>
+  <p:clrMapOvr>
+    <a:masterClrMapping/>
+  </p:clrMapOvr>
+</p:notes>
+</file>
+
+<file path=ppt/notesSlides/notesSlide38.xml><?xml version="1.0" encoding="utf-8"?>
+<p:notes xmlns:a="http://schemas.openxmlformats.org/drawingml/2006/main" xmlns:p="http://schemas.openxmlformats.org/presentationml/2006/main" xmlns:r="http://schemas.openxmlformats.org/officeDocument/2006/relationships">
+  <p:cSld>
+    <p:spTree>
+      <p:nvGrpSpPr>
+        <p:cNvPr id="1" name=""/>
+        <p:cNvGrpSpPr/>
+        <p:nvPr/>
+      </p:nvGrpSpPr>
+      <p:grpSpPr>
+        <a:xfrm>
+          <a:off x="0" y="0"/>
+          <a:ext cx="0" cy="0"/>
+          <a:chOff x="0" y="0"/>
+          <a:chExt cx="0" cy="0"/>
+        </a:xfrm>
+      </p:grpSpPr>
+      <p:sp>
+        <p:nvSpPr>
+          <p:cNvPr id="2" name="Slide Image Placeholder 1"/>
+          <p:cNvSpPr>
+            <a:spLocks noGrp="1"/>
+          </p:cNvSpPr>
+          <p:nvPr>
+            <p:ph type="sldImg" idx="3"/>
+          </p:nvPr>
+        </p:nvSpPr>
+        <p:spPr/>
+      </p:sp>
+      <p:sp>
+        <p:nvSpPr>
+          <p:cNvPr id="3" name="Notes Placeholder 2"/>
+          <p:cNvSpPr>
+            <a:spLocks noGrp="1"/>
+          </p:cNvSpPr>
+          <p:nvPr>
+            <p:ph type="body" idx="1"/>
+          </p:nvPr>
+        </p:nvSpPr>
+        <p:spPr/>
+        <p:txBody>
+          <a:bodyPr/>
+          <a:lstStyle/>
+          <a:p/>
+        </p:txBody>
+      </p:sp>
+      <p:sp>
+        <p:nvSpPr>
+          <p:cNvPr id="4" name="Slide Number Placeholder 3"/>
+          <p:cNvSpPr>
+            <a:spLocks noGrp="1"/>
+          </p:cNvSpPr>
+          <p:nvPr>
+            <p:ph type="sldNum" idx="12"/>
+          </p:nvPr>
+        </p:nvSpPr>
+        <p:spPr/>
+      </p:sp>
+    </p:spTree>
+  </p:cSld>
+  <p:clrMapOvr>
+    <a:masterClrMapping/>
+  </p:clrMapOvr>
+</p:notes>
+</file>
+
+<file path=ppt/notesSlides/notesSlide39.xml><?xml version="1.0" encoding="utf-8"?>
 <p:notes xmlns:a="http://schemas.openxmlformats.org/drawingml/2006/main" xmlns:p="http://schemas.openxmlformats.org/presentationml/2006/main" xmlns:r="http://schemas.openxmlformats.org/officeDocument/2006/relationships">
   <p:cSld>
     <p:spTree>
@@ -6751,7 +6391,7 @@
                 <a:ea typeface="Play"/>
                 <a:cs typeface="Play"/>
               </a:rPr>
-              <a:t>Защита инициативы: сервис автоматической вёрстки презентаций</a:t>
+              <a:t>Автоматическая вёрстка презентаций</a:t>
             </a:r>
           </a:p>
         </p:txBody>
@@ -6867,7 +6507,7 @@
                 <a:ea typeface="Play"/>
                 <a:cs typeface="Play"/>
               </a:rPr>
-              <a:t>• 12‑слайдная колода занимает 186 мин</a:t>
+              <a:t>• 42 колоды, 186 мин сборки</a:t>
             </a:r>
           </a:p>
           <a:p>
@@ -6893,7 +6533,7 @@
                 <a:ea typeface="Play"/>
                 <a:cs typeface="Play"/>
               </a:rPr>
-              <a:t>• 74 мин на правки после ревью</a:t>
+              <a:t>• 74 мин правок</a:t>
             </a:r>
           </a:p>
           <a:p>
@@ -6919,7 +6559,7 @@
                 <a:ea typeface="Play"/>
                 <a:cs typeface="Play"/>
               </a:rPr>
-              <a:t>• 19 из 42 колод нарушают фирменный стиль</a:t>
+              <a:t>• 19 нарушений фирменного стиля</a:t>
             </a:r>
           </a:p>
           <a:p>
@@ -6945,40 +6585,14 @@
                 <a:ea typeface="Play"/>
                 <a:cs typeface="Play"/>
               </a:rPr>
-              <a:t>• 4 чел. закрывают 11 запросов/нед</a:t>
-            </a:r>
-          </a:p>
-          <a:p>
-            <a:pPr algn="l">
-              <a:spcAft>
-                <a:spcPts val="300"/>
-              </a:spcAft>
-              <a:defRPr sz="1600">
-                <a:solidFill>
-                  <a:srgbClr val="FFFFFF"/>
-                </a:solidFill>
-                <a:latin typeface="Play"/>
-                <a:ea typeface="Play"/>
-                <a:cs typeface="Play"/>
-              </a:defRPr>
-            </a:pPr>
-            <a:r>
-              <a:rPr sz="1600">
-                <a:solidFill>
-                  <a:srgbClr val="FFFFFF"/>
-                </a:solidFill>
-                <a:latin typeface="Play"/>
-                <a:ea typeface="Play"/>
-                <a:cs typeface="Play"/>
-              </a:rPr>
-              <a:t>• Средний срок ожидания 6 рабочих дней</a:t>
+              <a:t>• 4 человека, 11 запросов/нед, 6 дней ожидания</a:t>
             </a:r>
           </a:p>
         </p:txBody>
       </p:sp>
       <p:graphicFrame>
         <p:nvGraphicFramePr>
-          <p:cNvPr id="4" name="Chart 3"/>
+          <p:cNvPr id="4" name="Table 3"/>
           <p:cNvGraphicFramePr>
             <a:graphicFrameLocks noGrp="1"/>
           </p:cNvGraphicFramePr>
@@ -6989,8 +6603,340 @@
           <a:ext cx="11310884" cy="2337343"/>
         </p:xfrm>
         <a:graphic>
-          <a:graphicData uri="http://schemas.openxmlformats.org/drawingml/2006/chart">
-            <c:chart xmlns:c="http://schemas.openxmlformats.org/drawingml/2006/chart" r:id="rId2"/>
+          <a:graphicData uri="http://schemas.openxmlformats.org/drawingml/2006/table">
+            <a:tbl>
+              <a:tblPr firstRow="1" bandRow="1">
+                <a:tableStyleId>{5C22544A-7EE6-4342-B048-85BDC9FD1C3A}</a:tableStyleId>
+              </a:tblPr>
+              <a:tblGrid>
+                <a:gridCol w="5655442"/>
+                <a:gridCol w="5655442"/>
+              </a:tblGrid>
+              <a:tr h="389557">
+                <a:tc>
+                  <a:txBody>
+                    <a:bodyPr/>
+                    <a:lstStyle/>
+                    <a:p>
+                      <a:pPr>
+                        <a:defRPr sz="1300" b="1">
+                          <a:solidFill>
+                            <a:srgbClr val="FFFFFF"/>
+                          </a:solidFill>
+                          <a:latin typeface="Play"/>
+                          <a:ea typeface="Play"/>
+                          <a:cs typeface="Play"/>
+                        </a:defRPr>
+                      </a:pPr>
+                      <a:r>
+                        <a:t>Показатель</a:t>
+                      </a:r>
+                    </a:p>
+                  </a:txBody>
+                  <a:tcPr>
+                    <a:solidFill>
+                      <a:srgbClr val="0077FF"/>
+                    </a:solidFill>
+                  </a:tcPr>
+                </a:tc>
+                <a:tc>
+                  <a:txBody>
+                    <a:bodyPr/>
+                    <a:lstStyle/>
+                    <a:p>
+                      <a:pPr>
+                        <a:defRPr sz="1300" b="1">
+                          <a:solidFill>
+                            <a:srgbClr val="FFFFFF"/>
+                          </a:solidFill>
+                          <a:latin typeface="Play"/>
+                          <a:ea typeface="Play"/>
+                          <a:cs typeface="Play"/>
+                        </a:defRPr>
+                      </a:pPr>
+                      <a:r>
+                        <a:t>Значение</a:t>
+                      </a:r>
+                    </a:p>
+                  </a:txBody>
+                  <a:tcPr>
+                    <a:solidFill>
+                      <a:srgbClr val="0077FF"/>
+                    </a:solidFill>
+                  </a:tcPr>
+                </a:tc>
+              </a:tr>
+              <a:tr h="389557">
+                <a:tc>
+                  <a:txBody>
+                    <a:bodyPr/>
+                    <a:lstStyle/>
+                    <a:p>
+                      <a:pPr>
+                        <a:defRPr sz="1300" b="0">
+                          <a:solidFill>
+                            <a:srgbClr val="FFFFFF"/>
+                          </a:solidFill>
+                          <a:latin typeface="Play"/>
+                          <a:ea typeface="Play"/>
+                          <a:cs typeface="Play"/>
+                        </a:defRPr>
+                      </a:pPr>
+                      <a:r>
+                        <a:t>Сборка</a:t>
+                      </a:r>
+                    </a:p>
+                  </a:txBody>
+                  <a:tcPr>
+                    <a:solidFill>
+                      <a:srgbClr val="111111"/>
+                    </a:solidFill>
+                  </a:tcPr>
+                </a:tc>
+                <a:tc>
+                  <a:txBody>
+                    <a:bodyPr/>
+                    <a:lstStyle/>
+                    <a:p>
+                      <a:pPr>
+                        <a:defRPr sz="1300" b="0">
+                          <a:solidFill>
+                            <a:srgbClr val="FFFFFF"/>
+                          </a:solidFill>
+                          <a:latin typeface="Play"/>
+                          <a:ea typeface="Play"/>
+                          <a:cs typeface="Play"/>
+                        </a:defRPr>
+                      </a:pPr>
+                      <a:r>
+                        <a:t>186 мин</a:t>
+                      </a:r>
+                    </a:p>
+                  </a:txBody>
+                  <a:tcPr>
+                    <a:solidFill>
+                      <a:srgbClr val="111111"/>
+                    </a:solidFill>
+                  </a:tcPr>
+                </a:tc>
+              </a:tr>
+              <a:tr h="389557">
+                <a:tc>
+                  <a:txBody>
+                    <a:bodyPr/>
+                    <a:lstStyle/>
+                    <a:p>
+                      <a:pPr>
+                        <a:defRPr sz="1300" b="0">
+                          <a:solidFill>
+                            <a:srgbClr val="FFFFFF"/>
+                          </a:solidFill>
+                          <a:latin typeface="Play"/>
+                          <a:ea typeface="Play"/>
+                          <a:cs typeface="Play"/>
+                        </a:defRPr>
+                      </a:pPr>
+                      <a:r>
+                        <a:t>Правки</a:t>
+                      </a:r>
+                    </a:p>
+                  </a:txBody>
+                  <a:tcPr>
+                    <a:solidFill>
+                      <a:srgbClr val="111111"/>
+                    </a:solidFill>
+                  </a:tcPr>
+                </a:tc>
+                <a:tc>
+                  <a:txBody>
+                    <a:bodyPr/>
+                    <a:lstStyle/>
+                    <a:p>
+                      <a:pPr>
+                        <a:defRPr sz="1300" b="0">
+                          <a:solidFill>
+                            <a:srgbClr val="FFFFFF"/>
+                          </a:solidFill>
+                          <a:latin typeface="Play"/>
+                          <a:ea typeface="Play"/>
+                          <a:cs typeface="Play"/>
+                        </a:defRPr>
+                      </a:pPr>
+                      <a:r>
+                        <a:t>74 мин</a:t>
+                      </a:r>
+                    </a:p>
+                  </a:txBody>
+                  <a:tcPr>
+                    <a:solidFill>
+                      <a:srgbClr val="111111"/>
+                    </a:solidFill>
+                  </a:tcPr>
+                </a:tc>
+              </a:tr>
+              <a:tr h="389557">
+                <a:tc>
+                  <a:txBody>
+                    <a:bodyPr/>
+                    <a:lstStyle/>
+                    <a:p>
+                      <a:pPr>
+                        <a:defRPr sz="1300" b="0">
+                          <a:solidFill>
+                            <a:srgbClr val="FFFFFF"/>
+                          </a:solidFill>
+                          <a:latin typeface="Play"/>
+                          <a:ea typeface="Play"/>
+                          <a:cs typeface="Play"/>
+                        </a:defRPr>
+                      </a:pPr>
+                      <a:r>
+                        <a:t>Нарушения</a:t>
+                      </a:r>
+                    </a:p>
+                  </a:txBody>
+                  <a:tcPr>
+                    <a:solidFill>
+                      <a:srgbClr val="111111"/>
+                    </a:solidFill>
+                  </a:tcPr>
+                </a:tc>
+                <a:tc>
+                  <a:txBody>
+                    <a:bodyPr/>
+                    <a:lstStyle/>
+                    <a:p>
+                      <a:pPr>
+                        <a:defRPr sz="1300" b="0">
+                          <a:solidFill>
+                            <a:srgbClr val="FFFFFF"/>
+                          </a:solidFill>
+                          <a:latin typeface="Play"/>
+                          <a:ea typeface="Play"/>
+                          <a:cs typeface="Play"/>
+                        </a:defRPr>
+                      </a:pPr>
+                      <a:r>
+                        <a:t>19 из 42</a:t>
+                      </a:r>
+                    </a:p>
+                  </a:txBody>
+                  <a:tcPr>
+                    <a:solidFill>
+                      <a:srgbClr val="111111"/>
+                    </a:solidFill>
+                  </a:tcPr>
+                </a:tc>
+              </a:tr>
+              <a:tr h="389557">
+                <a:tc>
+                  <a:txBody>
+                    <a:bodyPr/>
+                    <a:lstStyle/>
+                    <a:p>
+                      <a:pPr>
+                        <a:defRPr sz="1300" b="0">
+                          <a:solidFill>
+                            <a:srgbClr val="FFFFFF"/>
+                          </a:solidFill>
+                          <a:latin typeface="Play"/>
+                          <a:ea typeface="Play"/>
+                          <a:cs typeface="Play"/>
+                        </a:defRPr>
+                      </a:pPr>
+                      <a:r>
+                        <a:t>Запросы</a:t>
+                      </a:r>
+                    </a:p>
+                  </a:txBody>
+                  <a:tcPr>
+                    <a:solidFill>
+                      <a:srgbClr val="111111"/>
+                    </a:solidFill>
+                  </a:tcPr>
+                </a:tc>
+                <a:tc>
+                  <a:txBody>
+                    <a:bodyPr/>
+                    <a:lstStyle/>
+                    <a:p>
+                      <a:pPr>
+                        <a:defRPr sz="1300" b="0">
+                          <a:solidFill>
+                            <a:srgbClr val="FFFFFF"/>
+                          </a:solidFill>
+                          <a:latin typeface="Play"/>
+                          <a:ea typeface="Play"/>
+                          <a:cs typeface="Play"/>
+                        </a:defRPr>
+                      </a:pPr>
+                      <a:r>
+                        <a:t>11/нед</a:t>
+                      </a:r>
+                    </a:p>
+                  </a:txBody>
+                  <a:tcPr>
+                    <a:solidFill>
+                      <a:srgbClr val="111111"/>
+                    </a:solidFill>
+                  </a:tcPr>
+                </a:tc>
+              </a:tr>
+              <a:tr h="389558">
+                <a:tc>
+                  <a:txBody>
+                    <a:bodyPr/>
+                    <a:lstStyle/>
+                    <a:p>
+                      <a:pPr>
+                        <a:defRPr sz="1300" b="0">
+                          <a:solidFill>
+                            <a:srgbClr val="FFFFFF"/>
+                          </a:solidFill>
+                          <a:latin typeface="Play"/>
+                          <a:ea typeface="Play"/>
+                          <a:cs typeface="Play"/>
+                        </a:defRPr>
+                      </a:pPr>
+                      <a:r>
+                        <a:t>Ожидание</a:t>
+                      </a:r>
+                    </a:p>
+                  </a:txBody>
+                  <a:tcPr>
+                    <a:solidFill>
+                      <a:srgbClr val="111111"/>
+                    </a:solidFill>
+                  </a:tcPr>
+                </a:tc>
+                <a:tc>
+                  <a:txBody>
+                    <a:bodyPr/>
+                    <a:lstStyle/>
+                    <a:p>
+                      <a:pPr>
+                        <a:defRPr sz="1300" b="0">
+                          <a:solidFill>
+                            <a:srgbClr val="FFFFFF"/>
+                          </a:solidFill>
+                          <a:latin typeface="Play"/>
+                          <a:ea typeface="Play"/>
+                          <a:cs typeface="Play"/>
+                        </a:defRPr>
+                      </a:pPr>
+                      <a:r>
+                        <a:t>6 дней</a:t>
+                      </a:r>
+                    </a:p>
+                  </a:txBody>
+                  <a:tcPr>
+                    <a:solidFill>
+                      <a:srgbClr val="111111"/>
+                    </a:solidFill>
+                  </a:tcPr>
+                </a:tc>
+              </a:tr>
+            </a:tbl>
           </a:graphicData>
         </a:graphic>
       </p:graphicFrame>
@@ -7180,7 +7126,7 @@
         <p:spPr>
           <a:xfrm>
             <a:off x="427817" y="1837052"/>
-            <a:ext cx="11312347" cy="1636867"/>
+            <a:ext cx="11312347" cy="1341120"/>
           </a:xfrm>
           <a:prstGeom prst="rect">
             <a:avLst/>
@@ -7197,7 +7143,7 @@
               <a:spcAft>
                 <a:spcPts val="300"/>
               </a:spcAft>
-              <a:defRPr sz="1800">
+              <a:defRPr sz="1600">
                 <a:solidFill>
                   <a:srgbClr val="FFFFFF"/>
                 </a:solidFill>
@@ -7207,7 +7153,7 @@
               </a:defRPr>
             </a:pPr>
             <a:r>
-              <a:rPr sz="1800">
+              <a:rPr sz="1600">
                 <a:solidFill>
                   <a:srgbClr val="FFFFFF"/>
                 </a:solidFill>
@@ -7215,7 +7161,7 @@
                 <a:ea typeface="Play"/>
                 <a:cs typeface="Play"/>
               </a:rPr>
-              <a:t>• Сервис принимает pptx, документы, таблицы, заметки</a:t>
+              <a:t>• Сервис принимает pptx, материалы, применяет дизайн‑систему</a:t>
             </a:r>
           </a:p>
           <a:p>
@@ -7223,7 +7169,7 @@
               <a:spcAft>
                 <a:spcPts val="300"/>
               </a:spcAft>
-              <a:defRPr sz="1800">
+              <a:defRPr sz="1600">
                 <a:solidFill>
                   <a:srgbClr val="FFFFFF"/>
                 </a:solidFill>
@@ -7233,7 +7179,7 @@
               </a:defRPr>
             </a:pPr>
             <a:r>
-              <a:rPr sz="1800">
+              <a:rPr sz="1600">
                 <a:solidFill>
                   <a:srgbClr val="FFFFFF"/>
                 </a:solidFill>
@@ -7241,7 +7187,7 @@
                 <a:ea typeface="Play"/>
                 <a:cs typeface="Play"/>
               </a:rPr>
-              <a:t>• Автоматически строит дизайн‑систему и план колоды</a:t>
+              <a:t>• Экспорт в pptx, pdf, html, слайды редактируемы</a:t>
             </a:r>
           </a:p>
           <a:p>
@@ -7249,7 +7195,7 @@
               <a:spcAft>
                 <a:spcPts val="300"/>
               </a:spcAft>
-              <a:defRPr sz="1800">
+              <a:defRPr sz="1600">
                 <a:solidFill>
                   <a:srgbClr val="FFFFFF"/>
                 </a:solidFill>
@@ -7259,7 +7205,7 @@
               </a:defRPr>
             </a:pPr>
             <a:r>
-              <a:rPr sz="1800">
+              <a:rPr sz="1600">
                 <a:solidFill>
                   <a:srgbClr val="FFFFFF"/>
                 </a:solidFill>
@@ -7267,33 +7213,7 @@
                 <a:ea typeface="Play"/>
                 <a:cs typeface="Play"/>
               </a:rPr>
-              <a:t>• Экспорт в pptx, pdf, html с редактируемыми слайдами</a:t>
-            </a:r>
-          </a:p>
-          <a:p>
-            <a:pPr algn="l">
-              <a:spcAft>
-                <a:spcPts val="300"/>
-              </a:spcAft>
-              <a:defRPr sz="1800">
-                <a:solidFill>
-                  <a:srgbClr val="FFFFFF"/>
-                </a:solidFill>
-                <a:latin typeface="Play"/>
-                <a:ea typeface="Play"/>
-                <a:cs typeface="Play"/>
-              </a:defRPr>
-            </a:pPr>
-            <a:r>
-              <a:rPr sz="1800">
-                <a:solidFill>
-                  <a:srgbClr val="FFFFFF"/>
-                </a:solidFill>
-                <a:latin typeface="Play"/>
-                <a:ea typeface="Play"/>
-                <a:cs typeface="Play"/>
-              </a:rPr>
-              <a:t>• Аудит качества проверяет стиль и данные до выдачи</a:t>
+              <a:t>• Аудит качества устраняет нарушения стиля</a:t>
             </a:r>
           </a:p>
         </p:txBody>
@@ -7306,8 +7226,8 @@
         </p:nvSpPr>
         <p:spPr>
           <a:xfrm>
-            <a:off x="427817" y="4237891"/>
-            <a:ext cx="1772267" cy="1098805"/>
+            <a:off x="427817" y="3971721"/>
+            <a:ext cx="2153870" cy="1335399"/>
           </a:xfrm>
           <a:prstGeom prst="homePlate">
             <a:avLst/>
@@ -7338,7 +7258,7 @@
           <a:lstStyle/>
           <a:p>
             <a:pPr algn="ctr">
-              <a:defRPr sz="868" b="0">
+              <a:defRPr sz="1143" b="0">
                 <a:solidFill>
                   <a:srgbClr val="FFFFFF"/>
                 </a:solidFill>
@@ -7348,7 +7268,7 @@
               </a:defRPr>
             </a:pPr>
             <a:r>
-              <a:rPr sz="868" b="0">
+              <a:rPr sz="1143" b="0">
                 <a:solidFill>
                   <a:srgbClr val="FFFFFF"/>
                 </a:solidFill>
@@ -7356,7 +7276,7 @@
                 <a:ea typeface="Play"/>
                 <a:cs typeface="Play"/>
               </a:rPr>
-              <a:t>Загрузка шаблона</a:t>
+              <a:t>Шаблон</a:t>
             </a:r>
           </a:p>
         </p:txBody>
@@ -7369,8 +7289,8 @@
         </p:nvSpPr>
         <p:spPr>
           <a:xfrm>
-            <a:off x="2335832" y="4237891"/>
-            <a:ext cx="1772267" cy="1098805"/>
+            <a:off x="2717436" y="3971721"/>
+            <a:ext cx="2153870" cy="1335399"/>
           </a:xfrm>
           <a:prstGeom prst="chevron">
             <a:avLst/>
@@ -7401,7 +7321,7 @@
           <a:lstStyle/>
           <a:p>
             <a:pPr algn="ctr">
-              <a:defRPr sz="600" b="0">
+              <a:defRPr sz="1143" b="0">
                 <a:solidFill>
                   <a:srgbClr val="FFFFFF"/>
                 </a:solidFill>
@@ -7411,7 +7331,7 @@
               </a:defRPr>
             </a:pPr>
             <a:r>
-              <a:rPr sz="600" b="0">
+              <a:rPr sz="1143" b="0">
                 <a:solidFill>
                   <a:srgbClr val="FFFFFF"/>
                 </a:solidFill>
@@ -7419,7 +7339,7 @@
                 <a:ea typeface="Play"/>
                 <a:cs typeface="Play"/>
               </a:rPr>
-              <a:t>Разбор дизайн‑системы</a:t>
+              <a:t>План колоды</a:t>
             </a:r>
           </a:p>
         </p:txBody>
@@ -7432,8 +7352,8 @@
         </p:nvSpPr>
         <p:spPr>
           <a:xfrm>
-            <a:off x="4243848" y="4237891"/>
-            <a:ext cx="1772267" cy="1098805"/>
+            <a:off x="5007055" y="3971721"/>
+            <a:ext cx="2153870" cy="1335399"/>
           </a:xfrm>
           <a:prstGeom prst="chevron">
             <a:avLst/>
@@ -7464,7 +7384,7 @@
           <a:lstStyle/>
           <a:p>
             <a:pPr algn="ctr">
-              <a:defRPr sz="694" b="0">
+              <a:defRPr sz="1143" b="0">
                 <a:solidFill>
                   <a:srgbClr val="FFFFFF"/>
                 </a:solidFill>
@@ -7474,7 +7394,7 @@
               </a:defRPr>
             </a:pPr>
             <a:r>
-              <a:rPr sz="694" b="0">
+              <a:rPr sz="1143" b="0">
                 <a:solidFill>
                   <a:srgbClr val="FFFFFF"/>
                 </a:solidFill>
@@ -7482,7 +7402,7 @@
                 <a:ea typeface="Play"/>
                 <a:cs typeface="Play"/>
               </a:rPr>
-              <a:t>Построение плана колоды</a:t>
+              <a:t>Вёрстка</a:t>
             </a:r>
           </a:p>
         </p:txBody>
@@ -7495,8 +7415,8 @@
         </p:nvSpPr>
         <p:spPr>
           <a:xfrm>
-            <a:off x="6151864" y="4237891"/>
-            <a:ext cx="1772267" cy="1098805"/>
+            <a:off x="7296674" y="3971721"/>
+            <a:ext cx="2153870" cy="1335399"/>
           </a:xfrm>
           <a:prstGeom prst="chevron">
             <a:avLst/>
@@ -7527,7 +7447,7 @@
           <a:lstStyle/>
           <a:p>
             <a:pPr algn="ctr">
-              <a:defRPr sz="600" b="0">
+              <a:defRPr sz="1143" b="0">
                 <a:solidFill>
                   <a:srgbClr val="FFFFFF"/>
                 </a:solidFill>
@@ -7537,7 +7457,7 @@
               </a:defRPr>
             </a:pPr>
             <a:r>
-              <a:rPr sz="600" b="0">
+              <a:rPr sz="1143" b="0">
                 <a:solidFill>
                   <a:srgbClr val="FFFFFF"/>
                 </a:solidFill>
@@ -7545,7 +7465,7 @@
                 <a:ea typeface="Play"/>
                 <a:cs typeface="Play"/>
               </a:rPr>
-              <a:t>Авто‑верстка</a:t>
+              <a:t>Аудит</a:t>
             </a:r>
           </a:p>
         </p:txBody>
@@ -7558,8 +7478,8 @@
         </p:nvSpPr>
         <p:spPr>
           <a:xfrm>
-            <a:off x="8059880" y="4237891"/>
-            <a:ext cx="1772267" cy="1098805"/>
+            <a:off x="9586293" y="3971721"/>
+            <a:ext cx="2153870" cy="1335399"/>
           </a:xfrm>
           <a:prstGeom prst="chevron">
             <a:avLst/>
@@ -7590,7 +7510,7 @@
           <a:lstStyle/>
           <a:p>
             <a:pPr algn="ctr">
-              <a:defRPr sz="868" b="0">
+              <a:defRPr sz="1143" b="0">
                 <a:solidFill>
                   <a:srgbClr val="FFFFFF"/>
                 </a:solidFill>
@@ -7600,7 +7520,7 @@
               </a:defRPr>
             </a:pPr>
             <a:r>
-              <a:rPr sz="868" b="0">
+              <a:rPr sz="1143" b="0">
                 <a:solidFill>
                   <a:srgbClr val="FFFFFF"/>
                 </a:solidFill>
@@ -7608,70 +7528,7 @@
                 <a:ea typeface="Play"/>
                 <a:cs typeface="Play"/>
               </a:rPr>
-              <a:t>Аудит качества</a:t>
-            </a:r>
-          </a:p>
-        </p:txBody>
-      </p:sp>
-      <p:sp>
-        <p:nvSpPr>
-          <p:cNvPr id="688" name="Chevron 687"/>
-          <p:cNvSpPr/>
-          <p:nvPr/>
-        </p:nvSpPr>
-        <p:spPr>
-          <a:xfrm>
-            <a:off x="9967896" y="4237891"/>
-            <a:ext cx="1772267" cy="1098805"/>
-          </a:xfrm>
-          <a:prstGeom prst="chevron">
-            <a:avLst/>
-          </a:prstGeom>
-          <a:solidFill>
-            <a:srgbClr val="0077FF"/>
-          </a:solidFill>
-          <a:ln>
-            <a:noFill/>
-          </a:ln>
-        </p:spPr>
-        <p:style>
-          <a:lnRef idx="1">
-            <a:schemeClr val="accent1"/>
-          </a:lnRef>
-          <a:fillRef idx="3">
-            <a:schemeClr val="accent1"/>
-          </a:fillRef>
-          <a:effectRef idx="2">
-            <a:schemeClr val="accent1"/>
-          </a:effectRef>
-          <a:fontRef idx="minor">
-            <a:schemeClr val="lt1"/>
-          </a:fontRef>
-        </p:style>
-        <p:txBody>
-          <a:bodyPr rtlCol="0" anchor="ctr" wrap="square" lIns="12700" rIns="12700" tIns="12700" bIns="12700"/>
-          <a:lstStyle/>
-          <a:p>
-            <a:pPr algn="ctr">
-              <a:defRPr sz="694" b="0">
-                <a:solidFill>
-                  <a:srgbClr val="FFFFFF"/>
-                </a:solidFill>
-                <a:latin typeface="Play"/>
-                <a:ea typeface="Play"/>
-                <a:cs typeface="Play"/>
-              </a:defRPr>
-            </a:pPr>
-            <a:r>
-              <a:rPr sz="694" b="0">
-                <a:solidFill>
-                  <a:srgbClr val="FFFFFF"/>
-                </a:solidFill>
-                <a:latin typeface="Play"/>
-                <a:ea typeface="Play"/>
-                <a:cs typeface="Play"/>
-              </a:rPr>
-              <a:t>Экспорт результата</a:t>
+              <a:t>Экспорт</a:t>
             </a:r>
           </a:p>
         </p:txBody>
@@ -7792,7 +7649,7 @@
                 <a:ea typeface="Play"/>
                 <a:cs typeface="Play"/>
               </a:rPr>
-              <a:t>Ожидаемый эффект – Время</a:t>
+              <a:t>План пилота</a:t>
             </a:r>
           </a:p>
         </p:txBody>
@@ -7805,8 +7662,8 @@
         </p:nvSpPr>
         <p:spPr>
           <a:xfrm>
-            <a:off x="429280" y="1504165"/>
-            <a:ext cx="11310884" cy="944880"/>
+            <a:off x="429280" y="2310261"/>
+            <a:ext cx="11310884" cy="1488440"/>
           </a:xfrm>
           <a:prstGeom prst="rect">
             <a:avLst/>
@@ -7823,7 +7680,7 @@
               <a:spcAft>
                 <a:spcPts val="300"/>
               </a:spcAft>
-              <a:defRPr sz="2000">
+              <a:defRPr sz="2800">
                 <a:solidFill>
                   <a:srgbClr val="FFFFFF"/>
                 </a:solidFill>
@@ -7833,7 +7690,7 @@
               </a:defRPr>
             </a:pPr>
             <a:r>
-              <a:rPr sz="2000">
+              <a:rPr sz="2800">
                 <a:solidFill>
                   <a:srgbClr val="FFFFFF"/>
                 </a:solidFill>
@@ -7841,7 +7698,7 @@
                 <a:ea typeface="Play"/>
                 <a:cs typeface="Play"/>
               </a:rPr>
-              <a:t>• Время сборки колоды 12 слайдов сократилось с 186 до 4 мин</a:t>
+              <a:t>• 6 недель</a:t>
             </a:r>
           </a:p>
           <a:p>
@@ -7849,7 +7706,7 @@
               <a:spcAft>
                 <a:spcPts val="300"/>
               </a:spcAft>
-              <a:defRPr sz="2000">
+              <a:defRPr sz="2800">
                 <a:solidFill>
                   <a:srgbClr val="FFFFFF"/>
                 </a:solidFill>
@@ -7859,7 +7716,7 @@
               </a:defRPr>
             </a:pPr>
             <a:r>
-              <a:rPr sz="2000">
+              <a:rPr sz="2800">
                 <a:solidFill>
                   <a:srgbClr val="FFFFFF"/>
                 </a:solidFill>
@@ -7867,29 +7724,37 @@
                 <a:ea typeface="Play"/>
                 <a:cs typeface="Play"/>
               </a:rPr>
-              <a:t>• Первый готовый вариант доступен за 1 день вместо 6</a:t>
+              <a:t>• 2 команды</a:t>
+            </a:r>
+          </a:p>
+          <a:p>
+            <a:pPr algn="l">
+              <a:spcAft>
+                <a:spcPts val="300"/>
+              </a:spcAft>
+              <a:defRPr sz="2800">
+                <a:solidFill>
+                  <a:srgbClr val="FFFFFF"/>
+                </a:solidFill>
+                <a:latin typeface="Play"/>
+                <a:ea typeface="Play"/>
+                <a:cs typeface="Play"/>
+              </a:defRPr>
+            </a:pPr>
+            <a:r>
+              <a:rPr sz="2800">
+                <a:solidFill>
+                  <a:srgbClr val="FFFFFF"/>
+                </a:solidFill>
+                <a:latin typeface="Play"/>
+                <a:ea typeface="Play"/>
+                <a:cs typeface="Play"/>
+              </a:rPr>
+              <a:t>• 68 презентаций</a:t>
             </a:r>
           </a:p>
         </p:txBody>
       </p:sp>
-      <p:graphicFrame>
-        <p:nvGraphicFramePr>
-          <p:cNvPr id="624" name="Chart 623"/>
-          <p:cNvGraphicFramePr>
-            <a:graphicFrameLocks noGrp="1"/>
-          </p:cNvGraphicFramePr>
-          <p:nvPr/>
-        </p:nvGraphicFramePr>
-        <p:xfrm>
-          <a:off x="429280" y="2620495"/>
-          <a:ext cx="11310884" cy="2790398"/>
-        </p:xfrm>
-        <a:graphic>
-          <a:graphicData uri="http://schemas.openxmlformats.org/drawingml/2006/chart">
-            <c:chart xmlns:c="http://schemas.openxmlformats.org/drawingml/2006/chart" r:id="rId5"/>
-          </a:graphicData>
-        </a:graphic>
-      </p:graphicFrame>
     </p:spTree>
   </p:cSld>
   <p:clrMapOvr>
@@ -7952,7 +7817,7 @@
                 <a:ea typeface="Play"/>
                 <a:cs typeface="Play"/>
               </a:rPr>
-              <a:t>Ожидаемый эффект – Нарушения</a:t>
+              <a:t>Результаты пилота</a:t>
             </a:r>
           </a:p>
         </p:txBody>
@@ -7966,7 +7831,7 @@
         <p:spPr>
           <a:xfrm>
             <a:off x="429280" y="1492575"/>
-            <a:ext cx="11310884" cy="944880"/>
+            <a:ext cx="11310884" cy="1605841"/>
           </a:xfrm>
           <a:prstGeom prst="rect">
             <a:avLst/>
@@ -8001,7 +7866,7 @@
                 <a:ea typeface="Play"/>
                 <a:cs typeface="Play"/>
               </a:rPr>
-              <a:t>• Нарушений фирменного стиля в пилоте – 2 из 68 колод</a:t>
+              <a:t>• Сборка 4 мин вместо 186</a:t>
             </a:r>
           </a:p>
           <a:p>
@@ -8027,26 +7892,487 @@
                 <a:ea typeface="Play"/>
                 <a:cs typeface="Play"/>
               </a:rPr>
-              <a:t>• Все нарушения автоматически исправлены аудитором</a:t>
+              <a:t>• 1 день до первой версии вместо 6</a:t>
+            </a:r>
+          </a:p>
+          <a:p>
+            <a:pPr algn="l">
+              <a:spcAft>
+                <a:spcPts val="300"/>
+              </a:spcAft>
+              <a:defRPr sz="1600">
+                <a:solidFill>
+                  <a:srgbClr val="FFFFFF"/>
+                </a:solidFill>
+                <a:latin typeface="Play"/>
+                <a:ea typeface="Play"/>
+                <a:cs typeface="Play"/>
+              </a:defRPr>
+            </a:pPr>
+            <a:r>
+              <a:rPr sz="1600">
+                <a:solidFill>
+                  <a:srgbClr val="FFFFFF"/>
+                </a:solidFill>
+                <a:latin typeface="Play"/>
+                <a:ea typeface="Play"/>
+                <a:cs typeface="Play"/>
+              </a:rPr>
+              <a:t>• 2 нарушения из 68 вместо 19</a:t>
+            </a:r>
+          </a:p>
+          <a:p>
+            <a:pPr algn="l">
+              <a:spcAft>
+                <a:spcPts val="300"/>
+              </a:spcAft>
+              <a:defRPr sz="1600">
+                <a:solidFill>
+                  <a:srgbClr val="FFFFFF"/>
+                </a:solidFill>
+                <a:latin typeface="Play"/>
+                <a:ea typeface="Play"/>
+                <a:cs typeface="Play"/>
+              </a:defRPr>
+            </a:pPr>
+            <a:r>
+              <a:rPr sz="1600">
+                <a:solidFill>
+                  <a:srgbClr val="FFFFFF"/>
+                </a:solidFill>
+                <a:latin typeface="Play"/>
+                <a:ea typeface="Play"/>
+                <a:cs typeface="Play"/>
+              </a:rPr>
+              <a:t>• 38 запросов вместо 11</a:t>
             </a:r>
           </a:p>
         </p:txBody>
       </p:sp>
       <p:graphicFrame>
         <p:nvGraphicFramePr>
-          <p:cNvPr id="4" name="Chart 3"/>
+          <p:cNvPr id="4" name="Table 3"/>
           <p:cNvGraphicFramePr>
             <a:graphicFrameLocks noGrp="1"/>
           </p:cNvGraphicFramePr>
           <p:nvPr/>
         </p:nvGraphicFramePr>
         <p:xfrm>
-          <a:off x="429280" y="2608905"/>
-          <a:ext cx="11310884" cy="2898274"/>
+          <a:off x="429280" y="3269866"/>
+          <a:ext cx="11310884" cy="2237312"/>
         </p:xfrm>
         <a:graphic>
-          <a:graphicData uri="http://schemas.openxmlformats.org/drawingml/2006/chart">
-            <c:chart xmlns:c="http://schemas.openxmlformats.org/drawingml/2006/chart" r:id="rId4"/>
+          <a:graphicData uri="http://schemas.openxmlformats.org/drawingml/2006/table">
+            <a:tbl>
+              <a:tblPr firstRow="1" bandRow="1">
+                <a:tableStyleId>{5C22544A-7EE6-4342-B048-85BDC9FD1C3A}</a:tableStyleId>
+              </a:tblPr>
+              <a:tblGrid>
+                <a:gridCol w="3770294"/>
+                <a:gridCol w="3770294"/>
+                <a:gridCol w="3770296"/>
+              </a:tblGrid>
+              <a:tr h="447462">
+                <a:tc>
+                  <a:txBody>
+                    <a:bodyPr/>
+                    <a:lstStyle/>
+                    <a:p>
+                      <a:pPr>
+                        <a:defRPr sz="1300" b="1">
+                          <a:solidFill>
+                            <a:srgbClr val="FFFFFF"/>
+                          </a:solidFill>
+                          <a:latin typeface="Play"/>
+                          <a:ea typeface="Play"/>
+                          <a:cs typeface="Play"/>
+                        </a:defRPr>
+                      </a:pPr>
+                      <a:r>
+                        <a:t>Показатель</a:t>
+                      </a:r>
+                    </a:p>
+                  </a:txBody>
+                  <a:tcPr>
+                    <a:solidFill>
+                      <a:srgbClr val="0077FF"/>
+                    </a:solidFill>
+                  </a:tcPr>
+                </a:tc>
+                <a:tc>
+                  <a:txBody>
+                    <a:bodyPr/>
+                    <a:lstStyle/>
+                    <a:p>
+                      <a:pPr>
+                        <a:defRPr sz="1300" b="1">
+                          <a:solidFill>
+                            <a:srgbClr val="FFFFFF"/>
+                          </a:solidFill>
+                          <a:latin typeface="Play"/>
+                          <a:ea typeface="Play"/>
+                          <a:cs typeface="Play"/>
+                        </a:defRPr>
+                      </a:pPr>
+                      <a:r>
+                        <a:t>До пилота</a:t>
+                      </a:r>
+                    </a:p>
+                  </a:txBody>
+                  <a:tcPr>
+                    <a:solidFill>
+                      <a:srgbClr val="0077FF"/>
+                    </a:solidFill>
+                  </a:tcPr>
+                </a:tc>
+                <a:tc>
+                  <a:txBody>
+                    <a:bodyPr/>
+                    <a:lstStyle/>
+                    <a:p>
+                      <a:pPr>
+                        <a:defRPr sz="1300" b="1">
+                          <a:solidFill>
+                            <a:srgbClr val="FFFFFF"/>
+                          </a:solidFill>
+                          <a:latin typeface="Play"/>
+                          <a:ea typeface="Play"/>
+                          <a:cs typeface="Play"/>
+                        </a:defRPr>
+                      </a:pPr>
+                      <a:r>
+                        <a:t>После пилота</a:t>
+                      </a:r>
+                    </a:p>
+                  </a:txBody>
+                  <a:tcPr>
+                    <a:solidFill>
+                      <a:srgbClr val="0077FF"/>
+                    </a:solidFill>
+                  </a:tcPr>
+                </a:tc>
+              </a:tr>
+              <a:tr h="447462">
+                <a:tc>
+                  <a:txBody>
+                    <a:bodyPr/>
+                    <a:lstStyle/>
+                    <a:p>
+                      <a:pPr>
+                        <a:defRPr sz="1300" b="0">
+                          <a:solidFill>
+                            <a:srgbClr val="FFFFFF"/>
+                          </a:solidFill>
+                          <a:latin typeface="Play"/>
+                          <a:ea typeface="Play"/>
+                          <a:cs typeface="Play"/>
+                        </a:defRPr>
+                      </a:pPr>
+                      <a:r>
+                        <a:t>Сборка</a:t>
+                      </a:r>
+                    </a:p>
+                  </a:txBody>
+                  <a:tcPr>
+                    <a:solidFill>
+                      <a:srgbClr val="111111"/>
+                    </a:solidFill>
+                  </a:tcPr>
+                </a:tc>
+                <a:tc>
+                  <a:txBody>
+                    <a:bodyPr/>
+                    <a:lstStyle/>
+                    <a:p>
+                      <a:pPr>
+                        <a:defRPr sz="1300" b="0">
+                          <a:solidFill>
+                            <a:srgbClr val="FFFFFF"/>
+                          </a:solidFill>
+                          <a:latin typeface="Play"/>
+                          <a:ea typeface="Play"/>
+                          <a:cs typeface="Play"/>
+                        </a:defRPr>
+                      </a:pPr>
+                      <a:r>
+                        <a:t>186 мин</a:t>
+                      </a:r>
+                    </a:p>
+                  </a:txBody>
+                  <a:tcPr>
+                    <a:solidFill>
+                      <a:srgbClr val="111111"/>
+                    </a:solidFill>
+                  </a:tcPr>
+                </a:tc>
+                <a:tc>
+                  <a:txBody>
+                    <a:bodyPr/>
+                    <a:lstStyle/>
+                    <a:p>
+                      <a:pPr>
+                        <a:defRPr sz="1300" b="0">
+                          <a:solidFill>
+                            <a:srgbClr val="FFFFFF"/>
+                          </a:solidFill>
+                          <a:latin typeface="Play"/>
+                          <a:ea typeface="Play"/>
+                          <a:cs typeface="Play"/>
+                        </a:defRPr>
+                      </a:pPr>
+                      <a:r>
+                        <a:t>4 мин</a:t>
+                      </a:r>
+                    </a:p>
+                  </a:txBody>
+                  <a:tcPr>
+                    <a:solidFill>
+                      <a:srgbClr val="111111"/>
+                    </a:solidFill>
+                  </a:tcPr>
+                </a:tc>
+              </a:tr>
+              <a:tr h="447462">
+                <a:tc>
+                  <a:txBody>
+                    <a:bodyPr/>
+                    <a:lstStyle/>
+                    <a:p>
+                      <a:pPr>
+                        <a:defRPr sz="1300" b="0">
+                          <a:solidFill>
+                            <a:srgbClr val="FFFFFF"/>
+                          </a:solidFill>
+                          <a:latin typeface="Play"/>
+                          <a:ea typeface="Play"/>
+                          <a:cs typeface="Play"/>
+                        </a:defRPr>
+                      </a:pPr>
+                      <a:r>
+                        <a:t>Время до первой версии</a:t>
+                      </a:r>
+                    </a:p>
+                  </a:txBody>
+                  <a:tcPr>
+                    <a:solidFill>
+                      <a:srgbClr val="111111"/>
+                    </a:solidFill>
+                  </a:tcPr>
+                </a:tc>
+                <a:tc>
+                  <a:txBody>
+                    <a:bodyPr/>
+                    <a:lstStyle/>
+                    <a:p>
+                      <a:pPr>
+                        <a:defRPr sz="1300" b="0">
+                          <a:solidFill>
+                            <a:srgbClr val="FFFFFF"/>
+                          </a:solidFill>
+                          <a:latin typeface="Play"/>
+                          <a:ea typeface="Play"/>
+                          <a:cs typeface="Play"/>
+                        </a:defRPr>
+                      </a:pPr>
+                      <a:r>
+                        <a:t>6 дней</a:t>
+                      </a:r>
+                    </a:p>
+                  </a:txBody>
+                  <a:tcPr>
+                    <a:solidFill>
+                      <a:srgbClr val="111111"/>
+                    </a:solidFill>
+                  </a:tcPr>
+                </a:tc>
+                <a:tc>
+                  <a:txBody>
+                    <a:bodyPr/>
+                    <a:lstStyle/>
+                    <a:p>
+                      <a:pPr>
+                        <a:defRPr sz="1300" b="0">
+                          <a:solidFill>
+                            <a:srgbClr val="FFFFFF"/>
+                          </a:solidFill>
+                          <a:latin typeface="Play"/>
+                          <a:ea typeface="Play"/>
+                          <a:cs typeface="Play"/>
+                        </a:defRPr>
+                      </a:pPr>
+                      <a:r>
+                        <a:t>1 день</a:t>
+                      </a:r>
+                    </a:p>
+                  </a:txBody>
+                  <a:tcPr>
+                    <a:solidFill>
+                      <a:srgbClr val="111111"/>
+                    </a:solidFill>
+                  </a:tcPr>
+                </a:tc>
+              </a:tr>
+              <a:tr h="447462">
+                <a:tc>
+                  <a:txBody>
+                    <a:bodyPr/>
+                    <a:lstStyle/>
+                    <a:p>
+                      <a:pPr>
+                        <a:defRPr sz="1300" b="0">
+                          <a:solidFill>
+                            <a:srgbClr val="FFFFFF"/>
+                          </a:solidFill>
+                          <a:latin typeface="Play"/>
+                          <a:ea typeface="Play"/>
+                          <a:cs typeface="Play"/>
+                        </a:defRPr>
+                      </a:pPr>
+                      <a:r>
+                        <a:t>Нарушения</a:t>
+                      </a:r>
+                    </a:p>
+                  </a:txBody>
+                  <a:tcPr>
+                    <a:solidFill>
+                      <a:srgbClr val="111111"/>
+                    </a:solidFill>
+                  </a:tcPr>
+                </a:tc>
+                <a:tc>
+                  <a:txBody>
+                    <a:bodyPr/>
+                    <a:lstStyle/>
+                    <a:p>
+                      <a:pPr>
+                        <a:defRPr sz="1300" b="0">
+                          <a:solidFill>
+                            <a:srgbClr val="FFFFFF"/>
+                          </a:solidFill>
+                          <a:latin typeface="Play"/>
+                          <a:ea typeface="Play"/>
+                          <a:cs typeface="Play"/>
+                        </a:defRPr>
+                      </a:pPr>
+                      <a:r>
+                        <a:t>19 из 42</a:t>
+                      </a:r>
+                    </a:p>
+                  </a:txBody>
+                  <a:tcPr>
+                    <a:solidFill>
+                      <a:srgbClr val="111111"/>
+                    </a:solidFill>
+                  </a:tcPr>
+                </a:tc>
+                <a:tc>
+                  <a:txBody>
+                    <a:bodyPr/>
+                    <a:lstStyle/>
+                    <a:p>
+                      <a:pPr>
+                        <a:defRPr sz="1300" b="0">
+                          <a:solidFill>
+                            <a:srgbClr val="FFFFFF"/>
+                          </a:solidFill>
+                          <a:latin typeface="Play"/>
+                          <a:ea typeface="Play"/>
+                          <a:cs typeface="Play"/>
+                        </a:defRPr>
+                      </a:pPr>
+                      <a:r>
+                        <a:t>2 из 68</a:t>
+                      </a:r>
+                    </a:p>
+                  </a:txBody>
+                  <a:tcPr>
+                    <a:solidFill>
+                      <a:srgbClr val="111111"/>
+                    </a:solidFill>
+                  </a:tcPr>
+                </a:tc>
+              </a:tr>
+              <a:tr h="447464">
+                <a:tc>
+                  <a:txBody>
+                    <a:bodyPr/>
+                    <a:lstStyle/>
+                    <a:p>
+                      <a:pPr>
+                        <a:defRPr sz="1300" b="0">
+                          <a:solidFill>
+                            <a:srgbClr val="FFFFFF"/>
+                          </a:solidFill>
+                          <a:latin typeface="Play"/>
+                          <a:ea typeface="Play"/>
+                          <a:cs typeface="Play"/>
+                        </a:defRPr>
+                      </a:pPr>
+                      <a:r>
+                        <a:t>Запросы</a:t>
+                      </a:r>
+                    </a:p>
+                  </a:txBody>
+                  <a:tcPr>
+                    <a:solidFill>
+                      <a:srgbClr val="111111"/>
+                    </a:solidFill>
+                  </a:tcPr>
+                </a:tc>
+                <a:tc>
+                  <a:txBody>
+                    <a:bodyPr/>
+                    <a:lstStyle/>
+                    <a:p>
+                      <a:pPr>
+                        <a:defRPr sz="1300" b="0">
+                          <a:solidFill>
+                            <a:srgbClr val="FFFFFF"/>
+                          </a:solidFill>
+                          <a:latin typeface="Play"/>
+                          <a:ea typeface="Play"/>
+                          <a:cs typeface="Play"/>
+                        </a:defRPr>
+                      </a:pPr>
+                      <a:r>
+                        <a:t>11/нед</a:t>
+                      </a:r>
+                    </a:p>
+                  </a:txBody>
+                  <a:tcPr>
+                    <a:solidFill>
+                      <a:srgbClr val="111111"/>
+                    </a:solidFill>
+                  </a:tcPr>
+                </a:tc>
+                <a:tc>
+                  <a:txBody>
+                    <a:bodyPr/>
+                    <a:lstStyle/>
+                    <a:p>
+                      <a:pPr>
+                        <a:defRPr sz="1300" b="0">
+                          <a:solidFill>
+                            <a:srgbClr val="FFFFFF"/>
+                          </a:solidFill>
+                          <a:latin typeface="Play"/>
+                          <a:ea typeface="Play"/>
+                          <a:cs typeface="Play"/>
+                        </a:defRPr>
+                      </a:pPr>
+                      <a:r>
+                        <a:t>38/нед</a:t>
+                      </a:r>
+                    </a:p>
+                  </a:txBody>
+                  <a:tcPr>
+                    <a:solidFill>
+                      <a:srgbClr val="111111"/>
+                    </a:solidFill>
+                  </a:tcPr>
+                </a:tc>
+              </a:tr>
+            </a:tbl>
           </a:graphicData>
         </a:graphic>
       </p:graphicFrame>
@@ -8059,6 +8385,200 @@
 </file>
 
 <file path=ppt/slides/slide35.xml><?xml version="1.0" encoding="utf-8"?>
+<p:sld xmlns:a="http://schemas.openxmlformats.org/drawingml/2006/main" xmlns:p="http://schemas.openxmlformats.org/presentationml/2006/main" xmlns:r="http://schemas.openxmlformats.org/officeDocument/2006/relationships">
+  <p:cSld>
+    <p:spTree>
+      <p:nvGrpSpPr>
+        <p:cNvPr id="1" name=""/>
+        <p:cNvGrpSpPr/>
+        <p:nvPr/>
+      </p:nvGrpSpPr>
+      <p:grpSpPr/>
+      <p:sp>
+        <p:nvSpPr>
+          <p:cNvPr id="2" name="title"/>
+          <p:cNvSpPr txBox="1"/>
+          <p:nvPr/>
+        </p:nvSpPr>
+        <p:spPr>
+          <a:xfrm>
+            <a:off x="429280" y="424715"/>
+            <a:ext cx="7827264" cy="822960"/>
+          </a:xfrm>
+          <a:prstGeom prst="rect">
+            <a:avLst/>
+          </a:prstGeom>
+          <a:noFill/>
+        </p:spPr>
+        <p:txBody>
+          <a:bodyPr wrap="square" lIns="76200" rIns="76200" tIns="50800" bIns="50800">
+            <a:spAutoFit/>
+          </a:bodyPr>
+          <a:lstStyle/>
+          <a:p>
+            <a:pPr algn="l">
+              <a:spcAft>
+                <a:spcPts val="300"/>
+              </a:spcAft>
+              <a:defRPr sz="3200">
+                <a:solidFill>
+                  <a:srgbClr val="FFFFFF"/>
+                </a:solidFill>
+                <a:latin typeface="Play"/>
+                <a:ea typeface="Play"/>
+                <a:cs typeface="Play"/>
+              </a:defRPr>
+            </a:pPr>
+            <a:r>
+              <a:rPr sz="3200">
+                <a:solidFill>
+                  <a:srgbClr val="FFFFFF"/>
+                </a:solidFill>
+                <a:latin typeface="Play"/>
+                <a:ea typeface="Play"/>
+                <a:cs typeface="Play"/>
+              </a:rPr>
+              <a:t>Ожидаемый эффект</a:t>
+            </a:r>
+          </a:p>
+        </p:txBody>
+      </p:sp>
+      <p:sp>
+        <p:nvSpPr>
+          <p:cNvPr id="3" name="body"/>
+          <p:cNvSpPr txBox="1"/>
+          <p:nvPr/>
+        </p:nvSpPr>
+        <p:spPr>
+          <a:xfrm>
+            <a:off x="429280" y="2335824"/>
+            <a:ext cx="11310884" cy="1950720"/>
+          </a:xfrm>
+          <a:prstGeom prst="rect">
+            <a:avLst/>
+          </a:prstGeom>
+          <a:noFill/>
+        </p:spPr>
+        <p:txBody>
+          <a:bodyPr wrap="square" lIns="76200" rIns="76200" tIns="50800" bIns="50800">
+            <a:spAutoFit/>
+          </a:bodyPr>
+          <a:lstStyle/>
+          <a:p>
+            <a:pPr algn="l">
+              <a:spcAft>
+                <a:spcPts val="300"/>
+              </a:spcAft>
+              <a:defRPr sz="2800">
+                <a:solidFill>
+                  <a:srgbClr val="FFFFFF"/>
+                </a:solidFill>
+                <a:latin typeface="Play"/>
+                <a:ea typeface="Play"/>
+                <a:cs typeface="Play"/>
+              </a:defRPr>
+            </a:pPr>
+            <a:r>
+              <a:rPr sz="2800">
+                <a:solidFill>
+                  <a:srgbClr val="FFFFFF"/>
+                </a:solidFill>
+                <a:latin typeface="Play"/>
+                <a:ea typeface="Play"/>
+                <a:cs typeface="Play"/>
+              </a:rPr>
+              <a:t>• Сборка 4 мин вместо 186</a:t>
+            </a:r>
+          </a:p>
+          <a:p>
+            <a:pPr algn="l">
+              <a:spcAft>
+                <a:spcPts val="300"/>
+              </a:spcAft>
+              <a:defRPr sz="2800">
+                <a:solidFill>
+                  <a:srgbClr val="FFFFFF"/>
+                </a:solidFill>
+                <a:latin typeface="Play"/>
+                <a:ea typeface="Play"/>
+                <a:cs typeface="Play"/>
+              </a:defRPr>
+            </a:pPr>
+            <a:r>
+              <a:rPr sz="2800">
+                <a:solidFill>
+                  <a:srgbClr val="FFFFFF"/>
+                </a:solidFill>
+                <a:latin typeface="Play"/>
+                <a:ea typeface="Play"/>
+                <a:cs typeface="Play"/>
+              </a:rPr>
+              <a:t>• 1 день до первой версии вместо 6</a:t>
+            </a:r>
+          </a:p>
+          <a:p>
+            <a:pPr algn="l">
+              <a:spcAft>
+                <a:spcPts val="300"/>
+              </a:spcAft>
+              <a:defRPr sz="2800">
+                <a:solidFill>
+                  <a:srgbClr val="FFFFFF"/>
+                </a:solidFill>
+                <a:latin typeface="Play"/>
+                <a:ea typeface="Play"/>
+                <a:cs typeface="Play"/>
+              </a:defRPr>
+            </a:pPr>
+            <a:r>
+              <a:rPr sz="2800">
+                <a:solidFill>
+                  <a:srgbClr val="FFFFFF"/>
+                </a:solidFill>
+                <a:latin typeface="Play"/>
+                <a:ea typeface="Play"/>
+                <a:cs typeface="Play"/>
+              </a:rPr>
+              <a:t>• 2 нарушения вместо 19</a:t>
+            </a:r>
+          </a:p>
+          <a:p>
+            <a:pPr algn="l">
+              <a:spcAft>
+                <a:spcPts val="300"/>
+              </a:spcAft>
+              <a:defRPr sz="2800">
+                <a:solidFill>
+                  <a:srgbClr val="FFFFFF"/>
+                </a:solidFill>
+                <a:latin typeface="Play"/>
+                <a:ea typeface="Play"/>
+                <a:cs typeface="Play"/>
+              </a:defRPr>
+            </a:pPr>
+            <a:r>
+              <a:rPr sz="2800">
+                <a:solidFill>
+                  <a:srgbClr val="FFFFFF"/>
+                </a:solidFill>
+                <a:latin typeface="Play"/>
+                <a:ea typeface="Play"/>
+                <a:cs typeface="Play"/>
+              </a:rPr>
+              <a:t>• 38 запросов вместо 11</a:t>
+            </a:r>
+          </a:p>
+        </p:txBody>
+      </p:sp>
+    </p:spTree>
+  </p:cSld>
+  <p:clrMapOvr>
+    <a:masterClrMapping/>
+  </p:clrMapOvr>
+</p:sld>
+</file>
+
+<file path=ppt/slides/slide36.xml><?xml version="1.0" encoding="utf-8"?>
 <p:sld xmlns:a="http://schemas.openxmlformats.org/drawingml/2006/main" xmlns:p="http://schemas.openxmlformats.org/presentationml/2006/main" xmlns:r="http://schemas.openxmlformats.org/officeDocument/2006/relationships">
   <p:cSld>
     <p:spTree>
@@ -8161,7 +8681,7 @@
                 <a:ea typeface="Play"/>
                 <a:cs typeface="Play"/>
               </a:rPr>
-              <a:t>• Сервис работает на 2 vCPU / 2 GB RAM</a:t>
+              <a:t>• 2 vCPU / 2 ГБ RAM</a:t>
             </a:r>
           </a:p>
           <a:p>
@@ -8187,7 +8707,7 @@
                 <a:ea typeface="Play"/>
                 <a:cs typeface="Play"/>
               </a:rPr>
-              <a:t>• Инференс за 6 недель пилота – 1 400 руб</a:t>
+              <a:t>• 1 400 руб инференс</a:t>
             </a:r>
           </a:p>
           <a:p>
@@ -8213,7 +8733,7 @@
                 <a:ea typeface="Play"/>
                 <a:cs typeface="Play"/>
               </a:rPr>
-              <a:t>• 3 квартал 2026: подключение 4 команд</a:t>
+              <a:t>• Gpt-oss-20b, OpenAI‑совместим</a:t>
             </a:r>
           </a:p>
           <a:p>
@@ -8239,33 +8759,7 @@
                 <a:ea typeface="Play"/>
                 <a:cs typeface="Play"/>
               </a:rPr>
-              <a:t>• 4 квартал 2026: доступ для всей компании</a:t>
-            </a:r>
-          </a:p>
-          <a:p>
-            <a:pPr algn="l">
-              <a:spcAft>
-                <a:spcPts val="300"/>
-              </a:spcAft>
-              <a:defRPr sz="1600">
-                <a:solidFill>
-                  <a:srgbClr val="FFFFFF"/>
-                </a:solidFill>
-                <a:latin typeface="Play"/>
-                <a:ea typeface="Play"/>
-                <a:cs typeface="Play"/>
-              </a:defRPr>
-            </a:pPr>
-            <a:r>
-              <a:rPr sz="1600">
-                <a:solidFill>
-                  <a:srgbClr val="FFFFFF"/>
-                </a:solidFill>
-                <a:latin typeface="Play"/>
-                <a:ea typeface="Play"/>
-                <a:cs typeface="Play"/>
-              </a:rPr>
-              <a:t>• 1 квартал 2027: генерация иллюстраций</a:t>
+              <a:t>• Дизайн‑отдел 4 человека</a:t>
             </a:r>
           </a:p>
         </p:txBody>
@@ -8364,8 +8858,8 @@
         </p:nvSpPr>
         <p:spPr>
           <a:xfrm>
-            <a:off x="429279" y="3385860"/>
-            <a:ext cx="3770294" cy="772118"/>
+            <a:off x="429280" y="3385860"/>
+            <a:ext cx="5655442" cy="772118"/>
           </a:xfrm>
           <a:prstGeom prst="rect">
             <a:avLst/>
@@ -8373,13 +8867,13 @@
           <a:noFill/>
         </p:spPr>
         <p:txBody>
-          <a:bodyPr wrap="square">
+          <a:bodyPr wrap="square" lIns="12700" rIns="12700" tIns="12700" bIns="12700">
             <a:spAutoFit/>
           </a:bodyPr>
           <a:lstStyle/>
           <a:p>
             <a:pPr algn="ctr">
-              <a:defRPr sz="1200" b="0">
+              <a:defRPr sz="1400" b="0">
                 <a:solidFill>
                   <a:srgbClr val="FFFFFF"/>
                 </a:solidFill>
@@ -8389,7 +8883,7 @@
               </a:defRPr>
             </a:pPr>
             <a:r>
-              <a:rPr sz="1200" b="0">
+              <a:rPr sz="1400" b="0">
                 <a:solidFill>
                   <a:srgbClr val="FFFFFF"/>
                 </a:solidFill>
@@ -8397,7 +8891,7 @@
                 <a:ea typeface="Play"/>
                 <a:cs typeface="Play"/>
               </a:rPr>
-              <a:t>3 квартал 2026: подключение 4 команд</a:t>
+              <a:t>Третий квартал 2026</a:t>
             </a:r>
           </a:p>
         </p:txBody>
@@ -8453,8 +8947,8 @@
         </p:nvSpPr>
         <p:spPr>
           <a:xfrm>
-            <a:off x="4199574" y="4767545"/>
-            <a:ext cx="3770294" cy="772118"/>
+            <a:off x="3257001" y="4767545"/>
+            <a:ext cx="5655442" cy="772118"/>
           </a:xfrm>
           <a:prstGeom prst="rect">
             <a:avLst/>
@@ -8462,13 +8956,13 @@
           <a:noFill/>
         </p:spPr>
         <p:txBody>
-          <a:bodyPr wrap="square">
+          <a:bodyPr wrap="square" lIns="12700" rIns="12700" tIns="12700" bIns="12700">
             <a:spAutoFit/>
           </a:bodyPr>
           <a:lstStyle/>
           <a:p>
             <a:pPr algn="ctr">
-              <a:defRPr sz="1200" b="0">
+              <a:defRPr sz="1400" b="0">
                 <a:solidFill>
                   <a:srgbClr val="FFFFFF"/>
                 </a:solidFill>
@@ -8478,7 +8972,7 @@
               </a:defRPr>
             </a:pPr>
             <a:r>
-              <a:rPr sz="1200" b="0">
+              <a:rPr sz="1400" b="0">
                 <a:solidFill>
                   <a:srgbClr val="FFFFFF"/>
                 </a:solidFill>
@@ -8486,7 +8980,7 @@
                 <a:ea typeface="Play"/>
                 <a:cs typeface="Play"/>
               </a:rPr>
-              <a:t>4 квартал 2026: доступ для всей компании</a:t>
+              <a:t>Четвёртый квартал 2026</a:t>
             </a:r>
           </a:p>
         </p:txBody>
@@ -8542,8 +9036,8 @@
         </p:nvSpPr>
         <p:spPr>
           <a:xfrm>
-            <a:off x="7969869" y="3385860"/>
-            <a:ext cx="3770294" cy="772118"/>
+            <a:off x="6084722" y="3385860"/>
+            <a:ext cx="5655442" cy="772118"/>
           </a:xfrm>
           <a:prstGeom prst="rect">
             <a:avLst/>
@@ -8551,13 +9045,13 @@
           <a:noFill/>
         </p:spPr>
         <p:txBody>
-          <a:bodyPr wrap="square">
+          <a:bodyPr wrap="square" lIns="12700" rIns="12700" tIns="12700" bIns="12700">
             <a:spAutoFit/>
           </a:bodyPr>
           <a:lstStyle/>
           <a:p>
             <a:pPr algn="ctr">
-              <a:defRPr sz="1200" b="0">
+              <a:defRPr sz="1400" b="0">
                 <a:solidFill>
                   <a:srgbClr val="FFFFFF"/>
                 </a:solidFill>
@@ -8567,7 +9061,7 @@
               </a:defRPr>
             </a:pPr>
             <a:r>
-              <a:rPr sz="1200" b="0">
+              <a:rPr sz="1400" b="0">
                 <a:solidFill>
                   <a:srgbClr val="FFFFFF"/>
                 </a:solidFill>
@@ -8575,7 +9069,7 @@
                 <a:ea typeface="Play"/>
                 <a:cs typeface="Play"/>
               </a:rPr>
-              <a:t>1 квартал 2027: генерация иллюстраций</a:t>
+              <a:t>Первый квартал 2027</a:t>
             </a:r>
           </a:p>
         </p:txBody>
@@ -8588,7 +9082,553 @@
 </p:sld>
 </file>
 
-<file path=ppt/slides/slide36.xml><?xml version="1.0" encoding="utf-8"?>
+<file path=ppt/slides/slide37.xml><?xml version="1.0" encoding="utf-8"?>
+<p:sld xmlns:a="http://schemas.openxmlformats.org/drawingml/2006/main" xmlns:p="http://schemas.openxmlformats.org/presentationml/2006/main" xmlns:r="http://schemas.openxmlformats.org/officeDocument/2006/relationships">
+  <p:cSld>
+    <p:spTree>
+      <p:nvGrpSpPr>
+        <p:cNvPr id="1" name=""/>
+        <p:cNvGrpSpPr/>
+        <p:nvPr/>
+      </p:nvGrpSpPr>
+      <p:grpSpPr/>
+      <p:sp>
+        <p:nvSpPr>
+          <p:cNvPr id="679" name="Google Shape;679;p31"/>
+          <p:cNvSpPr/>
+          <p:nvPr/>
+        </p:nvSpPr>
+        <p:spPr>
+          <a:xfrm>
+            <a:off x="0" y="4748271"/>
+            <a:ext cx="12192000" cy="2109730"/>
+          </a:xfrm>
+          <a:prstGeom prst="rect">
+            <a:avLst/>
+          </a:prstGeom>
+          <a:gradFill>
+            <a:gsLst>
+              <a:gs pos="0">
+                <a:srgbClr val="0077FF">
+                  <a:alpha val="61961"/>
+                </a:srgbClr>
+              </a:gs>
+              <a:gs pos="99000">
+                <a:srgbClr val="00AEE8"/>
+              </a:gs>
+              <a:gs pos="100000">
+                <a:srgbClr val="00AEE8"/>
+              </a:gs>
+            </a:gsLst>
+            <a:lin ang="14400000" scaled="0"/>
+          </a:gradFill>
+          <a:ln>
+            <a:noFill/>
+          </a:ln>
+        </p:spPr>
+        <p:txBody>
+          <a:bodyPr anchorCtr="0" anchor="ctr" bIns="0" lIns="108000" spcFirstLastPara="1" rIns="91425" wrap="square" tIns="0">
+            <a:noAutofit/>
+          </a:bodyPr>
+          <a:lstStyle/>
+          <a:p>
+            <a:pPr indent="0" lvl="0" marL="0" marR="0" rtl="0" algn="l">
+              <a:spcBef>
+                <a:spcPts val="0"/>
+              </a:spcBef>
+              <a:spcAft>
+                <a:spcPts val="0"/>
+              </a:spcAft>
+              <a:buNone/>
+            </a:pPr>
+            <a:r>
+              <a:t/>
+            </a:r>
+            <a:endParaRPr sz="1100">
+              <a:solidFill>
+                <a:schemeClr val="lt1"/>
+              </a:solidFill>
+              <a:latin typeface="Play"/>
+              <a:ea typeface="Play"/>
+              <a:cs typeface="Play"/>
+              <a:sym typeface="Play"/>
+            </a:endParaRPr>
+          </a:p>
+        </p:txBody>
+      </p:sp>
+      <p:sp>
+        <p:nvSpPr>
+          <p:cNvPr id="680" name="Rounded Rectangle 679"/>
+          <p:cNvSpPr/>
+          <p:nvPr/>
+        </p:nvSpPr>
+        <p:spPr>
+          <a:xfrm>
+            <a:off x="300817" y="297715"/>
+            <a:ext cx="11317142" cy="3307176"/>
+          </a:xfrm>
+          <a:prstGeom prst="roundRect">
+            <a:avLst/>
+          </a:prstGeom>
+          <a:solidFill>
+            <a:srgbClr val="111111">
+              <a:alpha val="85000"/>
+            </a:srgbClr>
+          </a:solidFill>
+          <a:ln>
+            <a:noFill/>
+          </a:ln>
+          <a:effectLst/>
+        </p:spPr>
+        <p:style>
+          <a:lnRef idx="1">
+            <a:schemeClr val="accent1"/>
+          </a:lnRef>
+          <a:fillRef idx="3">
+            <a:schemeClr val="accent1"/>
+          </a:fillRef>
+          <a:effectRef idx="2">
+            <a:schemeClr val="accent1"/>
+          </a:effectRef>
+          <a:fontRef idx="minor">
+            <a:schemeClr val="lt1"/>
+          </a:fontRef>
+        </p:style>
+        <p:txBody>
+          <a:bodyPr rtlCol="0" anchor="ctr"/>
+          <a:lstStyle/>
+          <a:p>
+            <a:pPr algn="ctr"/>
+          </a:p>
+        </p:txBody>
+      </p:sp>
+      <p:sp>
+        <p:nvSpPr>
+          <p:cNvPr id="681" name="title"/>
+          <p:cNvSpPr txBox="1"/>
+          <p:nvPr/>
+        </p:nvSpPr>
+        <p:spPr>
+          <a:xfrm>
+            <a:off x="427817" y="424715"/>
+            <a:ext cx="7827264" cy="822960"/>
+          </a:xfrm>
+          <a:prstGeom prst="rect">
+            <a:avLst/>
+          </a:prstGeom>
+          <a:noFill/>
+        </p:spPr>
+        <p:txBody>
+          <a:bodyPr wrap="square" lIns="76200" rIns="76200" tIns="50800" bIns="50800">
+            <a:spAutoFit/>
+          </a:bodyPr>
+          <a:lstStyle/>
+          <a:p>
+            <a:pPr algn="l">
+              <a:spcAft>
+                <a:spcPts val="300"/>
+              </a:spcAft>
+              <a:defRPr sz="3200">
+                <a:solidFill>
+                  <a:srgbClr val="FFFFFF"/>
+                </a:solidFill>
+                <a:latin typeface="Play"/>
+                <a:ea typeface="Play"/>
+                <a:cs typeface="Play"/>
+              </a:defRPr>
+            </a:pPr>
+            <a:r>
+              <a:rPr sz="3200">
+                <a:solidFill>
+                  <a:srgbClr val="FFFFFF"/>
+                </a:solidFill>
+                <a:latin typeface="Play"/>
+                <a:ea typeface="Play"/>
+                <a:cs typeface="Play"/>
+              </a:rPr>
+              <a:t>Что мы просим решить</a:t>
+            </a:r>
+          </a:p>
+        </p:txBody>
+      </p:sp>
+      <p:sp>
+        <p:nvSpPr>
+          <p:cNvPr id="682" name="card_0"/>
+          <p:cNvSpPr txBox="1"/>
+          <p:nvPr/>
+        </p:nvSpPr>
+        <p:spPr>
+          <a:xfrm>
+            <a:off x="580217" y="1989452"/>
+            <a:ext cx="3331220" cy="1717212"/>
+          </a:xfrm>
+          <a:prstGeom prst="rect">
+            <a:avLst/>
+          </a:prstGeom>
+          <a:noFill/>
+        </p:spPr>
+        <p:txBody>
+          <a:bodyPr wrap="square" lIns="76200" rIns="76200" tIns="50800" bIns="50800">
+            <a:spAutoFit/>
+          </a:bodyPr>
+          <a:lstStyle/>
+          <a:p>
+            <a:pPr algn="l">
+              <a:spcAft>
+                <a:spcPts val="300"/>
+              </a:spcAft>
+              <a:defRPr sz="2800" b="0">
+                <a:solidFill>
+                  <a:srgbClr val="FFFFFF"/>
+                </a:solidFill>
+                <a:latin typeface="Play"/>
+                <a:ea typeface="Play"/>
+                <a:cs typeface="Play"/>
+              </a:defRPr>
+            </a:pPr>
+            <a:r>
+              <a:rPr sz="2800" b="0">
+                <a:solidFill>
+                  <a:srgbClr val="FFFFFF"/>
+                </a:solidFill>
+                <a:latin typeface="Play"/>
+                <a:ea typeface="Play"/>
+                <a:cs typeface="Play"/>
+              </a:rPr>
+              <a:t>Запуск на всю компанию</a:t>
+            </a:r>
+          </a:p>
+        </p:txBody>
+      </p:sp>
+      <p:sp>
+        <p:nvSpPr>
+          <p:cNvPr id="683" name="card_1"/>
+          <p:cNvSpPr txBox="1"/>
+          <p:nvPr/>
+        </p:nvSpPr>
+        <p:spPr>
+          <a:xfrm>
+            <a:off x="4369978" y="1989452"/>
+            <a:ext cx="3331220" cy="1717212"/>
+          </a:xfrm>
+          <a:prstGeom prst="rect">
+            <a:avLst/>
+          </a:prstGeom>
+          <a:noFill/>
+        </p:spPr>
+        <p:txBody>
+          <a:bodyPr wrap="square" lIns="76200" rIns="76200" tIns="50800" bIns="50800">
+            <a:spAutoFit/>
+          </a:bodyPr>
+          <a:lstStyle/>
+          <a:p>
+            <a:pPr algn="l">
+              <a:spcAft>
+                <a:spcPts val="300"/>
+              </a:spcAft>
+              <a:defRPr sz="2800" b="0">
+                <a:solidFill>
+                  <a:srgbClr val="FFFFFF"/>
+                </a:solidFill>
+                <a:latin typeface="Play"/>
+                <a:ea typeface="Play"/>
+                <a:cs typeface="Play"/>
+              </a:defRPr>
+            </a:pPr>
+            <a:r>
+              <a:rPr sz="2800" b="0">
+                <a:solidFill>
+                  <a:srgbClr val="FFFFFF"/>
+                </a:solidFill>
+                <a:latin typeface="Play"/>
+                <a:ea typeface="Play"/>
+                <a:cs typeface="Play"/>
+              </a:rPr>
+              <a:t>Бюджет на расширение инфраструктуры</a:t>
+            </a:r>
+          </a:p>
+        </p:txBody>
+      </p:sp>
+      <p:sp>
+        <p:nvSpPr>
+          <p:cNvPr id="684" name="card_2"/>
+          <p:cNvSpPr txBox="1"/>
+          <p:nvPr/>
+        </p:nvSpPr>
+        <p:spPr>
+          <a:xfrm>
+            <a:off x="8159739" y="1989452"/>
+            <a:ext cx="3331220" cy="1717212"/>
+          </a:xfrm>
+          <a:prstGeom prst="rect">
+            <a:avLst/>
+          </a:prstGeom>
+          <a:noFill/>
+        </p:spPr>
+        <p:txBody>
+          <a:bodyPr wrap="square" lIns="76200" rIns="76200" tIns="50800" bIns="50800">
+            <a:spAutoFit/>
+          </a:bodyPr>
+          <a:lstStyle/>
+          <a:p>
+            <a:pPr algn="l">
+              <a:spcAft>
+                <a:spcPts val="300"/>
+              </a:spcAft>
+              <a:defRPr sz="2800" b="0">
+                <a:solidFill>
+                  <a:srgbClr val="FFFFFF"/>
+                </a:solidFill>
+                <a:latin typeface="Play"/>
+                <a:ea typeface="Play"/>
+                <a:cs typeface="Play"/>
+              </a:defRPr>
+            </a:pPr>
+            <a:r>
+              <a:rPr sz="2800" b="0">
+                <a:solidFill>
+                  <a:srgbClr val="FFFFFF"/>
+                </a:solidFill>
+                <a:latin typeface="Play"/>
+                <a:ea typeface="Play"/>
+                <a:cs typeface="Play"/>
+              </a:rPr>
+              <a:t>Назначение ответственных за интеграцию</a:t>
+            </a:r>
+          </a:p>
+        </p:txBody>
+      </p:sp>
+    </p:spTree>
+  </p:cSld>
+  <p:clrMapOvr>
+    <a:masterClrMapping/>
+  </p:clrMapOvr>
+</p:sld>
+</file>
+
+<file path=ppt/slides/slide38.xml><?xml version="1.0" encoding="utf-8"?>
+<p:sld xmlns:a="http://schemas.openxmlformats.org/drawingml/2006/main" xmlns:p="http://schemas.openxmlformats.org/presentationml/2006/main" xmlns:r="http://schemas.openxmlformats.org/officeDocument/2006/relationships">
+  <p:cSld>
+    <p:spTree>
+      <p:nvGrpSpPr>
+        <p:cNvPr id="1" name=""/>
+        <p:cNvGrpSpPr/>
+        <p:nvPr/>
+      </p:nvGrpSpPr>
+      <p:grpSpPr/>
+      <p:pic>
+        <p:nvPicPr>
+          <p:cNvPr id="620" name="Google Shape;620;p28"/>
+          <p:cNvPicPr preferRelativeResize="0"/>
+          <p:nvPr/>
+        </p:nvPicPr>
+        <p:blipFill rotWithShape="1">
+          <a:blip r:embed="rId3">
+            <a:alphaModFix/>
+          </a:blip>
+          <a:srcRect b="0" l="0" r="0" t="0"/>
+          <a:stretch/>
+        </p:blipFill>
+        <p:spPr>
+          <a:xfrm>
+            <a:off x="398723" y="6160516"/>
+            <a:ext cx="1857481" cy="292671"/>
+          </a:xfrm>
+          <a:prstGeom prst="rect">
+            <a:avLst/>
+          </a:prstGeom>
+          <a:noFill/>
+          <a:ln>
+            <a:noFill/>
+          </a:ln>
+        </p:spPr>
+      </p:pic>
+      <p:pic>
+        <p:nvPicPr>
+          <p:cNvPr descr=" " id="621" name="Google Shape;621;p28"/>
+          <p:cNvPicPr preferRelativeResize="0"/>
+          <p:nvPr/>
+        </p:nvPicPr>
+        <p:blipFill rotWithShape="1">
+          <a:blip r:embed="rId4">
+            <a:alphaModFix/>
+          </a:blip>
+          <a:srcRect b="0" l="0" r="0" t="0"/>
+          <a:stretch/>
+        </p:blipFill>
+        <p:spPr>
+          <a:xfrm>
+            <a:off x="11093496" y="6238282"/>
+            <a:ext cx="690517" cy="216000"/>
+          </a:xfrm>
+          <a:prstGeom prst="rect">
+            <a:avLst/>
+          </a:prstGeom>
+          <a:noFill/>
+          <a:ln>
+            <a:noFill/>
+          </a:ln>
+        </p:spPr>
+      </p:pic>
+      <p:sp>
+        <p:nvSpPr>
+          <p:cNvPr id="622" name="title"/>
+          <p:cNvSpPr txBox="1"/>
+          <p:nvPr/>
+        </p:nvSpPr>
+        <p:spPr>
+          <a:xfrm>
+            <a:off x="429280" y="424715"/>
+            <a:ext cx="7827264" cy="822960"/>
+          </a:xfrm>
+          <a:prstGeom prst="rect">
+            <a:avLst/>
+          </a:prstGeom>
+          <a:noFill/>
+        </p:spPr>
+        <p:txBody>
+          <a:bodyPr wrap="square" lIns="76200" rIns="76200" tIns="50800" bIns="50800">
+            <a:spAutoFit/>
+          </a:bodyPr>
+          <a:lstStyle/>
+          <a:p>
+            <a:pPr algn="l">
+              <a:spcAft>
+                <a:spcPts val="300"/>
+              </a:spcAft>
+              <a:defRPr sz="3200">
+                <a:solidFill>
+                  <a:srgbClr val="FFFFFF"/>
+                </a:solidFill>
+                <a:latin typeface="Play"/>
+                <a:ea typeface="Play"/>
+                <a:cs typeface="Play"/>
+              </a:defRPr>
+            </a:pPr>
+            <a:r>
+              <a:rPr sz="3200">
+                <a:solidFill>
+                  <a:srgbClr val="FFFFFF"/>
+                </a:solidFill>
+                <a:latin typeface="Play"/>
+                <a:ea typeface="Play"/>
+                <a:cs typeface="Play"/>
+              </a:rPr>
+              <a:t>Риски</a:t>
+            </a:r>
+          </a:p>
+        </p:txBody>
+      </p:sp>
+      <p:sp>
+        <p:nvSpPr>
+          <p:cNvPr id="623" name="body"/>
+          <p:cNvSpPr txBox="1"/>
+          <p:nvPr/>
+        </p:nvSpPr>
+        <p:spPr>
+          <a:xfrm>
+            <a:off x="429280" y="2310261"/>
+            <a:ext cx="11310884" cy="1488440"/>
+          </a:xfrm>
+          <a:prstGeom prst="rect">
+            <a:avLst/>
+          </a:prstGeom>
+          <a:noFill/>
+        </p:spPr>
+        <p:txBody>
+          <a:bodyPr wrap="square" lIns="76200" rIns="76200" tIns="50800" bIns="50800">
+            <a:spAutoFit/>
+          </a:bodyPr>
+          <a:lstStyle/>
+          <a:p>
+            <a:pPr algn="l">
+              <a:spcAft>
+                <a:spcPts val="300"/>
+              </a:spcAft>
+              <a:defRPr sz="2800">
+                <a:solidFill>
+                  <a:srgbClr val="FFFFFF"/>
+                </a:solidFill>
+                <a:latin typeface="Play"/>
+                <a:ea typeface="Play"/>
+                <a:cs typeface="Play"/>
+              </a:defRPr>
+            </a:pPr>
+            <a:r>
+              <a:rPr sz="2800">
+                <a:solidFill>
+                  <a:srgbClr val="FFFFFF"/>
+                </a:solidFill>
+                <a:latin typeface="Play"/>
+                <a:ea typeface="Play"/>
+                <a:cs typeface="Play"/>
+              </a:rPr>
+              <a:t>• Слабая модель может выдумать цифры</a:t>
+            </a:r>
+          </a:p>
+          <a:p>
+            <a:pPr algn="l">
+              <a:spcAft>
+                <a:spcPts val="300"/>
+              </a:spcAft>
+              <a:defRPr sz="2800">
+                <a:solidFill>
+                  <a:srgbClr val="FFFFFF"/>
+                </a:solidFill>
+                <a:latin typeface="Play"/>
+                <a:ea typeface="Play"/>
+                <a:cs typeface="Play"/>
+              </a:defRPr>
+            </a:pPr>
+            <a:r>
+              <a:rPr sz="2800">
+                <a:solidFill>
+                  <a:srgbClr val="FFFFFF"/>
+                </a:solidFill>
+                <a:latin typeface="Play"/>
+                <a:ea typeface="Play"/>
+                <a:cs typeface="Play"/>
+              </a:rPr>
+              <a:t>• Плохой шаблон может привести к некорректной вёрстке</a:t>
+            </a:r>
+          </a:p>
+          <a:p>
+            <a:pPr algn="l">
+              <a:spcAft>
+                <a:spcPts val="300"/>
+              </a:spcAft>
+              <a:defRPr sz="2800">
+                <a:solidFill>
+                  <a:srgbClr val="FFFFFF"/>
+                </a:solidFill>
+                <a:latin typeface="Play"/>
+                <a:ea typeface="Play"/>
+                <a:cs typeface="Play"/>
+              </a:defRPr>
+            </a:pPr>
+            <a:r>
+              <a:rPr sz="2800">
+                <a:solidFill>
+                  <a:srgbClr val="FFFFFF"/>
+                </a:solidFill>
+                <a:latin typeface="Play"/>
+                <a:ea typeface="Play"/>
+                <a:cs typeface="Play"/>
+              </a:rPr>
+              <a:t>• Нагрузка &gt;20 задач требует внешней очереди</a:t>
+            </a:r>
+          </a:p>
+        </p:txBody>
+      </p:sp>
+    </p:spTree>
+  </p:cSld>
+  <p:clrMapOvr>
+    <a:masterClrMapping/>
+  </p:clrMapOvr>
+</p:sld>
+</file>
+
+<file path=ppt/slides/slide39.xml><?xml version="1.0" encoding="utf-8"?>
 <p:sld xmlns:a="http://schemas.openxmlformats.org/drawingml/2006/main" xmlns:p="http://schemas.openxmlformats.org/presentationml/2006/main" xmlns:r="http://schemas.openxmlformats.org/officeDocument/2006/relationships">
   <p:cSld>
     <p:spTree>
@@ -8642,7 +9682,7 @@
                 <a:ea typeface="Play"/>
                 <a:cs typeface="Play"/>
               </a:rPr>
-              <a:t>План пилота</a:t>
+              <a:t>Команда</a:t>
             </a:r>
           </a:p>
         </p:txBody>
@@ -8655,8 +9695,8 @@
         </p:nvSpPr>
         <p:spPr>
           <a:xfrm>
-            <a:off x="429280" y="1592290"/>
-            <a:ext cx="11310884" cy="1341120"/>
+            <a:off x="429280" y="1492575"/>
+            <a:ext cx="11310884" cy="944880"/>
           </a:xfrm>
           <a:prstGeom prst="rect">
             <a:avLst/>
@@ -8691,7 +9731,7 @@
                 <a:ea typeface="Play"/>
                 <a:cs typeface="Play"/>
               </a:rPr>
-              <a:t>• 6 недель, 2 команды, 68 презентаций</a:t>
+              <a:t>• Дизайн‑отдел 4 человека, 11 запросов/нед, 6 дней ожидания</a:t>
             </a:r>
           </a:p>
           <a:p>
@@ -8717,33 +9757,7 @@
                 <a:ea typeface="Play"/>
                 <a:cs typeface="Play"/>
               </a:rPr>
-              <a:t>• Время сборки 4 мин, 38 запросов закрыто</a:t>
-            </a:r>
-          </a:p>
-          <a:p>
-            <a:pPr algn="l">
-              <a:spcAft>
-                <a:spcPts val="300"/>
-              </a:spcAft>
-              <a:defRPr sz="1600">
-                <a:solidFill>
-                  <a:srgbClr val="FFFFFF"/>
-                </a:solidFill>
-                <a:latin typeface="Play"/>
-                <a:ea typeface="Play"/>
-                <a:cs typeface="Play"/>
-              </a:defRPr>
-            </a:pPr>
-            <a:r>
-              <a:rPr sz="1600">
-                <a:solidFill>
-                  <a:srgbClr val="FFFFFF"/>
-                </a:solidFill>
-                <a:latin typeface="Play"/>
-                <a:ea typeface="Play"/>
-                <a:cs typeface="Play"/>
-              </a:rPr>
-              <a:t>• Нарушений – 2 из 68</a:t>
+              <a:t>• Пилотные команды 2, 68 презентаций</a:t>
             </a:r>
           </a:p>
         </p:txBody>
@@ -8757,8 +9771,8 @@
           <p:nvPr/>
         </p:nvGraphicFramePr>
         <p:xfrm>
-          <a:off x="429280" y="3104860"/>
-          <a:ext cx="11310884" cy="2668752"/>
+          <a:off x="429280" y="2608905"/>
+          <a:ext cx="11310884" cy="2898274"/>
         </p:xfrm>
         <a:graphic>
           <a:graphicData uri="http://schemas.openxmlformats.org/drawingml/2006/table">
@@ -8767,11 +9781,10 @@
                 <a:tableStyleId>{5C22544A-7EE6-4342-B048-85BDC9FD1C3A}</a:tableStyleId>
               </a:tblPr>
               <a:tblGrid>
-                <a:gridCol w="3770294"/>
-                <a:gridCol w="3770294"/>
-                <a:gridCol w="3770296"/>
+                <a:gridCol w="5655442"/>
+                <a:gridCol w="5655442"/>
               </a:tblGrid>
-              <a:tr h="533750">
+              <a:tr h="483045">
                 <a:tc>
                   <a:txBody>
                     <a:bodyPr/>
@@ -8788,7 +9801,7 @@
                         </a:defRPr>
                       </a:pPr>
                       <a:r>
-                        <a:t>Метрика</a:t>
+                        <a:t>Роль</a:t>
                       </a:r>
                     </a:p>
                   </a:txBody>
@@ -8814,33 +9827,7 @@
                         </a:defRPr>
                       </a:pPr>
                       <a:r>
-                        <a:t>Ручной</a:t>
-                      </a:r>
-                    </a:p>
-                  </a:txBody>
-                  <a:tcPr>
-                    <a:solidFill>
-                      <a:srgbClr val="0077FF"/>
-                    </a:solidFill>
-                  </a:tcPr>
-                </a:tc>
-                <a:tc>
-                  <a:txBody>
-                    <a:bodyPr/>
-                    <a:lstStyle/>
-                    <a:p>
-                      <a:pPr>
-                        <a:defRPr sz="1300" b="1">
-                          <a:solidFill>
-                            <a:srgbClr val="FFFFFF"/>
-                          </a:solidFill>
-                          <a:latin typeface="Play"/>
-                          <a:ea typeface="Play"/>
-                          <a:cs typeface="Play"/>
-                        </a:defRPr>
-                      </a:pPr>
-                      <a:r>
-                        <a:t>Пилот</a:t>
+                        <a:t>Количество</a:t>
                       </a:r>
                     </a:p>
                   </a:txBody>
@@ -8851,7 +9838,7 @@
                   </a:tcPr>
                 </a:tc>
               </a:tr>
-              <a:tr h="533750">
+              <a:tr h="483045">
                 <a:tc>
                   <a:txBody>
                     <a:bodyPr/>
@@ -8868,7 +9855,7 @@
                         </a:defRPr>
                       </a:pPr>
                       <a:r>
-                        <a:t>Кол-во презентаций</a:t>
+                        <a:t>Дизайн‑отдел</a:t>
                       </a:r>
                     </a:p>
                   </a:txBody>
@@ -8894,7 +9881,197 @@
                         </a:defRPr>
                       </a:pPr>
                       <a:r>
-                        <a:t>42</a:t>
+                        <a:t>4 человека</a:t>
+                      </a:r>
+                    </a:p>
+                  </a:txBody>
+                  <a:tcPr>
+                    <a:solidFill>
+                      <a:srgbClr val="111111"/>
+                    </a:solidFill>
+                  </a:tcPr>
+                </a:tc>
+              </a:tr>
+              <a:tr h="483045">
+                <a:tc>
+                  <a:txBody>
+                    <a:bodyPr/>
+                    <a:lstStyle/>
+                    <a:p>
+                      <a:pPr>
+                        <a:defRPr sz="1300" b="0">
+                          <a:solidFill>
+                            <a:srgbClr val="FFFFFF"/>
+                          </a:solidFill>
+                          <a:latin typeface="Play"/>
+                          <a:ea typeface="Play"/>
+                          <a:cs typeface="Play"/>
+                        </a:defRPr>
+                      </a:pPr>
+                      <a:r>
+                        <a:t>Запросы</a:t>
+                      </a:r>
+                    </a:p>
+                  </a:txBody>
+                  <a:tcPr>
+                    <a:solidFill>
+                      <a:srgbClr val="111111"/>
+                    </a:solidFill>
+                  </a:tcPr>
+                </a:tc>
+                <a:tc>
+                  <a:txBody>
+                    <a:bodyPr/>
+                    <a:lstStyle/>
+                    <a:p>
+                      <a:pPr>
+                        <a:defRPr sz="1300" b="0">
+                          <a:solidFill>
+                            <a:srgbClr val="FFFFFF"/>
+                          </a:solidFill>
+                          <a:latin typeface="Play"/>
+                          <a:ea typeface="Play"/>
+                          <a:cs typeface="Play"/>
+                        </a:defRPr>
+                      </a:pPr>
+                      <a:r>
+                        <a:t>11/нед</a:t>
+                      </a:r>
+                    </a:p>
+                  </a:txBody>
+                  <a:tcPr>
+                    <a:solidFill>
+                      <a:srgbClr val="111111"/>
+                    </a:solidFill>
+                  </a:tcPr>
+                </a:tc>
+              </a:tr>
+              <a:tr h="483045">
+                <a:tc>
+                  <a:txBody>
+                    <a:bodyPr/>
+                    <a:lstStyle/>
+                    <a:p>
+                      <a:pPr>
+                        <a:defRPr sz="1300" b="0">
+                          <a:solidFill>
+                            <a:srgbClr val="FFFFFF"/>
+                          </a:solidFill>
+                          <a:latin typeface="Play"/>
+                          <a:ea typeface="Play"/>
+                          <a:cs typeface="Play"/>
+                        </a:defRPr>
+                      </a:pPr>
+                      <a:r>
+                        <a:t>Ожидание</a:t>
+                      </a:r>
+                    </a:p>
+                  </a:txBody>
+                  <a:tcPr>
+                    <a:solidFill>
+                      <a:srgbClr val="111111"/>
+                    </a:solidFill>
+                  </a:tcPr>
+                </a:tc>
+                <a:tc>
+                  <a:txBody>
+                    <a:bodyPr/>
+                    <a:lstStyle/>
+                    <a:p>
+                      <a:pPr>
+                        <a:defRPr sz="1300" b="0">
+                          <a:solidFill>
+                            <a:srgbClr val="FFFFFF"/>
+                          </a:solidFill>
+                          <a:latin typeface="Play"/>
+                          <a:ea typeface="Play"/>
+                          <a:cs typeface="Play"/>
+                        </a:defRPr>
+                      </a:pPr>
+                      <a:r>
+                        <a:t>6 дней</a:t>
+                      </a:r>
+                    </a:p>
+                  </a:txBody>
+                  <a:tcPr>
+                    <a:solidFill>
+                      <a:srgbClr val="111111"/>
+                    </a:solidFill>
+                  </a:tcPr>
+                </a:tc>
+              </a:tr>
+              <a:tr h="483045">
+                <a:tc>
+                  <a:txBody>
+                    <a:bodyPr/>
+                    <a:lstStyle/>
+                    <a:p>
+                      <a:pPr>
+                        <a:defRPr sz="1300" b="0">
+                          <a:solidFill>
+                            <a:srgbClr val="FFFFFF"/>
+                          </a:solidFill>
+                          <a:latin typeface="Play"/>
+                          <a:ea typeface="Play"/>
+                          <a:cs typeface="Play"/>
+                        </a:defRPr>
+                      </a:pPr>
+                      <a:r>
+                        <a:t>Пилотные команды</a:t>
+                      </a:r>
+                    </a:p>
+                  </a:txBody>
+                  <a:tcPr>
+                    <a:solidFill>
+                      <a:srgbClr val="111111"/>
+                    </a:solidFill>
+                  </a:tcPr>
+                </a:tc>
+                <a:tc>
+                  <a:txBody>
+                    <a:bodyPr/>
+                    <a:lstStyle/>
+                    <a:p>
+                      <a:pPr>
+                        <a:defRPr sz="1300" b="0">
+                          <a:solidFill>
+                            <a:srgbClr val="FFFFFF"/>
+                          </a:solidFill>
+                          <a:latin typeface="Play"/>
+                          <a:ea typeface="Play"/>
+                          <a:cs typeface="Play"/>
+                        </a:defRPr>
+                      </a:pPr>
+                      <a:r>
+                        <a:t>2</a:t>
+                      </a:r>
+                    </a:p>
+                  </a:txBody>
+                  <a:tcPr>
+                    <a:solidFill>
+                      <a:srgbClr val="111111"/>
+                    </a:solidFill>
+                  </a:tcPr>
+                </a:tc>
+              </a:tr>
+              <a:tr h="483049">
+                <a:tc>
+                  <a:txBody>
+                    <a:bodyPr/>
+                    <a:lstStyle/>
+                    <a:p>
+                      <a:pPr>
+                        <a:defRPr sz="1300" b="0">
+                          <a:solidFill>
+                            <a:srgbClr val="FFFFFF"/>
+                          </a:solidFill>
+                          <a:latin typeface="Play"/>
+                          <a:ea typeface="Play"/>
+                          <a:cs typeface="Play"/>
+                        </a:defRPr>
+                      </a:pPr>
+                      <a:r>
+                        <a:t>Презентации</a:t>
                       </a:r>
                     </a:p>
                   </a:txBody>
@@ -8921,246 +10098,6 @@
                       </a:pPr>
                       <a:r>
                         <a:t>68</a:t>
-                      </a:r>
-                    </a:p>
-                  </a:txBody>
-                  <a:tcPr>
-                    <a:solidFill>
-                      <a:srgbClr val="111111"/>
-                    </a:solidFill>
-                  </a:tcPr>
-                </a:tc>
-              </a:tr>
-              <a:tr h="533750">
-                <a:tc>
-                  <a:txBody>
-                    <a:bodyPr/>
-                    <a:lstStyle/>
-                    <a:p>
-                      <a:pPr>
-                        <a:defRPr sz="1300" b="0">
-                          <a:solidFill>
-                            <a:srgbClr val="FFFFFF"/>
-                          </a:solidFill>
-                          <a:latin typeface="Play"/>
-                          <a:ea typeface="Play"/>
-                          <a:cs typeface="Play"/>
-                        </a:defRPr>
-                      </a:pPr>
-                      <a:r>
-                        <a:t>Время сборки (мин)</a:t>
-                      </a:r>
-                    </a:p>
-                  </a:txBody>
-                  <a:tcPr>
-                    <a:solidFill>
-                      <a:srgbClr val="111111"/>
-                    </a:solidFill>
-                  </a:tcPr>
-                </a:tc>
-                <a:tc>
-                  <a:txBody>
-                    <a:bodyPr/>
-                    <a:lstStyle/>
-                    <a:p>
-                      <a:pPr>
-                        <a:defRPr sz="1300" b="0">
-                          <a:solidFill>
-                            <a:srgbClr val="FFFFFF"/>
-                          </a:solidFill>
-                          <a:latin typeface="Play"/>
-                          <a:ea typeface="Play"/>
-                          <a:cs typeface="Play"/>
-                        </a:defRPr>
-                      </a:pPr>
-                      <a:r>
-                        <a:t>186</a:t>
-                      </a:r>
-                    </a:p>
-                  </a:txBody>
-                  <a:tcPr>
-                    <a:solidFill>
-                      <a:srgbClr val="111111"/>
-                    </a:solidFill>
-                  </a:tcPr>
-                </a:tc>
-                <a:tc>
-                  <a:txBody>
-                    <a:bodyPr/>
-                    <a:lstStyle/>
-                    <a:p>
-                      <a:pPr>
-                        <a:defRPr sz="1300" b="0">
-                          <a:solidFill>
-                            <a:srgbClr val="FFFFFF"/>
-                          </a:solidFill>
-                          <a:latin typeface="Play"/>
-                          <a:ea typeface="Play"/>
-                          <a:cs typeface="Play"/>
-                        </a:defRPr>
-                      </a:pPr>
-                      <a:r>
-                        <a:t>4</a:t>
-                      </a:r>
-                    </a:p>
-                  </a:txBody>
-                  <a:tcPr>
-                    <a:solidFill>
-                      <a:srgbClr val="111111"/>
-                    </a:solidFill>
-                  </a:tcPr>
-                </a:tc>
-              </a:tr>
-              <a:tr h="533750">
-                <a:tc>
-                  <a:txBody>
-                    <a:bodyPr/>
-                    <a:lstStyle/>
-                    <a:p>
-                      <a:pPr>
-                        <a:defRPr sz="1300" b="0">
-                          <a:solidFill>
-                            <a:srgbClr val="FFFFFF"/>
-                          </a:solidFill>
-                          <a:latin typeface="Play"/>
-                          <a:ea typeface="Play"/>
-                          <a:cs typeface="Play"/>
-                        </a:defRPr>
-                      </a:pPr>
-                      <a:r>
-                        <a:t>Запросы на вёрстку/нед</a:t>
-                      </a:r>
-                    </a:p>
-                  </a:txBody>
-                  <a:tcPr>
-                    <a:solidFill>
-                      <a:srgbClr val="111111"/>
-                    </a:solidFill>
-                  </a:tcPr>
-                </a:tc>
-                <a:tc>
-                  <a:txBody>
-                    <a:bodyPr/>
-                    <a:lstStyle/>
-                    <a:p>
-                      <a:pPr>
-                        <a:defRPr sz="1300" b="0">
-                          <a:solidFill>
-                            <a:srgbClr val="FFFFFF"/>
-                          </a:solidFill>
-                          <a:latin typeface="Play"/>
-                          <a:ea typeface="Play"/>
-                          <a:cs typeface="Play"/>
-                        </a:defRPr>
-                      </a:pPr>
-                      <a:r>
-                        <a:t>11</a:t>
-                      </a:r>
-                    </a:p>
-                  </a:txBody>
-                  <a:tcPr>
-                    <a:solidFill>
-                      <a:srgbClr val="111111"/>
-                    </a:solidFill>
-                  </a:tcPr>
-                </a:tc>
-                <a:tc>
-                  <a:txBody>
-                    <a:bodyPr/>
-                    <a:lstStyle/>
-                    <a:p>
-                      <a:pPr>
-                        <a:defRPr sz="1300" b="0">
-                          <a:solidFill>
-                            <a:srgbClr val="FFFFFF"/>
-                          </a:solidFill>
-                          <a:latin typeface="Play"/>
-                          <a:ea typeface="Play"/>
-                          <a:cs typeface="Play"/>
-                        </a:defRPr>
-                      </a:pPr>
-                      <a:r>
-                        <a:t>38</a:t>
-                      </a:r>
-                    </a:p>
-                  </a:txBody>
-                  <a:tcPr>
-                    <a:solidFill>
-                      <a:srgbClr val="111111"/>
-                    </a:solidFill>
-                  </a:tcPr>
-                </a:tc>
-              </a:tr>
-              <a:tr h="533752">
-                <a:tc>
-                  <a:txBody>
-                    <a:bodyPr/>
-                    <a:lstStyle/>
-                    <a:p>
-                      <a:pPr>
-                        <a:defRPr sz="1300" b="0">
-                          <a:solidFill>
-                            <a:srgbClr val="FFFFFF"/>
-                          </a:solidFill>
-                          <a:latin typeface="Play"/>
-                          <a:ea typeface="Play"/>
-                          <a:cs typeface="Play"/>
-                        </a:defRPr>
-                      </a:pPr>
-                      <a:r>
-                        <a:t>Нарушения стиля</a:t>
-                      </a:r>
-                    </a:p>
-                  </a:txBody>
-                  <a:tcPr>
-                    <a:solidFill>
-                      <a:srgbClr val="111111"/>
-                    </a:solidFill>
-                  </a:tcPr>
-                </a:tc>
-                <a:tc>
-                  <a:txBody>
-                    <a:bodyPr/>
-                    <a:lstStyle/>
-                    <a:p>
-                      <a:pPr>
-                        <a:defRPr sz="1300" b="0">
-                          <a:solidFill>
-                            <a:srgbClr val="FFFFFF"/>
-                          </a:solidFill>
-                          <a:latin typeface="Play"/>
-                          <a:ea typeface="Play"/>
-                          <a:cs typeface="Play"/>
-                        </a:defRPr>
-                      </a:pPr>
-                      <a:r>
-                        <a:t>19</a:t>
-                      </a:r>
-                    </a:p>
-                  </a:txBody>
-                  <a:tcPr>
-                    <a:solidFill>
-                      <a:srgbClr val="111111"/>
-                    </a:solidFill>
-                  </a:tcPr>
-                </a:tc>
-                <a:tc>
-                  <a:txBody>
-                    <a:bodyPr/>
-                    <a:lstStyle/>
-                    <a:p>
-                      <a:pPr>
-                        <a:defRPr sz="1300" b="0">
-                          <a:solidFill>
-                            <a:srgbClr val="FFFFFF"/>
-                          </a:solidFill>
-                          <a:latin typeface="Play"/>
-                          <a:ea typeface="Play"/>
-                          <a:cs typeface="Play"/>
-                        </a:defRPr>
-                      </a:pPr>
-                      <a:r>
-                        <a:t>2</a:t>
                       </a:r>
                     </a:p>
                   </a:txBody>

--- a/samples/VK_WorkSpace_Клиентская_конференция_Шабл__classic.pptx
+++ b/samples/VK_WorkSpace_Клиентская_конференция_Шабл__classic.pptx
@@ -284,6 +284,220 @@
     </p:ext>
   </p:extLst>
 </p:presentation>
+</file>
+
+<file path=ppt/charts/chart1.xml><?xml version="1.0" encoding="utf-8"?>
+<c:chartSpace xmlns:c="http://schemas.openxmlformats.org/drawingml/2006/chart" xmlns:a="http://schemas.openxmlformats.org/drawingml/2006/main" xmlns:r="http://schemas.openxmlformats.org/officeDocument/2006/relationships">
+  <c:date1904 val="0"/>
+  <c:chart>
+    <c:autoTitleDeleted val="1"/>
+    <c:plotArea>
+      <c:barChart>
+        <c:barDir val="col"/>
+        <c:grouping val="clustered"/>
+        <c:ser>
+          <c:idx val="0"/>
+          <c:order val="0"/>
+          <c:tx>
+            <c:strRef>
+              <c:f>Sheet1!$B$1</c:f>
+              <c:strCache>
+                <c:ptCount val="1"/>
+                <c:pt idx="0">
+                  <c:v>Время</c:v>
+                </c:pt>
+              </c:strCache>
+            </c:strRef>
+          </c:tx>
+          <c:spPr>
+            <a:solidFill>
+              <a:srgbClr val="0077FF"/>
+            </a:solidFill>
+            <a:ln>
+              <a:solidFill>
+                <a:srgbClr val="0077FF"/>
+              </a:solidFill>
+            </a:ln>
+          </c:spPr>
+          <c:cat>
+            <c:strRef>
+              <c:f>Sheet1!$A$2:$A$3</c:f>
+              <c:strCache>
+                <c:ptCount val="2"/>
+                <c:pt idx="0">
+                  <c:v>Текущая сборка</c:v>
+                </c:pt>
+                <c:pt idx="1">
+                  <c:v>Пилот</c:v>
+                </c:pt>
+              </c:strCache>
+            </c:strRef>
+          </c:cat>
+          <c:val>
+            <c:numRef>
+              <c:f>Sheet1!$B$2:$B$3</c:f>
+              <c:numCache>
+                <c:formatCode>General</c:formatCode>
+                <c:ptCount val="2"/>
+                <c:pt idx="0">
+                  <c:v>186.0</c:v>
+                </c:pt>
+                <c:pt idx="1">
+                  <c:v>4.0</c:v>
+                </c:pt>
+              </c:numCache>
+            </c:numRef>
+          </c:val>
+        </c:ser>
+        <c:dLbls>
+          <c:numFmt formatCode="0&quot; минут&quot;" sourceLinked="0"/>
+          <c:txPr>
+            <a:bodyPr wrap="none"/>
+            <a:lstStyle/>
+            <a:p>
+              <a:pPr>
+                <a:defRPr sz="1100" b="0">
+                  <a:solidFill>
+                    <a:srgbClr val="FFFFFF"/>
+                  </a:solidFill>
+                  <a:latin typeface="Play"/>
+                  <a:ea typeface="Play"/>
+                  <a:cs typeface="Play"/>
+                </a:defRPr>
+              </a:pPr>
+            </a:p>
+          </c:txPr>
+          <c:dLblPos val="outEnd"/>
+          <c:showLegendKey val="0"/>
+          <c:showVal val="1"/>
+          <c:showCatName val="0"/>
+          <c:showSerName val="0"/>
+          <c:showPercent val="0"/>
+          <c:showBubbleSize val="0"/>
+          <c:showLeaderLines val="1"/>
+        </c:dLbls>
+        <c:gapWidth val="60"/>
+        <c:axId val="-2068027336"/>
+        <c:axId val="-2113994440"/>
+      </c:barChart>
+      <c:catAx>
+        <c:axId val="-2068027336"/>
+        <c:scaling>
+          <c:orientation val="minMax"/>
+        </c:scaling>
+        <c:delete val="0"/>
+        <c:axPos val="b"/>
+        <c:majorTickMark val="out"/>
+        <c:minorTickMark val="none"/>
+        <c:tickLblPos val="nextTo"/>
+        <c:txPr>
+          <a:bodyPr/>
+          <a:lstStyle/>
+          <a:p>
+            <a:pPr>
+              <a:defRPr sz="1100" b="0">
+                <a:solidFill>
+                  <a:srgbClr val="FFFFFF"/>
+                </a:solidFill>
+                <a:latin typeface="Play"/>
+                <a:ea typeface="Play"/>
+                <a:cs typeface="Play"/>
+              </a:defRPr>
+            </a:pPr>
+          </a:p>
+        </c:txPr>
+        <c:crossAx val="-2113994440"/>
+        <c:crosses val="autoZero"/>
+        <c:auto val="1"/>
+        <c:lblAlgn val="ctr"/>
+        <c:lblOffset val="100"/>
+        <c:noMultiLvlLbl val="0"/>
+      </c:catAx>
+      <c:valAx>
+        <c:axId val="-2113994440"/>
+        <c:scaling/>
+        <c:delete val="0"/>
+        <c:axPos val="l"/>
+        <c:majorGridlines>
+          <c:spPr>
+            <a:ln w="9525">
+              <a:solidFill>
+                <a:srgbClr val="3C3C3C"/>
+              </a:solidFill>
+            </a:ln>
+          </c:spPr>
+        </c:majorGridlines>
+        <c:title>
+          <c:tx>
+            <c:rich>
+              <a:bodyPr rot="0" vert="horz"/>
+              <a:lstStyle/>
+              <a:p>
+                <a:pPr>
+                  <a:defRPr sz="1100" b="0">
+                    <a:solidFill>
+                      <a:srgbClr val="FFFFFF"/>
+                    </a:solidFill>
+                    <a:latin typeface="Play"/>
+                    <a:ea typeface="Play"/>
+                    <a:cs typeface="Play"/>
+                  </a:defRPr>
+                </a:pPr>
+                <a:r>
+                  <a:t>Время, минут</a:t>
+                </a:r>
+              </a:p>
+            </c:rich>
+          </c:tx>
+          <c:layout/>
+          <c:overlay val="0"/>
+        </c:title>
+        <c:majorTickMark val="out"/>
+        <c:minorTickMark val="none"/>
+        <c:tickLblPos val="nextTo"/>
+        <c:txPr>
+          <a:bodyPr/>
+          <a:lstStyle/>
+          <a:p>
+            <a:pPr>
+              <a:defRPr sz="1100" b="0">
+                <a:solidFill>
+                  <a:srgbClr val="FFFFFF"/>
+                </a:solidFill>
+                <a:latin typeface="Play"/>
+                <a:ea typeface="Play"/>
+                <a:cs typeface="Play"/>
+              </a:defRPr>
+            </a:pPr>
+          </a:p>
+        </c:txPr>
+        <c:crossAx val="-2068027336"/>
+        <c:crosses val="autoZero"/>
+      </c:valAx>
+    </c:plotArea>
+    <c:dispBlanksAs val="gap"/>
+  </c:chart>
+  <c:txPr>
+    <a:bodyPr/>
+    <a:lstStyle/>
+    <a:p>
+      <a:pPr>
+        <a:defRPr sz="1200" b="0">
+          <a:solidFill>
+            <a:srgbClr val="FFFFFF"/>
+          </a:solidFill>
+          <a:latin typeface="Play"/>
+          <a:ea typeface="Play"/>
+          <a:cs typeface="Play"/>
+        </a:defRPr>
+      </a:pPr>
+      <a:endParaRPr lang="en-US"/>
+    </a:p>
+  </c:txPr>
+  <c:externalData r:id="rId1">
+    <c:autoUpdate val="0"/>
+  </c:externalData>
+</c:chartSpace>
 </file>
 
 <file path=ppt/notesMasters/notesMaster1.xml><?xml version="1.0" encoding="utf-8"?>
@@ -6391,7 +6605,7 @@
                 <a:ea typeface="Play"/>
                 <a:cs typeface="Play"/>
               </a:rPr>
-              <a:t>Автоматическая вёрстка презентаций</a:t>
+              <a:t>Защита инициативы: сервис автоматической вёрстки презентаций</a:t>
             </a:r>
           </a:p>
         </p:txBody>
@@ -6405,550 +6619,6 @@
 </file>
 
 <file path=ppt/slides/slide31.xml><?xml version="1.0" encoding="utf-8"?>
-<p:sld xmlns:a="http://schemas.openxmlformats.org/drawingml/2006/main" xmlns:p="http://schemas.openxmlformats.org/presentationml/2006/main" xmlns:r="http://schemas.openxmlformats.org/officeDocument/2006/relationships">
-  <p:cSld>
-    <p:spTree>
-      <p:nvGrpSpPr>
-        <p:cNvPr id="1" name=""/>
-        <p:cNvGrpSpPr/>
-        <p:nvPr/>
-      </p:nvGrpSpPr>
-      <p:grpSpPr/>
-      <p:sp>
-        <p:nvSpPr>
-          <p:cNvPr id="2" name="title"/>
-          <p:cNvSpPr txBox="1"/>
-          <p:nvPr/>
-        </p:nvSpPr>
-        <p:spPr>
-          <a:xfrm>
-            <a:off x="429280" y="424715"/>
-            <a:ext cx="7827264" cy="822960"/>
-          </a:xfrm>
-          <a:prstGeom prst="rect">
-            <a:avLst/>
-          </a:prstGeom>
-          <a:noFill/>
-        </p:spPr>
-        <p:txBody>
-          <a:bodyPr wrap="square" lIns="76200" rIns="76200" tIns="50800" bIns="50800">
-            <a:spAutoFit/>
-          </a:bodyPr>
-          <a:lstStyle/>
-          <a:p>
-            <a:pPr algn="l">
-              <a:spcAft>
-                <a:spcPts val="300"/>
-              </a:spcAft>
-              <a:defRPr sz="3200">
-                <a:solidFill>
-                  <a:srgbClr val="FFFFFF"/>
-                </a:solidFill>
-                <a:latin typeface="Play"/>
-                <a:ea typeface="Play"/>
-                <a:cs typeface="Play"/>
-              </a:defRPr>
-            </a:pPr>
-            <a:r>
-              <a:rPr sz="3200">
-                <a:solidFill>
-                  <a:srgbClr val="FFFFFF"/>
-                </a:solidFill>
-                <a:latin typeface="Play"/>
-                <a:ea typeface="Play"/>
-                <a:cs typeface="Play"/>
-              </a:rPr>
-              <a:t>Контекст и возможность</a:t>
-            </a:r>
-          </a:p>
-        </p:txBody>
-      </p:sp>
-      <p:sp>
-        <p:nvSpPr>
-          <p:cNvPr id="3" name="body"/>
-          <p:cNvSpPr txBox="1"/>
-          <p:nvPr/>
-        </p:nvSpPr>
-        <p:spPr>
-          <a:xfrm>
-            <a:off x="429280" y="1592290"/>
-            <a:ext cx="11310884" cy="1672529"/>
-          </a:xfrm>
-          <a:prstGeom prst="rect">
-            <a:avLst/>
-          </a:prstGeom>
-          <a:noFill/>
-        </p:spPr>
-        <p:txBody>
-          <a:bodyPr wrap="square" lIns="76200" rIns="76200" tIns="50800" bIns="50800">
-            <a:spAutoFit/>
-          </a:bodyPr>
-          <a:lstStyle/>
-          <a:p>
-            <a:pPr algn="l">
-              <a:spcAft>
-                <a:spcPts val="300"/>
-              </a:spcAft>
-              <a:defRPr sz="1600">
-                <a:solidFill>
-                  <a:srgbClr val="FFFFFF"/>
-                </a:solidFill>
-                <a:latin typeface="Play"/>
-                <a:ea typeface="Play"/>
-                <a:cs typeface="Play"/>
-              </a:defRPr>
-            </a:pPr>
-            <a:r>
-              <a:rPr sz="1600">
-                <a:solidFill>
-                  <a:srgbClr val="FFFFFF"/>
-                </a:solidFill>
-                <a:latin typeface="Play"/>
-                <a:ea typeface="Play"/>
-                <a:cs typeface="Play"/>
-              </a:rPr>
-              <a:t>• 42 колоды, 186 мин сборки</a:t>
-            </a:r>
-          </a:p>
-          <a:p>
-            <a:pPr algn="l">
-              <a:spcAft>
-                <a:spcPts val="300"/>
-              </a:spcAft>
-              <a:defRPr sz="1600">
-                <a:solidFill>
-                  <a:srgbClr val="FFFFFF"/>
-                </a:solidFill>
-                <a:latin typeface="Play"/>
-                <a:ea typeface="Play"/>
-                <a:cs typeface="Play"/>
-              </a:defRPr>
-            </a:pPr>
-            <a:r>
-              <a:rPr sz="1600">
-                <a:solidFill>
-                  <a:srgbClr val="FFFFFF"/>
-                </a:solidFill>
-                <a:latin typeface="Play"/>
-                <a:ea typeface="Play"/>
-                <a:cs typeface="Play"/>
-              </a:rPr>
-              <a:t>• 74 мин правок</a:t>
-            </a:r>
-          </a:p>
-          <a:p>
-            <a:pPr algn="l">
-              <a:spcAft>
-                <a:spcPts val="300"/>
-              </a:spcAft>
-              <a:defRPr sz="1600">
-                <a:solidFill>
-                  <a:srgbClr val="FFFFFF"/>
-                </a:solidFill>
-                <a:latin typeface="Play"/>
-                <a:ea typeface="Play"/>
-                <a:cs typeface="Play"/>
-              </a:defRPr>
-            </a:pPr>
-            <a:r>
-              <a:rPr sz="1600">
-                <a:solidFill>
-                  <a:srgbClr val="FFFFFF"/>
-                </a:solidFill>
-                <a:latin typeface="Play"/>
-                <a:ea typeface="Play"/>
-                <a:cs typeface="Play"/>
-              </a:rPr>
-              <a:t>• 19 нарушений фирменного стиля</a:t>
-            </a:r>
-          </a:p>
-          <a:p>
-            <a:pPr algn="l">
-              <a:spcAft>
-                <a:spcPts val="300"/>
-              </a:spcAft>
-              <a:defRPr sz="1600">
-                <a:solidFill>
-                  <a:srgbClr val="FFFFFF"/>
-                </a:solidFill>
-                <a:latin typeface="Play"/>
-                <a:ea typeface="Play"/>
-                <a:cs typeface="Play"/>
-              </a:defRPr>
-            </a:pPr>
-            <a:r>
-              <a:rPr sz="1600">
-                <a:solidFill>
-                  <a:srgbClr val="FFFFFF"/>
-                </a:solidFill>
-                <a:latin typeface="Play"/>
-                <a:ea typeface="Play"/>
-                <a:cs typeface="Play"/>
-              </a:rPr>
-              <a:t>• 4 человека, 11 запросов/нед, 6 дней ожидания</a:t>
-            </a:r>
-          </a:p>
-        </p:txBody>
-      </p:sp>
-      <p:graphicFrame>
-        <p:nvGraphicFramePr>
-          <p:cNvPr id="4" name="Table 3"/>
-          <p:cNvGraphicFramePr>
-            <a:graphicFrameLocks noGrp="1"/>
-          </p:cNvGraphicFramePr>
-          <p:nvPr/>
-        </p:nvGraphicFramePr>
-        <p:xfrm>
-          <a:off x="429280" y="3436269"/>
-          <a:ext cx="11310884" cy="2337343"/>
-        </p:xfrm>
-        <a:graphic>
-          <a:graphicData uri="http://schemas.openxmlformats.org/drawingml/2006/table">
-            <a:tbl>
-              <a:tblPr firstRow="1" bandRow="1">
-                <a:tableStyleId>{5C22544A-7EE6-4342-B048-85BDC9FD1C3A}</a:tableStyleId>
-              </a:tblPr>
-              <a:tblGrid>
-                <a:gridCol w="5655442"/>
-                <a:gridCol w="5655442"/>
-              </a:tblGrid>
-              <a:tr h="389557">
-                <a:tc>
-                  <a:txBody>
-                    <a:bodyPr/>
-                    <a:lstStyle/>
-                    <a:p>
-                      <a:pPr>
-                        <a:defRPr sz="1300" b="1">
-                          <a:solidFill>
-                            <a:srgbClr val="FFFFFF"/>
-                          </a:solidFill>
-                          <a:latin typeface="Play"/>
-                          <a:ea typeface="Play"/>
-                          <a:cs typeface="Play"/>
-                        </a:defRPr>
-                      </a:pPr>
-                      <a:r>
-                        <a:t>Показатель</a:t>
-                      </a:r>
-                    </a:p>
-                  </a:txBody>
-                  <a:tcPr>
-                    <a:solidFill>
-                      <a:srgbClr val="0077FF"/>
-                    </a:solidFill>
-                  </a:tcPr>
-                </a:tc>
-                <a:tc>
-                  <a:txBody>
-                    <a:bodyPr/>
-                    <a:lstStyle/>
-                    <a:p>
-                      <a:pPr>
-                        <a:defRPr sz="1300" b="1">
-                          <a:solidFill>
-                            <a:srgbClr val="FFFFFF"/>
-                          </a:solidFill>
-                          <a:latin typeface="Play"/>
-                          <a:ea typeface="Play"/>
-                          <a:cs typeface="Play"/>
-                        </a:defRPr>
-                      </a:pPr>
-                      <a:r>
-                        <a:t>Значение</a:t>
-                      </a:r>
-                    </a:p>
-                  </a:txBody>
-                  <a:tcPr>
-                    <a:solidFill>
-                      <a:srgbClr val="0077FF"/>
-                    </a:solidFill>
-                  </a:tcPr>
-                </a:tc>
-              </a:tr>
-              <a:tr h="389557">
-                <a:tc>
-                  <a:txBody>
-                    <a:bodyPr/>
-                    <a:lstStyle/>
-                    <a:p>
-                      <a:pPr>
-                        <a:defRPr sz="1300" b="0">
-                          <a:solidFill>
-                            <a:srgbClr val="FFFFFF"/>
-                          </a:solidFill>
-                          <a:latin typeface="Play"/>
-                          <a:ea typeface="Play"/>
-                          <a:cs typeface="Play"/>
-                        </a:defRPr>
-                      </a:pPr>
-                      <a:r>
-                        <a:t>Сборка</a:t>
-                      </a:r>
-                    </a:p>
-                  </a:txBody>
-                  <a:tcPr>
-                    <a:solidFill>
-                      <a:srgbClr val="111111"/>
-                    </a:solidFill>
-                  </a:tcPr>
-                </a:tc>
-                <a:tc>
-                  <a:txBody>
-                    <a:bodyPr/>
-                    <a:lstStyle/>
-                    <a:p>
-                      <a:pPr>
-                        <a:defRPr sz="1300" b="0">
-                          <a:solidFill>
-                            <a:srgbClr val="FFFFFF"/>
-                          </a:solidFill>
-                          <a:latin typeface="Play"/>
-                          <a:ea typeface="Play"/>
-                          <a:cs typeface="Play"/>
-                        </a:defRPr>
-                      </a:pPr>
-                      <a:r>
-                        <a:t>186 мин</a:t>
-                      </a:r>
-                    </a:p>
-                  </a:txBody>
-                  <a:tcPr>
-                    <a:solidFill>
-                      <a:srgbClr val="111111"/>
-                    </a:solidFill>
-                  </a:tcPr>
-                </a:tc>
-              </a:tr>
-              <a:tr h="389557">
-                <a:tc>
-                  <a:txBody>
-                    <a:bodyPr/>
-                    <a:lstStyle/>
-                    <a:p>
-                      <a:pPr>
-                        <a:defRPr sz="1300" b="0">
-                          <a:solidFill>
-                            <a:srgbClr val="FFFFFF"/>
-                          </a:solidFill>
-                          <a:latin typeface="Play"/>
-                          <a:ea typeface="Play"/>
-                          <a:cs typeface="Play"/>
-                        </a:defRPr>
-                      </a:pPr>
-                      <a:r>
-                        <a:t>Правки</a:t>
-                      </a:r>
-                    </a:p>
-                  </a:txBody>
-                  <a:tcPr>
-                    <a:solidFill>
-                      <a:srgbClr val="111111"/>
-                    </a:solidFill>
-                  </a:tcPr>
-                </a:tc>
-                <a:tc>
-                  <a:txBody>
-                    <a:bodyPr/>
-                    <a:lstStyle/>
-                    <a:p>
-                      <a:pPr>
-                        <a:defRPr sz="1300" b="0">
-                          <a:solidFill>
-                            <a:srgbClr val="FFFFFF"/>
-                          </a:solidFill>
-                          <a:latin typeface="Play"/>
-                          <a:ea typeface="Play"/>
-                          <a:cs typeface="Play"/>
-                        </a:defRPr>
-                      </a:pPr>
-                      <a:r>
-                        <a:t>74 мин</a:t>
-                      </a:r>
-                    </a:p>
-                  </a:txBody>
-                  <a:tcPr>
-                    <a:solidFill>
-                      <a:srgbClr val="111111"/>
-                    </a:solidFill>
-                  </a:tcPr>
-                </a:tc>
-              </a:tr>
-              <a:tr h="389557">
-                <a:tc>
-                  <a:txBody>
-                    <a:bodyPr/>
-                    <a:lstStyle/>
-                    <a:p>
-                      <a:pPr>
-                        <a:defRPr sz="1300" b="0">
-                          <a:solidFill>
-                            <a:srgbClr val="FFFFFF"/>
-                          </a:solidFill>
-                          <a:latin typeface="Play"/>
-                          <a:ea typeface="Play"/>
-                          <a:cs typeface="Play"/>
-                        </a:defRPr>
-                      </a:pPr>
-                      <a:r>
-                        <a:t>Нарушения</a:t>
-                      </a:r>
-                    </a:p>
-                  </a:txBody>
-                  <a:tcPr>
-                    <a:solidFill>
-                      <a:srgbClr val="111111"/>
-                    </a:solidFill>
-                  </a:tcPr>
-                </a:tc>
-                <a:tc>
-                  <a:txBody>
-                    <a:bodyPr/>
-                    <a:lstStyle/>
-                    <a:p>
-                      <a:pPr>
-                        <a:defRPr sz="1300" b="0">
-                          <a:solidFill>
-                            <a:srgbClr val="FFFFFF"/>
-                          </a:solidFill>
-                          <a:latin typeface="Play"/>
-                          <a:ea typeface="Play"/>
-                          <a:cs typeface="Play"/>
-                        </a:defRPr>
-                      </a:pPr>
-                      <a:r>
-                        <a:t>19 из 42</a:t>
-                      </a:r>
-                    </a:p>
-                  </a:txBody>
-                  <a:tcPr>
-                    <a:solidFill>
-                      <a:srgbClr val="111111"/>
-                    </a:solidFill>
-                  </a:tcPr>
-                </a:tc>
-              </a:tr>
-              <a:tr h="389557">
-                <a:tc>
-                  <a:txBody>
-                    <a:bodyPr/>
-                    <a:lstStyle/>
-                    <a:p>
-                      <a:pPr>
-                        <a:defRPr sz="1300" b="0">
-                          <a:solidFill>
-                            <a:srgbClr val="FFFFFF"/>
-                          </a:solidFill>
-                          <a:latin typeface="Play"/>
-                          <a:ea typeface="Play"/>
-                          <a:cs typeface="Play"/>
-                        </a:defRPr>
-                      </a:pPr>
-                      <a:r>
-                        <a:t>Запросы</a:t>
-                      </a:r>
-                    </a:p>
-                  </a:txBody>
-                  <a:tcPr>
-                    <a:solidFill>
-                      <a:srgbClr val="111111"/>
-                    </a:solidFill>
-                  </a:tcPr>
-                </a:tc>
-                <a:tc>
-                  <a:txBody>
-                    <a:bodyPr/>
-                    <a:lstStyle/>
-                    <a:p>
-                      <a:pPr>
-                        <a:defRPr sz="1300" b="0">
-                          <a:solidFill>
-                            <a:srgbClr val="FFFFFF"/>
-                          </a:solidFill>
-                          <a:latin typeface="Play"/>
-                          <a:ea typeface="Play"/>
-                          <a:cs typeface="Play"/>
-                        </a:defRPr>
-                      </a:pPr>
-                      <a:r>
-                        <a:t>11/нед</a:t>
-                      </a:r>
-                    </a:p>
-                  </a:txBody>
-                  <a:tcPr>
-                    <a:solidFill>
-                      <a:srgbClr val="111111"/>
-                    </a:solidFill>
-                  </a:tcPr>
-                </a:tc>
-              </a:tr>
-              <a:tr h="389558">
-                <a:tc>
-                  <a:txBody>
-                    <a:bodyPr/>
-                    <a:lstStyle/>
-                    <a:p>
-                      <a:pPr>
-                        <a:defRPr sz="1300" b="0">
-                          <a:solidFill>
-                            <a:srgbClr val="FFFFFF"/>
-                          </a:solidFill>
-                          <a:latin typeface="Play"/>
-                          <a:ea typeface="Play"/>
-                          <a:cs typeface="Play"/>
-                        </a:defRPr>
-                      </a:pPr>
-                      <a:r>
-                        <a:t>Ожидание</a:t>
-                      </a:r>
-                    </a:p>
-                  </a:txBody>
-                  <a:tcPr>
-                    <a:solidFill>
-                      <a:srgbClr val="111111"/>
-                    </a:solidFill>
-                  </a:tcPr>
-                </a:tc>
-                <a:tc>
-                  <a:txBody>
-                    <a:bodyPr/>
-                    <a:lstStyle/>
-                    <a:p>
-                      <a:pPr>
-                        <a:defRPr sz="1300" b="0">
-                          <a:solidFill>
-                            <a:srgbClr val="FFFFFF"/>
-                          </a:solidFill>
-                          <a:latin typeface="Play"/>
-                          <a:ea typeface="Play"/>
-                          <a:cs typeface="Play"/>
-                        </a:defRPr>
-                      </a:pPr>
-                      <a:r>
-                        <a:t>6 дней</a:t>
-                      </a:r>
-                    </a:p>
-                  </a:txBody>
-                  <a:tcPr>
-                    <a:solidFill>
-                      <a:srgbClr val="111111"/>
-                    </a:solidFill>
-                  </a:tcPr>
-                </a:tc>
-              </a:tr>
-            </a:tbl>
-          </a:graphicData>
-        </a:graphic>
-      </p:graphicFrame>
-    </p:spTree>
-  </p:cSld>
-  <p:clrMapOvr>
-    <a:masterClrMapping/>
-  </p:clrMapOvr>
-</p:sld>
-</file>
-
-<file path=ppt/slides/slide32.xml><?xml version="1.0" encoding="utf-8"?>
 <p:sld xmlns:a="http://schemas.openxmlformats.org/drawingml/2006/main" xmlns:p="http://schemas.openxmlformats.org/presentationml/2006/main" xmlns:r="http://schemas.openxmlformats.org/officeDocument/2006/relationships">
   <p:cSld>
     <p:spTree>
@@ -7031,7 +6701,7 @@
         <p:spPr>
           <a:xfrm>
             <a:off x="300817" y="297715"/>
-            <a:ext cx="11566347" cy="5758505"/>
+            <a:ext cx="11317142" cy="3307176"/>
           </a:xfrm>
           <a:prstGeom prst="roundRect">
             <a:avLst/>
@@ -7112,21 +6782,21 @@
                 <a:ea typeface="Play"/>
                 <a:cs typeface="Play"/>
               </a:rPr>
-              <a:t>Предложение</a:t>
+              <a:t>Контекст и возможность</a:t>
             </a:r>
           </a:p>
         </p:txBody>
       </p:sp>
       <p:sp>
         <p:nvSpPr>
-          <p:cNvPr id="682" name="body"/>
+          <p:cNvPr id="682" name="card_0"/>
           <p:cNvSpPr txBox="1"/>
           <p:nvPr/>
         </p:nvSpPr>
         <p:spPr>
           <a:xfrm>
-            <a:off x="427817" y="1837052"/>
-            <a:ext cx="11312347" cy="1341120"/>
+            <a:off x="580217" y="1989452"/>
+            <a:ext cx="3331220" cy="1717212"/>
           </a:xfrm>
           <a:prstGeom prst="rect">
             <a:avLst/>
@@ -7143,7 +6813,7 @@
               <a:spcAft>
                 <a:spcPts val="300"/>
               </a:spcAft>
-              <a:defRPr sz="1600">
+              <a:defRPr sz="2800" b="0">
                 <a:solidFill>
                   <a:srgbClr val="FFFFFF"/>
                 </a:solidFill>
@@ -7153,7 +6823,7 @@
               </a:defRPr>
             </a:pPr>
             <a:r>
-              <a:rPr sz="1600">
+              <a:rPr sz="2800" b="0">
                 <a:solidFill>
                   <a:srgbClr val="FFFFFF"/>
                 </a:solidFill>
@@ -7161,15 +6831,38 @@
                 <a:ea typeface="Play"/>
                 <a:cs typeface="Play"/>
               </a:rPr>
-              <a:t>• Сервис принимает pptx, материалы, применяет дизайн‑систему</a:t>
+              <a:t>42 колоды, 12 слайдов, 186 минут сборки</a:t>
             </a:r>
           </a:p>
+        </p:txBody>
+      </p:sp>
+      <p:sp>
+        <p:nvSpPr>
+          <p:cNvPr id="683" name="card_1"/>
+          <p:cNvSpPr txBox="1"/>
+          <p:nvPr/>
+        </p:nvSpPr>
+        <p:spPr>
+          <a:xfrm>
+            <a:off x="4369978" y="1989452"/>
+            <a:ext cx="3331220" cy="1717212"/>
+          </a:xfrm>
+          <a:prstGeom prst="rect">
+            <a:avLst/>
+          </a:prstGeom>
+          <a:noFill/>
+        </p:spPr>
+        <p:txBody>
+          <a:bodyPr wrap="square" lIns="76200" rIns="76200" tIns="50800" bIns="50800">
+            <a:spAutoFit/>
+          </a:bodyPr>
+          <a:lstStyle/>
           <a:p>
             <a:pPr algn="l">
               <a:spcAft>
                 <a:spcPts val="300"/>
               </a:spcAft>
-              <a:defRPr sz="1600">
+              <a:defRPr sz="2800" b="0">
                 <a:solidFill>
                   <a:srgbClr val="FFFFFF"/>
                 </a:solidFill>
@@ -7179,7 +6872,7 @@
               </a:defRPr>
             </a:pPr>
             <a:r>
-              <a:rPr sz="1600">
+              <a:rPr sz="2800" b="0">
                 <a:solidFill>
                   <a:srgbClr val="FFFFFF"/>
                 </a:solidFill>
@@ -7187,15 +6880,38 @@
                 <a:ea typeface="Play"/>
                 <a:cs typeface="Play"/>
               </a:rPr>
-              <a:t>• Экспорт в pptx, pdf, html, слайды редактируемы</a:t>
+              <a:t>74 минуты правки, 19 нарушений фирменного стиля</a:t>
             </a:r>
           </a:p>
+        </p:txBody>
+      </p:sp>
+      <p:sp>
+        <p:nvSpPr>
+          <p:cNvPr id="684" name="card_2"/>
+          <p:cNvSpPr txBox="1"/>
+          <p:nvPr/>
+        </p:nvSpPr>
+        <p:spPr>
+          <a:xfrm>
+            <a:off x="8159739" y="1989452"/>
+            <a:ext cx="3331220" cy="1717212"/>
+          </a:xfrm>
+          <a:prstGeom prst="rect">
+            <a:avLst/>
+          </a:prstGeom>
+          <a:noFill/>
+        </p:spPr>
+        <p:txBody>
+          <a:bodyPr wrap="square" lIns="76200" rIns="76200" tIns="50800" bIns="50800">
+            <a:spAutoFit/>
+          </a:bodyPr>
+          <a:lstStyle/>
           <a:p>
             <a:pPr algn="l">
               <a:spcAft>
                 <a:spcPts val="300"/>
               </a:spcAft>
-              <a:defRPr sz="1600">
+              <a:defRPr sz="2800" b="0">
                 <a:solidFill>
                   <a:srgbClr val="FFFFFF"/>
                 </a:solidFill>
@@ -7205,7 +6921,7 @@
               </a:defRPr>
             </a:pPr>
             <a:r>
-              <a:rPr sz="1600">
+              <a:rPr sz="2800" b="0">
                 <a:solidFill>
                   <a:srgbClr val="FFFFFF"/>
                 </a:solidFill>
@@ -7213,52 +6929,105 @@
                 <a:ea typeface="Play"/>
                 <a:cs typeface="Play"/>
               </a:rPr>
-              <a:t>• Аудит качества устраняет нарушения стиля</a:t>
+              <a:t>4 дизайнера, 11 запросов/неделя, 6 дней ожидания</a:t>
+            </a:r>
+          </a:p>
+        </p:txBody>
+      </p:sp>
+    </p:spTree>
+  </p:cSld>
+  <p:clrMapOvr>
+    <a:masterClrMapping/>
+  </p:clrMapOvr>
+</p:sld>
+</file>
+
+<file path=ppt/slides/slide32.xml><?xml version="1.0" encoding="utf-8"?>
+<p:sld xmlns:a="http://schemas.openxmlformats.org/drawingml/2006/main" xmlns:p="http://schemas.openxmlformats.org/presentationml/2006/main" xmlns:r="http://schemas.openxmlformats.org/officeDocument/2006/relationships">
+  <p:cSld>
+    <p:spTree>
+      <p:nvGrpSpPr>
+        <p:cNvPr id="1" name=""/>
+        <p:cNvGrpSpPr/>
+        <p:nvPr/>
+      </p:nvGrpSpPr>
+      <p:grpSpPr/>
+      <p:sp>
+        <p:nvSpPr>
+          <p:cNvPr id="2" name="title"/>
+          <p:cNvSpPr txBox="1"/>
+          <p:nvPr/>
+        </p:nvSpPr>
+        <p:spPr>
+          <a:xfrm>
+            <a:off x="429280" y="424715"/>
+            <a:ext cx="7827264" cy="822960"/>
+          </a:xfrm>
+          <a:prstGeom prst="rect">
+            <a:avLst/>
+          </a:prstGeom>
+          <a:noFill/>
+        </p:spPr>
+        <p:txBody>
+          <a:bodyPr wrap="square" lIns="76200" rIns="76200" tIns="50800" bIns="50800">
+            <a:spAutoFit/>
+          </a:bodyPr>
+          <a:lstStyle/>
+          <a:p>
+            <a:pPr algn="l">
+              <a:spcAft>
+                <a:spcPts val="300"/>
+              </a:spcAft>
+              <a:defRPr sz="3200">
+                <a:solidFill>
+                  <a:srgbClr val="FFFFFF"/>
+                </a:solidFill>
+                <a:latin typeface="Play"/>
+                <a:ea typeface="Play"/>
+                <a:cs typeface="Play"/>
+              </a:defRPr>
+            </a:pPr>
+            <a:r>
+              <a:rPr sz="3200">
+                <a:solidFill>
+                  <a:srgbClr val="FFFFFF"/>
+                </a:solidFill>
+                <a:latin typeface="Play"/>
+                <a:ea typeface="Play"/>
+                <a:cs typeface="Play"/>
+              </a:rPr>
+              <a:t>Предложение</a:t>
             </a:r>
           </a:p>
         </p:txBody>
       </p:sp>
       <p:sp>
         <p:nvSpPr>
-          <p:cNvPr id="683" name="Pentagon 682"/>
-          <p:cNvSpPr/>
+          <p:cNvPr id="3" name="body"/>
+          <p:cNvSpPr txBox="1"/>
           <p:nvPr/>
         </p:nvSpPr>
         <p:spPr>
           <a:xfrm>
-            <a:off x="427817" y="3971721"/>
-            <a:ext cx="2153870" cy="1335399"/>
+            <a:off x="429280" y="2489917"/>
+            <a:ext cx="11310884" cy="1488440"/>
           </a:xfrm>
-          <a:prstGeom prst="homePlate">
+          <a:prstGeom prst="rect">
             <a:avLst/>
           </a:prstGeom>
-          <a:solidFill>
-            <a:srgbClr val="0077FF"/>
-          </a:solidFill>
-          <a:ln>
-            <a:noFill/>
-          </a:ln>
+          <a:noFill/>
         </p:spPr>
-        <p:style>
-          <a:lnRef idx="1">
-            <a:schemeClr val="accent1"/>
-          </a:lnRef>
-          <a:fillRef idx="3">
-            <a:schemeClr val="accent1"/>
-          </a:fillRef>
-          <a:effectRef idx="2">
-            <a:schemeClr val="accent1"/>
-          </a:effectRef>
-          <a:fontRef idx="minor">
-            <a:schemeClr val="lt1"/>
-          </a:fontRef>
-        </p:style>
         <p:txBody>
-          <a:bodyPr rtlCol="0" anchor="ctr" wrap="square" lIns="12700" rIns="12700" tIns="12700" bIns="12700"/>
+          <a:bodyPr wrap="square" lIns="76200" rIns="76200" tIns="50800" bIns="50800">
+            <a:spAutoFit/>
+          </a:bodyPr>
           <a:lstStyle/>
           <a:p>
-            <a:pPr algn="ctr">
-              <a:defRPr sz="1143" b="0">
+            <a:pPr algn="l">
+              <a:spcAft>
+                <a:spcPts val="300"/>
+              </a:spcAft>
+              <a:defRPr sz="2800">
                 <a:solidFill>
                   <a:srgbClr val="FFFFFF"/>
                 </a:solidFill>
@@ -7268,7 +7037,7 @@
               </a:defRPr>
             </a:pPr>
             <a:r>
-              <a:rPr sz="1143" b="0">
+              <a:rPr sz="2800">
                 <a:solidFill>
                   <a:srgbClr val="FFFFFF"/>
                 </a:solidFill>
@@ -7276,52 +7045,15 @@
                 <a:ea typeface="Play"/>
                 <a:cs typeface="Play"/>
               </a:rPr>
-              <a:t>Шаблон</a:t>
+              <a:t>• Сервис принимает шаблон pptx и материалы</a:t>
             </a:r>
           </a:p>
-        </p:txBody>
-      </p:sp>
-      <p:sp>
-        <p:nvSpPr>
-          <p:cNvPr id="684" name="Chevron 683"/>
-          <p:cNvSpPr/>
-          <p:nvPr/>
-        </p:nvSpPr>
-        <p:spPr>
-          <a:xfrm>
-            <a:off x="2717436" y="3971721"/>
-            <a:ext cx="2153870" cy="1335399"/>
-          </a:xfrm>
-          <a:prstGeom prst="chevron">
-            <a:avLst/>
-          </a:prstGeom>
-          <a:solidFill>
-            <a:srgbClr val="0077FF"/>
-          </a:solidFill>
-          <a:ln>
-            <a:noFill/>
-          </a:ln>
-        </p:spPr>
-        <p:style>
-          <a:lnRef idx="1">
-            <a:schemeClr val="accent1"/>
-          </a:lnRef>
-          <a:fillRef idx="3">
-            <a:schemeClr val="accent1"/>
-          </a:fillRef>
-          <a:effectRef idx="2">
-            <a:schemeClr val="accent1"/>
-          </a:effectRef>
-          <a:fontRef idx="minor">
-            <a:schemeClr val="lt1"/>
-          </a:fontRef>
-        </p:style>
-        <p:txBody>
-          <a:bodyPr rtlCol="0" anchor="ctr" wrap="square" lIns="12700" rIns="12700" tIns="12700" bIns="12700"/>
-          <a:lstStyle/>
           <a:p>
-            <a:pPr algn="ctr">
-              <a:defRPr sz="1143" b="0">
+            <a:pPr algn="l">
+              <a:spcAft>
+                <a:spcPts val="300"/>
+              </a:spcAft>
+              <a:defRPr sz="2800">
                 <a:solidFill>
                   <a:srgbClr val="FFFFFF"/>
                 </a:solidFill>
@@ -7331,7 +7063,7 @@
               </a:defRPr>
             </a:pPr>
             <a:r>
-              <a:rPr sz="1143" b="0">
+              <a:rPr sz="2800">
                 <a:solidFill>
                   <a:srgbClr val="FFFFFF"/>
                 </a:solidFill>
@@ -7339,52 +7071,15 @@
                 <a:ea typeface="Play"/>
                 <a:cs typeface="Play"/>
               </a:rPr>
-              <a:t>План колоды</a:t>
+              <a:t>• Генерирует колоду, экспортирует pptx/pdf/html</a:t>
             </a:r>
           </a:p>
-        </p:txBody>
-      </p:sp>
-      <p:sp>
-        <p:nvSpPr>
-          <p:cNvPr id="685" name="Chevron 684"/>
-          <p:cNvSpPr/>
-          <p:nvPr/>
-        </p:nvSpPr>
-        <p:spPr>
-          <a:xfrm>
-            <a:off x="5007055" y="3971721"/>
-            <a:ext cx="2153870" cy="1335399"/>
-          </a:xfrm>
-          <a:prstGeom prst="chevron">
-            <a:avLst/>
-          </a:prstGeom>
-          <a:solidFill>
-            <a:srgbClr val="0077FF"/>
-          </a:solidFill>
-          <a:ln>
-            <a:noFill/>
-          </a:ln>
-        </p:spPr>
-        <p:style>
-          <a:lnRef idx="1">
-            <a:schemeClr val="accent1"/>
-          </a:lnRef>
-          <a:fillRef idx="3">
-            <a:schemeClr val="accent1"/>
-          </a:fillRef>
-          <a:effectRef idx="2">
-            <a:schemeClr val="accent1"/>
-          </a:effectRef>
-          <a:fontRef idx="minor">
-            <a:schemeClr val="lt1"/>
-          </a:fontRef>
-        </p:style>
-        <p:txBody>
-          <a:bodyPr rtlCol="0" anchor="ctr" wrap="square" lIns="12700" rIns="12700" tIns="12700" bIns="12700"/>
-          <a:lstStyle/>
           <a:p>
-            <a:pPr algn="ctr">
-              <a:defRPr sz="1143" b="0">
+            <a:pPr algn="l">
+              <a:spcAft>
+                <a:spcPts val="300"/>
+              </a:spcAft>
+              <a:defRPr sz="2800">
                 <a:solidFill>
                   <a:srgbClr val="FFFFFF"/>
                 </a:solidFill>
@@ -7394,7 +7089,7 @@
               </a:defRPr>
             </a:pPr>
             <a:r>
-              <a:rPr sz="1143" b="0">
+              <a:rPr sz="2800">
                 <a:solidFill>
                   <a:srgbClr val="FFFFFF"/>
                 </a:solidFill>
@@ -7402,133 +7097,7 @@
                 <a:ea typeface="Play"/>
                 <a:cs typeface="Play"/>
               </a:rPr>
-              <a:t>Вёрстка</a:t>
-            </a:r>
-          </a:p>
-        </p:txBody>
-      </p:sp>
-      <p:sp>
-        <p:nvSpPr>
-          <p:cNvPr id="686" name="Chevron 685"/>
-          <p:cNvSpPr/>
-          <p:nvPr/>
-        </p:nvSpPr>
-        <p:spPr>
-          <a:xfrm>
-            <a:off x="7296674" y="3971721"/>
-            <a:ext cx="2153870" cy="1335399"/>
-          </a:xfrm>
-          <a:prstGeom prst="chevron">
-            <a:avLst/>
-          </a:prstGeom>
-          <a:solidFill>
-            <a:srgbClr val="0077FF"/>
-          </a:solidFill>
-          <a:ln>
-            <a:noFill/>
-          </a:ln>
-        </p:spPr>
-        <p:style>
-          <a:lnRef idx="1">
-            <a:schemeClr val="accent1"/>
-          </a:lnRef>
-          <a:fillRef idx="3">
-            <a:schemeClr val="accent1"/>
-          </a:fillRef>
-          <a:effectRef idx="2">
-            <a:schemeClr val="accent1"/>
-          </a:effectRef>
-          <a:fontRef idx="minor">
-            <a:schemeClr val="lt1"/>
-          </a:fontRef>
-        </p:style>
-        <p:txBody>
-          <a:bodyPr rtlCol="0" anchor="ctr" wrap="square" lIns="12700" rIns="12700" tIns="12700" bIns="12700"/>
-          <a:lstStyle/>
-          <a:p>
-            <a:pPr algn="ctr">
-              <a:defRPr sz="1143" b="0">
-                <a:solidFill>
-                  <a:srgbClr val="FFFFFF"/>
-                </a:solidFill>
-                <a:latin typeface="Play"/>
-                <a:ea typeface="Play"/>
-                <a:cs typeface="Play"/>
-              </a:defRPr>
-            </a:pPr>
-            <a:r>
-              <a:rPr sz="1143" b="0">
-                <a:solidFill>
-                  <a:srgbClr val="FFFFFF"/>
-                </a:solidFill>
-                <a:latin typeface="Play"/>
-                <a:ea typeface="Play"/>
-                <a:cs typeface="Play"/>
-              </a:rPr>
-              <a:t>Аудит</a:t>
-            </a:r>
-          </a:p>
-        </p:txBody>
-      </p:sp>
-      <p:sp>
-        <p:nvSpPr>
-          <p:cNvPr id="687" name="Chevron 686"/>
-          <p:cNvSpPr/>
-          <p:nvPr/>
-        </p:nvSpPr>
-        <p:spPr>
-          <a:xfrm>
-            <a:off x="9586293" y="3971721"/>
-            <a:ext cx="2153870" cy="1335399"/>
-          </a:xfrm>
-          <a:prstGeom prst="chevron">
-            <a:avLst/>
-          </a:prstGeom>
-          <a:solidFill>
-            <a:srgbClr val="0077FF"/>
-          </a:solidFill>
-          <a:ln>
-            <a:noFill/>
-          </a:ln>
-        </p:spPr>
-        <p:style>
-          <a:lnRef idx="1">
-            <a:schemeClr val="accent1"/>
-          </a:lnRef>
-          <a:fillRef idx="3">
-            <a:schemeClr val="accent1"/>
-          </a:fillRef>
-          <a:effectRef idx="2">
-            <a:schemeClr val="accent1"/>
-          </a:effectRef>
-          <a:fontRef idx="minor">
-            <a:schemeClr val="lt1"/>
-          </a:fontRef>
-        </p:style>
-        <p:txBody>
-          <a:bodyPr rtlCol="0" anchor="ctr" wrap="square" lIns="12700" rIns="12700" tIns="12700" bIns="12700"/>
-          <a:lstStyle/>
-          <a:p>
-            <a:pPr algn="ctr">
-              <a:defRPr sz="1143" b="0">
-                <a:solidFill>
-                  <a:srgbClr val="FFFFFF"/>
-                </a:solidFill>
-                <a:latin typeface="Play"/>
-                <a:ea typeface="Play"/>
-                <a:cs typeface="Play"/>
-              </a:defRPr>
-            </a:pPr>
-            <a:r>
-              <a:rPr sz="1143" b="0">
-                <a:solidFill>
-                  <a:srgbClr val="FFFFFF"/>
-                </a:solidFill>
-                <a:latin typeface="Play"/>
-                <a:ea typeface="Play"/>
-                <a:cs typeface="Play"/>
-              </a:rPr>
-              <a:t>Экспорт</a:t>
+              <a:t>• Автоматический аудит исправляет нарушения стиля</a:t>
             </a:r>
           </a:p>
         </p:txBody>
@@ -7649,7 +7218,7 @@
                 <a:ea typeface="Play"/>
                 <a:cs typeface="Play"/>
               </a:rPr>
-              <a:t>План пилота</a:t>
+              <a:t>Ожидаемый эффект</a:t>
             </a:r>
           </a:p>
         </p:txBody>
@@ -7662,8 +7231,8 @@
         </p:nvSpPr>
         <p:spPr>
           <a:xfrm>
-            <a:off x="429280" y="2310261"/>
-            <a:ext cx="11310884" cy="1488440"/>
+            <a:off x="429280" y="2156167"/>
+            <a:ext cx="11310884" cy="1950720"/>
           </a:xfrm>
           <a:prstGeom prst="rect">
             <a:avLst/>
@@ -7698,7 +7267,7 @@
                 <a:ea typeface="Play"/>
                 <a:cs typeface="Play"/>
               </a:rPr>
-              <a:t>• 6 недель</a:t>
+              <a:t>• Сборка 4 минуты вместо 186</a:t>
             </a:r>
           </a:p>
           <a:p>
@@ -7724,7 +7293,7 @@
                 <a:ea typeface="Play"/>
                 <a:cs typeface="Play"/>
               </a:rPr>
-              <a:t>• 2 команды</a:t>
+              <a:t>• Время до первой версии 1 день вместо 6</a:t>
             </a:r>
           </a:p>
           <a:p>
@@ -7750,7 +7319,33 @@
                 <a:ea typeface="Play"/>
                 <a:cs typeface="Play"/>
               </a:rPr>
-              <a:t>• 68 презентаций</a:t>
+              <a:t>• Нарушений 2 из 68, все исправлены</a:t>
+            </a:r>
+          </a:p>
+          <a:p>
+            <a:pPr algn="l">
+              <a:spcAft>
+                <a:spcPts val="300"/>
+              </a:spcAft>
+              <a:defRPr sz="2800">
+                <a:solidFill>
+                  <a:srgbClr val="FFFFFF"/>
+                </a:solidFill>
+                <a:latin typeface="Play"/>
+                <a:ea typeface="Play"/>
+                <a:cs typeface="Play"/>
+              </a:defRPr>
+            </a:pPr>
+            <a:r>
+              <a:rPr sz="2800">
+                <a:solidFill>
+                  <a:srgbClr val="FFFFFF"/>
+                </a:solidFill>
+                <a:latin typeface="Play"/>
+                <a:ea typeface="Play"/>
+                <a:cs typeface="Play"/>
+              </a:rPr>
+              <a:t>• Дизайнеры закрыли 38 запросов вместо 11</a:t>
             </a:r>
           </a:p>
         </p:txBody>
@@ -7817,21 +7412,57 @@
                 <a:ea typeface="Play"/>
                 <a:cs typeface="Play"/>
               </a:rPr>
-              <a:t>Результаты пилота</a:t>
+              <a:t>Время сборки колоды</a:t>
             </a:r>
           </a:p>
         </p:txBody>
       </p:sp>
+      <p:graphicFrame>
+        <p:nvGraphicFramePr>
+          <p:cNvPr id="3" name="Chart 2"/>
+          <p:cNvGraphicFramePr>
+            <a:graphicFrameLocks noGrp="1"/>
+          </p:cNvGraphicFramePr>
+          <p:nvPr/>
+        </p:nvGraphicFramePr>
+        <p:xfrm>
+          <a:off x="429280" y="1492575"/>
+          <a:ext cx="11310884" cy="4014604"/>
+        </p:xfrm>
+        <a:graphic>
+          <a:graphicData uri="http://schemas.openxmlformats.org/drawingml/2006/chart">
+            <c:chart xmlns:c="http://schemas.openxmlformats.org/drawingml/2006/chart" r:id="rId4"/>
+          </a:graphicData>
+        </a:graphic>
+      </p:graphicFrame>
+    </p:spTree>
+  </p:cSld>
+  <p:clrMapOvr>
+    <a:masterClrMapping/>
+  </p:clrMapOvr>
+</p:sld>
+</file>
+
+<file path=ppt/slides/slide35.xml><?xml version="1.0" encoding="utf-8"?>
+<p:sld xmlns:a="http://schemas.openxmlformats.org/drawingml/2006/main" xmlns:p="http://schemas.openxmlformats.org/presentationml/2006/main" xmlns:r="http://schemas.openxmlformats.org/officeDocument/2006/relationships">
+  <p:cSld>
+    <p:spTree>
+      <p:nvGrpSpPr>
+        <p:cNvPr id="1" name=""/>
+        <p:cNvGrpSpPr/>
+        <p:nvPr/>
+      </p:nvGrpSpPr>
+      <p:grpSpPr/>
       <p:sp>
         <p:nvSpPr>
-          <p:cNvPr id="3" name="body"/>
+          <p:cNvPr id="2" name="title"/>
           <p:cNvSpPr txBox="1"/>
           <p:nvPr/>
         </p:nvSpPr>
         <p:spPr>
           <a:xfrm>
-            <a:off x="429280" y="1492575"/>
-            <a:ext cx="11310884" cy="1605841"/>
+            <a:off x="429280" y="424715"/>
+            <a:ext cx="7827264" cy="822960"/>
           </a:xfrm>
           <a:prstGeom prst="rect">
             <a:avLst/>
@@ -7848,7 +7479,7 @@
               <a:spcAft>
                 <a:spcPts val="300"/>
               </a:spcAft>
-              <a:defRPr sz="1600">
+              <a:defRPr sz="3200">
                 <a:solidFill>
                   <a:srgbClr val="FFFFFF"/>
                 </a:solidFill>
@@ -7858,7 +7489,7 @@
               </a:defRPr>
             </a:pPr>
             <a:r>
-              <a:rPr sz="1600">
+              <a:rPr sz="3200">
                 <a:solidFill>
                   <a:srgbClr val="FFFFFF"/>
                 </a:solidFill>
@@ -7866,100 +7497,22 @@
                 <a:ea typeface="Play"/>
                 <a:cs typeface="Play"/>
               </a:rPr>
-              <a:t>• Сборка 4 мин вместо 186</a:t>
-            </a:r>
-          </a:p>
-          <a:p>
-            <a:pPr algn="l">
-              <a:spcAft>
-                <a:spcPts val="300"/>
-              </a:spcAft>
-              <a:defRPr sz="1600">
-                <a:solidFill>
-                  <a:srgbClr val="FFFFFF"/>
-                </a:solidFill>
-                <a:latin typeface="Play"/>
-                <a:ea typeface="Play"/>
-                <a:cs typeface="Play"/>
-              </a:defRPr>
-            </a:pPr>
-            <a:r>
-              <a:rPr sz="1600">
-                <a:solidFill>
-                  <a:srgbClr val="FFFFFF"/>
-                </a:solidFill>
-                <a:latin typeface="Play"/>
-                <a:ea typeface="Play"/>
-                <a:cs typeface="Play"/>
-              </a:rPr>
-              <a:t>• 1 день до первой версии вместо 6</a:t>
-            </a:r>
-          </a:p>
-          <a:p>
-            <a:pPr algn="l">
-              <a:spcAft>
-                <a:spcPts val="300"/>
-              </a:spcAft>
-              <a:defRPr sz="1600">
-                <a:solidFill>
-                  <a:srgbClr val="FFFFFF"/>
-                </a:solidFill>
-                <a:latin typeface="Play"/>
-                <a:ea typeface="Play"/>
-                <a:cs typeface="Play"/>
-              </a:defRPr>
-            </a:pPr>
-            <a:r>
-              <a:rPr sz="1600">
-                <a:solidFill>
-                  <a:srgbClr val="FFFFFF"/>
-                </a:solidFill>
-                <a:latin typeface="Play"/>
-                <a:ea typeface="Play"/>
-                <a:cs typeface="Play"/>
-              </a:rPr>
-              <a:t>• 2 нарушения из 68 вместо 19</a:t>
-            </a:r>
-          </a:p>
-          <a:p>
-            <a:pPr algn="l">
-              <a:spcAft>
-                <a:spcPts val="300"/>
-              </a:spcAft>
-              <a:defRPr sz="1600">
-                <a:solidFill>
-                  <a:srgbClr val="FFFFFF"/>
-                </a:solidFill>
-                <a:latin typeface="Play"/>
-                <a:ea typeface="Play"/>
-                <a:cs typeface="Play"/>
-              </a:defRPr>
-            </a:pPr>
-            <a:r>
-              <a:rPr sz="1600">
-                <a:solidFill>
-                  <a:srgbClr val="FFFFFF"/>
-                </a:solidFill>
-                <a:latin typeface="Play"/>
-                <a:ea typeface="Play"/>
-                <a:cs typeface="Play"/>
-              </a:rPr>
-              <a:t>• 38 запросов вместо 11</a:t>
+              <a:t>Нарушения фирменного стиля</a:t>
             </a:r>
           </a:p>
         </p:txBody>
       </p:sp>
       <p:graphicFrame>
         <p:nvGraphicFramePr>
-          <p:cNvPr id="4" name="Table 3"/>
+          <p:cNvPr id="3" name="Table 2"/>
           <p:cNvGraphicFramePr>
             <a:graphicFrameLocks noGrp="1"/>
           </p:cNvGraphicFramePr>
           <p:nvPr/>
         </p:nvGraphicFramePr>
         <p:xfrm>
-          <a:off x="429280" y="3269866"/>
-          <a:ext cx="11310884" cy="2237312"/>
+          <a:off x="429280" y="1664162"/>
+          <a:ext cx="11310884" cy="3753589"/>
         </p:xfrm>
         <a:graphic>
           <a:graphicData uri="http://schemas.openxmlformats.org/drawingml/2006/table">
@@ -7972,7 +7525,7 @@
                 <a:gridCol w="3770294"/>
                 <a:gridCol w="3770296"/>
               </a:tblGrid>
-              <a:tr h="447462">
+              <a:tr h="1876794">
                 <a:tc>
                   <a:txBody>
                     <a:bodyPr/>
@@ -8015,7 +7568,7 @@
                         </a:defRPr>
                       </a:pPr>
                       <a:r>
-                        <a:t>До пилота</a:t>
+                        <a:t>Текущие</a:t>
                       </a:r>
                     </a:p>
                   </a:txBody>
@@ -8041,7 +7594,7 @@
                         </a:defRPr>
                       </a:pPr>
                       <a:r>
-                        <a:t>После пилота</a:t>
+                        <a:t>Пилот</a:t>
                       </a:r>
                     </a:p>
                   </a:txBody>
@@ -8052,7 +7605,7 @@
                   </a:tcPr>
                 </a:tc>
               </a:tr>
-              <a:tr h="447462">
+              <a:tr h="1876795">
                 <a:tc>
                   <a:txBody>
                     <a:bodyPr/>
@@ -8069,167 +7622,7 @@
                         </a:defRPr>
                       </a:pPr>
                       <a:r>
-                        <a:t>Сборка</a:t>
-                      </a:r>
-                    </a:p>
-                  </a:txBody>
-                  <a:tcPr>
-                    <a:solidFill>
-                      <a:srgbClr val="111111"/>
-                    </a:solidFill>
-                  </a:tcPr>
-                </a:tc>
-                <a:tc>
-                  <a:txBody>
-                    <a:bodyPr/>
-                    <a:lstStyle/>
-                    <a:p>
-                      <a:pPr>
-                        <a:defRPr sz="1300" b="0">
-                          <a:solidFill>
-                            <a:srgbClr val="FFFFFF"/>
-                          </a:solidFill>
-                          <a:latin typeface="Play"/>
-                          <a:ea typeface="Play"/>
-                          <a:cs typeface="Play"/>
-                        </a:defRPr>
-                      </a:pPr>
-                      <a:r>
-                        <a:t>186 мин</a:t>
-                      </a:r>
-                    </a:p>
-                  </a:txBody>
-                  <a:tcPr>
-                    <a:solidFill>
-                      <a:srgbClr val="111111"/>
-                    </a:solidFill>
-                  </a:tcPr>
-                </a:tc>
-                <a:tc>
-                  <a:txBody>
-                    <a:bodyPr/>
-                    <a:lstStyle/>
-                    <a:p>
-                      <a:pPr>
-                        <a:defRPr sz="1300" b="0">
-                          <a:solidFill>
-                            <a:srgbClr val="FFFFFF"/>
-                          </a:solidFill>
-                          <a:latin typeface="Play"/>
-                          <a:ea typeface="Play"/>
-                          <a:cs typeface="Play"/>
-                        </a:defRPr>
-                      </a:pPr>
-                      <a:r>
-                        <a:t>4 мин</a:t>
-                      </a:r>
-                    </a:p>
-                  </a:txBody>
-                  <a:tcPr>
-                    <a:solidFill>
-                      <a:srgbClr val="111111"/>
-                    </a:solidFill>
-                  </a:tcPr>
-                </a:tc>
-              </a:tr>
-              <a:tr h="447462">
-                <a:tc>
-                  <a:txBody>
-                    <a:bodyPr/>
-                    <a:lstStyle/>
-                    <a:p>
-                      <a:pPr>
-                        <a:defRPr sz="1300" b="0">
-                          <a:solidFill>
-                            <a:srgbClr val="FFFFFF"/>
-                          </a:solidFill>
-                          <a:latin typeface="Play"/>
-                          <a:ea typeface="Play"/>
-                          <a:cs typeface="Play"/>
-                        </a:defRPr>
-                      </a:pPr>
-                      <a:r>
-                        <a:t>Время до первой версии</a:t>
-                      </a:r>
-                    </a:p>
-                  </a:txBody>
-                  <a:tcPr>
-                    <a:solidFill>
-                      <a:srgbClr val="111111"/>
-                    </a:solidFill>
-                  </a:tcPr>
-                </a:tc>
-                <a:tc>
-                  <a:txBody>
-                    <a:bodyPr/>
-                    <a:lstStyle/>
-                    <a:p>
-                      <a:pPr>
-                        <a:defRPr sz="1300" b="0">
-                          <a:solidFill>
-                            <a:srgbClr val="FFFFFF"/>
-                          </a:solidFill>
-                          <a:latin typeface="Play"/>
-                          <a:ea typeface="Play"/>
-                          <a:cs typeface="Play"/>
-                        </a:defRPr>
-                      </a:pPr>
-                      <a:r>
-                        <a:t>6 дней</a:t>
-                      </a:r>
-                    </a:p>
-                  </a:txBody>
-                  <a:tcPr>
-                    <a:solidFill>
-                      <a:srgbClr val="111111"/>
-                    </a:solidFill>
-                  </a:tcPr>
-                </a:tc>
-                <a:tc>
-                  <a:txBody>
-                    <a:bodyPr/>
-                    <a:lstStyle/>
-                    <a:p>
-                      <a:pPr>
-                        <a:defRPr sz="1300" b="0">
-                          <a:solidFill>
-                            <a:srgbClr val="FFFFFF"/>
-                          </a:solidFill>
-                          <a:latin typeface="Play"/>
-                          <a:ea typeface="Play"/>
-                          <a:cs typeface="Play"/>
-                        </a:defRPr>
-                      </a:pPr>
-                      <a:r>
-                        <a:t>1 день</a:t>
-                      </a:r>
-                    </a:p>
-                  </a:txBody>
-                  <a:tcPr>
-                    <a:solidFill>
-                      <a:srgbClr val="111111"/>
-                    </a:solidFill>
-                  </a:tcPr>
-                </a:tc>
-              </a:tr>
-              <a:tr h="447462">
-                <a:tc>
-                  <a:txBody>
-                    <a:bodyPr/>
-                    <a:lstStyle/>
-                    <a:p>
-                      <a:pPr>
-                        <a:defRPr sz="1300" b="0">
-                          <a:solidFill>
-                            <a:srgbClr val="FFFFFF"/>
-                          </a:solidFill>
-                          <a:latin typeface="Play"/>
-                          <a:ea typeface="Play"/>
-                          <a:cs typeface="Play"/>
-                        </a:defRPr>
-                      </a:pPr>
-                      <a:r>
-                        <a:t>Нарушения</a:t>
+                        <a:t>Нарушения фирменного стиля</a:t>
                       </a:r>
                     </a:p>
                   </a:txBody>
@@ -8292,86 +7685,6 @@
                   </a:tcPr>
                 </a:tc>
               </a:tr>
-              <a:tr h="447464">
-                <a:tc>
-                  <a:txBody>
-                    <a:bodyPr/>
-                    <a:lstStyle/>
-                    <a:p>
-                      <a:pPr>
-                        <a:defRPr sz="1300" b="0">
-                          <a:solidFill>
-                            <a:srgbClr val="FFFFFF"/>
-                          </a:solidFill>
-                          <a:latin typeface="Play"/>
-                          <a:ea typeface="Play"/>
-                          <a:cs typeface="Play"/>
-                        </a:defRPr>
-                      </a:pPr>
-                      <a:r>
-                        <a:t>Запросы</a:t>
-                      </a:r>
-                    </a:p>
-                  </a:txBody>
-                  <a:tcPr>
-                    <a:solidFill>
-                      <a:srgbClr val="111111"/>
-                    </a:solidFill>
-                  </a:tcPr>
-                </a:tc>
-                <a:tc>
-                  <a:txBody>
-                    <a:bodyPr/>
-                    <a:lstStyle/>
-                    <a:p>
-                      <a:pPr>
-                        <a:defRPr sz="1300" b="0">
-                          <a:solidFill>
-                            <a:srgbClr val="FFFFFF"/>
-                          </a:solidFill>
-                          <a:latin typeface="Play"/>
-                          <a:ea typeface="Play"/>
-                          <a:cs typeface="Play"/>
-                        </a:defRPr>
-                      </a:pPr>
-                      <a:r>
-                        <a:t>11/нед</a:t>
-                      </a:r>
-                    </a:p>
-                  </a:txBody>
-                  <a:tcPr>
-                    <a:solidFill>
-                      <a:srgbClr val="111111"/>
-                    </a:solidFill>
-                  </a:tcPr>
-                </a:tc>
-                <a:tc>
-                  <a:txBody>
-                    <a:bodyPr/>
-                    <a:lstStyle/>
-                    <a:p>
-                      <a:pPr>
-                        <a:defRPr sz="1300" b="0">
-                          <a:solidFill>
-                            <a:srgbClr val="FFFFFF"/>
-                          </a:solidFill>
-                          <a:latin typeface="Play"/>
-                          <a:ea typeface="Play"/>
-                          <a:cs typeface="Play"/>
-                        </a:defRPr>
-                      </a:pPr>
-                      <a:r>
-                        <a:t>38/нед</a:t>
-                      </a:r>
-                    </a:p>
-                  </a:txBody>
-                  <a:tcPr>
-                    <a:solidFill>
-                      <a:srgbClr val="111111"/>
-                    </a:solidFill>
-                  </a:tcPr>
-                </a:tc>
-              </a:tr>
             </a:tbl>
           </a:graphicData>
         </a:graphic>
@@ -8384,7 +7697,7 @@
 </p:sld>
 </file>
 
-<file path=ppt/slides/slide35.xml><?xml version="1.0" encoding="utf-8"?>
+<file path=ppt/slides/slide36.xml><?xml version="1.0" encoding="utf-8"?>
 <p:sld xmlns:a="http://schemas.openxmlformats.org/drawingml/2006/main" xmlns:p="http://schemas.openxmlformats.org/presentationml/2006/main" xmlns:r="http://schemas.openxmlformats.org/officeDocument/2006/relationships">
   <p:cSld>
     <p:spTree>
@@ -8438,642 +7751,198 @@
                 <a:ea typeface="Play"/>
                 <a:cs typeface="Play"/>
               </a:rPr>
-              <a:t>Ожидаемый эффект</a:t>
+              <a:t>Нагрузка дизайнеров</a:t>
             </a:r>
           </a:p>
         </p:txBody>
       </p:sp>
-      <p:sp>
-        <p:nvSpPr>
-          <p:cNvPr id="3" name="body"/>
-          <p:cNvSpPr txBox="1"/>
+      <p:graphicFrame>
+        <p:nvGraphicFramePr>
+          <p:cNvPr id="3" name="Table 2"/>
+          <p:cNvGraphicFramePr>
+            <a:graphicFrameLocks noGrp="1"/>
+          </p:cNvGraphicFramePr>
           <p:nvPr/>
-        </p:nvSpPr>
-        <p:spPr>
-          <a:xfrm>
-            <a:off x="429280" y="2335824"/>
-            <a:ext cx="11310884" cy="1950720"/>
-          </a:xfrm>
-          <a:prstGeom prst="rect">
-            <a:avLst/>
-          </a:prstGeom>
-          <a:noFill/>
-        </p:spPr>
-        <p:txBody>
-          <a:bodyPr wrap="square" lIns="76200" rIns="76200" tIns="50800" bIns="50800">
-            <a:spAutoFit/>
-          </a:bodyPr>
-          <a:lstStyle/>
-          <a:p>
-            <a:pPr algn="l">
-              <a:spcAft>
-                <a:spcPts val="300"/>
-              </a:spcAft>
-              <a:defRPr sz="2800">
-                <a:solidFill>
-                  <a:srgbClr val="FFFFFF"/>
-                </a:solidFill>
-                <a:latin typeface="Play"/>
-                <a:ea typeface="Play"/>
-                <a:cs typeface="Play"/>
-              </a:defRPr>
-            </a:pPr>
-            <a:r>
-              <a:rPr sz="2800">
-                <a:solidFill>
-                  <a:srgbClr val="FFFFFF"/>
-                </a:solidFill>
-                <a:latin typeface="Play"/>
-                <a:ea typeface="Play"/>
-                <a:cs typeface="Play"/>
-              </a:rPr>
-              <a:t>• Сборка 4 мин вместо 186</a:t>
-            </a:r>
-          </a:p>
-          <a:p>
-            <a:pPr algn="l">
-              <a:spcAft>
-                <a:spcPts val="300"/>
-              </a:spcAft>
-              <a:defRPr sz="2800">
-                <a:solidFill>
-                  <a:srgbClr val="FFFFFF"/>
-                </a:solidFill>
-                <a:latin typeface="Play"/>
-                <a:ea typeface="Play"/>
-                <a:cs typeface="Play"/>
-              </a:defRPr>
-            </a:pPr>
-            <a:r>
-              <a:rPr sz="2800">
-                <a:solidFill>
-                  <a:srgbClr val="FFFFFF"/>
-                </a:solidFill>
-                <a:latin typeface="Play"/>
-                <a:ea typeface="Play"/>
-                <a:cs typeface="Play"/>
-              </a:rPr>
-              <a:t>• 1 день до первой версии вместо 6</a:t>
-            </a:r>
-          </a:p>
-          <a:p>
-            <a:pPr algn="l">
-              <a:spcAft>
-                <a:spcPts val="300"/>
-              </a:spcAft>
-              <a:defRPr sz="2800">
-                <a:solidFill>
-                  <a:srgbClr val="FFFFFF"/>
-                </a:solidFill>
-                <a:latin typeface="Play"/>
-                <a:ea typeface="Play"/>
-                <a:cs typeface="Play"/>
-              </a:defRPr>
-            </a:pPr>
-            <a:r>
-              <a:rPr sz="2800">
-                <a:solidFill>
-                  <a:srgbClr val="FFFFFF"/>
-                </a:solidFill>
-                <a:latin typeface="Play"/>
-                <a:ea typeface="Play"/>
-                <a:cs typeface="Play"/>
-              </a:rPr>
-              <a:t>• 2 нарушения вместо 19</a:t>
-            </a:r>
-          </a:p>
-          <a:p>
-            <a:pPr algn="l">
-              <a:spcAft>
-                <a:spcPts val="300"/>
-              </a:spcAft>
-              <a:defRPr sz="2800">
-                <a:solidFill>
-                  <a:srgbClr val="FFFFFF"/>
-                </a:solidFill>
-                <a:latin typeface="Play"/>
-                <a:ea typeface="Play"/>
-                <a:cs typeface="Play"/>
-              </a:defRPr>
-            </a:pPr>
-            <a:r>
-              <a:rPr sz="2800">
-                <a:solidFill>
-                  <a:srgbClr val="FFFFFF"/>
-                </a:solidFill>
-                <a:latin typeface="Play"/>
-                <a:ea typeface="Play"/>
-                <a:cs typeface="Play"/>
-              </a:rPr>
-              <a:t>• 38 запросов вместо 11</a:t>
-            </a:r>
-          </a:p>
-        </p:txBody>
-      </p:sp>
-    </p:spTree>
-  </p:cSld>
-  <p:clrMapOvr>
-    <a:masterClrMapping/>
-  </p:clrMapOvr>
-</p:sld>
-</file>
-
-<file path=ppt/slides/slide36.xml><?xml version="1.0" encoding="utf-8"?>
-<p:sld xmlns:a="http://schemas.openxmlformats.org/drawingml/2006/main" xmlns:p="http://schemas.openxmlformats.org/presentationml/2006/main" xmlns:r="http://schemas.openxmlformats.org/officeDocument/2006/relationships">
-  <p:cSld>
-    <p:spTree>
-      <p:nvGrpSpPr>
-        <p:cNvPr id="1" name=""/>
-        <p:cNvGrpSpPr/>
-        <p:nvPr/>
-      </p:nvGrpSpPr>
-      <p:grpSpPr/>
-      <p:sp>
-        <p:nvSpPr>
-          <p:cNvPr id="2" name="title"/>
-          <p:cNvSpPr txBox="1"/>
-          <p:nvPr/>
-        </p:nvSpPr>
-        <p:spPr>
-          <a:xfrm>
-            <a:off x="429280" y="424715"/>
-            <a:ext cx="7827264" cy="1183640"/>
-          </a:xfrm>
-          <a:prstGeom prst="rect">
-            <a:avLst/>
-          </a:prstGeom>
-          <a:noFill/>
-        </p:spPr>
-        <p:txBody>
-          <a:bodyPr wrap="square" lIns="76200" rIns="76200" tIns="50800" bIns="50800">
-            <a:spAutoFit/>
-          </a:bodyPr>
-          <a:lstStyle/>
-          <a:p>
-            <a:pPr algn="l">
-              <a:spcAft>
-                <a:spcPts val="300"/>
-              </a:spcAft>
-              <a:defRPr sz="3200">
-                <a:solidFill>
-                  <a:srgbClr val="FFFFFF"/>
-                </a:solidFill>
-                <a:latin typeface="Play"/>
-                <a:ea typeface="Play"/>
-                <a:cs typeface="Play"/>
-              </a:defRPr>
-            </a:pPr>
-            <a:r>
-              <a:rPr sz="3200">
-                <a:solidFill>
-                  <a:srgbClr val="FFFFFF"/>
-                </a:solidFill>
-                <a:latin typeface="Play"/>
-                <a:ea typeface="Play"/>
-                <a:cs typeface="Play"/>
-              </a:rPr>
-              <a:t>Что потребуется: ресурсы и сроки</a:t>
-            </a:r>
-          </a:p>
-        </p:txBody>
-      </p:sp>
-      <p:sp>
-        <p:nvSpPr>
-          <p:cNvPr id="3" name="body"/>
-          <p:cNvSpPr txBox="1"/>
-          <p:nvPr/>
-        </p:nvSpPr>
-        <p:spPr>
-          <a:xfrm>
-            <a:off x="429280" y="1745515"/>
-            <a:ext cx="11310884" cy="1468894"/>
-          </a:xfrm>
-          <a:prstGeom prst="rect">
-            <a:avLst/>
-          </a:prstGeom>
-          <a:noFill/>
-        </p:spPr>
-        <p:txBody>
-          <a:bodyPr wrap="square" lIns="76200" rIns="76200" tIns="50800" bIns="50800">
-            <a:spAutoFit/>
-          </a:bodyPr>
-          <a:lstStyle/>
-          <a:p>
-            <a:pPr algn="l">
-              <a:spcAft>
-                <a:spcPts val="300"/>
-              </a:spcAft>
-              <a:defRPr sz="1600">
-                <a:solidFill>
-                  <a:srgbClr val="FFFFFF"/>
-                </a:solidFill>
-                <a:latin typeface="Play"/>
-                <a:ea typeface="Play"/>
-                <a:cs typeface="Play"/>
-              </a:defRPr>
-            </a:pPr>
-            <a:r>
-              <a:rPr sz="1600">
-                <a:solidFill>
-                  <a:srgbClr val="FFFFFF"/>
-                </a:solidFill>
-                <a:latin typeface="Play"/>
-                <a:ea typeface="Play"/>
-                <a:cs typeface="Play"/>
-              </a:rPr>
-              <a:t>• 2 vCPU / 2 ГБ RAM</a:t>
-            </a:r>
-          </a:p>
-          <a:p>
-            <a:pPr algn="l">
-              <a:spcAft>
-                <a:spcPts val="300"/>
-              </a:spcAft>
-              <a:defRPr sz="1600">
-                <a:solidFill>
-                  <a:srgbClr val="FFFFFF"/>
-                </a:solidFill>
-                <a:latin typeface="Play"/>
-                <a:ea typeface="Play"/>
-                <a:cs typeface="Play"/>
-              </a:defRPr>
-            </a:pPr>
-            <a:r>
-              <a:rPr sz="1600">
-                <a:solidFill>
-                  <a:srgbClr val="FFFFFF"/>
-                </a:solidFill>
-                <a:latin typeface="Play"/>
-                <a:ea typeface="Play"/>
-                <a:cs typeface="Play"/>
-              </a:rPr>
-              <a:t>• 1 400 руб инференс</a:t>
-            </a:r>
-          </a:p>
-          <a:p>
-            <a:pPr algn="l">
-              <a:spcAft>
-                <a:spcPts val="300"/>
-              </a:spcAft>
-              <a:defRPr sz="1600">
-                <a:solidFill>
-                  <a:srgbClr val="FFFFFF"/>
-                </a:solidFill>
-                <a:latin typeface="Play"/>
-                <a:ea typeface="Play"/>
-                <a:cs typeface="Play"/>
-              </a:defRPr>
-            </a:pPr>
-            <a:r>
-              <a:rPr sz="1600">
-                <a:solidFill>
-                  <a:srgbClr val="FFFFFF"/>
-                </a:solidFill>
-                <a:latin typeface="Play"/>
-                <a:ea typeface="Play"/>
-                <a:cs typeface="Play"/>
-              </a:rPr>
-              <a:t>• Gpt-oss-20b, OpenAI‑совместим</a:t>
-            </a:r>
-          </a:p>
-          <a:p>
-            <a:pPr algn="l">
-              <a:spcAft>
-                <a:spcPts val="300"/>
-              </a:spcAft>
-              <a:defRPr sz="1600">
-                <a:solidFill>
-                  <a:srgbClr val="FFFFFF"/>
-                </a:solidFill>
-                <a:latin typeface="Play"/>
-                <a:ea typeface="Play"/>
-                <a:cs typeface="Play"/>
-              </a:defRPr>
-            </a:pPr>
-            <a:r>
-              <a:rPr sz="1600">
-                <a:solidFill>
-                  <a:srgbClr val="FFFFFF"/>
-                </a:solidFill>
-                <a:latin typeface="Play"/>
-                <a:ea typeface="Play"/>
-                <a:cs typeface="Play"/>
-              </a:rPr>
-              <a:t>• Дизайн‑отдел 4 человека</a:t>
-            </a:r>
-          </a:p>
-        </p:txBody>
-      </p:sp>
-      <p:sp>
-        <p:nvSpPr>
-          <p:cNvPr id="4" name="Rectangle 3"/>
-          <p:cNvSpPr/>
-          <p:nvPr/>
-        </p:nvSpPr>
-        <p:spPr>
-          <a:xfrm>
-            <a:off x="429280" y="4320529"/>
-            <a:ext cx="11310884" cy="60956"/>
-          </a:xfrm>
-          <a:prstGeom prst="rect">
-            <a:avLst/>
-          </a:prstGeom>
-          <a:solidFill>
-            <a:srgbClr val="0077FF"/>
-          </a:solidFill>
-          <a:ln>
-            <a:noFill/>
-          </a:ln>
-        </p:spPr>
-        <p:style>
-          <a:lnRef idx="1">
-            <a:schemeClr val="accent1"/>
-          </a:lnRef>
-          <a:fillRef idx="3">
-            <a:schemeClr val="accent1"/>
-          </a:fillRef>
-          <a:effectRef idx="2">
-            <a:schemeClr val="accent1"/>
-          </a:effectRef>
-          <a:fontRef idx="minor">
-            <a:schemeClr val="lt1"/>
-          </a:fontRef>
-        </p:style>
-        <p:txBody>
-          <a:bodyPr rtlCol="0" anchor="ctr"/>
-          <a:lstStyle/>
-          <a:p>
-            <a:pPr algn="ctr"/>
-          </a:p>
-        </p:txBody>
-      </p:sp>
-      <p:sp>
-        <p:nvSpPr>
-          <p:cNvPr id="5" name="Oval 4"/>
-          <p:cNvSpPr/>
-          <p:nvPr/>
-        </p:nvSpPr>
-        <p:spPr>
-          <a:xfrm>
-            <a:off x="2090919" y="4127500"/>
-            <a:ext cx="447016" cy="447016"/>
-          </a:xfrm>
-          <a:prstGeom prst="ellipse">
-            <a:avLst/>
-          </a:prstGeom>
-          <a:solidFill>
-            <a:srgbClr val="0077FF"/>
-          </a:solidFill>
-          <a:ln>
-            <a:noFill/>
-          </a:ln>
-        </p:spPr>
-        <p:style>
-          <a:lnRef idx="1">
-            <a:schemeClr val="accent1"/>
-          </a:lnRef>
-          <a:fillRef idx="3">
-            <a:schemeClr val="accent1"/>
-          </a:fillRef>
-          <a:effectRef idx="2">
-            <a:schemeClr val="accent1"/>
-          </a:effectRef>
-          <a:fontRef idx="minor">
-            <a:schemeClr val="lt1"/>
-          </a:fontRef>
-        </p:style>
-        <p:txBody>
-          <a:bodyPr rtlCol="0" anchor="ctr"/>
-          <a:lstStyle/>
-          <a:p>
-            <a:pPr algn="ctr"/>
-          </a:p>
-        </p:txBody>
-      </p:sp>
-      <p:sp>
-        <p:nvSpPr>
-          <p:cNvPr id="6" name="TextBox 5"/>
-          <p:cNvSpPr txBox="1"/>
-          <p:nvPr/>
-        </p:nvSpPr>
-        <p:spPr>
-          <a:xfrm>
-            <a:off x="429280" y="3385860"/>
-            <a:ext cx="5655442" cy="772118"/>
-          </a:xfrm>
-          <a:prstGeom prst="rect">
-            <a:avLst/>
-          </a:prstGeom>
-          <a:noFill/>
-        </p:spPr>
-        <p:txBody>
-          <a:bodyPr wrap="square" lIns="12700" rIns="12700" tIns="12700" bIns="12700">
-            <a:spAutoFit/>
-          </a:bodyPr>
-          <a:lstStyle/>
-          <a:p>
-            <a:pPr algn="ctr">
-              <a:defRPr sz="1400" b="0">
-                <a:solidFill>
-                  <a:srgbClr val="FFFFFF"/>
-                </a:solidFill>
-                <a:latin typeface="Play"/>
-                <a:ea typeface="Play"/>
-                <a:cs typeface="Play"/>
-              </a:defRPr>
-            </a:pPr>
-            <a:r>
-              <a:rPr sz="1400" b="0">
-                <a:solidFill>
-                  <a:srgbClr val="FFFFFF"/>
-                </a:solidFill>
-                <a:latin typeface="Play"/>
-                <a:ea typeface="Play"/>
-                <a:cs typeface="Play"/>
-              </a:rPr>
-              <a:t>Третий квартал 2026</a:t>
-            </a:r>
-          </a:p>
-        </p:txBody>
-      </p:sp>
-      <p:sp>
-        <p:nvSpPr>
-          <p:cNvPr id="7" name="Oval 6"/>
-          <p:cNvSpPr/>
-          <p:nvPr/>
-        </p:nvSpPr>
-        <p:spPr>
-          <a:xfrm>
-            <a:off x="5861213" y="4127500"/>
-            <a:ext cx="447016" cy="447016"/>
-          </a:xfrm>
-          <a:prstGeom prst="ellipse">
-            <a:avLst/>
-          </a:prstGeom>
-          <a:solidFill>
-            <a:srgbClr val="0077FF"/>
-          </a:solidFill>
-          <a:ln>
-            <a:noFill/>
-          </a:ln>
-        </p:spPr>
-        <p:style>
-          <a:lnRef idx="1">
-            <a:schemeClr val="accent1"/>
-          </a:lnRef>
-          <a:fillRef idx="3">
-            <a:schemeClr val="accent1"/>
-          </a:fillRef>
-          <a:effectRef idx="2">
-            <a:schemeClr val="accent1"/>
-          </a:effectRef>
-          <a:fontRef idx="minor">
-            <a:schemeClr val="lt1"/>
-          </a:fontRef>
-        </p:style>
-        <p:txBody>
-          <a:bodyPr rtlCol="0" anchor="ctr"/>
-          <a:lstStyle/>
-          <a:p>
-            <a:pPr algn="ctr"/>
-          </a:p>
-        </p:txBody>
-      </p:sp>
-      <p:sp>
-        <p:nvSpPr>
-          <p:cNvPr id="8" name="TextBox 7"/>
-          <p:cNvSpPr txBox="1"/>
-          <p:nvPr/>
-        </p:nvSpPr>
-        <p:spPr>
-          <a:xfrm>
-            <a:off x="3257001" y="4767545"/>
-            <a:ext cx="5655442" cy="772118"/>
-          </a:xfrm>
-          <a:prstGeom prst="rect">
-            <a:avLst/>
-          </a:prstGeom>
-          <a:noFill/>
-        </p:spPr>
-        <p:txBody>
-          <a:bodyPr wrap="square" lIns="12700" rIns="12700" tIns="12700" bIns="12700">
-            <a:spAutoFit/>
-          </a:bodyPr>
-          <a:lstStyle/>
-          <a:p>
-            <a:pPr algn="ctr">
-              <a:defRPr sz="1400" b="0">
-                <a:solidFill>
-                  <a:srgbClr val="FFFFFF"/>
-                </a:solidFill>
-                <a:latin typeface="Play"/>
-                <a:ea typeface="Play"/>
-                <a:cs typeface="Play"/>
-              </a:defRPr>
-            </a:pPr>
-            <a:r>
-              <a:rPr sz="1400" b="0">
-                <a:solidFill>
-                  <a:srgbClr val="FFFFFF"/>
-                </a:solidFill>
-                <a:latin typeface="Play"/>
-                <a:ea typeface="Play"/>
-                <a:cs typeface="Play"/>
-              </a:rPr>
-              <a:t>Четвёртый квартал 2026</a:t>
-            </a:r>
-          </a:p>
-        </p:txBody>
-      </p:sp>
-      <p:sp>
-        <p:nvSpPr>
-          <p:cNvPr id="9" name="Oval 8"/>
-          <p:cNvSpPr/>
-          <p:nvPr/>
-        </p:nvSpPr>
-        <p:spPr>
-          <a:xfrm>
-            <a:off x="9631508" y="4127500"/>
-            <a:ext cx="447016" cy="447016"/>
-          </a:xfrm>
-          <a:prstGeom prst="ellipse">
-            <a:avLst/>
-          </a:prstGeom>
-          <a:solidFill>
-            <a:srgbClr val="0077FF"/>
-          </a:solidFill>
-          <a:ln>
-            <a:noFill/>
-          </a:ln>
-        </p:spPr>
-        <p:style>
-          <a:lnRef idx="1">
-            <a:schemeClr val="accent1"/>
-          </a:lnRef>
-          <a:fillRef idx="3">
-            <a:schemeClr val="accent1"/>
-          </a:fillRef>
-          <a:effectRef idx="2">
-            <a:schemeClr val="accent1"/>
-          </a:effectRef>
-          <a:fontRef idx="minor">
-            <a:schemeClr val="lt1"/>
-          </a:fontRef>
-        </p:style>
-        <p:txBody>
-          <a:bodyPr rtlCol="0" anchor="ctr"/>
-          <a:lstStyle/>
-          <a:p>
-            <a:pPr algn="ctr"/>
-          </a:p>
-        </p:txBody>
-      </p:sp>
-      <p:sp>
-        <p:nvSpPr>
-          <p:cNvPr id="10" name="TextBox 9"/>
-          <p:cNvSpPr txBox="1"/>
-          <p:nvPr/>
-        </p:nvSpPr>
-        <p:spPr>
-          <a:xfrm>
-            <a:off x="6084722" y="3385860"/>
-            <a:ext cx="5655442" cy="772118"/>
-          </a:xfrm>
-          <a:prstGeom prst="rect">
-            <a:avLst/>
-          </a:prstGeom>
-          <a:noFill/>
-        </p:spPr>
-        <p:txBody>
-          <a:bodyPr wrap="square" lIns="12700" rIns="12700" tIns="12700" bIns="12700">
-            <a:spAutoFit/>
-          </a:bodyPr>
-          <a:lstStyle/>
-          <a:p>
-            <a:pPr algn="ctr">
-              <a:defRPr sz="1400" b="0">
-                <a:solidFill>
-                  <a:srgbClr val="FFFFFF"/>
-                </a:solidFill>
-                <a:latin typeface="Play"/>
-                <a:ea typeface="Play"/>
-                <a:cs typeface="Play"/>
-              </a:defRPr>
-            </a:pPr>
-            <a:r>
-              <a:rPr sz="1400" b="0">
-                <a:solidFill>
-                  <a:srgbClr val="FFFFFF"/>
-                </a:solidFill>
-                <a:latin typeface="Play"/>
-                <a:ea typeface="Play"/>
-                <a:cs typeface="Play"/>
-              </a:rPr>
-              <a:t>Первый квартал 2027</a:t>
-            </a:r>
-          </a:p>
-        </p:txBody>
-      </p:sp>
+        </p:nvGraphicFramePr>
+        <p:xfrm>
+          <a:off x="429280" y="1592290"/>
+          <a:ext cx="11310884" cy="4181322"/>
+        </p:xfrm>
+        <a:graphic>
+          <a:graphicData uri="http://schemas.openxmlformats.org/drawingml/2006/table">
+            <a:tbl>
+              <a:tblPr firstRow="1" bandRow="1">
+                <a:tableStyleId>{5C22544A-7EE6-4342-B048-85BDC9FD1C3A}</a:tableStyleId>
+              </a:tblPr>
+              <a:tblGrid>
+                <a:gridCol w="3770294"/>
+                <a:gridCol w="3770294"/>
+                <a:gridCol w="3770296"/>
+              </a:tblGrid>
+              <a:tr h="2090661">
+                <a:tc>
+                  <a:txBody>
+                    <a:bodyPr/>
+                    <a:lstStyle/>
+                    <a:p>
+                      <a:pPr>
+                        <a:defRPr sz="1300" b="1">
+                          <a:solidFill>
+                            <a:srgbClr val="FFFFFF"/>
+                          </a:solidFill>
+                          <a:latin typeface="Play"/>
+                          <a:ea typeface="Play"/>
+                          <a:cs typeface="Play"/>
+                        </a:defRPr>
+                      </a:pPr>
+                      <a:r>
+                        <a:t>Показатель</a:t>
+                      </a:r>
+                    </a:p>
+                  </a:txBody>
+                  <a:tcPr>
+                    <a:solidFill>
+                      <a:srgbClr val="0077FF"/>
+                    </a:solidFill>
+                  </a:tcPr>
+                </a:tc>
+                <a:tc>
+                  <a:txBody>
+                    <a:bodyPr/>
+                    <a:lstStyle/>
+                    <a:p>
+                      <a:pPr>
+                        <a:defRPr sz="1300" b="1">
+                          <a:solidFill>
+                            <a:srgbClr val="FFFFFF"/>
+                          </a:solidFill>
+                          <a:latin typeface="Play"/>
+                          <a:ea typeface="Play"/>
+                          <a:cs typeface="Play"/>
+                        </a:defRPr>
+                      </a:pPr>
+                      <a:r>
+                        <a:t>Текущая</a:t>
+                      </a:r>
+                    </a:p>
+                  </a:txBody>
+                  <a:tcPr>
+                    <a:solidFill>
+                      <a:srgbClr val="0077FF"/>
+                    </a:solidFill>
+                  </a:tcPr>
+                </a:tc>
+                <a:tc>
+                  <a:txBody>
+                    <a:bodyPr/>
+                    <a:lstStyle/>
+                    <a:p>
+                      <a:pPr>
+                        <a:defRPr sz="1300" b="1">
+                          <a:solidFill>
+                            <a:srgbClr val="FFFFFF"/>
+                          </a:solidFill>
+                          <a:latin typeface="Play"/>
+                          <a:ea typeface="Play"/>
+                          <a:cs typeface="Play"/>
+                        </a:defRPr>
+                      </a:pPr>
+                      <a:r>
+                        <a:t>Пилот</a:t>
+                      </a:r>
+                    </a:p>
+                  </a:txBody>
+                  <a:tcPr>
+                    <a:solidFill>
+                      <a:srgbClr val="0077FF"/>
+                    </a:solidFill>
+                  </a:tcPr>
+                </a:tc>
+              </a:tr>
+              <a:tr h="2090661">
+                <a:tc>
+                  <a:txBody>
+                    <a:bodyPr/>
+                    <a:lstStyle/>
+                    <a:p>
+                      <a:pPr>
+                        <a:defRPr sz="1300" b="0">
+                          <a:solidFill>
+                            <a:srgbClr val="FFFFFF"/>
+                          </a:solidFill>
+                          <a:latin typeface="Play"/>
+                          <a:ea typeface="Play"/>
+                          <a:cs typeface="Play"/>
+                        </a:defRPr>
+                      </a:pPr>
+                      <a:r>
+                        <a:t>Запросов/неделя</a:t>
+                      </a:r>
+                    </a:p>
+                  </a:txBody>
+                  <a:tcPr>
+                    <a:solidFill>
+                      <a:srgbClr val="111111"/>
+                    </a:solidFill>
+                  </a:tcPr>
+                </a:tc>
+                <a:tc>
+                  <a:txBody>
+                    <a:bodyPr/>
+                    <a:lstStyle/>
+                    <a:p>
+                      <a:pPr>
+                        <a:defRPr sz="1300" b="0">
+                          <a:solidFill>
+                            <a:srgbClr val="FFFFFF"/>
+                          </a:solidFill>
+                          <a:latin typeface="Play"/>
+                          <a:ea typeface="Play"/>
+                          <a:cs typeface="Play"/>
+                        </a:defRPr>
+                      </a:pPr>
+                      <a:r>
+                        <a:t>11</a:t>
+                      </a:r>
+                    </a:p>
+                  </a:txBody>
+                  <a:tcPr>
+                    <a:solidFill>
+                      <a:srgbClr val="111111"/>
+                    </a:solidFill>
+                  </a:tcPr>
+                </a:tc>
+                <a:tc>
+                  <a:txBody>
+                    <a:bodyPr/>
+                    <a:lstStyle/>
+                    <a:p>
+                      <a:pPr>
+                        <a:defRPr sz="1300" b="0">
+                          <a:solidFill>
+                            <a:srgbClr val="FFFFFF"/>
+                          </a:solidFill>
+                          <a:latin typeface="Play"/>
+                          <a:ea typeface="Play"/>
+                          <a:cs typeface="Play"/>
+                        </a:defRPr>
+                      </a:pPr>
+                      <a:r>
+                        <a:t>38</a:t>
+                      </a:r>
+                    </a:p>
+                  </a:txBody>
+                  <a:tcPr>
+                    <a:solidFill>
+                      <a:srgbClr val="111111"/>
+                    </a:solidFill>
+                  </a:tcPr>
+                </a:tc>
+              </a:tr>
+            </a:tbl>
+          </a:graphicData>
+        </a:graphic>
+      </p:graphicFrame>
     </p:spTree>
   </p:cSld>
   <p:clrMapOvr>
@@ -9246,7 +8115,7 @@
                 <a:ea typeface="Play"/>
                 <a:cs typeface="Play"/>
               </a:rPr>
-              <a:t>Что мы просим решить</a:t>
+              <a:t>Ресурсы и сроки</a:t>
             </a:r>
           </a:p>
         </p:txBody>
@@ -9295,7 +8164,7 @@
                 <a:ea typeface="Play"/>
                 <a:cs typeface="Play"/>
               </a:rPr>
-              <a:t>Запуск на всю компанию</a:t>
+              <a:t>2 vCPU / 2 GB RAM</a:t>
             </a:r>
           </a:p>
         </p:txBody>
@@ -9344,7 +8213,7 @@
                 <a:ea typeface="Play"/>
                 <a:cs typeface="Play"/>
               </a:rPr>
-              <a:t>Бюджет на расширение инфраструктуры</a:t>
+              <a:t>1 400 рублей за 6 недель пилота</a:t>
             </a:r>
           </a:p>
         </p:txBody>
@@ -9393,7 +8262,7 @@
                 <a:ea typeface="Play"/>
                 <a:cs typeface="Play"/>
               </a:rPr>
-              <a:t>Назначение ответственных за интеграцию</a:t>
+              <a:t>6 недель пилота, 2 команды, 68 презентаций</a:t>
             </a:r>
           </a:p>
         </p:txBody>
@@ -9514,7 +8383,7 @@
                 <a:ea typeface="Play"/>
                 <a:cs typeface="Play"/>
               </a:rPr>
-              <a:t>Риски</a:t>
+              <a:t>Что мы просим решить</a:t>
             </a:r>
           </a:p>
         </p:txBody>
@@ -9563,7 +8432,7 @@
                 <a:ea typeface="Play"/>
                 <a:cs typeface="Play"/>
               </a:rPr>
-              <a:t>• Слабая модель может выдумать цифры</a:t>
+              <a:t>• Запуск сервиса на всю компанию</a:t>
             </a:r>
           </a:p>
           <a:p>
@@ -9589,7 +8458,7 @@
                 <a:ea typeface="Play"/>
                 <a:cs typeface="Play"/>
               </a:rPr>
-              <a:t>• Плохой шаблон может привести к некорректной вёрстке</a:t>
+              <a:t>• Интеграция с корпоративным хранилищем</a:t>
             </a:r>
           </a:p>
           <a:p>
@@ -9615,7 +8484,7 @@
                 <a:ea typeface="Play"/>
                 <a:cs typeface="Play"/>
               </a:rPr>
-              <a:t>• Нагрузка &gt;20 задач требует внешней очереди</a:t>
+              <a:t>• Поддержка 20 одновременных задач</a:t>
             </a:r>
           </a:p>
         </p:txBody>
@@ -9682,21 +8551,107 @@
                 <a:ea typeface="Play"/>
                 <a:cs typeface="Play"/>
               </a:rPr>
-              <a:t>Команда</a:t>
+              <a:t>План запуска</a:t>
             </a:r>
           </a:p>
         </p:txBody>
       </p:sp>
       <p:sp>
         <p:nvSpPr>
-          <p:cNvPr id="3" name="body"/>
+          <p:cNvPr id="3" name="Rectangle 2"/>
+          <p:cNvSpPr/>
+          <p:nvPr/>
+        </p:nvSpPr>
+        <p:spPr>
+          <a:xfrm>
+            <a:off x="429280" y="3339292"/>
+            <a:ext cx="11310884" cy="120438"/>
+          </a:xfrm>
+          <a:prstGeom prst="rect">
+            <a:avLst/>
+          </a:prstGeom>
+          <a:solidFill>
+            <a:srgbClr val="0077FF"/>
+          </a:solidFill>
+          <a:ln>
+            <a:noFill/>
+          </a:ln>
+        </p:spPr>
+        <p:style>
+          <a:lnRef idx="1">
+            <a:schemeClr val="accent1"/>
+          </a:lnRef>
+          <a:fillRef idx="3">
+            <a:schemeClr val="accent1"/>
+          </a:fillRef>
+          <a:effectRef idx="2">
+            <a:schemeClr val="accent1"/>
+          </a:effectRef>
+          <a:fontRef idx="minor">
+            <a:schemeClr val="lt1"/>
+          </a:fontRef>
+        </p:style>
+        <p:txBody>
+          <a:bodyPr rtlCol="0" anchor="ctr"/>
+          <a:lstStyle/>
+          <a:p>
+            <a:pPr algn="ctr"/>
+          </a:p>
+        </p:txBody>
+      </p:sp>
+      <p:sp>
+        <p:nvSpPr>
+          <p:cNvPr id="4" name="Oval 3"/>
+          <p:cNvSpPr/>
+          <p:nvPr/>
+        </p:nvSpPr>
+        <p:spPr>
+          <a:xfrm>
+            <a:off x="1872820" y="2957905"/>
+            <a:ext cx="883212" cy="883212"/>
+          </a:xfrm>
+          <a:prstGeom prst="ellipse">
+            <a:avLst/>
+          </a:prstGeom>
+          <a:solidFill>
+            <a:srgbClr val="0077FF"/>
+          </a:solidFill>
+          <a:ln>
+            <a:noFill/>
+          </a:ln>
+        </p:spPr>
+        <p:style>
+          <a:lnRef idx="1">
+            <a:schemeClr val="accent1"/>
+          </a:lnRef>
+          <a:fillRef idx="3">
+            <a:schemeClr val="accent1"/>
+          </a:fillRef>
+          <a:effectRef idx="2">
+            <a:schemeClr val="accent1"/>
+          </a:effectRef>
+          <a:fontRef idx="minor">
+            <a:schemeClr val="lt1"/>
+          </a:fontRef>
+        </p:style>
+        <p:txBody>
+          <a:bodyPr rtlCol="0" anchor="ctr"/>
+          <a:lstStyle/>
+          <a:p>
+            <a:pPr algn="ctr"/>
+          </a:p>
+        </p:txBody>
+      </p:sp>
+      <p:sp>
+        <p:nvSpPr>
+          <p:cNvPr id="5" name="TextBox 4"/>
           <p:cNvSpPr txBox="1"/>
           <p:nvPr/>
         </p:nvSpPr>
         <p:spPr>
           <a:xfrm>
             <a:off x="429280" y="1492575"/>
-            <a:ext cx="11310884" cy="944880"/>
+            <a:ext cx="5655442" cy="1525549"/>
           </a:xfrm>
           <a:prstGeom prst="rect">
             <a:avLst/>
@@ -9704,16 +8659,13 @@
           <a:noFill/>
         </p:spPr>
         <p:txBody>
-          <a:bodyPr wrap="square" lIns="76200" rIns="76200" tIns="50800" bIns="50800">
+          <a:bodyPr wrap="square" lIns="12700" rIns="12700" tIns="12700" bIns="12700">
             <a:spAutoFit/>
           </a:bodyPr>
           <a:lstStyle/>
           <a:p>
-            <a:pPr algn="l">
-              <a:spcAft>
-                <a:spcPts val="300"/>
-              </a:spcAft>
-              <a:defRPr sz="1600">
+            <a:pPr algn="ctr">
+              <a:defRPr sz="1400" b="0">
                 <a:solidFill>
                   <a:srgbClr val="FFFFFF"/>
                 </a:solidFill>
@@ -9723,7 +8675,7 @@
               </a:defRPr>
             </a:pPr>
             <a:r>
-              <a:rPr sz="1600">
+              <a:rPr sz="1400" b="0">
                 <a:solidFill>
                   <a:srgbClr val="FFFFFF"/>
                 </a:solidFill>
@@ -9731,15 +8683,78 @@
                 <a:ea typeface="Play"/>
                 <a:cs typeface="Play"/>
               </a:rPr>
-              <a:t>• Дизайн‑отдел 4 человека, 11 запросов/нед, 6 дней ожидания</a:t>
+              <a:t>Третий квартал 2026: подключение 4 команд</a:t>
             </a:r>
           </a:p>
+        </p:txBody>
+      </p:sp>
+      <p:sp>
+        <p:nvSpPr>
+          <p:cNvPr id="6" name="Oval 5"/>
+          <p:cNvSpPr/>
+          <p:nvPr/>
+        </p:nvSpPr>
+        <p:spPr>
+          <a:xfrm>
+            <a:off x="5643115" y="2957905"/>
+            <a:ext cx="883212" cy="883212"/>
+          </a:xfrm>
+          <a:prstGeom prst="ellipse">
+            <a:avLst/>
+          </a:prstGeom>
+          <a:solidFill>
+            <a:srgbClr val="0077FF"/>
+          </a:solidFill>
+          <a:ln>
+            <a:noFill/>
+          </a:ln>
+        </p:spPr>
+        <p:style>
+          <a:lnRef idx="1">
+            <a:schemeClr val="accent1"/>
+          </a:lnRef>
+          <a:fillRef idx="3">
+            <a:schemeClr val="accent1"/>
+          </a:fillRef>
+          <a:effectRef idx="2">
+            <a:schemeClr val="accent1"/>
+          </a:effectRef>
+          <a:fontRef idx="minor">
+            <a:schemeClr val="lt1"/>
+          </a:fontRef>
+        </p:style>
+        <p:txBody>
+          <a:bodyPr rtlCol="0" anchor="ctr"/>
+          <a:lstStyle/>
           <a:p>
-            <a:pPr algn="l">
-              <a:spcAft>
-                <a:spcPts val="300"/>
-              </a:spcAft>
-              <a:defRPr sz="1600">
+            <a:pPr algn="ctr"/>
+          </a:p>
+        </p:txBody>
+      </p:sp>
+      <p:sp>
+        <p:nvSpPr>
+          <p:cNvPr id="7" name="TextBox 6"/>
+          <p:cNvSpPr txBox="1"/>
+          <p:nvPr/>
+        </p:nvSpPr>
+        <p:spPr>
+          <a:xfrm>
+            <a:off x="3257001" y="4222505"/>
+            <a:ext cx="5655442" cy="1525549"/>
+          </a:xfrm>
+          <a:prstGeom prst="rect">
+            <a:avLst/>
+          </a:prstGeom>
+          <a:noFill/>
+        </p:spPr>
+        <p:txBody>
+          <a:bodyPr wrap="square" lIns="12700" rIns="12700" tIns="12700" bIns="12700">
+            <a:spAutoFit/>
+          </a:bodyPr>
+          <a:lstStyle/>
+          <a:p>
+            <a:pPr algn="ctr">
+              <a:defRPr sz="1400" b="0">
                 <a:solidFill>
                   <a:srgbClr val="FFFFFF"/>
                 </a:solidFill>
@@ -9749,7 +8764,7 @@
               </a:defRPr>
             </a:pPr>
             <a:r>
-              <a:rPr sz="1600">
+              <a:rPr sz="1400" b="0">
                 <a:solidFill>
                   <a:srgbClr val="FFFFFF"/>
                 </a:solidFill>
@@ -9757,361 +8772,100 @@
                 <a:ea typeface="Play"/>
                 <a:cs typeface="Play"/>
               </a:rPr>
-              <a:t>• Пилотные команды 2, 68 презентаций</a:t>
+              <a:t>Четвёртый квартал 2026: доступ для всей компании</a:t>
             </a:r>
           </a:p>
         </p:txBody>
       </p:sp>
-      <p:graphicFrame>
-        <p:nvGraphicFramePr>
-          <p:cNvPr id="4" name="Table 3"/>
-          <p:cNvGraphicFramePr>
-            <a:graphicFrameLocks noGrp="1"/>
-          </p:cNvGraphicFramePr>
+      <p:sp>
+        <p:nvSpPr>
+          <p:cNvPr id="8" name="Oval 7"/>
+          <p:cNvSpPr/>
           <p:nvPr/>
-        </p:nvGraphicFramePr>
-        <p:xfrm>
-          <a:off x="429280" y="2608905"/>
-          <a:ext cx="11310884" cy="2898274"/>
-        </p:xfrm>
-        <a:graphic>
-          <a:graphicData uri="http://schemas.openxmlformats.org/drawingml/2006/table">
-            <a:tbl>
-              <a:tblPr firstRow="1" bandRow="1">
-                <a:tableStyleId>{5C22544A-7EE6-4342-B048-85BDC9FD1C3A}</a:tableStyleId>
-              </a:tblPr>
-              <a:tblGrid>
-                <a:gridCol w="5655442"/>
-                <a:gridCol w="5655442"/>
-              </a:tblGrid>
-              <a:tr h="483045">
-                <a:tc>
-                  <a:txBody>
-                    <a:bodyPr/>
-                    <a:lstStyle/>
-                    <a:p>
-                      <a:pPr>
-                        <a:defRPr sz="1300" b="1">
-                          <a:solidFill>
-                            <a:srgbClr val="FFFFFF"/>
-                          </a:solidFill>
-                          <a:latin typeface="Play"/>
-                          <a:ea typeface="Play"/>
-                          <a:cs typeface="Play"/>
-                        </a:defRPr>
-                      </a:pPr>
-                      <a:r>
-                        <a:t>Роль</a:t>
-                      </a:r>
-                    </a:p>
-                  </a:txBody>
-                  <a:tcPr>
-                    <a:solidFill>
-                      <a:srgbClr val="0077FF"/>
-                    </a:solidFill>
-                  </a:tcPr>
-                </a:tc>
-                <a:tc>
-                  <a:txBody>
-                    <a:bodyPr/>
-                    <a:lstStyle/>
-                    <a:p>
-                      <a:pPr>
-                        <a:defRPr sz="1300" b="1">
-                          <a:solidFill>
-                            <a:srgbClr val="FFFFFF"/>
-                          </a:solidFill>
-                          <a:latin typeface="Play"/>
-                          <a:ea typeface="Play"/>
-                          <a:cs typeface="Play"/>
-                        </a:defRPr>
-                      </a:pPr>
-                      <a:r>
-                        <a:t>Количество</a:t>
-                      </a:r>
-                    </a:p>
-                  </a:txBody>
-                  <a:tcPr>
-                    <a:solidFill>
-                      <a:srgbClr val="0077FF"/>
-                    </a:solidFill>
-                  </a:tcPr>
-                </a:tc>
-              </a:tr>
-              <a:tr h="483045">
-                <a:tc>
-                  <a:txBody>
-                    <a:bodyPr/>
-                    <a:lstStyle/>
-                    <a:p>
-                      <a:pPr>
-                        <a:defRPr sz="1300" b="0">
-                          <a:solidFill>
-                            <a:srgbClr val="FFFFFF"/>
-                          </a:solidFill>
-                          <a:latin typeface="Play"/>
-                          <a:ea typeface="Play"/>
-                          <a:cs typeface="Play"/>
-                        </a:defRPr>
-                      </a:pPr>
-                      <a:r>
-                        <a:t>Дизайн‑отдел</a:t>
-                      </a:r>
-                    </a:p>
-                  </a:txBody>
-                  <a:tcPr>
-                    <a:solidFill>
-                      <a:srgbClr val="111111"/>
-                    </a:solidFill>
-                  </a:tcPr>
-                </a:tc>
-                <a:tc>
-                  <a:txBody>
-                    <a:bodyPr/>
-                    <a:lstStyle/>
-                    <a:p>
-                      <a:pPr>
-                        <a:defRPr sz="1300" b="0">
-                          <a:solidFill>
-                            <a:srgbClr val="FFFFFF"/>
-                          </a:solidFill>
-                          <a:latin typeface="Play"/>
-                          <a:ea typeface="Play"/>
-                          <a:cs typeface="Play"/>
-                        </a:defRPr>
-                      </a:pPr>
-                      <a:r>
-                        <a:t>4 человека</a:t>
-                      </a:r>
-                    </a:p>
-                  </a:txBody>
-                  <a:tcPr>
-                    <a:solidFill>
-                      <a:srgbClr val="111111"/>
-                    </a:solidFill>
-                  </a:tcPr>
-                </a:tc>
-              </a:tr>
-              <a:tr h="483045">
-                <a:tc>
-                  <a:txBody>
-                    <a:bodyPr/>
-                    <a:lstStyle/>
-                    <a:p>
-                      <a:pPr>
-                        <a:defRPr sz="1300" b="0">
-                          <a:solidFill>
-                            <a:srgbClr val="FFFFFF"/>
-                          </a:solidFill>
-                          <a:latin typeface="Play"/>
-                          <a:ea typeface="Play"/>
-                          <a:cs typeface="Play"/>
-                        </a:defRPr>
-                      </a:pPr>
-                      <a:r>
-                        <a:t>Запросы</a:t>
-                      </a:r>
-                    </a:p>
-                  </a:txBody>
-                  <a:tcPr>
-                    <a:solidFill>
-                      <a:srgbClr val="111111"/>
-                    </a:solidFill>
-                  </a:tcPr>
-                </a:tc>
-                <a:tc>
-                  <a:txBody>
-                    <a:bodyPr/>
-                    <a:lstStyle/>
-                    <a:p>
-                      <a:pPr>
-                        <a:defRPr sz="1300" b="0">
-                          <a:solidFill>
-                            <a:srgbClr val="FFFFFF"/>
-                          </a:solidFill>
-                          <a:latin typeface="Play"/>
-                          <a:ea typeface="Play"/>
-                          <a:cs typeface="Play"/>
-                        </a:defRPr>
-                      </a:pPr>
-                      <a:r>
-                        <a:t>11/нед</a:t>
-                      </a:r>
-                    </a:p>
-                  </a:txBody>
-                  <a:tcPr>
-                    <a:solidFill>
-                      <a:srgbClr val="111111"/>
-                    </a:solidFill>
-                  </a:tcPr>
-                </a:tc>
-              </a:tr>
-              <a:tr h="483045">
-                <a:tc>
-                  <a:txBody>
-                    <a:bodyPr/>
-                    <a:lstStyle/>
-                    <a:p>
-                      <a:pPr>
-                        <a:defRPr sz="1300" b="0">
-                          <a:solidFill>
-                            <a:srgbClr val="FFFFFF"/>
-                          </a:solidFill>
-                          <a:latin typeface="Play"/>
-                          <a:ea typeface="Play"/>
-                          <a:cs typeface="Play"/>
-                        </a:defRPr>
-                      </a:pPr>
-                      <a:r>
-                        <a:t>Ожидание</a:t>
-                      </a:r>
-                    </a:p>
-                  </a:txBody>
-                  <a:tcPr>
-                    <a:solidFill>
-                      <a:srgbClr val="111111"/>
-                    </a:solidFill>
-                  </a:tcPr>
-                </a:tc>
-                <a:tc>
-                  <a:txBody>
-                    <a:bodyPr/>
-                    <a:lstStyle/>
-                    <a:p>
-                      <a:pPr>
-                        <a:defRPr sz="1300" b="0">
-                          <a:solidFill>
-                            <a:srgbClr val="FFFFFF"/>
-                          </a:solidFill>
-                          <a:latin typeface="Play"/>
-                          <a:ea typeface="Play"/>
-                          <a:cs typeface="Play"/>
-                        </a:defRPr>
-                      </a:pPr>
-                      <a:r>
-                        <a:t>6 дней</a:t>
-                      </a:r>
-                    </a:p>
-                  </a:txBody>
-                  <a:tcPr>
-                    <a:solidFill>
-                      <a:srgbClr val="111111"/>
-                    </a:solidFill>
-                  </a:tcPr>
-                </a:tc>
-              </a:tr>
-              <a:tr h="483045">
-                <a:tc>
-                  <a:txBody>
-                    <a:bodyPr/>
-                    <a:lstStyle/>
-                    <a:p>
-                      <a:pPr>
-                        <a:defRPr sz="1300" b="0">
-                          <a:solidFill>
-                            <a:srgbClr val="FFFFFF"/>
-                          </a:solidFill>
-                          <a:latin typeface="Play"/>
-                          <a:ea typeface="Play"/>
-                          <a:cs typeface="Play"/>
-                        </a:defRPr>
-                      </a:pPr>
-                      <a:r>
-                        <a:t>Пилотные команды</a:t>
-                      </a:r>
-                    </a:p>
-                  </a:txBody>
-                  <a:tcPr>
-                    <a:solidFill>
-                      <a:srgbClr val="111111"/>
-                    </a:solidFill>
-                  </a:tcPr>
-                </a:tc>
-                <a:tc>
-                  <a:txBody>
-                    <a:bodyPr/>
-                    <a:lstStyle/>
-                    <a:p>
-                      <a:pPr>
-                        <a:defRPr sz="1300" b="0">
-                          <a:solidFill>
-                            <a:srgbClr val="FFFFFF"/>
-                          </a:solidFill>
-                          <a:latin typeface="Play"/>
-                          <a:ea typeface="Play"/>
-                          <a:cs typeface="Play"/>
-                        </a:defRPr>
-                      </a:pPr>
-                      <a:r>
-                        <a:t>2</a:t>
-                      </a:r>
-                    </a:p>
-                  </a:txBody>
-                  <a:tcPr>
-                    <a:solidFill>
-                      <a:srgbClr val="111111"/>
-                    </a:solidFill>
-                  </a:tcPr>
-                </a:tc>
-              </a:tr>
-              <a:tr h="483049">
-                <a:tc>
-                  <a:txBody>
-                    <a:bodyPr/>
-                    <a:lstStyle/>
-                    <a:p>
-                      <a:pPr>
-                        <a:defRPr sz="1300" b="0">
-                          <a:solidFill>
-                            <a:srgbClr val="FFFFFF"/>
-                          </a:solidFill>
-                          <a:latin typeface="Play"/>
-                          <a:ea typeface="Play"/>
-                          <a:cs typeface="Play"/>
-                        </a:defRPr>
-                      </a:pPr>
-                      <a:r>
-                        <a:t>Презентации</a:t>
-                      </a:r>
-                    </a:p>
-                  </a:txBody>
-                  <a:tcPr>
-                    <a:solidFill>
-                      <a:srgbClr val="111111"/>
-                    </a:solidFill>
-                  </a:tcPr>
-                </a:tc>
-                <a:tc>
-                  <a:txBody>
-                    <a:bodyPr/>
-                    <a:lstStyle/>
-                    <a:p>
-                      <a:pPr>
-                        <a:defRPr sz="1300" b="0">
-                          <a:solidFill>
-                            <a:srgbClr val="FFFFFF"/>
-                          </a:solidFill>
-                          <a:latin typeface="Play"/>
-                          <a:ea typeface="Play"/>
-                          <a:cs typeface="Play"/>
-                        </a:defRPr>
-                      </a:pPr>
-                      <a:r>
-                        <a:t>68</a:t>
-                      </a:r>
-                    </a:p>
-                  </a:txBody>
-                  <a:tcPr>
-                    <a:solidFill>
-                      <a:srgbClr val="111111"/>
-                    </a:solidFill>
-                  </a:tcPr>
-                </a:tc>
-              </a:tr>
-            </a:tbl>
-          </a:graphicData>
-        </a:graphic>
-      </p:graphicFrame>
+        </p:nvSpPr>
+        <p:spPr>
+          <a:xfrm>
+            <a:off x="9413410" y="2957905"/>
+            <a:ext cx="883212" cy="883212"/>
+          </a:xfrm>
+          <a:prstGeom prst="ellipse">
+            <a:avLst/>
+          </a:prstGeom>
+          <a:solidFill>
+            <a:srgbClr val="0077FF"/>
+          </a:solidFill>
+          <a:ln>
+            <a:noFill/>
+          </a:ln>
+        </p:spPr>
+        <p:style>
+          <a:lnRef idx="1">
+            <a:schemeClr val="accent1"/>
+          </a:lnRef>
+          <a:fillRef idx="3">
+            <a:schemeClr val="accent1"/>
+          </a:fillRef>
+          <a:effectRef idx="2">
+            <a:schemeClr val="accent1"/>
+          </a:effectRef>
+          <a:fontRef idx="minor">
+            <a:schemeClr val="lt1"/>
+          </a:fontRef>
+        </p:style>
+        <p:txBody>
+          <a:bodyPr rtlCol="0" anchor="ctr"/>
+          <a:lstStyle/>
+          <a:p>
+            <a:pPr algn="ctr"/>
+          </a:p>
+        </p:txBody>
+      </p:sp>
+      <p:sp>
+        <p:nvSpPr>
+          <p:cNvPr id="9" name="TextBox 8"/>
+          <p:cNvSpPr txBox="1"/>
+          <p:nvPr/>
+        </p:nvSpPr>
+        <p:spPr>
+          <a:xfrm>
+            <a:off x="6084722" y="1492575"/>
+            <a:ext cx="5655442" cy="1525549"/>
+          </a:xfrm>
+          <a:prstGeom prst="rect">
+            <a:avLst/>
+          </a:prstGeom>
+          <a:noFill/>
+        </p:spPr>
+        <p:txBody>
+          <a:bodyPr wrap="square" lIns="12700" rIns="12700" tIns="12700" bIns="12700">
+            <a:spAutoFit/>
+          </a:bodyPr>
+          <a:lstStyle/>
+          <a:p>
+            <a:pPr algn="ctr">
+              <a:defRPr sz="1400" b="0">
+                <a:solidFill>
+                  <a:srgbClr val="FFFFFF"/>
+                </a:solidFill>
+                <a:latin typeface="Play"/>
+                <a:ea typeface="Play"/>
+                <a:cs typeface="Play"/>
+              </a:defRPr>
+            </a:pPr>
+            <a:r>
+              <a:rPr sz="1400" b="0">
+                <a:solidFill>
+                  <a:srgbClr val="FFFFFF"/>
+                </a:solidFill>
+                <a:latin typeface="Play"/>
+                <a:ea typeface="Play"/>
+                <a:cs typeface="Play"/>
+              </a:rPr>
+              <a:t>Первый квартал 2027: генерация иллюстраций</a:t>
+            </a:r>
+          </a:p>
+        </p:txBody>
+      </p:sp>
     </p:spTree>
   </p:cSld>
   <p:clrMapOvr>

--- a/samples/VK_WorkSpace_Клиентская_конференция_Шабл__classic.pptx
+++ b/samples/VK_WorkSpace_Клиентская_конференция_Шабл__classic.pptx
@@ -304,7 +304,7 @@
               <c:strCache>
                 <c:ptCount val="1"/>
                 <c:pt idx="0">
-                  <c:v>Время</c:v>
+                  <c:v>Текущее</c:v>
                 </c:pt>
               </c:strCache>
             </c:strRef>
@@ -321,36 +321,42 @@
           </c:spPr>
           <c:cat>
             <c:strRef>
-              <c:f>Sheet1!$A$2:$A$3</c:f>
+              <c:f>Sheet1!$A$2:$A$4</c:f>
               <c:strCache>
-                <c:ptCount val="2"/>
+                <c:ptCount val="3"/>
                 <c:pt idx="0">
-                  <c:v>Текущая сборка</c:v>
+                  <c:v>Сборка</c:v>
                 </c:pt>
                 <c:pt idx="1">
-                  <c:v>Пилот</c:v>
+                  <c:v>Правки</c:v>
+                </c:pt>
+                <c:pt idx="2">
+                  <c:v>Ожидание</c:v>
                 </c:pt>
               </c:strCache>
             </c:strRef>
           </c:cat>
           <c:val>
             <c:numRef>
-              <c:f>Sheet1!$B$2:$B$3</c:f>
+              <c:f>Sheet1!$B$2:$B$4</c:f>
               <c:numCache>
                 <c:formatCode>General</c:formatCode>
-                <c:ptCount val="2"/>
+                <c:ptCount val="3"/>
                 <c:pt idx="0">
                   <c:v>186.0</c:v>
                 </c:pt>
                 <c:pt idx="1">
-                  <c:v>4.0</c:v>
+                  <c:v>74.0</c:v>
+                </c:pt>
+                <c:pt idx="2">
+                  <c:v>6.0</c:v>
                 </c:pt>
               </c:numCache>
             </c:numRef>
           </c:val>
         </c:ser>
         <c:dLbls>
-          <c:numFmt formatCode="0&quot; минут&quot;" sourceLinked="0"/>
+          <c:numFmt formatCode="0&quot; мин&quot;" sourceLinked="0"/>
           <c:txPr>
             <a:bodyPr wrap="none"/>
             <a:lstStyle/>
@@ -444,7 +450,7 @@
                   </a:defRPr>
                 </a:pPr>
                 <a:r>
-                  <a:t>Время, минут</a:t>
+                  <a:t>Текущее, мин</a:t>
                 </a:r>
               </a:p>
             </c:rich>
@@ -475,6 +481,277 @@
         <c:crosses val="autoZero"/>
       </c:valAx>
     </c:plotArea>
+    <c:dispBlanksAs val="gap"/>
+  </c:chart>
+  <c:txPr>
+    <a:bodyPr/>
+    <a:lstStyle/>
+    <a:p>
+      <a:pPr>
+        <a:defRPr sz="1200" b="0">
+          <a:solidFill>
+            <a:srgbClr val="FFFFFF"/>
+          </a:solidFill>
+          <a:latin typeface="Play"/>
+          <a:ea typeface="Play"/>
+          <a:cs typeface="Play"/>
+        </a:defRPr>
+      </a:pPr>
+      <a:endParaRPr lang="en-US"/>
+    </a:p>
+  </c:txPr>
+  <c:externalData r:id="rId1">
+    <c:autoUpdate val="0"/>
+  </c:externalData>
+</c:chartSpace>
+</file>
+
+<file path=ppt/charts/chart2.xml><?xml version="1.0" encoding="utf-8"?>
+<c:chartSpace xmlns:c="http://schemas.openxmlformats.org/drawingml/2006/chart" xmlns:a="http://schemas.openxmlformats.org/drawingml/2006/main" xmlns:r="http://schemas.openxmlformats.org/officeDocument/2006/relationships">
+  <c:date1904 val="0"/>
+  <c:chart>
+    <c:autoTitleDeleted val="1"/>
+    <c:plotArea>
+      <c:barChart>
+        <c:barDir val="col"/>
+        <c:grouping val="clustered"/>
+        <c:ser>
+          <c:idx val="0"/>
+          <c:order val="0"/>
+          <c:tx>
+            <c:strRef>
+              <c:f>Sheet1!$B$1</c:f>
+              <c:strCache>
+                <c:ptCount val="1"/>
+                <c:pt idx="0">
+                  <c:v>До</c:v>
+                </c:pt>
+              </c:strCache>
+            </c:strRef>
+          </c:tx>
+          <c:spPr>
+            <a:solidFill>
+              <a:srgbClr val="0077FF"/>
+            </a:solidFill>
+            <a:ln>
+              <a:solidFill>
+                <a:srgbClr val="0077FF"/>
+              </a:solidFill>
+            </a:ln>
+          </c:spPr>
+          <c:cat>
+            <c:strRef>
+              <c:f>Sheet1!$A$2:$A$5</c:f>
+              <c:strCache>
+                <c:ptCount val="4"/>
+                <c:pt idx="0">
+                  <c:v>Время сборки</c:v>
+                </c:pt>
+                <c:pt idx="1">
+                  <c:v>Время до первой версии</c:v>
+                </c:pt>
+                <c:pt idx="2">
+                  <c:v>Нарушения стиля</c:v>
+                </c:pt>
+                <c:pt idx="3">
+                  <c:v>Запросы закрыты</c:v>
+                </c:pt>
+              </c:strCache>
+            </c:strRef>
+          </c:cat>
+          <c:val>
+            <c:numRef>
+              <c:f>Sheet1!$B$2:$B$5</c:f>
+              <c:numCache>
+                <c:formatCode>General</c:formatCode>
+                <c:ptCount val="4"/>
+                <c:pt idx="0">
+                  <c:v>186.0</c:v>
+                </c:pt>
+                <c:pt idx="1">
+                  <c:v>6.0</c:v>
+                </c:pt>
+                <c:pt idx="2">
+                  <c:v>19.0</c:v>
+                </c:pt>
+                <c:pt idx="3">
+                  <c:v>11.0</c:v>
+                </c:pt>
+              </c:numCache>
+            </c:numRef>
+          </c:val>
+        </c:ser>
+        <c:ser>
+          <c:idx val="1"/>
+          <c:order val="1"/>
+          <c:tx>
+            <c:strRef>
+              <c:f>Sheet1!$C$1</c:f>
+              <c:strCache>
+                <c:ptCount val="1"/>
+                <c:pt idx="0">
+                  <c:v>После</c:v>
+                </c:pt>
+              </c:strCache>
+            </c:strRef>
+          </c:tx>
+          <c:spPr>
+            <a:solidFill>
+              <a:srgbClr val="6DBCFF"/>
+            </a:solidFill>
+            <a:ln>
+              <a:solidFill>
+                <a:srgbClr val="6DBCFF"/>
+              </a:solidFill>
+            </a:ln>
+          </c:spPr>
+          <c:cat>
+            <c:strRef>
+              <c:f>Sheet1!$A$2:$A$5</c:f>
+              <c:strCache>
+                <c:ptCount val="4"/>
+                <c:pt idx="0">
+                  <c:v>Время сборки</c:v>
+                </c:pt>
+                <c:pt idx="1">
+                  <c:v>Время до первой версии</c:v>
+                </c:pt>
+                <c:pt idx="2">
+                  <c:v>Нарушения стиля</c:v>
+                </c:pt>
+                <c:pt idx="3">
+                  <c:v>Запросы закрыты</c:v>
+                </c:pt>
+              </c:strCache>
+            </c:strRef>
+          </c:cat>
+          <c:val>
+            <c:numRef>
+              <c:f>Sheet1!$C$2:$C$5</c:f>
+              <c:numCache>
+                <c:formatCode>General</c:formatCode>
+                <c:ptCount val="4"/>
+                <c:pt idx="0">
+                  <c:v>4.0</c:v>
+                </c:pt>
+                <c:pt idx="1">
+                  <c:v>1.0</c:v>
+                </c:pt>
+                <c:pt idx="2">
+                  <c:v>2.0</c:v>
+                </c:pt>
+                <c:pt idx="3">
+                  <c:v>38.0</c:v>
+                </c:pt>
+              </c:numCache>
+            </c:numRef>
+          </c:val>
+        </c:ser>
+        <c:dLbls>
+          <c:numFmt formatCode="0" sourceLinked="0"/>
+          <c:txPr>
+            <a:bodyPr wrap="none"/>
+            <a:lstStyle/>
+            <a:p>
+              <a:pPr>
+                <a:defRPr sz="1100" b="0">
+                  <a:solidFill>
+                    <a:srgbClr val="FFFFFF"/>
+                  </a:solidFill>
+                  <a:latin typeface="Play"/>
+                  <a:ea typeface="Play"/>
+                  <a:cs typeface="Play"/>
+                </a:defRPr>
+              </a:pPr>
+            </a:p>
+          </c:txPr>
+          <c:dLblPos val="outEnd"/>
+          <c:showLegendKey val="0"/>
+          <c:showVal val="1"/>
+          <c:showCatName val="0"/>
+          <c:showSerName val="0"/>
+          <c:showPercent val="0"/>
+          <c:showBubbleSize val="0"/>
+          <c:showLeaderLines val="1"/>
+        </c:dLbls>
+        <c:gapWidth val="60"/>
+        <c:axId val="-2068027336"/>
+        <c:axId val="-2113994440"/>
+      </c:barChart>
+      <c:catAx>
+        <c:axId val="-2068027336"/>
+        <c:scaling>
+          <c:orientation val="minMax"/>
+        </c:scaling>
+        <c:delete val="0"/>
+        <c:axPos val="b"/>
+        <c:majorTickMark val="out"/>
+        <c:minorTickMark val="none"/>
+        <c:tickLblPos val="nextTo"/>
+        <c:txPr>
+          <a:bodyPr/>
+          <a:lstStyle/>
+          <a:p>
+            <a:pPr>
+              <a:defRPr sz="1100" b="0">
+                <a:solidFill>
+                  <a:srgbClr val="FFFFFF"/>
+                </a:solidFill>
+                <a:latin typeface="Play"/>
+                <a:ea typeface="Play"/>
+                <a:cs typeface="Play"/>
+              </a:defRPr>
+            </a:pPr>
+          </a:p>
+        </c:txPr>
+        <c:crossAx val="-2113994440"/>
+        <c:crosses val="autoZero"/>
+        <c:auto val="1"/>
+        <c:lblAlgn val="ctr"/>
+        <c:lblOffset val="100"/>
+        <c:noMultiLvlLbl val="0"/>
+      </c:catAx>
+      <c:valAx>
+        <c:axId val="-2113994440"/>
+        <c:scaling/>
+        <c:delete val="0"/>
+        <c:axPos val="l"/>
+        <c:majorGridlines>
+          <c:spPr>
+            <a:ln w="9525">
+              <a:solidFill>
+                <a:srgbClr val="3C3C3C"/>
+              </a:solidFill>
+            </a:ln>
+          </c:spPr>
+        </c:majorGridlines>
+        <c:majorTickMark val="out"/>
+        <c:minorTickMark val="none"/>
+        <c:tickLblPos val="nextTo"/>
+        <c:txPr>
+          <a:bodyPr/>
+          <a:lstStyle/>
+          <a:p>
+            <a:pPr>
+              <a:defRPr sz="1100" b="0">
+                <a:solidFill>
+                  <a:srgbClr val="FFFFFF"/>
+                </a:solidFill>
+                <a:latin typeface="Play"/>
+                <a:ea typeface="Play"/>
+                <a:cs typeface="Play"/>
+              </a:defRPr>
+            </a:pPr>
+          </a:p>
+        </c:txPr>
+        <c:crossAx val="-2068027336"/>
+        <c:crosses val="autoZero"/>
+      </c:valAx>
+    </c:plotArea>
+    <c:legend>
+      <c:legendPos val="b"/>
+      <c:overlay val="0"/>
+    </c:legend>
     <c:dispBlanksAs val="gap"/>
   </c:chart>
   <c:txPr>
@@ -2328,6 +2605,2607 @@
 </p:notes>
 </file>
 
+<file path=ppt/slideLayouts/slideLayout1.xml><?xml version="1.0" encoding="utf-8"?>
+<p:sldLayout xmlns:a="http://schemas.openxmlformats.org/drawingml/2006/main" xmlns:r="http://schemas.openxmlformats.org/officeDocument/2006/relationships" xmlns:mc="http://schemas.openxmlformats.org/markup-compatibility/2006" xmlns:mv="urn:schemas-microsoft-com:mac:vml" xmlns:p="http://schemas.openxmlformats.org/presentationml/2006/main" xmlns:c="http://schemas.openxmlformats.org/drawingml/2006/chart" xmlns:dgm="http://schemas.openxmlformats.org/drawingml/2006/diagram" xmlns:o="urn:schemas-microsoft-com:office:office" xmlns:v="urn:schemas-microsoft-com:vml" xmlns:pvml="urn:schemas-microsoft-com:office:powerpoint" xmlns:com="http://schemas.openxmlformats.org/drawingml/2006/compatibility" xmlns:p14="http://schemas.microsoft.com/office/powerpoint/2010/main" xmlns:p15="http://schemas.microsoft.com/office/powerpoint/2012/main" xmlns:ahyp="http://schemas.microsoft.com/office/drawing/2018/hyperlinkcolor" matchingName="7_Титульный слайд">
+  <p:cSld name="7_Титульный слайд">
+    <p:bg>
+      <p:bgPr>
+        <a:solidFill>
+          <a:schemeClr val="dk1"/>
+        </a:solidFill>
+      </p:bgPr>
+    </p:bg>
+    <p:spTree>
+      <p:nvGrpSpPr>
+        <p:cNvPr id="54" name="Shape 54"/>
+        <p:cNvGrpSpPr/>
+        <p:nvPr/>
+      </p:nvGrpSpPr>
+      <p:grpSpPr>
+        <a:xfrm>
+          <a:off x="0" y="0"/>
+          <a:ext cx="0" cy="0"/>
+          <a:chOff x="0" y="0"/>
+          <a:chExt cx="0" cy="0"/>
+        </a:xfrm>
+      </p:grpSpPr>
+      <p:grpSp>
+        <p:nvGrpSpPr>
+          <p:cNvPr id="55" name="Google Shape;55;p2"/>
+          <p:cNvGrpSpPr/>
+          <p:nvPr/>
+        </p:nvGrpSpPr>
+        <p:grpSpPr>
+          <a:xfrm>
+            <a:off x="224842" y="-74145"/>
+            <a:ext cx="12188171" cy="64326"/>
+            <a:chOff x="-2" y="-2"/>
+            <a:chExt cx="12188169" cy="64324"/>
+          </a:xfrm>
+        </p:grpSpPr>
+        <p:cxnSp>
+          <p:nvCxnSpPr>
+            <p:cNvPr id="56" name="Google Shape;56;p2"/>
+            <p:cNvCxnSpPr/>
+            <p:nvPr/>
+          </p:nvCxnSpPr>
+          <p:spPr>
+            <a:xfrm flipH="1">
+              <a:off x="-2" y="-2"/>
+              <a:ext cx="7" cy="64324"/>
+            </a:xfrm>
+            <a:prstGeom prst="straightConnector1">
+              <a:avLst/>
+            </a:prstGeom>
+            <a:noFill/>
+            <a:ln cap="flat" cmpd="sng" w="9525">
+              <a:solidFill>
+                <a:srgbClr val="808080"/>
+              </a:solidFill>
+              <a:prstDash val="solid"/>
+              <a:miter lim="8000"/>
+              <a:headEnd len="sm" w="sm" type="none"/>
+              <a:tailEnd len="sm" w="sm" type="none"/>
+            </a:ln>
+          </p:spPr>
+        </p:cxnSp>
+        <p:cxnSp>
+          <p:nvCxnSpPr>
+            <p:cNvPr id="57" name="Google Shape;57;p2"/>
+            <p:cNvCxnSpPr/>
+            <p:nvPr/>
+          </p:nvCxnSpPr>
+          <p:spPr>
+            <a:xfrm>
+              <a:off x="677118" y="-2"/>
+              <a:ext cx="7" cy="64324"/>
+            </a:xfrm>
+            <a:prstGeom prst="straightConnector1">
+              <a:avLst/>
+            </a:prstGeom>
+            <a:noFill/>
+            <a:ln cap="flat" cmpd="sng" w="9525">
+              <a:solidFill>
+                <a:srgbClr val="808080"/>
+              </a:solidFill>
+              <a:prstDash val="solid"/>
+              <a:miter lim="8000"/>
+              <a:headEnd len="sm" w="sm" type="none"/>
+              <a:tailEnd len="sm" w="sm" type="none"/>
+            </a:ln>
+          </p:spPr>
+        </p:cxnSp>
+        <p:cxnSp>
+          <p:nvCxnSpPr>
+            <p:cNvPr id="58" name="Google Shape;58;p2"/>
+            <p:cNvCxnSpPr/>
+            <p:nvPr/>
+          </p:nvCxnSpPr>
+          <p:spPr>
+            <a:xfrm>
+              <a:off x="1354241" y="-2"/>
+              <a:ext cx="7" cy="64324"/>
+            </a:xfrm>
+            <a:prstGeom prst="straightConnector1">
+              <a:avLst/>
+            </a:prstGeom>
+            <a:noFill/>
+            <a:ln cap="flat" cmpd="sng" w="9525">
+              <a:solidFill>
+                <a:srgbClr val="808080"/>
+              </a:solidFill>
+              <a:prstDash val="solid"/>
+              <a:miter lim="8000"/>
+              <a:headEnd len="sm" w="sm" type="none"/>
+              <a:tailEnd len="sm" w="sm" type="none"/>
+            </a:ln>
+          </p:spPr>
+        </p:cxnSp>
+        <p:cxnSp>
+          <p:nvCxnSpPr>
+            <p:cNvPr id="59" name="Google Shape;59;p2"/>
+            <p:cNvCxnSpPr/>
+            <p:nvPr/>
+          </p:nvCxnSpPr>
+          <p:spPr>
+            <a:xfrm>
+              <a:off x="2031360" y="-2"/>
+              <a:ext cx="7" cy="64324"/>
+            </a:xfrm>
+            <a:prstGeom prst="straightConnector1">
+              <a:avLst/>
+            </a:prstGeom>
+            <a:noFill/>
+            <a:ln cap="flat" cmpd="sng" w="9525">
+              <a:solidFill>
+                <a:srgbClr val="808080"/>
+              </a:solidFill>
+              <a:prstDash val="solid"/>
+              <a:miter lim="8000"/>
+              <a:headEnd len="sm" w="sm" type="none"/>
+              <a:tailEnd len="sm" w="sm" type="none"/>
+            </a:ln>
+          </p:spPr>
+        </p:cxnSp>
+        <p:cxnSp>
+          <p:nvCxnSpPr>
+            <p:cNvPr id="60" name="Google Shape;60;p2"/>
+            <p:cNvCxnSpPr/>
+            <p:nvPr/>
+          </p:nvCxnSpPr>
+          <p:spPr>
+            <a:xfrm>
+              <a:off x="2708479" y="-2"/>
+              <a:ext cx="7" cy="64324"/>
+            </a:xfrm>
+            <a:prstGeom prst="straightConnector1">
+              <a:avLst/>
+            </a:prstGeom>
+            <a:noFill/>
+            <a:ln cap="flat" cmpd="sng" w="9525">
+              <a:solidFill>
+                <a:srgbClr val="808080"/>
+              </a:solidFill>
+              <a:prstDash val="solid"/>
+              <a:miter lim="8000"/>
+              <a:headEnd len="sm" w="sm" type="none"/>
+              <a:tailEnd len="sm" w="sm" type="none"/>
+            </a:ln>
+          </p:spPr>
+        </p:cxnSp>
+        <p:cxnSp>
+          <p:nvCxnSpPr>
+            <p:cNvPr id="61" name="Google Shape;61;p2"/>
+            <p:cNvCxnSpPr/>
+            <p:nvPr/>
+          </p:nvCxnSpPr>
+          <p:spPr>
+            <a:xfrm>
+              <a:off x="3385598" y="-2"/>
+              <a:ext cx="7" cy="64324"/>
+            </a:xfrm>
+            <a:prstGeom prst="straightConnector1">
+              <a:avLst/>
+            </a:prstGeom>
+            <a:noFill/>
+            <a:ln cap="flat" cmpd="sng" w="9525">
+              <a:solidFill>
+                <a:srgbClr val="808080"/>
+              </a:solidFill>
+              <a:prstDash val="solid"/>
+              <a:miter lim="8000"/>
+              <a:headEnd len="sm" w="sm" type="none"/>
+              <a:tailEnd len="sm" w="sm" type="none"/>
+            </a:ln>
+          </p:spPr>
+        </p:cxnSp>
+        <p:cxnSp>
+          <p:nvCxnSpPr>
+            <p:cNvPr id="62" name="Google Shape;62;p2"/>
+            <p:cNvCxnSpPr/>
+            <p:nvPr/>
+          </p:nvCxnSpPr>
+          <p:spPr>
+            <a:xfrm>
+              <a:off x="4062717" y="-2"/>
+              <a:ext cx="7" cy="64324"/>
+            </a:xfrm>
+            <a:prstGeom prst="straightConnector1">
+              <a:avLst/>
+            </a:prstGeom>
+            <a:noFill/>
+            <a:ln cap="flat" cmpd="sng" w="9525">
+              <a:solidFill>
+                <a:srgbClr val="808080"/>
+              </a:solidFill>
+              <a:prstDash val="solid"/>
+              <a:miter lim="8000"/>
+              <a:headEnd len="sm" w="sm" type="none"/>
+              <a:tailEnd len="sm" w="sm" type="none"/>
+            </a:ln>
+          </p:spPr>
+        </p:cxnSp>
+        <p:cxnSp>
+          <p:nvCxnSpPr>
+            <p:cNvPr id="63" name="Google Shape;63;p2"/>
+            <p:cNvCxnSpPr/>
+            <p:nvPr/>
+          </p:nvCxnSpPr>
+          <p:spPr>
+            <a:xfrm>
+              <a:off x="4739836" y="-2"/>
+              <a:ext cx="7" cy="64324"/>
+            </a:xfrm>
+            <a:prstGeom prst="straightConnector1">
+              <a:avLst/>
+            </a:prstGeom>
+            <a:noFill/>
+            <a:ln cap="flat" cmpd="sng" w="9525">
+              <a:solidFill>
+                <a:srgbClr val="808080"/>
+              </a:solidFill>
+              <a:prstDash val="solid"/>
+              <a:miter lim="8000"/>
+              <a:headEnd len="sm" w="sm" type="none"/>
+              <a:tailEnd len="sm" w="sm" type="none"/>
+            </a:ln>
+          </p:spPr>
+        </p:cxnSp>
+        <p:cxnSp>
+          <p:nvCxnSpPr>
+            <p:cNvPr id="64" name="Google Shape;64;p2"/>
+            <p:cNvCxnSpPr/>
+            <p:nvPr/>
+          </p:nvCxnSpPr>
+          <p:spPr>
+            <a:xfrm>
+              <a:off x="5416955" y="-2"/>
+              <a:ext cx="7" cy="64324"/>
+            </a:xfrm>
+            <a:prstGeom prst="straightConnector1">
+              <a:avLst/>
+            </a:prstGeom>
+            <a:noFill/>
+            <a:ln cap="flat" cmpd="sng" w="9525">
+              <a:solidFill>
+                <a:srgbClr val="808080"/>
+              </a:solidFill>
+              <a:prstDash val="solid"/>
+              <a:miter lim="8000"/>
+              <a:headEnd len="sm" w="sm" type="none"/>
+              <a:tailEnd len="sm" w="sm" type="none"/>
+            </a:ln>
+          </p:spPr>
+        </p:cxnSp>
+        <p:cxnSp>
+          <p:nvCxnSpPr>
+            <p:cNvPr id="65" name="Google Shape;65;p2"/>
+            <p:cNvCxnSpPr/>
+            <p:nvPr/>
+          </p:nvCxnSpPr>
+          <p:spPr>
+            <a:xfrm>
+              <a:off x="6094077" y="-2"/>
+              <a:ext cx="7" cy="64324"/>
+            </a:xfrm>
+            <a:prstGeom prst="straightConnector1">
+              <a:avLst/>
+            </a:prstGeom>
+            <a:noFill/>
+            <a:ln cap="flat" cmpd="sng" w="9525">
+              <a:solidFill>
+                <a:srgbClr val="808080"/>
+              </a:solidFill>
+              <a:prstDash val="solid"/>
+              <a:miter lim="8000"/>
+              <a:headEnd len="sm" w="sm" type="none"/>
+              <a:tailEnd len="sm" w="sm" type="none"/>
+            </a:ln>
+          </p:spPr>
+        </p:cxnSp>
+        <p:cxnSp>
+          <p:nvCxnSpPr>
+            <p:cNvPr id="66" name="Google Shape;66;p2"/>
+            <p:cNvCxnSpPr/>
+            <p:nvPr/>
+          </p:nvCxnSpPr>
+          <p:spPr>
+            <a:xfrm>
+              <a:off x="6771195" y="-2"/>
+              <a:ext cx="7" cy="64324"/>
+            </a:xfrm>
+            <a:prstGeom prst="straightConnector1">
+              <a:avLst/>
+            </a:prstGeom>
+            <a:noFill/>
+            <a:ln cap="flat" cmpd="sng" w="9525">
+              <a:solidFill>
+                <a:srgbClr val="808080"/>
+              </a:solidFill>
+              <a:prstDash val="solid"/>
+              <a:miter lim="8000"/>
+              <a:headEnd len="sm" w="sm" type="none"/>
+              <a:tailEnd len="sm" w="sm" type="none"/>
+            </a:ln>
+          </p:spPr>
+        </p:cxnSp>
+        <p:cxnSp>
+          <p:nvCxnSpPr>
+            <p:cNvPr id="67" name="Google Shape;67;p2"/>
+            <p:cNvCxnSpPr/>
+            <p:nvPr/>
+          </p:nvCxnSpPr>
+          <p:spPr>
+            <a:xfrm>
+              <a:off x="7448315" y="-2"/>
+              <a:ext cx="7" cy="64324"/>
+            </a:xfrm>
+            <a:prstGeom prst="straightConnector1">
+              <a:avLst/>
+            </a:prstGeom>
+            <a:noFill/>
+            <a:ln cap="flat" cmpd="sng" w="9525">
+              <a:solidFill>
+                <a:srgbClr val="808080"/>
+              </a:solidFill>
+              <a:prstDash val="solid"/>
+              <a:miter lim="8000"/>
+              <a:headEnd len="sm" w="sm" type="none"/>
+              <a:tailEnd len="sm" w="sm" type="none"/>
+            </a:ln>
+          </p:spPr>
+        </p:cxnSp>
+        <p:cxnSp>
+          <p:nvCxnSpPr>
+            <p:cNvPr id="68" name="Google Shape;68;p2"/>
+            <p:cNvCxnSpPr/>
+            <p:nvPr/>
+          </p:nvCxnSpPr>
+          <p:spPr>
+            <a:xfrm>
+              <a:off x="8125435" y="-2"/>
+              <a:ext cx="7" cy="64324"/>
+            </a:xfrm>
+            <a:prstGeom prst="straightConnector1">
+              <a:avLst/>
+            </a:prstGeom>
+            <a:noFill/>
+            <a:ln cap="flat" cmpd="sng" w="9525">
+              <a:solidFill>
+                <a:srgbClr val="808080"/>
+              </a:solidFill>
+              <a:prstDash val="solid"/>
+              <a:miter lim="8000"/>
+              <a:headEnd len="sm" w="sm" type="none"/>
+              <a:tailEnd len="sm" w="sm" type="none"/>
+            </a:ln>
+          </p:spPr>
+        </p:cxnSp>
+        <p:cxnSp>
+          <p:nvCxnSpPr>
+            <p:cNvPr id="69" name="Google Shape;69;p2"/>
+            <p:cNvCxnSpPr/>
+            <p:nvPr/>
+          </p:nvCxnSpPr>
+          <p:spPr>
+            <a:xfrm>
+              <a:off x="8802554" y="-2"/>
+              <a:ext cx="7" cy="64324"/>
+            </a:xfrm>
+            <a:prstGeom prst="straightConnector1">
+              <a:avLst/>
+            </a:prstGeom>
+            <a:noFill/>
+            <a:ln cap="flat" cmpd="sng" w="9525">
+              <a:solidFill>
+                <a:srgbClr val="808080"/>
+              </a:solidFill>
+              <a:prstDash val="solid"/>
+              <a:miter lim="8000"/>
+              <a:headEnd len="sm" w="sm" type="none"/>
+              <a:tailEnd len="sm" w="sm" type="none"/>
+            </a:ln>
+          </p:spPr>
+        </p:cxnSp>
+        <p:cxnSp>
+          <p:nvCxnSpPr>
+            <p:cNvPr id="70" name="Google Shape;70;p2"/>
+            <p:cNvCxnSpPr/>
+            <p:nvPr/>
+          </p:nvCxnSpPr>
+          <p:spPr>
+            <a:xfrm>
+              <a:off x="9479673" y="-2"/>
+              <a:ext cx="7" cy="64324"/>
+            </a:xfrm>
+            <a:prstGeom prst="straightConnector1">
+              <a:avLst/>
+            </a:prstGeom>
+            <a:noFill/>
+            <a:ln cap="flat" cmpd="sng" w="9525">
+              <a:solidFill>
+                <a:srgbClr val="808080"/>
+              </a:solidFill>
+              <a:prstDash val="solid"/>
+              <a:miter lim="8000"/>
+              <a:headEnd len="sm" w="sm" type="none"/>
+              <a:tailEnd len="sm" w="sm" type="none"/>
+            </a:ln>
+          </p:spPr>
+        </p:cxnSp>
+        <p:cxnSp>
+          <p:nvCxnSpPr>
+            <p:cNvPr id="71" name="Google Shape;71;p2"/>
+            <p:cNvCxnSpPr/>
+            <p:nvPr/>
+          </p:nvCxnSpPr>
+          <p:spPr>
+            <a:xfrm>
+              <a:off x="10156792" y="-2"/>
+              <a:ext cx="7" cy="64324"/>
+            </a:xfrm>
+            <a:prstGeom prst="straightConnector1">
+              <a:avLst/>
+            </a:prstGeom>
+            <a:noFill/>
+            <a:ln cap="flat" cmpd="sng" w="9525">
+              <a:solidFill>
+                <a:srgbClr val="808080"/>
+              </a:solidFill>
+              <a:prstDash val="solid"/>
+              <a:miter lim="8000"/>
+              <a:headEnd len="sm" w="sm" type="none"/>
+              <a:tailEnd len="sm" w="sm" type="none"/>
+            </a:ln>
+          </p:spPr>
+        </p:cxnSp>
+        <p:cxnSp>
+          <p:nvCxnSpPr>
+            <p:cNvPr id="72" name="Google Shape;72;p2"/>
+            <p:cNvCxnSpPr/>
+            <p:nvPr/>
+          </p:nvCxnSpPr>
+          <p:spPr>
+            <a:xfrm>
+              <a:off x="10833914" y="-2"/>
+              <a:ext cx="7" cy="64324"/>
+            </a:xfrm>
+            <a:prstGeom prst="straightConnector1">
+              <a:avLst/>
+            </a:prstGeom>
+            <a:noFill/>
+            <a:ln cap="flat" cmpd="sng" w="9525">
+              <a:solidFill>
+                <a:srgbClr val="808080"/>
+              </a:solidFill>
+              <a:prstDash val="solid"/>
+              <a:miter lim="8000"/>
+              <a:headEnd len="sm" w="sm" type="none"/>
+              <a:tailEnd len="sm" w="sm" type="none"/>
+            </a:ln>
+          </p:spPr>
+        </p:cxnSp>
+        <p:cxnSp>
+          <p:nvCxnSpPr>
+            <p:cNvPr id="73" name="Google Shape;73;p2"/>
+            <p:cNvCxnSpPr/>
+            <p:nvPr/>
+          </p:nvCxnSpPr>
+          <p:spPr>
+            <a:xfrm>
+              <a:off x="11511034" y="-2"/>
+              <a:ext cx="7" cy="64324"/>
+            </a:xfrm>
+            <a:prstGeom prst="straightConnector1">
+              <a:avLst/>
+            </a:prstGeom>
+            <a:noFill/>
+            <a:ln cap="flat" cmpd="sng" w="9525">
+              <a:solidFill>
+                <a:srgbClr val="808080"/>
+              </a:solidFill>
+              <a:prstDash val="solid"/>
+              <a:miter lim="8000"/>
+              <a:headEnd len="sm" w="sm" type="none"/>
+              <a:tailEnd len="sm" w="sm" type="none"/>
+            </a:ln>
+          </p:spPr>
+        </p:cxnSp>
+        <p:cxnSp>
+          <p:nvCxnSpPr>
+            <p:cNvPr id="74" name="Google Shape;74;p2"/>
+            <p:cNvCxnSpPr/>
+            <p:nvPr/>
+          </p:nvCxnSpPr>
+          <p:spPr>
+            <a:xfrm>
+              <a:off x="12188160" y="-2"/>
+              <a:ext cx="7" cy="64324"/>
+            </a:xfrm>
+            <a:prstGeom prst="straightConnector1">
+              <a:avLst/>
+            </a:prstGeom>
+            <a:noFill/>
+            <a:ln cap="flat" cmpd="sng" w="9525">
+              <a:solidFill>
+                <a:srgbClr val="808080"/>
+              </a:solidFill>
+              <a:prstDash val="solid"/>
+              <a:miter lim="8000"/>
+              <a:headEnd len="sm" w="sm" type="none"/>
+              <a:tailEnd len="sm" w="sm" type="none"/>
+            </a:ln>
+          </p:spPr>
+        </p:cxnSp>
+      </p:grpSp>
+      <p:sp>
+        <p:nvSpPr>
+          <p:cNvPr id="75" name="Google Shape;75;p2"/>
+          <p:cNvSpPr txBox="1"/>
+          <p:nvPr>
+            <p:ph type="title"/>
+          </p:nvPr>
+        </p:nvSpPr>
+        <p:spPr>
+          <a:xfrm>
+            <a:off x="429253" y="2546255"/>
+            <a:ext cx="7827335" cy="1876890"/>
+          </a:xfrm>
+          <a:prstGeom prst="rect">
+            <a:avLst/>
+          </a:prstGeom>
+          <a:noFill/>
+          <a:ln>
+            <a:noFill/>
+          </a:ln>
+        </p:spPr>
+        <p:txBody>
+          <a:bodyPr anchorCtr="0" anchor="ctr" bIns="0" lIns="0" spcFirstLastPara="1" rIns="0" wrap="square" tIns="0">
+            <a:noAutofit/>
+          </a:bodyPr>
+          <a:lstStyle>
+            <a:lvl1pPr lvl="0" algn="l">
+              <a:lnSpc>
+                <a:spcPct val="90000"/>
+              </a:lnSpc>
+              <a:spcBef>
+                <a:spcPts val="0"/>
+              </a:spcBef>
+              <a:spcAft>
+                <a:spcPts val="0"/>
+              </a:spcAft>
+              <a:buClr>
+                <a:schemeClr val="lt1"/>
+              </a:buClr>
+              <a:buSzPts val="3600"/>
+              <a:buFont typeface="Play"/>
+              <a:buNone/>
+              <a:defRPr b="0" i="0" sz="3600">
+                <a:solidFill>
+                  <a:schemeClr val="lt1"/>
+                </a:solidFill>
+                <a:latin typeface="Play"/>
+                <a:ea typeface="Play"/>
+                <a:cs typeface="Play"/>
+                <a:sym typeface="Play"/>
+              </a:defRPr>
+            </a:lvl1pPr>
+            <a:lvl2pPr lvl="1">
+              <a:spcBef>
+                <a:spcPts val="0"/>
+              </a:spcBef>
+              <a:spcAft>
+                <a:spcPts val="0"/>
+              </a:spcAft>
+              <a:buSzPts val="1400"/>
+              <a:buNone/>
+              <a:defRPr/>
+            </a:lvl2pPr>
+            <a:lvl3pPr lvl="2">
+              <a:spcBef>
+                <a:spcPts val="0"/>
+              </a:spcBef>
+              <a:spcAft>
+                <a:spcPts val="0"/>
+              </a:spcAft>
+              <a:buSzPts val="1400"/>
+              <a:buNone/>
+              <a:defRPr/>
+            </a:lvl3pPr>
+            <a:lvl4pPr lvl="3">
+              <a:spcBef>
+                <a:spcPts val="0"/>
+              </a:spcBef>
+              <a:spcAft>
+                <a:spcPts val="0"/>
+              </a:spcAft>
+              <a:buSzPts val="1400"/>
+              <a:buNone/>
+              <a:defRPr/>
+            </a:lvl4pPr>
+            <a:lvl5pPr lvl="4">
+              <a:spcBef>
+                <a:spcPts val="0"/>
+              </a:spcBef>
+              <a:spcAft>
+                <a:spcPts val="0"/>
+              </a:spcAft>
+              <a:buSzPts val="1400"/>
+              <a:buNone/>
+              <a:defRPr/>
+            </a:lvl5pPr>
+            <a:lvl6pPr lvl="5">
+              <a:spcBef>
+                <a:spcPts val="0"/>
+              </a:spcBef>
+              <a:spcAft>
+                <a:spcPts val="0"/>
+              </a:spcAft>
+              <a:buSzPts val="1400"/>
+              <a:buNone/>
+              <a:defRPr/>
+            </a:lvl6pPr>
+            <a:lvl7pPr lvl="6">
+              <a:spcBef>
+                <a:spcPts val="0"/>
+              </a:spcBef>
+              <a:spcAft>
+                <a:spcPts val="0"/>
+              </a:spcAft>
+              <a:buSzPts val="1400"/>
+              <a:buNone/>
+              <a:defRPr/>
+            </a:lvl7pPr>
+            <a:lvl8pPr lvl="7">
+              <a:spcBef>
+                <a:spcPts val="0"/>
+              </a:spcBef>
+              <a:spcAft>
+                <a:spcPts val="0"/>
+              </a:spcAft>
+              <a:buSzPts val="1400"/>
+              <a:buNone/>
+              <a:defRPr/>
+            </a:lvl8pPr>
+            <a:lvl9pPr lvl="8">
+              <a:spcBef>
+                <a:spcPts val="0"/>
+              </a:spcBef>
+              <a:spcAft>
+                <a:spcPts val="0"/>
+              </a:spcAft>
+              <a:buSzPts val="1400"/>
+              <a:buNone/>
+              <a:defRPr/>
+            </a:lvl9pPr>
+          </a:lstStyle>
+          <a:p/>
+        </p:txBody>
+      </p:sp>
+      <p:grpSp>
+        <p:nvGrpSpPr>
+          <p:cNvPr id="76" name="Google Shape;76;p2"/>
+          <p:cNvGrpSpPr/>
+          <p:nvPr/>
+        </p:nvGrpSpPr>
+        <p:grpSpPr>
+          <a:xfrm>
+            <a:off x="1" y="6350"/>
+            <a:ext cx="12192792" cy="6851649"/>
+            <a:chOff x="0" y="6350"/>
+            <a:chExt cx="24396891" cy="13709651"/>
+          </a:xfrm>
+        </p:grpSpPr>
+        <p:pic>
+          <p:nvPicPr>
+            <p:cNvPr id="77" name="Google Shape;77;p2"/>
+            <p:cNvPicPr preferRelativeResize="0"/>
+            <p:nvPr/>
+          </p:nvPicPr>
+          <p:blipFill rotWithShape="1">
+            <a:blip r:embed="rId2">
+              <a:alphaModFix/>
+            </a:blip>
+            <a:srcRect b="0" l="0" r="50023" t="80662"/>
+            <a:stretch/>
+          </p:blipFill>
+          <p:spPr>
+            <a:xfrm>
+              <a:off x="1587" y="11064874"/>
+              <a:ext cx="12192000" cy="2651125"/>
+            </a:xfrm>
+            <a:prstGeom prst="rect">
+              <a:avLst/>
+            </a:prstGeom>
+            <a:noFill/>
+            <a:ln>
+              <a:noFill/>
+            </a:ln>
+          </p:spPr>
+        </p:pic>
+        <p:sp>
+          <p:nvSpPr>
+            <p:cNvPr id="78" name="Google Shape;78;p2"/>
+            <p:cNvSpPr/>
+            <p:nvPr/>
+          </p:nvSpPr>
+          <p:spPr>
+            <a:xfrm>
+              <a:off x="0" y="10657492"/>
+              <a:ext cx="8335061" cy="3058509"/>
+            </a:xfrm>
+            <a:prstGeom prst="rect">
+              <a:avLst/>
+            </a:prstGeom>
+            <a:solidFill>
+              <a:srgbClr val="000000"/>
+            </a:solidFill>
+            <a:ln>
+              <a:noFill/>
+            </a:ln>
+          </p:spPr>
+          <p:txBody>
+            <a:bodyPr anchorCtr="0" anchor="ctr" bIns="45700" lIns="91425" spcFirstLastPara="1" rIns="91425" wrap="square" tIns="45700">
+              <a:noAutofit/>
+            </a:bodyPr>
+            <a:lstStyle/>
+            <a:p>
+              <a:pPr indent="0" lvl="0" marL="0" marR="0" rtl="0" algn="ctr">
+                <a:spcBef>
+                  <a:spcPts val="0"/>
+                </a:spcBef>
+                <a:spcAft>
+                  <a:spcPts val="0"/>
+                </a:spcAft>
+                <a:buNone/>
+              </a:pPr>
+              <a:r>
+                <a:t/>
+              </a:r>
+              <a:endParaRPr b="0" i="0" sz="1800" u="none" cap="none" strike="noStrike">
+                <a:solidFill>
+                  <a:schemeClr val="lt1"/>
+                </a:solidFill>
+                <a:latin typeface="Arial"/>
+                <a:ea typeface="Arial"/>
+                <a:cs typeface="Arial"/>
+                <a:sym typeface="Arial"/>
+              </a:endParaRPr>
+            </a:p>
+          </p:txBody>
+        </p:sp>
+        <p:pic>
+          <p:nvPicPr>
+            <p:cNvPr id="79" name="Google Shape;79;p2"/>
+            <p:cNvPicPr preferRelativeResize="0"/>
+            <p:nvPr/>
+          </p:nvPicPr>
+          <p:blipFill rotWithShape="1">
+            <a:blip r:embed="rId2">
+              <a:alphaModFix/>
+            </a:blip>
+            <a:srcRect b="0" l="52729" r="0" t="82751"/>
+            <a:stretch/>
+          </p:blipFill>
+          <p:spPr>
+            <a:xfrm>
+              <a:off x="12853797" y="11351172"/>
+              <a:ext cx="11531791" cy="2364828"/>
+            </a:xfrm>
+            <a:prstGeom prst="rect">
+              <a:avLst/>
+            </a:prstGeom>
+            <a:noFill/>
+            <a:ln>
+              <a:noFill/>
+            </a:ln>
+          </p:spPr>
+        </p:pic>
+        <p:pic>
+          <p:nvPicPr>
+            <p:cNvPr id="80" name="Google Shape;80;p2"/>
+            <p:cNvPicPr preferRelativeResize="0"/>
+            <p:nvPr/>
+          </p:nvPicPr>
+          <p:blipFill rotWithShape="1">
+            <a:blip r:embed="rId2">
+              <a:alphaModFix/>
+            </a:blip>
+            <a:srcRect b="76357" l="52729" r="0" t="0"/>
+            <a:stretch/>
+          </p:blipFill>
+          <p:spPr>
+            <a:xfrm>
+              <a:off x="12865099" y="6350"/>
+              <a:ext cx="11531792" cy="3241347"/>
+            </a:xfrm>
+            <a:prstGeom prst="rect">
+              <a:avLst/>
+            </a:prstGeom>
+            <a:noFill/>
+            <a:ln>
+              <a:noFill/>
+            </a:ln>
+          </p:spPr>
+        </p:pic>
+        <p:pic>
+          <p:nvPicPr>
+            <p:cNvPr id="81" name="Google Shape;81;p2"/>
+            <p:cNvPicPr preferRelativeResize="0"/>
+            <p:nvPr/>
+          </p:nvPicPr>
+          <p:blipFill rotWithShape="1">
+            <a:blip r:embed="rId2">
+              <a:alphaModFix/>
+            </a:blip>
+            <a:srcRect b="69917" l="0" r="47271" t="0"/>
+            <a:stretch/>
+          </p:blipFill>
+          <p:spPr>
+            <a:xfrm>
+              <a:off x="1587" y="6350"/>
+              <a:ext cx="12863512" cy="4124216"/>
+            </a:xfrm>
+            <a:prstGeom prst="rect">
+              <a:avLst/>
+            </a:prstGeom>
+            <a:noFill/>
+            <a:ln>
+              <a:noFill/>
+            </a:ln>
+          </p:spPr>
+        </p:pic>
+      </p:grpSp>
+      <p:pic>
+        <p:nvPicPr>
+          <p:cNvPr id="82" name="Google Shape;82;p2"/>
+          <p:cNvPicPr preferRelativeResize="0"/>
+          <p:nvPr/>
+        </p:nvPicPr>
+        <p:blipFill rotWithShape="1">
+          <a:blip r:embed="rId3">
+            <a:alphaModFix/>
+          </a:blip>
+          <a:srcRect b="0" l="0" r="0" t="0"/>
+          <a:stretch/>
+        </p:blipFill>
+        <p:spPr>
+          <a:xfrm>
+            <a:off x="398723" y="6035040"/>
+            <a:ext cx="2653844" cy="418148"/>
+          </a:xfrm>
+          <a:prstGeom prst="rect">
+            <a:avLst/>
+          </a:prstGeom>
+          <a:noFill/>
+          <a:ln>
+            <a:noFill/>
+          </a:ln>
+        </p:spPr>
+      </p:pic>
+      <p:pic>
+        <p:nvPicPr>
+          <p:cNvPr descr=" " id="83" name="Google Shape;83;p2"/>
+          <p:cNvPicPr preferRelativeResize="0"/>
+          <p:nvPr/>
+        </p:nvPicPr>
+        <p:blipFill rotWithShape="1">
+          <a:blip r:embed="rId4">
+            <a:alphaModFix/>
+          </a:blip>
+          <a:srcRect b="0" l="0" r="0" t="0"/>
+          <a:stretch/>
+        </p:blipFill>
+        <p:spPr>
+          <a:xfrm>
+            <a:off x="10858522" y="6160788"/>
+            <a:ext cx="934755" cy="292400"/>
+          </a:xfrm>
+          <a:prstGeom prst="rect">
+            <a:avLst/>
+          </a:prstGeom>
+          <a:noFill/>
+          <a:ln>
+            <a:noFill/>
+          </a:ln>
+        </p:spPr>
+      </p:pic>
+    </p:spTree>
+  </p:cSld>
+  <p:clrMapOvr>
+    <a:masterClrMapping/>
+  </p:clrMapOvr>
+</p:sldLayout>
+</file>
+
+<file path=ppt/slideLayouts/slideLayout14.xml><?xml version="1.0" encoding="utf-8"?>
+<p:sldLayout xmlns:a="http://schemas.openxmlformats.org/drawingml/2006/main" xmlns:r="http://schemas.openxmlformats.org/officeDocument/2006/relationships" xmlns:mc="http://schemas.openxmlformats.org/markup-compatibility/2006" xmlns:mv="urn:schemas-microsoft-com:mac:vml" xmlns:p="http://schemas.openxmlformats.org/presentationml/2006/main" xmlns:c="http://schemas.openxmlformats.org/drawingml/2006/chart" xmlns:dgm="http://schemas.openxmlformats.org/drawingml/2006/diagram" xmlns:o="urn:schemas-microsoft-com:office:office" xmlns:v="urn:schemas-microsoft-com:vml" xmlns:pvml="urn:schemas-microsoft-com:office:powerpoint" xmlns:com="http://schemas.openxmlformats.org/drawingml/2006/compatibility" xmlns:p14="http://schemas.microsoft.com/office/powerpoint/2010/main" xmlns:p15="http://schemas.microsoft.com/office/powerpoint/2012/main" xmlns:ahyp="http://schemas.microsoft.com/office/drawing/2018/hyperlinkcolor" matchingName="12_Титульный слайд">
+  <p:cSld name="12_Титульный слайд">
+    <p:bg>
+      <p:bgPr>
+        <a:solidFill>
+          <a:schemeClr val="dk1"/>
+        </a:solidFill>
+      </p:bgPr>
+    </p:bg>
+    <p:spTree>
+      <p:nvGrpSpPr>
+        <p:cNvPr id="326" name="Shape 326"/>
+        <p:cNvGrpSpPr/>
+        <p:nvPr/>
+      </p:nvGrpSpPr>
+      <p:grpSpPr>
+        <a:xfrm>
+          <a:off x="0" y="0"/>
+          <a:ext cx="0" cy="0"/>
+          <a:chOff x="0" y="0"/>
+          <a:chExt cx="0" cy="0"/>
+        </a:xfrm>
+      </p:grpSpPr>
+      <p:pic>
+        <p:nvPicPr>
+          <p:cNvPr descr=" " id="327" name="Google Shape;327;p15"/>
+          <p:cNvPicPr preferRelativeResize="0"/>
+          <p:nvPr/>
+        </p:nvPicPr>
+        <p:blipFill rotWithShape="1">
+          <a:blip r:embed="rId2">
+            <a:alphaModFix/>
+          </a:blip>
+          <a:srcRect b="0" l="0" r="0" t="0"/>
+          <a:stretch/>
+        </p:blipFill>
+        <p:spPr>
+          <a:xfrm>
+            <a:off x="0" y="0"/>
+            <a:ext cx="12191979" cy="6857131"/>
+          </a:xfrm>
+          <a:prstGeom prst="rect">
+            <a:avLst/>
+          </a:prstGeom>
+          <a:noFill/>
+          <a:ln>
+            <a:noFill/>
+          </a:ln>
+        </p:spPr>
+      </p:pic>
+      <p:sp>
+        <p:nvSpPr>
+          <p:cNvPr id="328" name="Google Shape;328;p15"/>
+          <p:cNvSpPr/>
+          <p:nvPr/>
+        </p:nvSpPr>
+        <p:spPr>
+          <a:xfrm>
+            <a:off x="0" y="4499104"/>
+            <a:ext cx="6792686" cy="1661684"/>
+          </a:xfrm>
+          <a:prstGeom prst="rect">
+            <a:avLst/>
+          </a:prstGeom>
+          <a:solidFill>
+            <a:srgbClr val="000000"/>
+          </a:solidFill>
+          <a:ln>
+            <a:noFill/>
+          </a:ln>
+        </p:spPr>
+        <p:txBody>
+          <a:bodyPr anchorCtr="0" anchor="ctr" bIns="45700" lIns="91425" spcFirstLastPara="1" rIns="91425" wrap="square" tIns="45700">
+            <a:noAutofit/>
+          </a:bodyPr>
+          <a:lstStyle/>
+          <a:p>
+            <a:pPr indent="0" lvl="0" marL="0" marR="0" rtl="0" algn="ctr">
+              <a:spcBef>
+                <a:spcPts val="0"/>
+              </a:spcBef>
+              <a:spcAft>
+                <a:spcPts val="0"/>
+              </a:spcAft>
+              <a:buNone/>
+            </a:pPr>
+            <a:r>
+              <a:t/>
+            </a:r>
+            <a:endParaRPr sz="1800">
+              <a:solidFill>
+                <a:schemeClr val="lt1"/>
+              </a:solidFill>
+              <a:latin typeface="Arial"/>
+              <a:ea typeface="Arial"/>
+              <a:cs typeface="Arial"/>
+              <a:sym typeface="Arial"/>
+            </a:endParaRPr>
+          </a:p>
+        </p:txBody>
+      </p:sp>
+      <p:sp>
+        <p:nvSpPr>
+          <p:cNvPr id="329" name="Google Shape;329;p15"/>
+          <p:cNvSpPr/>
+          <p:nvPr/>
+        </p:nvSpPr>
+        <p:spPr>
+          <a:xfrm>
+            <a:off x="1" y="5501389"/>
+            <a:ext cx="4811842" cy="1356609"/>
+          </a:xfrm>
+          <a:prstGeom prst="rect">
+            <a:avLst/>
+          </a:prstGeom>
+          <a:solidFill>
+            <a:srgbClr val="000000"/>
+          </a:solidFill>
+          <a:ln>
+            <a:noFill/>
+          </a:ln>
+        </p:spPr>
+        <p:txBody>
+          <a:bodyPr anchorCtr="0" anchor="ctr" bIns="45700" lIns="91425" spcFirstLastPara="1" rIns="91425" wrap="square" tIns="45700">
+            <a:noAutofit/>
+          </a:bodyPr>
+          <a:lstStyle/>
+          <a:p>
+            <a:pPr indent="0" lvl="0" marL="0" marR="0" rtl="0" algn="ctr">
+              <a:spcBef>
+                <a:spcPts val="0"/>
+              </a:spcBef>
+              <a:spcAft>
+                <a:spcPts val="0"/>
+              </a:spcAft>
+              <a:buNone/>
+            </a:pPr>
+            <a:r>
+              <a:t/>
+            </a:r>
+            <a:endParaRPr sz="1800">
+              <a:solidFill>
+                <a:schemeClr val="lt1"/>
+              </a:solidFill>
+              <a:latin typeface="Arial"/>
+              <a:ea typeface="Arial"/>
+              <a:cs typeface="Arial"/>
+              <a:sym typeface="Arial"/>
+            </a:endParaRPr>
+          </a:p>
+        </p:txBody>
+      </p:sp>
+      <p:grpSp>
+        <p:nvGrpSpPr>
+          <p:cNvPr id="330" name="Google Shape;330;p15"/>
+          <p:cNvGrpSpPr/>
+          <p:nvPr/>
+        </p:nvGrpSpPr>
+        <p:grpSpPr>
+          <a:xfrm>
+            <a:off x="224842" y="-74145"/>
+            <a:ext cx="12188171" cy="64326"/>
+            <a:chOff x="-2" y="-2"/>
+            <a:chExt cx="12188169" cy="64324"/>
+          </a:xfrm>
+        </p:grpSpPr>
+        <p:cxnSp>
+          <p:nvCxnSpPr>
+            <p:cNvPr id="331" name="Google Shape;331;p15"/>
+            <p:cNvCxnSpPr/>
+            <p:nvPr/>
+          </p:nvCxnSpPr>
+          <p:spPr>
+            <a:xfrm flipH="1">
+              <a:off x="-2" y="-2"/>
+              <a:ext cx="7" cy="64324"/>
+            </a:xfrm>
+            <a:prstGeom prst="straightConnector1">
+              <a:avLst/>
+            </a:prstGeom>
+            <a:noFill/>
+            <a:ln cap="flat" cmpd="sng" w="9525">
+              <a:solidFill>
+                <a:srgbClr val="808080"/>
+              </a:solidFill>
+              <a:prstDash val="solid"/>
+              <a:miter lim="8000"/>
+              <a:headEnd len="sm" w="sm" type="none"/>
+              <a:tailEnd len="sm" w="sm" type="none"/>
+            </a:ln>
+          </p:spPr>
+        </p:cxnSp>
+        <p:cxnSp>
+          <p:nvCxnSpPr>
+            <p:cNvPr id="332" name="Google Shape;332;p15"/>
+            <p:cNvCxnSpPr/>
+            <p:nvPr/>
+          </p:nvCxnSpPr>
+          <p:spPr>
+            <a:xfrm>
+              <a:off x="677118" y="-2"/>
+              <a:ext cx="7" cy="64324"/>
+            </a:xfrm>
+            <a:prstGeom prst="straightConnector1">
+              <a:avLst/>
+            </a:prstGeom>
+            <a:noFill/>
+            <a:ln cap="flat" cmpd="sng" w="9525">
+              <a:solidFill>
+                <a:srgbClr val="808080"/>
+              </a:solidFill>
+              <a:prstDash val="solid"/>
+              <a:miter lim="8000"/>
+              <a:headEnd len="sm" w="sm" type="none"/>
+              <a:tailEnd len="sm" w="sm" type="none"/>
+            </a:ln>
+          </p:spPr>
+        </p:cxnSp>
+        <p:cxnSp>
+          <p:nvCxnSpPr>
+            <p:cNvPr id="333" name="Google Shape;333;p15"/>
+            <p:cNvCxnSpPr/>
+            <p:nvPr/>
+          </p:nvCxnSpPr>
+          <p:spPr>
+            <a:xfrm>
+              <a:off x="1354241" y="-2"/>
+              <a:ext cx="7" cy="64324"/>
+            </a:xfrm>
+            <a:prstGeom prst="straightConnector1">
+              <a:avLst/>
+            </a:prstGeom>
+            <a:noFill/>
+            <a:ln cap="flat" cmpd="sng" w="9525">
+              <a:solidFill>
+                <a:srgbClr val="808080"/>
+              </a:solidFill>
+              <a:prstDash val="solid"/>
+              <a:miter lim="8000"/>
+              <a:headEnd len="sm" w="sm" type="none"/>
+              <a:tailEnd len="sm" w="sm" type="none"/>
+            </a:ln>
+          </p:spPr>
+        </p:cxnSp>
+        <p:cxnSp>
+          <p:nvCxnSpPr>
+            <p:cNvPr id="334" name="Google Shape;334;p15"/>
+            <p:cNvCxnSpPr/>
+            <p:nvPr/>
+          </p:nvCxnSpPr>
+          <p:spPr>
+            <a:xfrm>
+              <a:off x="2031360" y="-2"/>
+              <a:ext cx="7" cy="64324"/>
+            </a:xfrm>
+            <a:prstGeom prst="straightConnector1">
+              <a:avLst/>
+            </a:prstGeom>
+            <a:noFill/>
+            <a:ln cap="flat" cmpd="sng" w="9525">
+              <a:solidFill>
+                <a:srgbClr val="808080"/>
+              </a:solidFill>
+              <a:prstDash val="solid"/>
+              <a:miter lim="8000"/>
+              <a:headEnd len="sm" w="sm" type="none"/>
+              <a:tailEnd len="sm" w="sm" type="none"/>
+            </a:ln>
+          </p:spPr>
+        </p:cxnSp>
+        <p:cxnSp>
+          <p:nvCxnSpPr>
+            <p:cNvPr id="335" name="Google Shape;335;p15"/>
+            <p:cNvCxnSpPr/>
+            <p:nvPr/>
+          </p:nvCxnSpPr>
+          <p:spPr>
+            <a:xfrm>
+              <a:off x="2708479" y="-2"/>
+              <a:ext cx="7" cy="64324"/>
+            </a:xfrm>
+            <a:prstGeom prst="straightConnector1">
+              <a:avLst/>
+            </a:prstGeom>
+            <a:noFill/>
+            <a:ln cap="flat" cmpd="sng" w="9525">
+              <a:solidFill>
+                <a:srgbClr val="808080"/>
+              </a:solidFill>
+              <a:prstDash val="solid"/>
+              <a:miter lim="8000"/>
+              <a:headEnd len="sm" w="sm" type="none"/>
+              <a:tailEnd len="sm" w="sm" type="none"/>
+            </a:ln>
+          </p:spPr>
+        </p:cxnSp>
+        <p:cxnSp>
+          <p:nvCxnSpPr>
+            <p:cNvPr id="336" name="Google Shape;336;p15"/>
+            <p:cNvCxnSpPr/>
+            <p:nvPr/>
+          </p:nvCxnSpPr>
+          <p:spPr>
+            <a:xfrm>
+              <a:off x="3385598" y="-2"/>
+              <a:ext cx="7" cy="64324"/>
+            </a:xfrm>
+            <a:prstGeom prst="straightConnector1">
+              <a:avLst/>
+            </a:prstGeom>
+            <a:noFill/>
+            <a:ln cap="flat" cmpd="sng" w="9525">
+              <a:solidFill>
+                <a:srgbClr val="808080"/>
+              </a:solidFill>
+              <a:prstDash val="solid"/>
+              <a:miter lim="8000"/>
+              <a:headEnd len="sm" w="sm" type="none"/>
+              <a:tailEnd len="sm" w="sm" type="none"/>
+            </a:ln>
+          </p:spPr>
+        </p:cxnSp>
+        <p:cxnSp>
+          <p:nvCxnSpPr>
+            <p:cNvPr id="337" name="Google Shape;337;p15"/>
+            <p:cNvCxnSpPr/>
+            <p:nvPr/>
+          </p:nvCxnSpPr>
+          <p:spPr>
+            <a:xfrm>
+              <a:off x="4062717" y="-2"/>
+              <a:ext cx="7" cy="64324"/>
+            </a:xfrm>
+            <a:prstGeom prst="straightConnector1">
+              <a:avLst/>
+            </a:prstGeom>
+            <a:noFill/>
+            <a:ln cap="flat" cmpd="sng" w="9525">
+              <a:solidFill>
+                <a:srgbClr val="808080"/>
+              </a:solidFill>
+              <a:prstDash val="solid"/>
+              <a:miter lim="8000"/>
+              <a:headEnd len="sm" w="sm" type="none"/>
+              <a:tailEnd len="sm" w="sm" type="none"/>
+            </a:ln>
+          </p:spPr>
+        </p:cxnSp>
+        <p:cxnSp>
+          <p:nvCxnSpPr>
+            <p:cNvPr id="338" name="Google Shape;338;p15"/>
+            <p:cNvCxnSpPr/>
+            <p:nvPr/>
+          </p:nvCxnSpPr>
+          <p:spPr>
+            <a:xfrm>
+              <a:off x="4739836" y="-2"/>
+              <a:ext cx="7" cy="64324"/>
+            </a:xfrm>
+            <a:prstGeom prst="straightConnector1">
+              <a:avLst/>
+            </a:prstGeom>
+            <a:noFill/>
+            <a:ln cap="flat" cmpd="sng" w="9525">
+              <a:solidFill>
+                <a:srgbClr val="808080"/>
+              </a:solidFill>
+              <a:prstDash val="solid"/>
+              <a:miter lim="8000"/>
+              <a:headEnd len="sm" w="sm" type="none"/>
+              <a:tailEnd len="sm" w="sm" type="none"/>
+            </a:ln>
+          </p:spPr>
+        </p:cxnSp>
+        <p:cxnSp>
+          <p:nvCxnSpPr>
+            <p:cNvPr id="339" name="Google Shape;339;p15"/>
+            <p:cNvCxnSpPr/>
+            <p:nvPr/>
+          </p:nvCxnSpPr>
+          <p:spPr>
+            <a:xfrm>
+              <a:off x="5416955" y="-2"/>
+              <a:ext cx="7" cy="64324"/>
+            </a:xfrm>
+            <a:prstGeom prst="straightConnector1">
+              <a:avLst/>
+            </a:prstGeom>
+            <a:noFill/>
+            <a:ln cap="flat" cmpd="sng" w="9525">
+              <a:solidFill>
+                <a:srgbClr val="808080"/>
+              </a:solidFill>
+              <a:prstDash val="solid"/>
+              <a:miter lim="8000"/>
+              <a:headEnd len="sm" w="sm" type="none"/>
+              <a:tailEnd len="sm" w="sm" type="none"/>
+            </a:ln>
+          </p:spPr>
+        </p:cxnSp>
+        <p:cxnSp>
+          <p:nvCxnSpPr>
+            <p:cNvPr id="340" name="Google Shape;340;p15"/>
+            <p:cNvCxnSpPr/>
+            <p:nvPr/>
+          </p:nvCxnSpPr>
+          <p:spPr>
+            <a:xfrm>
+              <a:off x="6094077" y="-2"/>
+              <a:ext cx="7" cy="64324"/>
+            </a:xfrm>
+            <a:prstGeom prst="straightConnector1">
+              <a:avLst/>
+            </a:prstGeom>
+            <a:noFill/>
+            <a:ln cap="flat" cmpd="sng" w="9525">
+              <a:solidFill>
+                <a:srgbClr val="808080"/>
+              </a:solidFill>
+              <a:prstDash val="solid"/>
+              <a:miter lim="8000"/>
+              <a:headEnd len="sm" w="sm" type="none"/>
+              <a:tailEnd len="sm" w="sm" type="none"/>
+            </a:ln>
+          </p:spPr>
+        </p:cxnSp>
+        <p:cxnSp>
+          <p:nvCxnSpPr>
+            <p:cNvPr id="341" name="Google Shape;341;p15"/>
+            <p:cNvCxnSpPr/>
+            <p:nvPr/>
+          </p:nvCxnSpPr>
+          <p:spPr>
+            <a:xfrm>
+              <a:off x="6771195" y="-2"/>
+              <a:ext cx="7" cy="64324"/>
+            </a:xfrm>
+            <a:prstGeom prst="straightConnector1">
+              <a:avLst/>
+            </a:prstGeom>
+            <a:noFill/>
+            <a:ln cap="flat" cmpd="sng" w="9525">
+              <a:solidFill>
+                <a:srgbClr val="808080"/>
+              </a:solidFill>
+              <a:prstDash val="solid"/>
+              <a:miter lim="8000"/>
+              <a:headEnd len="sm" w="sm" type="none"/>
+              <a:tailEnd len="sm" w="sm" type="none"/>
+            </a:ln>
+          </p:spPr>
+        </p:cxnSp>
+        <p:cxnSp>
+          <p:nvCxnSpPr>
+            <p:cNvPr id="342" name="Google Shape;342;p15"/>
+            <p:cNvCxnSpPr/>
+            <p:nvPr/>
+          </p:nvCxnSpPr>
+          <p:spPr>
+            <a:xfrm>
+              <a:off x="7448315" y="-2"/>
+              <a:ext cx="7" cy="64324"/>
+            </a:xfrm>
+            <a:prstGeom prst="straightConnector1">
+              <a:avLst/>
+            </a:prstGeom>
+            <a:noFill/>
+            <a:ln cap="flat" cmpd="sng" w="9525">
+              <a:solidFill>
+                <a:srgbClr val="808080"/>
+              </a:solidFill>
+              <a:prstDash val="solid"/>
+              <a:miter lim="8000"/>
+              <a:headEnd len="sm" w="sm" type="none"/>
+              <a:tailEnd len="sm" w="sm" type="none"/>
+            </a:ln>
+          </p:spPr>
+        </p:cxnSp>
+        <p:cxnSp>
+          <p:nvCxnSpPr>
+            <p:cNvPr id="343" name="Google Shape;343;p15"/>
+            <p:cNvCxnSpPr/>
+            <p:nvPr/>
+          </p:nvCxnSpPr>
+          <p:spPr>
+            <a:xfrm>
+              <a:off x="8125435" y="-2"/>
+              <a:ext cx="7" cy="64324"/>
+            </a:xfrm>
+            <a:prstGeom prst="straightConnector1">
+              <a:avLst/>
+            </a:prstGeom>
+            <a:noFill/>
+            <a:ln cap="flat" cmpd="sng" w="9525">
+              <a:solidFill>
+                <a:srgbClr val="808080"/>
+              </a:solidFill>
+              <a:prstDash val="solid"/>
+              <a:miter lim="8000"/>
+              <a:headEnd len="sm" w="sm" type="none"/>
+              <a:tailEnd len="sm" w="sm" type="none"/>
+            </a:ln>
+          </p:spPr>
+        </p:cxnSp>
+        <p:cxnSp>
+          <p:nvCxnSpPr>
+            <p:cNvPr id="344" name="Google Shape;344;p15"/>
+            <p:cNvCxnSpPr/>
+            <p:nvPr/>
+          </p:nvCxnSpPr>
+          <p:spPr>
+            <a:xfrm>
+              <a:off x="8802554" y="-2"/>
+              <a:ext cx="7" cy="64324"/>
+            </a:xfrm>
+            <a:prstGeom prst="straightConnector1">
+              <a:avLst/>
+            </a:prstGeom>
+            <a:noFill/>
+            <a:ln cap="flat" cmpd="sng" w="9525">
+              <a:solidFill>
+                <a:srgbClr val="808080"/>
+              </a:solidFill>
+              <a:prstDash val="solid"/>
+              <a:miter lim="8000"/>
+              <a:headEnd len="sm" w="sm" type="none"/>
+              <a:tailEnd len="sm" w="sm" type="none"/>
+            </a:ln>
+          </p:spPr>
+        </p:cxnSp>
+        <p:cxnSp>
+          <p:nvCxnSpPr>
+            <p:cNvPr id="345" name="Google Shape;345;p15"/>
+            <p:cNvCxnSpPr/>
+            <p:nvPr/>
+          </p:nvCxnSpPr>
+          <p:spPr>
+            <a:xfrm>
+              <a:off x="9479673" y="-2"/>
+              <a:ext cx="7" cy="64324"/>
+            </a:xfrm>
+            <a:prstGeom prst="straightConnector1">
+              <a:avLst/>
+            </a:prstGeom>
+            <a:noFill/>
+            <a:ln cap="flat" cmpd="sng" w="9525">
+              <a:solidFill>
+                <a:srgbClr val="808080"/>
+              </a:solidFill>
+              <a:prstDash val="solid"/>
+              <a:miter lim="8000"/>
+              <a:headEnd len="sm" w="sm" type="none"/>
+              <a:tailEnd len="sm" w="sm" type="none"/>
+            </a:ln>
+          </p:spPr>
+        </p:cxnSp>
+        <p:cxnSp>
+          <p:nvCxnSpPr>
+            <p:cNvPr id="346" name="Google Shape;346;p15"/>
+            <p:cNvCxnSpPr/>
+            <p:nvPr/>
+          </p:nvCxnSpPr>
+          <p:spPr>
+            <a:xfrm>
+              <a:off x="10156792" y="-2"/>
+              <a:ext cx="7" cy="64324"/>
+            </a:xfrm>
+            <a:prstGeom prst="straightConnector1">
+              <a:avLst/>
+            </a:prstGeom>
+            <a:noFill/>
+            <a:ln cap="flat" cmpd="sng" w="9525">
+              <a:solidFill>
+                <a:srgbClr val="808080"/>
+              </a:solidFill>
+              <a:prstDash val="solid"/>
+              <a:miter lim="8000"/>
+              <a:headEnd len="sm" w="sm" type="none"/>
+              <a:tailEnd len="sm" w="sm" type="none"/>
+            </a:ln>
+          </p:spPr>
+        </p:cxnSp>
+        <p:cxnSp>
+          <p:nvCxnSpPr>
+            <p:cNvPr id="347" name="Google Shape;347;p15"/>
+            <p:cNvCxnSpPr/>
+            <p:nvPr/>
+          </p:nvCxnSpPr>
+          <p:spPr>
+            <a:xfrm>
+              <a:off x="10833914" y="-2"/>
+              <a:ext cx="7" cy="64324"/>
+            </a:xfrm>
+            <a:prstGeom prst="straightConnector1">
+              <a:avLst/>
+            </a:prstGeom>
+            <a:noFill/>
+            <a:ln cap="flat" cmpd="sng" w="9525">
+              <a:solidFill>
+                <a:srgbClr val="808080"/>
+              </a:solidFill>
+              <a:prstDash val="solid"/>
+              <a:miter lim="8000"/>
+              <a:headEnd len="sm" w="sm" type="none"/>
+              <a:tailEnd len="sm" w="sm" type="none"/>
+            </a:ln>
+          </p:spPr>
+        </p:cxnSp>
+        <p:cxnSp>
+          <p:nvCxnSpPr>
+            <p:cNvPr id="348" name="Google Shape;348;p15"/>
+            <p:cNvCxnSpPr/>
+            <p:nvPr/>
+          </p:nvCxnSpPr>
+          <p:spPr>
+            <a:xfrm>
+              <a:off x="11511034" y="-2"/>
+              <a:ext cx="7" cy="64324"/>
+            </a:xfrm>
+            <a:prstGeom prst="straightConnector1">
+              <a:avLst/>
+            </a:prstGeom>
+            <a:noFill/>
+            <a:ln cap="flat" cmpd="sng" w="9525">
+              <a:solidFill>
+                <a:srgbClr val="808080"/>
+              </a:solidFill>
+              <a:prstDash val="solid"/>
+              <a:miter lim="8000"/>
+              <a:headEnd len="sm" w="sm" type="none"/>
+              <a:tailEnd len="sm" w="sm" type="none"/>
+            </a:ln>
+          </p:spPr>
+        </p:cxnSp>
+        <p:cxnSp>
+          <p:nvCxnSpPr>
+            <p:cNvPr id="349" name="Google Shape;349;p15"/>
+            <p:cNvCxnSpPr/>
+            <p:nvPr/>
+          </p:nvCxnSpPr>
+          <p:spPr>
+            <a:xfrm>
+              <a:off x="12188160" y="-2"/>
+              <a:ext cx="7" cy="64324"/>
+            </a:xfrm>
+            <a:prstGeom prst="straightConnector1">
+              <a:avLst/>
+            </a:prstGeom>
+            <a:noFill/>
+            <a:ln cap="flat" cmpd="sng" w="9525">
+              <a:solidFill>
+                <a:srgbClr val="808080"/>
+              </a:solidFill>
+              <a:prstDash val="solid"/>
+              <a:miter lim="8000"/>
+              <a:headEnd len="sm" w="sm" type="none"/>
+              <a:tailEnd len="sm" w="sm" type="none"/>
+            </a:ln>
+          </p:spPr>
+        </p:cxnSp>
+      </p:grpSp>
+      <p:sp>
+        <p:nvSpPr>
+          <p:cNvPr id="350" name="Google Shape;350;p15"/>
+          <p:cNvSpPr txBox="1"/>
+          <p:nvPr>
+            <p:ph type="title"/>
+          </p:nvPr>
+        </p:nvSpPr>
+        <p:spPr>
+          <a:xfrm>
+            <a:off x="429253" y="2291422"/>
+            <a:ext cx="7827335" cy="1876890"/>
+          </a:xfrm>
+          <a:prstGeom prst="rect">
+            <a:avLst/>
+          </a:prstGeom>
+          <a:noFill/>
+          <a:ln>
+            <a:noFill/>
+          </a:ln>
+        </p:spPr>
+        <p:txBody>
+          <a:bodyPr anchorCtr="0" anchor="ctr" bIns="0" lIns="0" spcFirstLastPara="1" rIns="0" wrap="square" tIns="0">
+            <a:noAutofit/>
+          </a:bodyPr>
+          <a:lstStyle>
+            <a:lvl1pPr lvl="0" algn="l">
+              <a:lnSpc>
+                <a:spcPct val="90000"/>
+              </a:lnSpc>
+              <a:spcBef>
+                <a:spcPts val="0"/>
+              </a:spcBef>
+              <a:spcAft>
+                <a:spcPts val="0"/>
+              </a:spcAft>
+              <a:buClr>
+                <a:schemeClr val="lt1"/>
+              </a:buClr>
+              <a:buSzPts val="5400"/>
+              <a:buFont typeface="Play"/>
+              <a:buNone/>
+              <a:defRPr b="0" i="0" sz="5400">
+                <a:solidFill>
+                  <a:schemeClr val="lt1"/>
+                </a:solidFill>
+                <a:latin typeface="Play"/>
+                <a:ea typeface="Play"/>
+                <a:cs typeface="Play"/>
+                <a:sym typeface="Play"/>
+              </a:defRPr>
+            </a:lvl1pPr>
+            <a:lvl2pPr lvl="1">
+              <a:spcBef>
+                <a:spcPts val="0"/>
+              </a:spcBef>
+              <a:spcAft>
+                <a:spcPts val="0"/>
+              </a:spcAft>
+              <a:buSzPts val="1400"/>
+              <a:buNone/>
+              <a:defRPr/>
+            </a:lvl2pPr>
+            <a:lvl3pPr lvl="2">
+              <a:spcBef>
+                <a:spcPts val="0"/>
+              </a:spcBef>
+              <a:spcAft>
+                <a:spcPts val="0"/>
+              </a:spcAft>
+              <a:buSzPts val="1400"/>
+              <a:buNone/>
+              <a:defRPr/>
+            </a:lvl3pPr>
+            <a:lvl4pPr lvl="3">
+              <a:spcBef>
+                <a:spcPts val="0"/>
+              </a:spcBef>
+              <a:spcAft>
+                <a:spcPts val="0"/>
+              </a:spcAft>
+              <a:buSzPts val="1400"/>
+              <a:buNone/>
+              <a:defRPr/>
+            </a:lvl4pPr>
+            <a:lvl5pPr lvl="4">
+              <a:spcBef>
+                <a:spcPts val="0"/>
+              </a:spcBef>
+              <a:spcAft>
+                <a:spcPts val="0"/>
+              </a:spcAft>
+              <a:buSzPts val="1400"/>
+              <a:buNone/>
+              <a:defRPr/>
+            </a:lvl5pPr>
+            <a:lvl6pPr lvl="5">
+              <a:spcBef>
+                <a:spcPts val="0"/>
+              </a:spcBef>
+              <a:spcAft>
+                <a:spcPts val="0"/>
+              </a:spcAft>
+              <a:buSzPts val="1400"/>
+              <a:buNone/>
+              <a:defRPr/>
+            </a:lvl6pPr>
+            <a:lvl7pPr lvl="6">
+              <a:spcBef>
+                <a:spcPts val="0"/>
+              </a:spcBef>
+              <a:spcAft>
+                <a:spcPts val="0"/>
+              </a:spcAft>
+              <a:buSzPts val="1400"/>
+              <a:buNone/>
+              <a:defRPr/>
+            </a:lvl7pPr>
+            <a:lvl8pPr lvl="7">
+              <a:spcBef>
+                <a:spcPts val="0"/>
+              </a:spcBef>
+              <a:spcAft>
+                <a:spcPts val="0"/>
+              </a:spcAft>
+              <a:buSzPts val="1400"/>
+              <a:buNone/>
+              <a:defRPr/>
+            </a:lvl8pPr>
+            <a:lvl9pPr lvl="8">
+              <a:spcBef>
+                <a:spcPts val="0"/>
+              </a:spcBef>
+              <a:spcAft>
+                <a:spcPts val="0"/>
+              </a:spcAft>
+              <a:buSzPts val="1400"/>
+              <a:buNone/>
+              <a:defRPr/>
+            </a:lvl9pPr>
+          </a:lstStyle>
+          <a:p/>
+        </p:txBody>
+      </p:sp>
+      <p:pic>
+        <p:nvPicPr>
+          <p:cNvPr id="351" name="Google Shape;351;p15"/>
+          <p:cNvPicPr preferRelativeResize="0"/>
+          <p:nvPr/>
+        </p:nvPicPr>
+        <p:blipFill rotWithShape="1">
+          <a:blip r:embed="rId3">
+            <a:alphaModFix/>
+          </a:blip>
+          <a:srcRect b="0" l="0" r="0" t="0"/>
+          <a:stretch/>
+        </p:blipFill>
+        <p:spPr>
+          <a:xfrm>
+            <a:off x="398723" y="5895936"/>
+            <a:ext cx="3536690" cy="557252"/>
+          </a:xfrm>
+          <a:prstGeom prst="rect">
+            <a:avLst/>
+          </a:prstGeom>
+          <a:noFill/>
+          <a:ln>
+            <a:noFill/>
+          </a:ln>
+        </p:spPr>
+      </p:pic>
+      <p:pic>
+        <p:nvPicPr>
+          <p:cNvPr descr=" " id="352" name="Google Shape;352;p15"/>
+          <p:cNvPicPr preferRelativeResize="0"/>
+          <p:nvPr/>
+        </p:nvPicPr>
+        <p:blipFill rotWithShape="1">
+          <a:blip r:embed="rId4">
+            <a:alphaModFix/>
+          </a:blip>
+          <a:srcRect b="0" l="0" r="0" t="0"/>
+          <a:stretch/>
+        </p:blipFill>
+        <p:spPr>
+          <a:xfrm>
+            <a:off x="10858522" y="6160788"/>
+            <a:ext cx="934755" cy="292400"/>
+          </a:xfrm>
+          <a:prstGeom prst="rect">
+            <a:avLst/>
+          </a:prstGeom>
+          <a:noFill/>
+          <a:ln>
+            <a:noFill/>
+          </a:ln>
+        </p:spPr>
+      </p:pic>
+    </p:spTree>
+  </p:cSld>
+  <p:clrMapOvr>
+    <a:masterClrMapping/>
+  </p:clrMapOvr>
+</p:sldLayout>
+</file>
+
+<file path=ppt/slideLayouts/slideLayout5.xml><?xml version="1.0" encoding="utf-8"?>
+<p:sldLayout xmlns:a="http://schemas.openxmlformats.org/drawingml/2006/main" xmlns:r="http://schemas.openxmlformats.org/officeDocument/2006/relationships" xmlns:mc="http://schemas.openxmlformats.org/markup-compatibility/2006" xmlns:mv="urn:schemas-microsoft-com:mac:vml" xmlns:p="http://schemas.openxmlformats.org/presentationml/2006/main" xmlns:c="http://schemas.openxmlformats.org/drawingml/2006/chart" xmlns:dgm="http://schemas.openxmlformats.org/drawingml/2006/diagram" xmlns:o="urn:schemas-microsoft-com:office:office" xmlns:v="urn:schemas-microsoft-com:vml" xmlns:pvml="urn:schemas-microsoft-com:office:powerpoint" xmlns:com="http://schemas.openxmlformats.org/drawingml/2006/compatibility" xmlns:p14="http://schemas.microsoft.com/office/powerpoint/2010/main" xmlns:p15="http://schemas.microsoft.com/office/powerpoint/2012/main" xmlns:ahyp="http://schemas.microsoft.com/office/drawing/2018/hyperlinkcolor" matchingName="15_Титульный слайд">
+  <p:cSld name="15_Титульный слайд">
+    <p:bg>
+      <p:bgPr>
+        <a:solidFill>
+          <a:schemeClr val="dk1"/>
+        </a:solidFill>
+      </p:bgPr>
+    </p:bg>
+    <p:spTree>
+      <p:nvGrpSpPr>
+        <p:cNvPr id="147" name="Shape 147"/>
+        <p:cNvGrpSpPr/>
+        <p:nvPr/>
+      </p:nvGrpSpPr>
+      <p:grpSpPr>
+        <a:xfrm>
+          <a:off x="0" y="0"/>
+          <a:ext cx="0" cy="0"/>
+          <a:chOff x="0" y="0"/>
+          <a:chExt cx="0" cy="0"/>
+        </a:xfrm>
+      </p:grpSpPr>
+      <p:pic>
+        <p:nvPicPr>
+          <p:cNvPr descr=" " id="148" name="Google Shape;148;p6"/>
+          <p:cNvPicPr preferRelativeResize="0"/>
+          <p:nvPr/>
+        </p:nvPicPr>
+        <p:blipFill rotWithShape="1">
+          <a:blip r:embed="rId2">
+            <a:alphaModFix/>
+          </a:blip>
+          <a:srcRect b="0" l="0" r="0" t="0"/>
+          <a:stretch/>
+        </p:blipFill>
+        <p:spPr>
+          <a:xfrm>
+            <a:off x="0" y="6393786"/>
+            <a:ext cx="4655279" cy="464214"/>
+          </a:xfrm>
+          <a:prstGeom prst="rect">
+            <a:avLst/>
+          </a:prstGeom>
+          <a:noFill/>
+          <a:ln>
+            <a:noFill/>
+          </a:ln>
+        </p:spPr>
+      </p:pic>
+      <p:pic>
+        <p:nvPicPr>
+          <p:cNvPr descr=" " id="149" name="Google Shape;149;p6"/>
+          <p:cNvPicPr preferRelativeResize="0"/>
+          <p:nvPr/>
+        </p:nvPicPr>
+        <p:blipFill rotWithShape="1">
+          <a:blip r:embed="rId3">
+            <a:alphaModFix/>
+          </a:blip>
+          <a:srcRect b="0" l="0" r="0" t="0"/>
+          <a:stretch/>
+        </p:blipFill>
+        <p:spPr>
+          <a:xfrm>
+            <a:off x="10431600" y="0"/>
+            <a:ext cx="1760400" cy="2431278"/>
+          </a:xfrm>
+          <a:prstGeom prst="rect">
+            <a:avLst/>
+          </a:prstGeom>
+          <a:noFill/>
+          <a:ln>
+            <a:noFill/>
+          </a:ln>
+        </p:spPr>
+      </p:pic>
+      <p:pic>
+        <p:nvPicPr>
+          <p:cNvPr descr=" " id="150" name="Google Shape;150;p6"/>
+          <p:cNvPicPr preferRelativeResize="0"/>
+          <p:nvPr/>
+        </p:nvPicPr>
+        <p:blipFill rotWithShape="1">
+          <a:blip r:embed="rId4">
+            <a:alphaModFix/>
+          </a:blip>
+          <a:srcRect b="0" l="0" r="0" t="0"/>
+          <a:stretch/>
+        </p:blipFill>
+        <p:spPr>
+          <a:xfrm>
+            <a:off x="9331498" y="6290333"/>
+            <a:ext cx="2860502" cy="567667"/>
+          </a:xfrm>
+          <a:prstGeom prst="rect">
+            <a:avLst/>
+          </a:prstGeom>
+          <a:noFill/>
+          <a:ln>
+            <a:noFill/>
+          </a:ln>
+        </p:spPr>
+      </p:pic>
+      <p:grpSp>
+        <p:nvGrpSpPr>
+          <p:cNvPr id="151" name="Google Shape;151;p6"/>
+          <p:cNvGrpSpPr/>
+          <p:nvPr/>
+        </p:nvGrpSpPr>
+        <p:grpSpPr>
+          <a:xfrm>
+            <a:off x="224842" y="-74145"/>
+            <a:ext cx="12188171" cy="64326"/>
+            <a:chOff x="-2" y="-2"/>
+            <a:chExt cx="12188169" cy="64324"/>
+          </a:xfrm>
+        </p:grpSpPr>
+        <p:cxnSp>
+          <p:nvCxnSpPr>
+            <p:cNvPr id="152" name="Google Shape;152;p6"/>
+            <p:cNvCxnSpPr/>
+            <p:nvPr/>
+          </p:nvCxnSpPr>
+          <p:spPr>
+            <a:xfrm flipH="1">
+              <a:off x="-2" y="-2"/>
+              <a:ext cx="7" cy="64324"/>
+            </a:xfrm>
+            <a:prstGeom prst="straightConnector1">
+              <a:avLst/>
+            </a:prstGeom>
+            <a:noFill/>
+            <a:ln cap="flat" cmpd="sng" w="9525">
+              <a:solidFill>
+                <a:srgbClr val="808080"/>
+              </a:solidFill>
+              <a:prstDash val="solid"/>
+              <a:miter lim="8000"/>
+              <a:headEnd len="sm" w="sm" type="none"/>
+              <a:tailEnd len="sm" w="sm" type="none"/>
+            </a:ln>
+          </p:spPr>
+        </p:cxnSp>
+        <p:cxnSp>
+          <p:nvCxnSpPr>
+            <p:cNvPr id="153" name="Google Shape;153;p6"/>
+            <p:cNvCxnSpPr/>
+            <p:nvPr/>
+          </p:nvCxnSpPr>
+          <p:spPr>
+            <a:xfrm>
+              <a:off x="677118" y="-2"/>
+              <a:ext cx="7" cy="64324"/>
+            </a:xfrm>
+            <a:prstGeom prst="straightConnector1">
+              <a:avLst/>
+            </a:prstGeom>
+            <a:noFill/>
+            <a:ln cap="flat" cmpd="sng" w="9525">
+              <a:solidFill>
+                <a:srgbClr val="808080"/>
+              </a:solidFill>
+              <a:prstDash val="solid"/>
+              <a:miter lim="8000"/>
+              <a:headEnd len="sm" w="sm" type="none"/>
+              <a:tailEnd len="sm" w="sm" type="none"/>
+            </a:ln>
+          </p:spPr>
+        </p:cxnSp>
+        <p:cxnSp>
+          <p:nvCxnSpPr>
+            <p:cNvPr id="154" name="Google Shape;154;p6"/>
+            <p:cNvCxnSpPr/>
+            <p:nvPr/>
+          </p:nvCxnSpPr>
+          <p:spPr>
+            <a:xfrm>
+              <a:off x="1354241" y="-2"/>
+              <a:ext cx="7" cy="64324"/>
+            </a:xfrm>
+            <a:prstGeom prst="straightConnector1">
+              <a:avLst/>
+            </a:prstGeom>
+            <a:noFill/>
+            <a:ln cap="flat" cmpd="sng" w="9525">
+              <a:solidFill>
+                <a:srgbClr val="808080"/>
+              </a:solidFill>
+              <a:prstDash val="solid"/>
+              <a:miter lim="8000"/>
+              <a:headEnd len="sm" w="sm" type="none"/>
+              <a:tailEnd len="sm" w="sm" type="none"/>
+            </a:ln>
+          </p:spPr>
+        </p:cxnSp>
+        <p:cxnSp>
+          <p:nvCxnSpPr>
+            <p:cNvPr id="155" name="Google Shape;155;p6"/>
+            <p:cNvCxnSpPr/>
+            <p:nvPr/>
+          </p:nvCxnSpPr>
+          <p:spPr>
+            <a:xfrm>
+              <a:off x="2031360" y="-2"/>
+              <a:ext cx="7" cy="64324"/>
+            </a:xfrm>
+            <a:prstGeom prst="straightConnector1">
+              <a:avLst/>
+            </a:prstGeom>
+            <a:noFill/>
+            <a:ln cap="flat" cmpd="sng" w="9525">
+              <a:solidFill>
+                <a:srgbClr val="808080"/>
+              </a:solidFill>
+              <a:prstDash val="solid"/>
+              <a:miter lim="8000"/>
+              <a:headEnd len="sm" w="sm" type="none"/>
+              <a:tailEnd len="sm" w="sm" type="none"/>
+            </a:ln>
+          </p:spPr>
+        </p:cxnSp>
+        <p:cxnSp>
+          <p:nvCxnSpPr>
+            <p:cNvPr id="156" name="Google Shape;156;p6"/>
+            <p:cNvCxnSpPr/>
+            <p:nvPr/>
+          </p:nvCxnSpPr>
+          <p:spPr>
+            <a:xfrm>
+              <a:off x="2708479" y="-2"/>
+              <a:ext cx="7" cy="64324"/>
+            </a:xfrm>
+            <a:prstGeom prst="straightConnector1">
+              <a:avLst/>
+            </a:prstGeom>
+            <a:noFill/>
+            <a:ln cap="flat" cmpd="sng" w="9525">
+              <a:solidFill>
+                <a:srgbClr val="808080"/>
+              </a:solidFill>
+              <a:prstDash val="solid"/>
+              <a:miter lim="8000"/>
+              <a:headEnd len="sm" w="sm" type="none"/>
+              <a:tailEnd len="sm" w="sm" type="none"/>
+            </a:ln>
+          </p:spPr>
+        </p:cxnSp>
+        <p:cxnSp>
+          <p:nvCxnSpPr>
+            <p:cNvPr id="157" name="Google Shape;157;p6"/>
+            <p:cNvCxnSpPr/>
+            <p:nvPr/>
+          </p:nvCxnSpPr>
+          <p:spPr>
+            <a:xfrm>
+              <a:off x="3385598" y="-2"/>
+              <a:ext cx="7" cy="64324"/>
+            </a:xfrm>
+            <a:prstGeom prst="straightConnector1">
+              <a:avLst/>
+            </a:prstGeom>
+            <a:noFill/>
+            <a:ln cap="flat" cmpd="sng" w="9525">
+              <a:solidFill>
+                <a:srgbClr val="808080"/>
+              </a:solidFill>
+              <a:prstDash val="solid"/>
+              <a:miter lim="8000"/>
+              <a:headEnd len="sm" w="sm" type="none"/>
+              <a:tailEnd len="sm" w="sm" type="none"/>
+            </a:ln>
+          </p:spPr>
+        </p:cxnSp>
+        <p:cxnSp>
+          <p:nvCxnSpPr>
+            <p:cNvPr id="158" name="Google Shape;158;p6"/>
+            <p:cNvCxnSpPr/>
+            <p:nvPr/>
+          </p:nvCxnSpPr>
+          <p:spPr>
+            <a:xfrm>
+              <a:off x="4062717" y="-2"/>
+              <a:ext cx="7" cy="64324"/>
+            </a:xfrm>
+            <a:prstGeom prst="straightConnector1">
+              <a:avLst/>
+            </a:prstGeom>
+            <a:noFill/>
+            <a:ln cap="flat" cmpd="sng" w="9525">
+              <a:solidFill>
+                <a:srgbClr val="808080"/>
+              </a:solidFill>
+              <a:prstDash val="solid"/>
+              <a:miter lim="8000"/>
+              <a:headEnd len="sm" w="sm" type="none"/>
+              <a:tailEnd len="sm" w="sm" type="none"/>
+            </a:ln>
+          </p:spPr>
+        </p:cxnSp>
+        <p:cxnSp>
+          <p:nvCxnSpPr>
+            <p:cNvPr id="159" name="Google Shape;159;p6"/>
+            <p:cNvCxnSpPr/>
+            <p:nvPr/>
+          </p:nvCxnSpPr>
+          <p:spPr>
+            <a:xfrm>
+              <a:off x="4739836" y="-2"/>
+              <a:ext cx="7" cy="64324"/>
+            </a:xfrm>
+            <a:prstGeom prst="straightConnector1">
+              <a:avLst/>
+            </a:prstGeom>
+            <a:noFill/>
+            <a:ln cap="flat" cmpd="sng" w="9525">
+              <a:solidFill>
+                <a:srgbClr val="808080"/>
+              </a:solidFill>
+              <a:prstDash val="solid"/>
+              <a:miter lim="8000"/>
+              <a:headEnd len="sm" w="sm" type="none"/>
+              <a:tailEnd len="sm" w="sm" type="none"/>
+            </a:ln>
+          </p:spPr>
+        </p:cxnSp>
+        <p:cxnSp>
+          <p:nvCxnSpPr>
+            <p:cNvPr id="160" name="Google Shape;160;p6"/>
+            <p:cNvCxnSpPr/>
+            <p:nvPr/>
+          </p:nvCxnSpPr>
+          <p:spPr>
+            <a:xfrm>
+              <a:off x="5416955" y="-2"/>
+              <a:ext cx="7" cy="64324"/>
+            </a:xfrm>
+            <a:prstGeom prst="straightConnector1">
+              <a:avLst/>
+            </a:prstGeom>
+            <a:noFill/>
+            <a:ln cap="flat" cmpd="sng" w="9525">
+              <a:solidFill>
+                <a:srgbClr val="808080"/>
+              </a:solidFill>
+              <a:prstDash val="solid"/>
+              <a:miter lim="8000"/>
+              <a:headEnd len="sm" w="sm" type="none"/>
+              <a:tailEnd len="sm" w="sm" type="none"/>
+            </a:ln>
+          </p:spPr>
+        </p:cxnSp>
+        <p:cxnSp>
+          <p:nvCxnSpPr>
+            <p:cNvPr id="161" name="Google Shape;161;p6"/>
+            <p:cNvCxnSpPr/>
+            <p:nvPr/>
+          </p:nvCxnSpPr>
+          <p:spPr>
+            <a:xfrm>
+              <a:off x="6094077" y="-2"/>
+              <a:ext cx="7" cy="64324"/>
+            </a:xfrm>
+            <a:prstGeom prst="straightConnector1">
+              <a:avLst/>
+            </a:prstGeom>
+            <a:noFill/>
+            <a:ln cap="flat" cmpd="sng" w="9525">
+              <a:solidFill>
+                <a:srgbClr val="808080"/>
+              </a:solidFill>
+              <a:prstDash val="solid"/>
+              <a:miter lim="8000"/>
+              <a:headEnd len="sm" w="sm" type="none"/>
+              <a:tailEnd len="sm" w="sm" type="none"/>
+            </a:ln>
+          </p:spPr>
+        </p:cxnSp>
+        <p:cxnSp>
+          <p:nvCxnSpPr>
+            <p:cNvPr id="162" name="Google Shape;162;p6"/>
+            <p:cNvCxnSpPr/>
+            <p:nvPr/>
+          </p:nvCxnSpPr>
+          <p:spPr>
+            <a:xfrm>
+              <a:off x="6771195" y="-2"/>
+              <a:ext cx="7" cy="64324"/>
+            </a:xfrm>
+            <a:prstGeom prst="straightConnector1">
+              <a:avLst/>
+            </a:prstGeom>
+            <a:noFill/>
+            <a:ln cap="flat" cmpd="sng" w="9525">
+              <a:solidFill>
+                <a:srgbClr val="808080"/>
+              </a:solidFill>
+              <a:prstDash val="solid"/>
+              <a:miter lim="8000"/>
+              <a:headEnd len="sm" w="sm" type="none"/>
+              <a:tailEnd len="sm" w="sm" type="none"/>
+            </a:ln>
+          </p:spPr>
+        </p:cxnSp>
+        <p:cxnSp>
+          <p:nvCxnSpPr>
+            <p:cNvPr id="163" name="Google Shape;163;p6"/>
+            <p:cNvCxnSpPr/>
+            <p:nvPr/>
+          </p:nvCxnSpPr>
+          <p:spPr>
+            <a:xfrm>
+              <a:off x="7448315" y="-2"/>
+              <a:ext cx="7" cy="64324"/>
+            </a:xfrm>
+            <a:prstGeom prst="straightConnector1">
+              <a:avLst/>
+            </a:prstGeom>
+            <a:noFill/>
+            <a:ln cap="flat" cmpd="sng" w="9525">
+              <a:solidFill>
+                <a:srgbClr val="808080"/>
+              </a:solidFill>
+              <a:prstDash val="solid"/>
+              <a:miter lim="8000"/>
+              <a:headEnd len="sm" w="sm" type="none"/>
+              <a:tailEnd len="sm" w="sm" type="none"/>
+            </a:ln>
+          </p:spPr>
+        </p:cxnSp>
+        <p:cxnSp>
+          <p:nvCxnSpPr>
+            <p:cNvPr id="164" name="Google Shape;164;p6"/>
+            <p:cNvCxnSpPr/>
+            <p:nvPr/>
+          </p:nvCxnSpPr>
+          <p:spPr>
+            <a:xfrm>
+              <a:off x="8125435" y="-2"/>
+              <a:ext cx="7" cy="64324"/>
+            </a:xfrm>
+            <a:prstGeom prst="straightConnector1">
+              <a:avLst/>
+            </a:prstGeom>
+            <a:noFill/>
+            <a:ln cap="flat" cmpd="sng" w="9525">
+              <a:solidFill>
+                <a:srgbClr val="808080"/>
+              </a:solidFill>
+              <a:prstDash val="solid"/>
+              <a:miter lim="8000"/>
+              <a:headEnd len="sm" w="sm" type="none"/>
+              <a:tailEnd len="sm" w="sm" type="none"/>
+            </a:ln>
+          </p:spPr>
+        </p:cxnSp>
+        <p:cxnSp>
+          <p:nvCxnSpPr>
+            <p:cNvPr id="165" name="Google Shape;165;p6"/>
+            <p:cNvCxnSpPr/>
+            <p:nvPr/>
+          </p:nvCxnSpPr>
+          <p:spPr>
+            <a:xfrm>
+              <a:off x="8802554" y="-2"/>
+              <a:ext cx="7" cy="64324"/>
+            </a:xfrm>
+            <a:prstGeom prst="straightConnector1">
+              <a:avLst/>
+            </a:prstGeom>
+            <a:noFill/>
+            <a:ln cap="flat" cmpd="sng" w="9525">
+              <a:solidFill>
+                <a:srgbClr val="808080"/>
+              </a:solidFill>
+              <a:prstDash val="solid"/>
+              <a:miter lim="8000"/>
+              <a:headEnd len="sm" w="sm" type="none"/>
+              <a:tailEnd len="sm" w="sm" type="none"/>
+            </a:ln>
+          </p:spPr>
+        </p:cxnSp>
+        <p:cxnSp>
+          <p:nvCxnSpPr>
+            <p:cNvPr id="166" name="Google Shape;166;p6"/>
+            <p:cNvCxnSpPr/>
+            <p:nvPr/>
+          </p:nvCxnSpPr>
+          <p:spPr>
+            <a:xfrm>
+              <a:off x="9479673" y="-2"/>
+              <a:ext cx="7" cy="64324"/>
+            </a:xfrm>
+            <a:prstGeom prst="straightConnector1">
+              <a:avLst/>
+            </a:prstGeom>
+            <a:noFill/>
+            <a:ln cap="flat" cmpd="sng" w="9525">
+              <a:solidFill>
+                <a:srgbClr val="808080"/>
+              </a:solidFill>
+              <a:prstDash val="solid"/>
+              <a:miter lim="8000"/>
+              <a:headEnd len="sm" w="sm" type="none"/>
+              <a:tailEnd len="sm" w="sm" type="none"/>
+            </a:ln>
+          </p:spPr>
+        </p:cxnSp>
+        <p:cxnSp>
+          <p:nvCxnSpPr>
+            <p:cNvPr id="167" name="Google Shape;167;p6"/>
+            <p:cNvCxnSpPr/>
+            <p:nvPr/>
+          </p:nvCxnSpPr>
+          <p:spPr>
+            <a:xfrm>
+              <a:off x="10156792" y="-2"/>
+              <a:ext cx="7" cy="64324"/>
+            </a:xfrm>
+            <a:prstGeom prst="straightConnector1">
+              <a:avLst/>
+            </a:prstGeom>
+            <a:noFill/>
+            <a:ln cap="flat" cmpd="sng" w="9525">
+              <a:solidFill>
+                <a:srgbClr val="808080"/>
+              </a:solidFill>
+              <a:prstDash val="solid"/>
+              <a:miter lim="8000"/>
+              <a:headEnd len="sm" w="sm" type="none"/>
+              <a:tailEnd len="sm" w="sm" type="none"/>
+            </a:ln>
+          </p:spPr>
+        </p:cxnSp>
+        <p:cxnSp>
+          <p:nvCxnSpPr>
+            <p:cNvPr id="168" name="Google Shape;168;p6"/>
+            <p:cNvCxnSpPr/>
+            <p:nvPr/>
+          </p:nvCxnSpPr>
+          <p:spPr>
+            <a:xfrm>
+              <a:off x="10833914" y="-2"/>
+              <a:ext cx="7" cy="64324"/>
+            </a:xfrm>
+            <a:prstGeom prst="straightConnector1">
+              <a:avLst/>
+            </a:prstGeom>
+            <a:noFill/>
+            <a:ln cap="flat" cmpd="sng" w="9525">
+              <a:solidFill>
+                <a:srgbClr val="808080"/>
+              </a:solidFill>
+              <a:prstDash val="solid"/>
+              <a:miter lim="8000"/>
+              <a:headEnd len="sm" w="sm" type="none"/>
+              <a:tailEnd len="sm" w="sm" type="none"/>
+            </a:ln>
+          </p:spPr>
+        </p:cxnSp>
+        <p:cxnSp>
+          <p:nvCxnSpPr>
+            <p:cNvPr id="169" name="Google Shape;169;p6"/>
+            <p:cNvCxnSpPr/>
+            <p:nvPr/>
+          </p:nvCxnSpPr>
+          <p:spPr>
+            <a:xfrm>
+              <a:off x="11511034" y="-2"/>
+              <a:ext cx="7" cy="64324"/>
+            </a:xfrm>
+            <a:prstGeom prst="straightConnector1">
+              <a:avLst/>
+            </a:prstGeom>
+            <a:noFill/>
+            <a:ln cap="flat" cmpd="sng" w="9525">
+              <a:solidFill>
+                <a:srgbClr val="808080"/>
+              </a:solidFill>
+              <a:prstDash val="solid"/>
+              <a:miter lim="8000"/>
+              <a:headEnd len="sm" w="sm" type="none"/>
+              <a:tailEnd len="sm" w="sm" type="none"/>
+            </a:ln>
+          </p:spPr>
+        </p:cxnSp>
+        <p:cxnSp>
+          <p:nvCxnSpPr>
+            <p:cNvPr id="170" name="Google Shape;170;p6"/>
+            <p:cNvCxnSpPr/>
+            <p:nvPr/>
+          </p:nvCxnSpPr>
+          <p:spPr>
+            <a:xfrm>
+              <a:off x="12188160" y="-2"/>
+              <a:ext cx="7" cy="64324"/>
+            </a:xfrm>
+            <a:prstGeom prst="straightConnector1">
+              <a:avLst/>
+            </a:prstGeom>
+            <a:noFill/>
+            <a:ln cap="flat" cmpd="sng" w="9525">
+              <a:solidFill>
+                <a:srgbClr val="808080"/>
+              </a:solidFill>
+              <a:prstDash val="solid"/>
+              <a:miter lim="8000"/>
+              <a:headEnd len="sm" w="sm" type="none"/>
+              <a:tailEnd len="sm" w="sm" type="none"/>
+            </a:ln>
+          </p:spPr>
+        </p:cxnSp>
+      </p:grpSp>
+      <p:sp>
+        <p:nvSpPr>
+          <p:cNvPr id="171" name="Google Shape;171;p6"/>
+          <p:cNvSpPr txBox="1"/>
+          <p:nvPr>
+            <p:ph type="title"/>
+          </p:nvPr>
+        </p:nvSpPr>
+        <p:spPr>
+          <a:xfrm>
+            <a:off x="429253" y="424691"/>
+            <a:ext cx="7827311" cy="1167572"/>
+          </a:xfrm>
+          <a:prstGeom prst="rect">
+            <a:avLst/>
+          </a:prstGeom>
+          <a:noFill/>
+          <a:ln>
+            <a:noFill/>
+          </a:ln>
+        </p:spPr>
+        <p:txBody>
+          <a:bodyPr anchorCtr="0" anchor="t" bIns="0" lIns="0" spcFirstLastPara="1" rIns="0" wrap="square" tIns="0">
+            <a:noAutofit/>
+          </a:bodyPr>
+          <a:lstStyle>
+            <a:lvl1pPr lvl="0" algn="l">
+              <a:lnSpc>
+                <a:spcPct val="90000"/>
+              </a:lnSpc>
+              <a:spcBef>
+                <a:spcPts val="0"/>
+              </a:spcBef>
+              <a:spcAft>
+                <a:spcPts val="0"/>
+              </a:spcAft>
+              <a:buClr>
+                <a:schemeClr val="lt1"/>
+              </a:buClr>
+              <a:buSzPts val="3600"/>
+              <a:buFont typeface="Play"/>
+              <a:buNone/>
+              <a:defRPr b="0" i="0" sz="3600">
+                <a:solidFill>
+                  <a:schemeClr val="lt1"/>
+                </a:solidFill>
+                <a:latin typeface="Play"/>
+                <a:ea typeface="Play"/>
+                <a:cs typeface="Play"/>
+                <a:sym typeface="Play"/>
+              </a:defRPr>
+            </a:lvl1pPr>
+            <a:lvl2pPr lvl="1">
+              <a:spcBef>
+                <a:spcPts val="0"/>
+              </a:spcBef>
+              <a:spcAft>
+                <a:spcPts val="0"/>
+              </a:spcAft>
+              <a:buSzPts val="1400"/>
+              <a:buNone/>
+              <a:defRPr/>
+            </a:lvl2pPr>
+            <a:lvl3pPr lvl="2">
+              <a:spcBef>
+                <a:spcPts val="0"/>
+              </a:spcBef>
+              <a:spcAft>
+                <a:spcPts val="0"/>
+              </a:spcAft>
+              <a:buSzPts val="1400"/>
+              <a:buNone/>
+              <a:defRPr/>
+            </a:lvl3pPr>
+            <a:lvl4pPr lvl="3">
+              <a:spcBef>
+                <a:spcPts val="0"/>
+              </a:spcBef>
+              <a:spcAft>
+                <a:spcPts val="0"/>
+              </a:spcAft>
+              <a:buSzPts val="1400"/>
+              <a:buNone/>
+              <a:defRPr/>
+            </a:lvl4pPr>
+            <a:lvl5pPr lvl="4">
+              <a:spcBef>
+                <a:spcPts val="0"/>
+              </a:spcBef>
+              <a:spcAft>
+                <a:spcPts val="0"/>
+              </a:spcAft>
+              <a:buSzPts val="1400"/>
+              <a:buNone/>
+              <a:defRPr/>
+            </a:lvl5pPr>
+            <a:lvl6pPr lvl="5">
+              <a:spcBef>
+                <a:spcPts val="0"/>
+              </a:spcBef>
+              <a:spcAft>
+                <a:spcPts val="0"/>
+              </a:spcAft>
+              <a:buSzPts val="1400"/>
+              <a:buNone/>
+              <a:defRPr/>
+            </a:lvl6pPr>
+            <a:lvl7pPr lvl="6">
+              <a:spcBef>
+                <a:spcPts val="0"/>
+              </a:spcBef>
+              <a:spcAft>
+                <a:spcPts val="0"/>
+              </a:spcAft>
+              <a:buSzPts val="1400"/>
+              <a:buNone/>
+              <a:defRPr/>
+            </a:lvl7pPr>
+            <a:lvl8pPr lvl="7">
+              <a:spcBef>
+                <a:spcPts val="0"/>
+              </a:spcBef>
+              <a:spcAft>
+                <a:spcPts val="0"/>
+              </a:spcAft>
+              <a:buSzPts val="1400"/>
+              <a:buNone/>
+              <a:defRPr/>
+            </a:lvl8pPr>
+            <a:lvl9pPr lvl="8">
+              <a:spcBef>
+                <a:spcPts val="0"/>
+              </a:spcBef>
+              <a:spcAft>
+                <a:spcPts val="0"/>
+              </a:spcAft>
+              <a:buSzPts val="1400"/>
+              <a:buNone/>
+              <a:defRPr/>
+            </a:lvl9pPr>
+          </a:lstStyle>
+          <a:p/>
+        </p:txBody>
+      </p:sp>
+      <p:pic>
+        <p:nvPicPr>
+          <p:cNvPr id="172" name="Google Shape;172;p6"/>
+          <p:cNvPicPr preferRelativeResize="0"/>
+          <p:nvPr/>
+        </p:nvPicPr>
+        <p:blipFill rotWithShape="1">
+          <a:blip r:embed="rId5">
+            <a:alphaModFix/>
+          </a:blip>
+          <a:srcRect b="0" l="0" r="0" t="0"/>
+          <a:stretch/>
+        </p:blipFill>
+        <p:spPr>
+          <a:xfrm>
+            <a:off x="398723" y="6160516"/>
+            <a:ext cx="1857481" cy="292671"/>
+          </a:xfrm>
+          <a:prstGeom prst="rect">
+            <a:avLst/>
+          </a:prstGeom>
+          <a:noFill/>
+          <a:ln>
+            <a:noFill/>
+          </a:ln>
+        </p:spPr>
+      </p:pic>
+      <p:pic>
+        <p:nvPicPr>
+          <p:cNvPr descr=" " id="173" name="Google Shape;173;p6"/>
+          <p:cNvPicPr preferRelativeResize="0"/>
+          <p:nvPr/>
+        </p:nvPicPr>
+        <p:blipFill rotWithShape="1">
+          <a:blip r:embed="rId6">
+            <a:alphaModFix/>
+          </a:blip>
+          <a:srcRect b="0" l="0" r="0" t="0"/>
+          <a:stretch/>
+        </p:blipFill>
+        <p:spPr>
+          <a:xfrm>
+            <a:off x="11093496" y="6238282"/>
+            <a:ext cx="690517" cy="216000"/>
+          </a:xfrm>
+          <a:prstGeom prst="rect">
+            <a:avLst/>
+          </a:prstGeom>
+          <a:noFill/>
+          <a:ln>
+            <a:noFill/>
+          </a:ln>
+        </p:spPr>
+      </p:pic>
+    </p:spTree>
+  </p:cSld>
+  <p:clrMapOvr>
+    <a:masterClrMapping/>
+  </p:clrMapOvr>
+</p:sldLayout>
+</file>
+
 <file path=ppt/slideLayouts/slideLayout6.xml><?xml version="1.0" encoding="utf-8"?>
 <p:sldLayout xmlns:a="http://schemas.openxmlformats.org/drawingml/2006/main" xmlns:r="http://schemas.openxmlformats.org/officeDocument/2006/relationships" xmlns:mc="http://schemas.openxmlformats.org/markup-compatibility/2006" xmlns:mv="urn:schemas-microsoft-com:mac:vml" xmlns:p="http://schemas.openxmlformats.org/presentationml/2006/main" xmlns:c="http://schemas.openxmlformats.org/drawingml/2006/chart" xmlns:dgm="http://schemas.openxmlformats.org/drawingml/2006/diagram" xmlns:o="urn:schemas-microsoft-com:office:office" xmlns:v="urn:schemas-microsoft-com:vml" xmlns:pvml="urn:schemas-microsoft-com:office:powerpoint" xmlns:com="http://schemas.openxmlformats.org/drawingml/2006/compatibility" xmlns:p14="http://schemas.microsoft.com/office/powerpoint/2010/main" xmlns:p15="http://schemas.microsoft.com/office/powerpoint/2012/main" xmlns:ahyp="http://schemas.microsoft.com/office/drawing/2018/hyperlinkcolor" matchingName="13_Титульный слайд">
   <p:cSld name="13_Титульный слайд">
@@ -4104,6 +6982,799 @@
           </a:p>
         </p:txBody>
       </p:sp>
+    </p:spTree>
+  </p:cSld>
+  <p:clrMapOvr>
+    <a:masterClrMapping/>
+  </p:clrMapOvr>
+</p:sldLayout>
+</file>
+
+<file path=ppt/slideLayouts/slideLayout9.xml><?xml version="1.0" encoding="utf-8"?>
+<p:sldLayout xmlns:a="http://schemas.openxmlformats.org/drawingml/2006/main" xmlns:r="http://schemas.openxmlformats.org/officeDocument/2006/relationships" xmlns:mc="http://schemas.openxmlformats.org/markup-compatibility/2006" xmlns:mv="urn:schemas-microsoft-com:mac:vml" xmlns:p="http://schemas.openxmlformats.org/presentationml/2006/main" xmlns:c="http://schemas.openxmlformats.org/drawingml/2006/chart" xmlns:dgm="http://schemas.openxmlformats.org/drawingml/2006/diagram" xmlns:o="urn:schemas-microsoft-com:office:office" xmlns:v="urn:schemas-microsoft-com:vml" xmlns:pvml="urn:schemas-microsoft-com:office:powerpoint" xmlns:com="http://schemas.openxmlformats.org/drawingml/2006/compatibility" xmlns:p14="http://schemas.microsoft.com/office/powerpoint/2010/main" xmlns:p15="http://schemas.microsoft.com/office/powerpoint/2012/main" xmlns:ahyp="http://schemas.microsoft.com/office/drawing/2018/hyperlinkcolor" matchingName="14_Титульный слайд">
+  <p:cSld name="14_Титульный слайд">
+    <p:bg>
+      <p:bgPr>
+        <a:solidFill>
+          <a:schemeClr val="dk1"/>
+        </a:solidFill>
+      </p:bgPr>
+    </p:bg>
+    <p:spTree>
+      <p:nvGrpSpPr>
+        <p:cNvPr id="234" name="Shape 234"/>
+        <p:cNvGrpSpPr/>
+        <p:nvPr/>
+      </p:nvGrpSpPr>
+      <p:grpSpPr>
+        <a:xfrm>
+          <a:off x="0" y="0"/>
+          <a:ext cx="0" cy="0"/>
+          <a:chOff x="0" y="0"/>
+          <a:chExt cx="0" cy="0"/>
+        </a:xfrm>
+      </p:grpSpPr>
+      <p:pic>
+        <p:nvPicPr>
+          <p:cNvPr descr=" " id="235" name="Google Shape;235;p10"/>
+          <p:cNvPicPr preferRelativeResize="0"/>
+          <p:nvPr/>
+        </p:nvPicPr>
+        <p:blipFill rotWithShape="1">
+          <a:blip r:embed="rId2">
+            <a:alphaModFix/>
+          </a:blip>
+          <a:srcRect b="0" l="0" r="0" t="0"/>
+          <a:stretch/>
+        </p:blipFill>
+        <p:spPr>
+          <a:xfrm>
+            <a:off x="6096000" y="5844358"/>
+            <a:ext cx="6096000" cy="1013642"/>
+          </a:xfrm>
+          <a:prstGeom prst="rect">
+            <a:avLst/>
+          </a:prstGeom>
+          <a:noFill/>
+          <a:ln>
+            <a:noFill/>
+          </a:ln>
+        </p:spPr>
+      </p:pic>
+      <p:grpSp>
+        <p:nvGrpSpPr>
+          <p:cNvPr id="236" name="Google Shape;236;p10"/>
+          <p:cNvGrpSpPr/>
+          <p:nvPr/>
+        </p:nvGrpSpPr>
+        <p:grpSpPr>
+          <a:xfrm>
+            <a:off x="224842" y="-74145"/>
+            <a:ext cx="12188171" cy="64326"/>
+            <a:chOff x="-2" y="-2"/>
+            <a:chExt cx="12188169" cy="64324"/>
+          </a:xfrm>
+        </p:grpSpPr>
+        <p:cxnSp>
+          <p:nvCxnSpPr>
+            <p:cNvPr id="237" name="Google Shape;237;p10"/>
+            <p:cNvCxnSpPr/>
+            <p:nvPr/>
+          </p:nvCxnSpPr>
+          <p:spPr>
+            <a:xfrm flipH="1">
+              <a:off x="-2" y="-2"/>
+              <a:ext cx="7" cy="64324"/>
+            </a:xfrm>
+            <a:prstGeom prst="straightConnector1">
+              <a:avLst/>
+            </a:prstGeom>
+            <a:noFill/>
+            <a:ln cap="flat" cmpd="sng" w="9525">
+              <a:solidFill>
+                <a:srgbClr val="808080"/>
+              </a:solidFill>
+              <a:prstDash val="solid"/>
+              <a:miter lim="8000"/>
+              <a:headEnd len="sm" w="sm" type="none"/>
+              <a:tailEnd len="sm" w="sm" type="none"/>
+            </a:ln>
+          </p:spPr>
+        </p:cxnSp>
+        <p:cxnSp>
+          <p:nvCxnSpPr>
+            <p:cNvPr id="238" name="Google Shape;238;p10"/>
+            <p:cNvCxnSpPr/>
+            <p:nvPr/>
+          </p:nvCxnSpPr>
+          <p:spPr>
+            <a:xfrm>
+              <a:off x="677118" y="-2"/>
+              <a:ext cx="7" cy="64324"/>
+            </a:xfrm>
+            <a:prstGeom prst="straightConnector1">
+              <a:avLst/>
+            </a:prstGeom>
+            <a:noFill/>
+            <a:ln cap="flat" cmpd="sng" w="9525">
+              <a:solidFill>
+                <a:srgbClr val="808080"/>
+              </a:solidFill>
+              <a:prstDash val="solid"/>
+              <a:miter lim="8000"/>
+              <a:headEnd len="sm" w="sm" type="none"/>
+              <a:tailEnd len="sm" w="sm" type="none"/>
+            </a:ln>
+          </p:spPr>
+        </p:cxnSp>
+        <p:cxnSp>
+          <p:nvCxnSpPr>
+            <p:cNvPr id="239" name="Google Shape;239;p10"/>
+            <p:cNvCxnSpPr/>
+            <p:nvPr/>
+          </p:nvCxnSpPr>
+          <p:spPr>
+            <a:xfrm>
+              <a:off x="1354241" y="-2"/>
+              <a:ext cx="7" cy="64324"/>
+            </a:xfrm>
+            <a:prstGeom prst="straightConnector1">
+              <a:avLst/>
+            </a:prstGeom>
+            <a:noFill/>
+            <a:ln cap="flat" cmpd="sng" w="9525">
+              <a:solidFill>
+                <a:srgbClr val="808080"/>
+              </a:solidFill>
+              <a:prstDash val="solid"/>
+              <a:miter lim="8000"/>
+              <a:headEnd len="sm" w="sm" type="none"/>
+              <a:tailEnd len="sm" w="sm" type="none"/>
+            </a:ln>
+          </p:spPr>
+        </p:cxnSp>
+        <p:cxnSp>
+          <p:nvCxnSpPr>
+            <p:cNvPr id="240" name="Google Shape;240;p10"/>
+            <p:cNvCxnSpPr/>
+            <p:nvPr/>
+          </p:nvCxnSpPr>
+          <p:spPr>
+            <a:xfrm>
+              <a:off x="2031360" y="-2"/>
+              <a:ext cx="7" cy="64324"/>
+            </a:xfrm>
+            <a:prstGeom prst="straightConnector1">
+              <a:avLst/>
+            </a:prstGeom>
+            <a:noFill/>
+            <a:ln cap="flat" cmpd="sng" w="9525">
+              <a:solidFill>
+                <a:srgbClr val="808080"/>
+              </a:solidFill>
+              <a:prstDash val="solid"/>
+              <a:miter lim="8000"/>
+              <a:headEnd len="sm" w="sm" type="none"/>
+              <a:tailEnd len="sm" w="sm" type="none"/>
+            </a:ln>
+          </p:spPr>
+        </p:cxnSp>
+        <p:cxnSp>
+          <p:nvCxnSpPr>
+            <p:cNvPr id="241" name="Google Shape;241;p10"/>
+            <p:cNvCxnSpPr/>
+            <p:nvPr/>
+          </p:nvCxnSpPr>
+          <p:spPr>
+            <a:xfrm>
+              <a:off x="2708479" y="-2"/>
+              <a:ext cx="7" cy="64324"/>
+            </a:xfrm>
+            <a:prstGeom prst="straightConnector1">
+              <a:avLst/>
+            </a:prstGeom>
+            <a:noFill/>
+            <a:ln cap="flat" cmpd="sng" w="9525">
+              <a:solidFill>
+                <a:srgbClr val="808080"/>
+              </a:solidFill>
+              <a:prstDash val="solid"/>
+              <a:miter lim="8000"/>
+              <a:headEnd len="sm" w="sm" type="none"/>
+              <a:tailEnd len="sm" w="sm" type="none"/>
+            </a:ln>
+          </p:spPr>
+        </p:cxnSp>
+        <p:cxnSp>
+          <p:nvCxnSpPr>
+            <p:cNvPr id="242" name="Google Shape;242;p10"/>
+            <p:cNvCxnSpPr/>
+            <p:nvPr/>
+          </p:nvCxnSpPr>
+          <p:spPr>
+            <a:xfrm>
+              <a:off x="3385598" y="-2"/>
+              <a:ext cx="7" cy="64324"/>
+            </a:xfrm>
+            <a:prstGeom prst="straightConnector1">
+              <a:avLst/>
+            </a:prstGeom>
+            <a:noFill/>
+            <a:ln cap="flat" cmpd="sng" w="9525">
+              <a:solidFill>
+                <a:srgbClr val="808080"/>
+              </a:solidFill>
+              <a:prstDash val="solid"/>
+              <a:miter lim="8000"/>
+              <a:headEnd len="sm" w="sm" type="none"/>
+              <a:tailEnd len="sm" w="sm" type="none"/>
+            </a:ln>
+          </p:spPr>
+        </p:cxnSp>
+        <p:cxnSp>
+          <p:nvCxnSpPr>
+            <p:cNvPr id="243" name="Google Shape;243;p10"/>
+            <p:cNvCxnSpPr/>
+            <p:nvPr/>
+          </p:nvCxnSpPr>
+          <p:spPr>
+            <a:xfrm>
+              <a:off x="4062717" y="-2"/>
+              <a:ext cx="7" cy="64324"/>
+            </a:xfrm>
+            <a:prstGeom prst="straightConnector1">
+              <a:avLst/>
+            </a:prstGeom>
+            <a:noFill/>
+            <a:ln cap="flat" cmpd="sng" w="9525">
+              <a:solidFill>
+                <a:srgbClr val="808080"/>
+              </a:solidFill>
+              <a:prstDash val="solid"/>
+              <a:miter lim="8000"/>
+              <a:headEnd len="sm" w="sm" type="none"/>
+              <a:tailEnd len="sm" w="sm" type="none"/>
+            </a:ln>
+          </p:spPr>
+        </p:cxnSp>
+        <p:cxnSp>
+          <p:nvCxnSpPr>
+            <p:cNvPr id="244" name="Google Shape;244;p10"/>
+            <p:cNvCxnSpPr/>
+            <p:nvPr/>
+          </p:nvCxnSpPr>
+          <p:spPr>
+            <a:xfrm>
+              <a:off x="4739836" y="-2"/>
+              <a:ext cx="7" cy="64324"/>
+            </a:xfrm>
+            <a:prstGeom prst="straightConnector1">
+              <a:avLst/>
+            </a:prstGeom>
+            <a:noFill/>
+            <a:ln cap="flat" cmpd="sng" w="9525">
+              <a:solidFill>
+                <a:srgbClr val="808080"/>
+              </a:solidFill>
+              <a:prstDash val="solid"/>
+              <a:miter lim="8000"/>
+              <a:headEnd len="sm" w="sm" type="none"/>
+              <a:tailEnd len="sm" w="sm" type="none"/>
+            </a:ln>
+          </p:spPr>
+        </p:cxnSp>
+        <p:cxnSp>
+          <p:nvCxnSpPr>
+            <p:cNvPr id="245" name="Google Shape;245;p10"/>
+            <p:cNvCxnSpPr/>
+            <p:nvPr/>
+          </p:nvCxnSpPr>
+          <p:spPr>
+            <a:xfrm>
+              <a:off x="5416955" y="-2"/>
+              <a:ext cx="7" cy="64324"/>
+            </a:xfrm>
+            <a:prstGeom prst="straightConnector1">
+              <a:avLst/>
+            </a:prstGeom>
+            <a:noFill/>
+            <a:ln cap="flat" cmpd="sng" w="9525">
+              <a:solidFill>
+                <a:srgbClr val="808080"/>
+              </a:solidFill>
+              <a:prstDash val="solid"/>
+              <a:miter lim="8000"/>
+              <a:headEnd len="sm" w="sm" type="none"/>
+              <a:tailEnd len="sm" w="sm" type="none"/>
+            </a:ln>
+          </p:spPr>
+        </p:cxnSp>
+        <p:cxnSp>
+          <p:nvCxnSpPr>
+            <p:cNvPr id="246" name="Google Shape;246;p10"/>
+            <p:cNvCxnSpPr/>
+            <p:nvPr/>
+          </p:nvCxnSpPr>
+          <p:spPr>
+            <a:xfrm>
+              <a:off x="6094077" y="-2"/>
+              <a:ext cx="7" cy="64324"/>
+            </a:xfrm>
+            <a:prstGeom prst="straightConnector1">
+              <a:avLst/>
+            </a:prstGeom>
+            <a:noFill/>
+            <a:ln cap="flat" cmpd="sng" w="9525">
+              <a:solidFill>
+                <a:srgbClr val="808080"/>
+              </a:solidFill>
+              <a:prstDash val="solid"/>
+              <a:miter lim="8000"/>
+              <a:headEnd len="sm" w="sm" type="none"/>
+              <a:tailEnd len="sm" w="sm" type="none"/>
+            </a:ln>
+          </p:spPr>
+        </p:cxnSp>
+        <p:cxnSp>
+          <p:nvCxnSpPr>
+            <p:cNvPr id="247" name="Google Shape;247;p10"/>
+            <p:cNvCxnSpPr/>
+            <p:nvPr/>
+          </p:nvCxnSpPr>
+          <p:spPr>
+            <a:xfrm>
+              <a:off x="6771195" y="-2"/>
+              <a:ext cx="7" cy="64324"/>
+            </a:xfrm>
+            <a:prstGeom prst="straightConnector1">
+              <a:avLst/>
+            </a:prstGeom>
+            <a:noFill/>
+            <a:ln cap="flat" cmpd="sng" w="9525">
+              <a:solidFill>
+                <a:srgbClr val="808080"/>
+              </a:solidFill>
+              <a:prstDash val="solid"/>
+              <a:miter lim="8000"/>
+              <a:headEnd len="sm" w="sm" type="none"/>
+              <a:tailEnd len="sm" w="sm" type="none"/>
+            </a:ln>
+          </p:spPr>
+        </p:cxnSp>
+        <p:cxnSp>
+          <p:nvCxnSpPr>
+            <p:cNvPr id="248" name="Google Shape;248;p10"/>
+            <p:cNvCxnSpPr/>
+            <p:nvPr/>
+          </p:nvCxnSpPr>
+          <p:spPr>
+            <a:xfrm>
+              <a:off x="7448315" y="-2"/>
+              <a:ext cx="7" cy="64324"/>
+            </a:xfrm>
+            <a:prstGeom prst="straightConnector1">
+              <a:avLst/>
+            </a:prstGeom>
+            <a:noFill/>
+            <a:ln cap="flat" cmpd="sng" w="9525">
+              <a:solidFill>
+                <a:srgbClr val="808080"/>
+              </a:solidFill>
+              <a:prstDash val="solid"/>
+              <a:miter lim="8000"/>
+              <a:headEnd len="sm" w="sm" type="none"/>
+              <a:tailEnd len="sm" w="sm" type="none"/>
+            </a:ln>
+          </p:spPr>
+        </p:cxnSp>
+        <p:cxnSp>
+          <p:nvCxnSpPr>
+            <p:cNvPr id="249" name="Google Shape;249;p10"/>
+            <p:cNvCxnSpPr/>
+            <p:nvPr/>
+          </p:nvCxnSpPr>
+          <p:spPr>
+            <a:xfrm>
+              <a:off x="8125435" y="-2"/>
+              <a:ext cx="7" cy="64324"/>
+            </a:xfrm>
+            <a:prstGeom prst="straightConnector1">
+              <a:avLst/>
+            </a:prstGeom>
+            <a:noFill/>
+            <a:ln cap="flat" cmpd="sng" w="9525">
+              <a:solidFill>
+                <a:srgbClr val="808080"/>
+              </a:solidFill>
+              <a:prstDash val="solid"/>
+              <a:miter lim="8000"/>
+              <a:headEnd len="sm" w="sm" type="none"/>
+              <a:tailEnd len="sm" w="sm" type="none"/>
+            </a:ln>
+          </p:spPr>
+        </p:cxnSp>
+        <p:cxnSp>
+          <p:nvCxnSpPr>
+            <p:cNvPr id="250" name="Google Shape;250;p10"/>
+            <p:cNvCxnSpPr/>
+            <p:nvPr/>
+          </p:nvCxnSpPr>
+          <p:spPr>
+            <a:xfrm>
+              <a:off x="8802554" y="-2"/>
+              <a:ext cx="7" cy="64324"/>
+            </a:xfrm>
+            <a:prstGeom prst="straightConnector1">
+              <a:avLst/>
+            </a:prstGeom>
+            <a:noFill/>
+            <a:ln cap="flat" cmpd="sng" w="9525">
+              <a:solidFill>
+                <a:srgbClr val="808080"/>
+              </a:solidFill>
+              <a:prstDash val="solid"/>
+              <a:miter lim="8000"/>
+              <a:headEnd len="sm" w="sm" type="none"/>
+              <a:tailEnd len="sm" w="sm" type="none"/>
+            </a:ln>
+          </p:spPr>
+        </p:cxnSp>
+        <p:cxnSp>
+          <p:nvCxnSpPr>
+            <p:cNvPr id="251" name="Google Shape;251;p10"/>
+            <p:cNvCxnSpPr/>
+            <p:nvPr/>
+          </p:nvCxnSpPr>
+          <p:spPr>
+            <a:xfrm>
+              <a:off x="9479673" y="-2"/>
+              <a:ext cx="7" cy="64324"/>
+            </a:xfrm>
+            <a:prstGeom prst="straightConnector1">
+              <a:avLst/>
+            </a:prstGeom>
+            <a:noFill/>
+            <a:ln cap="flat" cmpd="sng" w="9525">
+              <a:solidFill>
+                <a:srgbClr val="808080"/>
+              </a:solidFill>
+              <a:prstDash val="solid"/>
+              <a:miter lim="8000"/>
+              <a:headEnd len="sm" w="sm" type="none"/>
+              <a:tailEnd len="sm" w="sm" type="none"/>
+            </a:ln>
+          </p:spPr>
+        </p:cxnSp>
+        <p:cxnSp>
+          <p:nvCxnSpPr>
+            <p:cNvPr id="252" name="Google Shape;252;p10"/>
+            <p:cNvCxnSpPr/>
+            <p:nvPr/>
+          </p:nvCxnSpPr>
+          <p:spPr>
+            <a:xfrm>
+              <a:off x="10156792" y="-2"/>
+              <a:ext cx="7" cy="64324"/>
+            </a:xfrm>
+            <a:prstGeom prst="straightConnector1">
+              <a:avLst/>
+            </a:prstGeom>
+            <a:noFill/>
+            <a:ln cap="flat" cmpd="sng" w="9525">
+              <a:solidFill>
+                <a:srgbClr val="808080"/>
+              </a:solidFill>
+              <a:prstDash val="solid"/>
+              <a:miter lim="8000"/>
+              <a:headEnd len="sm" w="sm" type="none"/>
+              <a:tailEnd len="sm" w="sm" type="none"/>
+            </a:ln>
+          </p:spPr>
+        </p:cxnSp>
+        <p:cxnSp>
+          <p:nvCxnSpPr>
+            <p:cNvPr id="253" name="Google Shape;253;p10"/>
+            <p:cNvCxnSpPr/>
+            <p:nvPr/>
+          </p:nvCxnSpPr>
+          <p:spPr>
+            <a:xfrm>
+              <a:off x="10833914" y="-2"/>
+              <a:ext cx="7" cy="64324"/>
+            </a:xfrm>
+            <a:prstGeom prst="straightConnector1">
+              <a:avLst/>
+            </a:prstGeom>
+            <a:noFill/>
+            <a:ln cap="flat" cmpd="sng" w="9525">
+              <a:solidFill>
+                <a:srgbClr val="808080"/>
+              </a:solidFill>
+              <a:prstDash val="solid"/>
+              <a:miter lim="8000"/>
+              <a:headEnd len="sm" w="sm" type="none"/>
+              <a:tailEnd len="sm" w="sm" type="none"/>
+            </a:ln>
+          </p:spPr>
+        </p:cxnSp>
+        <p:cxnSp>
+          <p:nvCxnSpPr>
+            <p:cNvPr id="254" name="Google Shape;254;p10"/>
+            <p:cNvCxnSpPr/>
+            <p:nvPr/>
+          </p:nvCxnSpPr>
+          <p:spPr>
+            <a:xfrm>
+              <a:off x="11511034" y="-2"/>
+              <a:ext cx="7" cy="64324"/>
+            </a:xfrm>
+            <a:prstGeom prst="straightConnector1">
+              <a:avLst/>
+            </a:prstGeom>
+            <a:noFill/>
+            <a:ln cap="flat" cmpd="sng" w="9525">
+              <a:solidFill>
+                <a:srgbClr val="808080"/>
+              </a:solidFill>
+              <a:prstDash val="solid"/>
+              <a:miter lim="8000"/>
+              <a:headEnd len="sm" w="sm" type="none"/>
+              <a:tailEnd len="sm" w="sm" type="none"/>
+            </a:ln>
+          </p:spPr>
+        </p:cxnSp>
+        <p:cxnSp>
+          <p:nvCxnSpPr>
+            <p:cNvPr id="255" name="Google Shape;255;p10"/>
+            <p:cNvCxnSpPr/>
+            <p:nvPr/>
+          </p:nvCxnSpPr>
+          <p:spPr>
+            <a:xfrm>
+              <a:off x="12188160" y="-2"/>
+              <a:ext cx="7" cy="64324"/>
+            </a:xfrm>
+            <a:prstGeom prst="straightConnector1">
+              <a:avLst/>
+            </a:prstGeom>
+            <a:noFill/>
+            <a:ln cap="flat" cmpd="sng" w="9525">
+              <a:solidFill>
+                <a:srgbClr val="808080"/>
+              </a:solidFill>
+              <a:prstDash val="solid"/>
+              <a:miter lim="8000"/>
+              <a:headEnd len="sm" w="sm" type="none"/>
+              <a:tailEnd len="sm" w="sm" type="none"/>
+            </a:ln>
+          </p:spPr>
+        </p:cxnSp>
+      </p:grpSp>
+      <p:sp>
+        <p:nvSpPr>
+          <p:cNvPr id="256" name="Google Shape;256;p10"/>
+          <p:cNvSpPr txBox="1"/>
+          <p:nvPr>
+            <p:ph type="title"/>
+          </p:nvPr>
+        </p:nvSpPr>
+        <p:spPr>
+          <a:xfrm>
+            <a:off x="429253" y="424691"/>
+            <a:ext cx="7827311" cy="1167572"/>
+          </a:xfrm>
+          <a:prstGeom prst="rect">
+            <a:avLst/>
+          </a:prstGeom>
+          <a:noFill/>
+          <a:ln>
+            <a:noFill/>
+          </a:ln>
+        </p:spPr>
+        <p:txBody>
+          <a:bodyPr anchorCtr="0" anchor="t" bIns="0" lIns="0" spcFirstLastPara="1" rIns="0" wrap="square" tIns="0">
+            <a:noAutofit/>
+          </a:bodyPr>
+          <a:lstStyle>
+            <a:lvl1pPr lvl="0" algn="l">
+              <a:lnSpc>
+                <a:spcPct val="90000"/>
+              </a:lnSpc>
+              <a:spcBef>
+                <a:spcPts val="0"/>
+              </a:spcBef>
+              <a:spcAft>
+                <a:spcPts val="0"/>
+              </a:spcAft>
+              <a:buClr>
+                <a:schemeClr val="lt1"/>
+              </a:buClr>
+              <a:buSzPts val="3600"/>
+              <a:buFont typeface="Play"/>
+              <a:buNone/>
+              <a:defRPr b="0" i="0" sz="3600">
+                <a:solidFill>
+                  <a:schemeClr val="lt1"/>
+                </a:solidFill>
+                <a:latin typeface="Play"/>
+                <a:ea typeface="Play"/>
+                <a:cs typeface="Play"/>
+                <a:sym typeface="Play"/>
+              </a:defRPr>
+            </a:lvl1pPr>
+            <a:lvl2pPr lvl="1">
+              <a:spcBef>
+                <a:spcPts val="0"/>
+              </a:spcBef>
+              <a:spcAft>
+                <a:spcPts val="0"/>
+              </a:spcAft>
+              <a:buSzPts val="1400"/>
+              <a:buNone/>
+              <a:defRPr/>
+            </a:lvl2pPr>
+            <a:lvl3pPr lvl="2">
+              <a:spcBef>
+                <a:spcPts val="0"/>
+              </a:spcBef>
+              <a:spcAft>
+                <a:spcPts val="0"/>
+              </a:spcAft>
+              <a:buSzPts val="1400"/>
+              <a:buNone/>
+              <a:defRPr/>
+            </a:lvl3pPr>
+            <a:lvl4pPr lvl="3">
+              <a:spcBef>
+                <a:spcPts val="0"/>
+              </a:spcBef>
+              <a:spcAft>
+                <a:spcPts val="0"/>
+              </a:spcAft>
+              <a:buSzPts val="1400"/>
+              <a:buNone/>
+              <a:defRPr/>
+            </a:lvl4pPr>
+            <a:lvl5pPr lvl="4">
+              <a:spcBef>
+                <a:spcPts val="0"/>
+              </a:spcBef>
+              <a:spcAft>
+                <a:spcPts val="0"/>
+              </a:spcAft>
+              <a:buSzPts val="1400"/>
+              <a:buNone/>
+              <a:defRPr/>
+            </a:lvl5pPr>
+            <a:lvl6pPr lvl="5">
+              <a:spcBef>
+                <a:spcPts val="0"/>
+              </a:spcBef>
+              <a:spcAft>
+                <a:spcPts val="0"/>
+              </a:spcAft>
+              <a:buSzPts val="1400"/>
+              <a:buNone/>
+              <a:defRPr/>
+            </a:lvl6pPr>
+            <a:lvl7pPr lvl="6">
+              <a:spcBef>
+                <a:spcPts val="0"/>
+              </a:spcBef>
+              <a:spcAft>
+                <a:spcPts val="0"/>
+              </a:spcAft>
+              <a:buSzPts val="1400"/>
+              <a:buNone/>
+              <a:defRPr/>
+            </a:lvl7pPr>
+            <a:lvl8pPr lvl="7">
+              <a:spcBef>
+                <a:spcPts val="0"/>
+              </a:spcBef>
+              <a:spcAft>
+                <a:spcPts val="0"/>
+              </a:spcAft>
+              <a:buSzPts val="1400"/>
+              <a:buNone/>
+              <a:defRPr/>
+            </a:lvl8pPr>
+            <a:lvl9pPr lvl="8">
+              <a:spcBef>
+                <a:spcPts val="0"/>
+              </a:spcBef>
+              <a:spcAft>
+                <a:spcPts val="0"/>
+              </a:spcAft>
+              <a:buSzPts val="1400"/>
+              <a:buNone/>
+              <a:defRPr/>
+            </a:lvl9pPr>
+          </a:lstStyle>
+          <a:p/>
+        </p:txBody>
+      </p:sp>
+      <p:pic>
+        <p:nvPicPr>
+          <p:cNvPr id="257" name="Google Shape;257;p10"/>
+          <p:cNvPicPr preferRelativeResize="0"/>
+          <p:nvPr/>
+        </p:nvPicPr>
+        <p:blipFill rotWithShape="1">
+          <a:blip r:embed="rId3">
+            <a:alphaModFix/>
+          </a:blip>
+          <a:srcRect b="0" l="0" r="0" t="0"/>
+          <a:stretch/>
+        </p:blipFill>
+        <p:spPr>
+          <a:xfrm>
+            <a:off x="398723" y="6160516"/>
+            <a:ext cx="1857481" cy="292671"/>
+          </a:xfrm>
+          <a:prstGeom prst="rect">
+            <a:avLst/>
+          </a:prstGeom>
+          <a:noFill/>
+          <a:ln>
+            <a:noFill/>
+          </a:ln>
+        </p:spPr>
+      </p:pic>
+      <p:pic>
+        <p:nvPicPr>
+          <p:cNvPr descr=" " id="258" name="Google Shape;258;p10"/>
+          <p:cNvPicPr preferRelativeResize="0"/>
+          <p:nvPr/>
+        </p:nvPicPr>
+        <p:blipFill rotWithShape="1">
+          <a:blip r:embed="rId4">
+            <a:alphaModFix/>
+          </a:blip>
+          <a:srcRect b="0" l="0" r="0" t="0"/>
+          <a:stretch/>
+        </p:blipFill>
+        <p:spPr>
+          <a:xfrm>
+            <a:off x="10866292" y="0"/>
+            <a:ext cx="1325708" cy="3723972"/>
+          </a:xfrm>
+          <a:prstGeom prst="rect">
+            <a:avLst/>
+          </a:prstGeom>
+          <a:noFill/>
+          <a:ln>
+            <a:noFill/>
+          </a:ln>
+        </p:spPr>
+      </p:pic>
+      <p:pic>
+        <p:nvPicPr>
+          <p:cNvPr descr=" " id="259" name="Google Shape;259;p10"/>
+          <p:cNvPicPr preferRelativeResize="0"/>
+          <p:nvPr/>
+        </p:nvPicPr>
+        <p:blipFill rotWithShape="1">
+          <a:blip r:embed="rId5">
+            <a:alphaModFix/>
+          </a:blip>
+          <a:srcRect b="0" l="0" r="0" t="0"/>
+          <a:stretch/>
+        </p:blipFill>
+        <p:spPr>
+          <a:xfrm>
+            <a:off x="11093496" y="6238282"/>
+            <a:ext cx="690517" cy="216000"/>
+          </a:xfrm>
+          <a:prstGeom prst="rect">
+            <a:avLst/>
+          </a:prstGeom>
+          <a:noFill/>
+          <a:ln>
+            <a:noFill/>
+          </a:ln>
+        </p:spPr>
+      </p:pic>
     </p:spTree>
   </p:cSld>
   <p:clrMapOvr>
@@ -5794,8 +9465,12 @@
   </p:cSld>
   <p:clrMap accent1="accent1" accent2="accent2" accent3="accent3" accent4="accent4" accent5="accent5" accent6="accent6" bg1="lt1" bg2="dk2" tx1="dk1" tx2="lt2" folHlink="folHlink" hlink="hlink"/>
   <p:sldLayoutIdLst>
+    <p:sldLayoutId id="2147483648" r:id="rId2"/>
+    <p:sldLayoutId id="2147483652" r:id="rId6"/>
     <p:sldLayoutId id="2147483653" r:id="rId7"/>
     <p:sldLayoutId id="2147483655" r:id="rId9"/>
+    <p:sldLayoutId id="2147483656" r:id="rId10"/>
+    <p:sldLayoutId id="2147483661" r:id="rId15"/>
   </p:sldLayoutIdLst>
   <p:hf dt="0" ftr="0" hdr="0" sldNum="0"/>
   <p:txStyles>
@@ -6563,14 +10238,65 @@
       <p:grpSpPr/>
       <p:sp>
         <p:nvSpPr>
-          <p:cNvPr id="2" name="title"/>
+          <p:cNvPr id="382" name="Google Shape;382;p17"/>
+          <p:cNvSpPr/>
+          <p:nvPr/>
+        </p:nvSpPr>
+        <p:spPr>
+          <a:xfrm>
+            <a:off x="429254" y="4682210"/>
+            <a:ext cx="834282" cy="834282"/>
+          </a:xfrm>
+          <a:prstGeom prst="ellipse">
+            <a:avLst/>
+          </a:prstGeom>
+          <a:solidFill>
+            <a:srgbClr val="5A6775"/>
+          </a:solidFill>
+          <a:ln>
+            <a:noFill/>
+          </a:ln>
+        </p:spPr>
+        <p:txBody>
+          <a:bodyPr anchorCtr="0" anchor="ctr" bIns="45700" lIns="91425" spcFirstLastPara="1" rIns="91425" wrap="square" tIns="45700">
+            <a:noAutofit/>
+          </a:bodyPr>
+          <a:lstStyle/>
+          <a:p>
+            <a:pPr indent="0" lvl="0" marL="0" marR="0" rtl="0" algn="ctr">
+              <a:spcBef>
+                <a:spcPts val="0"/>
+              </a:spcBef>
+              <a:spcAft>
+                <a:spcPts val="0"/>
+              </a:spcAft>
+              <a:buNone/>
+            </a:pPr>
+            <a:r>
+              <a:t/>
+            </a:r>
+            <a:endParaRPr b="0" i="0" sz="1800" u="none" cap="none" strike="noStrike">
+              <a:solidFill>
+                <a:schemeClr val="lt1"/>
+              </a:solidFill>
+              <a:latin typeface="Arial"/>
+              <a:ea typeface="Arial"/>
+              <a:cs typeface="Arial"/>
+              <a:sym typeface="Arial"/>
+            </a:endParaRPr>
+          </a:p>
+        </p:txBody>
+      </p:sp>
+      <p:sp>
+        <p:nvSpPr>
+          <p:cNvPr id="383" name="title"/>
           <p:cNvSpPr txBox="1"/>
           <p:nvPr/>
         </p:nvSpPr>
         <p:spPr>
           <a:xfrm>
-            <a:off x="429280" y="424715"/>
-            <a:ext cx="7827264" cy="1067996"/>
+            <a:off x="429280" y="2490551"/>
+            <a:ext cx="7827385" cy="1876897"/>
           </a:xfrm>
           <a:prstGeom prst="rect">
             <a:avLst/>
@@ -6587,7 +10313,7 @@
               <a:spcAft>
                 <a:spcPts val="300"/>
               </a:spcAft>
-              <a:defRPr sz="2800">
+              <a:defRPr sz="5400" b="0">
                 <a:solidFill>
                   <a:srgbClr val="FFFFFF"/>
                 </a:solidFill>
@@ -6597,7 +10323,7 @@
               </a:defRPr>
             </a:pPr>
             <a:r>
-              <a:rPr sz="2800">
+              <a:rPr sz="5400" b="0">
                 <a:solidFill>
                   <a:srgbClr val="FFFFFF"/>
                 </a:solidFill>
@@ -6605,7 +10331,7 @@
                 <a:ea typeface="Play"/>
                 <a:cs typeface="Play"/>
               </a:rPr>
-              <a:t>Защита инициативы: сервис автоматической вёрстки презентаций</a:t>
+              <a:t>Защита инициативы</a:t>
             </a:r>
           </a:p>
         </p:txBody>
@@ -6619,6 +10345,569 @@
 </file>
 
 <file path=ppt/slides/slide31.xml><?xml version="1.0" encoding="utf-8"?>
+<p:sld xmlns:a="http://schemas.openxmlformats.org/drawingml/2006/main" xmlns:p="http://schemas.openxmlformats.org/presentationml/2006/main" xmlns:r="http://schemas.openxmlformats.org/officeDocument/2006/relationships">
+  <p:cSld>
+    <p:spTree>
+      <p:nvGrpSpPr>
+        <p:cNvPr id="1" name=""/>
+        <p:cNvGrpSpPr/>
+        <p:nvPr/>
+      </p:nvGrpSpPr>
+      <p:grpSpPr/>
+      <p:sp>
+        <p:nvSpPr>
+          <p:cNvPr id="2" name="title"/>
+          <p:cNvSpPr txBox="1"/>
+          <p:nvPr/>
+        </p:nvSpPr>
+        <p:spPr>
+          <a:xfrm>
+            <a:off x="429280" y="424715"/>
+            <a:ext cx="7827264" cy="822960"/>
+          </a:xfrm>
+          <a:prstGeom prst="rect">
+            <a:avLst/>
+          </a:prstGeom>
+          <a:noFill/>
+        </p:spPr>
+        <p:txBody>
+          <a:bodyPr wrap="square" lIns="76200" rIns="76200" tIns="50800" bIns="50800">
+            <a:spAutoFit/>
+          </a:bodyPr>
+          <a:lstStyle/>
+          <a:p>
+            <a:pPr algn="l">
+              <a:spcAft>
+                <a:spcPts val="300"/>
+              </a:spcAft>
+              <a:defRPr sz="3200">
+                <a:solidFill>
+                  <a:srgbClr val="FFFFFF"/>
+                </a:solidFill>
+                <a:latin typeface="Play"/>
+                <a:ea typeface="Play"/>
+                <a:cs typeface="Play"/>
+              </a:defRPr>
+            </a:pPr>
+            <a:r>
+              <a:rPr sz="3200">
+                <a:solidFill>
+                  <a:srgbClr val="FFFFFF"/>
+                </a:solidFill>
+                <a:latin typeface="Play"/>
+                <a:ea typeface="Play"/>
+                <a:cs typeface="Play"/>
+              </a:rPr>
+              <a:t>Контекст и возможность</a:t>
+            </a:r>
+          </a:p>
+        </p:txBody>
+      </p:sp>
+      <p:sp>
+        <p:nvSpPr>
+          <p:cNvPr id="3" name="body"/>
+          <p:cNvSpPr txBox="1"/>
+          <p:nvPr/>
+        </p:nvSpPr>
+        <p:spPr>
+          <a:xfrm>
+            <a:off x="429280" y="1664162"/>
+            <a:ext cx="11310884" cy="1341120"/>
+          </a:xfrm>
+          <a:prstGeom prst="rect">
+            <a:avLst/>
+          </a:prstGeom>
+          <a:noFill/>
+        </p:spPr>
+        <p:txBody>
+          <a:bodyPr wrap="square" lIns="76200" rIns="76200" tIns="50800" bIns="50800">
+            <a:spAutoFit/>
+          </a:bodyPr>
+          <a:lstStyle/>
+          <a:p>
+            <a:pPr algn="l">
+              <a:spcAft>
+                <a:spcPts val="300"/>
+              </a:spcAft>
+              <a:defRPr sz="1600">
+                <a:solidFill>
+                  <a:srgbClr val="FFFFFF"/>
+                </a:solidFill>
+                <a:latin typeface="Play"/>
+                <a:ea typeface="Play"/>
+                <a:cs typeface="Play"/>
+              </a:defRPr>
+            </a:pPr>
+            <a:r>
+              <a:rPr sz="1600">
+                <a:solidFill>
+                  <a:srgbClr val="FFFFFF"/>
+                </a:solidFill>
+                <a:latin typeface="Play"/>
+                <a:ea typeface="Play"/>
+                <a:cs typeface="Play"/>
+              </a:rPr>
+              <a:t>• Сборка 12-слайдной колоды занимает 186 мин</a:t>
+            </a:r>
+          </a:p>
+          <a:p>
+            <a:pPr algn="l">
+              <a:spcAft>
+                <a:spcPts val="300"/>
+              </a:spcAft>
+              <a:defRPr sz="1600">
+                <a:solidFill>
+                  <a:srgbClr val="FFFFFF"/>
+                </a:solidFill>
+                <a:latin typeface="Play"/>
+                <a:ea typeface="Play"/>
+                <a:cs typeface="Play"/>
+              </a:defRPr>
+            </a:pPr>
+            <a:r>
+              <a:rPr sz="1600">
+                <a:solidFill>
+                  <a:srgbClr val="FFFFFF"/>
+                </a:solidFill>
+                <a:latin typeface="Play"/>
+                <a:ea typeface="Play"/>
+                <a:cs typeface="Play"/>
+              </a:rPr>
+              <a:t>• Правки после ревью добавляют 74 мин</a:t>
+            </a:r>
+          </a:p>
+          <a:p>
+            <a:pPr algn="l">
+              <a:spcAft>
+                <a:spcPts val="300"/>
+              </a:spcAft>
+              <a:defRPr sz="1600">
+                <a:solidFill>
+                  <a:srgbClr val="FFFFFF"/>
+                </a:solidFill>
+                <a:latin typeface="Play"/>
+                <a:ea typeface="Play"/>
+                <a:cs typeface="Play"/>
+              </a:defRPr>
+            </a:pPr>
+            <a:r>
+              <a:rPr sz="1600">
+                <a:solidFill>
+                  <a:srgbClr val="FFFFFF"/>
+                </a:solidFill>
+                <a:latin typeface="Play"/>
+                <a:ea typeface="Play"/>
+                <a:cs typeface="Play"/>
+              </a:rPr>
+              <a:t>• Средний срок ожидания 6 дней</a:t>
+            </a:r>
+          </a:p>
+        </p:txBody>
+      </p:sp>
+      <p:graphicFrame>
+        <p:nvGraphicFramePr>
+          <p:cNvPr id="4" name="Chart 3"/>
+          <p:cNvGraphicFramePr>
+            <a:graphicFrameLocks noGrp="1"/>
+          </p:cNvGraphicFramePr>
+          <p:nvPr/>
+        </p:nvGraphicFramePr>
+        <p:xfrm>
+          <a:off x="429280" y="3176732"/>
+          <a:ext cx="11310884" cy="2241019"/>
+        </p:xfrm>
+        <a:graphic>
+          <a:graphicData uri="http://schemas.openxmlformats.org/drawingml/2006/chart">
+            <c:chart xmlns:c="http://schemas.openxmlformats.org/drawingml/2006/chart" r:id="rId2"/>
+          </a:graphicData>
+        </a:graphic>
+      </p:graphicFrame>
+    </p:spTree>
+  </p:cSld>
+  <p:clrMapOvr>
+    <a:masterClrMapping/>
+  </p:clrMapOvr>
+</p:sld>
+</file>
+
+<file path=ppt/slides/slide32.xml><?xml version="1.0" encoding="utf-8"?>
+<p:sld xmlns:a="http://schemas.openxmlformats.org/drawingml/2006/main" xmlns:p="http://schemas.openxmlformats.org/presentationml/2006/main" xmlns:r="http://schemas.openxmlformats.org/officeDocument/2006/relationships">
+  <p:cSld>
+    <p:spTree>
+      <p:nvGrpSpPr>
+        <p:cNvPr id="1" name=""/>
+        <p:cNvGrpSpPr/>
+        <p:nvPr/>
+      </p:nvGrpSpPr>
+      <p:grpSpPr/>
+      <p:sp>
+        <p:nvSpPr>
+          <p:cNvPr id="2" name="title"/>
+          <p:cNvSpPr txBox="1"/>
+          <p:nvPr/>
+        </p:nvSpPr>
+        <p:spPr>
+          <a:xfrm>
+            <a:off x="429280" y="424715"/>
+            <a:ext cx="7827264" cy="647052"/>
+          </a:xfrm>
+          <a:prstGeom prst="rect">
+            <a:avLst/>
+          </a:prstGeom>
+          <a:noFill/>
+        </p:spPr>
+        <p:txBody>
+          <a:bodyPr wrap="square" lIns="76200" rIns="76200" tIns="50800" bIns="50800">
+            <a:spAutoFit/>
+          </a:bodyPr>
+          <a:lstStyle/>
+          <a:p>
+            <a:pPr algn="l">
+              <a:spcAft>
+                <a:spcPts val="300"/>
+              </a:spcAft>
+              <a:defRPr sz="2800">
+                <a:solidFill>
+                  <a:srgbClr val="FFFFFF"/>
+                </a:solidFill>
+                <a:latin typeface="Play"/>
+                <a:ea typeface="Play"/>
+                <a:cs typeface="Play"/>
+              </a:defRPr>
+            </a:pPr>
+            <a:r>
+              <a:rPr sz="2800">
+                <a:solidFill>
+                  <a:srgbClr val="FFFFFF"/>
+                </a:solidFill>
+                <a:latin typeface="Play"/>
+                <a:ea typeface="Play"/>
+                <a:cs typeface="Play"/>
+              </a:rPr>
+              <a:t>Текущая нагрузка дизайна</a:t>
+            </a:r>
+          </a:p>
+        </p:txBody>
+      </p:sp>
+      <p:sp>
+        <p:nvSpPr>
+          <p:cNvPr id="3" name="card_0"/>
+          <p:cNvSpPr txBox="1"/>
+          <p:nvPr/>
+        </p:nvSpPr>
+        <p:spPr>
+          <a:xfrm>
+            <a:off x="6469197" y="1395618"/>
+            <a:ext cx="4434352" cy="1608033"/>
+          </a:xfrm>
+          <a:prstGeom prst="rect">
+            <a:avLst/>
+          </a:prstGeom>
+          <a:noFill/>
+        </p:spPr>
+        <p:txBody>
+          <a:bodyPr wrap="square" lIns="76200" rIns="76200" tIns="50800" bIns="50800">
+            <a:spAutoFit/>
+          </a:bodyPr>
+          <a:lstStyle/>
+          <a:p>
+            <a:pPr algn="l">
+              <a:spcAft>
+                <a:spcPts val="300"/>
+              </a:spcAft>
+              <a:defRPr sz="2800" b="0">
+                <a:solidFill>
+                  <a:srgbClr val="FFFFFF"/>
+                </a:solidFill>
+                <a:latin typeface="Play"/>
+                <a:ea typeface="Play"/>
+                <a:cs typeface="Play"/>
+              </a:defRPr>
+            </a:pPr>
+            <a:r>
+              <a:rPr sz="2800" b="0">
+                <a:solidFill>
+                  <a:srgbClr val="FFFFFF"/>
+                </a:solidFill>
+                <a:latin typeface="Play"/>
+                <a:ea typeface="Play"/>
+                <a:cs typeface="Play"/>
+              </a:rPr>
+              <a:t>Дизайн-отдел закрывает 11 запросов в неделю из 27</a:t>
+            </a:r>
+          </a:p>
+        </p:txBody>
+      </p:sp>
+      <p:sp>
+        <p:nvSpPr>
+          <p:cNvPr id="4" name="card_1"/>
+          <p:cNvSpPr txBox="1"/>
+          <p:nvPr/>
+        </p:nvSpPr>
+        <p:spPr>
+          <a:xfrm>
+            <a:off x="6469197" y="3750655"/>
+            <a:ext cx="4434352" cy="2284917"/>
+          </a:xfrm>
+          <a:prstGeom prst="rect">
+            <a:avLst/>
+          </a:prstGeom>
+          <a:noFill/>
+        </p:spPr>
+        <p:txBody>
+          <a:bodyPr wrap="square" lIns="76200" rIns="76200" tIns="50800" bIns="50800">
+            <a:spAutoFit/>
+          </a:bodyPr>
+          <a:lstStyle/>
+          <a:p>
+            <a:pPr algn="l">
+              <a:spcAft>
+                <a:spcPts val="300"/>
+              </a:spcAft>
+              <a:defRPr sz="2800" b="0">
+                <a:solidFill>
+                  <a:srgbClr val="FFFFFF"/>
+                </a:solidFill>
+                <a:latin typeface="Play"/>
+                <a:ea typeface="Play"/>
+                <a:cs typeface="Play"/>
+              </a:defRPr>
+            </a:pPr>
+            <a:r>
+              <a:rPr sz="2800" b="0">
+                <a:solidFill>
+                  <a:srgbClr val="FFFFFF"/>
+                </a:solidFill>
+                <a:latin typeface="Play"/>
+                <a:ea typeface="Play"/>
+                <a:cs typeface="Play"/>
+              </a:rPr>
+              <a:t>Средний срок ожидания 6 дней</a:t>
+            </a:r>
+          </a:p>
+        </p:txBody>
+      </p:sp>
+    </p:spTree>
+  </p:cSld>
+  <p:clrMapOvr>
+    <a:masterClrMapping/>
+  </p:clrMapOvr>
+</p:sld>
+</file>
+
+<file path=ppt/slides/slide33.xml><?xml version="1.0" encoding="utf-8"?>
+<p:sld xmlns:a="http://schemas.openxmlformats.org/drawingml/2006/main" xmlns:p="http://schemas.openxmlformats.org/presentationml/2006/main" xmlns:r="http://schemas.openxmlformats.org/officeDocument/2006/relationships">
+  <p:cSld>
+    <p:spTree>
+      <p:nvGrpSpPr>
+        <p:cNvPr id="1" name=""/>
+        <p:cNvGrpSpPr/>
+        <p:nvPr/>
+      </p:nvGrpSpPr>
+      <p:grpSpPr/>
+      <p:sp>
+        <p:nvSpPr>
+          <p:cNvPr id="2" name="title"/>
+          <p:cNvSpPr txBox="1"/>
+          <p:nvPr/>
+        </p:nvSpPr>
+        <p:spPr>
+          <a:xfrm>
+            <a:off x="429280" y="424715"/>
+            <a:ext cx="7827264" cy="822960"/>
+          </a:xfrm>
+          <a:prstGeom prst="rect">
+            <a:avLst/>
+          </a:prstGeom>
+          <a:noFill/>
+        </p:spPr>
+        <p:txBody>
+          <a:bodyPr wrap="square" lIns="76200" rIns="76200" tIns="50800" bIns="50800">
+            <a:spAutoFit/>
+          </a:bodyPr>
+          <a:lstStyle/>
+          <a:p>
+            <a:pPr algn="l">
+              <a:spcAft>
+                <a:spcPts val="300"/>
+              </a:spcAft>
+              <a:defRPr sz="3200">
+                <a:solidFill>
+                  <a:srgbClr val="FFFFFF"/>
+                </a:solidFill>
+                <a:latin typeface="Play"/>
+                <a:ea typeface="Play"/>
+                <a:cs typeface="Play"/>
+              </a:defRPr>
+            </a:pPr>
+            <a:r>
+              <a:rPr sz="3200">
+                <a:solidFill>
+                  <a:srgbClr val="FFFFFF"/>
+                </a:solidFill>
+                <a:latin typeface="Play"/>
+                <a:ea typeface="Play"/>
+                <a:cs typeface="Play"/>
+              </a:rPr>
+              <a:t>Ожидаемый эффект пилота</a:t>
+            </a:r>
+          </a:p>
+        </p:txBody>
+      </p:sp>
+      <p:sp>
+        <p:nvSpPr>
+          <p:cNvPr id="3" name="body"/>
+          <p:cNvSpPr txBox="1"/>
+          <p:nvPr/>
+        </p:nvSpPr>
+        <p:spPr>
+          <a:xfrm>
+            <a:off x="429280" y="1592290"/>
+            <a:ext cx="11310884" cy="1672529"/>
+          </a:xfrm>
+          <a:prstGeom prst="rect">
+            <a:avLst/>
+          </a:prstGeom>
+          <a:noFill/>
+        </p:spPr>
+        <p:txBody>
+          <a:bodyPr wrap="square" lIns="76200" rIns="76200" tIns="50800" bIns="50800">
+            <a:spAutoFit/>
+          </a:bodyPr>
+          <a:lstStyle/>
+          <a:p>
+            <a:pPr algn="l">
+              <a:spcAft>
+                <a:spcPts val="300"/>
+              </a:spcAft>
+              <a:defRPr sz="1600">
+                <a:solidFill>
+                  <a:srgbClr val="FFFFFF"/>
+                </a:solidFill>
+                <a:latin typeface="Play"/>
+                <a:ea typeface="Play"/>
+                <a:cs typeface="Play"/>
+              </a:defRPr>
+            </a:pPr>
+            <a:r>
+              <a:rPr sz="1600">
+                <a:solidFill>
+                  <a:srgbClr val="FFFFFF"/>
+                </a:solidFill>
+                <a:latin typeface="Play"/>
+                <a:ea typeface="Play"/>
+                <a:cs typeface="Play"/>
+              </a:rPr>
+              <a:t>• Средняя сборка колоды 12 слайдов — 4 мин вместо 186</a:t>
+            </a:r>
+          </a:p>
+          <a:p>
+            <a:pPr algn="l">
+              <a:spcAft>
+                <a:spcPts val="300"/>
+              </a:spcAft>
+              <a:defRPr sz="1600">
+                <a:solidFill>
+                  <a:srgbClr val="FFFFFF"/>
+                </a:solidFill>
+                <a:latin typeface="Play"/>
+                <a:ea typeface="Play"/>
+                <a:cs typeface="Play"/>
+              </a:defRPr>
+            </a:pPr>
+            <a:r>
+              <a:rPr sz="1600">
+                <a:solidFill>
+                  <a:srgbClr val="FFFFFF"/>
+                </a:solidFill>
+                <a:latin typeface="Play"/>
+                <a:ea typeface="Play"/>
+                <a:cs typeface="Play"/>
+              </a:rPr>
+              <a:t>• Время до первой версии сократилось с 6 дней до 1</a:t>
+            </a:r>
+          </a:p>
+          <a:p>
+            <a:pPr algn="l">
+              <a:spcAft>
+                <a:spcPts val="300"/>
+              </a:spcAft>
+              <a:defRPr sz="1600">
+                <a:solidFill>
+                  <a:srgbClr val="FFFFFF"/>
+                </a:solidFill>
+                <a:latin typeface="Play"/>
+                <a:ea typeface="Play"/>
+                <a:cs typeface="Play"/>
+              </a:defRPr>
+            </a:pPr>
+            <a:r>
+              <a:rPr sz="1600">
+                <a:solidFill>
+                  <a:srgbClr val="FFFFFF"/>
+                </a:solidFill>
+                <a:latin typeface="Play"/>
+                <a:ea typeface="Play"/>
+                <a:cs typeface="Play"/>
+              </a:rPr>
+              <a:t>• Нарушений стиля 2 из 68, исправлены автоматически</a:t>
+            </a:r>
+          </a:p>
+          <a:p>
+            <a:pPr algn="l">
+              <a:spcAft>
+                <a:spcPts val="300"/>
+              </a:spcAft>
+              <a:defRPr sz="1600">
+                <a:solidFill>
+                  <a:srgbClr val="FFFFFF"/>
+                </a:solidFill>
+                <a:latin typeface="Play"/>
+                <a:ea typeface="Play"/>
+                <a:cs typeface="Play"/>
+              </a:defRPr>
+            </a:pPr>
+            <a:r>
+              <a:rPr sz="1600">
+                <a:solidFill>
+                  <a:srgbClr val="FFFFFF"/>
+                </a:solidFill>
+                <a:latin typeface="Play"/>
+                <a:ea typeface="Play"/>
+                <a:cs typeface="Play"/>
+              </a:rPr>
+              <a:t>• Дизайнеры закрыли 38 запросов вместо 11</a:t>
+            </a:r>
+          </a:p>
+        </p:txBody>
+      </p:sp>
+      <p:graphicFrame>
+        <p:nvGraphicFramePr>
+          <p:cNvPr id="4" name="Chart 3"/>
+          <p:cNvGraphicFramePr>
+            <a:graphicFrameLocks noGrp="1"/>
+          </p:cNvGraphicFramePr>
+          <p:nvPr/>
+        </p:nvGraphicFramePr>
+        <p:xfrm>
+          <a:off x="429280" y="3436269"/>
+          <a:ext cx="11310884" cy="2337343"/>
+        </p:xfrm>
+        <a:graphic>
+          <a:graphicData uri="http://schemas.openxmlformats.org/drawingml/2006/chart">
+            <c:chart xmlns:c="http://schemas.openxmlformats.org/drawingml/2006/chart" r:id="rId2"/>
+          </a:graphicData>
+        </a:graphic>
+      </p:graphicFrame>
+    </p:spTree>
+  </p:cSld>
+  <p:clrMapOvr>
+    <a:masterClrMapping/>
+  </p:clrMapOvr>
+</p:sld>
+</file>
+
+<file path=ppt/slides/slide34.xml><?xml version="1.0" encoding="utf-8"?>
 <p:sld xmlns:a="http://schemas.openxmlformats.org/drawingml/2006/main" xmlns:p="http://schemas.openxmlformats.org/presentationml/2006/main" xmlns:r="http://schemas.openxmlformats.org/officeDocument/2006/relationships">
   <p:cSld>
     <p:spTree>
@@ -6701,7 +10990,809 @@
         <p:spPr>
           <a:xfrm>
             <a:off x="300817" y="297715"/>
-            <a:ext cx="11317142" cy="3307176"/>
+            <a:ext cx="11566347" cy="5758505"/>
+          </a:xfrm>
+          <a:prstGeom prst="roundRect">
+            <a:avLst/>
+          </a:prstGeom>
+          <a:solidFill>
+            <a:srgbClr val="111111">
+              <a:alpha val="85000"/>
+            </a:srgbClr>
+          </a:solidFill>
+          <a:ln>
+            <a:noFill/>
+          </a:ln>
+          <a:effectLst/>
+        </p:spPr>
+        <p:style>
+          <a:lnRef idx="1">
+            <a:schemeClr val="accent1"/>
+          </a:lnRef>
+          <a:fillRef idx="3">
+            <a:schemeClr val="accent1"/>
+          </a:fillRef>
+          <a:effectRef idx="2">
+            <a:schemeClr val="accent1"/>
+          </a:effectRef>
+          <a:fontRef idx="minor">
+            <a:schemeClr val="lt1"/>
+          </a:fontRef>
+        </p:style>
+        <p:txBody>
+          <a:bodyPr rtlCol="0" anchor="ctr"/>
+          <a:lstStyle/>
+          <a:p>
+            <a:pPr algn="ctr"/>
+          </a:p>
+        </p:txBody>
+      </p:sp>
+      <p:sp>
+        <p:nvSpPr>
+          <p:cNvPr id="681" name="title"/>
+          <p:cNvSpPr txBox="1"/>
+          <p:nvPr/>
+        </p:nvSpPr>
+        <p:spPr>
+          <a:xfrm>
+            <a:off x="427817" y="424715"/>
+            <a:ext cx="7827264" cy="1183640"/>
+          </a:xfrm>
+          <a:prstGeom prst="rect">
+            <a:avLst/>
+          </a:prstGeom>
+          <a:noFill/>
+        </p:spPr>
+        <p:txBody>
+          <a:bodyPr wrap="square" lIns="76200" rIns="76200" tIns="50800" bIns="50800">
+            <a:spAutoFit/>
+          </a:bodyPr>
+          <a:lstStyle/>
+          <a:p>
+            <a:pPr algn="l">
+              <a:spcAft>
+                <a:spcPts val="300"/>
+              </a:spcAft>
+              <a:defRPr sz="3200">
+                <a:solidFill>
+                  <a:srgbClr val="FFFFFF"/>
+                </a:solidFill>
+                <a:latin typeface="Play"/>
+                <a:ea typeface="Play"/>
+                <a:cs typeface="Play"/>
+              </a:defRPr>
+            </a:pPr>
+            <a:r>
+              <a:rPr sz="3200">
+                <a:solidFill>
+                  <a:srgbClr val="FFFFFF"/>
+                </a:solidFill>
+                <a:latin typeface="Play"/>
+                <a:ea typeface="Play"/>
+                <a:cs typeface="Play"/>
+              </a:rPr>
+              <a:t>Что потребуется: ресурсы и сроки</a:t>
+            </a:r>
+          </a:p>
+        </p:txBody>
+      </p:sp>
+      <p:sp>
+        <p:nvSpPr>
+          <p:cNvPr id="682" name="body"/>
+          <p:cNvSpPr txBox="1"/>
+          <p:nvPr/>
+        </p:nvSpPr>
+        <p:spPr>
+          <a:xfrm>
+            <a:off x="427817" y="1837052"/>
+            <a:ext cx="11312347" cy="1341120"/>
+          </a:xfrm>
+          <a:prstGeom prst="rect">
+            <a:avLst/>
+          </a:prstGeom>
+          <a:noFill/>
+        </p:spPr>
+        <p:txBody>
+          <a:bodyPr wrap="square" lIns="76200" rIns="76200" tIns="50800" bIns="50800">
+            <a:spAutoFit/>
+          </a:bodyPr>
+          <a:lstStyle/>
+          <a:p>
+            <a:pPr algn="l">
+              <a:spcAft>
+                <a:spcPts val="300"/>
+              </a:spcAft>
+              <a:defRPr sz="1600">
+                <a:solidFill>
+                  <a:srgbClr val="FFFFFF"/>
+                </a:solidFill>
+                <a:latin typeface="Play"/>
+                <a:ea typeface="Play"/>
+                <a:cs typeface="Play"/>
+              </a:defRPr>
+            </a:pPr>
+            <a:r>
+              <a:rPr sz="1600">
+                <a:solidFill>
+                  <a:srgbClr val="FFFFFF"/>
+                </a:solidFill>
+                <a:latin typeface="Play"/>
+                <a:ea typeface="Play"/>
+                <a:cs typeface="Play"/>
+              </a:rPr>
+              <a:t>• Сервис работает на 2 vCPU / 2 ГБ RAM</a:t>
+            </a:r>
+          </a:p>
+          <a:p>
+            <a:pPr algn="l">
+              <a:spcAft>
+                <a:spcPts val="300"/>
+              </a:spcAft>
+              <a:defRPr sz="1600">
+                <a:solidFill>
+                  <a:srgbClr val="FFFFFF"/>
+                </a:solidFill>
+                <a:latin typeface="Play"/>
+                <a:ea typeface="Play"/>
+                <a:cs typeface="Play"/>
+              </a:defRPr>
+            </a:pPr>
+            <a:r>
+              <a:rPr sz="1600">
+                <a:solidFill>
+                  <a:srgbClr val="FFFFFF"/>
+                </a:solidFill>
+                <a:latin typeface="Play"/>
+                <a:ea typeface="Play"/>
+                <a:cs typeface="Play"/>
+              </a:rPr>
+              <a:t>• Инференс за 6 недель 1 400 руб</a:t>
+            </a:r>
+          </a:p>
+          <a:p>
+            <a:pPr algn="l">
+              <a:spcAft>
+                <a:spcPts val="300"/>
+              </a:spcAft>
+              <a:defRPr sz="1600">
+                <a:solidFill>
+                  <a:srgbClr val="FFFFFF"/>
+                </a:solidFill>
+                <a:latin typeface="Play"/>
+                <a:ea typeface="Play"/>
+                <a:cs typeface="Play"/>
+              </a:defRPr>
+            </a:pPr>
+            <a:r>
+              <a:rPr sz="1600">
+                <a:solidFill>
+                  <a:srgbClr val="FFFFFF"/>
+                </a:solidFill>
+                <a:latin typeface="Play"/>
+                <a:ea typeface="Play"/>
+                <a:cs typeface="Play"/>
+              </a:rPr>
+              <a:t>• Модель gpt-oss-20b подключается по OpenAI-совместимому протоколу</a:t>
+            </a:r>
+          </a:p>
+        </p:txBody>
+      </p:sp>
+      <p:sp>
+        <p:nvSpPr>
+          <p:cNvPr id="683" name="Rectangle 682"/>
+          <p:cNvSpPr/>
+          <p:nvPr/>
+        </p:nvSpPr>
+        <p:spPr>
+          <a:xfrm>
+            <a:off x="427817" y="4536237"/>
+            <a:ext cx="11312347" cy="77387"/>
+          </a:xfrm>
+          <a:prstGeom prst="rect">
+            <a:avLst/>
+          </a:prstGeom>
+          <a:solidFill>
+            <a:srgbClr val="0077FF"/>
+          </a:solidFill>
+          <a:ln>
+            <a:noFill/>
+          </a:ln>
+        </p:spPr>
+        <p:style>
+          <a:lnRef idx="1">
+            <a:schemeClr val="accent1"/>
+          </a:lnRef>
+          <a:fillRef idx="3">
+            <a:schemeClr val="accent1"/>
+          </a:fillRef>
+          <a:effectRef idx="2">
+            <a:schemeClr val="accent1"/>
+          </a:effectRef>
+          <a:fontRef idx="minor">
+            <a:schemeClr val="lt1"/>
+          </a:fontRef>
+        </p:style>
+        <p:txBody>
+          <a:bodyPr rtlCol="0" anchor="ctr"/>
+          <a:lstStyle/>
+          <a:p>
+            <a:pPr algn="ctr"/>
+          </a:p>
+        </p:txBody>
+      </p:sp>
+      <p:sp>
+        <p:nvSpPr>
+          <p:cNvPr id="684" name="Oval 683"/>
+          <p:cNvSpPr/>
+          <p:nvPr/>
+        </p:nvSpPr>
+        <p:spPr>
+          <a:xfrm>
+            <a:off x="2029452" y="4291175"/>
+            <a:ext cx="567511" cy="567511"/>
+          </a:xfrm>
+          <a:prstGeom prst="ellipse">
+            <a:avLst/>
+          </a:prstGeom>
+          <a:solidFill>
+            <a:srgbClr val="0077FF"/>
+          </a:solidFill>
+          <a:ln>
+            <a:noFill/>
+          </a:ln>
+        </p:spPr>
+        <p:style>
+          <a:lnRef idx="1">
+            <a:schemeClr val="accent1"/>
+          </a:lnRef>
+          <a:fillRef idx="3">
+            <a:schemeClr val="accent1"/>
+          </a:fillRef>
+          <a:effectRef idx="2">
+            <a:schemeClr val="accent1"/>
+          </a:effectRef>
+          <a:fontRef idx="minor">
+            <a:schemeClr val="lt1"/>
+          </a:fontRef>
+        </p:style>
+        <p:txBody>
+          <a:bodyPr rtlCol="0" anchor="ctr"/>
+          <a:lstStyle/>
+          <a:p>
+            <a:pPr algn="ctr"/>
+          </a:p>
+        </p:txBody>
+      </p:sp>
+      <p:sp>
+        <p:nvSpPr>
+          <p:cNvPr id="685" name="TextBox 684"/>
+          <p:cNvSpPr txBox="1"/>
+          <p:nvPr/>
+        </p:nvSpPr>
+        <p:spPr>
+          <a:xfrm>
+            <a:off x="427817" y="3349622"/>
+            <a:ext cx="5656173" cy="980247"/>
+          </a:xfrm>
+          <a:prstGeom prst="rect">
+            <a:avLst/>
+          </a:prstGeom>
+          <a:noFill/>
+        </p:spPr>
+        <p:txBody>
+          <a:bodyPr wrap="square" lIns="12700" rIns="12700" tIns="12700" bIns="12700">
+            <a:spAutoFit/>
+          </a:bodyPr>
+          <a:lstStyle/>
+          <a:p>
+            <a:pPr algn="ctr">
+              <a:defRPr sz="1400" b="0">
+                <a:solidFill>
+                  <a:srgbClr val="FFFFFF"/>
+                </a:solidFill>
+                <a:latin typeface="Play"/>
+                <a:ea typeface="Play"/>
+                <a:cs typeface="Play"/>
+              </a:defRPr>
+            </a:pPr>
+            <a:r>
+              <a:rPr sz="1400" b="0">
+                <a:solidFill>
+                  <a:srgbClr val="FFFFFF"/>
+                </a:solidFill>
+                <a:latin typeface="Play"/>
+                <a:ea typeface="Play"/>
+                <a:cs typeface="Play"/>
+              </a:rPr>
+              <a:t>Третий квартал 2026 подключение 4 команд</a:t>
+            </a:r>
+          </a:p>
+        </p:txBody>
+      </p:sp>
+      <p:sp>
+        <p:nvSpPr>
+          <p:cNvPr id="686" name="Oval 685"/>
+          <p:cNvSpPr/>
+          <p:nvPr/>
+        </p:nvSpPr>
+        <p:spPr>
+          <a:xfrm>
+            <a:off x="5800234" y="4291175"/>
+            <a:ext cx="567511" cy="567511"/>
+          </a:xfrm>
+          <a:prstGeom prst="ellipse">
+            <a:avLst/>
+          </a:prstGeom>
+          <a:solidFill>
+            <a:srgbClr val="0077FF"/>
+          </a:solidFill>
+          <a:ln>
+            <a:noFill/>
+          </a:ln>
+        </p:spPr>
+        <p:style>
+          <a:lnRef idx="1">
+            <a:schemeClr val="accent1"/>
+          </a:lnRef>
+          <a:fillRef idx="3">
+            <a:schemeClr val="accent1"/>
+          </a:fillRef>
+          <a:effectRef idx="2">
+            <a:schemeClr val="accent1"/>
+          </a:effectRef>
+          <a:fontRef idx="minor">
+            <a:schemeClr val="lt1"/>
+          </a:fontRef>
+        </p:style>
+        <p:txBody>
+          <a:bodyPr rtlCol="0" anchor="ctr"/>
+          <a:lstStyle/>
+          <a:p>
+            <a:pPr algn="ctr"/>
+          </a:p>
+        </p:txBody>
+      </p:sp>
+      <p:sp>
+        <p:nvSpPr>
+          <p:cNvPr id="687" name="TextBox 686"/>
+          <p:cNvSpPr txBox="1"/>
+          <p:nvPr/>
+        </p:nvSpPr>
+        <p:spPr>
+          <a:xfrm>
+            <a:off x="3255903" y="5103748"/>
+            <a:ext cx="5656173" cy="980247"/>
+          </a:xfrm>
+          <a:prstGeom prst="rect">
+            <a:avLst/>
+          </a:prstGeom>
+          <a:noFill/>
+        </p:spPr>
+        <p:txBody>
+          <a:bodyPr wrap="square" lIns="12700" rIns="12700" tIns="12700" bIns="12700">
+            <a:spAutoFit/>
+          </a:bodyPr>
+          <a:lstStyle/>
+          <a:p>
+            <a:pPr algn="ctr">
+              <a:defRPr sz="1400" b="0">
+                <a:solidFill>
+                  <a:srgbClr val="FFFFFF"/>
+                </a:solidFill>
+                <a:latin typeface="Play"/>
+                <a:ea typeface="Play"/>
+                <a:cs typeface="Play"/>
+              </a:defRPr>
+            </a:pPr>
+            <a:r>
+              <a:rPr sz="1400" b="0">
+                <a:solidFill>
+                  <a:srgbClr val="FFFFFF"/>
+                </a:solidFill>
+                <a:latin typeface="Play"/>
+                <a:ea typeface="Play"/>
+                <a:cs typeface="Play"/>
+              </a:rPr>
+              <a:t>Четвёртый квартал 2026 доступ для всей компании</a:t>
+            </a:r>
+          </a:p>
+        </p:txBody>
+      </p:sp>
+      <p:sp>
+        <p:nvSpPr>
+          <p:cNvPr id="688" name="Oval 687"/>
+          <p:cNvSpPr/>
+          <p:nvPr/>
+        </p:nvSpPr>
+        <p:spPr>
+          <a:xfrm>
+            <a:off x="9571017" y="4291175"/>
+            <a:ext cx="567511" cy="567511"/>
+          </a:xfrm>
+          <a:prstGeom prst="ellipse">
+            <a:avLst/>
+          </a:prstGeom>
+          <a:solidFill>
+            <a:srgbClr val="0077FF"/>
+          </a:solidFill>
+          <a:ln>
+            <a:noFill/>
+          </a:ln>
+        </p:spPr>
+        <p:style>
+          <a:lnRef idx="1">
+            <a:schemeClr val="accent1"/>
+          </a:lnRef>
+          <a:fillRef idx="3">
+            <a:schemeClr val="accent1"/>
+          </a:fillRef>
+          <a:effectRef idx="2">
+            <a:schemeClr val="accent1"/>
+          </a:effectRef>
+          <a:fontRef idx="minor">
+            <a:schemeClr val="lt1"/>
+          </a:fontRef>
+        </p:style>
+        <p:txBody>
+          <a:bodyPr rtlCol="0" anchor="ctr"/>
+          <a:lstStyle/>
+          <a:p>
+            <a:pPr algn="ctr"/>
+          </a:p>
+        </p:txBody>
+      </p:sp>
+      <p:sp>
+        <p:nvSpPr>
+          <p:cNvPr id="689" name="TextBox 688"/>
+          <p:cNvSpPr txBox="1"/>
+          <p:nvPr/>
+        </p:nvSpPr>
+        <p:spPr>
+          <a:xfrm>
+            <a:off x="6083990" y="3349622"/>
+            <a:ext cx="5656173" cy="980247"/>
+          </a:xfrm>
+          <a:prstGeom prst="rect">
+            <a:avLst/>
+          </a:prstGeom>
+          <a:noFill/>
+        </p:spPr>
+        <p:txBody>
+          <a:bodyPr wrap="square" lIns="12700" rIns="12700" tIns="12700" bIns="12700">
+            <a:spAutoFit/>
+          </a:bodyPr>
+          <a:lstStyle/>
+          <a:p>
+            <a:pPr algn="ctr">
+              <a:defRPr sz="1400" b="0">
+                <a:solidFill>
+                  <a:srgbClr val="FFFFFF"/>
+                </a:solidFill>
+                <a:latin typeface="Play"/>
+                <a:ea typeface="Play"/>
+                <a:cs typeface="Play"/>
+              </a:defRPr>
+            </a:pPr>
+            <a:r>
+              <a:rPr sz="1400" b="0">
+                <a:solidFill>
+                  <a:srgbClr val="FFFFFF"/>
+                </a:solidFill>
+                <a:latin typeface="Play"/>
+                <a:ea typeface="Play"/>
+                <a:cs typeface="Play"/>
+              </a:rPr>
+              <a:t>Первый квартал 2027 генерация иллюстраций</a:t>
+            </a:r>
+          </a:p>
+        </p:txBody>
+      </p:sp>
+    </p:spTree>
+  </p:cSld>
+  <p:clrMapOvr>
+    <a:masterClrMapping/>
+  </p:clrMapOvr>
+</p:sld>
+</file>
+
+<file path=ppt/slides/slide35.xml><?xml version="1.0" encoding="utf-8"?>
+<p:sld xmlns:a="http://schemas.openxmlformats.org/drawingml/2006/main" xmlns:p="http://schemas.openxmlformats.org/presentationml/2006/main" xmlns:r="http://schemas.openxmlformats.org/officeDocument/2006/relationships">
+  <p:cSld>
+    <p:spTree>
+      <p:nvGrpSpPr>
+        <p:cNvPr id="1" name=""/>
+        <p:cNvGrpSpPr/>
+        <p:nvPr/>
+      </p:nvGrpSpPr>
+      <p:grpSpPr/>
+      <p:sp>
+        <p:nvSpPr>
+          <p:cNvPr id="2" name="title"/>
+          <p:cNvSpPr txBox="1"/>
+          <p:nvPr/>
+        </p:nvSpPr>
+        <p:spPr>
+          <a:xfrm>
+            <a:off x="429280" y="424715"/>
+            <a:ext cx="7827264" cy="822960"/>
+          </a:xfrm>
+          <a:prstGeom prst="rect">
+            <a:avLst/>
+          </a:prstGeom>
+          <a:noFill/>
+        </p:spPr>
+        <p:txBody>
+          <a:bodyPr wrap="square" lIns="76200" rIns="76200" tIns="50800" bIns="50800">
+            <a:spAutoFit/>
+          </a:bodyPr>
+          <a:lstStyle/>
+          <a:p>
+            <a:pPr algn="l">
+              <a:spcAft>
+                <a:spcPts val="300"/>
+              </a:spcAft>
+              <a:defRPr sz="3200">
+                <a:solidFill>
+                  <a:srgbClr val="FFFFFF"/>
+                </a:solidFill>
+                <a:latin typeface="Play"/>
+                <a:ea typeface="Play"/>
+                <a:cs typeface="Play"/>
+              </a:defRPr>
+            </a:pPr>
+            <a:r>
+              <a:rPr sz="3200">
+                <a:solidFill>
+                  <a:srgbClr val="FFFFFF"/>
+                </a:solidFill>
+                <a:latin typeface="Play"/>
+                <a:ea typeface="Play"/>
+                <a:cs typeface="Play"/>
+              </a:rPr>
+              <a:t>Риски</a:t>
+            </a:r>
+          </a:p>
+        </p:txBody>
+      </p:sp>
+      <p:sp>
+        <p:nvSpPr>
+          <p:cNvPr id="3" name="card_0"/>
+          <p:cNvSpPr txBox="1"/>
+          <p:nvPr/>
+        </p:nvSpPr>
+        <p:spPr>
+          <a:xfrm>
+            <a:off x="568147" y="1818894"/>
+            <a:ext cx="3115177" cy="3220212"/>
+          </a:xfrm>
+          <a:prstGeom prst="rect">
+            <a:avLst/>
+          </a:prstGeom>
+          <a:noFill/>
+        </p:spPr>
+        <p:txBody>
+          <a:bodyPr wrap="square" lIns="76200" rIns="76200" tIns="50800" bIns="50800">
+            <a:spAutoFit/>
+          </a:bodyPr>
+          <a:lstStyle/>
+          <a:p>
+            <a:pPr algn="l">
+              <a:spcAft>
+                <a:spcPts val="300"/>
+              </a:spcAft>
+              <a:defRPr sz="2800" b="0">
+                <a:solidFill>
+                  <a:srgbClr val="FFFFFF"/>
+                </a:solidFill>
+                <a:latin typeface="Play"/>
+                <a:ea typeface="Play"/>
+                <a:cs typeface="Play"/>
+              </a:defRPr>
+            </a:pPr>
+            <a:r>
+              <a:rPr sz="2800" b="0">
+                <a:solidFill>
+                  <a:srgbClr val="FFFFFF"/>
+                </a:solidFill>
+                <a:latin typeface="Play"/>
+                <a:ea typeface="Play"/>
+                <a:cs typeface="Play"/>
+              </a:rPr>
+              <a:t>Слабая модель может выдумать цифру, аудит проверяет каждое число</a:t>
+            </a:r>
+          </a:p>
+        </p:txBody>
+      </p:sp>
+      <p:sp>
+        <p:nvSpPr>
+          <p:cNvPr id="4" name="card_1"/>
+          <p:cNvSpPr txBox="1"/>
+          <p:nvPr/>
+        </p:nvSpPr>
+        <p:spPr>
+          <a:xfrm>
+            <a:off x="4209288" y="1818894"/>
+            <a:ext cx="3115177" cy="3220212"/>
+          </a:xfrm>
+          <a:prstGeom prst="rect">
+            <a:avLst/>
+          </a:prstGeom>
+          <a:noFill/>
+        </p:spPr>
+        <p:txBody>
+          <a:bodyPr wrap="square" lIns="76200" rIns="76200" tIns="50800" bIns="50800">
+            <a:spAutoFit/>
+          </a:bodyPr>
+          <a:lstStyle/>
+          <a:p>
+            <a:pPr algn="l">
+              <a:spcAft>
+                <a:spcPts val="300"/>
+              </a:spcAft>
+              <a:defRPr sz="2800" b="0">
+                <a:solidFill>
+                  <a:srgbClr val="FFFFFF"/>
+                </a:solidFill>
+                <a:latin typeface="Play"/>
+                <a:ea typeface="Play"/>
+                <a:cs typeface="Play"/>
+              </a:defRPr>
+            </a:pPr>
+            <a:r>
+              <a:rPr sz="2800" b="0">
+                <a:solidFill>
+                  <a:srgbClr val="FFFFFF"/>
+                </a:solidFill>
+                <a:latin typeface="Play"/>
+                <a:ea typeface="Play"/>
+                <a:cs typeface="Play"/>
+              </a:rPr>
+              <a:t>Незнакомый шаблон может быть плохо сделанным, сервис использует рабочую область</a:t>
+            </a:r>
+          </a:p>
+        </p:txBody>
+      </p:sp>
+      <p:sp>
+        <p:nvSpPr>
+          <p:cNvPr id="5" name="card_2"/>
+          <p:cNvSpPr txBox="1"/>
+          <p:nvPr/>
+        </p:nvSpPr>
+        <p:spPr>
+          <a:xfrm>
+            <a:off x="7881884" y="1818894"/>
+            <a:ext cx="3115177" cy="3220212"/>
+          </a:xfrm>
+          <a:prstGeom prst="rect">
+            <a:avLst/>
+          </a:prstGeom>
+          <a:noFill/>
+        </p:spPr>
+        <p:txBody>
+          <a:bodyPr wrap="square" lIns="76200" rIns="76200" tIns="50800" bIns="50800">
+            <a:spAutoFit/>
+          </a:bodyPr>
+          <a:lstStyle/>
+          <a:p>
+            <a:pPr algn="l">
+              <a:spcAft>
+                <a:spcPts val="300"/>
+              </a:spcAft>
+              <a:defRPr sz="2800" b="0">
+                <a:solidFill>
+                  <a:srgbClr val="FFFFFF"/>
+                </a:solidFill>
+                <a:latin typeface="Play"/>
+                <a:ea typeface="Play"/>
+                <a:cs typeface="Play"/>
+              </a:defRPr>
+            </a:pPr>
+            <a:r>
+              <a:rPr sz="2800" b="0">
+                <a:solidFill>
+                  <a:srgbClr val="FFFFFF"/>
+                </a:solidFill>
+                <a:latin typeface="Play"/>
+                <a:ea typeface="Play"/>
+                <a:cs typeface="Play"/>
+              </a:rPr>
+              <a:t>Нагрузка выше 20 задач требует внешней очереди</a:t>
+            </a:r>
+          </a:p>
+        </p:txBody>
+      </p:sp>
+    </p:spTree>
+  </p:cSld>
+  <p:clrMapOvr>
+    <a:masterClrMapping/>
+  </p:clrMapOvr>
+</p:sld>
+</file>
+
+<file path=ppt/slides/slide36.xml><?xml version="1.0" encoding="utf-8"?>
+<p:sld xmlns:a="http://schemas.openxmlformats.org/drawingml/2006/main" xmlns:p="http://schemas.openxmlformats.org/presentationml/2006/main" xmlns:r="http://schemas.openxmlformats.org/officeDocument/2006/relationships">
+  <p:cSld>
+    <p:spTree>
+      <p:nvGrpSpPr>
+        <p:cNvPr id="1" name=""/>
+        <p:cNvGrpSpPr/>
+        <p:nvPr/>
+      </p:nvGrpSpPr>
+      <p:grpSpPr/>
+      <p:sp>
+        <p:nvSpPr>
+          <p:cNvPr id="679" name="Google Shape;679;p31"/>
+          <p:cNvSpPr/>
+          <p:nvPr/>
+        </p:nvSpPr>
+        <p:spPr>
+          <a:xfrm>
+            <a:off x="0" y="4748271"/>
+            <a:ext cx="12192000" cy="2109730"/>
+          </a:xfrm>
+          <a:prstGeom prst="rect">
+            <a:avLst/>
+          </a:prstGeom>
+          <a:gradFill>
+            <a:gsLst>
+              <a:gs pos="0">
+                <a:srgbClr val="0077FF">
+                  <a:alpha val="61961"/>
+                </a:srgbClr>
+              </a:gs>
+              <a:gs pos="99000">
+                <a:srgbClr val="00AEE8"/>
+              </a:gs>
+              <a:gs pos="100000">
+                <a:srgbClr val="00AEE8"/>
+              </a:gs>
+            </a:gsLst>
+            <a:lin ang="14400000" scaled="0"/>
+          </a:gradFill>
+          <a:ln>
+            <a:noFill/>
+          </a:ln>
+        </p:spPr>
+        <p:txBody>
+          <a:bodyPr anchorCtr="0" anchor="ctr" bIns="0" lIns="108000" spcFirstLastPara="1" rIns="91425" wrap="square" tIns="0">
+            <a:noAutofit/>
+          </a:bodyPr>
+          <a:lstStyle/>
+          <a:p>
+            <a:pPr indent="0" lvl="0" marL="0" marR="0" rtl="0" algn="l">
+              <a:spcBef>
+                <a:spcPts val="0"/>
+              </a:spcBef>
+              <a:spcAft>
+                <a:spcPts val="0"/>
+              </a:spcAft>
+              <a:buNone/>
+            </a:pPr>
+            <a:r>
+              <a:t/>
+            </a:r>
+            <a:endParaRPr sz="1100">
+              <a:solidFill>
+                <a:schemeClr val="lt1"/>
+              </a:solidFill>
+              <a:latin typeface="Play"/>
+              <a:ea typeface="Play"/>
+              <a:cs typeface="Play"/>
+              <a:sym typeface="Play"/>
+            </a:endParaRPr>
+          </a:p>
+        </p:txBody>
+      </p:sp>
+      <p:sp>
+        <p:nvSpPr>
+          <p:cNvPr id="680" name="Rounded Rectangle 679"/>
+          <p:cNvSpPr/>
+          <p:nvPr/>
+        </p:nvSpPr>
+        <p:spPr>
+          <a:xfrm>
+            <a:off x="300817" y="297715"/>
+            <a:ext cx="11317142" cy="3505296"/>
           </a:xfrm>
           <a:prstGeom prst="roundRect">
             <a:avLst/>
@@ -6782,7 +11873,7 @@
                 <a:ea typeface="Play"/>
                 <a:cs typeface="Play"/>
               </a:rPr>
-              <a:t>Контекст и возможность</a:t>
+              <a:t>План пилота</a:t>
             </a:r>
           </a:p>
         </p:txBody>
@@ -6813,7 +11904,7 @@
               <a:spcAft>
                 <a:spcPts val="300"/>
               </a:spcAft>
-              <a:defRPr sz="2800" b="0">
+              <a:defRPr sz="2400" b="0">
                 <a:solidFill>
                   <a:srgbClr val="FFFFFF"/>
                 </a:solidFill>
@@ -6823,7 +11914,7 @@
               </a:defRPr>
             </a:pPr>
             <a:r>
-              <a:rPr sz="2800" b="0">
+              <a:rPr sz="2400" b="0">
                 <a:solidFill>
                   <a:srgbClr val="FFFFFF"/>
                 </a:solidFill>
@@ -6831,7 +11922,7 @@
                 <a:ea typeface="Play"/>
                 <a:cs typeface="Play"/>
               </a:rPr>
-              <a:t>42 колоды, 12 слайдов, 186 минут сборки</a:t>
+              <a:t>Третий квартал 2026 подключение 4 команд, домен и HTTPS</a:t>
             </a:r>
           </a:p>
         </p:txBody>
@@ -6862,7 +11953,7 @@
               <a:spcAft>
                 <a:spcPts val="300"/>
               </a:spcAft>
-              <a:defRPr sz="2800" b="0">
+              <a:defRPr sz="2400" b="0">
                 <a:solidFill>
                   <a:srgbClr val="FFFFFF"/>
                 </a:solidFill>
@@ -6872,7 +11963,7 @@
               </a:defRPr>
             </a:pPr>
             <a:r>
-              <a:rPr sz="2800" b="0">
+              <a:rPr sz="2400" b="0">
                 <a:solidFill>
                   <a:srgbClr val="FFFFFF"/>
                 </a:solidFill>
@@ -6880,7 +11971,7 @@
                 <a:ea typeface="Play"/>
                 <a:cs typeface="Play"/>
               </a:rPr>
-              <a:t>74 минуты правки, 19 нарушений фирменного стиля</a:t>
+              <a:t>Четвёртый квартал 2026 доступ для всей компании, интеграция с хранилищем</a:t>
             </a:r>
           </a:p>
         </p:txBody>
@@ -6911,7 +12002,7 @@
               <a:spcAft>
                 <a:spcPts val="300"/>
               </a:spcAft>
-              <a:defRPr sz="2800" b="0">
+              <a:defRPr sz="2400" b="0">
                 <a:solidFill>
                   <a:srgbClr val="FFFFFF"/>
                 </a:solidFill>
@@ -6921,7 +12012,7 @@
               </a:defRPr>
             </a:pPr>
             <a:r>
-              <a:rPr sz="2800" b="0">
+              <a:rPr sz="2400" b="0">
                 <a:solidFill>
                   <a:srgbClr val="FFFFFF"/>
                 </a:solidFill>
@@ -6929,7 +12020,7 @@
                 <a:ea typeface="Play"/>
                 <a:cs typeface="Play"/>
               </a:rPr>
-              <a:t>4 дизайнера, 11 запросов/неделя, 6 дней ожидания</a:t>
+              <a:t>Первый квартал 2027 генерация иллюстраций под стиль шаблона</a:t>
             </a:r>
           </a:p>
         </p:txBody>
@@ -6942,7 +12033,7 @@
 </p:sld>
 </file>
 
-<file path=ppt/slides/slide32.xml><?xml version="1.0" encoding="utf-8"?>
+<file path=ppt/slides/slide37.xml><?xml version="1.0" encoding="utf-8"?>
 <p:sld xmlns:a="http://schemas.openxmlformats.org/drawingml/2006/main" xmlns:p="http://schemas.openxmlformats.org/presentationml/2006/main" xmlns:r="http://schemas.openxmlformats.org/officeDocument/2006/relationships">
   <p:cSld>
     <p:spTree>
@@ -6996,21 +12087,21 @@
                 <a:ea typeface="Play"/>
                 <a:cs typeface="Play"/>
               </a:rPr>
-              <a:t>Предложение</a:t>
+              <a:t>Пилотные результаты</a:t>
             </a:r>
           </a:p>
         </p:txBody>
       </p:sp>
       <p:sp>
         <p:nvSpPr>
-          <p:cNvPr id="3" name="body"/>
+          <p:cNvPr id="3" name="card_0"/>
           <p:cNvSpPr txBox="1"/>
           <p:nvPr/>
         </p:nvSpPr>
         <p:spPr>
           <a:xfrm>
-            <a:off x="429280" y="2489917"/>
-            <a:ext cx="11310884" cy="1488440"/>
+            <a:off x="568147" y="1818894"/>
+            <a:ext cx="3115177" cy="3220212"/>
           </a:xfrm>
           <a:prstGeom prst="rect">
             <a:avLst/>
@@ -7027,7 +12118,7 @@
               <a:spcAft>
                 <a:spcPts val="300"/>
               </a:spcAft>
-              <a:defRPr sz="2800">
+              <a:defRPr sz="2800" b="0">
                 <a:solidFill>
                   <a:srgbClr val="FFFFFF"/>
                 </a:solidFill>
@@ -7037,7 +12128,7 @@
               </a:defRPr>
             </a:pPr>
             <a:r>
-              <a:rPr sz="2800">
+              <a:rPr sz="2800" b="0">
                 <a:solidFill>
                   <a:srgbClr val="FFFFFF"/>
                 </a:solidFill>
@@ -7045,145 +12136,21 @@
                 <a:ea typeface="Play"/>
                 <a:cs typeface="Play"/>
               </a:rPr>
-              <a:t>• Сервис принимает шаблон pptx и материалы</a:t>
-            </a:r>
-          </a:p>
-          <a:p>
-            <a:pPr algn="l">
-              <a:spcAft>
-                <a:spcPts val="300"/>
-              </a:spcAft>
-              <a:defRPr sz="2800">
-                <a:solidFill>
-                  <a:srgbClr val="FFFFFF"/>
-                </a:solidFill>
-                <a:latin typeface="Play"/>
-                <a:ea typeface="Play"/>
-                <a:cs typeface="Play"/>
-              </a:defRPr>
-            </a:pPr>
-            <a:r>
-              <a:rPr sz="2800">
-                <a:solidFill>
-                  <a:srgbClr val="FFFFFF"/>
-                </a:solidFill>
-                <a:latin typeface="Play"/>
-                <a:ea typeface="Play"/>
-                <a:cs typeface="Play"/>
-              </a:rPr>
-              <a:t>• Генерирует колоду, экспортирует pptx/pdf/html</a:t>
-            </a:r>
-          </a:p>
-          <a:p>
-            <a:pPr algn="l">
-              <a:spcAft>
-                <a:spcPts val="300"/>
-              </a:spcAft>
-              <a:defRPr sz="2800">
-                <a:solidFill>
-                  <a:srgbClr val="FFFFFF"/>
-                </a:solidFill>
-                <a:latin typeface="Play"/>
-                <a:ea typeface="Play"/>
-                <a:cs typeface="Play"/>
-              </a:defRPr>
-            </a:pPr>
-            <a:r>
-              <a:rPr sz="2800">
-                <a:solidFill>
-                  <a:srgbClr val="FFFFFF"/>
-                </a:solidFill>
-                <a:latin typeface="Play"/>
-                <a:ea typeface="Play"/>
-                <a:cs typeface="Play"/>
-              </a:rPr>
-              <a:t>• Автоматический аудит исправляет нарушения стиля</a:t>
+              <a:t>Пилот шёл 6 недель на двух командах, собрал 68 презентаций</a:t>
             </a:r>
           </a:p>
         </p:txBody>
       </p:sp>
-    </p:spTree>
-  </p:cSld>
-  <p:clrMapOvr>
-    <a:masterClrMapping/>
-  </p:clrMapOvr>
-</p:sld>
-</file>
-
-<file path=ppt/slides/slide33.xml><?xml version="1.0" encoding="utf-8"?>
-<p:sld xmlns:a="http://schemas.openxmlformats.org/drawingml/2006/main" xmlns:p="http://schemas.openxmlformats.org/presentationml/2006/main" xmlns:r="http://schemas.openxmlformats.org/officeDocument/2006/relationships">
-  <p:cSld>
-    <p:spTree>
-      <p:nvGrpSpPr>
-        <p:cNvPr id="1" name=""/>
-        <p:cNvGrpSpPr/>
-        <p:nvPr/>
-      </p:nvGrpSpPr>
-      <p:grpSpPr/>
-      <p:pic>
-        <p:nvPicPr>
-          <p:cNvPr id="620" name="Google Shape;620;p28"/>
-          <p:cNvPicPr preferRelativeResize="0"/>
-          <p:nvPr/>
-        </p:nvPicPr>
-        <p:blipFill rotWithShape="1">
-          <a:blip r:embed="rId3">
-            <a:alphaModFix/>
-          </a:blip>
-          <a:srcRect b="0" l="0" r="0" t="0"/>
-          <a:stretch/>
-        </p:blipFill>
-        <p:spPr>
-          <a:xfrm>
-            <a:off x="398723" y="6160516"/>
-            <a:ext cx="1857481" cy="292671"/>
-          </a:xfrm>
-          <a:prstGeom prst="rect">
-            <a:avLst/>
-          </a:prstGeom>
-          <a:noFill/>
-          <a:ln>
-            <a:noFill/>
-          </a:ln>
-        </p:spPr>
-      </p:pic>
-      <p:pic>
-        <p:nvPicPr>
-          <p:cNvPr descr=" " id="621" name="Google Shape;621;p28"/>
-          <p:cNvPicPr preferRelativeResize="0"/>
-          <p:nvPr/>
-        </p:nvPicPr>
-        <p:blipFill rotWithShape="1">
-          <a:blip r:embed="rId4">
-            <a:alphaModFix/>
-          </a:blip>
-          <a:srcRect b="0" l="0" r="0" t="0"/>
-          <a:stretch/>
-        </p:blipFill>
-        <p:spPr>
-          <a:xfrm>
-            <a:off x="11093496" y="6238282"/>
-            <a:ext cx="690517" cy="216000"/>
-          </a:xfrm>
-          <a:prstGeom prst="rect">
-            <a:avLst/>
-          </a:prstGeom>
-          <a:noFill/>
-          <a:ln>
-            <a:noFill/>
-          </a:ln>
-        </p:spPr>
-      </p:pic>
       <p:sp>
         <p:nvSpPr>
-          <p:cNvPr id="622" name="title"/>
+          <p:cNvPr id="4" name="card_1"/>
           <p:cNvSpPr txBox="1"/>
           <p:nvPr/>
         </p:nvSpPr>
         <p:spPr>
           <a:xfrm>
-            <a:off x="429280" y="424715"/>
-            <a:ext cx="7827264" cy="822960"/>
+            <a:off x="4209288" y="1818894"/>
+            <a:ext cx="3115177" cy="3220212"/>
           </a:xfrm>
           <a:prstGeom prst="rect">
             <a:avLst/>
@@ -7200,7 +12167,7 @@
               <a:spcAft>
                 <a:spcPts val="300"/>
               </a:spcAft>
-              <a:defRPr sz="3200">
+              <a:defRPr sz="2800" b="0">
                 <a:solidFill>
                   <a:srgbClr val="FFFFFF"/>
                 </a:solidFill>
@@ -7210,7 +12177,7 @@
               </a:defRPr>
             </a:pPr>
             <a:r>
-              <a:rPr sz="3200">
+              <a:rPr sz="2800" b="0">
                 <a:solidFill>
                   <a:srgbClr val="FFFFFF"/>
                 </a:solidFill>
@@ -7218,21 +12185,21 @@
                 <a:ea typeface="Play"/>
                 <a:cs typeface="Play"/>
               </a:rPr>
-              <a:t>Ожидаемый эффект</a:t>
+              <a:t>Сервис ускорил сборку с 186 до 4 мин</a:t>
             </a:r>
           </a:p>
         </p:txBody>
       </p:sp>
       <p:sp>
         <p:nvSpPr>
-          <p:cNvPr id="623" name="body"/>
+          <p:cNvPr id="5" name="card_2"/>
           <p:cNvSpPr txBox="1"/>
           <p:nvPr/>
         </p:nvSpPr>
         <p:spPr>
           <a:xfrm>
-            <a:off x="429280" y="2156167"/>
-            <a:ext cx="11310884" cy="1950720"/>
+            <a:off x="7881884" y="1818894"/>
+            <a:ext cx="3115177" cy="3220212"/>
           </a:xfrm>
           <a:prstGeom prst="rect">
             <a:avLst/>
@@ -7249,7 +12216,7 @@
               <a:spcAft>
                 <a:spcPts val="300"/>
               </a:spcAft>
-              <a:defRPr sz="2800">
+              <a:defRPr sz="2800" b="0">
                 <a:solidFill>
                   <a:srgbClr val="FFFFFF"/>
                 </a:solidFill>
@@ -7259,7 +12226,7 @@
               </a:defRPr>
             </a:pPr>
             <a:r>
-              <a:rPr sz="2800">
+              <a:rPr sz="2800" b="0">
                 <a:solidFill>
                   <a:srgbClr val="FFFFFF"/>
                 </a:solidFill>
@@ -7267,85 +12234,7 @@
                 <a:ea typeface="Play"/>
                 <a:cs typeface="Play"/>
               </a:rPr>
-              <a:t>• Сборка 4 минуты вместо 186</a:t>
-            </a:r>
-          </a:p>
-          <a:p>
-            <a:pPr algn="l">
-              <a:spcAft>
-                <a:spcPts val="300"/>
-              </a:spcAft>
-              <a:defRPr sz="2800">
-                <a:solidFill>
-                  <a:srgbClr val="FFFFFF"/>
-                </a:solidFill>
-                <a:latin typeface="Play"/>
-                <a:ea typeface="Play"/>
-                <a:cs typeface="Play"/>
-              </a:defRPr>
-            </a:pPr>
-            <a:r>
-              <a:rPr sz="2800">
-                <a:solidFill>
-                  <a:srgbClr val="FFFFFF"/>
-                </a:solidFill>
-                <a:latin typeface="Play"/>
-                <a:ea typeface="Play"/>
-                <a:cs typeface="Play"/>
-              </a:rPr>
-              <a:t>• Время до первой версии 1 день вместо 6</a:t>
-            </a:r>
-          </a:p>
-          <a:p>
-            <a:pPr algn="l">
-              <a:spcAft>
-                <a:spcPts val="300"/>
-              </a:spcAft>
-              <a:defRPr sz="2800">
-                <a:solidFill>
-                  <a:srgbClr val="FFFFFF"/>
-                </a:solidFill>
-                <a:latin typeface="Play"/>
-                <a:ea typeface="Play"/>
-                <a:cs typeface="Play"/>
-              </a:defRPr>
-            </a:pPr>
-            <a:r>
-              <a:rPr sz="2800">
-                <a:solidFill>
-                  <a:srgbClr val="FFFFFF"/>
-                </a:solidFill>
-                <a:latin typeface="Play"/>
-                <a:ea typeface="Play"/>
-                <a:cs typeface="Play"/>
-              </a:rPr>
-              <a:t>• Нарушений 2 из 68, все исправлены</a:t>
-            </a:r>
-          </a:p>
-          <a:p>
-            <a:pPr algn="l">
-              <a:spcAft>
-                <a:spcPts val="300"/>
-              </a:spcAft>
-              <a:defRPr sz="2800">
-                <a:solidFill>
-                  <a:srgbClr val="FFFFFF"/>
-                </a:solidFill>
-                <a:latin typeface="Play"/>
-                <a:ea typeface="Play"/>
-                <a:cs typeface="Play"/>
-              </a:defRPr>
-            </a:pPr>
-            <a:r>
-              <a:rPr sz="2800">
-                <a:solidFill>
-                  <a:srgbClr val="FFFFFF"/>
-                </a:solidFill>
-                <a:latin typeface="Play"/>
-                <a:ea typeface="Play"/>
-                <a:cs typeface="Play"/>
-              </a:rPr>
-              <a:t>• Дизайнеры закрыли 38 запросов вместо 11</a:t>
+              <a:t>Нарушения стиля 2 из 68, исправлены автоматически</a:t>
             </a:r>
           </a:p>
         </p:txBody>
@@ -7358,600 +12247,7 @@
 </p:sld>
 </file>
 
-<file path=ppt/slides/slide34.xml><?xml version="1.0" encoding="utf-8"?>
-<p:sld xmlns:a="http://schemas.openxmlformats.org/drawingml/2006/main" xmlns:p="http://schemas.openxmlformats.org/presentationml/2006/main" xmlns:r="http://schemas.openxmlformats.org/officeDocument/2006/relationships">
-  <p:cSld>
-    <p:spTree>
-      <p:nvGrpSpPr>
-        <p:cNvPr id="1" name=""/>
-        <p:cNvGrpSpPr/>
-        <p:nvPr/>
-      </p:nvGrpSpPr>
-      <p:grpSpPr/>
-      <p:sp>
-        <p:nvSpPr>
-          <p:cNvPr id="2" name="title"/>
-          <p:cNvSpPr txBox="1"/>
-          <p:nvPr/>
-        </p:nvSpPr>
-        <p:spPr>
-          <a:xfrm>
-            <a:off x="429280" y="424715"/>
-            <a:ext cx="7827264" cy="822960"/>
-          </a:xfrm>
-          <a:prstGeom prst="rect">
-            <a:avLst/>
-          </a:prstGeom>
-          <a:noFill/>
-        </p:spPr>
-        <p:txBody>
-          <a:bodyPr wrap="square" lIns="76200" rIns="76200" tIns="50800" bIns="50800">
-            <a:spAutoFit/>
-          </a:bodyPr>
-          <a:lstStyle/>
-          <a:p>
-            <a:pPr algn="l">
-              <a:spcAft>
-                <a:spcPts val="300"/>
-              </a:spcAft>
-              <a:defRPr sz="3200">
-                <a:solidFill>
-                  <a:srgbClr val="FFFFFF"/>
-                </a:solidFill>
-                <a:latin typeface="Play"/>
-                <a:ea typeface="Play"/>
-                <a:cs typeface="Play"/>
-              </a:defRPr>
-            </a:pPr>
-            <a:r>
-              <a:rPr sz="3200">
-                <a:solidFill>
-                  <a:srgbClr val="FFFFFF"/>
-                </a:solidFill>
-                <a:latin typeface="Play"/>
-                <a:ea typeface="Play"/>
-                <a:cs typeface="Play"/>
-              </a:rPr>
-              <a:t>Время сборки колоды</a:t>
-            </a:r>
-          </a:p>
-        </p:txBody>
-      </p:sp>
-      <p:graphicFrame>
-        <p:nvGraphicFramePr>
-          <p:cNvPr id="3" name="Chart 2"/>
-          <p:cNvGraphicFramePr>
-            <a:graphicFrameLocks noGrp="1"/>
-          </p:cNvGraphicFramePr>
-          <p:nvPr/>
-        </p:nvGraphicFramePr>
-        <p:xfrm>
-          <a:off x="429280" y="1492575"/>
-          <a:ext cx="11310884" cy="4014604"/>
-        </p:xfrm>
-        <a:graphic>
-          <a:graphicData uri="http://schemas.openxmlformats.org/drawingml/2006/chart">
-            <c:chart xmlns:c="http://schemas.openxmlformats.org/drawingml/2006/chart" r:id="rId4"/>
-          </a:graphicData>
-        </a:graphic>
-      </p:graphicFrame>
-    </p:spTree>
-  </p:cSld>
-  <p:clrMapOvr>
-    <a:masterClrMapping/>
-  </p:clrMapOvr>
-</p:sld>
-</file>
-
-<file path=ppt/slides/slide35.xml><?xml version="1.0" encoding="utf-8"?>
-<p:sld xmlns:a="http://schemas.openxmlformats.org/drawingml/2006/main" xmlns:p="http://schemas.openxmlformats.org/presentationml/2006/main" xmlns:r="http://schemas.openxmlformats.org/officeDocument/2006/relationships">
-  <p:cSld>
-    <p:spTree>
-      <p:nvGrpSpPr>
-        <p:cNvPr id="1" name=""/>
-        <p:cNvGrpSpPr/>
-        <p:nvPr/>
-      </p:nvGrpSpPr>
-      <p:grpSpPr/>
-      <p:sp>
-        <p:nvSpPr>
-          <p:cNvPr id="2" name="title"/>
-          <p:cNvSpPr txBox="1"/>
-          <p:nvPr/>
-        </p:nvSpPr>
-        <p:spPr>
-          <a:xfrm>
-            <a:off x="429280" y="424715"/>
-            <a:ext cx="7827264" cy="822960"/>
-          </a:xfrm>
-          <a:prstGeom prst="rect">
-            <a:avLst/>
-          </a:prstGeom>
-          <a:noFill/>
-        </p:spPr>
-        <p:txBody>
-          <a:bodyPr wrap="square" lIns="76200" rIns="76200" tIns="50800" bIns="50800">
-            <a:spAutoFit/>
-          </a:bodyPr>
-          <a:lstStyle/>
-          <a:p>
-            <a:pPr algn="l">
-              <a:spcAft>
-                <a:spcPts val="300"/>
-              </a:spcAft>
-              <a:defRPr sz="3200">
-                <a:solidFill>
-                  <a:srgbClr val="FFFFFF"/>
-                </a:solidFill>
-                <a:latin typeface="Play"/>
-                <a:ea typeface="Play"/>
-                <a:cs typeface="Play"/>
-              </a:defRPr>
-            </a:pPr>
-            <a:r>
-              <a:rPr sz="3200">
-                <a:solidFill>
-                  <a:srgbClr val="FFFFFF"/>
-                </a:solidFill>
-                <a:latin typeface="Play"/>
-                <a:ea typeface="Play"/>
-                <a:cs typeface="Play"/>
-              </a:rPr>
-              <a:t>Нарушения фирменного стиля</a:t>
-            </a:r>
-          </a:p>
-        </p:txBody>
-      </p:sp>
-      <p:graphicFrame>
-        <p:nvGraphicFramePr>
-          <p:cNvPr id="3" name="Table 2"/>
-          <p:cNvGraphicFramePr>
-            <a:graphicFrameLocks noGrp="1"/>
-          </p:cNvGraphicFramePr>
-          <p:nvPr/>
-        </p:nvGraphicFramePr>
-        <p:xfrm>
-          <a:off x="429280" y="1664162"/>
-          <a:ext cx="11310884" cy="3753589"/>
-        </p:xfrm>
-        <a:graphic>
-          <a:graphicData uri="http://schemas.openxmlformats.org/drawingml/2006/table">
-            <a:tbl>
-              <a:tblPr firstRow="1" bandRow="1">
-                <a:tableStyleId>{5C22544A-7EE6-4342-B048-85BDC9FD1C3A}</a:tableStyleId>
-              </a:tblPr>
-              <a:tblGrid>
-                <a:gridCol w="3770294"/>
-                <a:gridCol w="3770294"/>
-                <a:gridCol w="3770296"/>
-              </a:tblGrid>
-              <a:tr h="1876794">
-                <a:tc>
-                  <a:txBody>
-                    <a:bodyPr/>
-                    <a:lstStyle/>
-                    <a:p>
-                      <a:pPr>
-                        <a:defRPr sz="1300" b="1">
-                          <a:solidFill>
-                            <a:srgbClr val="FFFFFF"/>
-                          </a:solidFill>
-                          <a:latin typeface="Play"/>
-                          <a:ea typeface="Play"/>
-                          <a:cs typeface="Play"/>
-                        </a:defRPr>
-                      </a:pPr>
-                      <a:r>
-                        <a:t>Показатель</a:t>
-                      </a:r>
-                    </a:p>
-                  </a:txBody>
-                  <a:tcPr>
-                    <a:solidFill>
-                      <a:srgbClr val="0077FF"/>
-                    </a:solidFill>
-                  </a:tcPr>
-                </a:tc>
-                <a:tc>
-                  <a:txBody>
-                    <a:bodyPr/>
-                    <a:lstStyle/>
-                    <a:p>
-                      <a:pPr>
-                        <a:defRPr sz="1300" b="1">
-                          <a:solidFill>
-                            <a:srgbClr val="FFFFFF"/>
-                          </a:solidFill>
-                          <a:latin typeface="Play"/>
-                          <a:ea typeface="Play"/>
-                          <a:cs typeface="Play"/>
-                        </a:defRPr>
-                      </a:pPr>
-                      <a:r>
-                        <a:t>Текущие</a:t>
-                      </a:r>
-                    </a:p>
-                  </a:txBody>
-                  <a:tcPr>
-                    <a:solidFill>
-                      <a:srgbClr val="0077FF"/>
-                    </a:solidFill>
-                  </a:tcPr>
-                </a:tc>
-                <a:tc>
-                  <a:txBody>
-                    <a:bodyPr/>
-                    <a:lstStyle/>
-                    <a:p>
-                      <a:pPr>
-                        <a:defRPr sz="1300" b="1">
-                          <a:solidFill>
-                            <a:srgbClr val="FFFFFF"/>
-                          </a:solidFill>
-                          <a:latin typeface="Play"/>
-                          <a:ea typeface="Play"/>
-                          <a:cs typeface="Play"/>
-                        </a:defRPr>
-                      </a:pPr>
-                      <a:r>
-                        <a:t>Пилот</a:t>
-                      </a:r>
-                    </a:p>
-                  </a:txBody>
-                  <a:tcPr>
-                    <a:solidFill>
-                      <a:srgbClr val="0077FF"/>
-                    </a:solidFill>
-                  </a:tcPr>
-                </a:tc>
-              </a:tr>
-              <a:tr h="1876795">
-                <a:tc>
-                  <a:txBody>
-                    <a:bodyPr/>
-                    <a:lstStyle/>
-                    <a:p>
-                      <a:pPr>
-                        <a:defRPr sz="1300" b="0">
-                          <a:solidFill>
-                            <a:srgbClr val="FFFFFF"/>
-                          </a:solidFill>
-                          <a:latin typeface="Play"/>
-                          <a:ea typeface="Play"/>
-                          <a:cs typeface="Play"/>
-                        </a:defRPr>
-                      </a:pPr>
-                      <a:r>
-                        <a:t>Нарушения фирменного стиля</a:t>
-                      </a:r>
-                    </a:p>
-                  </a:txBody>
-                  <a:tcPr>
-                    <a:solidFill>
-                      <a:srgbClr val="111111"/>
-                    </a:solidFill>
-                  </a:tcPr>
-                </a:tc>
-                <a:tc>
-                  <a:txBody>
-                    <a:bodyPr/>
-                    <a:lstStyle/>
-                    <a:p>
-                      <a:pPr>
-                        <a:defRPr sz="1300" b="0">
-                          <a:solidFill>
-                            <a:srgbClr val="FFFFFF"/>
-                          </a:solidFill>
-                          <a:latin typeface="Play"/>
-                          <a:ea typeface="Play"/>
-                          <a:cs typeface="Play"/>
-                        </a:defRPr>
-                      </a:pPr>
-                      <a:r>
-                        <a:t>19 из 42</a:t>
-                      </a:r>
-                    </a:p>
-                  </a:txBody>
-                  <a:tcPr>
-                    <a:solidFill>
-                      <a:srgbClr val="111111"/>
-                    </a:solidFill>
-                  </a:tcPr>
-                </a:tc>
-                <a:tc>
-                  <a:txBody>
-                    <a:bodyPr/>
-                    <a:lstStyle/>
-                    <a:p>
-                      <a:pPr>
-                        <a:defRPr sz="1300" b="0">
-                          <a:solidFill>
-                            <a:srgbClr val="FFFFFF"/>
-                          </a:solidFill>
-                          <a:latin typeface="Play"/>
-                          <a:ea typeface="Play"/>
-                          <a:cs typeface="Play"/>
-                        </a:defRPr>
-                      </a:pPr>
-                      <a:r>
-                        <a:t>2 из 68</a:t>
-                      </a:r>
-                    </a:p>
-                  </a:txBody>
-                  <a:tcPr>
-                    <a:solidFill>
-                      <a:srgbClr val="111111"/>
-                    </a:solidFill>
-                  </a:tcPr>
-                </a:tc>
-              </a:tr>
-            </a:tbl>
-          </a:graphicData>
-        </a:graphic>
-      </p:graphicFrame>
-    </p:spTree>
-  </p:cSld>
-  <p:clrMapOvr>
-    <a:masterClrMapping/>
-  </p:clrMapOvr>
-</p:sld>
-</file>
-
-<file path=ppt/slides/slide36.xml><?xml version="1.0" encoding="utf-8"?>
-<p:sld xmlns:a="http://schemas.openxmlformats.org/drawingml/2006/main" xmlns:p="http://schemas.openxmlformats.org/presentationml/2006/main" xmlns:r="http://schemas.openxmlformats.org/officeDocument/2006/relationships">
-  <p:cSld>
-    <p:spTree>
-      <p:nvGrpSpPr>
-        <p:cNvPr id="1" name=""/>
-        <p:cNvGrpSpPr/>
-        <p:nvPr/>
-      </p:nvGrpSpPr>
-      <p:grpSpPr/>
-      <p:sp>
-        <p:nvSpPr>
-          <p:cNvPr id="2" name="title"/>
-          <p:cNvSpPr txBox="1"/>
-          <p:nvPr/>
-        </p:nvSpPr>
-        <p:spPr>
-          <a:xfrm>
-            <a:off x="429280" y="424715"/>
-            <a:ext cx="7827264" cy="822960"/>
-          </a:xfrm>
-          <a:prstGeom prst="rect">
-            <a:avLst/>
-          </a:prstGeom>
-          <a:noFill/>
-        </p:spPr>
-        <p:txBody>
-          <a:bodyPr wrap="square" lIns="76200" rIns="76200" tIns="50800" bIns="50800">
-            <a:spAutoFit/>
-          </a:bodyPr>
-          <a:lstStyle/>
-          <a:p>
-            <a:pPr algn="l">
-              <a:spcAft>
-                <a:spcPts val="300"/>
-              </a:spcAft>
-              <a:defRPr sz="3200">
-                <a:solidFill>
-                  <a:srgbClr val="FFFFFF"/>
-                </a:solidFill>
-                <a:latin typeface="Play"/>
-                <a:ea typeface="Play"/>
-                <a:cs typeface="Play"/>
-              </a:defRPr>
-            </a:pPr>
-            <a:r>
-              <a:rPr sz="3200">
-                <a:solidFill>
-                  <a:srgbClr val="FFFFFF"/>
-                </a:solidFill>
-                <a:latin typeface="Play"/>
-                <a:ea typeface="Play"/>
-                <a:cs typeface="Play"/>
-              </a:rPr>
-              <a:t>Нагрузка дизайнеров</a:t>
-            </a:r>
-          </a:p>
-        </p:txBody>
-      </p:sp>
-      <p:graphicFrame>
-        <p:nvGraphicFramePr>
-          <p:cNvPr id="3" name="Table 2"/>
-          <p:cNvGraphicFramePr>
-            <a:graphicFrameLocks noGrp="1"/>
-          </p:cNvGraphicFramePr>
-          <p:nvPr/>
-        </p:nvGraphicFramePr>
-        <p:xfrm>
-          <a:off x="429280" y="1592290"/>
-          <a:ext cx="11310884" cy="4181322"/>
-        </p:xfrm>
-        <a:graphic>
-          <a:graphicData uri="http://schemas.openxmlformats.org/drawingml/2006/table">
-            <a:tbl>
-              <a:tblPr firstRow="1" bandRow="1">
-                <a:tableStyleId>{5C22544A-7EE6-4342-B048-85BDC9FD1C3A}</a:tableStyleId>
-              </a:tblPr>
-              <a:tblGrid>
-                <a:gridCol w="3770294"/>
-                <a:gridCol w="3770294"/>
-                <a:gridCol w="3770296"/>
-              </a:tblGrid>
-              <a:tr h="2090661">
-                <a:tc>
-                  <a:txBody>
-                    <a:bodyPr/>
-                    <a:lstStyle/>
-                    <a:p>
-                      <a:pPr>
-                        <a:defRPr sz="1300" b="1">
-                          <a:solidFill>
-                            <a:srgbClr val="FFFFFF"/>
-                          </a:solidFill>
-                          <a:latin typeface="Play"/>
-                          <a:ea typeface="Play"/>
-                          <a:cs typeface="Play"/>
-                        </a:defRPr>
-                      </a:pPr>
-                      <a:r>
-                        <a:t>Показатель</a:t>
-                      </a:r>
-                    </a:p>
-                  </a:txBody>
-                  <a:tcPr>
-                    <a:solidFill>
-                      <a:srgbClr val="0077FF"/>
-                    </a:solidFill>
-                  </a:tcPr>
-                </a:tc>
-                <a:tc>
-                  <a:txBody>
-                    <a:bodyPr/>
-                    <a:lstStyle/>
-                    <a:p>
-                      <a:pPr>
-                        <a:defRPr sz="1300" b="1">
-                          <a:solidFill>
-                            <a:srgbClr val="FFFFFF"/>
-                          </a:solidFill>
-                          <a:latin typeface="Play"/>
-                          <a:ea typeface="Play"/>
-                          <a:cs typeface="Play"/>
-                        </a:defRPr>
-                      </a:pPr>
-                      <a:r>
-                        <a:t>Текущая</a:t>
-                      </a:r>
-                    </a:p>
-                  </a:txBody>
-                  <a:tcPr>
-                    <a:solidFill>
-                      <a:srgbClr val="0077FF"/>
-                    </a:solidFill>
-                  </a:tcPr>
-                </a:tc>
-                <a:tc>
-                  <a:txBody>
-                    <a:bodyPr/>
-                    <a:lstStyle/>
-                    <a:p>
-                      <a:pPr>
-                        <a:defRPr sz="1300" b="1">
-                          <a:solidFill>
-                            <a:srgbClr val="FFFFFF"/>
-                          </a:solidFill>
-                          <a:latin typeface="Play"/>
-                          <a:ea typeface="Play"/>
-                          <a:cs typeface="Play"/>
-                        </a:defRPr>
-                      </a:pPr>
-                      <a:r>
-                        <a:t>Пилот</a:t>
-                      </a:r>
-                    </a:p>
-                  </a:txBody>
-                  <a:tcPr>
-                    <a:solidFill>
-                      <a:srgbClr val="0077FF"/>
-                    </a:solidFill>
-                  </a:tcPr>
-                </a:tc>
-              </a:tr>
-              <a:tr h="2090661">
-                <a:tc>
-                  <a:txBody>
-                    <a:bodyPr/>
-                    <a:lstStyle/>
-                    <a:p>
-                      <a:pPr>
-                        <a:defRPr sz="1300" b="0">
-                          <a:solidFill>
-                            <a:srgbClr val="FFFFFF"/>
-                          </a:solidFill>
-                          <a:latin typeface="Play"/>
-                          <a:ea typeface="Play"/>
-                          <a:cs typeface="Play"/>
-                        </a:defRPr>
-                      </a:pPr>
-                      <a:r>
-                        <a:t>Запросов/неделя</a:t>
-                      </a:r>
-                    </a:p>
-                  </a:txBody>
-                  <a:tcPr>
-                    <a:solidFill>
-                      <a:srgbClr val="111111"/>
-                    </a:solidFill>
-                  </a:tcPr>
-                </a:tc>
-                <a:tc>
-                  <a:txBody>
-                    <a:bodyPr/>
-                    <a:lstStyle/>
-                    <a:p>
-                      <a:pPr>
-                        <a:defRPr sz="1300" b="0">
-                          <a:solidFill>
-                            <a:srgbClr val="FFFFFF"/>
-                          </a:solidFill>
-                          <a:latin typeface="Play"/>
-                          <a:ea typeface="Play"/>
-                          <a:cs typeface="Play"/>
-                        </a:defRPr>
-                      </a:pPr>
-                      <a:r>
-                        <a:t>11</a:t>
-                      </a:r>
-                    </a:p>
-                  </a:txBody>
-                  <a:tcPr>
-                    <a:solidFill>
-                      <a:srgbClr val="111111"/>
-                    </a:solidFill>
-                  </a:tcPr>
-                </a:tc>
-                <a:tc>
-                  <a:txBody>
-                    <a:bodyPr/>
-                    <a:lstStyle/>
-                    <a:p>
-                      <a:pPr>
-                        <a:defRPr sz="1300" b="0">
-                          <a:solidFill>
-                            <a:srgbClr val="FFFFFF"/>
-                          </a:solidFill>
-                          <a:latin typeface="Play"/>
-                          <a:ea typeface="Play"/>
-                          <a:cs typeface="Play"/>
-                        </a:defRPr>
-                      </a:pPr>
-                      <a:r>
-                        <a:t>38</a:t>
-                      </a:r>
-                    </a:p>
-                  </a:txBody>
-                  <a:tcPr>
-                    <a:solidFill>
-                      <a:srgbClr val="111111"/>
-                    </a:solidFill>
-                  </a:tcPr>
-                </a:tc>
-              </a:tr>
-            </a:tbl>
-          </a:graphicData>
-        </a:graphic>
-      </p:graphicFrame>
-    </p:spTree>
-  </p:cSld>
-  <p:clrMapOvr>
-    <a:masterClrMapping/>
-  </p:clrMapOvr>
-</p:sld>
-</file>
-
-<file path=ppt/slides/slide37.xml><?xml version="1.0" encoding="utf-8"?>
+<file path=ppt/slides/slide38.xml><?xml version="1.0" encoding="utf-8"?>
 <p:sld xmlns:a="http://schemas.openxmlformats.org/drawingml/2006/main" xmlns:p="http://schemas.openxmlformats.org/presentationml/2006/main" xmlns:r="http://schemas.openxmlformats.org/officeDocument/2006/relationships">
   <p:cSld>
     <p:spTree>
@@ -8115,7 +12411,7 @@
                 <a:ea typeface="Play"/>
                 <a:cs typeface="Play"/>
               </a:rPr>
-              <a:t>Ресурсы и сроки</a:t>
+              <a:t>Показатели после пилота</a:t>
             </a:r>
           </a:p>
         </p:txBody>
@@ -8146,7 +12442,7 @@
               <a:spcAft>
                 <a:spcPts val="300"/>
               </a:spcAft>
-              <a:defRPr sz="2800" b="0">
+              <a:defRPr sz="2400" b="0">
                 <a:solidFill>
                   <a:srgbClr val="FFFFFF"/>
                 </a:solidFill>
@@ -8156,7 +12452,7 @@
               </a:defRPr>
             </a:pPr>
             <a:r>
-              <a:rPr sz="2800" b="0">
+              <a:rPr sz="2400" b="0">
                 <a:solidFill>
                   <a:srgbClr val="FFFFFF"/>
                 </a:solidFill>
@@ -8164,7 +12460,7 @@
                 <a:ea typeface="Play"/>
                 <a:cs typeface="Play"/>
               </a:rPr>
-              <a:t>2 vCPU / 2 GB RAM</a:t>
+              <a:t>Запросы закрыты 38 вместо 11, рутина ушла в сервис</a:t>
             </a:r>
           </a:p>
         </p:txBody>
@@ -8213,7 +12509,7 @@
                 <a:ea typeface="Play"/>
                 <a:cs typeface="Play"/>
               </a:rPr>
-              <a:t>1 400 рублей за 6 недель пилота</a:t>
+              <a:t>Время до первой версии сократилось с 6 дней до 1</a:t>
             </a:r>
           </a:p>
         </p:txBody>
@@ -8262,229 +12558,7 @@
                 <a:ea typeface="Play"/>
                 <a:cs typeface="Play"/>
               </a:rPr>
-              <a:t>6 недель пилота, 2 команды, 68 презентаций</a:t>
-            </a:r>
-          </a:p>
-        </p:txBody>
-      </p:sp>
-    </p:spTree>
-  </p:cSld>
-  <p:clrMapOvr>
-    <a:masterClrMapping/>
-  </p:clrMapOvr>
-</p:sld>
-</file>
-
-<file path=ppt/slides/slide38.xml><?xml version="1.0" encoding="utf-8"?>
-<p:sld xmlns:a="http://schemas.openxmlformats.org/drawingml/2006/main" xmlns:p="http://schemas.openxmlformats.org/presentationml/2006/main" xmlns:r="http://schemas.openxmlformats.org/officeDocument/2006/relationships">
-  <p:cSld>
-    <p:spTree>
-      <p:nvGrpSpPr>
-        <p:cNvPr id="1" name=""/>
-        <p:cNvGrpSpPr/>
-        <p:nvPr/>
-      </p:nvGrpSpPr>
-      <p:grpSpPr/>
-      <p:pic>
-        <p:nvPicPr>
-          <p:cNvPr id="620" name="Google Shape;620;p28"/>
-          <p:cNvPicPr preferRelativeResize="0"/>
-          <p:nvPr/>
-        </p:nvPicPr>
-        <p:blipFill rotWithShape="1">
-          <a:blip r:embed="rId3">
-            <a:alphaModFix/>
-          </a:blip>
-          <a:srcRect b="0" l="0" r="0" t="0"/>
-          <a:stretch/>
-        </p:blipFill>
-        <p:spPr>
-          <a:xfrm>
-            <a:off x="398723" y="6160516"/>
-            <a:ext cx="1857481" cy="292671"/>
-          </a:xfrm>
-          <a:prstGeom prst="rect">
-            <a:avLst/>
-          </a:prstGeom>
-          <a:noFill/>
-          <a:ln>
-            <a:noFill/>
-          </a:ln>
-        </p:spPr>
-      </p:pic>
-      <p:pic>
-        <p:nvPicPr>
-          <p:cNvPr descr=" " id="621" name="Google Shape;621;p28"/>
-          <p:cNvPicPr preferRelativeResize="0"/>
-          <p:nvPr/>
-        </p:nvPicPr>
-        <p:blipFill rotWithShape="1">
-          <a:blip r:embed="rId4">
-            <a:alphaModFix/>
-          </a:blip>
-          <a:srcRect b="0" l="0" r="0" t="0"/>
-          <a:stretch/>
-        </p:blipFill>
-        <p:spPr>
-          <a:xfrm>
-            <a:off x="11093496" y="6238282"/>
-            <a:ext cx="690517" cy="216000"/>
-          </a:xfrm>
-          <a:prstGeom prst="rect">
-            <a:avLst/>
-          </a:prstGeom>
-          <a:noFill/>
-          <a:ln>
-            <a:noFill/>
-          </a:ln>
-        </p:spPr>
-      </p:pic>
-      <p:sp>
-        <p:nvSpPr>
-          <p:cNvPr id="622" name="title"/>
-          <p:cNvSpPr txBox="1"/>
-          <p:nvPr/>
-        </p:nvSpPr>
-        <p:spPr>
-          <a:xfrm>
-            <a:off x="429280" y="424715"/>
-            <a:ext cx="7827264" cy="822960"/>
-          </a:xfrm>
-          <a:prstGeom prst="rect">
-            <a:avLst/>
-          </a:prstGeom>
-          <a:noFill/>
-        </p:spPr>
-        <p:txBody>
-          <a:bodyPr wrap="square" lIns="76200" rIns="76200" tIns="50800" bIns="50800">
-            <a:spAutoFit/>
-          </a:bodyPr>
-          <a:lstStyle/>
-          <a:p>
-            <a:pPr algn="l">
-              <a:spcAft>
-                <a:spcPts val="300"/>
-              </a:spcAft>
-              <a:defRPr sz="3200">
-                <a:solidFill>
-                  <a:srgbClr val="FFFFFF"/>
-                </a:solidFill>
-                <a:latin typeface="Play"/>
-                <a:ea typeface="Play"/>
-                <a:cs typeface="Play"/>
-              </a:defRPr>
-            </a:pPr>
-            <a:r>
-              <a:rPr sz="3200">
-                <a:solidFill>
-                  <a:srgbClr val="FFFFFF"/>
-                </a:solidFill>
-                <a:latin typeface="Play"/>
-                <a:ea typeface="Play"/>
-                <a:cs typeface="Play"/>
-              </a:rPr>
-              <a:t>Что мы просим решить</a:t>
-            </a:r>
-          </a:p>
-        </p:txBody>
-      </p:sp>
-      <p:sp>
-        <p:nvSpPr>
-          <p:cNvPr id="623" name="body"/>
-          <p:cNvSpPr txBox="1"/>
-          <p:nvPr/>
-        </p:nvSpPr>
-        <p:spPr>
-          <a:xfrm>
-            <a:off x="429280" y="2310261"/>
-            <a:ext cx="11310884" cy="1488440"/>
-          </a:xfrm>
-          <a:prstGeom prst="rect">
-            <a:avLst/>
-          </a:prstGeom>
-          <a:noFill/>
-        </p:spPr>
-        <p:txBody>
-          <a:bodyPr wrap="square" lIns="76200" rIns="76200" tIns="50800" bIns="50800">
-            <a:spAutoFit/>
-          </a:bodyPr>
-          <a:lstStyle/>
-          <a:p>
-            <a:pPr algn="l">
-              <a:spcAft>
-                <a:spcPts val="300"/>
-              </a:spcAft>
-              <a:defRPr sz="2800">
-                <a:solidFill>
-                  <a:srgbClr val="FFFFFF"/>
-                </a:solidFill>
-                <a:latin typeface="Play"/>
-                <a:ea typeface="Play"/>
-                <a:cs typeface="Play"/>
-              </a:defRPr>
-            </a:pPr>
-            <a:r>
-              <a:rPr sz="2800">
-                <a:solidFill>
-                  <a:srgbClr val="FFFFFF"/>
-                </a:solidFill>
-                <a:latin typeface="Play"/>
-                <a:ea typeface="Play"/>
-                <a:cs typeface="Play"/>
-              </a:rPr>
-              <a:t>• Запуск сервиса на всю компанию</a:t>
-            </a:r>
-          </a:p>
-          <a:p>
-            <a:pPr algn="l">
-              <a:spcAft>
-                <a:spcPts val="300"/>
-              </a:spcAft>
-              <a:defRPr sz="2800">
-                <a:solidFill>
-                  <a:srgbClr val="FFFFFF"/>
-                </a:solidFill>
-                <a:latin typeface="Play"/>
-                <a:ea typeface="Play"/>
-                <a:cs typeface="Play"/>
-              </a:defRPr>
-            </a:pPr>
-            <a:r>
-              <a:rPr sz="2800">
-                <a:solidFill>
-                  <a:srgbClr val="FFFFFF"/>
-                </a:solidFill>
-                <a:latin typeface="Play"/>
-                <a:ea typeface="Play"/>
-                <a:cs typeface="Play"/>
-              </a:rPr>
-              <a:t>• Интеграция с корпоративным хранилищем</a:t>
-            </a:r>
-          </a:p>
-          <a:p>
-            <a:pPr algn="l">
-              <a:spcAft>
-                <a:spcPts val="300"/>
-              </a:spcAft>
-              <a:defRPr sz="2800">
-                <a:solidFill>
-                  <a:srgbClr val="FFFFFF"/>
-                </a:solidFill>
-                <a:latin typeface="Play"/>
-                <a:ea typeface="Play"/>
-                <a:cs typeface="Play"/>
-              </a:defRPr>
-            </a:pPr>
-            <a:r>
-              <a:rPr sz="2800">
-                <a:solidFill>
-                  <a:srgbClr val="FFFFFF"/>
-                </a:solidFill>
-                <a:latin typeface="Play"/>
-                <a:ea typeface="Play"/>
-                <a:cs typeface="Play"/>
-              </a:rPr>
-              <a:t>• Поддержка 20 одновременных задач</a:t>
+              <a:t>Сервис работает на 2 vCPU / 2 ГБ RAM</a:t>
             </a:r>
           </a:p>
         </p:txBody>
@@ -8509,73 +12583,129 @@
       <p:grpSpPr/>
       <p:sp>
         <p:nvSpPr>
-          <p:cNvPr id="2" name="title"/>
-          <p:cNvSpPr txBox="1"/>
+          <p:cNvPr id="881" name="Google Shape;881;p45"/>
+          <p:cNvSpPr/>
           <p:nvPr/>
         </p:nvSpPr>
         <p:spPr>
           <a:xfrm>
-            <a:off x="429280" y="424715"/>
-            <a:ext cx="7827264" cy="822960"/>
+            <a:off x="429254" y="4567907"/>
+            <a:ext cx="834282" cy="834282"/>
           </a:xfrm>
-          <a:prstGeom prst="rect">
+          <a:prstGeom prst="ellipse">
             <a:avLst/>
           </a:prstGeom>
-          <a:noFill/>
+          <a:solidFill>
+            <a:srgbClr val="5A6775"/>
+          </a:solidFill>
+          <a:ln>
+            <a:noFill/>
+          </a:ln>
         </p:spPr>
         <p:txBody>
-          <a:bodyPr wrap="square" lIns="76200" rIns="76200" tIns="50800" bIns="50800">
-            <a:spAutoFit/>
+          <a:bodyPr anchorCtr="0" anchor="ctr" bIns="45700" lIns="91425" spcFirstLastPara="1" rIns="91425" wrap="square" tIns="45700">
+            <a:noAutofit/>
           </a:bodyPr>
           <a:lstStyle/>
           <a:p>
-            <a:pPr algn="l">
-              <a:spcAft>
-                <a:spcPts val="300"/>
-              </a:spcAft>
-              <a:defRPr sz="3200">
-                <a:solidFill>
-                  <a:srgbClr val="FFFFFF"/>
-                </a:solidFill>
-                <a:latin typeface="Play"/>
-                <a:ea typeface="Play"/>
-                <a:cs typeface="Play"/>
-              </a:defRPr>
+            <a:pPr indent="0" lvl="0" marL="0" marR="0" rtl="0" algn="ctr">
+              <a:spcBef>
+                <a:spcPts val="0"/>
+              </a:spcBef>
+              <a:spcAft>
+                <a:spcPts val="0"/>
+              </a:spcAft>
+              <a:buNone/>
             </a:pPr>
             <a:r>
-              <a:rPr sz="3200">
-                <a:solidFill>
-                  <a:srgbClr val="FFFFFF"/>
-                </a:solidFill>
-                <a:latin typeface="Play"/>
-                <a:ea typeface="Play"/>
-                <a:cs typeface="Play"/>
-              </a:rPr>
-              <a:t>План запуска</a:t>
+              <a:t/>
             </a:r>
+            <a:endParaRPr sz="1800">
+              <a:solidFill>
+                <a:schemeClr val="lt1"/>
+              </a:solidFill>
+              <a:latin typeface="Arial"/>
+              <a:ea typeface="Arial"/>
+              <a:cs typeface="Arial"/>
+              <a:sym typeface="Arial"/>
+            </a:endParaRPr>
           </a:p>
         </p:txBody>
       </p:sp>
       <p:sp>
         <p:nvSpPr>
-          <p:cNvPr id="3" name="Rectangle 2"/>
+          <p:cNvPr id="883" name="Google Shape;883;p45"/>
           <p:cNvSpPr/>
           <p:nvPr/>
         </p:nvSpPr>
         <p:spPr>
           <a:xfrm>
-            <a:off x="429280" y="3339292"/>
-            <a:ext cx="11310884" cy="120438"/>
+            <a:off x="3499026" y="4567907"/>
+            <a:ext cx="834282" cy="834282"/>
           </a:xfrm>
-          <a:prstGeom prst="rect">
+          <a:prstGeom prst="ellipse">
             <a:avLst/>
           </a:prstGeom>
           <a:solidFill>
-            <a:srgbClr val="0077FF"/>
+            <a:srgbClr val="5A6775"/>
           </a:solidFill>
           <a:ln>
             <a:noFill/>
           </a:ln>
+        </p:spPr>
+        <p:txBody>
+          <a:bodyPr anchorCtr="0" anchor="ctr" bIns="45700" lIns="91425" spcFirstLastPara="1" rIns="91425" wrap="square" tIns="45700">
+            <a:noAutofit/>
+          </a:bodyPr>
+          <a:lstStyle/>
+          <a:p>
+            <a:pPr indent="0" lvl="0" marL="0" marR="0" rtl="0" algn="ctr">
+              <a:spcBef>
+                <a:spcPts val="0"/>
+              </a:spcBef>
+              <a:spcAft>
+                <a:spcPts val="0"/>
+              </a:spcAft>
+              <a:buNone/>
+            </a:pPr>
+            <a:r>
+              <a:t/>
+            </a:r>
+            <a:endParaRPr sz="1800">
+              <a:solidFill>
+                <a:schemeClr val="lt1"/>
+              </a:solidFill>
+              <a:latin typeface="Arial"/>
+              <a:ea typeface="Arial"/>
+              <a:cs typeface="Arial"/>
+              <a:sym typeface="Arial"/>
+            </a:endParaRPr>
+          </a:p>
+        </p:txBody>
+      </p:sp>
+      <p:sp>
+        <p:nvSpPr>
+          <p:cNvPr id="884" name="Rounded Rectangle 883"/>
+          <p:cNvSpPr/>
+          <p:nvPr/>
+        </p:nvSpPr>
+        <p:spPr>
+          <a:xfrm>
+            <a:off x="300817" y="297715"/>
+            <a:ext cx="11566347" cy="3377993"/>
+          </a:xfrm>
+          <a:prstGeom prst="roundRect">
+            <a:avLst/>
+          </a:prstGeom>
+          <a:solidFill>
+            <a:srgbClr val="111111">
+              <a:alpha val="85000"/>
+            </a:srgbClr>
+          </a:solidFill>
+          <a:ln>
+            <a:noFill/>
+          </a:ln>
+          <a:effectLst/>
         </p:spPr>
         <p:style>
           <a:lnRef idx="1">
@@ -8601,57 +12731,14 @@
       </p:sp>
       <p:sp>
         <p:nvSpPr>
-          <p:cNvPr id="4" name="Oval 3"/>
-          <p:cNvSpPr/>
-          <p:nvPr/>
-        </p:nvSpPr>
-        <p:spPr>
-          <a:xfrm>
-            <a:off x="1872820" y="2957905"/>
-            <a:ext cx="883212" cy="883212"/>
-          </a:xfrm>
-          <a:prstGeom prst="ellipse">
-            <a:avLst/>
-          </a:prstGeom>
-          <a:solidFill>
-            <a:srgbClr val="0077FF"/>
-          </a:solidFill>
-          <a:ln>
-            <a:noFill/>
-          </a:ln>
-        </p:spPr>
-        <p:style>
-          <a:lnRef idx="1">
-            <a:schemeClr val="accent1"/>
-          </a:lnRef>
-          <a:fillRef idx="3">
-            <a:schemeClr val="accent1"/>
-          </a:fillRef>
-          <a:effectRef idx="2">
-            <a:schemeClr val="accent1"/>
-          </a:effectRef>
-          <a:fontRef idx="minor">
-            <a:schemeClr val="lt1"/>
-          </a:fontRef>
-        </p:style>
-        <p:txBody>
-          <a:bodyPr rtlCol="0" anchor="ctr"/>
-          <a:lstStyle/>
-          <a:p>
-            <a:pPr algn="ctr"/>
-          </a:p>
-        </p:txBody>
-      </p:sp>
-      <p:sp>
-        <p:nvSpPr>
-          <p:cNvPr id="5" name="TextBox 4"/>
+          <p:cNvPr id="885" name="title"/>
           <p:cNvSpPr txBox="1"/>
           <p:nvPr/>
         </p:nvSpPr>
         <p:spPr>
           <a:xfrm>
-            <a:off x="429280" y="1492575"/>
-            <a:ext cx="5655442" cy="1525549"/>
+            <a:off x="427817" y="424715"/>
+            <a:ext cx="11312347" cy="1018540"/>
           </a:xfrm>
           <a:prstGeom prst="rect">
             <a:avLst/>
@@ -8659,13 +12746,16 @@
           <a:noFill/>
         </p:spPr>
         <p:txBody>
-          <a:bodyPr wrap="square" lIns="12700" rIns="12700" tIns="12700" bIns="12700">
+          <a:bodyPr wrap="square" lIns="76200" rIns="76200" tIns="50800" bIns="50800">
             <a:spAutoFit/>
           </a:bodyPr>
           <a:lstStyle/>
           <a:p>
-            <a:pPr algn="ctr">
-              <a:defRPr sz="1400" b="0">
+            <a:pPr algn="l">
+              <a:spcAft>
+                <a:spcPts val="300"/>
+              </a:spcAft>
+              <a:defRPr sz="5400">
                 <a:solidFill>
                   <a:srgbClr val="FFFFFF"/>
                 </a:solidFill>
@@ -8675,7 +12765,7 @@
               </a:defRPr>
             </a:pPr>
             <a:r>
-              <a:rPr sz="1400" b="0">
+              <a:rPr sz="5400">
                 <a:solidFill>
                   <a:srgbClr val="FFFFFF"/>
                 </a:solidFill>
@@ -8683,64 +12773,21 @@
                 <a:ea typeface="Play"/>
                 <a:cs typeface="Play"/>
               </a:rPr>
-              <a:t>Третий квартал 2026: подключение 4 команд</a:t>
+              <a:t>Что мы просим решить</a:t>
             </a:r>
           </a:p>
         </p:txBody>
       </p:sp>
       <p:sp>
         <p:nvSpPr>
-          <p:cNvPr id="6" name="Oval 5"/>
-          <p:cNvSpPr/>
-          <p:nvPr/>
-        </p:nvSpPr>
-        <p:spPr>
-          <a:xfrm>
-            <a:off x="5643115" y="2957905"/>
-            <a:ext cx="883212" cy="883212"/>
-          </a:xfrm>
-          <a:prstGeom prst="ellipse">
-            <a:avLst/>
-          </a:prstGeom>
-          <a:solidFill>
-            <a:srgbClr val="0077FF"/>
-          </a:solidFill>
-          <a:ln>
-            <a:noFill/>
-          </a:ln>
-        </p:spPr>
-        <p:style>
-          <a:lnRef idx="1">
-            <a:schemeClr val="accent1"/>
-          </a:lnRef>
-          <a:fillRef idx="3">
-            <a:schemeClr val="accent1"/>
-          </a:fillRef>
-          <a:effectRef idx="2">
-            <a:schemeClr val="accent1"/>
-          </a:effectRef>
-          <a:fontRef idx="minor">
-            <a:schemeClr val="lt1"/>
-          </a:fontRef>
-        </p:style>
-        <p:txBody>
-          <a:bodyPr rtlCol="0" anchor="ctr"/>
-          <a:lstStyle/>
-          <a:p>
-            <a:pPr algn="ctr"/>
-          </a:p>
-        </p:txBody>
-      </p:sp>
-      <p:sp>
-        <p:nvSpPr>
-          <p:cNvPr id="7" name="TextBox 6"/>
+          <p:cNvPr id="886" name="body"/>
           <p:cNvSpPr txBox="1"/>
           <p:nvPr/>
         </p:nvSpPr>
         <p:spPr>
           <a:xfrm>
-            <a:off x="3257001" y="4222505"/>
-            <a:ext cx="5655442" cy="1525549"/>
+            <a:off x="427817" y="2258389"/>
+            <a:ext cx="11312347" cy="1290320"/>
           </a:xfrm>
           <a:prstGeom prst="rect">
             <a:avLst/>
@@ -8748,13 +12795,16 @@
           <a:noFill/>
         </p:spPr>
         <p:txBody>
-          <a:bodyPr wrap="square" lIns="12700" rIns="12700" tIns="12700" bIns="12700">
+          <a:bodyPr wrap="square" lIns="76200" rIns="76200" tIns="50800" bIns="50800">
             <a:spAutoFit/>
           </a:bodyPr>
           <a:lstStyle/>
           <a:p>
-            <a:pPr algn="ctr">
-              <a:defRPr sz="1400" b="0">
+            <a:pPr algn="l">
+              <a:spcAft>
+                <a:spcPts val="300"/>
+              </a:spcAft>
+              <a:defRPr sz="2400" b="1">
                 <a:solidFill>
                   <a:srgbClr val="FFFFFF"/>
                 </a:solidFill>
@@ -8764,7 +12814,7 @@
               </a:defRPr>
             </a:pPr>
             <a:r>
-              <a:rPr sz="1400" b="0">
+              <a:rPr sz="2400" b="1">
                 <a:solidFill>
                   <a:srgbClr val="FFFFFF"/>
                 </a:solidFill>
@@ -8772,78 +12822,15 @@
                 <a:ea typeface="Play"/>
                 <a:cs typeface="Play"/>
               </a:rPr>
-              <a:t>Четвёртый квартал 2026: доступ для всей компании</a:t>
+              <a:t>• Попросим решение о запуске на всю компанию</a:t>
             </a:r>
           </a:p>
-        </p:txBody>
-      </p:sp>
-      <p:sp>
-        <p:nvSpPr>
-          <p:cNvPr id="8" name="Oval 7"/>
-          <p:cNvSpPr/>
-          <p:nvPr/>
-        </p:nvSpPr>
-        <p:spPr>
-          <a:xfrm>
-            <a:off x="9413410" y="2957905"/>
-            <a:ext cx="883212" cy="883212"/>
-          </a:xfrm>
-          <a:prstGeom prst="ellipse">
-            <a:avLst/>
-          </a:prstGeom>
-          <a:solidFill>
-            <a:srgbClr val="0077FF"/>
-          </a:solidFill>
-          <a:ln>
-            <a:noFill/>
-          </a:ln>
-        </p:spPr>
-        <p:style>
-          <a:lnRef idx="1">
-            <a:schemeClr val="accent1"/>
-          </a:lnRef>
-          <a:fillRef idx="3">
-            <a:schemeClr val="accent1"/>
-          </a:fillRef>
-          <a:effectRef idx="2">
-            <a:schemeClr val="accent1"/>
-          </a:effectRef>
-          <a:fontRef idx="minor">
-            <a:schemeClr val="lt1"/>
-          </a:fontRef>
-        </p:style>
-        <p:txBody>
-          <a:bodyPr rtlCol="0" anchor="ctr"/>
-          <a:lstStyle/>
           <a:p>
-            <a:pPr algn="ctr"/>
-          </a:p>
-        </p:txBody>
-      </p:sp>
-      <p:sp>
-        <p:nvSpPr>
-          <p:cNvPr id="9" name="TextBox 8"/>
-          <p:cNvSpPr txBox="1"/>
-          <p:nvPr/>
-        </p:nvSpPr>
-        <p:spPr>
-          <a:xfrm>
-            <a:off x="6084722" y="1492575"/>
-            <a:ext cx="5655442" cy="1525549"/>
-          </a:xfrm>
-          <a:prstGeom prst="rect">
-            <a:avLst/>
-          </a:prstGeom>
-          <a:noFill/>
-        </p:spPr>
-        <p:txBody>
-          <a:bodyPr wrap="square" lIns="12700" rIns="12700" tIns="12700" bIns="12700">
-            <a:spAutoFit/>
-          </a:bodyPr>
-          <a:lstStyle/>
-          <a:p>
-            <a:pPr algn="ctr">
-              <a:defRPr sz="1400" b="0">
+            <a:pPr algn="l">
+              <a:spcAft>
+                <a:spcPts val="300"/>
+              </a:spcAft>
+              <a:defRPr sz="2400" b="1">
                 <a:solidFill>
                   <a:srgbClr val="FFFFFF"/>
                 </a:solidFill>
@@ -8853,7 +12840,7 @@
               </a:defRPr>
             </a:pPr>
             <a:r>
-              <a:rPr sz="1400" b="0">
+              <a:rPr sz="2400" b="1">
                 <a:solidFill>
                   <a:srgbClr val="FFFFFF"/>
                 </a:solidFill>
@@ -8861,7 +12848,33 @@
                 <a:ea typeface="Play"/>
                 <a:cs typeface="Play"/>
               </a:rPr>
-              <a:t>Первый квартал 2027: генерация иллюстраций</a:t>
+              <a:t>• Ожидаем одобрения руководства</a:t>
+            </a:r>
+          </a:p>
+          <a:p>
+            <a:pPr algn="l">
+              <a:spcAft>
+                <a:spcPts val="300"/>
+              </a:spcAft>
+              <a:defRPr sz="2400" b="1">
+                <a:solidFill>
+                  <a:srgbClr val="FFFFFF"/>
+                </a:solidFill>
+                <a:latin typeface="Play"/>
+                <a:ea typeface="Play"/>
+                <a:cs typeface="Play"/>
+              </a:defRPr>
+            </a:pPr>
+            <a:r>
+              <a:rPr sz="2400" b="1">
+                <a:solidFill>
+                  <a:srgbClr val="FFFFFF"/>
+                </a:solidFill>
+                <a:latin typeface="Play"/>
+                <a:ea typeface="Play"/>
+                <a:cs typeface="Play"/>
+              </a:rPr>
+              <a:t>• Готовы к масштабированию</a:t>
             </a:r>
           </a:p>
         </p:txBody>

--- a/samples/VK_WorkSpace_Клиентская_конференция_Шабл__classic.pptx
+++ b/samples/VK_WorkSpace_Клиентская_конференция_Шабл__classic.pptx
@@ -304,7 +304,7 @@
               <c:strCache>
                 <c:ptCount val="1"/>
                 <c:pt idx="0">
-                  <c:v>Текущее</c:v>
+                  <c:v>Время</c:v>
                 </c:pt>
               </c:strCache>
             </c:strRef>
@@ -321,35 +321,29 @@
           </c:spPr>
           <c:cat>
             <c:strRef>
-              <c:f>Sheet1!$A$2:$A$4</c:f>
+              <c:f>Sheet1!$A$2:$A$3</c:f>
               <c:strCache>
-                <c:ptCount val="3"/>
+                <c:ptCount val="2"/>
                 <c:pt idx="0">
                   <c:v>Сборка</c:v>
                 </c:pt>
                 <c:pt idx="1">
                   <c:v>Правки</c:v>
                 </c:pt>
-                <c:pt idx="2">
-                  <c:v>Ожидание</c:v>
-                </c:pt>
               </c:strCache>
             </c:strRef>
           </c:cat>
           <c:val>
             <c:numRef>
-              <c:f>Sheet1!$B$2:$B$4</c:f>
+              <c:f>Sheet1!$B$2:$B$3</c:f>
               <c:numCache>
                 <c:formatCode>General</c:formatCode>
-                <c:ptCount val="3"/>
+                <c:ptCount val="2"/>
                 <c:pt idx="0">
                   <c:v>186.0</c:v>
                 </c:pt>
                 <c:pt idx="1">
                   <c:v>74.0</c:v>
-                </c:pt>
-                <c:pt idx="2">
-                  <c:v>6.0</c:v>
                 </c:pt>
               </c:numCache>
             </c:numRef>
@@ -450,7 +444,7 @@
                   </a:defRPr>
                 </a:pPr>
                 <a:r>
-                  <a:t>Текущее, мин</a:t>
+                  <a:t>Время, мин</a:t>
                 </a:r>
               </a:p>
             </c:rich>
@@ -524,7 +518,7 @@
               <c:strCache>
                 <c:ptCount val="1"/>
                 <c:pt idx="0">
-                  <c:v>До</c:v>
+                  <c:v>Текущее</c:v>
                 </c:pt>
               </c:strCache>
             </c:strRef>
@@ -541,41 +535,29 @@
           </c:spPr>
           <c:cat>
             <c:strRef>
-              <c:f>Sheet1!$A$2:$A$5</c:f>
+              <c:f>Sheet1!$A$2:$A$3</c:f>
               <c:strCache>
-                <c:ptCount val="4"/>
+                <c:ptCount val="2"/>
                 <c:pt idx="0">
-                  <c:v>Время сборки</c:v>
+                  <c:v>Сборка</c:v>
                 </c:pt>
                 <c:pt idx="1">
-                  <c:v>Время до первой версии</c:v>
-                </c:pt>
-                <c:pt idx="2">
-                  <c:v>Нарушения стиля</c:v>
-                </c:pt>
-                <c:pt idx="3">
-                  <c:v>Запросы закрыты</c:v>
+                  <c:v>Первая версия</c:v>
                 </c:pt>
               </c:strCache>
             </c:strRef>
           </c:cat>
           <c:val>
             <c:numRef>
-              <c:f>Sheet1!$B$2:$B$5</c:f>
+              <c:f>Sheet1!$B$2:$B$3</c:f>
               <c:numCache>
                 <c:formatCode>General</c:formatCode>
-                <c:ptCount val="4"/>
+                <c:ptCount val="2"/>
                 <c:pt idx="0">
                   <c:v>186.0</c:v>
                 </c:pt>
                 <c:pt idx="1">
                   <c:v>6.0</c:v>
-                </c:pt>
-                <c:pt idx="2">
-                  <c:v>19.0</c:v>
-                </c:pt>
-                <c:pt idx="3">
-                  <c:v>11.0</c:v>
                 </c:pt>
               </c:numCache>
             </c:numRef>
@@ -590,7 +572,7 @@
               <c:strCache>
                 <c:ptCount val="1"/>
                 <c:pt idx="0">
-                  <c:v>После</c:v>
+                  <c:v>Пилот</c:v>
                 </c:pt>
               </c:strCache>
             </c:strRef>
@@ -607,48 +589,36 @@
           </c:spPr>
           <c:cat>
             <c:strRef>
-              <c:f>Sheet1!$A$2:$A$5</c:f>
+              <c:f>Sheet1!$A$2:$A$3</c:f>
               <c:strCache>
-                <c:ptCount val="4"/>
+                <c:ptCount val="2"/>
                 <c:pt idx="0">
-                  <c:v>Время сборки</c:v>
+                  <c:v>Сборка</c:v>
                 </c:pt>
                 <c:pt idx="1">
-                  <c:v>Время до первой версии</c:v>
-                </c:pt>
-                <c:pt idx="2">
-                  <c:v>Нарушения стиля</c:v>
-                </c:pt>
-                <c:pt idx="3">
-                  <c:v>Запросы закрыты</c:v>
+                  <c:v>Первая версия</c:v>
                 </c:pt>
               </c:strCache>
             </c:strRef>
           </c:cat>
           <c:val>
             <c:numRef>
-              <c:f>Sheet1!$C$2:$C$5</c:f>
+              <c:f>Sheet1!$C$2:$C$3</c:f>
               <c:numCache>
                 <c:formatCode>General</c:formatCode>
-                <c:ptCount val="4"/>
+                <c:ptCount val="2"/>
                 <c:pt idx="0">
                   <c:v>4.0</c:v>
                 </c:pt>
                 <c:pt idx="1">
                   <c:v>1.0</c:v>
                 </c:pt>
-                <c:pt idx="2">
-                  <c:v>2.0</c:v>
-                </c:pt>
-                <c:pt idx="3">
-                  <c:v>38.0</c:v>
-                </c:pt>
               </c:numCache>
             </c:numRef>
           </c:val>
         </c:ser>
         <c:dLbls>
-          <c:numFmt formatCode="0" sourceLinked="0"/>
+          <c:numFmt formatCode="0&quot; мин&quot;" sourceLinked="0"/>
           <c:txPr>
             <a:bodyPr wrap="none"/>
             <a:lstStyle/>
@@ -725,6 +695,31 @@
             </a:ln>
           </c:spPr>
         </c:majorGridlines>
+        <c:title>
+          <c:tx>
+            <c:rich>
+              <a:bodyPr rot="0" vert="horz"/>
+              <a:lstStyle/>
+              <a:p>
+                <a:pPr>
+                  <a:defRPr sz="1100" b="0">
+                    <a:solidFill>
+                      <a:srgbClr val="FFFFFF"/>
+                    </a:solidFill>
+                    <a:latin typeface="Play"/>
+                    <a:ea typeface="Play"/>
+                    <a:cs typeface="Play"/>
+                  </a:defRPr>
+                </a:pPr>
+                <a:r>
+                  <a:t>мин</a:t>
+                </a:r>
+              </a:p>
+            </c:rich>
+          </c:tx>
+          <c:layout/>
+          <c:overlay val="0"/>
+        </c:title>
         <c:majorTickMark val="out"/>
         <c:minorTickMark val="none"/>
         <c:tickLblPos val="nextTo"/>
@@ -752,6 +747,220 @@
       <c:legendPos val="b"/>
       <c:overlay val="0"/>
     </c:legend>
+    <c:dispBlanksAs val="gap"/>
+  </c:chart>
+  <c:txPr>
+    <a:bodyPr/>
+    <a:lstStyle/>
+    <a:p>
+      <a:pPr>
+        <a:defRPr sz="1200" b="0">
+          <a:solidFill>
+            <a:srgbClr val="FFFFFF"/>
+          </a:solidFill>
+          <a:latin typeface="Play"/>
+          <a:ea typeface="Play"/>
+          <a:cs typeface="Play"/>
+        </a:defRPr>
+      </a:pPr>
+      <a:endParaRPr lang="en-US"/>
+    </a:p>
+  </c:txPr>
+  <c:externalData r:id="rId1">
+    <c:autoUpdate val="0"/>
+  </c:externalData>
+</c:chartSpace>
+</file>
+
+<file path=ppt/charts/chart3.xml><?xml version="1.0" encoding="utf-8"?>
+<c:chartSpace xmlns:c="http://schemas.openxmlformats.org/drawingml/2006/chart" xmlns:a="http://schemas.openxmlformats.org/drawingml/2006/main" xmlns:r="http://schemas.openxmlformats.org/officeDocument/2006/relationships">
+  <c:date1904 val="0"/>
+  <c:chart>
+    <c:autoTitleDeleted val="1"/>
+    <c:plotArea>
+      <c:barChart>
+        <c:barDir val="col"/>
+        <c:grouping val="clustered"/>
+        <c:ser>
+          <c:idx val="0"/>
+          <c:order val="0"/>
+          <c:tx>
+            <c:strRef>
+              <c:f>Sheet1!$B$1</c:f>
+              <c:strCache>
+                <c:ptCount val="1"/>
+                <c:pt idx="0">
+                  <c:v>Запросы</c:v>
+                </c:pt>
+              </c:strCache>
+            </c:strRef>
+          </c:tx>
+          <c:spPr>
+            <a:solidFill>
+              <a:srgbClr val="0077FF"/>
+            </a:solidFill>
+            <a:ln>
+              <a:solidFill>
+                <a:srgbClr val="0077FF"/>
+              </a:solidFill>
+            </a:ln>
+          </c:spPr>
+          <c:cat>
+            <c:strRef>
+              <c:f>Sheet1!$A$2:$A$3</c:f>
+              <c:strCache>
+                <c:ptCount val="2"/>
+                <c:pt idx="0">
+                  <c:v>Текущая</c:v>
+                </c:pt>
+                <c:pt idx="1">
+                  <c:v>Пилот</c:v>
+                </c:pt>
+              </c:strCache>
+            </c:strRef>
+          </c:cat>
+          <c:val>
+            <c:numRef>
+              <c:f>Sheet1!$B$2:$B$3</c:f>
+              <c:numCache>
+                <c:formatCode>General</c:formatCode>
+                <c:ptCount val="2"/>
+                <c:pt idx="0">
+                  <c:v>11.0</c:v>
+                </c:pt>
+                <c:pt idx="1">
+                  <c:v>38.0</c:v>
+                </c:pt>
+              </c:numCache>
+            </c:numRef>
+          </c:val>
+        </c:ser>
+        <c:dLbls>
+          <c:numFmt formatCode="0&quot; запросов&quot;" sourceLinked="0"/>
+          <c:txPr>
+            <a:bodyPr wrap="none"/>
+            <a:lstStyle/>
+            <a:p>
+              <a:pPr>
+                <a:defRPr sz="1100" b="0">
+                  <a:solidFill>
+                    <a:srgbClr val="FFFFFF"/>
+                  </a:solidFill>
+                  <a:latin typeface="Play"/>
+                  <a:ea typeface="Play"/>
+                  <a:cs typeface="Play"/>
+                </a:defRPr>
+              </a:pPr>
+            </a:p>
+          </c:txPr>
+          <c:dLblPos val="outEnd"/>
+          <c:showLegendKey val="0"/>
+          <c:showVal val="1"/>
+          <c:showCatName val="0"/>
+          <c:showSerName val="0"/>
+          <c:showPercent val="0"/>
+          <c:showBubbleSize val="0"/>
+          <c:showLeaderLines val="1"/>
+        </c:dLbls>
+        <c:gapWidth val="60"/>
+        <c:axId val="-2068027336"/>
+        <c:axId val="-2113994440"/>
+      </c:barChart>
+      <c:catAx>
+        <c:axId val="-2068027336"/>
+        <c:scaling>
+          <c:orientation val="minMax"/>
+        </c:scaling>
+        <c:delete val="0"/>
+        <c:axPos val="b"/>
+        <c:majorTickMark val="out"/>
+        <c:minorTickMark val="none"/>
+        <c:tickLblPos val="nextTo"/>
+        <c:txPr>
+          <a:bodyPr/>
+          <a:lstStyle/>
+          <a:p>
+            <a:pPr>
+              <a:defRPr sz="1100" b="0">
+                <a:solidFill>
+                  <a:srgbClr val="FFFFFF"/>
+                </a:solidFill>
+                <a:latin typeface="Play"/>
+                <a:ea typeface="Play"/>
+                <a:cs typeface="Play"/>
+              </a:defRPr>
+            </a:pPr>
+          </a:p>
+        </c:txPr>
+        <c:crossAx val="-2113994440"/>
+        <c:crosses val="autoZero"/>
+        <c:auto val="1"/>
+        <c:lblAlgn val="ctr"/>
+        <c:lblOffset val="100"/>
+        <c:noMultiLvlLbl val="0"/>
+      </c:catAx>
+      <c:valAx>
+        <c:axId val="-2113994440"/>
+        <c:scaling/>
+        <c:delete val="0"/>
+        <c:axPos val="l"/>
+        <c:majorGridlines>
+          <c:spPr>
+            <a:ln w="9525">
+              <a:solidFill>
+                <a:srgbClr val="3C3C3C"/>
+              </a:solidFill>
+            </a:ln>
+          </c:spPr>
+        </c:majorGridlines>
+        <c:title>
+          <c:tx>
+            <c:rich>
+              <a:bodyPr rot="0" vert="horz"/>
+              <a:lstStyle/>
+              <a:p>
+                <a:pPr>
+                  <a:defRPr sz="1100" b="0">
+                    <a:solidFill>
+                      <a:srgbClr val="FFFFFF"/>
+                    </a:solidFill>
+                    <a:latin typeface="Play"/>
+                    <a:ea typeface="Play"/>
+                    <a:cs typeface="Play"/>
+                  </a:defRPr>
+                </a:pPr>
+                <a:r>
+                  <a:t>Запросы, запросов</a:t>
+                </a:r>
+              </a:p>
+            </c:rich>
+          </c:tx>
+          <c:layout/>
+          <c:overlay val="0"/>
+        </c:title>
+        <c:majorTickMark val="out"/>
+        <c:minorTickMark val="none"/>
+        <c:tickLblPos val="nextTo"/>
+        <c:txPr>
+          <a:bodyPr/>
+          <a:lstStyle/>
+          <a:p>
+            <a:pPr>
+              <a:defRPr sz="1100" b="0">
+                <a:solidFill>
+                  <a:srgbClr val="FFFFFF"/>
+                </a:solidFill>
+                <a:latin typeface="Play"/>
+                <a:ea typeface="Play"/>
+                <a:cs typeface="Play"/>
+              </a:defRPr>
+            </a:pPr>
+          </a:p>
+        </c:txPr>
+        <c:crossAx val="-2068027336"/>
+        <c:crosses val="autoZero"/>
+      </c:valAx>
+    </c:plotArea>
     <c:dispBlanksAs val="gap"/>
   </c:chart>
   <c:txPr>
@@ -6990,799 +7199,6 @@
 </p:sldLayout>
 </file>
 
-<file path=ppt/slideLayouts/slideLayout9.xml><?xml version="1.0" encoding="utf-8"?>
-<p:sldLayout xmlns:a="http://schemas.openxmlformats.org/drawingml/2006/main" xmlns:r="http://schemas.openxmlformats.org/officeDocument/2006/relationships" xmlns:mc="http://schemas.openxmlformats.org/markup-compatibility/2006" xmlns:mv="urn:schemas-microsoft-com:mac:vml" xmlns:p="http://schemas.openxmlformats.org/presentationml/2006/main" xmlns:c="http://schemas.openxmlformats.org/drawingml/2006/chart" xmlns:dgm="http://schemas.openxmlformats.org/drawingml/2006/diagram" xmlns:o="urn:schemas-microsoft-com:office:office" xmlns:v="urn:schemas-microsoft-com:vml" xmlns:pvml="urn:schemas-microsoft-com:office:powerpoint" xmlns:com="http://schemas.openxmlformats.org/drawingml/2006/compatibility" xmlns:p14="http://schemas.microsoft.com/office/powerpoint/2010/main" xmlns:p15="http://schemas.microsoft.com/office/powerpoint/2012/main" xmlns:ahyp="http://schemas.microsoft.com/office/drawing/2018/hyperlinkcolor" matchingName="14_Титульный слайд">
-  <p:cSld name="14_Титульный слайд">
-    <p:bg>
-      <p:bgPr>
-        <a:solidFill>
-          <a:schemeClr val="dk1"/>
-        </a:solidFill>
-      </p:bgPr>
-    </p:bg>
-    <p:spTree>
-      <p:nvGrpSpPr>
-        <p:cNvPr id="234" name="Shape 234"/>
-        <p:cNvGrpSpPr/>
-        <p:nvPr/>
-      </p:nvGrpSpPr>
-      <p:grpSpPr>
-        <a:xfrm>
-          <a:off x="0" y="0"/>
-          <a:ext cx="0" cy="0"/>
-          <a:chOff x="0" y="0"/>
-          <a:chExt cx="0" cy="0"/>
-        </a:xfrm>
-      </p:grpSpPr>
-      <p:pic>
-        <p:nvPicPr>
-          <p:cNvPr descr=" " id="235" name="Google Shape;235;p10"/>
-          <p:cNvPicPr preferRelativeResize="0"/>
-          <p:nvPr/>
-        </p:nvPicPr>
-        <p:blipFill rotWithShape="1">
-          <a:blip r:embed="rId2">
-            <a:alphaModFix/>
-          </a:blip>
-          <a:srcRect b="0" l="0" r="0" t="0"/>
-          <a:stretch/>
-        </p:blipFill>
-        <p:spPr>
-          <a:xfrm>
-            <a:off x="6096000" y="5844358"/>
-            <a:ext cx="6096000" cy="1013642"/>
-          </a:xfrm>
-          <a:prstGeom prst="rect">
-            <a:avLst/>
-          </a:prstGeom>
-          <a:noFill/>
-          <a:ln>
-            <a:noFill/>
-          </a:ln>
-        </p:spPr>
-      </p:pic>
-      <p:grpSp>
-        <p:nvGrpSpPr>
-          <p:cNvPr id="236" name="Google Shape;236;p10"/>
-          <p:cNvGrpSpPr/>
-          <p:nvPr/>
-        </p:nvGrpSpPr>
-        <p:grpSpPr>
-          <a:xfrm>
-            <a:off x="224842" y="-74145"/>
-            <a:ext cx="12188171" cy="64326"/>
-            <a:chOff x="-2" y="-2"/>
-            <a:chExt cx="12188169" cy="64324"/>
-          </a:xfrm>
-        </p:grpSpPr>
-        <p:cxnSp>
-          <p:nvCxnSpPr>
-            <p:cNvPr id="237" name="Google Shape;237;p10"/>
-            <p:cNvCxnSpPr/>
-            <p:nvPr/>
-          </p:nvCxnSpPr>
-          <p:spPr>
-            <a:xfrm flipH="1">
-              <a:off x="-2" y="-2"/>
-              <a:ext cx="7" cy="64324"/>
-            </a:xfrm>
-            <a:prstGeom prst="straightConnector1">
-              <a:avLst/>
-            </a:prstGeom>
-            <a:noFill/>
-            <a:ln cap="flat" cmpd="sng" w="9525">
-              <a:solidFill>
-                <a:srgbClr val="808080"/>
-              </a:solidFill>
-              <a:prstDash val="solid"/>
-              <a:miter lim="8000"/>
-              <a:headEnd len="sm" w="sm" type="none"/>
-              <a:tailEnd len="sm" w="sm" type="none"/>
-            </a:ln>
-          </p:spPr>
-        </p:cxnSp>
-        <p:cxnSp>
-          <p:nvCxnSpPr>
-            <p:cNvPr id="238" name="Google Shape;238;p10"/>
-            <p:cNvCxnSpPr/>
-            <p:nvPr/>
-          </p:nvCxnSpPr>
-          <p:spPr>
-            <a:xfrm>
-              <a:off x="677118" y="-2"/>
-              <a:ext cx="7" cy="64324"/>
-            </a:xfrm>
-            <a:prstGeom prst="straightConnector1">
-              <a:avLst/>
-            </a:prstGeom>
-            <a:noFill/>
-            <a:ln cap="flat" cmpd="sng" w="9525">
-              <a:solidFill>
-                <a:srgbClr val="808080"/>
-              </a:solidFill>
-              <a:prstDash val="solid"/>
-              <a:miter lim="8000"/>
-              <a:headEnd len="sm" w="sm" type="none"/>
-              <a:tailEnd len="sm" w="sm" type="none"/>
-            </a:ln>
-          </p:spPr>
-        </p:cxnSp>
-        <p:cxnSp>
-          <p:nvCxnSpPr>
-            <p:cNvPr id="239" name="Google Shape;239;p10"/>
-            <p:cNvCxnSpPr/>
-            <p:nvPr/>
-          </p:nvCxnSpPr>
-          <p:spPr>
-            <a:xfrm>
-              <a:off x="1354241" y="-2"/>
-              <a:ext cx="7" cy="64324"/>
-            </a:xfrm>
-            <a:prstGeom prst="straightConnector1">
-              <a:avLst/>
-            </a:prstGeom>
-            <a:noFill/>
-            <a:ln cap="flat" cmpd="sng" w="9525">
-              <a:solidFill>
-                <a:srgbClr val="808080"/>
-              </a:solidFill>
-              <a:prstDash val="solid"/>
-              <a:miter lim="8000"/>
-              <a:headEnd len="sm" w="sm" type="none"/>
-              <a:tailEnd len="sm" w="sm" type="none"/>
-            </a:ln>
-          </p:spPr>
-        </p:cxnSp>
-        <p:cxnSp>
-          <p:nvCxnSpPr>
-            <p:cNvPr id="240" name="Google Shape;240;p10"/>
-            <p:cNvCxnSpPr/>
-            <p:nvPr/>
-          </p:nvCxnSpPr>
-          <p:spPr>
-            <a:xfrm>
-              <a:off x="2031360" y="-2"/>
-              <a:ext cx="7" cy="64324"/>
-            </a:xfrm>
-            <a:prstGeom prst="straightConnector1">
-              <a:avLst/>
-            </a:prstGeom>
-            <a:noFill/>
-            <a:ln cap="flat" cmpd="sng" w="9525">
-              <a:solidFill>
-                <a:srgbClr val="808080"/>
-              </a:solidFill>
-              <a:prstDash val="solid"/>
-              <a:miter lim="8000"/>
-              <a:headEnd len="sm" w="sm" type="none"/>
-              <a:tailEnd len="sm" w="sm" type="none"/>
-            </a:ln>
-          </p:spPr>
-        </p:cxnSp>
-        <p:cxnSp>
-          <p:nvCxnSpPr>
-            <p:cNvPr id="241" name="Google Shape;241;p10"/>
-            <p:cNvCxnSpPr/>
-            <p:nvPr/>
-          </p:nvCxnSpPr>
-          <p:spPr>
-            <a:xfrm>
-              <a:off x="2708479" y="-2"/>
-              <a:ext cx="7" cy="64324"/>
-            </a:xfrm>
-            <a:prstGeom prst="straightConnector1">
-              <a:avLst/>
-            </a:prstGeom>
-            <a:noFill/>
-            <a:ln cap="flat" cmpd="sng" w="9525">
-              <a:solidFill>
-                <a:srgbClr val="808080"/>
-              </a:solidFill>
-              <a:prstDash val="solid"/>
-              <a:miter lim="8000"/>
-              <a:headEnd len="sm" w="sm" type="none"/>
-              <a:tailEnd len="sm" w="sm" type="none"/>
-            </a:ln>
-          </p:spPr>
-        </p:cxnSp>
-        <p:cxnSp>
-          <p:nvCxnSpPr>
-            <p:cNvPr id="242" name="Google Shape;242;p10"/>
-            <p:cNvCxnSpPr/>
-            <p:nvPr/>
-          </p:nvCxnSpPr>
-          <p:spPr>
-            <a:xfrm>
-              <a:off x="3385598" y="-2"/>
-              <a:ext cx="7" cy="64324"/>
-            </a:xfrm>
-            <a:prstGeom prst="straightConnector1">
-              <a:avLst/>
-            </a:prstGeom>
-            <a:noFill/>
-            <a:ln cap="flat" cmpd="sng" w="9525">
-              <a:solidFill>
-                <a:srgbClr val="808080"/>
-              </a:solidFill>
-              <a:prstDash val="solid"/>
-              <a:miter lim="8000"/>
-              <a:headEnd len="sm" w="sm" type="none"/>
-              <a:tailEnd len="sm" w="sm" type="none"/>
-            </a:ln>
-          </p:spPr>
-        </p:cxnSp>
-        <p:cxnSp>
-          <p:nvCxnSpPr>
-            <p:cNvPr id="243" name="Google Shape;243;p10"/>
-            <p:cNvCxnSpPr/>
-            <p:nvPr/>
-          </p:nvCxnSpPr>
-          <p:spPr>
-            <a:xfrm>
-              <a:off x="4062717" y="-2"/>
-              <a:ext cx="7" cy="64324"/>
-            </a:xfrm>
-            <a:prstGeom prst="straightConnector1">
-              <a:avLst/>
-            </a:prstGeom>
-            <a:noFill/>
-            <a:ln cap="flat" cmpd="sng" w="9525">
-              <a:solidFill>
-                <a:srgbClr val="808080"/>
-              </a:solidFill>
-              <a:prstDash val="solid"/>
-              <a:miter lim="8000"/>
-              <a:headEnd len="sm" w="sm" type="none"/>
-              <a:tailEnd len="sm" w="sm" type="none"/>
-            </a:ln>
-          </p:spPr>
-        </p:cxnSp>
-        <p:cxnSp>
-          <p:nvCxnSpPr>
-            <p:cNvPr id="244" name="Google Shape;244;p10"/>
-            <p:cNvCxnSpPr/>
-            <p:nvPr/>
-          </p:nvCxnSpPr>
-          <p:spPr>
-            <a:xfrm>
-              <a:off x="4739836" y="-2"/>
-              <a:ext cx="7" cy="64324"/>
-            </a:xfrm>
-            <a:prstGeom prst="straightConnector1">
-              <a:avLst/>
-            </a:prstGeom>
-            <a:noFill/>
-            <a:ln cap="flat" cmpd="sng" w="9525">
-              <a:solidFill>
-                <a:srgbClr val="808080"/>
-              </a:solidFill>
-              <a:prstDash val="solid"/>
-              <a:miter lim="8000"/>
-              <a:headEnd len="sm" w="sm" type="none"/>
-              <a:tailEnd len="sm" w="sm" type="none"/>
-            </a:ln>
-          </p:spPr>
-        </p:cxnSp>
-        <p:cxnSp>
-          <p:nvCxnSpPr>
-            <p:cNvPr id="245" name="Google Shape;245;p10"/>
-            <p:cNvCxnSpPr/>
-            <p:nvPr/>
-          </p:nvCxnSpPr>
-          <p:spPr>
-            <a:xfrm>
-              <a:off x="5416955" y="-2"/>
-              <a:ext cx="7" cy="64324"/>
-            </a:xfrm>
-            <a:prstGeom prst="straightConnector1">
-              <a:avLst/>
-            </a:prstGeom>
-            <a:noFill/>
-            <a:ln cap="flat" cmpd="sng" w="9525">
-              <a:solidFill>
-                <a:srgbClr val="808080"/>
-              </a:solidFill>
-              <a:prstDash val="solid"/>
-              <a:miter lim="8000"/>
-              <a:headEnd len="sm" w="sm" type="none"/>
-              <a:tailEnd len="sm" w="sm" type="none"/>
-            </a:ln>
-          </p:spPr>
-        </p:cxnSp>
-        <p:cxnSp>
-          <p:nvCxnSpPr>
-            <p:cNvPr id="246" name="Google Shape;246;p10"/>
-            <p:cNvCxnSpPr/>
-            <p:nvPr/>
-          </p:nvCxnSpPr>
-          <p:spPr>
-            <a:xfrm>
-              <a:off x="6094077" y="-2"/>
-              <a:ext cx="7" cy="64324"/>
-            </a:xfrm>
-            <a:prstGeom prst="straightConnector1">
-              <a:avLst/>
-            </a:prstGeom>
-            <a:noFill/>
-            <a:ln cap="flat" cmpd="sng" w="9525">
-              <a:solidFill>
-                <a:srgbClr val="808080"/>
-              </a:solidFill>
-              <a:prstDash val="solid"/>
-              <a:miter lim="8000"/>
-              <a:headEnd len="sm" w="sm" type="none"/>
-              <a:tailEnd len="sm" w="sm" type="none"/>
-            </a:ln>
-          </p:spPr>
-        </p:cxnSp>
-        <p:cxnSp>
-          <p:nvCxnSpPr>
-            <p:cNvPr id="247" name="Google Shape;247;p10"/>
-            <p:cNvCxnSpPr/>
-            <p:nvPr/>
-          </p:nvCxnSpPr>
-          <p:spPr>
-            <a:xfrm>
-              <a:off x="6771195" y="-2"/>
-              <a:ext cx="7" cy="64324"/>
-            </a:xfrm>
-            <a:prstGeom prst="straightConnector1">
-              <a:avLst/>
-            </a:prstGeom>
-            <a:noFill/>
-            <a:ln cap="flat" cmpd="sng" w="9525">
-              <a:solidFill>
-                <a:srgbClr val="808080"/>
-              </a:solidFill>
-              <a:prstDash val="solid"/>
-              <a:miter lim="8000"/>
-              <a:headEnd len="sm" w="sm" type="none"/>
-              <a:tailEnd len="sm" w="sm" type="none"/>
-            </a:ln>
-          </p:spPr>
-        </p:cxnSp>
-        <p:cxnSp>
-          <p:nvCxnSpPr>
-            <p:cNvPr id="248" name="Google Shape;248;p10"/>
-            <p:cNvCxnSpPr/>
-            <p:nvPr/>
-          </p:nvCxnSpPr>
-          <p:spPr>
-            <a:xfrm>
-              <a:off x="7448315" y="-2"/>
-              <a:ext cx="7" cy="64324"/>
-            </a:xfrm>
-            <a:prstGeom prst="straightConnector1">
-              <a:avLst/>
-            </a:prstGeom>
-            <a:noFill/>
-            <a:ln cap="flat" cmpd="sng" w="9525">
-              <a:solidFill>
-                <a:srgbClr val="808080"/>
-              </a:solidFill>
-              <a:prstDash val="solid"/>
-              <a:miter lim="8000"/>
-              <a:headEnd len="sm" w="sm" type="none"/>
-              <a:tailEnd len="sm" w="sm" type="none"/>
-            </a:ln>
-          </p:spPr>
-        </p:cxnSp>
-        <p:cxnSp>
-          <p:nvCxnSpPr>
-            <p:cNvPr id="249" name="Google Shape;249;p10"/>
-            <p:cNvCxnSpPr/>
-            <p:nvPr/>
-          </p:nvCxnSpPr>
-          <p:spPr>
-            <a:xfrm>
-              <a:off x="8125435" y="-2"/>
-              <a:ext cx="7" cy="64324"/>
-            </a:xfrm>
-            <a:prstGeom prst="straightConnector1">
-              <a:avLst/>
-            </a:prstGeom>
-            <a:noFill/>
-            <a:ln cap="flat" cmpd="sng" w="9525">
-              <a:solidFill>
-                <a:srgbClr val="808080"/>
-              </a:solidFill>
-              <a:prstDash val="solid"/>
-              <a:miter lim="8000"/>
-              <a:headEnd len="sm" w="sm" type="none"/>
-              <a:tailEnd len="sm" w="sm" type="none"/>
-            </a:ln>
-          </p:spPr>
-        </p:cxnSp>
-        <p:cxnSp>
-          <p:nvCxnSpPr>
-            <p:cNvPr id="250" name="Google Shape;250;p10"/>
-            <p:cNvCxnSpPr/>
-            <p:nvPr/>
-          </p:nvCxnSpPr>
-          <p:spPr>
-            <a:xfrm>
-              <a:off x="8802554" y="-2"/>
-              <a:ext cx="7" cy="64324"/>
-            </a:xfrm>
-            <a:prstGeom prst="straightConnector1">
-              <a:avLst/>
-            </a:prstGeom>
-            <a:noFill/>
-            <a:ln cap="flat" cmpd="sng" w="9525">
-              <a:solidFill>
-                <a:srgbClr val="808080"/>
-              </a:solidFill>
-              <a:prstDash val="solid"/>
-              <a:miter lim="8000"/>
-              <a:headEnd len="sm" w="sm" type="none"/>
-              <a:tailEnd len="sm" w="sm" type="none"/>
-            </a:ln>
-          </p:spPr>
-        </p:cxnSp>
-        <p:cxnSp>
-          <p:nvCxnSpPr>
-            <p:cNvPr id="251" name="Google Shape;251;p10"/>
-            <p:cNvCxnSpPr/>
-            <p:nvPr/>
-          </p:nvCxnSpPr>
-          <p:spPr>
-            <a:xfrm>
-              <a:off x="9479673" y="-2"/>
-              <a:ext cx="7" cy="64324"/>
-            </a:xfrm>
-            <a:prstGeom prst="straightConnector1">
-              <a:avLst/>
-            </a:prstGeom>
-            <a:noFill/>
-            <a:ln cap="flat" cmpd="sng" w="9525">
-              <a:solidFill>
-                <a:srgbClr val="808080"/>
-              </a:solidFill>
-              <a:prstDash val="solid"/>
-              <a:miter lim="8000"/>
-              <a:headEnd len="sm" w="sm" type="none"/>
-              <a:tailEnd len="sm" w="sm" type="none"/>
-            </a:ln>
-          </p:spPr>
-        </p:cxnSp>
-        <p:cxnSp>
-          <p:nvCxnSpPr>
-            <p:cNvPr id="252" name="Google Shape;252;p10"/>
-            <p:cNvCxnSpPr/>
-            <p:nvPr/>
-          </p:nvCxnSpPr>
-          <p:spPr>
-            <a:xfrm>
-              <a:off x="10156792" y="-2"/>
-              <a:ext cx="7" cy="64324"/>
-            </a:xfrm>
-            <a:prstGeom prst="straightConnector1">
-              <a:avLst/>
-            </a:prstGeom>
-            <a:noFill/>
-            <a:ln cap="flat" cmpd="sng" w="9525">
-              <a:solidFill>
-                <a:srgbClr val="808080"/>
-              </a:solidFill>
-              <a:prstDash val="solid"/>
-              <a:miter lim="8000"/>
-              <a:headEnd len="sm" w="sm" type="none"/>
-              <a:tailEnd len="sm" w="sm" type="none"/>
-            </a:ln>
-          </p:spPr>
-        </p:cxnSp>
-        <p:cxnSp>
-          <p:nvCxnSpPr>
-            <p:cNvPr id="253" name="Google Shape;253;p10"/>
-            <p:cNvCxnSpPr/>
-            <p:nvPr/>
-          </p:nvCxnSpPr>
-          <p:spPr>
-            <a:xfrm>
-              <a:off x="10833914" y="-2"/>
-              <a:ext cx="7" cy="64324"/>
-            </a:xfrm>
-            <a:prstGeom prst="straightConnector1">
-              <a:avLst/>
-            </a:prstGeom>
-            <a:noFill/>
-            <a:ln cap="flat" cmpd="sng" w="9525">
-              <a:solidFill>
-                <a:srgbClr val="808080"/>
-              </a:solidFill>
-              <a:prstDash val="solid"/>
-              <a:miter lim="8000"/>
-              <a:headEnd len="sm" w="sm" type="none"/>
-              <a:tailEnd len="sm" w="sm" type="none"/>
-            </a:ln>
-          </p:spPr>
-        </p:cxnSp>
-        <p:cxnSp>
-          <p:nvCxnSpPr>
-            <p:cNvPr id="254" name="Google Shape;254;p10"/>
-            <p:cNvCxnSpPr/>
-            <p:nvPr/>
-          </p:nvCxnSpPr>
-          <p:spPr>
-            <a:xfrm>
-              <a:off x="11511034" y="-2"/>
-              <a:ext cx="7" cy="64324"/>
-            </a:xfrm>
-            <a:prstGeom prst="straightConnector1">
-              <a:avLst/>
-            </a:prstGeom>
-            <a:noFill/>
-            <a:ln cap="flat" cmpd="sng" w="9525">
-              <a:solidFill>
-                <a:srgbClr val="808080"/>
-              </a:solidFill>
-              <a:prstDash val="solid"/>
-              <a:miter lim="8000"/>
-              <a:headEnd len="sm" w="sm" type="none"/>
-              <a:tailEnd len="sm" w="sm" type="none"/>
-            </a:ln>
-          </p:spPr>
-        </p:cxnSp>
-        <p:cxnSp>
-          <p:nvCxnSpPr>
-            <p:cNvPr id="255" name="Google Shape;255;p10"/>
-            <p:cNvCxnSpPr/>
-            <p:nvPr/>
-          </p:nvCxnSpPr>
-          <p:spPr>
-            <a:xfrm>
-              <a:off x="12188160" y="-2"/>
-              <a:ext cx="7" cy="64324"/>
-            </a:xfrm>
-            <a:prstGeom prst="straightConnector1">
-              <a:avLst/>
-            </a:prstGeom>
-            <a:noFill/>
-            <a:ln cap="flat" cmpd="sng" w="9525">
-              <a:solidFill>
-                <a:srgbClr val="808080"/>
-              </a:solidFill>
-              <a:prstDash val="solid"/>
-              <a:miter lim="8000"/>
-              <a:headEnd len="sm" w="sm" type="none"/>
-              <a:tailEnd len="sm" w="sm" type="none"/>
-            </a:ln>
-          </p:spPr>
-        </p:cxnSp>
-      </p:grpSp>
-      <p:sp>
-        <p:nvSpPr>
-          <p:cNvPr id="256" name="Google Shape;256;p10"/>
-          <p:cNvSpPr txBox="1"/>
-          <p:nvPr>
-            <p:ph type="title"/>
-          </p:nvPr>
-        </p:nvSpPr>
-        <p:spPr>
-          <a:xfrm>
-            <a:off x="429253" y="424691"/>
-            <a:ext cx="7827311" cy="1167572"/>
-          </a:xfrm>
-          <a:prstGeom prst="rect">
-            <a:avLst/>
-          </a:prstGeom>
-          <a:noFill/>
-          <a:ln>
-            <a:noFill/>
-          </a:ln>
-        </p:spPr>
-        <p:txBody>
-          <a:bodyPr anchorCtr="0" anchor="t" bIns="0" lIns="0" spcFirstLastPara="1" rIns="0" wrap="square" tIns="0">
-            <a:noAutofit/>
-          </a:bodyPr>
-          <a:lstStyle>
-            <a:lvl1pPr lvl="0" algn="l">
-              <a:lnSpc>
-                <a:spcPct val="90000"/>
-              </a:lnSpc>
-              <a:spcBef>
-                <a:spcPts val="0"/>
-              </a:spcBef>
-              <a:spcAft>
-                <a:spcPts val="0"/>
-              </a:spcAft>
-              <a:buClr>
-                <a:schemeClr val="lt1"/>
-              </a:buClr>
-              <a:buSzPts val="3600"/>
-              <a:buFont typeface="Play"/>
-              <a:buNone/>
-              <a:defRPr b="0" i="0" sz="3600">
-                <a:solidFill>
-                  <a:schemeClr val="lt1"/>
-                </a:solidFill>
-                <a:latin typeface="Play"/>
-                <a:ea typeface="Play"/>
-                <a:cs typeface="Play"/>
-                <a:sym typeface="Play"/>
-              </a:defRPr>
-            </a:lvl1pPr>
-            <a:lvl2pPr lvl="1">
-              <a:spcBef>
-                <a:spcPts val="0"/>
-              </a:spcBef>
-              <a:spcAft>
-                <a:spcPts val="0"/>
-              </a:spcAft>
-              <a:buSzPts val="1400"/>
-              <a:buNone/>
-              <a:defRPr/>
-            </a:lvl2pPr>
-            <a:lvl3pPr lvl="2">
-              <a:spcBef>
-                <a:spcPts val="0"/>
-              </a:spcBef>
-              <a:spcAft>
-                <a:spcPts val="0"/>
-              </a:spcAft>
-              <a:buSzPts val="1400"/>
-              <a:buNone/>
-              <a:defRPr/>
-            </a:lvl3pPr>
-            <a:lvl4pPr lvl="3">
-              <a:spcBef>
-                <a:spcPts val="0"/>
-              </a:spcBef>
-              <a:spcAft>
-                <a:spcPts val="0"/>
-              </a:spcAft>
-              <a:buSzPts val="1400"/>
-              <a:buNone/>
-              <a:defRPr/>
-            </a:lvl4pPr>
-            <a:lvl5pPr lvl="4">
-              <a:spcBef>
-                <a:spcPts val="0"/>
-              </a:spcBef>
-              <a:spcAft>
-                <a:spcPts val="0"/>
-              </a:spcAft>
-              <a:buSzPts val="1400"/>
-              <a:buNone/>
-              <a:defRPr/>
-            </a:lvl5pPr>
-            <a:lvl6pPr lvl="5">
-              <a:spcBef>
-                <a:spcPts val="0"/>
-              </a:spcBef>
-              <a:spcAft>
-                <a:spcPts val="0"/>
-              </a:spcAft>
-              <a:buSzPts val="1400"/>
-              <a:buNone/>
-              <a:defRPr/>
-            </a:lvl6pPr>
-            <a:lvl7pPr lvl="6">
-              <a:spcBef>
-                <a:spcPts val="0"/>
-              </a:spcBef>
-              <a:spcAft>
-                <a:spcPts val="0"/>
-              </a:spcAft>
-              <a:buSzPts val="1400"/>
-              <a:buNone/>
-              <a:defRPr/>
-            </a:lvl7pPr>
-            <a:lvl8pPr lvl="7">
-              <a:spcBef>
-                <a:spcPts val="0"/>
-              </a:spcBef>
-              <a:spcAft>
-                <a:spcPts val="0"/>
-              </a:spcAft>
-              <a:buSzPts val="1400"/>
-              <a:buNone/>
-              <a:defRPr/>
-            </a:lvl8pPr>
-            <a:lvl9pPr lvl="8">
-              <a:spcBef>
-                <a:spcPts val="0"/>
-              </a:spcBef>
-              <a:spcAft>
-                <a:spcPts val="0"/>
-              </a:spcAft>
-              <a:buSzPts val="1400"/>
-              <a:buNone/>
-              <a:defRPr/>
-            </a:lvl9pPr>
-          </a:lstStyle>
-          <a:p/>
-        </p:txBody>
-      </p:sp>
-      <p:pic>
-        <p:nvPicPr>
-          <p:cNvPr id="257" name="Google Shape;257;p10"/>
-          <p:cNvPicPr preferRelativeResize="0"/>
-          <p:nvPr/>
-        </p:nvPicPr>
-        <p:blipFill rotWithShape="1">
-          <a:blip r:embed="rId3">
-            <a:alphaModFix/>
-          </a:blip>
-          <a:srcRect b="0" l="0" r="0" t="0"/>
-          <a:stretch/>
-        </p:blipFill>
-        <p:spPr>
-          <a:xfrm>
-            <a:off x="398723" y="6160516"/>
-            <a:ext cx="1857481" cy="292671"/>
-          </a:xfrm>
-          <a:prstGeom prst="rect">
-            <a:avLst/>
-          </a:prstGeom>
-          <a:noFill/>
-          <a:ln>
-            <a:noFill/>
-          </a:ln>
-        </p:spPr>
-      </p:pic>
-      <p:pic>
-        <p:nvPicPr>
-          <p:cNvPr descr=" " id="258" name="Google Shape;258;p10"/>
-          <p:cNvPicPr preferRelativeResize="0"/>
-          <p:nvPr/>
-        </p:nvPicPr>
-        <p:blipFill rotWithShape="1">
-          <a:blip r:embed="rId4">
-            <a:alphaModFix/>
-          </a:blip>
-          <a:srcRect b="0" l="0" r="0" t="0"/>
-          <a:stretch/>
-        </p:blipFill>
-        <p:spPr>
-          <a:xfrm>
-            <a:off x="10866292" y="0"/>
-            <a:ext cx="1325708" cy="3723972"/>
-          </a:xfrm>
-          <a:prstGeom prst="rect">
-            <a:avLst/>
-          </a:prstGeom>
-          <a:noFill/>
-          <a:ln>
-            <a:noFill/>
-          </a:ln>
-        </p:spPr>
-      </p:pic>
-      <p:pic>
-        <p:nvPicPr>
-          <p:cNvPr descr=" " id="259" name="Google Shape;259;p10"/>
-          <p:cNvPicPr preferRelativeResize="0"/>
-          <p:nvPr/>
-        </p:nvPicPr>
-        <p:blipFill rotWithShape="1">
-          <a:blip r:embed="rId5">
-            <a:alphaModFix/>
-          </a:blip>
-          <a:srcRect b="0" l="0" r="0" t="0"/>
-          <a:stretch/>
-        </p:blipFill>
-        <p:spPr>
-          <a:xfrm>
-            <a:off x="11093496" y="6238282"/>
-            <a:ext cx="690517" cy="216000"/>
-          </a:xfrm>
-          <a:prstGeom prst="rect">
-            <a:avLst/>
-          </a:prstGeom>
-          <a:noFill/>
-          <a:ln>
-            <a:noFill/>
-          </a:ln>
-        </p:spPr>
-      </p:pic>
-    </p:spTree>
-  </p:cSld>
-  <p:clrMapOvr>
-    <a:masterClrMapping/>
-  </p:clrMapOvr>
-</p:sldLayout>
-</file>
-
 <file path=ppt/slideMasters/slideMaster1.xml><?xml version="1.0" encoding="utf-8"?>
 <p:sldMaster xmlns:a="http://schemas.openxmlformats.org/drawingml/2006/main" xmlns:r="http://schemas.openxmlformats.org/officeDocument/2006/relationships" xmlns:mc="http://schemas.openxmlformats.org/markup-compatibility/2006" xmlns:mv="urn:schemas-microsoft-com:mac:vml" xmlns:p="http://schemas.openxmlformats.org/presentationml/2006/main" xmlns:c="http://schemas.openxmlformats.org/drawingml/2006/chart" xmlns:dgm="http://schemas.openxmlformats.org/drawingml/2006/diagram" xmlns:o="urn:schemas-microsoft-com:office:office" xmlns:v="urn:schemas-microsoft-com:vml" xmlns:pvml="urn:schemas-microsoft-com:office:powerpoint" xmlns:com="http://schemas.openxmlformats.org/drawingml/2006/compatibility" xmlns:p14="http://schemas.microsoft.com/office/powerpoint/2010/main" xmlns:p15="http://schemas.microsoft.com/office/powerpoint/2012/main" xmlns:ahyp="http://schemas.microsoft.com/office/drawing/2018/hyperlinkcolor">
   <p:cSld>
@@ -9469,7 +8885,6 @@
     <p:sldLayoutId id="2147483652" r:id="rId6"/>
     <p:sldLayoutId id="2147483653" r:id="rId7"/>
     <p:sldLayoutId id="2147483655" r:id="rId9"/>
-    <p:sldLayoutId id="2147483656" r:id="rId10"/>
     <p:sldLayoutId id="2147483661" r:id="rId15"/>
   </p:sldLayoutIdLst>
   <p:hf dt="0" ftr="0" hdr="0" sldNum="0"/>
@@ -10313,7 +9728,7 @@
               <a:spcAft>
                 <a:spcPts val="300"/>
               </a:spcAft>
-              <a:defRPr sz="5400" b="0">
+              <a:defRPr sz="3200" b="0">
                 <a:solidFill>
                   <a:srgbClr val="FFFFFF"/>
                 </a:solidFill>
@@ -10323,7 +9738,7 @@
               </a:defRPr>
             </a:pPr>
             <a:r>
-              <a:rPr sz="5400" b="0">
+              <a:rPr sz="3200" b="0">
                 <a:solidFill>
                   <a:srgbClr val="FFFFFF"/>
                 </a:solidFill>
@@ -10331,7 +9746,7 @@
                 <a:ea typeface="Play"/>
                 <a:cs typeface="Play"/>
               </a:rPr>
-              <a:t>Защита инициативы</a:t>
+              <a:t>Защита инициативы: сервис автоматической вёрстки презентаций</a:t>
             </a:r>
           </a:p>
         </p:txBody>
@@ -10412,7 +9827,7 @@
         <p:spPr>
           <a:xfrm>
             <a:off x="429280" y="1664162"/>
-            <a:ext cx="11310884" cy="1341120"/>
+            <a:ext cx="11310884" cy="1501435"/>
           </a:xfrm>
           <a:prstGeom prst="rect">
             <a:avLst/>
@@ -10447,7 +9862,7 @@
                 <a:ea typeface="Play"/>
                 <a:cs typeface="Play"/>
               </a:rPr>
-              <a:t>• Сборка 12-слайдной колоды занимает 186 мин</a:t>
+              <a:t>• Сборка одной презентации занимает 186 минут</a:t>
             </a:r>
           </a:p>
           <a:p>
@@ -10473,7 +9888,7 @@
                 <a:ea typeface="Play"/>
                 <a:cs typeface="Play"/>
               </a:rPr>
-              <a:t>• Правки после ревью добавляют 74 мин</a:t>
+              <a:t>• Правки после ревью добавляют 74 минуты</a:t>
             </a:r>
           </a:p>
           <a:p>
@@ -10499,7 +9914,59 @@
                 <a:ea typeface="Play"/>
                 <a:cs typeface="Play"/>
               </a:rPr>
-              <a:t>• Средний срок ожидания 6 дней</a:t>
+              <a:t>• 19 из 42 колод нарушают фирменный стиль</a:t>
+            </a:r>
+          </a:p>
+          <a:p>
+            <a:pPr algn="l">
+              <a:spcAft>
+                <a:spcPts val="300"/>
+              </a:spcAft>
+              <a:defRPr sz="1600">
+                <a:solidFill>
+                  <a:srgbClr val="FFFFFF"/>
+                </a:solidFill>
+                <a:latin typeface="Play"/>
+                <a:ea typeface="Play"/>
+                <a:cs typeface="Play"/>
+              </a:defRPr>
+            </a:pPr>
+            <a:r>
+              <a:rPr sz="1600">
+                <a:solidFill>
+                  <a:srgbClr val="FFFFFF"/>
+                </a:solidFill>
+                <a:latin typeface="Play"/>
+                <a:ea typeface="Play"/>
+                <a:cs typeface="Play"/>
+              </a:rPr>
+              <a:t>• Дизайн-отдел закрывает 11 запросов в неделю из 27</a:t>
+            </a:r>
+          </a:p>
+          <a:p>
+            <a:pPr algn="l">
+              <a:spcAft>
+                <a:spcPts val="300"/>
+              </a:spcAft>
+              <a:defRPr sz="1600">
+                <a:solidFill>
+                  <a:srgbClr val="FFFFFF"/>
+                </a:solidFill>
+                <a:latin typeface="Play"/>
+                <a:ea typeface="Play"/>
+                <a:cs typeface="Play"/>
+              </a:defRPr>
+            </a:pPr>
+            <a:r>
+              <a:rPr sz="1600">
+                <a:solidFill>
+                  <a:srgbClr val="FFFFFF"/>
+                </a:solidFill>
+                <a:latin typeface="Play"/>
+                <a:ea typeface="Play"/>
+                <a:cs typeface="Play"/>
+              </a:rPr>
+              <a:t>• Средний срок ожидания 6 рабочих дней</a:t>
             </a:r>
           </a:p>
         </p:txBody>
@@ -10513,8 +9980,8 @@
           <p:nvPr/>
         </p:nvGraphicFramePr>
         <p:xfrm>
-          <a:off x="429280" y="3176732"/>
-          <a:ext cx="11310884" cy="2241019"/>
+          <a:off x="429280" y="3337047"/>
+          <a:ext cx="11310884" cy="2080703"/>
         </p:xfrm>
         <a:graphic>
           <a:graphicData uri="http://schemas.openxmlformats.org/drawingml/2006/chart">
@@ -10549,171 +10016,6 @@
         <p:spPr>
           <a:xfrm>
             <a:off x="429280" y="424715"/>
-            <a:ext cx="7827264" cy="647052"/>
-          </a:xfrm>
-          <a:prstGeom prst="rect">
-            <a:avLst/>
-          </a:prstGeom>
-          <a:noFill/>
-        </p:spPr>
-        <p:txBody>
-          <a:bodyPr wrap="square" lIns="76200" rIns="76200" tIns="50800" bIns="50800">
-            <a:spAutoFit/>
-          </a:bodyPr>
-          <a:lstStyle/>
-          <a:p>
-            <a:pPr algn="l">
-              <a:spcAft>
-                <a:spcPts val="300"/>
-              </a:spcAft>
-              <a:defRPr sz="2800">
-                <a:solidFill>
-                  <a:srgbClr val="FFFFFF"/>
-                </a:solidFill>
-                <a:latin typeface="Play"/>
-                <a:ea typeface="Play"/>
-                <a:cs typeface="Play"/>
-              </a:defRPr>
-            </a:pPr>
-            <a:r>
-              <a:rPr sz="2800">
-                <a:solidFill>
-                  <a:srgbClr val="FFFFFF"/>
-                </a:solidFill>
-                <a:latin typeface="Play"/>
-                <a:ea typeface="Play"/>
-                <a:cs typeface="Play"/>
-              </a:rPr>
-              <a:t>Текущая нагрузка дизайна</a:t>
-            </a:r>
-          </a:p>
-        </p:txBody>
-      </p:sp>
-      <p:sp>
-        <p:nvSpPr>
-          <p:cNvPr id="3" name="card_0"/>
-          <p:cNvSpPr txBox="1"/>
-          <p:nvPr/>
-        </p:nvSpPr>
-        <p:spPr>
-          <a:xfrm>
-            <a:off x="6469197" y="1395618"/>
-            <a:ext cx="4434352" cy="1608033"/>
-          </a:xfrm>
-          <a:prstGeom prst="rect">
-            <a:avLst/>
-          </a:prstGeom>
-          <a:noFill/>
-        </p:spPr>
-        <p:txBody>
-          <a:bodyPr wrap="square" lIns="76200" rIns="76200" tIns="50800" bIns="50800">
-            <a:spAutoFit/>
-          </a:bodyPr>
-          <a:lstStyle/>
-          <a:p>
-            <a:pPr algn="l">
-              <a:spcAft>
-                <a:spcPts val="300"/>
-              </a:spcAft>
-              <a:defRPr sz="2800" b="0">
-                <a:solidFill>
-                  <a:srgbClr val="FFFFFF"/>
-                </a:solidFill>
-                <a:latin typeface="Play"/>
-                <a:ea typeface="Play"/>
-                <a:cs typeface="Play"/>
-              </a:defRPr>
-            </a:pPr>
-            <a:r>
-              <a:rPr sz="2800" b="0">
-                <a:solidFill>
-                  <a:srgbClr val="FFFFFF"/>
-                </a:solidFill>
-                <a:latin typeface="Play"/>
-                <a:ea typeface="Play"/>
-                <a:cs typeface="Play"/>
-              </a:rPr>
-              <a:t>Дизайн-отдел закрывает 11 запросов в неделю из 27</a:t>
-            </a:r>
-          </a:p>
-        </p:txBody>
-      </p:sp>
-      <p:sp>
-        <p:nvSpPr>
-          <p:cNvPr id="4" name="card_1"/>
-          <p:cNvSpPr txBox="1"/>
-          <p:nvPr/>
-        </p:nvSpPr>
-        <p:spPr>
-          <a:xfrm>
-            <a:off x="6469197" y="3750655"/>
-            <a:ext cx="4434352" cy="2284917"/>
-          </a:xfrm>
-          <a:prstGeom prst="rect">
-            <a:avLst/>
-          </a:prstGeom>
-          <a:noFill/>
-        </p:spPr>
-        <p:txBody>
-          <a:bodyPr wrap="square" lIns="76200" rIns="76200" tIns="50800" bIns="50800">
-            <a:spAutoFit/>
-          </a:bodyPr>
-          <a:lstStyle/>
-          <a:p>
-            <a:pPr algn="l">
-              <a:spcAft>
-                <a:spcPts val="300"/>
-              </a:spcAft>
-              <a:defRPr sz="2800" b="0">
-                <a:solidFill>
-                  <a:srgbClr val="FFFFFF"/>
-                </a:solidFill>
-                <a:latin typeface="Play"/>
-                <a:ea typeface="Play"/>
-                <a:cs typeface="Play"/>
-              </a:defRPr>
-            </a:pPr>
-            <a:r>
-              <a:rPr sz="2800" b="0">
-                <a:solidFill>
-                  <a:srgbClr val="FFFFFF"/>
-                </a:solidFill>
-                <a:latin typeface="Play"/>
-                <a:ea typeface="Play"/>
-                <a:cs typeface="Play"/>
-              </a:rPr>
-              <a:t>Средний срок ожидания 6 дней</a:t>
-            </a:r>
-          </a:p>
-        </p:txBody>
-      </p:sp>
-    </p:spTree>
-  </p:cSld>
-  <p:clrMapOvr>
-    <a:masterClrMapping/>
-  </p:clrMapOvr>
-</p:sld>
-</file>
-
-<file path=ppt/slides/slide33.xml><?xml version="1.0" encoding="utf-8"?>
-<p:sld xmlns:a="http://schemas.openxmlformats.org/drawingml/2006/main" xmlns:p="http://schemas.openxmlformats.org/presentationml/2006/main" xmlns:r="http://schemas.openxmlformats.org/officeDocument/2006/relationships">
-  <p:cSld>
-    <p:spTree>
-      <p:nvGrpSpPr>
-        <p:cNvPr id="1" name=""/>
-        <p:cNvGrpSpPr/>
-        <p:nvPr/>
-      </p:nvGrpSpPr>
-      <p:grpSpPr/>
-      <p:sp>
-        <p:nvSpPr>
-          <p:cNvPr id="2" name="title"/>
-          <p:cNvSpPr txBox="1"/>
-          <p:nvPr/>
-        </p:nvSpPr>
-        <p:spPr>
-          <a:xfrm>
-            <a:off x="429280" y="424715"/>
             <a:ext cx="7827264" cy="822960"/>
           </a:xfrm>
           <a:prstGeom prst="rect">
@@ -10749,7 +10051,7 @@
                 <a:ea typeface="Play"/>
                 <a:cs typeface="Play"/>
               </a:rPr>
-              <a:t>Ожидаемый эффект пилота</a:t>
+              <a:t>Предложение</a:t>
             </a:r>
           </a:p>
         </p:txBody>
@@ -10798,7 +10100,7 @@
                 <a:ea typeface="Play"/>
                 <a:cs typeface="Play"/>
               </a:rPr>
-              <a:t>• Средняя сборка колоды 12 слайдов — 4 мин вместо 186</a:t>
+              <a:t>• Сервис принимает шаблон pptx и материалы</a:t>
             </a:r>
           </a:p>
           <a:p>
@@ -10824,7 +10126,7 @@
                 <a:ea typeface="Play"/>
                 <a:cs typeface="Play"/>
               </a:rPr>
-              <a:t>• Время до первой версии сократилось с 6 дней до 1</a:t>
+              <a:t>• Автоматически формирует дизайн-систему и план колоды</a:t>
             </a:r>
           </a:p>
           <a:p>
@@ -10850,7 +10152,7 @@
                 <a:ea typeface="Play"/>
                 <a:cs typeface="Play"/>
               </a:rPr>
-              <a:t>• Нарушений стиля 2 из 68, исправлены автоматически</a:t>
+              <a:t>• Экспорт в pptx, pdf, html с редактируемыми слайдами</a:t>
             </a:r>
           </a:p>
           <a:p>
@@ -10876,29 +10178,389 @@
                 <a:ea typeface="Play"/>
                 <a:cs typeface="Play"/>
               </a:rPr>
-              <a:t>• Дизайнеры закрыли 38 запросов вместо 11</a:t>
+              <a:t>• Аудит качества проверяет все данные до выдачи</a:t>
             </a:r>
           </a:p>
         </p:txBody>
       </p:sp>
-      <p:graphicFrame>
-        <p:nvGraphicFramePr>
-          <p:cNvPr id="4" name="Chart 3"/>
-          <p:cNvGraphicFramePr>
-            <a:graphicFrameLocks noGrp="1"/>
-          </p:cNvGraphicFramePr>
+      <p:sp>
+        <p:nvSpPr>
+          <p:cNvPr id="4" name="Pentagon 3"/>
+          <p:cNvSpPr/>
           <p:nvPr/>
-        </p:nvGraphicFramePr>
-        <p:xfrm>
-          <a:off x="429280" y="3436269"/>
-          <a:ext cx="11310884" cy="2337343"/>
-        </p:xfrm>
-        <a:graphic>
-          <a:graphicData uri="http://schemas.openxmlformats.org/drawingml/2006/chart">
-            <c:chart xmlns:c="http://schemas.openxmlformats.org/drawingml/2006/chart" r:id="rId2"/>
-          </a:graphicData>
-        </a:graphic>
-      </p:graphicFrame>
+        </p:nvSpPr>
+        <p:spPr>
+          <a:xfrm>
+            <a:off x="429280" y="3463538"/>
+            <a:ext cx="11310884" cy="335019"/>
+          </a:xfrm>
+          <a:prstGeom prst="homePlate">
+            <a:avLst/>
+          </a:prstGeom>
+          <a:solidFill>
+            <a:srgbClr val="0077FF"/>
+          </a:solidFill>
+          <a:ln>
+            <a:noFill/>
+          </a:ln>
+        </p:spPr>
+        <p:style>
+          <a:lnRef idx="1">
+            <a:schemeClr val="accent1"/>
+          </a:lnRef>
+          <a:fillRef idx="3">
+            <a:schemeClr val="accent1"/>
+          </a:fillRef>
+          <a:effectRef idx="2">
+            <a:schemeClr val="accent1"/>
+          </a:effectRef>
+          <a:fontRef idx="minor">
+            <a:schemeClr val="lt1"/>
+          </a:fontRef>
+        </p:style>
+        <p:txBody>
+          <a:bodyPr rtlCol="0" anchor="ctr" wrap="square" lIns="12700" rIns="12700" tIns="12700" bIns="12700"/>
+          <a:lstStyle/>
+          <a:p>
+            <a:pPr algn="ctr">
+              <a:defRPr sz="1400" b="0">
+                <a:solidFill>
+                  <a:srgbClr val="FFFFFF"/>
+                </a:solidFill>
+                <a:latin typeface="Play"/>
+                <a:ea typeface="Play"/>
+                <a:cs typeface="Play"/>
+              </a:defRPr>
+            </a:pPr>
+            <a:r>
+              <a:rPr sz="1400" b="0">
+                <a:solidFill>
+                  <a:srgbClr val="FFFFFF"/>
+                </a:solidFill>
+                <a:latin typeface="Play"/>
+                <a:ea typeface="Play"/>
+                <a:cs typeface="Play"/>
+              </a:rPr>
+              <a:t>Шаблон</a:t>
+            </a:r>
+          </a:p>
+        </p:txBody>
+      </p:sp>
+      <p:sp>
+        <p:nvSpPr>
+          <p:cNvPr id="5" name="Chevron 4"/>
+          <p:cNvSpPr/>
+          <p:nvPr/>
+        </p:nvSpPr>
+        <p:spPr>
+          <a:xfrm>
+            <a:off x="429280" y="3853095"/>
+            <a:ext cx="11310884" cy="335019"/>
+          </a:xfrm>
+          <a:prstGeom prst="chevron">
+            <a:avLst/>
+          </a:prstGeom>
+          <a:solidFill>
+            <a:srgbClr val="0077FF"/>
+          </a:solidFill>
+          <a:ln>
+            <a:noFill/>
+          </a:ln>
+        </p:spPr>
+        <p:style>
+          <a:lnRef idx="1">
+            <a:schemeClr val="accent1"/>
+          </a:lnRef>
+          <a:fillRef idx="3">
+            <a:schemeClr val="accent1"/>
+          </a:fillRef>
+          <a:effectRef idx="2">
+            <a:schemeClr val="accent1"/>
+          </a:effectRef>
+          <a:fontRef idx="minor">
+            <a:schemeClr val="lt1"/>
+          </a:fontRef>
+        </p:style>
+        <p:txBody>
+          <a:bodyPr rtlCol="0" anchor="ctr" wrap="square" lIns="12700" rIns="12700" tIns="12700" bIns="12700"/>
+          <a:lstStyle/>
+          <a:p>
+            <a:pPr algn="ctr">
+              <a:defRPr sz="1400" b="0">
+                <a:solidFill>
+                  <a:srgbClr val="FFFFFF"/>
+                </a:solidFill>
+                <a:latin typeface="Play"/>
+                <a:ea typeface="Play"/>
+                <a:cs typeface="Play"/>
+              </a:defRPr>
+            </a:pPr>
+            <a:r>
+              <a:rPr sz="1400" b="0">
+                <a:solidFill>
+                  <a:srgbClr val="FFFFFF"/>
+                </a:solidFill>
+                <a:latin typeface="Play"/>
+                <a:ea typeface="Play"/>
+                <a:cs typeface="Play"/>
+              </a:rPr>
+              <a:t>Дизайн-система</a:t>
+            </a:r>
+          </a:p>
+        </p:txBody>
+      </p:sp>
+      <p:sp>
+        <p:nvSpPr>
+          <p:cNvPr id="6" name="Chevron 5"/>
+          <p:cNvSpPr/>
+          <p:nvPr/>
+        </p:nvSpPr>
+        <p:spPr>
+          <a:xfrm>
+            <a:off x="429280" y="4242652"/>
+            <a:ext cx="11310884" cy="335019"/>
+          </a:xfrm>
+          <a:prstGeom prst="chevron">
+            <a:avLst/>
+          </a:prstGeom>
+          <a:solidFill>
+            <a:srgbClr val="0077FF"/>
+          </a:solidFill>
+          <a:ln>
+            <a:noFill/>
+          </a:ln>
+        </p:spPr>
+        <p:style>
+          <a:lnRef idx="1">
+            <a:schemeClr val="accent1"/>
+          </a:lnRef>
+          <a:fillRef idx="3">
+            <a:schemeClr val="accent1"/>
+          </a:fillRef>
+          <a:effectRef idx="2">
+            <a:schemeClr val="accent1"/>
+          </a:effectRef>
+          <a:fontRef idx="minor">
+            <a:schemeClr val="lt1"/>
+          </a:fontRef>
+        </p:style>
+        <p:txBody>
+          <a:bodyPr rtlCol="0" anchor="ctr" wrap="square" lIns="12700" rIns="12700" tIns="12700" bIns="12700"/>
+          <a:lstStyle/>
+          <a:p>
+            <a:pPr algn="ctr">
+              <a:defRPr sz="1400" b="0">
+                <a:solidFill>
+                  <a:srgbClr val="FFFFFF"/>
+                </a:solidFill>
+                <a:latin typeface="Play"/>
+                <a:ea typeface="Play"/>
+                <a:cs typeface="Play"/>
+              </a:defRPr>
+            </a:pPr>
+            <a:r>
+              <a:rPr sz="1400" b="0">
+                <a:solidFill>
+                  <a:srgbClr val="FFFFFF"/>
+                </a:solidFill>
+                <a:latin typeface="Play"/>
+                <a:ea typeface="Play"/>
+                <a:cs typeface="Play"/>
+              </a:rPr>
+              <a:t>План колоды</a:t>
+            </a:r>
+          </a:p>
+        </p:txBody>
+      </p:sp>
+      <p:sp>
+        <p:nvSpPr>
+          <p:cNvPr id="7" name="Chevron 6"/>
+          <p:cNvSpPr/>
+          <p:nvPr/>
+        </p:nvSpPr>
+        <p:spPr>
+          <a:xfrm>
+            <a:off x="429280" y="4632209"/>
+            <a:ext cx="11310884" cy="335019"/>
+          </a:xfrm>
+          <a:prstGeom prst="chevron">
+            <a:avLst/>
+          </a:prstGeom>
+          <a:solidFill>
+            <a:srgbClr val="0077FF"/>
+          </a:solidFill>
+          <a:ln>
+            <a:noFill/>
+          </a:ln>
+        </p:spPr>
+        <p:style>
+          <a:lnRef idx="1">
+            <a:schemeClr val="accent1"/>
+          </a:lnRef>
+          <a:fillRef idx="3">
+            <a:schemeClr val="accent1"/>
+          </a:fillRef>
+          <a:effectRef idx="2">
+            <a:schemeClr val="accent1"/>
+          </a:effectRef>
+          <a:fontRef idx="minor">
+            <a:schemeClr val="lt1"/>
+          </a:fontRef>
+        </p:style>
+        <p:txBody>
+          <a:bodyPr rtlCol="0" anchor="ctr" wrap="square" lIns="12700" rIns="12700" tIns="12700" bIns="12700"/>
+          <a:lstStyle/>
+          <a:p>
+            <a:pPr algn="ctr">
+              <a:defRPr sz="1400" b="0">
+                <a:solidFill>
+                  <a:srgbClr val="FFFFFF"/>
+                </a:solidFill>
+                <a:latin typeface="Play"/>
+                <a:ea typeface="Play"/>
+                <a:cs typeface="Play"/>
+              </a:defRPr>
+            </a:pPr>
+            <a:r>
+              <a:rPr sz="1400" b="0">
+                <a:solidFill>
+                  <a:srgbClr val="FFFFFF"/>
+                </a:solidFill>
+                <a:latin typeface="Play"/>
+                <a:ea typeface="Play"/>
+                <a:cs typeface="Play"/>
+              </a:rPr>
+              <a:t>Вёрстка</a:t>
+            </a:r>
+          </a:p>
+        </p:txBody>
+      </p:sp>
+      <p:sp>
+        <p:nvSpPr>
+          <p:cNvPr id="8" name="Chevron 7"/>
+          <p:cNvSpPr/>
+          <p:nvPr/>
+        </p:nvSpPr>
+        <p:spPr>
+          <a:xfrm>
+            <a:off x="429280" y="5021766"/>
+            <a:ext cx="11310884" cy="335019"/>
+          </a:xfrm>
+          <a:prstGeom prst="chevron">
+            <a:avLst/>
+          </a:prstGeom>
+          <a:solidFill>
+            <a:srgbClr val="0077FF"/>
+          </a:solidFill>
+          <a:ln>
+            <a:noFill/>
+          </a:ln>
+        </p:spPr>
+        <p:style>
+          <a:lnRef idx="1">
+            <a:schemeClr val="accent1"/>
+          </a:lnRef>
+          <a:fillRef idx="3">
+            <a:schemeClr val="accent1"/>
+          </a:fillRef>
+          <a:effectRef idx="2">
+            <a:schemeClr val="accent1"/>
+          </a:effectRef>
+          <a:fontRef idx="minor">
+            <a:schemeClr val="lt1"/>
+          </a:fontRef>
+        </p:style>
+        <p:txBody>
+          <a:bodyPr rtlCol="0" anchor="ctr" wrap="square" lIns="12700" rIns="12700" tIns="12700" bIns="12700"/>
+          <a:lstStyle/>
+          <a:p>
+            <a:pPr algn="ctr">
+              <a:defRPr sz="1400" b="0">
+                <a:solidFill>
+                  <a:srgbClr val="FFFFFF"/>
+                </a:solidFill>
+                <a:latin typeface="Play"/>
+                <a:ea typeface="Play"/>
+                <a:cs typeface="Play"/>
+              </a:defRPr>
+            </a:pPr>
+            <a:r>
+              <a:rPr sz="1400" b="0">
+                <a:solidFill>
+                  <a:srgbClr val="FFFFFF"/>
+                </a:solidFill>
+                <a:latin typeface="Play"/>
+                <a:ea typeface="Play"/>
+                <a:cs typeface="Play"/>
+              </a:rPr>
+              <a:t>Аудит</a:t>
+            </a:r>
+          </a:p>
+        </p:txBody>
+      </p:sp>
+      <p:sp>
+        <p:nvSpPr>
+          <p:cNvPr id="9" name="Chevron 8"/>
+          <p:cNvSpPr/>
+          <p:nvPr/>
+        </p:nvSpPr>
+        <p:spPr>
+          <a:xfrm>
+            <a:off x="429280" y="5411323"/>
+            <a:ext cx="11310884" cy="335019"/>
+          </a:xfrm>
+          <a:prstGeom prst="chevron">
+            <a:avLst/>
+          </a:prstGeom>
+          <a:solidFill>
+            <a:srgbClr val="0077FF"/>
+          </a:solidFill>
+          <a:ln>
+            <a:noFill/>
+          </a:ln>
+        </p:spPr>
+        <p:style>
+          <a:lnRef idx="1">
+            <a:schemeClr val="accent1"/>
+          </a:lnRef>
+          <a:fillRef idx="3">
+            <a:schemeClr val="accent1"/>
+          </a:fillRef>
+          <a:effectRef idx="2">
+            <a:schemeClr val="accent1"/>
+          </a:effectRef>
+          <a:fontRef idx="minor">
+            <a:schemeClr val="lt1"/>
+          </a:fontRef>
+        </p:style>
+        <p:txBody>
+          <a:bodyPr rtlCol="0" anchor="ctr" wrap="square" lIns="12700" rIns="12700" tIns="12700" bIns="12700"/>
+          <a:lstStyle/>
+          <a:p>
+            <a:pPr algn="ctr">
+              <a:defRPr sz="1400" b="0">
+                <a:solidFill>
+                  <a:srgbClr val="FFFFFF"/>
+                </a:solidFill>
+                <a:latin typeface="Play"/>
+                <a:ea typeface="Play"/>
+                <a:cs typeface="Play"/>
+              </a:defRPr>
+            </a:pPr>
+            <a:r>
+              <a:rPr sz="1400" b="0">
+                <a:solidFill>
+                  <a:srgbClr val="FFFFFF"/>
+                </a:solidFill>
+                <a:latin typeface="Play"/>
+                <a:ea typeface="Play"/>
+                <a:cs typeface="Play"/>
+              </a:rPr>
+              <a:t>Экспорт</a:t>
+            </a:r>
+          </a:p>
+        </p:txBody>
+      </p:sp>
     </p:spTree>
   </p:cSld>
   <p:clrMapOvr>
@@ -10907,7 +10569,7 @@
 </p:sld>
 </file>
 
-<file path=ppt/slides/slide34.xml><?xml version="1.0" encoding="utf-8"?>
+<file path=ppt/slides/slide33.xml><?xml version="1.0" encoding="utf-8"?>
 <p:sld xmlns:a="http://schemas.openxmlformats.org/drawingml/2006/main" xmlns:p="http://schemas.openxmlformats.org/presentationml/2006/main" xmlns:r="http://schemas.openxmlformats.org/officeDocument/2006/relationships">
   <p:cSld>
     <p:spTree>
@@ -10991,808 +10653,6 @@
           <a:xfrm>
             <a:off x="300817" y="297715"/>
             <a:ext cx="11566347" cy="5758505"/>
-          </a:xfrm>
-          <a:prstGeom prst="roundRect">
-            <a:avLst/>
-          </a:prstGeom>
-          <a:solidFill>
-            <a:srgbClr val="111111">
-              <a:alpha val="85000"/>
-            </a:srgbClr>
-          </a:solidFill>
-          <a:ln>
-            <a:noFill/>
-          </a:ln>
-          <a:effectLst/>
-        </p:spPr>
-        <p:style>
-          <a:lnRef idx="1">
-            <a:schemeClr val="accent1"/>
-          </a:lnRef>
-          <a:fillRef idx="3">
-            <a:schemeClr val="accent1"/>
-          </a:fillRef>
-          <a:effectRef idx="2">
-            <a:schemeClr val="accent1"/>
-          </a:effectRef>
-          <a:fontRef idx="minor">
-            <a:schemeClr val="lt1"/>
-          </a:fontRef>
-        </p:style>
-        <p:txBody>
-          <a:bodyPr rtlCol="0" anchor="ctr"/>
-          <a:lstStyle/>
-          <a:p>
-            <a:pPr algn="ctr"/>
-          </a:p>
-        </p:txBody>
-      </p:sp>
-      <p:sp>
-        <p:nvSpPr>
-          <p:cNvPr id="681" name="title"/>
-          <p:cNvSpPr txBox="1"/>
-          <p:nvPr/>
-        </p:nvSpPr>
-        <p:spPr>
-          <a:xfrm>
-            <a:off x="427817" y="424715"/>
-            <a:ext cx="7827264" cy="1183640"/>
-          </a:xfrm>
-          <a:prstGeom prst="rect">
-            <a:avLst/>
-          </a:prstGeom>
-          <a:noFill/>
-        </p:spPr>
-        <p:txBody>
-          <a:bodyPr wrap="square" lIns="76200" rIns="76200" tIns="50800" bIns="50800">
-            <a:spAutoFit/>
-          </a:bodyPr>
-          <a:lstStyle/>
-          <a:p>
-            <a:pPr algn="l">
-              <a:spcAft>
-                <a:spcPts val="300"/>
-              </a:spcAft>
-              <a:defRPr sz="3200">
-                <a:solidFill>
-                  <a:srgbClr val="FFFFFF"/>
-                </a:solidFill>
-                <a:latin typeface="Play"/>
-                <a:ea typeface="Play"/>
-                <a:cs typeface="Play"/>
-              </a:defRPr>
-            </a:pPr>
-            <a:r>
-              <a:rPr sz="3200">
-                <a:solidFill>
-                  <a:srgbClr val="FFFFFF"/>
-                </a:solidFill>
-                <a:latin typeface="Play"/>
-                <a:ea typeface="Play"/>
-                <a:cs typeface="Play"/>
-              </a:rPr>
-              <a:t>Что потребуется: ресурсы и сроки</a:t>
-            </a:r>
-          </a:p>
-        </p:txBody>
-      </p:sp>
-      <p:sp>
-        <p:nvSpPr>
-          <p:cNvPr id="682" name="body"/>
-          <p:cNvSpPr txBox="1"/>
-          <p:nvPr/>
-        </p:nvSpPr>
-        <p:spPr>
-          <a:xfrm>
-            <a:off x="427817" y="1837052"/>
-            <a:ext cx="11312347" cy="1341120"/>
-          </a:xfrm>
-          <a:prstGeom prst="rect">
-            <a:avLst/>
-          </a:prstGeom>
-          <a:noFill/>
-        </p:spPr>
-        <p:txBody>
-          <a:bodyPr wrap="square" lIns="76200" rIns="76200" tIns="50800" bIns="50800">
-            <a:spAutoFit/>
-          </a:bodyPr>
-          <a:lstStyle/>
-          <a:p>
-            <a:pPr algn="l">
-              <a:spcAft>
-                <a:spcPts val="300"/>
-              </a:spcAft>
-              <a:defRPr sz="1600">
-                <a:solidFill>
-                  <a:srgbClr val="FFFFFF"/>
-                </a:solidFill>
-                <a:latin typeface="Play"/>
-                <a:ea typeface="Play"/>
-                <a:cs typeface="Play"/>
-              </a:defRPr>
-            </a:pPr>
-            <a:r>
-              <a:rPr sz="1600">
-                <a:solidFill>
-                  <a:srgbClr val="FFFFFF"/>
-                </a:solidFill>
-                <a:latin typeface="Play"/>
-                <a:ea typeface="Play"/>
-                <a:cs typeface="Play"/>
-              </a:rPr>
-              <a:t>• Сервис работает на 2 vCPU / 2 ГБ RAM</a:t>
-            </a:r>
-          </a:p>
-          <a:p>
-            <a:pPr algn="l">
-              <a:spcAft>
-                <a:spcPts val="300"/>
-              </a:spcAft>
-              <a:defRPr sz="1600">
-                <a:solidFill>
-                  <a:srgbClr val="FFFFFF"/>
-                </a:solidFill>
-                <a:latin typeface="Play"/>
-                <a:ea typeface="Play"/>
-                <a:cs typeface="Play"/>
-              </a:defRPr>
-            </a:pPr>
-            <a:r>
-              <a:rPr sz="1600">
-                <a:solidFill>
-                  <a:srgbClr val="FFFFFF"/>
-                </a:solidFill>
-                <a:latin typeface="Play"/>
-                <a:ea typeface="Play"/>
-                <a:cs typeface="Play"/>
-              </a:rPr>
-              <a:t>• Инференс за 6 недель 1 400 руб</a:t>
-            </a:r>
-          </a:p>
-          <a:p>
-            <a:pPr algn="l">
-              <a:spcAft>
-                <a:spcPts val="300"/>
-              </a:spcAft>
-              <a:defRPr sz="1600">
-                <a:solidFill>
-                  <a:srgbClr val="FFFFFF"/>
-                </a:solidFill>
-                <a:latin typeface="Play"/>
-                <a:ea typeface="Play"/>
-                <a:cs typeface="Play"/>
-              </a:defRPr>
-            </a:pPr>
-            <a:r>
-              <a:rPr sz="1600">
-                <a:solidFill>
-                  <a:srgbClr val="FFFFFF"/>
-                </a:solidFill>
-                <a:latin typeface="Play"/>
-                <a:ea typeface="Play"/>
-                <a:cs typeface="Play"/>
-              </a:rPr>
-              <a:t>• Модель gpt-oss-20b подключается по OpenAI-совместимому протоколу</a:t>
-            </a:r>
-          </a:p>
-        </p:txBody>
-      </p:sp>
-      <p:sp>
-        <p:nvSpPr>
-          <p:cNvPr id="683" name="Rectangle 682"/>
-          <p:cNvSpPr/>
-          <p:nvPr/>
-        </p:nvSpPr>
-        <p:spPr>
-          <a:xfrm>
-            <a:off x="427817" y="4536237"/>
-            <a:ext cx="11312347" cy="77387"/>
-          </a:xfrm>
-          <a:prstGeom prst="rect">
-            <a:avLst/>
-          </a:prstGeom>
-          <a:solidFill>
-            <a:srgbClr val="0077FF"/>
-          </a:solidFill>
-          <a:ln>
-            <a:noFill/>
-          </a:ln>
-        </p:spPr>
-        <p:style>
-          <a:lnRef idx="1">
-            <a:schemeClr val="accent1"/>
-          </a:lnRef>
-          <a:fillRef idx="3">
-            <a:schemeClr val="accent1"/>
-          </a:fillRef>
-          <a:effectRef idx="2">
-            <a:schemeClr val="accent1"/>
-          </a:effectRef>
-          <a:fontRef idx="minor">
-            <a:schemeClr val="lt1"/>
-          </a:fontRef>
-        </p:style>
-        <p:txBody>
-          <a:bodyPr rtlCol="0" anchor="ctr"/>
-          <a:lstStyle/>
-          <a:p>
-            <a:pPr algn="ctr"/>
-          </a:p>
-        </p:txBody>
-      </p:sp>
-      <p:sp>
-        <p:nvSpPr>
-          <p:cNvPr id="684" name="Oval 683"/>
-          <p:cNvSpPr/>
-          <p:nvPr/>
-        </p:nvSpPr>
-        <p:spPr>
-          <a:xfrm>
-            <a:off x="2029452" y="4291175"/>
-            <a:ext cx="567511" cy="567511"/>
-          </a:xfrm>
-          <a:prstGeom prst="ellipse">
-            <a:avLst/>
-          </a:prstGeom>
-          <a:solidFill>
-            <a:srgbClr val="0077FF"/>
-          </a:solidFill>
-          <a:ln>
-            <a:noFill/>
-          </a:ln>
-        </p:spPr>
-        <p:style>
-          <a:lnRef idx="1">
-            <a:schemeClr val="accent1"/>
-          </a:lnRef>
-          <a:fillRef idx="3">
-            <a:schemeClr val="accent1"/>
-          </a:fillRef>
-          <a:effectRef idx="2">
-            <a:schemeClr val="accent1"/>
-          </a:effectRef>
-          <a:fontRef idx="minor">
-            <a:schemeClr val="lt1"/>
-          </a:fontRef>
-        </p:style>
-        <p:txBody>
-          <a:bodyPr rtlCol="0" anchor="ctr"/>
-          <a:lstStyle/>
-          <a:p>
-            <a:pPr algn="ctr"/>
-          </a:p>
-        </p:txBody>
-      </p:sp>
-      <p:sp>
-        <p:nvSpPr>
-          <p:cNvPr id="685" name="TextBox 684"/>
-          <p:cNvSpPr txBox="1"/>
-          <p:nvPr/>
-        </p:nvSpPr>
-        <p:spPr>
-          <a:xfrm>
-            <a:off x="427817" y="3349622"/>
-            <a:ext cx="5656173" cy="980247"/>
-          </a:xfrm>
-          <a:prstGeom prst="rect">
-            <a:avLst/>
-          </a:prstGeom>
-          <a:noFill/>
-        </p:spPr>
-        <p:txBody>
-          <a:bodyPr wrap="square" lIns="12700" rIns="12700" tIns="12700" bIns="12700">
-            <a:spAutoFit/>
-          </a:bodyPr>
-          <a:lstStyle/>
-          <a:p>
-            <a:pPr algn="ctr">
-              <a:defRPr sz="1400" b="0">
-                <a:solidFill>
-                  <a:srgbClr val="FFFFFF"/>
-                </a:solidFill>
-                <a:latin typeface="Play"/>
-                <a:ea typeface="Play"/>
-                <a:cs typeface="Play"/>
-              </a:defRPr>
-            </a:pPr>
-            <a:r>
-              <a:rPr sz="1400" b="0">
-                <a:solidFill>
-                  <a:srgbClr val="FFFFFF"/>
-                </a:solidFill>
-                <a:latin typeface="Play"/>
-                <a:ea typeface="Play"/>
-                <a:cs typeface="Play"/>
-              </a:rPr>
-              <a:t>Третий квартал 2026 подключение 4 команд</a:t>
-            </a:r>
-          </a:p>
-        </p:txBody>
-      </p:sp>
-      <p:sp>
-        <p:nvSpPr>
-          <p:cNvPr id="686" name="Oval 685"/>
-          <p:cNvSpPr/>
-          <p:nvPr/>
-        </p:nvSpPr>
-        <p:spPr>
-          <a:xfrm>
-            <a:off x="5800234" y="4291175"/>
-            <a:ext cx="567511" cy="567511"/>
-          </a:xfrm>
-          <a:prstGeom prst="ellipse">
-            <a:avLst/>
-          </a:prstGeom>
-          <a:solidFill>
-            <a:srgbClr val="0077FF"/>
-          </a:solidFill>
-          <a:ln>
-            <a:noFill/>
-          </a:ln>
-        </p:spPr>
-        <p:style>
-          <a:lnRef idx="1">
-            <a:schemeClr val="accent1"/>
-          </a:lnRef>
-          <a:fillRef idx="3">
-            <a:schemeClr val="accent1"/>
-          </a:fillRef>
-          <a:effectRef idx="2">
-            <a:schemeClr val="accent1"/>
-          </a:effectRef>
-          <a:fontRef idx="minor">
-            <a:schemeClr val="lt1"/>
-          </a:fontRef>
-        </p:style>
-        <p:txBody>
-          <a:bodyPr rtlCol="0" anchor="ctr"/>
-          <a:lstStyle/>
-          <a:p>
-            <a:pPr algn="ctr"/>
-          </a:p>
-        </p:txBody>
-      </p:sp>
-      <p:sp>
-        <p:nvSpPr>
-          <p:cNvPr id="687" name="TextBox 686"/>
-          <p:cNvSpPr txBox="1"/>
-          <p:nvPr/>
-        </p:nvSpPr>
-        <p:spPr>
-          <a:xfrm>
-            <a:off x="3255903" y="5103748"/>
-            <a:ext cx="5656173" cy="980247"/>
-          </a:xfrm>
-          <a:prstGeom prst="rect">
-            <a:avLst/>
-          </a:prstGeom>
-          <a:noFill/>
-        </p:spPr>
-        <p:txBody>
-          <a:bodyPr wrap="square" lIns="12700" rIns="12700" tIns="12700" bIns="12700">
-            <a:spAutoFit/>
-          </a:bodyPr>
-          <a:lstStyle/>
-          <a:p>
-            <a:pPr algn="ctr">
-              <a:defRPr sz="1400" b="0">
-                <a:solidFill>
-                  <a:srgbClr val="FFFFFF"/>
-                </a:solidFill>
-                <a:latin typeface="Play"/>
-                <a:ea typeface="Play"/>
-                <a:cs typeface="Play"/>
-              </a:defRPr>
-            </a:pPr>
-            <a:r>
-              <a:rPr sz="1400" b="0">
-                <a:solidFill>
-                  <a:srgbClr val="FFFFFF"/>
-                </a:solidFill>
-                <a:latin typeface="Play"/>
-                <a:ea typeface="Play"/>
-                <a:cs typeface="Play"/>
-              </a:rPr>
-              <a:t>Четвёртый квартал 2026 доступ для всей компании</a:t>
-            </a:r>
-          </a:p>
-        </p:txBody>
-      </p:sp>
-      <p:sp>
-        <p:nvSpPr>
-          <p:cNvPr id="688" name="Oval 687"/>
-          <p:cNvSpPr/>
-          <p:nvPr/>
-        </p:nvSpPr>
-        <p:spPr>
-          <a:xfrm>
-            <a:off x="9571017" y="4291175"/>
-            <a:ext cx="567511" cy="567511"/>
-          </a:xfrm>
-          <a:prstGeom prst="ellipse">
-            <a:avLst/>
-          </a:prstGeom>
-          <a:solidFill>
-            <a:srgbClr val="0077FF"/>
-          </a:solidFill>
-          <a:ln>
-            <a:noFill/>
-          </a:ln>
-        </p:spPr>
-        <p:style>
-          <a:lnRef idx="1">
-            <a:schemeClr val="accent1"/>
-          </a:lnRef>
-          <a:fillRef idx="3">
-            <a:schemeClr val="accent1"/>
-          </a:fillRef>
-          <a:effectRef idx="2">
-            <a:schemeClr val="accent1"/>
-          </a:effectRef>
-          <a:fontRef idx="minor">
-            <a:schemeClr val="lt1"/>
-          </a:fontRef>
-        </p:style>
-        <p:txBody>
-          <a:bodyPr rtlCol="0" anchor="ctr"/>
-          <a:lstStyle/>
-          <a:p>
-            <a:pPr algn="ctr"/>
-          </a:p>
-        </p:txBody>
-      </p:sp>
-      <p:sp>
-        <p:nvSpPr>
-          <p:cNvPr id="689" name="TextBox 688"/>
-          <p:cNvSpPr txBox="1"/>
-          <p:nvPr/>
-        </p:nvSpPr>
-        <p:spPr>
-          <a:xfrm>
-            <a:off x="6083990" y="3349622"/>
-            <a:ext cx="5656173" cy="980247"/>
-          </a:xfrm>
-          <a:prstGeom prst="rect">
-            <a:avLst/>
-          </a:prstGeom>
-          <a:noFill/>
-        </p:spPr>
-        <p:txBody>
-          <a:bodyPr wrap="square" lIns="12700" rIns="12700" tIns="12700" bIns="12700">
-            <a:spAutoFit/>
-          </a:bodyPr>
-          <a:lstStyle/>
-          <a:p>
-            <a:pPr algn="ctr">
-              <a:defRPr sz="1400" b="0">
-                <a:solidFill>
-                  <a:srgbClr val="FFFFFF"/>
-                </a:solidFill>
-                <a:latin typeface="Play"/>
-                <a:ea typeface="Play"/>
-                <a:cs typeface="Play"/>
-              </a:defRPr>
-            </a:pPr>
-            <a:r>
-              <a:rPr sz="1400" b="0">
-                <a:solidFill>
-                  <a:srgbClr val="FFFFFF"/>
-                </a:solidFill>
-                <a:latin typeface="Play"/>
-                <a:ea typeface="Play"/>
-                <a:cs typeface="Play"/>
-              </a:rPr>
-              <a:t>Первый квартал 2027 генерация иллюстраций</a:t>
-            </a:r>
-          </a:p>
-        </p:txBody>
-      </p:sp>
-    </p:spTree>
-  </p:cSld>
-  <p:clrMapOvr>
-    <a:masterClrMapping/>
-  </p:clrMapOvr>
-</p:sld>
-</file>
-
-<file path=ppt/slides/slide35.xml><?xml version="1.0" encoding="utf-8"?>
-<p:sld xmlns:a="http://schemas.openxmlformats.org/drawingml/2006/main" xmlns:p="http://schemas.openxmlformats.org/presentationml/2006/main" xmlns:r="http://schemas.openxmlformats.org/officeDocument/2006/relationships">
-  <p:cSld>
-    <p:spTree>
-      <p:nvGrpSpPr>
-        <p:cNvPr id="1" name=""/>
-        <p:cNvGrpSpPr/>
-        <p:nvPr/>
-      </p:nvGrpSpPr>
-      <p:grpSpPr/>
-      <p:sp>
-        <p:nvSpPr>
-          <p:cNvPr id="2" name="title"/>
-          <p:cNvSpPr txBox="1"/>
-          <p:nvPr/>
-        </p:nvSpPr>
-        <p:spPr>
-          <a:xfrm>
-            <a:off x="429280" y="424715"/>
-            <a:ext cx="7827264" cy="822960"/>
-          </a:xfrm>
-          <a:prstGeom prst="rect">
-            <a:avLst/>
-          </a:prstGeom>
-          <a:noFill/>
-        </p:spPr>
-        <p:txBody>
-          <a:bodyPr wrap="square" lIns="76200" rIns="76200" tIns="50800" bIns="50800">
-            <a:spAutoFit/>
-          </a:bodyPr>
-          <a:lstStyle/>
-          <a:p>
-            <a:pPr algn="l">
-              <a:spcAft>
-                <a:spcPts val="300"/>
-              </a:spcAft>
-              <a:defRPr sz="3200">
-                <a:solidFill>
-                  <a:srgbClr val="FFFFFF"/>
-                </a:solidFill>
-                <a:latin typeface="Play"/>
-                <a:ea typeface="Play"/>
-                <a:cs typeface="Play"/>
-              </a:defRPr>
-            </a:pPr>
-            <a:r>
-              <a:rPr sz="3200">
-                <a:solidFill>
-                  <a:srgbClr val="FFFFFF"/>
-                </a:solidFill>
-                <a:latin typeface="Play"/>
-                <a:ea typeface="Play"/>
-                <a:cs typeface="Play"/>
-              </a:rPr>
-              <a:t>Риски</a:t>
-            </a:r>
-          </a:p>
-        </p:txBody>
-      </p:sp>
-      <p:sp>
-        <p:nvSpPr>
-          <p:cNvPr id="3" name="card_0"/>
-          <p:cNvSpPr txBox="1"/>
-          <p:nvPr/>
-        </p:nvSpPr>
-        <p:spPr>
-          <a:xfrm>
-            <a:off x="568147" y="1818894"/>
-            <a:ext cx="3115177" cy="3220212"/>
-          </a:xfrm>
-          <a:prstGeom prst="rect">
-            <a:avLst/>
-          </a:prstGeom>
-          <a:noFill/>
-        </p:spPr>
-        <p:txBody>
-          <a:bodyPr wrap="square" lIns="76200" rIns="76200" tIns="50800" bIns="50800">
-            <a:spAutoFit/>
-          </a:bodyPr>
-          <a:lstStyle/>
-          <a:p>
-            <a:pPr algn="l">
-              <a:spcAft>
-                <a:spcPts val="300"/>
-              </a:spcAft>
-              <a:defRPr sz="2800" b="0">
-                <a:solidFill>
-                  <a:srgbClr val="FFFFFF"/>
-                </a:solidFill>
-                <a:latin typeface="Play"/>
-                <a:ea typeface="Play"/>
-                <a:cs typeface="Play"/>
-              </a:defRPr>
-            </a:pPr>
-            <a:r>
-              <a:rPr sz="2800" b="0">
-                <a:solidFill>
-                  <a:srgbClr val="FFFFFF"/>
-                </a:solidFill>
-                <a:latin typeface="Play"/>
-                <a:ea typeface="Play"/>
-                <a:cs typeface="Play"/>
-              </a:rPr>
-              <a:t>Слабая модель может выдумать цифру, аудит проверяет каждое число</a:t>
-            </a:r>
-          </a:p>
-        </p:txBody>
-      </p:sp>
-      <p:sp>
-        <p:nvSpPr>
-          <p:cNvPr id="4" name="card_1"/>
-          <p:cNvSpPr txBox="1"/>
-          <p:nvPr/>
-        </p:nvSpPr>
-        <p:spPr>
-          <a:xfrm>
-            <a:off x="4209288" y="1818894"/>
-            <a:ext cx="3115177" cy="3220212"/>
-          </a:xfrm>
-          <a:prstGeom prst="rect">
-            <a:avLst/>
-          </a:prstGeom>
-          <a:noFill/>
-        </p:spPr>
-        <p:txBody>
-          <a:bodyPr wrap="square" lIns="76200" rIns="76200" tIns="50800" bIns="50800">
-            <a:spAutoFit/>
-          </a:bodyPr>
-          <a:lstStyle/>
-          <a:p>
-            <a:pPr algn="l">
-              <a:spcAft>
-                <a:spcPts val="300"/>
-              </a:spcAft>
-              <a:defRPr sz="2800" b="0">
-                <a:solidFill>
-                  <a:srgbClr val="FFFFFF"/>
-                </a:solidFill>
-                <a:latin typeface="Play"/>
-                <a:ea typeface="Play"/>
-                <a:cs typeface="Play"/>
-              </a:defRPr>
-            </a:pPr>
-            <a:r>
-              <a:rPr sz="2800" b="0">
-                <a:solidFill>
-                  <a:srgbClr val="FFFFFF"/>
-                </a:solidFill>
-                <a:latin typeface="Play"/>
-                <a:ea typeface="Play"/>
-                <a:cs typeface="Play"/>
-              </a:rPr>
-              <a:t>Незнакомый шаблон может быть плохо сделанным, сервис использует рабочую область</a:t>
-            </a:r>
-          </a:p>
-        </p:txBody>
-      </p:sp>
-      <p:sp>
-        <p:nvSpPr>
-          <p:cNvPr id="5" name="card_2"/>
-          <p:cNvSpPr txBox="1"/>
-          <p:nvPr/>
-        </p:nvSpPr>
-        <p:spPr>
-          <a:xfrm>
-            <a:off x="7881884" y="1818894"/>
-            <a:ext cx="3115177" cy="3220212"/>
-          </a:xfrm>
-          <a:prstGeom prst="rect">
-            <a:avLst/>
-          </a:prstGeom>
-          <a:noFill/>
-        </p:spPr>
-        <p:txBody>
-          <a:bodyPr wrap="square" lIns="76200" rIns="76200" tIns="50800" bIns="50800">
-            <a:spAutoFit/>
-          </a:bodyPr>
-          <a:lstStyle/>
-          <a:p>
-            <a:pPr algn="l">
-              <a:spcAft>
-                <a:spcPts val="300"/>
-              </a:spcAft>
-              <a:defRPr sz="2800" b="0">
-                <a:solidFill>
-                  <a:srgbClr val="FFFFFF"/>
-                </a:solidFill>
-                <a:latin typeface="Play"/>
-                <a:ea typeface="Play"/>
-                <a:cs typeface="Play"/>
-              </a:defRPr>
-            </a:pPr>
-            <a:r>
-              <a:rPr sz="2800" b="0">
-                <a:solidFill>
-                  <a:srgbClr val="FFFFFF"/>
-                </a:solidFill>
-                <a:latin typeface="Play"/>
-                <a:ea typeface="Play"/>
-                <a:cs typeface="Play"/>
-              </a:rPr>
-              <a:t>Нагрузка выше 20 задач требует внешней очереди</a:t>
-            </a:r>
-          </a:p>
-        </p:txBody>
-      </p:sp>
-    </p:spTree>
-  </p:cSld>
-  <p:clrMapOvr>
-    <a:masterClrMapping/>
-  </p:clrMapOvr>
-</p:sld>
-</file>
-
-<file path=ppt/slides/slide36.xml><?xml version="1.0" encoding="utf-8"?>
-<p:sld xmlns:a="http://schemas.openxmlformats.org/drawingml/2006/main" xmlns:p="http://schemas.openxmlformats.org/presentationml/2006/main" xmlns:r="http://schemas.openxmlformats.org/officeDocument/2006/relationships">
-  <p:cSld>
-    <p:spTree>
-      <p:nvGrpSpPr>
-        <p:cNvPr id="1" name=""/>
-        <p:cNvGrpSpPr/>
-        <p:nvPr/>
-      </p:nvGrpSpPr>
-      <p:grpSpPr/>
-      <p:sp>
-        <p:nvSpPr>
-          <p:cNvPr id="679" name="Google Shape;679;p31"/>
-          <p:cNvSpPr/>
-          <p:nvPr/>
-        </p:nvSpPr>
-        <p:spPr>
-          <a:xfrm>
-            <a:off x="0" y="4748271"/>
-            <a:ext cx="12192000" cy="2109730"/>
-          </a:xfrm>
-          <a:prstGeom prst="rect">
-            <a:avLst/>
-          </a:prstGeom>
-          <a:gradFill>
-            <a:gsLst>
-              <a:gs pos="0">
-                <a:srgbClr val="0077FF">
-                  <a:alpha val="61961"/>
-                </a:srgbClr>
-              </a:gs>
-              <a:gs pos="99000">
-                <a:srgbClr val="00AEE8"/>
-              </a:gs>
-              <a:gs pos="100000">
-                <a:srgbClr val="00AEE8"/>
-              </a:gs>
-            </a:gsLst>
-            <a:lin ang="14400000" scaled="0"/>
-          </a:gradFill>
-          <a:ln>
-            <a:noFill/>
-          </a:ln>
-        </p:spPr>
-        <p:txBody>
-          <a:bodyPr anchorCtr="0" anchor="ctr" bIns="0" lIns="108000" spcFirstLastPara="1" rIns="91425" wrap="square" tIns="0">
-            <a:noAutofit/>
-          </a:bodyPr>
-          <a:lstStyle/>
-          <a:p>
-            <a:pPr indent="0" lvl="0" marL="0" marR="0" rtl="0" algn="l">
-              <a:spcBef>
-                <a:spcPts val="0"/>
-              </a:spcBef>
-              <a:spcAft>
-                <a:spcPts val="0"/>
-              </a:spcAft>
-              <a:buNone/>
-            </a:pPr>
-            <a:r>
-              <a:t/>
-            </a:r>
-            <a:endParaRPr sz="1100">
-              <a:solidFill>
-                <a:schemeClr val="lt1"/>
-              </a:solidFill>
-              <a:latin typeface="Play"/>
-              <a:ea typeface="Play"/>
-              <a:cs typeface="Play"/>
-              <a:sym typeface="Play"/>
-            </a:endParaRPr>
-          </a:p>
-        </p:txBody>
-      </p:sp>
-      <p:sp>
-        <p:nvSpPr>
-          <p:cNvPr id="680" name="Rounded Rectangle 679"/>
-          <p:cNvSpPr/>
-          <p:nvPr/>
-        </p:nvSpPr>
-        <p:spPr>
-          <a:xfrm>
-            <a:off x="300817" y="297715"/>
-            <a:ext cx="11317142" cy="3505296"/>
           </a:xfrm>
           <a:prstGeom prst="roundRect">
             <a:avLst/>
@@ -11873,21 +10733,21 @@
                 <a:ea typeface="Play"/>
                 <a:cs typeface="Play"/>
               </a:rPr>
-              <a:t>План пилота</a:t>
+              <a:t>Результаты пилота: время</a:t>
             </a:r>
           </a:p>
         </p:txBody>
       </p:sp>
       <p:sp>
         <p:nvSpPr>
-          <p:cNvPr id="682" name="card_0"/>
+          <p:cNvPr id="682" name="body"/>
           <p:cNvSpPr txBox="1"/>
           <p:nvPr/>
         </p:nvSpPr>
         <p:spPr>
           <a:xfrm>
-            <a:off x="580217" y="1989452"/>
-            <a:ext cx="3331220" cy="1717212"/>
+            <a:off x="427817" y="1837052"/>
+            <a:ext cx="11312347" cy="1341120"/>
           </a:xfrm>
           <a:prstGeom prst="rect">
             <a:avLst/>
@@ -11904,7 +10764,7 @@
               <a:spcAft>
                 <a:spcPts val="300"/>
               </a:spcAft>
-              <a:defRPr sz="2400" b="0">
+              <a:defRPr sz="1600">
                 <a:solidFill>
                   <a:srgbClr val="FFFFFF"/>
                 </a:solidFill>
@@ -11914,7 +10774,7 @@
               </a:defRPr>
             </a:pPr>
             <a:r>
-              <a:rPr sz="2400" b="0">
+              <a:rPr sz="1600">
                 <a:solidFill>
                   <a:srgbClr val="FFFFFF"/>
                 </a:solidFill>
@@ -11922,21 +10782,163 @@
                 <a:ea typeface="Play"/>
                 <a:cs typeface="Play"/>
               </a:rPr>
-              <a:t>Третий квартал 2026 подключение 4 команд, домен и HTTPS</a:t>
+              <a:t>• 68 презентаций собраны за 6 недель</a:t>
+            </a:r>
+          </a:p>
+          <a:p>
+            <a:pPr algn="l">
+              <a:spcAft>
+                <a:spcPts val="300"/>
+              </a:spcAft>
+              <a:defRPr sz="1600">
+                <a:solidFill>
+                  <a:srgbClr val="FFFFFF"/>
+                </a:solidFill>
+                <a:latin typeface="Play"/>
+                <a:ea typeface="Play"/>
+                <a:cs typeface="Play"/>
+              </a:defRPr>
+            </a:pPr>
+            <a:r>
+              <a:rPr sz="1600">
+                <a:solidFill>
+                  <a:srgbClr val="FFFFFF"/>
+                </a:solidFill>
+                <a:latin typeface="Play"/>
+                <a:ea typeface="Play"/>
+                <a:cs typeface="Play"/>
+              </a:rPr>
+              <a:t>• Средняя сборка 4 минуты вместо 186</a:t>
+            </a:r>
+          </a:p>
+          <a:p>
+            <a:pPr algn="l">
+              <a:spcAft>
+                <a:spcPts val="300"/>
+              </a:spcAft>
+              <a:defRPr sz="1600">
+                <a:solidFill>
+                  <a:srgbClr val="FFFFFF"/>
+                </a:solidFill>
+                <a:latin typeface="Play"/>
+                <a:ea typeface="Play"/>
+                <a:cs typeface="Play"/>
+              </a:defRPr>
+            </a:pPr>
+            <a:r>
+              <a:rPr sz="1600">
+                <a:solidFill>
+                  <a:srgbClr val="FFFFFF"/>
+                </a:solidFill>
+                <a:latin typeface="Play"/>
+                <a:ea typeface="Play"/>
+                <a:cs typeface="Play"/>
+              </a:rPr>
+              <a:t>• Время до первой версии сократилось с 6 дней до 1</a:t>
             </a:r>
           </a:p>
         </p:txBody>
       </p:sp>
+      <p:graphicFrame>
+        <p:nvGraphicFramePr>
+          <p:cNvPr id="683" name="Chart 682"/>
+          <p:cNvGraphicFramePr>
+            <a:graphicFrameLocks noGrp="1"/>
+          </p:cNvGraphicFramePr>
+          <p:nvPr/>
+        </p:nvGraphicFramePr>
+        <p:xfrm>
+          <a:off x="427817" y="3349622"/>
+          <a:ext cx="11312347" cy="2579598"/>
+        </p:xfrm>
+        <a:graphic>
+          <a:graphicData uri="http://schemas.openxmlformats.org/drawingml/2006/chart">
+            <c:chart xmlns:c="http://schemas.openxmlformats.org/drawingml/2006/chart" r:id="rId2"/>
+          </a:graphicData>
+        </a:graphic>
+      </p:graphicFrame>
+    </p:spTree>
+  </p:cSld>
+  <p:clrMapOvr>
+    <a:masterClrMapping/>
+  </p:clrMapOvr>
+</p:sld>
+</file>
+
+<file path=ppt/slides/slide34.xml><?xml version="1.0" encoding="utf-8"?>
+<p:sld xmlns:a="http://schemas.openxmlformats.org/drawingml/2006/main" xmlns:p="http://schemas.openxmlformats.org/presentationml/2006/main" xmlns:r="http://schemas.openxmlformats.org/officeDocument/2006/relationships">
+  <p:cSld>
+    <p:spTree>
+      <p:nvGrpSpPr>
+        <p:cNvPr id="1" name=""/>
+        <p:cNvGrpSpPr/>
+        <p:nvPr/>
+      </p:nvGrpSpPr>
+      <p:grpSpPr/>
+      <p:pic>
+        <p:nvPicPr>
+          <p:cNvPr id="620" name="Google Shape;620;p28"/>
+          <p:cNvPicPr preferRelativeResize="0"/>
+          <p:nvPr/>
+        </p:nvPicPr>
+        <p:blipFill rotWithShape="1">
+          <a:blip r:embed="rId3">
+            <a:alphaModFix/>
+          </a:blip>
+          <a:srcRect b="0" l="0" r="0" t="0"/>
+          <a:stretch/>
+        </p:blipFill>
+        <p:spPr>
+          <a:xfrm>
+            <a:off x="398723" y="6160516"/>
+            <a:ext cx="1857481" cy="292671"/>
+          </a:xfrm>
+          <a:prstGeom prst="rect">
+            <a:avLst/>
+          </a:prstGeom>
+          <a:noFill/>
+          <a:ln>
+            <a:noFill/>
+          </a:ln>
+        </p:spPr>
+      </p:pic>
+      <p:pic>
+        <p:nvPicPr>
+          <p:cNvPr descr=" " id="621" name="Google Shape;621;p28"/>
+          <p:cNvPicPr preferRelativeResize="0"/>
+          <p:nvPr/>
+        </p:nvPicPr>
+        <p:blipFill rotWithShape="1">
+          <a:blip r:embed="rId4">
+            <a:alphaModFix/>
+          </a:blip>
+          <a:srcRect b="0" l="0" r="0" t="0"/>
+          <a:stretch/>
+        </p:blipFill>
+        <p:spPr>
+          <a:xfrm>
+            <a:off x="11093496" y="6238282"/>
+            <a:ext cx="690517" cy="216000"/>
+          </a:xfrm>
+          <a:prstGeom prst="rect">
+            <a:avLst/>
+          </a:prstGeom>
+          <a:noFill/>
+          <a:ln>
+            <a:noFill/>
+          </a:ln>
+        </p:spPr>
+      </p:pic>
       <p:sp>
         <p:nvSpPr>
-          <p:cNvPr id="683" name="card_1"/>
+          <p:cNvPr id="622" name="title"/>
           <p:cNvSpPr txBox="1"/>
           <p:nvPr/>
         </p:nvSpPr>
         <p:spPr>
           <a:xfrm>
-            <a:off x="4369978" y="1989452"/>
-            <a:ext cx="3331220" cy="1717212"/>
+            <a:off x="429280" y="424715"/>
+            <a:ext cx="7827264" cy="1183640"/>
           </a:xfrm>
           <a:prstGeom prst="rect">
             <a:avLst/>
@@ -11953,7 +10955,7 @@
               <a:spcAft>
                 <a:spcPts val="300"/>
               </a:spcAft>
-              <a:defRPr sz="2400" b="0">
+              <a:defRPr sz="3200">
                 <a:solidFill>
                   <a:srgbClr val="FFFFFF"/>
                 </a:solidFill>
@@ -11963,7 +10965,7 @@
               </a:defRPr>
             </a:pPr>
             <a:r>
-              <a:rPr sz="2400" b="0">
+              <a:rPr sz="3200">
                 <a:solidFill>
                   <a:srgbClr val="FFFFFF"/>
                 </a:solidFill>
@@ -11971,21 +10973,21 @@
                 <a:ea typeface="Play"/>
                 <a:cs typeface="Play"/>
               </a:rPr>
-              <a:t>Четвёртый квартал 2026 доступ для всей компании, интеграция с хранилищем</a:t>
+              <a:t>Результаты пилота: качество и нагрузка</a:t>
             </a:r>
           </a:p>
         </p:txBody>
       </p:sp>
       <p:sp>
         <p:nvSpPr>
-          <p:cNvPr id="684" name="card_2"/>
+          <p:cNvPr id="623" name="body"/>
           <p:cNvSpPr txBox="1"/>
           <p:nvPr/>
         </p:nvSpPr>
         <p:spPr>
           <a:xfrm>
-            <a:off x="8159739" y="1989452"/>
-            <a:ext cx="3331220" cy="1717212"/>
+            <a:off x="429280" y="1745515"/>
+            <a:ext cx="11310884" cy="944880"/>
           </a:xfrm>
           <a:prstGeom prst="rect">
             <a:avLst/>
@@ -12002,7 +11004,7 @@
               <a:spcAft>
                 <a:spcPts val="300"/>
               </a:spcAft>
-              <a:defRPr sz="2400" b="0">
+              <a:defRPr sz="2000">
                 <a:solidFill>
                   <a:srgbClr val="FFFFFF"/>
                 </a:solidFill>
@@ -12012,7 +11014,7 @@
               </a:defRPr>
             </a:pPr>
             <a:r>
-              <a:rPr sz="2400" b="0">
+              <a:rPr sz="2000">
                 <a:solidFill>
                   <a:srgbClr val="FFFFFF"/>
                 </a:solidFill>
@@ -12020,7 +11022,872 @@
                 <a:ea typeface="Play"/>
                 <a:cs typeface="Play"/>
               </a:rPr>
-              <a:t>Первый квартал 2027 генерация иллюстраций под стиль шаблона</a:t>
+              <a:t>• Нарушений фирменного стиля 2 из 68 колод</a:t>
+            </a:r>
+          </a:p>
+          <a:p>
+            <a:pPr algn="l">
+              <a:spcAft>
+                <a:spcPts val="300"/>
+              </a:spcAft>
+              <a:defRPr sz="2000">
+                <a:solidFill>
+                  <a:srgbClr val="FFFFFF"/>
+                </a:solidFill>
+                <a:latin typeface="Play"/>
+                <a:ea typeface="Play"/>
+                <a:cs typeface="Play"/>
+              </a:defRPr>
+            </a:pPr>
+            <a:r>
+              <a:rPr sz="2000">
+                <a:solidFill>
+                  <a:srgbClr val="FFFFFF"/>
+                </a:solidFill>
+                <a:latin typeface="Play"/>
+                <a:ea typeface="Play"/>
+                <a:cs typeface="Play"/>
+              </a:rPr>
+              <a:t>• Дизайнеры закрыли 38 запросов вместо 11 в неделю</a:t>
+            </a:r>
+          </a:p>
+        </p:txBody>
+      </p:sp>
+      <p:graphicFrame>
+        <p:nvGraphicFramePr>
+          <p:cNvPr id="624" name="Chart 623"/>
+          <p:cNvGraphicFramePr>
+            <a:graphicFrameLocks noGrp="1"/>
+          </p:cNvGraphicFramePr>
+          <p:nvPr/>
+        </p:nvGraphicFramePr>
+        <p:xfrm>
+          <a:off x="429280" y="2861845"/>
+          <a:ext cx="11310884" cy="2549047"/>
+        </p:xfrm>
+        <a:graphic>
+          <a:graphicData uri="http://schemas.openxmlformats.org/drawingml/2006/chart">
+            <c:chart xmlns:c="http://schemas.openxmlformats.org/drawingml/2006/chart" r:id="rId5"/>
+          </a:graphicData>
+        </a:graphic>
+      </p:graphicFrame>
+    </p:spTree>
+  </p:cSld>
+  <p:clrMapOvr>
+    <a:masterClrMapping/>
+  </p:clrMapOvr>
+</p:sld>
+</file>
+
+<file path=ppt/slides/slide35.xml><?xml version="1.0" encoding="utf-8"?>
+<p:sld xmlns:a="http://schemas.openxmlformats.org/drawingml/2006/main" xmlns:p="http://schemas.openxmlformats.org/presentationml/2006/main" xmlns:r="http://schemas.openxmlformats.org/officeDocument/2006/relationships">
+  <p:cSld>
+    <p:spTree>
+      <p:nvGrpSpPr>
+        <p:cNvPr id="1" name=""/>
+        <p:cNvGrpSpPr/>
+        <p:nvPr/>
+      </p:nvGrpSpPr>
+      <p:grpSpPr/>
+      <p:sp>
+        <p:nvSpPr>
+          <p:cNvPr id="2" name="title"/>
+          <p:cNvSpPr txBox="1"/>
+          <p:nvPr/>
+        </p:nvSpPr>
+        <p:spPr>
+          <a:xfrm>
+            <a:off x="429280" y="424715"/>
+            <a:ext cx="7827264" cy="822960"/>
+          </a:xfrm>
+          <a:prstGeom prst="rect">
+            <a:avLst/>
+          </a:prstGeom>
+          <a:noFill/>
+        </p:spPr>
+        <p:txBody>
+          <a:bodyPr wrap="square" lIns="76200" rIns="76200" tIns="50800" bIns="50800">
+            <a:spAutoFit/>
+          </a:bodyPr>
+          <a:lstStyle/>
+          <a:p>
+            <a:pPr algn="l">
+              <a:spcAft>
+                <a:spcPts val="300"/>
+              </a:spcAft>
+              <a:defRPr sz="3200">
+                <a:solidFill>
+                  <a:srgbClr val="FFFFFF"/>
+                </a:solidFill>
+                <a:latin typeface="Play"/>
+                <a:ea typeface="Play"/>
+                <a:cs typeface="Play"/>
+              </a:defRPr>
+            </a:pPr>
+            <a:r>
+              <a:rPr sz="3200">
+                <a:solidFill>
+                  <a:srgbClr val="FFFFFF"/>
+                </a:solidFill>
+                <a:latin typeface="Play"/>
+                <a:ea typeface="Play"/>
+                <a:cs typeface="Play"/>
+              </a:rPr>
+              <a:t>Стоимость и ресурсы</a:t>
+            </a:r>
+          </a:p>
+        </p:txBody>
+      </p:sp>
+      <p:sp>
+        <p:nvSpPr>
+          <p:cNvPr id="3" name="card_0"/>
+          <p:cNvSpPr txBox="1"/>
+          <p:nvPr/>
+        </p:nvSpPr>
+        <p:spPr>
+          <a:xfrm>
+            <a:off x="568147" y="1818894"/>
+            <a:ext cx="3115177" cy="3220212"/>
+          </a:xfrm>
+          <a:prstGeom prst="rect">
+            <a:avLst/>
+          </a:prstGeom>
+          <a:noFill/>
+        </p:spPr>
+        <p:txBody>
+          <a:bodyPr wrap="square" lIns="76200" rIns="76200" tIns="50800" bIns="50800">
+            <a:spAutoFit/>
+          </a:bodyPr>
+          <a:lstStyle/>
+          <a:p>
+            <a:pPr algn="l">
+              <a:spcAft>
+                <a:spcPts val="300"/>
+              </a:spcAft>
+              <a:defRPr sz="2800" b="0">
+                <a:solidFill>
+                  <a:srgbClr val="FFFFFF"/>
+                </a:solidFill>
+                <a:latin typeface="Play"/>
+                <a:ea typeface="Play"/>
+                <a:cs typeface="Play"/>
+              </a:defRPr>
+            </a:pPr>
+            <a:r>
+              <a:rPr sz="2800" b="0">
+                <a:solidFill>
+                  <a:srgbClr val="FFFFFF"/>
+                </a:solidFill>
+                <a:latin typeface="Play"/>
+                <a:ea typeface="Play"/>
+                <a:cs typeface="Play"/>
+              </a:rPr>
+              <a:t>Сервис работает на 2 vCPU / 2 ГБ RAM</a:t>
+            </a:r>
+          </a:p>
+        </p:txBody>
+      </p:sp>
+      <p:sp>
+        <p:nvSpPr>
+          <p:cNvPr id="4" name="card_1"/>
+          <p:cNvSpPr txBox="1"/>
+          <p:nvPr/>
+        </p:nvSpPr>
+        <p:spPr>
+          <a:xfrm>
+            <a:off x="4209288" y="1818894"/>
+            <a:ext cx="3115177" cy="3220212"/>
+          </a:xfrm>
+          <a:prstGeom prst="rect">
+            <a:avLst/>
+          </a:prstGeom>
+          <a:noFill/>
+        </p:spPr>
+        <p:txBody>
+          <a:bodyPr wrap="square" lIns="76200" rIns="76200" tIns="50800" bIns="50800">
+            <a:spAutoFit/>
+          </a:bodyPr>
+          <a:lstStyle/>
+          <a:p>
+            <a:pPr algn="l">
+              <a:spcAft>
+                <a:spcPts val="300"/>
+              </a:spcAft>
+              <a:defRPr sz="2800" b="0">
+                <a:solidFill>
+                  <a:srgbClr val="FFFFFF"/>
+                </a:solidFill>
+                <a:latin typeface="Play"/>
+                <a:ea typeface="Play"/>
+                <a:cs typeface="Play"/>
+              </a:defRPr>
+            </a:pPr>
+            <a:r>
+              <a:rPr sz="2800" b="0">
+                <a:solidFill>
+                  <a:srgbClr val="FFFFFF"/>
+                </a:solidFill>
+                <a:latin typeface="Play"/>
+                <a:ea typeface="Play"/>
+                <a:cs typeface="Play"/>
+              </a:rPr>
+              <a:t>Модель gpt-oss-20b подключается по OpenAI-совместимому протоколу</a:t>
+            </a:r>
+          </a:p>
+        </p:txBody>
+      </p:sp>
+      <p:sp>
+        <p:nvSpPr>
+          <p:cNvPr id="5" name="card_2"/>
+          <p:cNvSpPr txBox="1"/>
+          <p:nvPr/>
+        </p:nvSpPr>
+        <p:spPr>
+          <a:xfrm>
+            <a:off x="7881884" y="1818894"/>
+            <a:ext cx="3115177" cy="3220212"/>
+          </a:xfrm>
+          <a:prstGeom prst="rect">
+            <a:avLst/>
+          </a:prstGeom>
+          <a:noFill/>
+        </p:spPr>
+        <p:txBody>
+          <a:bodyPr wrap="square" lIns="76200" rIns="76200" tIns="50800" bIns="50800">
+            <a:spAutoFit/>
+          </a:bodyPr>
+          <a:lstStyle/>
+          <a:p>
+            <a:pPr algn="l">
+              <a:spcAft>
+                <a:spcPts val="300"/>
+              </a:spcAft>
+              <a:defRPr sz="2800" b="0">
+                <a:solidFill>
+                  <a:srgbClr val="FFFFFF"/>
+                </a:solidFill>
+                <a:latin typeface="Play"/>
+                <a:ea typeface="Play"/>
+                <a:cs typeface="Play"/>
+              </a:defRPr>
+            </a:pPr>
+            <a:r>
+              <a:rPr sz="2800" b="0">
+                <a:solidFill>
+                  <a:srgbClr val="FFFFFF"/>
+                </a:solidFill>
+                <a:latin typeface="Play"/>
+                <a:ea typeface="Play"/>
+                <a:cs typeface="Play"/>
+              </a:rPr>
+              <a:t>Стоимость инференса за 6 недель 1 400 рублей</a:t>
+            </a:r>
+          </a:p>
+        </p:txBody>
+      </p:sp>
+    </p:spTree>
+  </p:cSld>
+  <p:clrMapOvr>
+    <a:masterClrMapping/>
+  </p:clrMapOvr>
+</p:sld>
+</file>
+
+<file path=ppt/slides/slide36.xml><?xml version="1.0" encoding="utf-8"?>
+<p:sld xmlns:a="http://schemas.openxmlformats.org/drawingml/2006/main" xmlns:p="http://schemas.openxmlformats.org/presentationml/2006/main" xmlns:r="http://schemas.openxmlformats.org/officeDocument/2006/relationships">
+  <p:cSld>
+    <p:spTree>
+      <p:nvGrpSpPr>
+        <p:cNvPr id="1" name=""/>
+        <p:cNvGrpSpPr/>
+        <p:nvPr/>
+      </p:nvGrpSpPr>
+      <p:grpSpPr/>
+      <p:sp>
+        <p:nvSpPr>
+          <p:cNvPr id="2" name="title"/>
+          <p:cNvSpPr txBox="1"/>
+          <p:nvPr/>
+        </p:nvSpPr>
+        <p:spPr>
+          <a:xfrm>
+            <a:off x="429280" y="424715"/>
+            <a:ext cx="7827264" cy="822960"/>
+          </a:xfrm>
+          <a:prstGeom prst="rect">
+            <a:avLst/>
+          </a:prstGeom>
+          <a:noFill/>
+        </p:spPr>
+        <p:txBody>
+          <a:bodyPr wrap="square" lIns="76200" rIns="76200" tIns="50800" bIns="50800">
+            <a:spAutoFit/>
+          </a:bodyPr>
+          <a:lstStyle/>
+          <a:p>
+            <a:pPr algn="l">
+              <a:spcAft>
+                <a:spcPts val="300"/>
+              </a:spcAft>
+              <a:defRPr sz="3200">
+                <a:solidFill>
+                  <a:srgbClr val="FFFFFF"/>
+                </a:solidFill>
+                <a:latin typeface="Play"/>
+                <a:ea typeface="Play"/>
+                <a:cs typeface="Play"/>
+              </a:defRPr>
+            </a:pPr>
+            <a:r>
+              <a:rPr sz="3200">
+                <a:solidFill>
+                  <a:srgbClr val="FFFFFF"/>
+                </a:solidFill>
+                <a:latin typeface="Play"/>
+                <a:ea typeface="Play"/>
+                <a:cs typeface="Play"/>
+              </a:rPr>
+              <a:t>Риски</a:t>
+            </a:r>
+          </a:p>
+        </p:txBody>
+      </p:sp>
+      <p:sp>
+        <p:nvSpPr>
+          <p:cNvPr id="3" name="body"/>
+          <p:cNvSpPr txBox="1"/>
+          <p:nvPr/>
+        </p:nvSpPr>
+        <p:spPr>
+          <a:xfrm>
+            <a:off x="429280" y="1492575"/>
+            <a:ext cx="11310884" cy="1341120"/>
+          </a:xfrm>
+          <a:prstGeom prst="rect">
+            <a:avLst/>
+          </a:prstGeom>
+          <a:noFill/>
+        </p:spPr>
+        <p:txBody>
+          <a:bodyPr wrap="square" lIns="76200" rIns="76200" tIns="50800" bIns="50800">
+            <a:spAutoFit/>
+          </a:bodyPr>
+          <a:lstStyle/>
+          <a:p>
+            <a:pPr algn="l">
+              <a:spcAft>
+                <a:spcPts val="300"/>
+              </a:spcAft>
+              <a:defRPr sz="1600">
+                <a:solidFill>
+                  <a:srgbClr val="FFFFFF"/>
+                </a:solidFill>
+                <a:latin typeface="Play"/>
+                <a:ea typeface="Play"/>
+                <a:cs typeface="Play"/>
+              </a:defRPr>
+            </a:pPr>
+            <a:r>
+              <a:rPr sz="1600">
+                <a:solidFill>
+                  <a:srgbClr val="FFFFFF"/>
+                </a:solidFill>
+                <a:latin typeface="Play"/>
+                <a:ea typeface="Play"/>
+                <a:cs typeface="Play"/>
+              </a:rPr>
+              <a:t>• Модель может выдумать цифры, аудит проверяет каждое число</a:t>
+            </a:r>
+          </a:p>
+          <a:p>
+            <a:pPr algn="l">
+              <a:spcAft>
+                <a:spcPts val="300"/>
+              </a:spcAft>
+              <a:defRPr sz="1600">
+                <a:solidFill>
+                  <a:srgbClr val="FFFFFF"/>
+                </a:solidFill>
+                <a:latin typeface="Play"/>
+                <a:ea typeface="Play"/>
+                <a:cs typeface="Play"/>
+              </a:defRPr>
+            </a:pPr>
+            <a:r>
+              <a:rPr sz="1600">
+                <a:solidFill>
+                  <a:srgbClr val="FFFFFF"/>
+                </a:solidFill>
+                <a:latin typeface="Play"/>
+                <a:ea typeface="Play"/>
+                <a:cs typeface="Play"/>
+              </a:rPr>
+              <a:t>• Плохой шаблон приводит к использованию рабочей области</a:t>
+            </a:r>
+          </a:p>
+          <a:p>
+            <a:pPr algn="l">
+              <a:spcAft>
+                <a:spcPts val="300"/>
+              </a:spcAft>
+              <a:defRPr sz="1600">
+                <a:solidFill>
+                  <a:srgbClr val="FFFFFF"/>
+                </a:solidFill>
+                <a:latin typeface="Play"/>
+                <a:ea typeface="Play"/>
+                <a:cs typeface="Play"/>
+              </a:defRPr>
+            </a:pPr>
+            <a:r>
+              <a:rPr sz="1600">
+                <a:solidFill>
+                  <a:srgbClr val="FFFFFF"/>
+                </a:solidFill>
+                <a:latin typeface="Play"/>
+                <a:ea typeface="Play"/>
+                <a:cs typeface="Play"/>
+              </a:rPr>
+              <a:t>• Нагрузка выше 20 задач требует внешней очереди</a:t>
+            </a:r>
+          </a:p>
+        </p:txBody>
+      </p:sp>
+      <p:sp>
+        <p:nvSpPr>
+          <p:cNvPr id="4" name="Oval 3"/>
+          <p:cNvSpPr/>
+          <p:nvPr/>
+        </p:nvSpPr>
+        <p:spPr>
+          <a:xfrm>
+            <a:off x="1713709" y="3080206"/>
+            <a:ext cx="1100894" cy="1100894"/>
+          </a:xfrm>
+          <a:prstGeom prst="ellipse">
+            <a:avLst/>
+          </a:prstGeom>
+          <a:solidFill>
+            <a:srgbClr val="0077FF"/>
+          </a:solidFill>
+          <a:ln>
+            <a:noFill/>
+          </a:ln>
+        </p:spPr>
+        <p:style>
+          <a:lnRef idx="1">
+            <a:schemeClr val="accent1"/>
+          </a:lnRef>
+          <a:fillRef idx="3">
+            <a:schemeClr val="accent1"/>
+          </a:fillRef>
+          <a:effectRef idx="2">
+            <a:schemeClr val="accent1"/>
+          </a:effectRef>
+          <a:fontRef idx="minor">
+            <a:schemeClr val="lt1"/>
+          </a:fontRef>
+        </p:style>
+        <p:txBody>
+          <a:bodyPr rtlCol="0" anchor="ctr"/>
+          <a:lstStyle/>
+          <a:p>
+            <a:pPr algn="ctr"/>
+          </a:p>
+        </p:txBody>
+      </p:sp>
+      <p:sp>
+        <p:nvSpPr>
+          <p:cNvPr id="5" name="Oval 4"/>
+          <p:cNvSpPr/>
+          <p:nvPr/>
+        </p:nvSpPr>
+        <p:spPr>
+          <a:xfrm>
+            <a:off x="1888851" y="3255348"/>
+            <a:ext cx="750610" cy="750610"/>
+          </a:xfrm>
+          <a:prstGeom prst="ellipse">
+            <a:avLst/>
+          </a:prstGeom>
+          <a:solidFill>
+            <a:srgbClr val="111111"/>
+          </a:solidFill>
+          <a:ln>
+            <a:noFill/>
+          </a:ln>
+        </p:spPr>
+        <p:style>
+          <a:lnRef idx="1">
+            <a:schemeClr val="accent1"/>
+          </a:lnRef>
+          <a:fillRef idx="3">
+            <a:schemeClr val="accent1"/>
+          </a:fillRef>
+          <a:effectRef idx="2">
+            <a:schemeClr val="accent1"/>
+          </a:effectRef>
+          <a:fontRef idx="minor">
+            <a:schemeClr val="lt1"/>
+          </a:fontRef>
+        </p:style>
+        <p:txBody>
+          <a:bodyPr rtlCol="0" anchor="ctr"/>
+          <a:lstStyle/>
+          <a:p>
+            <a:pPr algn="ctr"/>
+          </a:p>
+        </p:txBody>
+      </p:sp>
+      <p:sp>
+        <p:nvSpPr>
+          <p:cNvPr id="6" name="Oval 5"/>
+          <p:cNvSpPr/>
+          <p:nvPr/>
+        </p:nvSpPr>
+        <p:spPr>
+          <a:xfrm>
+            <a:off x="2089014" y="3455511"/>
+            <a:ext cx="350284" cy="350284"/>
+          </a:xfrm>
+          <a:prstGeom prst="ellipse">
+            <a:avLst/>
+          </a:prstGeom>
+          <a:solidFill>
+            <a:srgbClr val="0077FF"/>
+          </a:solidFill>
+          <a:ln>
+            <a:noFill/>
+          </a:ln>
+        </p:spPr>
+        <p:style>
+          <a:lnRef idx="1">
+            <a:schemeClr val="accent1"/>
+          </a:lnRef>
+          <a:fillRef idx="3">
+            <a:schemeClr val="accent1"/>
+          </a:fillRef>
+          <a:effectRef idx="2">
+            <a:schemeClr val="accent1"/>
+          </a:effectRef>
+          <a:fontRef idx="minor">
+            <a:schemeClr val="lt1"/>
+          </a:fontRef>
+        </p:style>
+        <p:txBody>
+          <a:bodyPr rtlCol="0" anchor="ctr"/>
+          <a:lstStyle/>
+          <a:p>
+            <a:pPr algn="ctr"/>
+          </a:p>
+        </p:txBody>
+      </p:sp>
+      <p:sp>
+        <p:nvSpPr>
+          <p:cNvPr id="7" name="TextBox 6"/>
+          <p:cNvSpPr txBox="1"/>
+          <p:nvPr/>
+        </p:nvSpPr>
+        <p:spPr>
+          <a:xfrm>
+            <a:off x="429280" y="4406284"/>
+            <a:ext cx="3669753" cy="1100894"/>
+          </a:xfrm>
+          <a:prstGeom prst="rect">
+            <a:avLst/>
+          </a:prstGeom>
+          <a:noFill/>
+        </p:spPr>
+        <p:txBody>
+          <a:bodyPr wrap="square" lIns="12700" rIns="12700" tIns="12700" bIns="12700">
+            <a:spAutoFit/>
+          </a:bodyPr>
+          <a:lstStyle/>
+          <a:p>
+            <a:pPr algn="ctr">
+              <a:defRPr sz="1400" b="0">
+                <a:solidFill>
+                  <a:srgbClr val="FFFFFF"/>
+                </a:solidFill>
+                <a:latin typeface="Play"/>
+                <a:ea typeface="Play"/>
+                <a:cs typeface="Play"/>
+              </a:defRPr>
+            </a:pPr>
+            <a:r>
+              <a:rPr sz="1400" b="0">
+                <a:solidFill>
+                  <a:srgbClr val="FFFFFF"/>
+                </a:solidFill>
+                <a:latin typeface="Play"/>
+                <a:ea typeface="Play"/>
+                <a:cs typeface="Play"/>
+              </a:rPr>
+              <a:t>Выдумка</a:t>
+            </a:r>
+          </a:p>
+        </p:txBody>
+      </p:sp>
+      <p:sp>
+        <p:nvSpPr>
+          <p:cNvPr id="8" name="Document 7"/>
+          <p:cNvSpPr/>
+          <p:nvPr/>
+        </p:nvSpPr>
+        <p:spPr>
+          <a:xfrm>
+            <a:off x="5609335" y="3105226"/>
+            <a:ext cx="950772" cy="1050854"/>
+          </a:xfrm>
+          <a:prstGeom prst="flowChartDocument">
+            <a:avLst/>
+          </a:prstGeom>
+          <a:solidFill>
+            <a:srgbClr val="0077FF"/>
+          </a:solidFill>
+          <a:ln>
+            <a:noFill/>
+          </a:ln>
+        </p:spPr>
+        <p:style>
+          <a:lnRef idx="1">
+            <a:schemeClr val="accent1"/>
+          </a:lnRef>
+          <a:fillRef idx="3">
+            <a:schemeClr val="accent1"/>
+          </a:fillRef>
+          <a:effectRef idx="2">
+            <a:schemeClr val="accent1"/>
+          </a:effectRef>
+          <a:fontRef idx="minor">
+            <a:schemeClr val="lt1"/>
+          </a:fontRef>
+        </p:style>
+        <p:txBody>
+          <a:bodyPr rtlCol="0" anchor="ctr"/>
+          <a:lstStyle/>
+          <a:p>
+            <a:pPr algn="ctr"/>
+          </a:p>
+        </p:txBody>
+      </p:sp>
+      <p:sp>
+        <p:nvSpPr>
+          <p:cNvPr id="9" name="TextBox 8"/>
+          <p:cNvSpPr txBox="1"/>
+          <p:nvPr/>
+        </p:nvSpPr>
+        <p:spPr>
+          <a:xfrm>
+            <a:off x="4249845" y="4406284"/>
+            <a:ext cx="3669753" cy="1100894"/>
+          </a:xfrm>
+          <a:prstGeom prst="rect">
+            <a:avLst/>
+          </a:prstGeom>
+          <a:noFill/>
+        </p:spPr>
+        <p:txBody>
+          <a:bodyPr wrap="square" lIns="12700" rIns="12700" tIns="12700" bIns="12700">
+            <a:spAutoFit/>
+          </a:bodyPr>
+          <a:lstStyle/>
+          <a:p>
+            <a:pPr algn="ctr">
+              <a:defRPr sz="1400" b="0">
+                <a:solidFill>
+                  <a:srgbClr val="FFFFFF"/>
+                </a:solidFill>
+                <a:latin typeface="Play"/>
+                <a:ea typeface="Play"/>
+                <a:cs typeface="Play"/>
+              </a:defRPr>
+            </a:pPr>
+            <a:r>
+              <a:rPr sz="1400" b="0">
+                <a:solidFill>
+                  <a:srgbClr val="FFFFFF"/>
+                </a:solidFill>
+                <a:latin typeface="Play"/>
+                <a:ea typeface="Play"/>
+                <a:cs typeface="Play"/>
+              </a:rPr>
+              <a:t>Плохой шаблон</a:t>
+            </a:r>
+          </a:p>
+        </p:txBody>
+      </p:sp>
+      <p:sp>
+        <p:nvSpPr>
+          <p:cNvPr id="10" name="Oval 9"/>
+          <p:cNvSpPr/>
+          <p:nvPr/>
+        </p:nvSpPr>
+        <p:spPr>
+          <a:xfrm>
+            <a:off x="9354839" y="3080206"/>
+            <a:ext cx="1100894" cy="1100894"/>
+          </a:xfrm>
+          <a:prstGeom prst="ellipse">
+            <a:avLst/>
+          </a:prstGeom>
+          <a:solidFill>
+            <a:srgbClr val="0077FF"/>
+          </a:solidFill>
+          <a:ln>
+            <a:noFill/>
+          </a:ln>
+        </p:spPr>
+        <p:style>
+          <a:lnRef idx="1">
+            <a:schemeClr val="accent1"/>
+          </a:lnRef>
+          <a:fillRef idx="3">
+            <a:schemeClr val="accent1"/>
+          </a:fillRef>
+          <a:effectRef idx="2">
+            <a:schemeClr val="accent1"/>
+          </a:effectRef>
+          <a:fontRef idx="minor">
+            <a:schemeClr val="lt1"/>
+          </a:fontRef>
+        </p:style>
+        <p:txBody>
+          <a:bodyPr rtlCol="0" anchor="ctr"/>
+          <a:lstStyle/>
+          <a:p>
+            <a:pPr algn="ctr"/>
+          </a:p>
+        </p:txBody>
+      </p:sp>
+      <p:sp>
+        <p:nvSpPr>
+          <p:cNvPr id="11" name="Oval 10"/>
+          <p:cNvSpPr/>
+          <p:nvPr/>
+        </p:nvSpPr>
+        <p:spPr>
+          <a:xfrm>
+            <a:off x="9529982" y="3255348"/>
+            <a:ext cx="750610" cy="750610"/>
+          </a:xfrm>
+          <a:prstGeom prst="ellipse">
+            <a:avLst/>
+          </a:prstGeom>
+          <a:solidFill>
+            <a:srgbClr val="111111"/>
+          </a:solidFill>
+          <a:ln>
+            <a:noFill/>
+          </a:ln>
+        </p:spPr>
+        <p:style>
+          <a:lnRef idx="1">
+            <a:schemeClr val="accent1"/>
+          </a:lnRef>
+          <a:fillRef idx="3">
+            <a:schemeClr val="accent1"/>
+          </a:fillRef>
+          <a:effectRef idx="2">
+            <a:schemeClr val="accent1"/>
+          </a:effectRef>
+          <a:fontRef idx="minor">
+            <a:schemeClr val="lt1"/>
+          </a:fontRef>
+        </p:style>
+        <p:txBody>
+          <a:bodyPr rtlCol="0" anchor="ctr"/>
+          <a:lstStyle/>
+          <a:p>
+            <a:pPr algn="ctr"/>
+          </a:p>
+        </p:txBody>
+      </p:sp>
+      <p:sp>
+        <p:nvSpPr>
+          <p:cNvPr id="12" name="Oval 11"/>
+          <p:cNvSpPr/>
+          <p:nvPr/>
+        </p:nvSpPr>
+        <p:spPr>
+          <a:xfrm>
+            <a:off x="9730144" y="3455511"/>
+            <a:ext cx="350284" cy="350284"/>
+          </a:xfrm>
+          <a:prstGeom prst="ellipse">
+            <a:avLst/>
+          </a:prstGeom>
+          <a:solidFill>
+            <a:srgbClr val="0077FF"/>
+          </a:solidFill>
+          <a:ln>
+            <a:noFill/>
+          </a:ln>
+        </p:spPr>
+        <p:style>
+          <a:lnRef idx="1">
+            <a:schemeClr val="accent1"/>
+          </a:lnRef>
+          <a:fillRef idx="3">
+            <a:schemeClr val="accent1"/>
+          </a:fillRef>
+          <a:effectRef idx="2">
+            <a:schemeClr val="accent1"/>
+          </a:effectRef>
+          <a:fontRef idx="minor">
+            <a:schemeClr val="lt1"/>
+          </a:fontRef>
+        </p:style>
+        <p:txBody>
+          <a:bodyPr rtlCol="0" anchor="ctr"/>
+          <a:lstStyle/>
+          <a:p>
+            <a:pPr algn="ctr"/>
+          </a:p>
+        </p:txBody>
+      </p:sp>
+      <p:sp>
+        <p:nvSpPr>
+          <p:cNvPr id="13" name="TextBox 12"/>
+          <p:cNvSpPr txBox="1"/>
+          <p:nvPr/>
+        </p:nvSpPr>
+        <p:spPr>
+          <a:xfrm>
+            <a:off x="8070410" y="4406284"/>
+            <a:ext cx="3669753" cy="1100894"/>
+          </a:xfrm>
+          <a:prstGeom prst="rect">
+            <a:avLst/>
+          </a:prstGeom>
+          <a:noFill/>
+        </p:spPr>
+        <p:txBody>
+          <a:bodyPr wrap="square" lIns="12700" rIns="12700" tIns="12700" bIns="12700">
+            <a:spAutoFit/>
+          </a:bodyPr>
+          <a:lstStyle/>
+          <a:p>
+            <a:pPr algn="ctr">
+              <a:defRPr sz="1400" b="0">
+                <a:solidFill>
+                  <a:srgbClr val="FFFFFF"/>
+                </a:solidFill>
+                <a:latin typeface="Play"/>
+                <a:ea typeface="Play"/>
+                <a:cs typeface="Play"/>
+              </a:defRPr>
+            </a:pPr>
+            <a:r>
+              <a:rPr sz="1400" b="0">
+                <a:solidFill>
+                  <a:srgbClr val="FFFFFF"/>
+                </a:solidFill>
+                <a:latin typeface="Play"/>
+                <a:ea typeface="Play"/>
+                <a:cs typeface="Play"/>
+              </a:rPr>
+              <a:t>Перегрузка</a:t>
             </a:r>
           </a:p>
         </p:txBody>
@@ -12087,21 +11954,21 @@
                 <a:ea typeface="Play"/>
                 <a:cs typeface="Play"/>
               </a:rPr>
-              <a:t>Пилотные результаты</a:t>
+              <a:t>План</a:t>
             </a:r>
           </a:p>
         </p:txBody>
       </p:sp>
       <p:sp>
         <p:nvSpPr>
-          <p:cNvPr id="3" name="card_0"/>
+          <p:cNvPr id="3" name="body"/>
           <p:cNvSpPr txBox="1"/>
           <p:nvPr/>
         </p:nvSpPr>
         <p:spPr>
           <a:xfrm>
-            <a:off x="568147" y="1818894"/>
-            <a:ext cx="3115177" cy="3220212"/>
+            <a:off x="429280" y="1664162"/>
+            <a:ext cx="11310884" cy="1341120"/>
           </a:xfrm>
           <a:prstGeom prst="rect">
             <a:avLst/>
@@ -12118,7 +11985,7 @@
               <a:spcAft>
                 <a:spcPts val="300"/>
               </a:spcAft>
-              <a:defRPr sz="2800" b="0">
+              <a:defRPr sz="1600">
                 <a:solidFill>
                   <a:srgbClr val="FFFFFF"/>
                 </a:solidFill>
@@ -12128,7 +11995,7 @@
               </a:defRPr>
             </a:pPr>
             <a:r>
-              <a:rPr sz="2800" b="0">
+              <a:rPr sz="1600">
                 <a:solidFill>
                   <a:srgbClr val="FFFFFF"/>
                 </a:solidFill>
@@ -12136,21 +12003,159 @@
                 <a:ea typeface="Play"/>
                 <a:cs typeface="Play"/>
               </a:rPr>
-              <a:t>Пилот шёл 6 недель на двух командах, собрал 68 презентаций</a:t>
+              <a:t>• Q3 2026: подключение 4 команд, домен и HTTPS</a:t>
+            </a:r>
+          </a:p>
+          <a:p>
+            <a:pPr algn="l">
+              <a:spcAft>
+                <a:spcPts val="300"/>
+              </a:spcAft>
+              <a:defRPr sz="1600">
+                <a:solidFill>
+                  <a:srgbClr val="FFFFFF"/>
+                </a:solidFill>
+                <a:latin typeface="Play"/>
+                <a:ea typeface="Play"/>
+                <a:cs typeface="Play"/>
+              </a:defRPr>
+            </a:pPr>
+            <a:r>
+              <a:rPr sz="1600">
+                <a:solidFill>
+                  <a:srgbClr val="FFFFFF"/>
+                </a:solidFill>
+                <a:latin typeface="Play"/>
+                <a:ea typeface="Play"/>
+                <a:cs typeface="Play"/>
+              </a:rPr>
+              <a:t>• Q4 2026: доступ для всей компании, интеграция с хранилищем</a:t>
+            </a:r>
+          </a:p>
+          <a:p>
+            <a:pPr algn="l">
+              <a:spcAft>
+                <a:spcPts val="300"/>
+              </a:spcAft>
+              <a:defRPr sz="1600">
+                <a:solidFill>
+                  <a:srgbClr val="FFFFFF"/>
+                </a:solidFill>
+                <a:latin typeface="Play"/>
+                <a:ea typeface="Play"/>
+                <a:cs typeface="Play"/>
+              </a:defRPr>
+            </a:pPr>
+            <a:r>
+              <a:rPr sz="1600">
+                <a:solidFill>
+                  <a:srgbClr val="FFFFFF"/>
+                </a:solidFill>
+                <a:latin typeface="Play"/>
+                <a:ea typeface="Play"/>
+                <a:cs typeface="Play"/>
+              </a:rPr>
+              <a:t>• Q1 2027: генерация иллюстраций под стиль шаблона</a:t>
             </a:r>
           </a:p>
         </p:txBody>
       </p:sp>
       <p:sp>
         <p:nvSpPr>
-          <p:cNvPr id="4" name="card_1"/>
+          <p:cNvPr id="4" name="Rectangle 3"/>
+          <p:cNvSpPr/>
+          <p:nvPr/>
+        </p:nvSpPr>
+        <p:spPr>
+          <a:xfrm>
+            <a:off x="429280" y="4207600"/>
+            <a:ext cx="11310884" cy="67230"/>
+          </a:xfrm>
+          <a:prstGeom prst="rect">
+            <a:avLst/>
+          </a:prstGeom>
+          <a:solidFill>
+            <a:srgbClr val="0077FF"/>
+          </a:solidFill>
+          <a:ln>
+            <a:noFill/>
+          </a:ln>
+        </p:spPr>
+        <p:style>
+          <a:lnRef idx="1">
+            <a:schemeClr val="accent1"/>
+          </a:lnRef>
+          <a:fillRef idx="3">
+            <a:schemeClr val="accent1"/>
+          </a:fillRef>
+          <a:effectRef idx="2">
+            <a:schemeClr val="accent1"/>
+          </a:effectRef>
+          <a:fontRef idx="minor">
+            <a:schemeClr val="lt1"/>
+          </a:fontRef>
+        </p:style>
+        <p:txBody>
+          <a:bodyPr rtlCol="0" anchor="ctr"/>
+          <a:lstStyle/>
+          <a:p>
+            <a:pPr algn="ctr"/>
+          </a:p>
+        </p:txBody>
+      </p:sp>
+      <p:sp>
+        <p:nvSpPr>
+          <p:cNvPr id="5" name="Oval 4"/>
+          <p:cNvSpPr/>
+          <p:nvPr/>
+        </p:nvSpPr>
+        <p:spPr>
+          <a:xfrm>
+            <a:off x="2067915" y="3994703"/>
+            <a:ext cx="493024" cy="493024"/>
+          </a:xfrm>
+          <a:prstGeom prst="ellipse">
+            <a:avLst/>
+          </a:prstGeom>
+          <a:solidFill>
+            <a:srgbClr val="0077FF"/>
+          </a:solidFill>
+          <a:ln>
+            <a:noFill/>
+          </a:ln>
+        </p:spPr>
+        <p:style>
+          <a:lnRef idx="1">
+            <a:schemeClr val="accent1"/>
+          </a:lnRef>
+          <a:fillRef idx="3">
+            <a:schemeClr val="accent1"/>
+          </a:fillRef>
+          <a:effectRef idx="2">
+            <a:schemeClr val="accent1"/>
+          </a:effectRef>
+          <a:fontRef idx="minor">
+            <a:schemeClr val="lt1"/>
+          </a:fontRef>
+        </p:style>
+        <p:txBody>
+          <a:bodyPr rtlCol="0" anchor="ctr"/>
+          <a:lstStyle/>
+          <a:p>
+            <a:pPr algn="ctr"/>
+          </a:p>
+        </p:txBody>
+      </p:sp>
+      <p:sp>
+        <p:nvSpPr>
+          <p:cNvPr id="6" name="TextBox 5"/>
           <p:cNvSpPr txBox="1"/>
           <p:nvPr/>
         </p:nvSpPr>
         <p:spPr>
           <a:xfrm>
-            <a:off x="4209288" y="1818894"/>
-            <a:ext cx="3115177" cy="3220212"/>
+            <a:off x="429280" y="3176732"/>
+            <a:ext cx="5655442" cy="851587"/>
           </a:xfrm>
           <a:prstGeom prst="rect">
             <a:avLst/>
@@ -12158,16 +12163,13 @@
           <a:noFill/>
         </p:spPr>
         <p:txBody>
-          <a:bodyPr wrap="square" lIns="76200" rIns="76200" tIns="50800" bIns="50800">
+          <a:bodyPr wrap="square" lIns="12700" rIns="12700" tIns="12700" bIns="12700">
             <a:spAutoFit/>
           </a:bodyPr>
           <a:lstStyle/>
           <a:p>
-            <a:pPr algn="l">
-              <a:spcAft>
-                <a:spcPts val="300"/>
-              </a:spcAft>
-              <a:defRPr sz="2800" b="0">
+            <a:pPr algn="ctr">
+              <a:defRPr sz="1400" b="0">
                 <a:solidFill>
                   <a:srgbClr val="FFFFFF"/>
                 </a:solidFill>
@@ -12177,7 +12179,7 @@
               </a:defRPr>
             </a:pPr>
             <a:r>
-              <a:rPr sz="2800" b="0">
+              <a:rPr sz="1400" b="0">
                 <a:solidFill>
                   <a:srgbClr val="FFFFFF"/>
                 </a:solidFill>
@@ -12185,21 +12187,64 @@
                 <a:ea typeface="Play"/>
                 <a:cs typeface="Play"/>
               </a:rPr>
-              <a:t>Сервис ускорил сборку с 186 до 4 мин</a:t>
+              <a:t>Подключение 4 команд</a:t>
             </a:r>
           </a:p>
         </p:txBody>
       </p:sp>
       <p:sp>
         <p:nvSpPr>
-          <p:cNvPr id="5" name="card_2"/>
+          <p:cNvPr id="7" name="Oval 6"/>
+          <p:cNvSpPr/>
+          <p:nvPr/>
+        </p:nvSpPr>
+        <p:spPr>
+          <a:xfrm>
+            <a:off x="5838209" y="3994703"/>
+            <a:ext cx="493024" cy="493024"/>
+          </a:xfrm>
+          <a:prstGeom prst="ellipse">
+            <a:avLst/>
+          </a:prstGeom>
+          <a:solidFill>
+            <a:srgbClr val="0077FF"/>
+          </a:solidFill>
+          <a:ln>
+            <a:noFill/>
+          </a:ln>
+        </p:spPr>
+        <p:style>
+          <a:lnRef idx="1">
+            <a:schemeClr val="accent1"/>
+          </a:lnRef>
+          <a:fillRef idx="3">
+            <a:schemeClr val="accent1"/>
+          </a:fillRef>
+          <a:effectRef idx="2">
+            <a:schemeClr val="accent1"/>
+          </a:effectRef>
+          <a:fontRef idx="minor">
+            <a:schemeClr val="lt1"/>
+          </a:fontRef>
+        </p:style>
+        <p:txBody>
+          <a:bodyPr rtlCol="0" anchor="ctr"/>
+          <a:lstStyle/>
+          <a:p>
+            <a:pPr algn="ctr"/>
+          </a:p>
+        </p:txBody>
+      </p:sp>
+      <p:sp>
+        <p:nvSpPr>
+          <p:cNvPr id="8" name="TextBox 7"/>
           <p:cNvSpPr txBox="1"/>
           <p:nvPr/>
         </p:nvSpPr>
         <p:spPr>
           <a:xfrm>
-            <a:off x="7881884" y="1818894"/>
-            <a:ext cx="3115177" cy="3220212"/>
+            <a:off x="3257001" y="4700624"/>
+            <a:ext cx="5655442" cy="851587"/>
           </a:xfrm>
           <a:prstGeom prst="rect">
             <a:avLst/>
@@ -12207,16 +12252,13 @@
           <a:noFill/>
         </p:spPr>
         <p:txBody>
-          <a:bodyPr wrap="square" lIns="76200" rIns="76200" tIns="50800" bIns="50800">
+          <a:bodyPr wrap="square" lIns="12700" rIns="12700" tIns="12700" bIns="12700">
             <a:spAutoFit/>
           </a:bodyPr>
           <a:lstStyle/>
           <a:p>
-            <a:pPr algn="l">
-              <a:spcAft>
-                <a:spcPts val="300"/>
-              </a:spcAft>
-              <a:defRPr sz="2800" b="0">
+            <a:pPr algn="ctr">
+              <a:defRPr sz="1400" b="0">
                 <a:solidFill>
                   <a:srgbClr val="FFFFFF"/>
                 </a:solidFill>
@@ -12226,7 +12268,7 @@
               </a:defRPr>
             </a:pPr>
             <a:r>
-              <a:rPr sz="2800" b="0">
+              <a:rPr sz="1400" b="0">
                 <a:solidFill>
                   <a:srgbClr val="FFFFFF"/>
                 </a:solidFill>
@@ -12234,7 +12276,96 @@
                 <a:ea typeface="Play"/>
                 <a:cs typeface="Play"/>
               </a:rPr>
-              <a:t>Нарушения стиля 2 из 68, исправлены автоматически</a:t>
+              <a:t>Доступ для всей компании</a:t>
+            </a:r>
+          </a:p>
+        </p:txBody>
+      </p:sp>
+      <p:sp>
+        <p:nvSpPr>
+          <p:cNvPr id="9" name="Oval 8"/>
+          <p:cNvSpPr/>
+          <p:nvPr/>
+        </p:nvSpPr>
+        <p:spPr>
+          <a:xfrm>
+            <a:off x="9608504" y="3994703"/>
+            <a:ext cx="493024" cy="493024"/>
+          </a:xfrm>
+          <a:prstGeom prst="ellipse">
+            <a:avLst/>
+          </a:prstGeom>
+          <a:solidFill>
+            <a:srgbClr val="0077FF"/>
+          </a:solidFill>
+          <a:ln>
+            <a:noFill/>
+          </a:ln>
+        </p:spPr>
+        <p:style>
+          <a:lnRef idx="1">
+            <a:schemeClr val="accent1"/>
+          </a:lnRef>
+          <a:fillRef idx="3">
+            <a:schemeClr val="accent1"/>
+          </a:fillRef>
+          <a:effectRef idx="2">
+            <a:schemeClr val="accent1"/>
+          </a:effectRef>
+          <a:fontRef idx="minor">
+            <a:schemeClr val="lt1"/>
+          </a:fontRef>
+        </p:style>
+        <p:txBody>
+          <a:bodyPr rtlCol="0" anchor="ctr"/>
+          <a:lstStyle/>
+          <a:p>
+            <a:pPr algn="ctr"/>
+          </a:p>
+        </p:txBody>
+      </p:sp>
+      <p:sp>
+        <p:nvSpPr>
+          <p:cNvPr id="10" name="TextBox 9"/>
+          <p:cNvSpPr txBox="1"/>
+          <p:nvPr/>
+        </p:nvSpPr>
+        <p:spPr>
+          <a:xfrm>
+            <a:off x="6084722" y="3176732"/>
+            <a:ext cx="5655442" cy="851587"/>
+          </a:xfrm>
+          <a:prstGeom prst="rect">
+            <a:avLst/>
+          </a:prstGeom>
+          <a:noFill/>
+        </p:spPr>
+        <p:txBody>
+          <a:bodyPr wrap="square" lIns="12700" rIns="12700" tIns="12700" bIns="12700">
+            <a:spAutoFit/>
+          </a:bodyPr>
+          <a:lstStyle/>
+          <a:p>
+            <a:pPr algn="ctr">
+              <a:defRPr sz="1400" b="0">
+                <a:solidFill>
+                  <a:srgbClr val="FFFFFF"/>
+                </a:solidFill>
+                <a:latin typeface="Play"/>
+                <a:ea typeface="Play"/>
+                <a:cs typeface="Play"/>
+              </a:defRPr>
+            </a:pPr>
+            <a:r>
+              <a:rPr sz="1400" b="0">
+                <a:solidFill>
+                  <a:srgbClr val="FFFFFF"/>
+                </a:solidFill>
+                <a:latin typeface="Play"/>
+                <a:ea typeface="Play"/>
+                <a:cs typeface="Play"/>
+              </a:rPr>
+              <a:t>Генерация иллюстраций</a:t>
             </a:r>
           </a:p>
         </p:txBody>
@@ -12411,7 +12542,7 @@
                 <a:ea typeface="Play"/>
                 <a:cs typeface="Play"/>
               </a:rPr>
-              <a:t>Показатели после пилота</a:t>
+              <a:t>Что мы просим решить</a:t>
             </a:r>
           </a:p>
         </p:txBody>
@@ -12442,7 +12573,7 @@
               <a:spcAft>
                 <a:spcPts val="300"/>
               </a:spcAft>
-              <a:defRPr sz="2400" b="0">
+              <a:defRPr sz="2800" b="0">
                 <a:solidFill>
                   <a:srgbClr val="FFFFFF"/>
                 </a:solidFill>
@@ -12452,7 +12583,7 @@
               </a:defRPr>
             </a:pPr>
             <a:r>
-              <a:rPr sz="2400" b="0">
+              <a:rPr sz="2800" b="0">
                 <a:solidFill>
                   <a:srgbClr val="FFFFFF"/>
                 </a:solidFill>
@@ -12460,7 +12591,7 @@
                 <a:ea typeface="Play"/>
                 <a:cs typeface="Play"/>
               </a:rPr>
-              <a:t>Запросы закрыты 38 вместо 11, рутина ушла в сервис</a:t>
+              <a:t>Запуск сервиса на всю компанию</a:t>
             </a:r>
           </a:p>
         </p:txBody>
@@ -12509,7 +12640,7 @@
                 <a:ea typeface="Play"/>
                 <a:cs typeface="Play"/>
               </a:rPr>
-              <a:t>Время до первой версии сократилось с 6 дней до 1</a:t>
+              <a:t>Выделение бюджета на поддержку и развитие</a:t>
             </a:r>
           </a:p>
         </p:txBody>
@@ -12558,7 +12689,7 @@
                 <a:ea typeface="Play"/>
                 <a:cs typeface="Play"/>
               </a:rPr>
-              <a:t>Сервис работает на 2 vCPU / 2 ГБ RAM</a:t>
+              <a:t>Поддержка интеграции с корпоративными системами</a:t>
             </a:r>
           </a:p>
         </p:txBody>
@@ -12691,8 +12822,8 @@
         </p:nvSpPr>
         <p:spPr>
           <a:xfrm>
-            <a:off x="300817" y="297715"/>
-            <a:ext cx="11566347" cy="3377993"/>
+            <a:off x="302280" y="2164394"/>
+            <a:ext cx="8081385" cy="1247140"/>
           </a:xfrm>
           <a:prstGeom prst="roundRect">
             <a:avLst/>
@@ -12737,8 +12868,8 @@
         </p:nvSpPr>
         <p:spPr>
           <a:xfrm>
-            <a:off x="427817" y="424715"/>
-            <a:ext cx="11312347" cy="1018540"/>
+            <a:off x="429280" y="2291394"/>
+            <a:ext cx="7827385" cy="1018540"/>
           </a:xfrm>
           <a:prstGeom prst="rect">
             <a:avLst/>
@@ -12773,108 +12904,7 @@
                 <a:ea typeface="Play"/>
                 <a:cs typeface="Play"/>
               </a:rPr>
-              <a:t>Что мы просим решить</a:t>
-            </a:r>
-          </a:p>
-        </p:txBody>
-      </p:sp>
-      <p:sp>
-        <p:nvSpPr>
-          <p:cNvPr id="886" name="body"/>
-          <p:cNvSpPr txBox="1"/>
-          <p:nvPr/>
-        </p:nvSpPr>
-        <p:spPr>
-          <a:xfrm>
-            <a:off x="427817" y="2258389"/>
-            <a:ext cx="11312347" cy="1290320"/>
-          </a:xfrm>
-          <a:prstGeom prst="rect">
-            <a:avLst/>
-          </a:prstGeom>
-          <a:noFill/>
-        </p:spPr>
-        <p:txBody>
-          <a:bodyPr wrap="square" lIns="76200" rIns="76200" tIns="50800" bIns="50800">
-            <a:spAutoFit/>
-          </a:bodyPr>
-          <a:lstStyle/>
-          <a:p>
-            <a:pPr algn="l">
-              <a:spcAft>
-                <a:spcPts val="300"/>
-              </a:spcAft>
-              <a:defRPr sz="2400" b="1">
-                <a:solidFill>
-                  <a:srgbClr val="FFFFFF"/>
-                </a:solidFill>
-                <a:latin typeface="Play"/>
-                <a:ea typeface="Play"/>
-                <a:cs typeface="Play"/>
-              </a:defRPr>
-            </a:pPr>
-            <a:r>
-              <a:rPr sz="2400" b="1">
-                <a:solidFill>
-                  <a:srgbClr val="FFFFFF"/>
-                </a:solidFill>
-                <a:latin typeface="Play"/>
-                <a:ea typeface="Play"/>
-                <a:cs typeface="Play"/>
-              </a:rPr>
-              <a:t>• Попросим решение о запуске на всю компанию</a:t>
-            </a:r>
-          </a:p>
-          <a:p>
-            <a:pPr algn="l">
-              <a:spcAft>
-                <a:spcPts val="300"/>
-              </a:spcAft>
-              <a:defRPr sz="2400" b="1">
-                <a:solidFill>
-                  <a:srgbClr val="FFFFFF"/>
-                </a:solidFill>
-                <a:latin typeface="Play"/>
-                <a:ea typeface="Play"/>
-                <a:cs typeface="Play"/>
-              </a:defRPr>
-            </a:pPr>
-            <a:r>
-              <a:rPr sz="2400" b="1">
-                <a:solidFill>
-                  <a:srgbClr val="FFFFFF"/>
-                </a:solidFill>
-                <a:latin typeface="Play"/>
-                <a:ea typeface="Play"/>
-                <a:cs typeface="Play"/>
-              </a:rPr>
-              <a:t>• Ожидаем одобрения руководства</a:t>
-            </a:r>
-          </a:p>
-          <a:p>
-            <a:pPr algn="l">
-              <a:spcAft>
-                <a:spcPts val="300"/>
-              </a:spcAft>
-              <a:defRPr sz="2400" b="1">
-                <a:solidFill>
-                  <a:srgbClr val="FFFFFF"/>
-                </a:solidFill>
-                <a:latin typeface="Play"/>
-                <a:ea typeface="Play"/>
-                <a:cs typeface="Play"/>
-              </a:defRPr>
-            </a:pPr>
-            <a:r>
-              <a:rPr sz="2400" b="1">
-                <a:solidFill>
-                  <a:srgbClr val="FFFFFF"/>
-                </a:solidFill>
-                <a:latin typeface="Play"/>
-                <a:ea typeface="Play"/>
-                <a:cs typeface="Play"/>
-              </a:rPr>
-              <a:t>• Готовы к масштабированию</a:t>
+              <a:t>Вопросы?</a:t>
             </a:r>
           </a:p>
         </p:txBody>

--- a/samples/VK_WorkSpace_Клиентская_конференция_Шабл__classic.pptx
+++ b/samples/VK_WorkSpace_Клиентская_конференция_Шабл__classic.pptx
@@ -18,6 +18,8 @@
     <p:sldId id="292" r:id="rId45"/>
     <p:sldId id="293" r:id="rId46"/>
     <p:sldId id="294" r:id="rId47"/>
+    <p:sldId id="295" r:id="rId48"/>
+    <p:sldId id="296" r:id="rId49"/>
   </p:sldIdLst>
   <p:sldSz cy="6858000" cx="12192000"/>
   <p:notesSz cx="6858000" cy="9144000"/>
@@ -284,706 +286,6 @@
     </p:ext>
   </p:extLst>
 </p:presentation>
-</file>
-
-<file path=ppt/charts/chart1.xml><?xml version="1.0" encoding="utf-8"?>
-<c:chartSpace xmlns:c="http://schemas.openxmlformats.org/drawingml/2006/chart" xmlns:a="http://schemas.openxmlformats.org/drawingml/2006/main" xmlns:r="http://schemas.openxmlformats.org/officeDocument/2006/relationships">
-  <c:date1904 val="0"/>
-  <c:chart>
-    <c:autoTitleDeleted val="1"/>
-    <c:plotArea>
-      <c:barChart>
-        <c:barDir val="col"/>
-        <c:grouping val="clustered"/>
-        <c:ser>
-          <c:idx val="0"/>
-          <c:order val="0"/>
-          <c:tx>
-            <c:strRef>
-              <c:f>Sheet1!$B$1</c:f>
-              <c:strCache>
-                <c:ptCount val="1"/>
-                <c:pt idx="0">
-                  <c:v>Время</c:v>
-                </c:pt>
-              </c:strCache>
-            </c:strRef>
-          </c:tx>
-          <c:spPr>
-            <a:solidFill>
-              <a:srgbClr val="0077FF"/>
-            </a:solidFill>
-            <a:ln>
-              <a:solidFill>
-                <a:srgbClr val="0077FF"/>
-              </a:solidFill>
-            </a:ln>
-          </c:spPr>
-          <c:cat>
-            <c:strRef>
-              <c:f>Sheet1!$A$2:$A$3</c:f>
-              <c:strCache>
-                <c:ptCount val="2"/>
-                <c:pt idx="0">
-                  <c:v>Сборка</c:v>
-                </c:pt>
-                <c:pt idx="1">
-                  <c:v>Правки</c:v>
-                </c:pt>
-              </c:strCache>
-            </c:strRef>
-          </c:cat>
-          <c:val>
-            <c:numRef>
-              <c:f>Sheet1!$B$2:$B$3</c:f>
-              <c:numCache>
-                <c:formatCode>General</c:formatCode>
-                <c:ptCount val="2"/>
-                <c:pt idx="0">
-                  <c:v>186.0</c:v>
-                </c:pt>
-                <c:pt idx="1">
-                  <c:v>74.0</c:v>
-                </c:pt>
-              </c:numCache>
-            </c:numRef>
-          </c:val>
-        </c:ser>
-        <c:dLbls>
-          <c:numFmt formatCode="0&quot; мин&quot;" sourceLinked="0"/>
-          <c:txPr>
-            <a:bodyPr wrap="none"/>
-            <a:lstStyle/>
-            <a:p>
-              <a:pPr>
-                <a:defRPr sz="1100" b="0">
-                  <a:solidFill>
-                    <a:srgbClr val="FFFFFF"/>
-                  </a:solidFill>
-                  <a:latin typeface="Play"/>
-                  <a:ea typeface="Play"/>
-                  <a:cs typeface="Play"/>
-                </a:defRPr>
-              </a:pPr>
-            </a:p>
-          </c:txPr>
-          <c:dLblPos val="outEnd"/>
-          <c:showLegendKey val="0"/>
-          <c:showVal val="1"/>
-          <c:showCatName val="0"/>
-          <c:showSerName val="0"/>
-          <c:showPercent val="0"/>
-          <c:showBubbleSize val="0"/>
-          <c:showLeaderLines val="1"/>
-        </c:dLbls>
-        <c:gapWidth val="60"/>
-        <c:axId val="-2068027336"/>
-        <c:axId val="-2113994440"/>
-      </c:barChart>
-      <c:catAx>
-        <c:axId val="-2068027336"/>
-        <c:scaling>
-          <c:orientation val="minMax"/>
-        </c:scaling>
-        <c:delete val="0"/>
-        <c:axPos val="b"/>
-        <c:majorTickMark val="out"/>
-        <c:minorTickMark val="none"/>
-        <c:tickLblPos val="nextTo"/>
-        <c:txPr>
-          <a:bodyPr/>
-          <a:lstStyle/>
-          <a:p>
-            <a:pPr>
-              <a:defRPr sz="1100" b="0">
-                <a:solidFill>
-                  <a:srgbClr val="FFFFFF"/>
-                </a:solidFill>
-                <a:latin typeface="Play"/>
-                <a:ea typeface="Play"/>
-                <a:cs typeface="Play"/>
-              </a:defRPr>
-            </a:pPr>
-          </a:p>
-        </c:txPr>
-        <c:crossAx val="-2113994440"/>
-        <c:crosses val="autoZero"/>
-        <c:auto val="1"/>
-        <c:lblAlgn val="ctr"/>
-        <c:lblOffset val="100"/>
-        <c:noMultiLvlLbl val="0"/>
-      </c:catAx>
-      <c:valAx>
-        <c:axId val="-2113994440"/>
-        <c:scaling/>
-        <c:delete val="0"/>
-        <c:axPos val="l"/>
-        <c:majorGridlines>
-          <c:spPr>
-            <a:ln w="9525">
-              <a:solidFill>
-                <a:srgbClr val="3C3C3C"/>
-              </a:solidFill>
-            </a:ln>
-          </c:spPr>
-        </c:majorGridlines>
-        <c:title>
-          <c:tx>
-            <c:rich>
-              <a:bodyPr rot="0" vert="horz"/>
-              <a:lstStyle/>
-              <a:p>
-                <a:pPr>
-                  <a:defRPr sz="1100" b="0">
-                    <a:solidFill>
-                      <a:srgbClr val="FFFFFF"/>
-                    </a:solidFill>
-                    <a:latin typeface="Play"/>
-                    <a:ea typeface="Play"/>
-                    <a:cs typeface="Play"/>
-                  </a:defRPr>
-                </a:pPr>
-                <a:r>
-                  <a:t>Время, мин</a:t>
-                </a:r>
-              </a:p>
-            </c:rich>
-          </c:tx>
-          <c:layout/>
-          <c:overlay val="0"/>
-        </c:title>
-        <c:majorTickMark val="out"/>
-        <c:minorTickMark val="none"/>
-        <c:tickLblPos val="nextTo"/>
-        <c:txPr>
-          <a:bodyPr/>
-          <a:lstStyle/>
-          <a:p>
-            <a:pPr>
-              <a:defRPr sz="1100" b="0">
-                <a:solidFill>
-                  <a:srgbClr val="FFFFFF"/>
-                </a:solidFill>
-                <a:latin typeface="Play"/>
-                <a:ea typeface="Play"/>
-                <a:cs typeface="Play"/>
-              </a:defRPr>
-            </a:pPr>
-          </a:p>
-        </c:txPr>
-        <c:crossAx val="-2068027336"/>
-        <c:crosses val="autoZero"/>
-      </c:valAx>
-    </c:plotArea>
-    <c:dispBlanksAs val="gap"/>
-  </c:chart>
-  <c:txPr>
-    <a:bodyPr/>
-    <a:lstStyle/>
-    <a:p>
-      <a:pPr>
-        <a:defRPr sz="1200" b="0">
-          <a:solidFill>
-            <a:srgbClr val="FFFFFF"/>
-          </a:solidFill>
-          <a:latin typeface="Play"/>
-          <a:ea typeface="Play"/>
-          <a:cs typeface="Play"/>
-        </a:defRPr>
-      </a:pPr>
-      <a:endParaRPr lang="en-US"/>
-    </a:p>
-  </c:txPr>
-  <c:externalData r:id="rId1">
-    <c:autoUpdate val="0"/>
-  </c:externalData>
-</c:chartSpace>
-</file>
-
-<file path=ppt/charts/chart2.xml><?xml version="1.0" encoding="utf-8"?>
-<c:chartSpace xmlns:c="http://schemas.openxmlformats.org/drawingml/2006/chart" xmlns:a="http://schemas.openxmlformats.org/drawingml/2006/main" xmlns:r="http://schemas.openxmlformats.org/officeDocument/2006/relationships">
-  <c:date1904 val="0"/>
-  <c:chart>
-    <c:autoTitleDeleted val="1"/>
-    <c:plotArea>
-      <c:barChart>
-        <c:barDir val="col"/>
-        <c:grouping val="clustered"/>
-        <c:ser>
-          <c:idx val="0"/>
-          <c:order val="0"/>
-          <c:tx>
-            <c:strRef>
-              <c:f>Sheet1!$B$1</c:f>
-              <c:strCache>
-                <c:ptCount val="1"/>
-                <c:pt idx="0">
-                  <c:v>Текущее</c:v>
-                </c:pt>
-              </c:strCache>
-            </c:strRef>
-          </c:tx>
-          <c:spPr>
-            <a:solidFill>
-              <a:srgbClr val="0077FF"/>
-            </a:solidFill>
-            <a:ln>
-              <a:solidFill>
-                <a:srgbClr val="0077FF"/>
-              </a:solidFill>
-            </a:ln>
-          </c:spPr>
-          <c:cat>
-            <c:strRef>
-              <c:f>Sheet1!$A$2:$A$3</c:f>
-              <c:strCache>
-                <c:ptCount val="2"/>
-                <c:pt idx="0">
-                  <c:v>Сборка</c:v>
-                </c:pt>
-                <c:pt idx="1">
-                  <c:v>Первая версия</c:v>
-                </c:pt>
-              </c:strCache>
-            </c:strRef>
-          </c:cat>
-          <c:val>
-            <c:numRef>
-              <c:f>Sheet1!$B$2:$B$3</c:f>
-              <c:numCache>
-                <c:formatCode>General</c:formatCode>
-                <c:ptCount val="2"/>
-                <c:pt idx="0">
-                  <c:v>186.0</c:v>
-                </c:pt>
-                <c:pt idx="1">
-                  <c:v>6.0</c:v>
-                </c:pt>
-              </c:numCache>
-            </c:numRef>
-          </c:val>
-        </c:ser>
-        <c:ser>
-          <c:idx val="1"/>
-          <c:order val="1"/>
-          <c:tx>
-            <c:strRef>
-              <c:f>Sheet1!$C$1</c:f>
-              <c:strCache>
-                <c:ptCount val="1"/>
-                <c:pt idx="0">
-                  <c:v>Пилот</c:v>
-                </c:pt>
-              </c:strCache>
-            </c:strRef>
-          </c:tx>
-          <c:spPr>
-            <a:solidFill>
-              <a:srgbClr val="6DBCFF"/>
-            </a:solidFill>
-            <a:ln>
-              <a:solidFill>
-                <a:srgbClr val="6DBCFF"/>
-              </a:solidFill>
-            </a:ln>
-          </c:spPr>
-          <c:cat>
-            <c:strRef>
-              <c:f>Sheet1!$A$2:$A$3</c:f>
-              <c:strCache>
-                <c:ptCount val="2"/>
-                <c:pt idx="0">
-                  <c:v>Сборка</c:v>
-                </c:pt>
-                <c:pt idx="1">
-                  <c:v>Первая версия</c:v>
-                </c:pt>
-              </c:strCache>
-            </c:strRef>
-          </c:cat>
-          <c:val>
-            <c:numRef>
-              <c:f>Sheet1!$C$2:$C$3</c:f>
-              <c:numCache>
-                <c:formatCode>General</c:formatCode>
-                <c:ptCount val="2"/>
-                <c:pt idx="0">
-                  <c:v>4.0</c:v>
-                </c:pt>
-                <c:pt idx="1">
-                  <c:v>1.0</c:v>
-                </c:pt>
-              </c:numCache>
-            </c:numRef>
-          </c:val>
-        </c:ser>
-        <c:dLbls>
-          <c:numFmt formatCode="0&quot; мин&quot;" sourceLinked="0"/>
-          <c:txPr>
-            <a:bodyPr wrap="none"/>
-            <a:lstStyle/>
-            <a:p>
-              <a:pPr>
-                <a:defRPr sz="1100" b="0">
-                  <a:solidFill>
-                    <a:srgbClr val="FFFFFF"/>
-                  </a:solidFill>
-                  <a:latin typeface="Play"/>
-                  <a:ea typeface="Play"/>
-                  <a:cs typeface="Play"/>
-                </a:defRPr>
-              </a:pPr>
-            </a:p>
-          </c:txPr>
-          <c:dLblPos val="outEnd"/>
-          <c:showLegendKey val="0"/>
-          <c:showVal val="1"/>
-          <c:showCatName val="0"/>
-          <c:showSerName val="0"/>
-          <c:showPercent val="0"/>
-          <c:showBubbleSize val="0"/>
-          <c:showLeaderLines val="1"/>
-        </c:dLbls>
-        <c:gapWidth val="60"/>
-        <c:axId val="-2068027336"/>
-        <c:axId val="-2113994440"/>
-      </c:barChart>
-      <c:catAx>
-        <c:axId val="-2068027336"/>
-        <c:scaling>
-          <c:orientation val="minMax"/>
-        </c:scaling>
-        <c:delete val="0"/>
-        <c:axPos val="b"/>
-        <c:majorTickMark val="out"/>
-        <c:minorTickMark val="none"/>
-        <c:tickLblPos val="nextTo"/>
-        <c:txPr>
-          <a:bodyPr/>
-          <a:lstStyle/>
-          <a:p>
-            <a:pPr>
-              <a:defRPr sz="1100" b="0">
-                <a:solidFill>
-                  <a:srgbClr val="FFFFFF"/>
-                </a:solidFill>
-                <a:latin typeface="Play"/>
-                <a:ea typeface="Play"/>
-                <a:cs typeface="Play"/>
-              </a:defRPr>
-            </a:pPr>
-          </a:p>
-        </c:txPr>
-        <c:crossAx val="-2113994440"/>
-        <c:crosses val="autoZero"/>
-        <c:auto val="1"/>
-        <c:lblAlgn val="ctr"/>
-        <c:lblOffset val="100"/>
-        <c:noMultiLvlLbl val="0"/>
-      </c:catAx>
-      <c:valAx>
-        <c:axId val="-2113994440"/>
-        <c:scaling/>
-        <c:delete val="0"/>
-        <c:axPos val="l"/>
-        <c:majorGridlines>
-          <c:spPr>
-            <a:ln w="9525">
-              <a:solidFill>
-                <a:srgbClr val="3C3C3C"/>
-              </a:solidFill>
-            </a:ln>
-          </c:spPr>
-        </c:majorGridlines>
-        <c:title>
-          <c:tx>
-            <c:rich>
-              <a:bodyPr rot="0" vert="horz"/>
-              <a:lstStyle/>
-              <a:p>
-                <a:pPr>
-                  <a:defRPr sz="1100" b="0">
-                    <a:solidFill>
-                      <a:srgbClr val="FFFFFF"/>
-                    </a:solidFill>
-                    <a:latin typeface="Play"/>
-                    <a:ea typeface="Play"/>
-                    <a:cs typeface="Play"/>
-                  </a:defRPr>
-                </a:pPr>
-                <a:r>
-                  <a:t>мин</a:t>
-                </a:r>
-              </a:p>
-            </c:rich>
-          </c:tx>
-          <c:layout/>
-          <c:overlay val="0"/>
-        </c:title>
-        <c:majorTickMark val="out"/>
-        <c:minorTickMark val="none"/>
-        <c:tickLblPos val="nextTo"/>
-        <c:txPr>
-          <a:bodyPr/>
-          <a:lstStyle/>
-          <a:p>
-            <a:pPr>
-              <a:defRPr sz="1100" b="0">
-                <a:solidFill>
-                  <a:srgbClr val="FFFFFF"/>
-                </a:solidFill>
-                <a:latin typeface="Play"/>
-                <a:ea typeface="Play"/>
-                <a:cs typeface="Play"/>
-              </a:defRPr>
-            </a:pPr>
-          </a:p>
-        </c:txPr>
-        <c:crossAx val="-2068027336"/>
-        <c:crosses val="autoZero"/>
-      </c:valAx>
-    </c:plotArea>
-    <c:legend>
-      <c:legendPos val="b"/>
-      <c:overlay val="0"/>
-    </c:legend>
-    <c:dispBlanksAs val="gap"/>
-  </c:chart>
-  <c:txPr>
-    <a:bodyPr/>
-    <a:lstStyle/>
-    <a:p>
-      <a:pPr>
-        <a:defRPr sz="1200" b="0">
-          <a:solidFill>
-            <a:srgbClr val="FFFFFF"/>
-          </a:solidFill>
-          <a:latin typeface="Play"/>
-          <a:ea typeface="Play"/>
-          <a:cs typeface="Play"/>
-        </a:defRPr>
-      </a:pPr>
-      <a:endParaRPr lang="en-US"/>
-    </a:p>
-  </c:txPr>
-  <c:externalData r:id="rId1">
-    <c:autoUpdate val="0"/>
-  </c:externalData>
-</c:chartSpace>
-</file>
-
-<file path=ppt/charts/chart3.xml><?xml version="1.0" encoding="utf-8"?>
-<c:chartSpace xmlns:c="http://schemas.openxmlformats.org/drawingml/2006/chart" xmlns:a="http://schemas.openxmlformats.org/drawingml/2006/main" xmlns:r="http://schemas.openxmlformats.org/officeDocument/2006/relationships">
-  <c:date1904 val="0"/>
-  <c:chart>
-    <c:autoTitleDeleted val="1"/>
-    <c:plotArea>
-      <c:barChart>
-        <c:barDir val="col"/>
-        <c:grouping val="clustered"/>
-        <c:ser>
-          <c:idx val="0"/>
-          <c:order val="0"/>
-          <c:tx>
-            <c:strRef>
-              <c:f>Sheet1!$B$1</c:f>
-              <c:strCache>
-                <c:ptCount val="1"/>
-                <c:pt idx="0">
-                  <c:v>Запросы</c:v>
-                </c:pt>
-              </c:strCache>
-            </c:strRef>
-          </c:tx>
-          <c:spPr>
-            <a:solidFill>
-              <a:srgbClr val="0077FF"/>
-            </a:solidFill>
-            <a:ln>
-              <a:solidFill>
-                <a:srgbClr val="0077FF"/>
-              </a:solidFill>
-            </a:ln>
-          </c:spPr>
-          <c:cat>
-            <c:strRef>
-              <c:f>Sheet1!$A$2:$A$3</c:f>
-              <c:strCache>
-                <c:ptCount val="2"/>
-                <c:pt idx="0">
-                  <c:v>Текущая</c:v>
-                </c:pt>
-                <c:pt idx="1">
-                  <c:v>Пилот</c:v>
-                </c:pt>
-              </c:strCache>
-            </c:strRef>
-          </c:cat>
-          <c:val>
-            <c:numRef>
-              <c:f>Sheet1!$B$2:$B$3</c:f>
-              <c:numCache>
-                <c:formatCode>General</c:formatCode>
-                <c:ptCount val="2"/>
-                <c:pt idx="0">
-                  <c:v>11.0</c:v>
-                </c:pt>
-                <c:pt idx="1">
-                  <c:v>38.0</c:v>
-                </c:pt>
-              </c:numCache>
-            </c:numRef>
-          </c:val>
-        </c:ser>
-        <c:dLbls>
-          <c:numFmt formatCode="0&quot; запросов&quot;" sourceLinked="0"/>
-          <c:txPr>
-            <a:bodyPr wrap="none"/>
-            <a:lstStyle/>
-            <a:p>
-              <a:pPr>
-                <a:defRPr sz="1100" b="0">
-                  <a:solidFill>
-                    <a:srgbClr val="FFFFFF"/>
-                  </a:solidFill>
-                  <a:latin typeface="Play"/>
-                  <a:ea typeface="Play"/>
-                  <a:cs typeface="Play"/>
-                </a:defRPr>
-              </a:pPr>
-            </a:p>
-          </c:txPr>
-          <c:dLblPos val="outEnd"/>
-          <c:showLegendKey val="0"/>
-          <c:showVal val="1"/>
-          <c:showCatName val="0"/>
-          <c:showSerName val="0"/>
-          <c:showPercent val="0"/>
-          <c:showBubbleSize val="0"/>
-          <c:showLeaderLines val="1"/>
-        </c:dLbls>
-        <c:gapWidth val="60"/>
-        <c:axId val="-2068027336"/>
-        <c:axId val="-2113994440"/>
-      </c:barChart>
-      <c:catAx>
-        <c:axId val="-2068027336"/>
-        <c:scaling>
-          <c:orientation val="minMax"/>
-        </c:scaling>
-        <c:delete val="0"/>
-        <c:axPos val="b"/>
-        <c:majorTickMark val="out"/>
-        <c:minorTickMark val="none"/>
-        <c:tickLblPos val="nextTo"/>
-        <c:txPr>
-          <a:bodyPr/>
-          <a:lstStyle/>
-          <a:p>
-            <a:pPr>
-              <a:defRPr sz="1100" b="0">
-                <a:solidFill>
-                  <a:srgbClr val="FFFFFF"/>
-                </a:solidFill>
-                <a:latin typeface="Play"/>
-                <a:ea typeface="Play"/>
-                <a:cs typeface="Play"/>
-              </a:defRPr>
-            </a:pPr>
-          </a:p>
-        </c:txPr>
-        <c:crossAx val="-2113994440"/>
-        <c:crosses val="autoZero"/>
-        <c:auto val="1"/>
-        <c:lblAlgn val="ctr"/>
-        <c:lblOffset val="100"/>
-        <c:noMultiLvlLbl val="0"/>
-      </c:catAx>
-      <c:valAx>
-        <c:axId val="-2113994440"/>
-        <c:scaling/>
-        <c:delete val="0"/>
-        <c:axPos val="l"/>
-        <c:majorGridlines>
-          <c:spPr>
-            <a:ln w="9525">
-              <a:solidFill>
-                <a:srgbClr val="3C3C3C"/>
-              </a:solidFill>
-            </a:ln>
-          </c:spPr>
-        </c:majorGridlines>
-        <c:title>
-          <c:tx>
-            <c:rich>
-              <a:bodyPr rot="0" vert="horz"/>
-              <a:lstStyle/>
-              <a:p>
-                <a:pPr>
-                  <a:defRPr sz="1100" b="0">
-                    <a:solidFill>
-                      <a:srgbClr val="FFFFFF"/>
-                    </a:solidFill>
-                    <a:latin typeface="Play"/>
-                    <a:ea typeface="Play"/>
-                    <a:cs typeface="Play"/>
-                  </a:defRPr>
-                </a:pPr>
-                <a:r>
-                  <a:t>Запросы, запросов</a:t>
-                </a:r>
-              </a:p>
-            </c:rich>
-          </c:tx>
-          <c:layout/>
-          <c:overlay val="0"/>
-        </c:title>
-        <c:majorTickMark val="out"/>
-        <c:minorTickMark val="none"/>
-        <c:tickLblPos val="nextTo"/>
-        <c:txPr>
-          <a:bodyPr/>
-          <a:lstStyle/>
-          <a:p>
-            <a:pPr>
-              <a:defRPr sz="1100" b="0">
-                <a:solidFill>
-                  <a:srgbClr val="FFFFFF"/>
-                </a:solidFill>
-                <a:latin typeface="Play"/>
-                <a:ea typeface="Play"/>
-                <a:cs typeface="Play"/>
-              </a:defRPr>
-            </a:pPr>
-          </a:p>
-        </c:txPr>
-        <c:crossAx val="-2068027336"/>
-        <c:crosses val="autoZero"/>
-      </c:valAx>
-    </c:plotArea>
-    <c:dispBlanksAs val="gap"/>
-  </c:chart>
-  <c:txPr>
-    <a:bodyPr/>
-    <a:lstStyle/>
-    <a:p>
-      <a:pPr>
-        <a:defRPr sz="1200" b="0">
-          <a:solidFill>
-            <a:srgbClr val="FFFFFF"/>
-          </a:solidFill>
-          <a:latin typeface="Play"/>
-          <a:ea typeface="Play"/>
-          <a:cs typeface="Play"/>
-        </a:defRPr>
-      </a:pPr>
-      <a:endParaRPr lang="en-US"/>
-    </a:p>
-  </c:txPr>
-  <c:externalData r:id="rId1">
-    <c:autoUpdate val="0"/>
-  </c:externalData>
-</c:chartSpace>
 </file>
 
 <file path=ppt/notesMasters/notesMaster1.xml><?xml version="1.0" encoding="utf-8"?>
@@ -2814,6 +2116,138 @@
 </p:notes>
 </file>
 
+<file path=ppt/notesSlides/notesSlide40.xml><?xml version="1.0" encoding="utf-8"?>
+<p:notes xmlns:a="http://schemas.openxmlformats.org/drawingml/2006/main" xmlns:p="http://schemas.openxmlformats.org/presentationml/2006/main" xmlns:r="http://schemas.openxmlformats.org/officeDocument/2006/relationships">
+  <p:cSld>
+    <p:spTree>
+      <p:nvGrpSpPr>
+        <p:cNvPr id="1" name=""/>
+        <p:cNvGrpSpPr/>
+        <p:nvPr/>
+      </p:nvGrpSpPr>
+      <p:grpSpPr>
+        <a:xfrm>
+          <a:off x="0" y="0"/>
+          <a:ext cx="0" cy="0"/>
+          <a:chOff x="0" y="0"/>
+          <a:chExt cx="0" cy="0"/>
+        </a:xfrm>
+      </p:grpSpPr>
+      <p:sp>
+        <p:nvSpPr>
+          <p:cNvPr id="2" name="Slide Image Placeholder 1"/>
+          <p:cNvSpPr>
+            <a:spLocks noGrp="1"/>
+          </p:cNvSpPr>
+          <p:nvPr>
+            <p:ph type="sldImg" idx="3"/>
+          </p:nvPr>
+        </p:nvSpPr>
+        <p:spPr/>
+      </p:sp>
+      <p:sp>
+        <p:nvSpPr>
+          <p:cNvPr id="3" name="Notes Placeholder 2"/>
+          <p:cNvSpPr>
+            <a:spLocks noGrp="1"/>
+          </p:cNvSpPr>
+          <p:nvPr>
+            <p:ph type="body" idx="1"/>
+          </p:nvPr>
+        </p:nvSpPr>
+        <p:spPr/>
+        <p:txBody>
+          <a:bodyPr/>
+          <a:lstStyle/>
+          <a:p/>
+        </p:txBody>
+      </p:sp>
+      <p:sp>
+        <p:nvSpPr>
+          <p:cNvPr id="4" name="Slide Number Placeholder 3"/>
+          <p:cNvSpPr>
+            <a:spLocks noGrp="1"/>
+          </p:cNvSpPr>
+          <p:nvPr>
+            <p:ph type="sldNum" idx="12"/>
+          </p:nvPr>
+        </p:nvSpPr>
+        <p:spPr/>
+      </p:sp>
+    </p:spTree>
+  </p:cSld>
+  <p:clrMapOvr>
+    <a:masterClrMapping/>
+  </p:clrMapOvr>
+</p:notes>
+</file>
+
+<file path=ppt/notesSlides/notesSlide41.xml><?xml version="1.0" encoding="utf-8"?>
+<p:notes xmlns:a="http://schemas.openxmlformats.org/drawingml/2006/main" xmlns:p="http://schemas.openxmlformats.org/presentationml/2006/main" xmlns:r="http://schemas.openxmlformats.org/officeDocument/2006/relationships">
+  <p:cSld>
+    <p:spTree>
+      <p:nvGrpSpPr>
+        <p:cNvPr id="1" name=""/>
+        <p:cNvGrpSpPr/>
+        <p:nvPr/>
+      </p:nvGrpSpPr>
+      <p:grpSpPr>
+        <a:xfrm>
+          <a:off x="0" y="0"/>
+          <a:ext cx="0" cy="0"/>
+          <a:chOff x="0" y="0"/>
+          <a:chExt cx="0" cy="0"/>
+        </a:xfrm>
+      </p:grpSpPr>
+      <p:sp>
+        <p:nvSpPr>
+          <p:cNvPr id="2" name="Slide Image Placeholder 1"/>
+          <p:cNvSpPr>
+            <a:spLocks noGrp="1"/>
+          </p:cNvSpPr>
+          <p:nvPr>
+            <p:ph type="sldImg" idx="3"/>
+          </p:nvPr>
+        </p:nvSpPr>
+        <p:spPr/>
+      </p:sp>
+      <p:sp>
+        <p:nvSpPr>
+          <p:cNvPr id="3" name="Notes Placeholder 2"/>
+          <p:cNvSpPr>
+            <a:spLocks noGrp="1"/>
+          </p:cNvSpPr>
+          <p:nvPr>
+            <p:ph type="body" idx="1"/>
+          </p:nvPr>
+        </p:nvSpPr>
+        <p:spPr/>
+        <p:txBody>
+          <a:bodyPr/>
+          <a:lstStyle/>
+          <a:p/>
+        </p:txBody>
+      </p:sp>
+      <p:sp>
+        <p:nvSpPr>
+          <p:cNvPr id="4" name="Slide Number Placeholder 3"/>
+          <p:cNvSpPr>
+            <a:spLocks noGrp="1"/>
+          </p:cNvSpPr>
+          <p:nvPr>
+            <p:ph type="sldNum" idx="12"/>
+          </p:nvPr>
+        </p:nvSpPr>
+        <p:spPr/>
+      </p:sp>
+    </p:spTree>
+  </p:cSld>
+  <p:clrMapOvr>
+    <a:masterClrMapping/>
+  </p:clrMapOvr>
+</p:notes>
+</file>
+
 <file path=ppt/slideLayouts/slideLayout1.xml><?xml version="1.0" encoding="utf-8"?>
 <p:sldLayout xmlns:a="http://schemas.openxmlformats.org/drawingml/2006/main" xmlns:r="http://schemas.openxmlformats.org/officeDocument/2006/relationships" xmlns:mc="http://schemas.openxmlformats.org/markup-compatibility/2006" xmlns:mv="urn:schemas-microsoft-com:mac:vml" xmlns:p="http://schemas.openxmlformats.org/presentationml/2006/main" xmlns:c="http://schemas.openxmlformats.org/drawingml/2006/chart" xmlns:dgm="http://schemas.openxmlformats.org/drawingml/2006/diagram" xmlns:o="urn:schemas-microsoft-com:office:office" xmlns:v="urn:schemas-microsoft-com:vml" xmlns:pvml="urn:schemas-microsoft-com:office:powerpoint" xmlns:com="http://schemas.openxmlformats.org/drawingml/2006/compatibility" xmlns:p14="http://schemas.microsoft.com/office/powerpoint/2010/main" xmlns:p15="http://schemas.microsoft.com/office/powerpoint/2012/main" xmlns:ahyp="http://schemas.microsoft.com/office/drawing/2018/hyperlinkcolor" matchingName="7_Титульный слайд">
   <p:cSld name="7_Титульный слайд">
@@ -9826,8 +9260,8 @@
         </p:nvSpPr>
         <p:spPr>
           <a:xfrm>
-            <a:off x="429280" y="1664162"/>
-            <a:ext cx="11310884" cy="1501435"/>
+            <a:off x="429280" y="1783080"/>
+            <a:ext cx="11310884" cy="1645920"/>
           </a:xfrm>
           <a:prstGeom prst="rect">
             <a:avLst/>
@@ -9940,52 +9374,595 @@
                 <a:ea typeface="Play"/>
                 <a:cs typeface="Play"/>
               </a:rPr>
-              <a:t>• Дизайн-отдел закрывает 11 запросов в неделю из 27</a:t>
-            </a:r>
-          </a:p>
-          <a:p>
-            <a:pPr algn="l">
-              <a:spcAft>
-                <a:spcPts val="300"/>
-              </a:spcAft>
-              <a:defRPr sz="1600">
-                <a:solidFill>
-                  <a:srgbClr val="FFFFFF"/>
-                </a:solidFill>
-                <a:latin typeface="Play"/>
-                <a:ea typeface="Play"/>
-                <a:cs typeface="Play"/>
-              </a:defRPr>
-            </a:pPr>
-            <a:r>
-              <a:rPr sz="1600">
-                <a:solidFill>
-                  <a:srgbClr val="FFFFFF"/>
-                </a:solidFill>
-                <a:latin typeface="Play"/>
-                <a:ea typeface="Play"/>
-                <a:cs typeface="Play"/>
-              </a:rPr>
-              <a:t>• Средний срок ожидания 6 рабочих дней</a:t>
+              <a:t>• Дизайн-отдел из 4 человек обслуживает 11 запросов в неделю</a:t>
             </a:r>
           </a:p>
         </p:txBody>
       </p:sp>
       <p:graphicFrame>
         <p:nvGraphicFramePr>
-          <p:cNvPr id="4" name="Chart 3"/>
+          <p:cNvPr id="4" name="Table 3"/>
           <p:cNvGraphicFramePr>
             <a:graphicFrameLocks noGrp="1"/>
           </p:cNvGraphicFramePr>
           <p:nvPr/>
         </p:nvGraphicFramePr>
         <p:xfrm>
-          <a:off x="429280" y="3337047"/>
-          <a:ext cx="11310884" cy="2080703"/>
+          <a:off x="429280" y="3600450"/>
+          <a:ext cx="11310884" cy="2297430"/>
         </p:xfrm>
         <a:graphic>
-          <a:graphicData uri="http://schemas.openxmlformats.org/drawingml/2006/chart">
-            <c:chart xmlns:c="http://schemas.openxmlformats.org/drawingml/2006/chart" r:id="rId2"/>
+          <a:graphicData uri="http://schemas.openxmlformats.org/drawingml/2006/table">
+            <a:tbl>
+              <a:tblPr firstRow="1" bandRow="1">
+                <a:tableStyleId>{5C22544A-7EE6-4342-B048-85BDC9FD1C3A}</a:tableStyleId>
+              </a:tblPr>
+              <a:tblGrid>
+                <a:gridCol w="3770294"/>
+                <a:gridCol w="3770294"/>
+                <a:gridCol w="3770296"/>
+              </a:tblGrid>
+              <a:tr h="328204">
+                <a:tc>
+                  <a:txBody>
+                    <a:bodyPr/>
+                    <a:lstStyle/>
+                    <a:p>
+                      <a:pPr>
+                        <a:defRPr sz="1300" b="1">
+                          <a:solidFill>
+                            <a:srgbClr val="FFFFFF"/>
+                          </a:solidFill>
+                          <a:latin typeface="Play"/>
+                          <a:ea typeface="Play"/>
+                          <a:cs typeface="Play"/>
+                        </a:defRPr>
+                      </a:pPr>
+                      <a:r>
+                        <a:t>Метрика</a:t>
+                      </a:r>
+                    </a:p>
+                  </a:txBody>
+                  <a:tcPr>
+                    <a:solidFill>
+                      <a:srgbClr val="0077FF"/>
+                    </a:solidFill>
+                  </a:tcPr>
+                </a:tc>
+                <a:tc>
+                  <a:txBody>
+                    <a:bodyPr/>
+                    <a:lstStyle/>
+                    <a:p>
+                      <a:pPr>
+                        <a:defRPr sz="1300" b="1">
+                          <a:solidFill>
+                            <a:srgbClr val="FFFFFF"/>
+                          </a:solidFill>
+                          <a:latin typeface="Play"/>
+                          <a:ea typeface="Play"/>
+                          <a:cs typeface="Play"/>
+                        </a:defRPr>
+                      </a:pPr>
+                      <a:r>
+                        <a:t>Значение</a:t>
+                      </a:r>
+                    </a:p>
+                  </a:txBody>
+                  <a:tcPr>
+                    <a:solidFill>
+                      <a:srgbClr val="0077FF"/>
+                    </a:solidFill>
+                  </a:tcPr>
+                </a:tc>
+                <a:tc>
+                  <a:txBody>
+                    <a:bodyPr/>
+                    <a:lstStyle/>
+                    <a:p>
+                      <a:pPr>
+                        <a:defRPr sz="1300" b="1">
+                          <a:solidFill>
+                            <a:srgbClr val="FFFFFF"/>
+                          </a:solidFill>
+                          <a:latin typeface="Play"/>
+                          <a:ea typeface="Play"/>
+                          <a:cs typeface="Play"/>
+                        </a:defRPr>
+                      </a:pPr>
+                      <a:r>
+                        <a:t>Единица</a:t>
+                      </a:r>
+                    </a:p>
+                  </a:txBody>
+                  <a:tcPr>
+                    <a:solidFill>
+                      <a:srgbClr val="0077FF"/>
+                    </a:solidFill>
+                  </a:tcPr>
+                </a:tc>
+              </a:tr>
+              <a:tr h="328204">
+                <a:tc>
+                  <a:txBody>
+                    <a:bodyPr/>
+                    <a:lstStyle/>
+                    <a:p>
+                      <a:pPr>
+                        <a:defRPr sz="1300" b="0">
+                          <a:solidFill>
+                            <a:srgbClr val="FFFFFF"/>
+                          </a:solidFill>
+                          <a:latin typeface="Play"/>
+                          <a:ea typeface="Play"/>
+                          <a:cs typeface="Play"/>
+                        </a:defRPr>
+                      </a:pPr>
+                      <a:r>
+                        <a:t>Время сборки</a:t>
+                      </a:r>
+                    </a:p>
+                  </a:txBody>
+                  <a:tcPr>
+                    <a:solidFill>
+                      <a:srgbClr val="111111"/>
+                    </a:solidFill>
+                  </a:tcPr>
+                </a:tc>
+                <a:tc>
+                  <a:txBody>
+                    <a:bodyPr/>
+                    <a:lstStyle/>
+                    <a:p>
+                      <a:pPr>
+                        <a:defRPr sz="1300" b="0">
+                          <a:solidFill>
+                            <a:srgbClr val="FFFFFF"/>
+                          </a:solidFill>
+                          <a:latin typeface="Play"/>
+                          <a:ea typeface="Play"/>
+                          <a:cs typeface="Play"/>
+                        </a:defRPr>
+                      </a:pPr>
+                      <a:r>
+                        <a:t>186</a:t>
+                      </a:r>
+                    </a:p>
+                  </a:txBody>
+                  <a:tcPr>
+                    <a:solidFill>
+                      <a:srgbClr val="111111"/>
+                    </a:solidFill>
+                  </a:tcPr>
+                </a:tc>
+                <a:tc>
+                  <a:txBody>
+                    <a:bodyPr/>
+                    <a:lstStyle/>
+                    <a:p>
+                      <a:pPr>
+                        <a:defRPr sz="1300" b="0">
+                          <a:solidFill>
+                            <a:srgbClr val="FFFFFF"/>
+                          </a:solidFill>
+                          <a:latin typeface="Play"/>
+                          <a:ea typeface="Play"/>
+                          <a:cs typeface="Play"/>
+                        </a:defRPr>
+                      </a:pPr>
+                      <a:r>
+                        <a:t>мин</a:t>
+                      </a:r>
+                    </a:p>
+                  </a:txBody>
+                  <a:tcPr>
+                    <a:solidFill>
+                      <a:srgbClr val="111111"/>
+                    </a:solidFill>
+                  </a:tcPr>
+                </a:tc>
+              </a:tr>
+              <a:tr h="328204">
+                <a:tc>
+                  <a:txBody>
+                    <a:bodyPr/>
+                    <a:lstStyle/>
+                    <a:p>
+                      <a:pPr>
+                        <a:defRPr sz="1300" b="0">
+                          <a:solidFill>
+                            <a:srgbClr val="FFFFFF"/>
+                          </a:solidFill>
+                          <a:latin typeface="Play"/>
+                          <a:ea typeface="Play"/>
+                          <a:cs typeface="Play"/>
+                        </a:defRPr>
+                      </a:pPr>
+                      <a:r>
+                        <a:t>Время правок</a:t>
+                      </a:r>
+                    </a:p>
+                  </a:txBody>
+                  <a:tcPr>
+                    <a:solidFill>
+                      <a:srgbClr val="111111"/>
+                    </a:solidFill>
+                  </a:tcPr>
+                </a:tc>
+                <a:tc>
+                  <a:txBody>
+                    <a:bodyPr/>
+                    <a:lstStyle/>
+                    <a:p>
+                      <a:pPr>
+                        <a:defRPr sz="1300" b="0">
+                          <a:solidFill>
+                            <a:srgbClr val="FFFFFF"/>
+                          </a:solidFill>
+                          <a:latin typeface="Play"/>
+                          <a:ea typeface="Play"/>
+                          <a:cs typeface="Play"/>
+                        </a:defRPr>
+                      </a:pPr>
+                      <a:r>
+                        <a:t>74</a:t>
+                      </a:r>
+                    </a:p>
+                  </a:txBody>
+                  <a:tcPr>
+                    <a:solidFill>
+                      <a:srgbClr val="111111"/>
+                    </a:solidFill>
+                  </a:tcPr>
+                </a:tc>
+                <a:tc>
+                  <a:txBody>
+                    <a:bodyPr/>
+                    <a:lstStyle/>
+                    <a:p>
+                      <a:pPr>
+                        <a:defRPr sz="1300" b="0">
+                          <a:solidFill>
+                            <a:srgbClr val="FFFFFF"/>
+                          </a:solidFill>
+                          <a:latin typeface="Play"/>
+                          <a:ea typeface="Play"/>
+                          <a:cs typeface="Play"/>
+                        </a:defRPr>
+                      </a:pPr>
+                      <a:r>
+                        <a:t>мин</a:t>
+                      </a:r>
+                    </a:p>
+                  </a:txBody>
+                  <a:tcPr>
+                    <a:solidFill>
+                      <a:srgbClr val="111111"/>
+                    </a:solidFill>
+                  </a:tcPr>
+                </a:tc>
+              </a:tr>
+              <a:tr h="328204">
+                <a:tc>
+                  <a:txBody>
+                    <a:bodyPr/>
+                    <a:lstStyle/>
+                    <a:p>
+                      <a:pPr>
+                        <a:defRPr sz="1300" b="0">
+                          <a:solidFill>
+                            <a:srgbClr val="FFFFFF"/>
+                          </a:solidFill>
+                          <a:latin typeface="Play"/>
+                          <a:ea typeface="Play"/>
+                          <a:cs typeface="Play"/>
+                        </a:defRPr>
+                      </a:pPr>
+                      <a:r>
+                        <a:t>Нарушения стиля</a:t>
+                      </a:r>
+                    </a:p>
+                  </a:txBody>
+                  <a:tcPr>
+                    <a:solidFill>
+                      <a:srgbClr val="111111"/>
+                    </a:solidFill>
+                  </a:tcPr>
+                </a:tc>
+                <a:tc>
+                  <a:txBody>
+                    <a:bodyPr/>
+                    <a:lstStyle/>
+                    <a:p>
+                      <a:pPr>
+                        <a:defRPr sz="1300" b="0">
+                          <a:solidFill>
+                            <a:srgbClr val="FFFFFF"/>
+                          </a:solidFill>
+                          <a:latin typeface="Play"/>
+                          <a:ea typeface="Play"/>
+                          <a:cs typeface="Play"/>
+                        </a:defRPr>
+                      </a:pPr>
+                      <a:r>
+                        <a:t>19/42</a:t>
+                      </a:r>
+                    </a:p>
+                  </a:txBody>
+                  <a:tcPr>
+                    <a:solidFill>
+                      <a:srgbClr val="111111"/>
+                    </a:solidFill>
+                  </a:tcPr>
+                </a:tc>
+                <a:tc>
+                  <a:txBody>
+                    <a:bodyPr/>
+                    <a:lstStyle/>
+                    <a:p>
+                      <a:pPr>
+                        <a:defRPr sz="1300" b="0">
+                          <a:solidFill>
+                            <a:srgbClr val="FFFFFF"/>
+                          </a:solidFill>
+                          <a:latin typeface="Play"/>
+                          <a:ea typeface="Play"/>
+                          <a:cs typeface="Play"/>
+                        </a:defRPr>
+                      </a:pPr>
+                      <a:r>
+                        <a:t>шт</a:t>
+                      </a:r>
+                    </a:p>
+                  </a:txBody>
+                  <a:tcPr>
+                    <a:solidFill>
+                      <a:srgbClr val="111111"/>
+                    </a:solidFill>
+                  </a:tcPr>
+                </a:tc>
+              </a:tr>
+              <a:tr h="328204">
+                <a:tc>
+                  <a:txBody>
+                    <a:bodyPr/>
+                    <a:lstStyle/>
+                    <a:p>
+                      <a:pPr>
+                        <a:defRPr sz="1300" b="0">
+                          <a:solidFill>
+                            <a:srgbClr val="FFFFFF"/>
+                          </a:solidFill>
+                          <a:latin typeface="Play"/>
+                          <a:ea typeface="Play"/>
+                          <a:cs typeface="Play"/>
+                        </a:defRPr>
+                      </a:pPr>
+                      <a:r>
+                        <a:t>Размер команды</a:t>
+                      </a:r>
+                    </a:p>
+                  </a:txBody>
+                  <a:tcPr>
+                    <a:solidFill>
+                      <a:srgbClr val="111111"/>
+                    </a:solidFill>
+                  </a:tcPr>
+                </a:tc>
+                <a:tc>
+                  <a:txBody>
+                    <a:bodyPr/>
+                    <a:lstStyle/>
+                    <a:p>
+                      <a:pPr>
+                        <a:defRPr sz="1300" b="0">
+                          <a:solidFill>
+                            <a:srgbClr val="FFFFFF"/>
+                          </a:solidFill>
+                          <a:latin typeface="Play"/>
+                          <a:ea typeface="Play"/>
+                          <a:cs typeface="Play"/>
+                        </a:defRPr>
+                      </a:pPr>
+                      <a:r>
+                        <a:t>4</a:t>
+                      </a:r>
+                    </a:p>
+                  </a:txBody>
+                  <a:tcPr>
+                    <a:solidFill>
+                      <a:srgbClr val="111111"/>
+                    </a:solidFill>
+                  </a:tcPr>
+                </a:tc>
+                <a:tc>
+                  <a:txBody>
+                    <a:bodyPr/>
+                    <a:lstStyle/>
+                    <a:p>
+                      <a:pPr>
+                        <a:defRPr sz="1300" b="0">
+                          <a:solidFill>
+                            <a:srgbClr val="FFFFFF"/>
+                          </a:solidFill>
+                          <a:latin typeface="Play"/>
+                          <a:ea typeface="Play"/>
+                          <a:cs typeface="Play"/>
+                        </a:defRPr>
+                      </a:pPr>
+                      <a:r>
+                        <a:t>чел</a:t>
+                      </a:r>
+                    </a:p>
+                  </a:txBody>
+                  <a:tcPr>
+                    <a:solidFill>
+                      <a:srgbClr val="111111"/>
+                    </a:solidFill>
+                  </a:tcPr>
+                </a:tc>
+              </a:tr>
+              <a:tr h="328204">
+                <a:tc>
+                  <a:txBody>
+                    <a:bodyPr/>
+                    <a:lstStyle/>
+                    <a:p>
+                      <a:pPr>
+                        <a:defRPr sz="1300" b="0">
+                          <a:solidFill>
+                            <a:srgbClr val="FFFFFF"/>
+                          </a:solidFill>
+                          <a:latin typeface="Play"/>
+                          <a:ea typeface="Play"/>
+                          <a:cs typeface="Play"/>
+                        </a:defRPr>
+                      </a:pPr>
+                      <a:r>
+                        <a:t>Запросы в неделю</a:t>
+                      </a:r>
+                    </a:p>
+                  </a:txBody>
+                  <a:tcPr>
+                    <a:solidFill>
+                      <a:srgbClr val="111111"/>
+                    </a:solidFill>
+                  </a:tcPr>
+                </a:tc>
+                <a:tc>
+                  <a:txBody>
+                    <a:bodyPr/>
+                    <a:lstStyle/>
+                    <a:p>
+                      <a:pPr>
+                        <a:defRPr sz="1300" b="0">
+                          <a:solidFill>
+                            <a:srgbClr val="FFFFFF"/>
+                          </a:solidFill>
+                          <a:latin typeface="Play"/>
+                          <a:ea typeface="Play"/>
+                          <a:cs typeface="Play"/>
+                        </a:defRPr>
+                      </a:pPr>
+                      <a:r>
+                        <a:t>11/27</a:t>
+                      </a:r>
+                    </a:p>
+                  </a:txBody>
+                  <a:tcPr>
+                    <a:solidFill>
+                      <a:srgbClr val="111111"/>
+                    </a:solidFill>
+                  </a:tcPr>
+                </a:tc>
+                <a:tc>
+                  <a:txBody>
+                    <a:bodyPr/>
+                    <a:lstStyle/>
+                    <a:p>
+                      <a:pPr>
+                        <a:defRPr sz="1300" b="0">
+                          <a:solidFill>
+                            <a:srgbClr val="FFFFFF"/>
+                          </a:solidFill>
+                          <a:latin typeface="Play"/>
+                          <a:ea typeface="Play"/>
+                          <a:cs typeface="Play"/>
+                        </a:defRPr>
+                      </a:pPr>
+                      <a:r>
+                        <a:t>запросов</a:t>
+                      </a:r>
+                    </a:p>
+                  </a:txBody>
+                  <a:tcPr>
+                    <a:solidFill>
+                      <a:srgbClr val="111111"/>
+                    </a:solidFill>
+                  </a:tcPr>
+                </a:tc>
+              </a:tr>
+              <a:tr h="328206">
+                <a:tc>
+                  <a:txBody>
+                    <a:bodyPr/>
+                    <a:lstStyle/>
+                    <a:p>
+                      <a:pPr>
+                        <a:defRPr sz="1300" b="0">
+                          <a:solidFill>
+                            <a:srgbClr val="FFFFFF"/>
+                          </a:solidFill>
+                          <a:latin typeface="Play"/>
+                          <a:ea typeface="Play"/>
+                          <a:cs typeface="Play"/>
+                        </a:defRPr>
+                      </a:pPr>
+                      <a:r>
+                        <a:t>Срок ожидания</a:t>
+                      </a:r>
+                    </a:p>
+                  </a:txBody>
+                  <a:tcPr>
+                    <a:solidFill>
+                      <a:srgbClr val="111111"/>
+                    </a:solidFill>
+                  </a:tcPr>
+                </a:tc>
+                <a:tc>
+                  <a:txBody>
+                    <a:bodyPr/>
+                    <a:lstStyle/>
+                    <a:p>
+                      <a:pPr>
+                        <a:defRPr sz="1300" b="0">
+                          <a:solidFill>
+                            <a:srgbClr val="FFFFFF"/>
+                          </a:solidFill>
+                          <a:latin typeface="Play"/>
+                          <a:ea typeface="Play"/>
+                          <a:cs typeface="Play"/>
+                        </a:defRPr>
+                      </a:pPr>
+                      <a:r>
+                        <a:t>6</a:t>
+                      </a:r>
+                    </a:p>
+                  </a:txBody>
+                  <a:tcPr>
+                    <a:solidFill>
+                      <a:srgbClr val="111111"/>
+                    </a:solidFill>
+                  </a:tcPr>
+                </a:tc>
+                <a:tc>
+                  <a:txBody>
+                    <a:bodyPr/>
+                    <a:lstStyle/>
+                    <a:p>
+                      <a:pPr>
+                        <a:defRPr sz="1300" b="0">
+                          <a:solidFill>
+                            <a:srgbClr val="FFFFFF"/>
+                          </a:solidFill>
+                          <a:latin typeface="Play"/>
+                          <a:ea typeface="Play"/>
+                          <a:cs typeface="Play"/>
+                        </a:defRPr>
+                      </a:pPr>
+                      <a:r>
+                        <a:t>дней</a:t>
+                      </a:r>
+                    </a:p>
+                  </a:txBody>
+                  <a:tcPr>
+                    <a:solidFill>
+                      <a:srgbClr val="111111"/>
+                    </a:solidFill>
+                  </a:tcPr>
+                </a:tc>
+              </a:tr>
+            </a:tbl>
           </a:graphicData>
         </a:graphic>
       </p:graphicFrame>
@@ -10064,8 +10041,8 @@
         </p:nvSpPr>
         <p:spPr>
           <a:xfrm>
-            <a:off x="429280" y="1592290"/>
-            <a:ext cx="11310884" cy="1672529"/>
+            <a:off x="429280" y="1783080"/>
+            <a:ext cx="11310884" cy="1645920"/>
           </a:xfrm>
           <a:prstGeom prst="rect">
             <a:avLst/>
@@ -10126,7 +10103,7 @@
                 <a:ea typeface="Play"/>
                 <a:cs typeface="Play"/>
               </a:rPr>
-              <a:t>• Автоматически формирует дизайн-систему и план колоды</a:t>
+              <a:t>• Шаблон преобразуется в дизайн-систему</a:t>
             </a:r>
           </a:p>
           <a:p>
@@ -10152,7 +10129,7 @@
                 <a:ea typeface="Play"/>
                 <a:cs typeface="Play"/>
               </a:rPr>
-              <a:t>• Экспорт в pptx, pdf, html с редактируемыми слайдами</a:t>
+              <a:t>• Автоматически формируется план колоды</a:t>
             </a:r>
           </a:p>
           <a:p>
@@ -10178,7 +10155,33 @@
                 <a:ea typeface="Play"/>
                 <a:cs typeface="Play"/>
               </a:rPr>
-              <a:t>• Аудит качества проверяет все данные до выдачи</a:t>
+              <a:t>• Вёрстка выполняется по правилам дизайна</a:t>
+            </a:r>
+          </a:p>
+          <a:p>
+            <a:pPr algn="l">
+              <a:spcAft>
+                <a:spcPts val="300"/>
+              </a:spcAft>
+              <a:defRPr sz="1600">
+                <a:solidFill>
+                  <a:srgbClr val="FFFFFF"/>
+                </a:solidFill>
+                <a:latin typeface="Play"/>
+                <a:ea typeface="Play"/>
+                <a:cs typeface="Play"/>
+              </a:defRPr>
+            </a:pPr>
+            <a:r>
+              <a:rPr sz="1600">
+                <a:solidFill>
+                  <a:srgbClr val="FFFFFF"/>
+                </a:solidFill>
+                <a:latin typeface="Play"/>
+                <a:ea typeface="Play"/>
+                <a:cs typeface="Play"/>
+              </a:rPr>
+              <a:t>• Проводится аудит качества до публикации</a:t>
             </a:r>
           </a:p>
         </p:txBody>
@@ -10191,8 +10194,8 @@
         </p:nvSpPr>
         <p:spPr>
           <a:xfrm>
-            <a:off x="429280" y="3463538"/>
-            <a:ext cx="11310884" cy="335019"/>
+            <a:off x="429280" y="3627253"/>
+            <a:ext cx="11310884" cy="329298"/>
           </a:xfrm>
           <a:prstGeom prst="homePlate">
             <a:avLst/>
@@ -10241,7 +10244,7 @@
                 <a:ea typeface="Play"/>
                 <a:cs typeface="Play"/>
               </a:rPr>
-              <a:t>Шаблон</a:t>
+              <a:t>Загрузить шаблон</a:t>
             </a:r>
           </a:p>
         </p:txBody>
@@ -10254,8 +10257,8 @@
         </p:nvSpPr>
         <p:spPr>
           <a:xfrm>
-            <a:off x="429280" y="3853095"/>
-            <a:ext cx="11310884" cy="335019"/>
+            <a:off x="429280" y="4010158"/>
+            <a:ext cx="11310884" cy="329298"/>
           </a:xfrm>
           <a:prstGeom prst="chevron">
             <a:avLst/>
@@ -10304,7 +10307,7 @@
                 <a:ea typeface="Play"/>
                 <a:cs typeface="Play"/>
               </a:rPr>
-              <a:t>Дизайн-система</a:t>
+              <a:t>Разобрать дизайн-систему</a:t>
             </a:r>
           </a:p>
         </p:txBody>
@@ -10317,8 +10320,8 @@
         </p:nvSpPr>
         <p:spPr>
           <a:xfrm>
-            <a:off x="429280" y="4242652"/>
-            <a:ext cx="11310884" cy="335019"/>
+            <a:off x="429280" y="4393063"/>
+            <a:ext cx="11310884" cy="329298"/>
           </a:xfrm>
           <a:prstGeom prst="chevron">
             <a:avLst/>
@@ -10367,7 +10370,7 @@
                 <a:ea typeface="Play"/>
                 <a:cs typeface="Play"/>
               </a:rPr>
-              <a:t>План колоды</a:t>
+              <a:t>Сформировать план колоды</a:t>
             </a:r>
           </a:p>
         </p:txBody>
@@ -10380,8 +10383,8 @@
         </p:nvSpPr>
         <p:spPr>
           <a:xfrm>
-            <a:off x="429280" y="4632209"/>
-            <a:ext cx="11310884" cy="335019"/>
+            <a:off x="429280" y="4775968"/>
+            <a:ext cx="11310884" cy="329298"/>
           </a:xfrm>
           <a:prstGeom prst="chevron">
             <a:avLst/>
@@ -10430,7 +10433,7 @@
                 <a:ea typeface="Play"/>
                 <a:cs typeface="Play"/>
               </a:rPr>
-              <a:t>Вёрстка</a:t>
+              <a:t>Автоматически вёрстать</a:t>
             </a:r>
           </a:p>
         </p:txBody>
@@ -10443,8 +10446,8 @@
         </p:nvSpPr>
         <p:spPr>
           <a:xfrm>
-            <a:off x="429280" y="5021766"/>
-            <a:ext cx="11310884" cy="335019"/>
+            <a:off x="429280" y="5158873"/>
+            <a:ext cx="11310884" cy="329298"/>
           </a:xfrm>
           <a:prstGeom prst="chevron">
             <a:avLst/>
@@ -10493,7 +10496,7 @@
                 <a:ea typeface="Play"/>
                 <a:cs typeface="Play"/>
               </a:rPr>
-              <a:t>Аудит</a:t>
+              <a:t>Провести аудит качества</a:t>
             </a:r>
           </a:p>
         </p:txBody>
@@ -10506,8 +10509,8 @@
         </p:nvSpPr>
         <p:spPr>
           <a:xfrm>
-            <a:off x="429280" y="5411323"/>
-            <a:ext cx="11310884" cy="335019"/>
+            <a:off x="429280" y="5541778"/>
+            <a:ext cx="11310884" cy="329298"/>
           </a:xfrm>
           <a:prstGeom prst="chevron">
             <a:avLst/>
@@ -10556,7 +10559,7 @@
                 <a:ea typeface="Play"/>
                 <a:cs typeface="Play"/>
               </a:rPr>
-              <a:t>Экспорт</a:t>
+              <a:t>Экспортировать pptx/pdf/html</a:t>
             </a:r>
           </a:p>
         </p:txBody>
@@ -10652,7 +10655,7 @@
         <p:spPr>
           <a:xfrm>
             <a:off x="300817" y="297715"/>
-            <a:ext cx="11566347" cy="5758505"/>
+            <a:ext cx="11566347" cy="5727164"/>
           </a:xfrm>
           <a:prstGeom prst="roundRect">
             <a:avLst/>
@@ -10733,7 +10736,7 @@
                 <a:ea typeface="Play"/>
                 <a:cs typeface="Play"/>
               </a:rPr>
-              <a:t>Результаты пилота: время</a:t>
+              <a:t>Ожидаемый эффект</a:t>
             </a:r>
           </a:p>
         </p:txBody>
@@ -10746,8 +10749,8 @@
         </p:nvSpPr>
         <p:spPr>
           <a:xfrm>
-            <a:off x="427817" y="1837052"/>
-            <a:ext cx="11312347" cy="1341120"/>
+            <a:off x="427817" y="1783080"/>
+            <a:ext cx="11312347" cy="1645920"/>
           </a:xfrm>
           <a:prstGeom prst="rect">
             <a:avLst/>
@@ -10782,7 +10785,7 @@
                 <a:ea typeface="Play"/>
                 <a:cs typeface="Play"/>
               </a:rPr>
-              <a:t>• 68 презентаций собраны за 6 недель</a:t>
+              <a:t>• Время сборки колоды сократилось с 186 до 4 минут</a:t>
             </a:r>
           </a:p>
           <a:p>
@@ -10808,7 +10811,7 @@
                 <a:ea typeface="Play"/>
                 <a:cs typeface="Play"/>
               </a:rPr>
-              <a:t>• Средняя сборка 4 минуты вместо 186</a:t>
+              <a:t>• Первый готовый вариант появился за 1 день вместо 6</a:t>
             </a:r>
           </a:p>
           <a:p>
@@ -10834,26 +10837,461 @@
                 <a:ea typeface="Play"/>
                 <a:cs typeface="Play"/>
               </a:rPr>
-              <a:t>• Время до первой версии сократилось с 6 дней до 1</a:t>
+              <a:t>• Нарушения стиля уменьшились до 2 из 68 колод</a:t>
+            </a:r>
+          </a:p>
+          <a:p>
+            <a:pPr algn="l">
+              <a:spcAft>
+                <a:spcPts val="300"/>
+              </a:spcAft>
+              <a:defRPr sz="1600">
+                <a:solidFill>
+                  <a:srgbClr val="FFFFFF"/>
+                </a:solidFill>
+                <a:latin typeface="Play"/>
+                <a:ea typeface="Play"/>
+                <a:cs typeface="Play"/>
+              </a:defRPr>
+            </a:pPr>
+            <a:r>
+              <a:rPr sz="1600">
+                <a:solidFill>
+                  <a:srgbClr val="FFFFFF"/>
+                </a:solidFill>
+                <a:latin typeface="Play"/>
+                <a:ea typeface="Play"/>
+                <a:cs typeface="Play"/>
+              </a:rPr>
+              <a:t>• Дизайнеры закрыли 38 запросов вместо 11 в неделю</a:t>
             </a:r>
           </a:p>
         </p:txBody>
       </p:sp>
       <p:graphicFrame>
         <p:nvGraphicFramePr>
-          <p:cNvPr id="683" name="Chart 682"/>
+          <p:cNvPr id="683" name="Table 682"/>
           <p:cNvGraphicFramePr>
             <a:graphicFrameLocks noGrp="1"/>
           </p:cNvGraphicFramePr>
           <p:nvPr/>
         </p:nvGraphicFramePr>
         <p:xfrm>
-          <a:off x="427817" y="3349622"/>
-          <a:ext cx="11312347" cy="2579598"/>
+          <a:off x="427817" y="3600450"/>
+          <a:ext cx="11312347" cy="2297430"/>
         </p:xfrm>
         <a:graphic>
-          <a:graphicData uri="http://schemas.openxmlformats.org/drawingml/2006/chart">
-            <c:chart xmlns:c="http://schemas.openxmlformats.org/drawingml/2006/chart" r:id="rId2"/>
+          <a:graphicData uri="http://schemas.openxmlformats.org/drawingml/2006/table">
+            <a:tbl>
+              <a:tblPr firstRow="1" bandRow="1">
+                <a:tableStyleId>{5C22544A-7EE6-4342-B048-85BDC9FD1C3A}</a:tableStyleId>
+              </a:tblPr>
+              <a:tblGrid>
+                <a:gridCol w="3770782"/>
+                <a:gridCol w="3770782"/>
+                <a:gridCol w="3770783"/>
+              </a:tblGrid>
+              <a:tr h="459486">
+                <a:tc>
+                  <a:txBody>
+                    <a:bodyPr/>
+                    <a:lstStyle/>
+                    <a:p>
+                      <a:pPr>
+                        <a:defRPr sz="1300" b="1">
+                          <a:solidFill>
+                            <a:srgbClr val="FFFFFF"/>
+                          </a:solidFill>
+                          <a:latin typeface="Play"/>
+                          <a:ea typeface="Play"/>
+                          <a:cs typeface="Play"/>
+                        </a:defRPr>
+                      </a:pPr>
+                      <a:r>
+                        <a:t>Метрика</a:t>
+                      </a:r>
+                    </a:p>
+                  </a:txBody>
+                  <a:tcPr>
+                    <a:solidFill>
+                      <a:srgbClr val="0077FF"/>
+                    </a:solidFill>
+                  </a:tcPr>
+                </a:tc>
+                <a:tc>
+                  <a:txBody>
+                    <a:bodyPr/>
+                    <a:lstStyle/>
+                    <a:p>
+                      <a:pPr>
+                        <a:defRPr sz="1300" b="1">
+                          <a:solidFill>
+                            <a:srgbClr val="FFFFFF"/>
+                          </a:solidFill>
+                          <a:latin typeface="Play"/>
+                          <a:ea typeface="Play"/>
+                          <a:cs typeface="Play"/>
+                        </a:defRPr>
+                      </a:pPr>
+                      <a:r>
+                        <a:t>До</a:t>
+                      </a:r>
+                    </a:p>
+                  </a:txBody>
+                  <a:tcPr>
+                    <a:solidFill>
+                      <a:srgbClr val="0077FF"/>
+                    </a:solidFill>
+                  </a:tcPr>
+                </a:tc>
+                <a:tc>
+                  <a:txBody>
+                    <a:bodyPr/>
+                    <a:lstStyle/>
+                    <a:p>
+                      <a:pPr>
+                        <a:defRPr sz="1300" b="1">
+                          <a:solidFill>
+                            <a:srgbClr val="FFFFFF"/>
+                          </a:solidFill>
+                          <a:latin typeface="Play"/>
+                          <a:ea typeface="Play"/>
+                          <a:cs typeface="Play"/>
+                        </a:defRPr>
+                      </a:pPr>
+                      <a:r>
+                        <a:t>После</a:t>
+                      </a:r>
+                    </a:p>
+                  </a:txBody>
+                  <a:tcPr>
+                    <a:solidFill>
+                      <a:srgbClr val="0077FF"/>
+                    </a:solidFill>
+                  </a:tcPr>
+                </a:tc>
+              </a:tr>
+              <a:tr h="459486">
+                <a:tc>
+                  <a:txBody>
+                    <a:bodyPr/>
+                    <a:lstStyle/>
+                    <a:p>
+                      <a:pPr>
+                        <a:defRPr sz="1300" b="0">
+                          <a:solidFill>
+                            <a:srgbClr val="FFFFFF"/>
+                          </a:solidFill>
+                          <a:latin typeface="Play"/>
+                          <a:ea typeface="Play"/>
+                          <a:cs typeface="Play"/>
+                        </a:defRPr>
+                      </a:pPr>
+                      <a:r>
+                        <a:t>Время сборки</a:t>
+                      </a:r>
+                    </a:p>
+                  </a:txBody>
+                  <a:tcPr>
+                    <a:solidFill>
+                      <a:srgbClr val="111111"/>
+                    </a:solidFill>
+                  </a:tcPr>
+                </a:tc>
+                <a:tc>
+                  <a:txBody>
+                    <a:bodyPr/>
+                    <a:lstStyle/>
+                    <a:p>
+                      <a:pPr>
+                        <a:defRPr sz="1300" b="0">
+                          <a:solidFill>
+                            <a:srgbClr val="FFFFFF"/>
+                          </a:solidFill>
+                          <a:latin typeface="Play"/>
+                          <a:ea typeface="Play"/>
+                          <a:cs typeface="Play"/>
+                        </a:defRPr>
+                      </a:pPr>
+                      <a:r>
+                        <a:t>186</a:t>
+                      </a:r>
+                    </a:p>
+                  </a:txBody>
+                  <a:tcPr>
+                    <a:solidFill>
+                      <a:srgbClr val="111111"/>
+                    </a:solidFill>
+                  </a:tcPr>
+                </a:tc>
+                <a:tc>
+                  <a:txBody>
+                    <a:bodyPr/>
+                    <a:lstStyle/>
+                    <a:p>
+                      <a:pPr>
+                        <a:defRPr sz="1300" b="0">
+                          <a:solidFill>
+                            <a:srgbClr val="FFFFFF"/>
+                          </a:solidFill>
+                          <a:latin typeface="Play"/>
+                          <a:ea typeface="Play"/>
+                          <a:cs typeface="Play"/>
+                        </a:defRPr>
+                      </a:pPr>
+                      <a:r>
+                        <a:t>4</a:t>
+                      </a:r>
+                    </a:p>
+                  </a:txBody>
+                  <a:tcPr>
+                    <a:solidFill>
+                      <a:srgbClr val="111111"/>
+                    </a:solidFill>
+                  </a:tcPr>
+                </a:tc>
+              </a:tr>
+              <a:tr h="459486">
+                <a:tc>
+                  <a:txBody>
+                    <a:bodyPr/>
+                    <a:lstStyle/>
+                    <a:p>
+                      <a:pPr>
+                        <a:defRPr sz="1300" b="0">
+                          <a:solidFill>
+                            <a:srgbClr val="FFFFFF"/>
+                          </a:solidFill>
+                          <a:latin typeface="Play"/>
+                          <a:ea typeface="Play"/>
+                          <a:cs typeface="Play"/>
+                        </a:defRPr>
+                      </a:pPr>
+                      <a:r>
+                        <a:t>Первый вариант</a:t>
+                      </a:r>
+                    </a:p>
+                  </a:txBody>
+                  <a:tcPr>
+                    <a:solidFill>
+                      <a:srgbClr val="111111"/>
+                    </a:solidFill>
+                  </a:tcPr>
+                </a:tc>
+                <a:tc>
+                  <a:txBody>
+                    <a:bodyPr/>
+                    <a:lstStyle/>
+                    <a:p>
+                      <a:pPr>
+                        <a:defRPr sz="1300" b="0">
+                          <a:solidFill>
+                            <a:srgbClr val="FFFFFF"/>
+                          </a:solidFill>
+                          <a:latin typeface="Play"/>
+                          <a:ea typeface="Play"/>
+                          <a:cs typeface="Play"/>
+                        </a:defRPr>
+                      </a:pPr>
+                      <a:r>
+                        <a:t>6</a:t>
+                      </a:r>
+                    </a:p>
+                  </a:txBody>
+                  <a:tcPr>
+                    <a:solidFill>
+                      <a:srgbClr val="111111"/>
+                    </a:solidFill>
+                  </a:tcPr>
+                </a:tc>
+                <a:tc>
+                  <a:txBody>
+                    <a:bodyPr/>
+                    <a:lstStyle/>
+                    <a:p>
+                      <a:pPr>
+                        <a:defRPr sz="1300" b="0">
+                          <a:solidFill>
+                            <a:srgbClr val="FFFFFF"/>
+                          </a:solidFill>
+                          <a:latin typeface="Play"/>
+                          <a:ea typeface="Play"/>
+                          <a:cs typeface="Play"/>
+                        </a:defRPr>
+                      </a:pPr>
+                      <a:r>
+                        <a:t>1</a:t>
+                      </a:r>
+                    </a:p>
+                  </a:txBody>
+                  <a:tcPr>
+                    <a:solidFill>
+                      <a:srgbClr val="111111"/>
+                    </a:solidFill>
+                  </a:tcPr>
+                </a:tc>
+              </a:tr>
+              <a:tr h="459486">
+                <a:tc>
+                  <a:txBody>
+                    <a:bodyPr/>
+                    <a:lstStyle/>
+                    <a:p>
+                      <a:pPr>
+                        <a:defRPr sz="1300" b="0">
+                          <a:solidFill>
+                            <a:srgbClr val="FFFFFF"/>
+                          </a:solidFill>
+                          <a:latin typeface="Play"/>
+                          <a:ea typeface="Play"/>
+                          <a:cs typeface="Play"/>
+                        </a:defRPr>
+                      </a:pPr>
+                      <a:r>
+                        <a:t>Нарушения стиля</a:t>
+                      </a:r>
+                    </a:p>
+                  </a:txBody>
+                  <a:tcPr>
+                    <a:solidFill>
+                      <a:srgbClr val="111111"/>
+                    </a:solidFill>
+                  </a:tcPr>
+                </a:tc>
+                <a:tc>
+                  <a:txBody>
+                    <a:bodyPr/>
+                    <a:lstStyle/>
+                    <a:p>
+                      <a:pPr>
+                        <a:defRPr sz="1300" b="0">
+                          <a:solidFill>
+                            <a:srgbClr val="FFFFFF"/>
+                          </a:solidFill>
+                          <a:latin typeface="Play"/>
+                          <a:ea typeface="Play"/>
+                          <a:cs typeface="Play"/>
+                        </a:defRPr>
+                      </a:pPr>
+                      <a:r>
+                        <a:t>19/42</a:t>
+                      </a:r>
+                    </a:p>
+                  </a:txBody>
+                  <a:tcPr>
+                    <a:solidFill>
+                      <a:srgbClr val="111111"/>
+                    </a:solidFill>
+                  </a:tcPr>
+                </a:tc>
+                <a:tc>
+                  <a:txBody>
+                    <a:bodyPr/>
+                    <a:lstStyle/>
+                    <a:p>
+                      <a:pPr>
+                        <a:defRPr sz="1300" b="0">
+                          <a:solidFill>
+                            <a:srgbClr val="FFFFFF"/>
+                          </a:solidFill>
+                          <a:latin typeface="Play"/>
+                          <a:ea typeface="Play"/>
+                          <a:cs typeface="Play"/>
+                        </a:defRPr>
+                      </a:pPr>
+                      <a:r>
+                        <a:t>2/68</a:t>
+                      </a:r>
+                    </a:p>
+                  </a:txBody>
+                  <a:tcPr>
+                    <a:solidFill>
+                      <a:srgbClr val="111111"/>
+                    </a:solidFill>
+                  </a:tcPr>
+                </a:tc>
+              </a:tr>
+              <a:tr h="459486">
+                <a:tc>
+                  <a:txBody>
+                    <a:bodyPr/>
+                    <a:lstStyle/>
+                    <a:p>
+                      <a:pPr>
+                        <a:defRPr sz="1300" b="0">
+                          <a:solidFill>
+                            <a:srgbClr val="FFFFFF"/>
+                          </a:solidFill>
+                          <a:latin typeface="Play"/>
+                          <a:ea typeface="Play"/>
+                          <a:cs typeface="Play"/>
+                        </a:defRPr>
+                      </a:pPr>
+                      <a:r>
+                        <a:t>Загрузка дизайнеров</a:t>
+                      </a:r>
+                    </a:p>
+                  </a:txBody>
+                  <a:tcPr>
+                    <a:solidFill>
+                      <a:srgbClr val="111111"/>
+                    </a:solidFill>
+                  </a:tcPr>
+                </a:tc>
+                <a:tc>
+                  <a:txBody>
+                    <a:bodyPr/>
+                    <a:lstStyle/>
+                    <a:p>
+                      <a:pPr>
+                        <a:defRPr sz="1300" b="0">
+                          <a:solidFill>
+                            <a:srgbClr val="FFFFFF"/>
+                          </a:solidFill>
+                          <a:latin typeface="Play"/>
+                          <a:ea typeface="Play"/>
+                          <a:cs typeface="Play"/>
+                        </a:defRPr>
+                      </a:pPr>
+                      <a:r>
+                        <a:t>11/нед</a:t>
+                      </a:r>
+                    </a:p>
+                  </a:txBody>
+                  <a:tcPr>
+                    <a:solidFill>
+                      <a:srgbClr val="111111"/>
+                    </a:solidFill>
+                  </a:tcPr>
+                </a:tc>
+                <a:tc>
+                  <a:txBody>
+                    <a:bodyPr/>
+                    <a:lstStyle/>
+                    <a:p>
+                      <a:pPr>
+                        <a:defRPr sz="1300" b="0">
+                          <a:solidFill>
+                            <a:srgbClr val="FFFFFF"/>
+                          </a:solidFill>
+                          <a:latin typeface="Play"/>
+                          <a:ea typeface="Play"/>
+                          <a:cs typeface="Play"/>
+                        </a:defRPr>
+                      </a:pPr>
+                      <a:r>
+                        <a:t>38/нед</a:t>
+                      </a:r>
+                    </a:p>
+                  </a:txBody>
+                  <a:tcPr>
+                    <a:solidFill>
+                      <a:srgbClr val="111111"/>
+                    </a:solidFill>
+                  </a:tcPr>
+                </a:tc>
+              </a:tr>
+            </a:tbl>
           </a:graphicData>
         </a:graphic>
       </p:graphicFrame>
@@ -10938,7 +11376,7 @@
         <p:spPr>
           <a:xfrm>
             <a:off x="429280" y="424715"/>
-            <a:ext cx="7827264" cy="1183640"/>
+            <a:ext cx="7827264" cy="822960"/>
           </a:xfrm>
           <a:prstGeom prst="rect">
             <a:avLst/>
@@ -10973,7 +11411,7 @@
                 <a:ea typeface="Play"/>
                 <a:cs typeface="Play"/>
               </a:rPr>
-              <a:t>Результаты пилота: качество и нагрузка</a:t>
+              <a:t>Ресурсы и сроки</a:t>
             </a:r>
           </a:p>
         </p:txBody>
@@ -10986,8 +11424,8 @@
         </p:nvSpPr>
         <p:spPr>
           <a:xfrm>
-            <a:off x="429280" y="1745515"/>
-            <a:ext cx="11310884" cy="944880"/>
+            <a:off x="429280" y="1783080"/>
+            <a:ext cx="11310884" cy="1645920"/>
           </a:xfrm>
           <a:prstGeom prst="rect">
             <a:avLst/>
@@ -11022,7 +11460,7 @@
                 <a:ea typeface="Play"/>
                 <a:cs typeface="Play"/>
               </a:rPr>
-              <a:t>• Нарушений фирменного стиля 2 из 68 колод</a:t>
+              <a:t>• Сервис работает на 2 vCPU / 2 ГБ RAM</a:t>
             </a:r>
           </a:p>
           <a:p>
@@ -11048,29 +11486,347 @@
                 <a:ea typeface="Play"/>
                 <a:cs typeface="Play"/>
               </a:rPr>
-              <a:t>• Дизайнеры закрыли 38 запросов вместо 11 в неделю</a:t>
+              <a:t>• Инференс gpt-oss-20b стоит 1 400 рублей за 6 недель</a:t>
+            </a:r>
+          </a:p>
+          <a:p>
+            <a:pPr algn="l">
+              <a:spcAft>
+                <a:spcPts val="300"/>
+              </a:spcAft>
+              <a:defRPr sz="2000">
+                <a:solidFill>
+                  <a:srgbClr val="FFFFFF"/>
+                </a:solidFill>
+                <a:latin typeface="Play"/>
+                <a:ea typeface="Play"/>
+                <a:cs typeface="Play"/>
+              </a:defRPr>
+            </a:pPr>
+            <a:r>
+              <a:rPr sz="2000">
+                <a:solidFill>
+                  <a:srgbClr val="FFFFFF"/>
+                </a:solidFill>
+                <a:latin typeface="Play"/>
+                <a:ea typeface="Play"/>
+                <a:cs typeface="Play"/>
+              </a:rPr>
+              <a:t>• План запуска: Q3 2026 подключение 4 команд, Q4 2026 доступ компании, Q1 2027 генерация иллюстраций</a:t>
             </a:r>
           </a:p>
         </p:txBody>
       </p:sp>
-      <p:graphicFrame>
-        <p:nvGraphicFramePr>
-          <p:cNvPr id="624" name="Chart 623"/>
-          <p:cNvGraphicFramePr>
-            <a:graphicFrameLocks noGrp="1"/>
-          </p:cNvGraphicFramePr>
+      <p:sp>
+        <p:nvSpPr>
+          <p:cNvPr id="624" name="Rectangle 623"/>
+          <p:cNvSpPr/>
           <p:nvPr/>
-        </p:nvGraphicFramePr>
-        <p:xfrm>
-          <a:off x="429280" y="2861845"/>
-          <a:ext cx="11310884" cy="2549047"/>
-        </p:xfrm>
-        <a:graphic>
-          <a:graphicData uri="http://schemas.openxmlformats.org/drawingml/2006/chart">
-            <c:chart xmlns:c="http://schemas.openxmlformats.org/drawingml/2006/chart" r:id="rId5"/>
-          </a:graphicData>
-        </a:graphic>
-      </p:graphicFrame>
+        </p:nvSpPr>
+        <p:spPr>
+          <a:xfrm>
+            <a:off x="429280" y="4657267"/>
+            <a:ext cx="11310884" cy="68922"/>
+          </a:xfrm>
+          <a:prstGeom prst="rect">
+            <a:avLst/>
+          </a:prstGeom>
+          <a:solidFill>
+            <a:srgbClr val="0077FF"/>
+          </a:solidFill>
+          <a:ln>
+            <a:noFill/>
+          </a:ln>
+        </p:spPr>
+        <p:style>
+          <a:lnRef idx="1">
+            <a:schemeClr val="accent1"/>
+          </a:lnRef>
+          <a:fillRef idx="3">
+            <a:schemeClr val="accent1"/>
+          </a:fillRef>
+          <a:effectRef idx="2">
+            <a:schemeClr val="accent1"/>
+          </a:effectRef>
+          <a:fontRef idx="minor">
+            <a:schemeClr val="lt1"/>
+          </a:fontRef>
+        </p:style>
+        <p:txBody>
+          <a:bodyPr rtlCol="0" anchor="ctr"/>
+          <a:lstStyle/>
+          <a:p>
+            <a:pPr algn="ctr"/>
+          </a:p>
+        </p:txBody>
+      </p:sp>
+      <p:sp>
+        <p:nvSpPr>
+          <p:cNvPr id="625" name="Oval 624"/>
+          <p:cNvSpPr/>
+          <p:nvPr/>
+        </p:nvSpPr>
+        <p:spPr>
+          <a:xfrm>
+            <a:off x="2061710" y="4439011"/>
+            <a:ext cx="505434" cy="505434"/>
+          </a:xfrm>
+          <a:prstGeom prst="ellipse">
+            <a:avLst/>
+          </a:prstGeom>
+          <a:solidFill>
+            <a:srgbClr val="0077FF"/>
+          </a:solidFill>
+          <a:ln>
+            <a:noFill/>
+          </a:ln>
+        </p:spPr>
+        <p:style>
+          <a:lnRef idx="1">
+            <a:schemeClr val="accent1"/>
+          </a:lnRef>
+          <a:fillRef idx="3">
+            <a:schemeClr val="accent1"/>
+          </a:fillRef>
+          <a:effectRef idx="2">
+            <a:schemeClr val="accent1"/>
+          </a:effectRef>
+          <a:fontRef idx="minor">
+            <a:schemeClr val="lt1"/>
+          </a:fontRef>
+        </p:style>
+        <p:txBody>
+          <a:bodyPr rtlCol="0" anchor="ctr"/>
+          <a:lstStyle/>
+          <a:p>
+            <a:pPr algn="ctr"/>
+          </a:p>
+        </p:txBody>
+      </p:sp>
+      <p:sp>
+        <p:nvSpPr>
+          <p:cNvPr id="626" name="TextBox 625"/>
+          <p:cNvSpPr txBox="1"/>
+          <p:nvPr/>
+        </p:nvSpPr>
+        <p:spPr>
+          <a:xfrm>
+            <a:off x="429280" y="3600450"/>
+            <a:ext cx="5655442" cy="873023"/>
+          </a:xfrm>
+          <a:prstGeom prst="rect">
+            <a:avLst/>
+          </a:prstGeom>
+          <a:noFill/>
+        </p:spPr>
+        <p:txBody>
+          <a:bodyPr wrap="square" lIns="12700" rIns="12700" tIns="12700" bIns="12700">
+            <a:spAutoFit/>
+          </a:bodyPr>
+          <a:lstStyle/>
+          <a:p>
+            <a:pPr algn="ctr">
+              <a:defRPr sz="1400" b="0">
+                <a:solidFill>
+                  <a:srgbClr val="FFFFFF"/>
+                </a:solidFill>
+                <a:latin typeface="Play"/>
+                <a:ea typeface="Play"/>
+                <a:cs typeface="Play"/>
+              </a:defRPr>
+            </a:pPr>
+            <a:r>
+              <a:rPr sz="1400" b="0">
+                <a:solidFill>
+                  <a:srgbClr val="FFFFFF"/>
+                </a:solidFill>
+                <a:latin typeface="Play"/>
+                <a:ea typeface="Play"/>
+                <a:cs typeface="Play"/>
+              </a:rPr>
+              <a:t>Q3 2026: подключение 4 команд</a:t>
+            </a:r>
+          </a:p>
+        </p:txBody>
+      </p:sp>
+      <p:sp>
+        <p:nvSpPr>
+          <p:cNvPr id="627" name="Oval 626"/>
+          <p:cNvSpPr/>
+          <p:nvPr/>
+        </p:nvSpPr>
+        <p:spPr>
+          <a:xfrm>
+            <a:off x="5832004" y="4439011"/>
+            <a:ext cx="505434" cy="505434"/>
+          </a:xfrm>
+          <a:prstGeom prst="ellipse">
+            <a:avLst/>
+          </a:prstGeom>
+          <a:solidFill>
+            <a:srgbClr val="0077FF"/>
+          </a:solidFill>
+          <a:ln>
+            <a:noFill/>
+          </a:ln>
+        </p:spPr>
+        <p:style>
+          <a:lnRef idx="1">
+            <a:schemeClr val="accent1"/>
+          </a:lnRef>
+          <a:fillRef idx="3">
+            <a:schemeClr val="accent1"/>
+          </a:fillRef>
+          <a:effectRef idx="2">
+            <a:schemeClr val="accent1"/>
+          </a:effectRef>
+          <a:fontRef idx="minor">
+            <a:schemeClr val="lt1"/>
+          </a:fontRef>
+        </p:style>
+        <p:txBody>
+          <a:bodyPr rtlCol="0" anchor="ctr"/>
+          <a:lstStyle/>
+          <a:p>
+            <a:pPr algn="ctr"/>
+          </a:p>
+        </p:txBody>
+      </p:sp>
+      <p:sp>
+        <p:nvSpPr>
+          <p:cNvPr id="628" name="TextBox 627"/>
+          <p:cNvSpPr txBox="1"/>
+          <p:nvPr/>
+        </p:nvSpPr>
+        <p:spPr>
+          <a:xfrm>
+            <a:off x="3257001" y="5162702"/>
+            <a:ext cx="5655442" cy="873023"/>
+          </a:xfrm>
+          <a:prstGeom prst="rect">
+            <a:avLst/>
+          </a:prstGeom>
+          <a:noFill/>
+        </p:spPr>
+        <p:txBody>
+          <a:bodyPr wrap="square" lIns="12700" rIns="12700" tIns="12700" bIns="12700">
+            <a:spAutoFit/>
+          </a:bodyPr>
+          <a:lstStyle/>
+          <a:p>
+            <a:pPr algn="ctr">
+              <a:defRPr sz="1400" b="0">
+                <a:solidFill>
+                  <a:srgbClr val="FFFFFF"/>
+                </a:solidFill>
+                <a:latin typeface="Play"/>
+                <a:ea typeface="Play"/>
+                <a:cs typeface="Play"/>
+              </a:defRPr>
+            </a:pPr>
+            <a:r>
+              <a:rPr sz="1400" b="0">
+                <a:solidFill>
+                  <a:srgbClr val="FFFFFF"/>
+                </a:solidFill>
+                <a:latin typeface="Play"/>
+                <a:ea typeface="Play"/>
+                <a:cs typeface="Play"/>
+              </a:rPr>
+              <a:t>Q4 2026: доступ для всей компании</a:t>
+            </a:r>
+          </a:p>
+        </p:txBody>
+      </p:sp>
+      <p:sp>
+        <p:nvSpPr>
+          <p:cNvPr id="629" name="Oval 628"/>
+          <p:cNvSpPr/>
+          <p:nvPr/>
+        </p:nvSpPr>
+        <p:spPr>
+          <a:xfrm>
+            <a:off x="9602299" y="4439011"/>
+            <a:ext cx="505434" cy="505434"/>
+          </a:xfrm>
+          <a:prstGeom prst="ellipse">
+            <a:avLst/>
+          </a:prstGeom>
+          <a:solidFill>
+            <a:srgbClr val="0077FF"/>
+          </a:solidFill>
+          <a:ln>
+            <a:noFill/>
+          </a:ln>
+        </p:spPr>
+        <p:style>
+          <a:lnRef idx="1">
+            <a:schemeClr val="accent1"/>
+          </a:lnRef>
+          <a:fillRef idx="3">
+            <a:schemeClr val="accent1"/>
+          </a:fillRef>
+          <a:effectRef idx="2">
+            <a:schemeClr val="accent1"/>
+          </a:effectRef>
+          <a:fontRef idx="minor">
+            <a:schemeClr val="lt1"/>
+          </a:fontRef>
+        </p:style>
+        <p:txBody>
+          <a:bodyPr rtlCol="0" anchor="ctr"/>
+          <a:lstStyle/>
+          <a:p>
+            <a:pPr algn="ctr"/>
+          </a:p>
+        </p:txBody>
+      </p:sp>
+      <p:sp>
+        <p:nvSpPr>
+          <p:cNvPr id="630" name="TextBox 629"/>
+          <p:cNvSpPr txBox="1"/>
+          <p:nvPr/>
+        </p:nvSpPr>
+        <p:spPr>
+          <a:xfrm>
+            <a:off x="6084722" y="3600450"/>
+            <a:ext cx="5655442" cy="873023"/>
+          </a:xfrm>
+          <a:prstGeom prst="rect">
+            <a:avLst/>
+          </a:prstGeom>
+          <a:noFill/>
+        </p:spPr>
+        <p:txBody>
+          <a:bodyPr wrap="square" lIns="12700" rIns="12700" tIns="12700" bIns="12700">
+            <a:spAutoFit/>
+          </a:bodyPr>
+          <a:lstStyle/>
+          <a:p>
+            <a:pPr algn="ctr">
+              <a:defRPr sz="1400" b="0">
+                <a:solidFill>
+                  <a:srgbClr val="FFFFFF"/>
+                </a:solidFill>
+                <a:latin typeface="Play"/>
+                <a:ea typeface="Play"/>
+                <a:cs typeface="Play"/>
+              </a:defRPr>
+            </a:pPr>
+            <a:r>
+              <a:rPr sz="1400" b="0">
+                <a:solidFill>
+                  <a:srgbClr val="FFFFFF"/>
+                </a:solidFill>
+                <a:latin typeface="Play"/>
+                <a:ea typeface="Play"/>
+                <a:cs typeface="Play"/>
+              </a:rPr>
+              <a:t>Q1 2027: генерация иллюстраций</a:t>
+            </a:r>
+          </a:p>
+        </p:txBody>
+      </p:sp>
     </p:spTree>
   </p:cSld>
   <p:clrMapOvr>
@@ -11133,21 +11889,450 @@
                 <a:ea typeface="Play"/>
                 <a:cs typeface="Play"/>
               </a:rPr>
-              <a:t>Стоимость и ресурсы</a:t>
+              <a:t>План пилота</a:t>
             </a:r>
           </a:p>
         </p:txBody>
       </p:sp>
+      <p:grpSp>
+        <p:nvGrpSpPr>
+          <p:cNvPr id="3" name="icon:builtin-rocket"/>
+          <p:cNvGrpSpPr/>
+          <p:nvPr/>
+        </p:nvGrpSpPr>
+        <p:grpSpPr>
+          <a:xfrm>
+            <a:off x="526435" y="1852254"/>
+            <a:ext cx="392311" cy="416601"/>
+            <a:chOff x="526435" y="1852254"/>
+            <a:chExt cx="392311" cy="416601"/>
+          </a:xfrm>
+        </p:grpSpPr>
+        <p:sp>
+          <p:nvSpPr>
+            <p:cNvPr id="4" name="Freeform 3"/>
+            <p:cNvSpPr/>
+            <p:nvPr/>
+          </p:nvSpPr>
+          <p:spPr>
+            <a:xfrm>
+              <a:off x="623590" y="1852254"/>
+              <a:ext cx="295156" cy="319446"/>
+            </a:xfrm>
+            <a:custGeom>
+              <a:avLst/>
+              <a:gdLst/>
+              <a:ahLst/>
+              <a:cxnLst/>
+              <a:rect l="l" t="t" r="r" b="b"/>
+              <a:pathLst>
+                <a:path w="295156" h="319446">
+                  <a:moveTo>
+                    <a:pt x="145732" y="27981"/>
+                  </a:moveTo>
+                  <a:lnTo>
+                    <a:pt x="167130" y="17804"/>
+                  </a:lnTo>
+                  <a:lnTo>
+                    <a:pt x="187460" y="10298"/>
+                  </a:lnTo>
+                  <a:lnTo>
+                    <a:pt x="206600" y="5125"/>
+                  </a:lnTo>
+                  <a:lnTo>
+                    <a:pt x="224306" y="1943"/>
+                  </a:lnTo>
+                  <a:lnTo>
+                    <a:pt x="240458" y="340"/>
+                  </a:lnTo>
+                  <a:lnTo>
+                    <a:pt x="254861" y="0"/>
+                  </a:lnTo>
+                  <a:lnTo>
+                    <a:pt x="267321" y="510"/>
+                  </a:lnTo>
+                  <a:lnTo>
+                    <a:pt x="277717" y="1554"/>
+                  </a:lnTo>
+                  <a:lnTo>
+                    <a:pt x="285805" y="2744"/>
+                  </a:lnTo>
+                  <a:lnTo>
+                    <a:pt x="291465" y="3692"/>
+                  </a:lnTo>
+                  <a:lnTo>
+                    <a:pt x="292436" y="9351"/>
+                  </a:lnTo>
+                  <a:lnTo>
+                    <a:pt x="293602" y="17439"/>
+                  </a:lnTo>
+                  <a:lnTo>
+                    <a:pt x="294622" y="27835"/>
+                  </a:lnTo>
+                  <a:lnTo>
+                    <a:pt x="295156" y="40295"/>
+                  </a:lnTo>
+                  <a:lnTo>
+                    <a:pt x="294816" y="54698"/>
+                  </a:lnTo>
+                  <a:lnTo>
+                    <a:pt x="293213" y="70850"/>
+                  </a:lnTo>
+                  <a:lnTo>
+                    <a:pt x="290031" y="88557"/>
+                  </a:lnTo>
+                  <a:lnTo>
+                    <a:pt x="284858" y="107696"/>
+                  </a:lnTo>
+                  <a:lnTo>
+                    <a:pt x="277377" y="128026"/>
+                  </a:lnTo>
+                  <a:lnTo>
+                    <a:pt x="267176" y="149424"/>
+                  </a:lnTo>
+                  <a:lnTo>
+                    <a:pt x="97155" y="319446"/>
+                  </a:lnTo>
+                  <a:lnTo>
+                    <a:pt x="0" y="222291"/>
+                  </a:lnTo>
+                  <a:close/>
+                </a:path>
+              </a:pathLst>
+            </a:custGeom>
+            <a:noFill/>
+            <a:ln w="48577" cap="rnd">
+              <a:solidFill>
+                <a:srgbClr val="0077FF"/>
+              </a:solidFill>
+              <a:round/>
+            </a:ln>
+            <a:effectLst/>
+          </p:spPr>
+          <p:style>
+            <a:lnRef idx="1">
+              <a:schemeClr val="accent1"/>
+            </a:lnRef>
+            <a:fillRef idx="3">
+              <a:schemeClr val="accent1"/>
+            </a:fillRef>
+            <a:effectRef idx="2">
+              <a:schemeClr val="accent1"/>
+            </a:effectRef>
+            <a:fontRef idx="minor">
+              <a:schemeClr val="lt1"/>
+            </a:fontRef>
+          </p:style>
+          <p:txBody>
+            <a:bodyPr rtlCol="0" anchor="ctr"/>
+            <a:lstStyle/>
+            <a:p>
+              <a:pPr algn="ctr"/>
+            </a:p>
+          </p:txBody>
+        </p:sp>
+        <p:sp>
+          <p:nvSpPr>
+            <p:cNvPr id="5" name="Freeform 4"/>
+            <p:cNvSpPr/>
+            <p:nvPr/>
+          </p:nvSpPr>
+          <p:spPr>
+            <a:xfrm>
+              <a:off x="550723" y="1977390"/>
+              <a:ext cx="170022" cy="97155"/>
+            </a:xfrm>
+            <a:custGeom>
+              <a:avLst/>
+              <a:gdLst/>
+              <a:ahLst/>
+              <a:cxnLst/>
+              <a:rect l="l" t="t" r="r" b="b"/>
+              <a:pathLst>
+                <a:path w="170022" h="97155">
+                  <a:moveTo>
+                    <a:pt x="72867" y="97155"/>
+                  </a:moveTo>
+                  <a:lnTo>
+                    <a:pt x="0" y="97155"/>
+                  </a:lnTo>
+                  <a:lnTo>
+                    <a:pt x="72867" y="0"/>
+                  </a:lnTo>
+                  <a:lnTo>
+                    <a:pt x="170022" y="0"/>
+                  </a:lnTo>
+                </a:path>
+              </a:pathLst>
+            </a:custGeom>
+            <a:noFill/>
+            <a:ln w="48577" cap="rnd">
+              <a:solidFill>
+                <a:srgbClr val="0077FF"/>
+              </a:solidFill>
+              <a:round/>
+            </a:ln>
+            <a:effectLst/>
+          </p:spPr>
+          <p:style>
+            <a:lnRef idx="1">
+              <a:schemeClr val="accent1"/>
+            </a:lnRef>
+            <a:fillRef idx="3">
+              <a:schemeClr val="accent1"/>
+            </a:fillRef>
+            <a:effectRef idx="2">
+              <a:schemeClr val="accent1"/>
+            </a:effectRef>
+            <a:fontRef idx="minor">
+              <a:schemeClr val="lt1"/>
+            </a:fontRef>
+          </p:style>
+          <p:txBody>
+            <a:bodyPr rtlCol="0" anchor="ctr"/>
+            <a:lstStyle/>
+            <a:p>
+              <a:pPr algn="ctr"/>
+            </a:p>
+          </p:txBody>
+        </p:sp>
+        <p:sp>
+          <p:nvSpPr>
+            <p:cNvPr id="6" name="Freeform 5"/>
+            <p:cNvSpPr/>
+            <p:nvPr/>
+          </p:nvSpPr>
+          <p:spPr>
+            <a:xfrm>
+              <a:off x="720745" y="2074545"/>
+              <a:ext cx="97155" cy="170021"/>
+            </a:xfrm>
+            <a:custGeom>
+              <a:avLst/>
+              <a:gdLst/>
+              <a:ahLst/>
+              <a:cxnLst/>
+              <a:rect l="l" t="t" r="r" b="b"/>
+              <a:pathLst>
+                <a:path w="97155" h="170021">
+                  <a:moveTo>
+                    <a:pt x="0" y="97155"/>
+                  </a:moveTo>
+                  <a:lnTo>
+                    <a:pt x="0" y="170021"/>
+                  </a:lnTo>
+                  <a:lnTo>
+                    <a:pt x="97155" y="97155"/>
+                  </a:lnTo>
+                  <a:lnTo>
+                    <a:pt x="97155" y="0"/>
+                  </a:lnTo>
+                </a:path>
+              </a:pathLst>
+            </a:custGeom>
+            <a:noFill/>
+            <a:ln w="48577" cap="rnd">
+              <a:solidFill>
+                <a:srgbClr val="0077FF"/>
+              </a:solidFill>
+              <a:round/>
+            </a:ln>
+            <a:effectLst/>
+          </p:spPr>
+          <p:style>
+            <a:lnRef idx="1">
+              <a:schemeClr val="accent1"/>
+            </a:lnRef>
+            <a:fillRef idx="3">
+              <a:schemeClr val="accent1"/>
+            </a:fillRef>
+            <a:effectRef idx="2">
+              <a:schemeClr val="accent1"/>
+            </a:effectRef>
+            <a:fontRef idx="minor">
+              <a:schemeClr val="lt1"/>
+            </a:fontRef>
+          </p:style>
+          <p:txBody>
+            <a:bodyPr rtlCol="0" anchor="ctr"/>
+            <a:lstStyle/>
+            <a:p>
+              <a:pPr algn="ctr"/>
+            </a:p>
+          </p:txBody>
+        </p:sp>
+        <p:sp>
+          <p:nvSpPr>
+            <p:cNvPr id="7" name="Oval 6"/>
+            <p:cNvSpPr/>
+            <p:nvPr/>
+          </p:nvSpPr>
+          <p:spPr>
+            <a:xfrm>
+              <a:off x="771751" y="1955530"/>
+              <a:ext cx="68008" cy="68008"/>
+            </a:xfrm>
+            <a:prstGeom prst="ellipse">
+              <a:avLst/>
+            </a:prstGeom>
+            <a:noFill/>
+            <a:ln w="48577" cap="rnd">
+              <a:solidFill>
+                <a:srgbClr val="0077FF"/>
+              </a:solidFill>
+              <a:round/>
+            </a:ln>
+            <a:effectLst/>
+          </p:spPr>
+          <p:style>
+            <a:lnRef idx="1">
+              <a:schemeClr val="accent1"/>
+            </a:lnRef>
+            <a:fillRef idx="3">
+              <a:schemeClr val="accent1"/>
+            </a:fillRef>
+            <a:effectRef idx="2">
+              <a:schemeClr val="accent1"/>
+            </a:effectRef>
+            <a:fontRef idx="minor">
+              <a:schemeClr val="lt1"/>
+            </a:fontRef>
+          </p:style>
+          <p:txBody>
+            <a:bodyPr rtlCol="0" anchor="ctr"/>
+            <a:lstStyle/>
+            <a:p>
+              <a:pPr algn="ctr"/>
+            </a:p>
+          </p:txBody>
+        </p:sp>
+        <p:sp>
+          <p:nvSpPr>
+            <p:cNvPr id="8" name="Freeform 7"/>
+            <p:cNvSpPr/>
+            <p:nvPr/>
+          </p:nvSpPr>
+          <p:spPr>
+            <a:xfrm>
+              <a:off x="526435" y="2183844"/>
+              <a:ext cx="85010" cy="85011"/>
+            </a:xfrm>
+            <a:custGeom>
+              <a:avLst/>
+              <a:gdLst/>
+              <a:ahLst/>
+              <a:cxnLst/>
+              <a:rect l="l" t="t" r="r" b="b"/>
+              <a:pathLst>
+                <a:path w="85010" h="85011">
+                  <a:moveTo>
+                    <a:pt x="60721" y="0"/>
+                  </a:moveTo>
+                  <a:lnTo>
+                    <a:pt x="50156" y="4348"/>
+                  </a:lnTo>
+                  <a:lnTo>
+                    <a:pt x="40416" y="10007"/>
+                  </a:lnTo>
+                  <a:lnTo>
+                    <a:pt x="31526" y="16832"/>
+                  </a:lnTo>
+                  <a:lnTo>
+                    <a:pt x="23608" y="24677"/>
+                  </a:lnTo>
+                  <a:lnTo>
+                    <a:pt x="16710" y="33397"/>
+                  </a:lnTo>
+                  <a:lnTo>
+                    <a:pt x="10881" y="42845"/>
+                  </a:lnTo>
+                  <a:lnTo>
+                    <a:pt x="6217" y="52876"/>
+                  </a:lnTo>
+                  <a:lnTo>
+                    <a:pt x="2817" y="63345"/>
+                  </a:lnTo>
+                  <a:lnTo>
+                    <a:pt x="728" y="74105"/>
+                  </a:lnTo>
+                  <a:lnTo>
+                    <a:pt x="0" y="85011"/>
+                  </a:lnTo>
+                  <a:lnTo>
+                    <a:pt x="10905" y="84306"/>
+                  </a:lnTo>
+                  <a:lnTo>
+                    <a:pt x="21665" y="82193"/>
+                  </a:lnTo>
+                  <a:lnTo>
+                    <a:pt x="32134" y="78768"/>
+                  </a:lnTo>
+                  <a:lnTo>
+                    <a:pt x="42165" y="74129"/>
+                  </a:lnTo>
+                  <a:lnTo>
+                    <a:pt x="51613" y="68300"/>
+                  </a:lnTo>
+                  <a:lnTo>
+                    <a:pt x="60333" y="61402"/>
+                  </a:lnTo>
+                  <a:lnTo>
+                    <a:pt x="68178" y="53459"/>
+                  </a:lnTo>
+                  <a:lnTo>
+                    <a:pt x="75003" y="44594"/>
+                  </a:lnTo>
+                  <a:lnTo>
+                    <a:pt x="80662" y="34830"/>
+                  </a:lnTo>
+                  <a:lnTo>
+                    <a:pt x="85010" y="24289"/>
+                  </a:lnTo>
+                </a:path>
+              </a:pathLst>
+            </a:custGeom>
+            <a:noFill/>
+            <a:ln w="48577" cap="rnd">
+              <a:solidFill>
+                <a:srgbClr val="0077FF"/>
+              </a:solidFill>
+              <a:round/>
+            </a:ln>
+            <a:effectLst/>
+          </p:spPr>
+          <p:style>
+            <a:lnRef idx="1">
+              <a:schemeClr val="accent1"/>
+            </a:lnRef>
+            <a:fillRef idx="3">
+              <a:schemeClr val="accent1"/>
+            </a:fillRef>
+            <a:effectRef idx="2">
+              <a:schemeClr val="accent1"/>
+            </a:effectRef>
+            <a:fontRef idx="minor">
+              <a:schemeClr val="lt1"/>
+            </a:fontRef>
+          </p:style>
+          <p:txBody>
+            <a:bodyPr rtlCol="0" anchor="ctr"/>
+            <a:lstStyle/>
+            <a:p>
+              <a:pPr algn="ctr"/>
+            </a:p>
+          </p:txBody>
+        </p:sp>
+      </p:grpSp>
       <p:sp>
         <p:nvSpPr>
-          <p:cNvPr id="3" name="card_0"/>
+          <p:cNvPr id="9" name="item_0"/>
           <p:cNvSpPr txBox="1"/>
           <p:nvPr/>
         </p:nvSpPr>
         <p:spPr>
           <a:xfrm>
-            <a:off x="568147" y="1818894"/>
-            <a:ext cx="3115177" cy="3220212"/>
+            <a:off x="1274528" y="1792605"/>
+            <a:ext cx="10465635" cy="676275"/>
           </a:xfrm>
           <a:prstGeom prst="rect">
             <a:avLst/>
@@ -11164,7 +12349,7 @@
               <a:spcAft>
                 <a:spcPts val="300"/>
               </a:spcAft>
-              <a:defRPr sz="2800" b="0">
+              <a:defRPr sz="2800">
                 <a:solidFill>
                   <a:srgbClr val="FFFFFF"/>
                 </a:solidFill>
@@ -11174,7 +12359,7 @@
               </a:defRPr>
             </a:pPr>
             <a:r>
-              <a:rPr sz="2800" b="0">
+              <a:rPr sz="2800">
                 <a:solidFill>
                   <a:srgbClr val="FFFFFF"/>
                 </a:solidFill>
@@ -11182,21 +12367,266 @@
                 <a:ea typeface="Play"/>
                 <a:cs typeface="Play"/>
               </a:rPr>
-              <a:t>Сервис работает на 2 vCPU / 2 ГБ RAM</a:t>
+              <a:t>Пилот длился 6 недель на двух командах</a:t>
             </a:r>
           </a:p>
         </p:txBody>
       </p:sp>
+      <p:grpSp>
+        <p:nvGrpSpPr>
+          <p:cNvPr id="10" name="icon:builtin-presentation"/>
+          <p:cNvGrpSpPr/>
+          <p:nvPr/>
+        </p:nvGrpSpPr>
+        <p:grpSpPr>
+          <a:xfrm>
+            <a:off x="502146" y="2703195"/>
+            <a:ext cx="437197" cy="388620"/>
+            <a:chOff x="502146" y="2703195"/>
+            <a:chExt cx="437197" cy="388620"/>
+          </a:xfrm>
+        </p:grpSpPr>
+        <p:sp>
+          <p:nvSpPr>
+            <p:cNvPr id="11" name="Rounded Rectangle 10"/>
+            <p:cNvSpPr/>
+            <p:nvPr/>
+          </p:nvSpPr>
+          <p:spPr>
+            <a:xfrm>
+              <a:off x="502146" y="2703195"/>
+              <a:ext cx="437197" cy="291465"/>
+            </a:xfrm>
+            <a:prstGeom prst="roundRect">
+              <a:avLst>
+                <a:gd name="adj" fmla="val 12500"/>
+              </a:avLst>
+            </a:prstGeom>
+            <a:noFill/>
+            <a:ln w="48577" cap="rnd">
+              <a:solidFill>
+                <a:srgbClr val="0077FF"/>
+              </a:solidFill>
+              <a:round/>
+            </a:ln>
+            <a:effectLst/>
+          </p:spPr>
+          <p:style>
+            <a:lnRef idx="1">
+              <a:schemeClr val="accent1"/>
+            </a:lnRef>
+            <a:fillRef idx="3">
+              <a:schemeClr val="accent1"/>
+            </a:fillRef>
+            <a:effectRef idx="2">
+              <a:schemeClr val="accent1"/>
+            </a:effectRef>
+            <a:fontRef idx="minor">
+              <a:schemeClr val="lt1"/>
+            </a:fontRef>
+          </p:style>
+          <p:txBody>
+            <a:bodyPr rtlCol="0" anchor="ctr"/>
+            <a:lstStyle/>
+            <a:p>
+              <a:pPr algn="ctr"/>
+            </a:p>
+          </p:txBody>
+        </p:sp>
+        <p:sp>
+          <p:nvSpPr>
+            <p:cNvPr id="12" name="Freeform 11"/>
+            <p:cNvSpPr/>
+            <p:nvPr/>
+          </p:nvSpPr>
+          <p:spPr>
+            <a:xfrm>
+              <a:off x="720745" y="2994660"/>
+              <a:ext cx="0" cy="97155"/>
+            </a:xfrm>
+            <a:custGeom>
+              <a:avLst/>
+              <a:gdLst/>
+              <a:ahLst/>
+              <a:cxnLst/>
+              <a:rect l="l" t="t" r="r" b="b"/>
+              <a:pathLst>
+                <a:path w="0" h="97155">
+                  <a:moveTo>
+                    <a:pt x="0" y="0"/>
+                  </a:moveTo>
+                  <a:lnTo>
+                    <a:pt x="0" y="97155"/>
+                  </a:lnTo>
+                </a:path>
+              </a:pathLst>
+            </a:custGeom>
+            <a:noFill/>
+            <a:ln w="48577" cap="rnd">
+              <a:solidFill>
+                <a:srgbClr val="0077FF"/>
+              </a:solidFill>
+              <a:round/>
+            </a:ln>
+            <a:effectLst/>
+          </p:spPr>
+          <p:style>
+            <a:lnRef idx="1">
+              <a:schemeClr val="accent1"/>
+            </a:lnRef>
+            <a:fillRef idx="3">
+              <a:schemeClr val="accent1"/>
+            </a:fillRef>
+            <a:effectRef idx="2">
+              <a:schemeClr val="accent1"/>
+            </a:effectRef>
+            <a:fontRef idx="minor">
+              <a:schemeClr val="lt1"/>
+            </a:fontRef>
+          </p:style>
+          <p:txBody>
+            <a:bodyPr rtlCol="0" anchor="ctr"/>
+            <a:lstStyle/>
+            <a:p>
+              <a:pPr algn="ctr"/>
+            </a:p>
+          </p:txBody>
+        </p:sp>
+        <p:sp>
+          <p:nvSpPr>
+            <p:cNvPr id="13" name="Freeform 12"/>
+            <p:cNvSpPr/>
+            <p:nvPr/>
+          </p:nvSpPr>
+          <p:spPr>
+            <a:xfrm>
+              <a:off x="623590" y="3091815"/>
+              <a:ext cx="194310" cy="0"/>
+            </a:xfrm>
+            <a:custGeom>
+              <a:avLst/>
+              <a:gdLst/>
+              <a:ahLst/>
+              <a:cxnLst/>
+              <a:rect l="l" t="t" r="r" b="b"/>
+              <a:pathLst>
+                <a:path w="194310" h="0">
+                  <a:moveTo>
+                    <a:pt x="0" y="0"/>
+                  </a:moveTo>
+                  <a:lnTo>
+                    <a:pt x="194310" y="0"/>
+                  </a:lnTo>
+                </a:path>
+              </a:pathLst>
+            </a:custGeom>
+            <a:noFill/>
+            <a:ln w="48577" cap="rnd">
+              <a:solidFill>
+                <a:srgbClr val="0077FF"/>
+              </a:solidFill>
+              <a:round/>
+            </a:ln>
+            <a:effectLst/>
+          </p:spPr>
+          <p:style>
+            <a:lnRef idx="1">
+              <a:schemeClr val="accent1"/>
+            </a:lnRef>
+            <a:fillRef idx="3">
+              <a:schemeClr val="accent1"/>
+            </a:fillRef>
+            <a:effectRef idx="2">
+              <a:schemeClr val="accent1"/>
+            </a:effectRef>
+            <a:fontRef idx="minor">
+              <a:schemeClr val="lt1"/>
+            </a:fontRef>
+          </p:style>
+          <p:txBody>
+            <a:bodyPr rtlCol="0" anchor="ctr"/>
+            <a:lstStyle/>
+            <a:p>
+              <a:pPr algn="ctr"/>
+            </a:p>
+          </p:txBody>
+        </p:sp>
+        <p:sp>
+          <p:nvSpPr>
+            <p:cNvPr id="14" name="Freeform 13"/>
+            <p:cNvSpPr/>
+            <p:nvPr/>
+          </p:nvSpPr>
+          <p:spPr>
+            <a:xfrm>
+              <a:off x="599301" y="2776061"/>
+              <a:ext cx="242887" cy="121444"/>
+            </a:xfrm>
+            <a:custGeom>
+              <a:avLst/>
+              <a:gdLst/>
+              <a:ahLst/>
+              <a:cxnLst/>
+              <a:rect l="l" t="t" r="r" b="b"/>
+              <a:pathLst>
+                <a:path w="242887" h="121444">
+                  <a:moveTo>
+                    <a:pt x="0" y="121444"/>
+                  </a:moveTo>
+                  <a:lnTo>
+                    <a:pt x="72866" y="48577"/>
+                  </a:lnTo>
+                  <a:lnTo>
+                    <a:pt x="145732" y="97155"/>
+                  </a:lnTo>
+                  <a:lnTo>
+                    <a:pt x="242887" y="0"/>
+                  </a:lnTo>
+                </a:path>
+              </a:pathLst>
+            </a:custGeom>
+            <a:noFill/>
+            <a:ln w="48577" cap="rnd">
+              <a:solidFill>
+                <a:srgbClr val="0077FF"/>
+              </a:solidFill>
+              <a:round/>
+            </a:ln>
+            <a:effectLst/>
+          </p:spPr>
+          <p:style>
+            <a:lnRef idx="1">
+              <a:schemeClr val="accent1"/>
+            </a:lnRef>
+            <a:fillRef idx="3">
+              <a:schemeClr val="accent1"/>
+            </a:fillRef>
+            <a:effectRef idx="2">
+              <a:schemeClr val="accent1"/>
+            </a:effectRef>
+            <a:fontRef idx="minor">
+              <a:schemeClr val="lt1"/>
+            </a:fontRef>
+          </p:style>
+          <p:txBody>
+            <a:bodyPr rtlCol="0" anchor="ctr"/>
+            <a:lstStyle/>
+            <a:p>
+              <a:pPr algn="ctr"/>
+            </a:p>
+          </p:txBody>
+        </p:sp>
+      </p:grpSp>
       <p:sp>
         <p:nvSpPr>
-          <p:cNvPr id="4" name="card_1"/>
+          <p:cNvPr id="15" name="item_1"/>
           <p:cNvSpPr txBox="1"/>
           <p:nvPr/>
         </p:nvSpPr>
         <p:spPr>
           <a:xfrm>
-            <a:off x="4209288" y="1818894"/>
-            <a:ext cx="3115177" cy="3220212"/>
+            <a:off x="1274528" y="2615565"/>
+            <a:ext cx="10465635" cy="676275"/>
           </a:xfrm>
           <a:prstGeom prst="rect">
             <a:avLst/>
@@ -11213,7 +12643,7 @@
               <a:spcAft>
                 <a:spcPts val="300"/>
               </a:spcAft>
-              <a:defRPr sz="2800" b="0">
+              <a:defRPr sz="2800">
                 <a:solidFill>
                   <a:srgbClr val="FFFFFF"/>
                 </a:solidFill>
@@ -11223,7 +12653,7 @@
               </a:defRPr>
             </a:pPr>
             <a:r>
-              <a:rPr sz="2800" b="0">
+              <a:rPr sz="2800">
                 <a:solidFill>
                   <a:srgbClr val="FFFFFF"/>
                 </a:solidFill>
@@ -11231,21 +12661,143 @@
                 <a:ea typeface="Play"/>
                 <a:cs typeface="Play"/>
               </a:rPr>
-              <a:t>Модель gpt-oss-20b подключается по OpenAI-совместимому протоколу</a:t>
+              <a:t>Собрано 68 презентаций</a:t>
             </a:r>
           </a:p>
         </p:txBody>
       </p:sp>
+      <p:grpSp>
+        <p:nvGrpSpPr>
+          <p:cNvPr id="16" name="icon:builtin-clock"/>
+          <p:cNvGrpSpPr/>
+          <p:nvPr/>
+        </p:nvGrpSpPr>
+        <p:grpSpPr>
+          <a:xfrm>
+            <a:off x="502146" y="3501866"/>
+            <a:ext cx="437197" cy="437197"/>
+            <a:chOff x="502146" y="3501866"/>
+            <a:chExt cx="437197" cy="437197"/>
+          </a:xfrm>
+        </p:grpSpPr>
+        <p:sp>
+          <p:nvSpPr>
+            <p:cNvPr id="17" name="Oval 16"/>
+            <p:cNvSpPr/>
+            <p:nvPr/>
+          </p:nvSpPr>
+          <p:spPr>
+            <a:xfrm>
+              <a:off x="502146" y="3501866"/>
+              <a:ext cx="437197" cy="437197"/>
+            </a:xfrm>
+            <a:prstGeom prst="ellipse">
+              <a:avLst/>
+            </a:prstGeom>
+            <a:noFill/>
+            <a:ln w="48577" cap="rnd">
+              <a:solidFill>
+                <a:srgbClr val="0077FF"/>
+              </a:solidFill>
+              <a:round/>
+            </a:ln>
+            <a:effectLst/>
+          </p:spPr>
+          <p:style>
+            <a:lnRef idx="1">
+              <a:schemeClr val="accent1"/>
+            </a:lnRef>
+            <a:fillRef idx="3">
+              <a:schemeClr val="accent1"/>
+            </a:fillRef>
+            <a:effectRef idx="2">
+              <a:schemeClr val="accent1"/>
+            </a:effectRef>
+            <a:fontRef idx="minor">
+              <a:schemeClr val="lt1"/>
+            </a:fontRef>
+          </p:style>
+          <p:txBody>
+            <a:bodyPr rtlCol="0" anchor="ctr"/>
+            <a:lstStyle/>
+            <a:p>
+              <a:pPr algn="ctr"/>
+            </a:p>
+          </p:txBody>
+        </p:sp>
+        <p:sp>
+          <p:nvSpPr>
+            <p:cNvPr id="18" name="Freeform 17"/>
+            <p:cNvSpPr/>
+            <p:nvPr/>
+          </p:nvSpPr>
+          <p:spPr>
+            <a:xfrm>
+              <a:off x="720745" y="3599021"/>
+              <a:ext cx="85010" cy="170021"/>
+            </a:xfrm>
+            <a:custGeom>
+              <a:avLst/>
+              <a:gdLst/>
+              <a:ahLst/>
+              <a:cxnLst/>
+              <a:rect l="l" t="t" r="r" b="b"/>
+              <a:pathLst>
+                <a:path w="85010" h="170021">
+                  <a:moveTo>
+                    <a:pt x="0" y="0"/>
+                  </a:moveTo>
+                  <a:lnTo>
+                    <a:pt x="0" y="121444"/>
+                  </a:lnTo>
+                  <a:lnTo>
+                    <a:pt x="85010" y="170021"/>
+                  </a:lnTo>
+                </a:path>
+              </a:pathLst>
+            </a:custGeom>
+            <a:noFill/>
+            <a:ln w="48577" cap="rnd">
+              <a:solidFill>
+                <a:srgbClr val="0077FF"/>
+              </a:solidFill>
+              <a:round/>
+            </a:ln>
+            <a:effectLst/>
+          </p:spPr>
+          <p:style>
+            <a:lnRef idx="1">
+              <a:schemeClr val="accent1"/>
+            </a:lnRef>
+            <a:fillRef idx="3">
+              <a:schemeClr val="accent1"/>
+            </a:fillRef>
+            <a:effectRef idx="2">
+              <a:schemeClr val="accent1"/>
+            </a:effectRef>
+            <a:fontRef idx="minor">
+              <a:schemeClr val="lt1"/>
+            </a:fontRef>
+          </p:style>
+          <p:txBody>
+            <a:bodyPr rtlCol="0" anchor="ctr"/>
+            <a:lstStyle/>
+            <a:p>
+              <a:pPr algn="ctr"/>
+            </a:p>
+          </p:txBody>
+        </p:sp>
+      </p:grpSp>
       <p:sp>
         <p:nvSpPr>
-          <p:cNvPr id="5" name="card_2"/>
+          <p:cNvPr id="19" name="item_2"/>
           <p:cNvSpPr txBox="1"/>
           <p:nvPr/>
         </p:nvSpPr>
         <p:spPr>
           <a:xfrm>
-            <a:off x="7881884" y="1818894"/>
-            <a:ext cx="3115177" cy="3220212"/>
+            <a:off x="1274528" y="3438525"/>
+            <a:ext cx="10465635" cy="676275"/>
           </a:xfrm>
           <a:prstGeom prst="rect">
             <a:avLst/>
@@ -11262,7 +12814,7 @@
               <a:spcAft>
                 <a:spcPts val="300"/>
               </a:spcAft>
-              <a:defRPr sz="2800" b="0">
+              <a:defRPr sz="2800">
                 <a:solidFill>
                   <a:srgbClr val="FFFFFF"/>
                 </a:solidFill>
@@ -11272,7 +12824,7 @@
               </a:defRPr>
             </a:pPr>
             <a:r>
-              <a:rPr sz="2800" b="0">
+              <a:rPr sz="2800">
                 <a:solidFill>
                   <a:srgbClr val="FFFFFF"/>
                 </a:solidFill>
@@ -11280,7 +12832,405 @@
                 <a:ea typeface="Play"/>
                 <a:cs typeface="Play"/>
               </a:rPr>
-              <a:t>Стоимость инференса за 6 недель 1 400 рублей</a:t>
+              <a:t>Среднее время сборки 4 минуты</a:t>
+            </a:r>
+          </a:p>
+        </p:txBody>
+      </p:sp>
+      <p:grpSp>
+        <p:nvGrpSpPr>
+          <p:cNvPr id="20" name="icon:builtin-check"/>
+          <p:cNvGrpSpPr/>
+          <p:nvPr/>
+        </p:nvGrpSpPr>
+        <p:grpSpPr>
+          <a:xfrm>
+            <a:off x="502146" y="4324825"/>
+            <a:ext cx="437197" cy="437197"/>
+            <a:chOff x="502146" y="4324825"/>
+            <a:chExt cx="437197" cy="437197"/>
+          </a:xfrm>
+        </p:grpSpPr>
+        <p:sp>
+          <p:nvSpPr>
+            <p:cNvPr id="21" name="Oval 20"/>
+            <p:cNvSpPr/>
+            <p:nvPr/>
+          </p:nvSpPr>
+          <p:spPr>
+            <a:xfrm>
+              <a:off x="502146" y="4324825"/>
+              <a:ext cx="437197" cy="437197"/>
+            </a:xfrm>
+            <a:prstGeom prst="ellipse">
+              <a:avLst/>
+            </a:prstGeom>
+            <a:noFill/>
+            <a:ln w="48577" cap="rnd">
+              <a:solidFill>
+                <a:srgbClr val="0077FF"/>
+              </a:solidFill>
+              <a:round/>
+            </a:ln>
+            <a:effectLst/>
+          </p:spPr>
+          <p:style>
+            <a:lnRef idx="1">
+              <a:schemeClr val="accent1"/>
+            </a:lnRef>
+            <a:fillRef idx="3">
+              <a:schemeClr val="accent1"/>
+            </a:fillRef>
+            <a:effectRef idx="2">
+              <a:schemeClr val="accent1"/>
+            </a:effectRef>
+            <a:fontRef idx="minor">
+              <a:schemeClr val="lt1"/>
+            </a:fontRef>
+          </p:style>
+          <p:txBody>
+            <a:bodyPr rtlCol="0" anchor="ctr"/>
+            <a:lstStyle/>
+            <a:p>
+              <a:pPr algn="ctr"/>
+            </a:p>
+          </p:txBody>
+        </p:sp>
+        <p:sp>
+          <p:nvSpPr>
+            <p:cNvPr id="22" name="Freeform 21"/>
+            <p:cNvSpPr/>
+            <p:nvPr/>
+          </p:nvSpPr>
+          <p:spPr>
+            <a:xfrm>
+              <a:off x="623590" y="4470557"/>
+              <a:ext cx="194310" cy="145733"/>
+            </a:xfrm>
+            <a:custGeom>
+              <a:avLst/>
+              <a:gdLst/>
+              <a:ahLst/>
+              <a:cxnLst/>
+              <a:rect l="l" t="t" r="r" b="b"/>
+              <a:pathLst>
+                <a:path w="194310" h="145733">
+                  <a:moveTo>
+                    <a:pt x="0" y="72867"/>
+                  </a:moveTo>
+                  <a:lnTo>
+                    <a:pt x="72866" y="145733"/>
+                  </a:lnTo>
+                  <a:lnTo>
+                    <a:pt x="194310" y="0"/>
+                  </a:lnTo>
+                </a:path>
+              </a:pathLst>
+            </a:custGeom>
+            <a:noFill/>
+            <a:ln w="48577" cap="rnd">
+              <a:solidFill>
+                <a:srgbClr val="0077FF"/>
+              </a:solidFill>
+              <a:round/>
+            </a:ln>
+            <a:effectLst/>
+          </p:spPr>
+          <p:style>
+            <a:lnRef idx="1">
+              <a:schemeClr val="accent1"/>
+            </a:lnRef>
+            <a:fillRef idx="3">
+              <a:schemeClr val="accent1"/>
+            </a:fillRef>
+            <a:effectRef idx="2">
+              <a:schemeClr val="accent1"/>
+            </a:effectRef>
+            <a:fontRef idx="minor">
+              <a:schemeClr val="lt1"/>
+            </a:fontRef>
+          </p:style>
+          <p:txBody>
+            <a:bodyPr rtlCol="0" anchor="ctr"/>
+            <a:lstStyle/>
+            <a:p>
+              <a:pPr algn="ctr"/>
+            </a:p>
+          </p:txBody>
+        </p:sp>
+      </p:grpSp>
+      <p:sp>
+        <p:nvSpPr>
+          <p:cNvPr id="23" name="item_3"/>
+          <p:cNvSpPr txBox="1"/>
+          <p:nvPr/>
+        </p:nvSpPr>
+        <p:spPr>
+          <a:xfrm>
+            <a:off x="1274528" y="4261484"/>
+            <a:ext cx="10465635" cy="676275"/>
+          </a:xfrm>
+          <a:prstGeom prst="rect">
+            <a:avLst/>
+          </a:prstGeom>
+          <a:noFill/>
+        </p:spPr>
+        <p:txBody>
+          <a:bodyPr wrap="square" lIns="76200" rIns="76200" tIns="50800" bIns="50800">
+            <a:spAutoFit/>
+          </a:bodyPr>
+          <a:lstStyle/>
+          <a:p>
+            <a:pPr algn="l">
+              <a:spcAft>
+                <a:spcPts val="300"/>
+              </a:spcAft>
+              <a:defRPr sz="2800">
+                <a:solidFill>
+                  <a:srgbClr val="FFFFFF"/>
+                </a:solidFill>
+                <a:latin typeface="Play"/>
+                <a:ea typeface="Play"/>
+                <a:cs typeface="Play"/>
+              </a:defRPr>
+            </a:pPr>
+            <a:r>
+              <a:rPr sz="2800">
+                <a:solidFill>
+                  <a:srgbClr val="FFFFFF"/>
+                </a:solidFill>
+                <a:latin typeface="Play"/>
+                <a:ea typeface="Play"/>
+                <a:cs typeface="Play"/>
+              </a:rPr>
+              <a:t>Первый вариант готов за 1 день</a:t>
+            </a:r>
+          </a:p>
+        </p:txBody>
+      </p:sp>
+      <p:grpSp>
+        <p:nvGrpSpPr>
+          <p:cNvPr id="24" name="icon:builtin-cross"/>
+          <p:cNvGrpSpPr/>
+          <p:nvPr/>
+        </p:nvGrpSpPr>
+        <p:grpSpPr>
+          <a:xfrm>
+            <a:off x="502146" y="5147786"/>
+            <a:ext cx="437197" cy="437197"/>
+            <a:chOff x="502146" y="5147786"/>
+            <a:chExt cx="437197" cy="437197"/>
+          </a:xfrm>
+        </p:grpSpPr>
+        <p:sp>
+          <p:nvSpPr>
+            <p:cNvPr id="25" name="Oval 24"/>
+            <p:cNvSpPr/>
+            <p:nvPr/>
+          </p:nvSpPr>
+          <p:spPr>
+            <a:xfrm>
+              <a:off x="502146" y="5147786"/>
+              <a:ext cx="437197" cy="437197"/>
+            </a:xfrm>
+            <a:prstGeom prst="ellipse">
+              <a:avLst/>
+            </a:prstGeom>
+            <a:noFill/>
+            <a:ln w="48577" cap="rnd">
+              <a:solidFill>
+                <a:srgbClr val="0077FF"/>
+              </a:solidFill>
+              <a:round/>
+            </a:ln>
+            <a:effectLst/>
+          </p:spPr>
+          <p:style>
+            <a:lnRef idx="1">
+              <a:schemeClr val="accent1"/>
+            </a:lnRef>
+            <a:fillRef idx="3">
+              <a:schemeClr val="accent1"/>
+            </a:fillRef>
+            <a:effectRef idx="2">
+              <a:schemeClr val="accent1"/>
+            </a:effectRef>
+            <a:fontRef idx="minor">
+              <a:schemeClr val="lt1"/>
+            </a:fontRef>
+          </p:style>
+          <p:txBody>
+            <a:bodyPr rtlCol="0" anchor="ctr"/>
+            <a:lstStyle/>
+            <a:p>
+              <a:pPr algn="ctr"/>
+            </a:p>
+          </p:txBody>
+        </p:sp>
+        <p:sp>
+          <p:nvSpPr>
+            <p:cNvPr id="26" name="Freeform 25"/>
+            <p:cNvSpPr/>
+            <p:nvPr/>
+          </p:nvSpPr>
+          <p:spPr>
+            <a:xfrm>
+              <a:off x="647878" y="5293518"/>
+              <a:ext cx="145733" cy="145733"/>
+            </a:xfrm>
+            <a:custGeom>
+              <a:avLst/>
+              <a:gdLst/>
+              <a:ahLst/>
+              <a:cxnLst/>
+              <a:rect l="l" t="t" r="r" b="b"/>
+              <a:pathLst>
+                <a:path w="145733" h="145733">
+                  <a:moveTo>
+                    <a:pt x="0" y="0"/>
+                  </a:moveTo>
+                  <a:lnTo>
+                    <a:pt x="145733" y="145733"/>
+                  </a:lnTo>
+                </a:path>
+              </a:pathLst>
+            </a:custGeom>
+            <a:noFill/>
+            <a:ln w="48577" cap="rnd">
+              <a:solidFill>
+                <a:srgbClr val="0077FF"/>
+              </a:solidFill>
+              <a:round/>
+            </a:ln>
+            <a:effectLst/>
+          </p:spPr>
+          <p:style>
+            <a:lnRef idx="1">
+              <a:schemeClr val="accent1"/>
+            </a:lnRef>
+            <a:fillRef idx="3">
+              <a:schemeClr val="accent1"/>
+            </a:fillRef>
+            <a:effectRef idx="2">
+              <a:schemeClr val="accent1"/>
+            </a:effectRef>
+            <a:fontRef idx="minor">
+              <a:schemeClr val="lt1"/>
+            </a:fontRef>
+          </p:style>
+          <p:txBody>
+            <a:bodyPr rtlCol="0" anchor="ctr"/>
+            <a:lstStyle/>
+            <a:p>
+              <a:pPr algn="ctr"/>
+            </a:p>
+          </p:txBody>
+        </p:sp>
+        <p:sp>
+          <p:nvSpPr>
+            <p:cNvPr id="27" name="Freeform 26"/>
+            <p:cNvSpPr/>
+            <p:nvPr/>
+          </p:nvSpPr>
+          <p:spPr>
+            <a:xfrm>
+              <a:off x="647878" y="5293518"/>
+              <a:ext cx="145733" cy="145733"/>
+            </a:xfrm>
+            <a:custGeom>
+              <a:avLst/>
+              <a:gdLst/>
+              <a:ahLst/>
+              <a:cxnLst/>
+              <a:rect l="l" t="t" r="r" b="b"/>
+              <a:pathLst>
+                <a:path w="145733" h="145733">
+                  <a:moveTo>
+                    <a:pt x="145733" y="0"/>
+                  </a:moveTo>
+                  <a:lnTo>
+                    <a:pt x="0" y="145733"/>
+                  </a:lnTo>
+                </a:path>
+              </a:pathLst>
+            </a:custGeom>
+            <a:noFill/>
+            <a:ln w="48577" cap="rnd">
+              <a:solidFill>
+                <a:srgbClr val="0077FF"/>
+              </a:solidFill>
+              <a:round/>
+            </a:ln>
+            <a:effectLst/>
+          </p:spPr>
+          <p:style>
+            <a:lnRef idx="1">
+              <a:schemeClr val="accent1"/>
+            </a:lnRef>
+            <a:fillRef idx="3">
+              <a:schemeClr val="accent1"/>
+            </a:fillRef>
+            <a:effectRef idx="2">
+              <a:schemeClr val="accent1"/>
+            </a:effectRef>
+            <a:fontRef idx="minor">
+              <a:schemeClr val="lt1"/>
+            </a:fontRef>
+          </p:style>
+          <p:txBody>
+            <a:bodyPr rtlCol="0" anchor="ctr"/>
+            <a:lstStyle/>
+            <a:p>
+              <a:pPr algn="ctr"/>
+            </a:p>
+          </p:txBody>
+        </p:sp>
+      </p:grpSp>
+      <p:sp>
+        <p:nvSpPr>
+          <p:cNvPr id="28" name="item_4"/>
+          <p:cNvSpPr txBox="1"/>
+          <p:nvPr/>
+        </p:nvSpPr>
+        <p:spPr>
+          <a:xfrm>
+            <a:off x="1274528" y="5084445"/>
+            <a:ext cx="10465635" cy="676275"/>
+          </a:xfrm>
+          <a:prstGeom prst="rect">
+            <a:avLst/>
+          </a:prstGeom>
+          <a:noFill/>
+        </p:spPr>
+        <p:txBody>
+          <a:bodyPr wrap="square" lIns="76200" rIns="76200" tIns="50800" bIns="50800">
+            <a:spAutoFit/>
+          </a:bodyPr>
+          <a:lstStyle/>
+          <a:p>
+            <a:pPr algn="l">
+              <a:spcAft>
+                <a:spcPts val="300"/>
+              </a:spcAft>
+              <a:defRPr sz="2800">
+                <a:solidFill>
+                  <a:srgbClr val="FFFFFF"/>
+                </a:solidFill>
+                <a:latin typeface="Play"/>
+                <a:ea typeface="Play"/>
+                <a:cs typeface="Play"/>
+              </a:defRPr>
+            </a:pPr>
+            <a:r>
+              <a:rPr sz="2800">
+                <a:solidFill>
+                  <a:srgbClr val="FFFFFF"/>
+                </a:solidFill>
+                <a:latin typeface="Play"/>
+                <a:ea typeface="Play"/>
+                <a:cs typeface="Play"/>
+              </a:rPr>
+              <a:t>Нарушения стиля 2 из 68, исправлены автоматически</a:t>
             </a:r>
           </a:p>
         </p:txBody>
@@ -11347,21 +13297,21 @@
                 <a:ea typeface="Play"/>
                 <a:cs typeface="Play"/>
               </a:rPr>
-              <a:t>Риски</a:t>
+              <a:t>Что мы просим решить</a:t>
             </a:r>
           </a:p>
         </p:txBody>
       </p:sp>
       <p:sp>
         <p:nvSpPr>
-          <p:cNvPr id="3" name="body"/>
+          <p:cNvPr id="3" name="card_0"/>
           <p:cNvSpPr txBox="1"/>
           <p:nvPr/>
         </p:nvSpPr>
         <p:spPr>
           <a:xfrm>
-            <a:off x="429280" y="1492575"/>
-            <a:ext cx="11310884" cy="1341120"/>
+            <a:off x="568147" y="1818894"/>
+            <a:ext cx="3115177" cy="3220212"/>
           </a:xfrm>
           <a:prstGeom prst="rect">
             <a:avLst/>
@@ -11378,7 +13328,7 @@
               <a:spcAft>
                 <a:spcPts val="300"/>
               </a:spcAft>
-              <a:defRPr sz="1600">
+              <a:defRPr sz="2800" b="0">
                 <a:solidFill>
                   <a:srgbClr val="FFFFFF"/>
                 </a:solidFill>
@@ -11388,7 +13338,7 @@
               </a:defRPr>
             </a:pPr>
             <a:r>
-              <a:rPr sz="1600">
+              <a:rPr sz="2800" b="0">
                 <a:solidFill>
                   <a:srgbClr val="FFFFFF"/>
                 </a:solidFill>
@@ -11396,202 +13346,21 @@
                 <a:ea typeface="Play"/>
                 <a:cs typeface="Play"/>
               </a:rPr>
-              <a:t>• Модель может выдумать цифры, аудит проверяет каждое число</a:t>
-            </a:r>
-          </a:p>
-          <a:p>
-            <a:pPr algn="l">
-              <a:spcAft>
-                <a:spcPts val="300"/>
-              </a:spcAft>
-              <a:defRPr sz="1600">
-                <a:solidFill>
-                  <a:srgbClr val="FFFFFF"/>
-                </a:solidFill>
-                <a:latin typeface="Play"/>
-                <a:ea typeface="Play"/>
-                <a:cs typeface="Play"/>
-              </a:defRPr>
-            </a:pPr>
-            <a:r>
-              <a:rPr sz="1600">
-                <a:solidFill>
-                  <a:srgbClr val="FFFFFF"/>
-                </a:solidFill>
-                <a:latin typeface="Play"/>
-                <a:ea typeface="Play"/>
-                <a:cs typeface="Play"/>
-              </a:rPr>
-              <a:t>• Плохой шаблон приводит к использованию рабочей области</a:t>
-            </a:r>
-          </a:p>
-          <a:p>
-            <a:pPr algn="l">
-              <a:spcAft>
-                <a:spcPts val="300"/>
-              </a:spcAft>
-              <a:defRPr sz="1600">
-                <a:solidFill>
-                  <a:srgbClr val="FFFFFF"/>
-                </a:solidFill>
-                <a:latin typeface="Play"/>
-                <a:ea typeface="Play"/>
-                <a:cs typeface="Play"/>
-              </a:defRPr>
-            </a:pPr>
-            <a:r>
-              <a:rPr sz="1600">
-                <a:solidFill>
-                  <a:srgbClr val="FFFFFF"/>
-                </a:solidFill>
-                <a:latin typeface="Play"/>
-                <a:ea typeface="Play"/>
-                <a:cs typeface="Play"/>
-              </a:rPr>
-              <a:t>• Нагрузка выше 20 задач требует внешней очереди</a:t>
+              <a:t>Одобрить запуск сервиса на всю компанию</a:t>
             </a:r>
           </a:p>
         </p:txBody>
       </p:sp>
       <p:sp>
         <p:nvSpPr>
-          <p:cNvPr id="4" name="Oval 3"/>
-          <p:cNvSpPr/>
-          <p:nvPr/>
-        </p:nvSpPr>
-        <p:spPr>
-          <a:xfrm>
-            <a:off x="1713709" y="3080206"/>
-            <a:ext cx="1100894" cy="1100894"/>
-          </a:xfrm>
-          <a:prstGeom prst="ellipse">
-            <a:avLst/>
-          </a:prstGeom>
-          <a:solidFill>
-            <a:srgbClr val="0077FF"/>
-          </a:solidFill>
-          <a:ln>
-            <a:noFill/>
-          </a:ln>
-        </p:spPr>
-        <p:style>
-          <a:lnRef idx="1">
-            <a:schemeClr val="accent1"/>
-          </a:lnRef>
-          <a:fillRef idx="3">
-            <a:schemeClr val="accent1"/>
-          </a:fillRef>
-          <a:effectRef idx="2">
-            <a:schemeClr val="accent1"/>
-          </a:effectRef>
-          <a:fontRef idx="minor">
-            <a:schemeClr val="lt1"/>
-          </a:fontRef>
-        </p:style>
-        <p:txBody>
-          <a:bodyPr rtlCol="0" anchor="ctr"/>
-          <a:lstStyle/>
-          <a:p>
-            <a:pPr algn="ctr"/>
-          </a:p>
-        </p:txBody>
-      </p:sp>
-      <p:sp>
-        <p:nvSpPr>
-          <p:cNvPr id="5" name="Oval 4"/>
-          <p:cNvSpPr/>
-          <p:nvPr/>
-        </p:nvSpPr>
-        <p:spPr>
-          <a:xfrm>
-            <a:off x="1888851" y="3255348"/>
-            <a:ext cx="750610" cy="750610"/>
-          </a:xfrm>
-          <a:prstGeom prst="ellipse">
-            <a:avLst/>
-          </a:prstGeom>
-          <a:solidFill>
-            <a:srgbClr val="111111"/>
-          </a:solidFill>
-          <a:ln>
-            <a:noFill/>
-          </a:ln>
-        </p:spPr>
-        <p:style>
-          <a:lnRef idx="1">
-            <a:schemeClr val="accent1"/>
-          </a:lnRef>
-          <a:fillRef idx="3">
-            <a:schemeClr val="accent1"/>
-          </a:fillRef>
-          <a:effectRef idx="2">
-            <a:schemeClr val="accent1"/>
-          </a:effectRef>
-          <a:fontRef idx="minor">
-            <a:schemeClr val="lt1"/>
-          </a:fontRef>
-        </p:style>
-        <p:txBody>
-          <a:bodyPr rtlCol="0" anchor="ctr"/>
-          <a:lstStyle/>
-          <a:p>
-            <a:pPr algn="ctr"/>
-          </a:p>
-        </p:txBody>
-      </p:sp>
-      <p:sp>
-        <p:nvSpPr>
-          <p:cNvPr id="6" name="Oval 5"/>
-          <p:cNvSpPr/>
-          <p:nvPr/>
-        </p:nvSpPr>
-        <p:spPr>
-          <a:xfrm>
-            <a:off x="2089014" y="3455511"/>
-            <a:ext cx="350284" cy="350284"/>
-          </a:xfrm>
-          <a:prstGeom prst="ellipse">
-            <a:avLst/>
-          </a:prstGeom>
-          <a:solidFill>
-            <a:srgbClr val="0077FF"/>
-          </a:solidFill>
-          <a:ln>
-            <a:noFill/>
-          </a:ln>
-        </p:spPr>
-        <p:style>
-          <a:lnRef idx="1">
-            <a:schemeClr val="accent1"/>
-          </a:lnRef>
-          <a:fillRef idx="3">
-            <a:schemeClr val="accent1"/>
-          </a:fillRef>
-          <a:effectRef idx="2">
-            <a:schemeClr val="accent1"/>
-          </a:effectRef>
-          <a:fontRef idx="minor">
-            <a:schemeClr val="lt1"/>
-          </a:fontRef>
-        </p:style>
-        <p:txBody>
-          <a:bodyPr rtlCol="0" anchor="ctr"/>
-          <a:lstStyle/>
-          <a:p>
-            <a:pPr algn="ctr"/>
-          </a:p>
-        </p:txBody>
-      </p:sp>
-      <p:sp>
-        <p:nvSpPr>
-          <p:cNvPr id="7" name="TextBox 6"/>
+          <p:cNvPr id="4" name="card_1"/>
           <p:cNvSpPr txBox="1"/>
           <p:nvPr/>
         </p:nvSpPr>
         <p:spPr>
           <a:xfrm>
-            <a:off x="429280" y="4406284"/>
-            <a:ext cx="3669753" cy="1100894"/>
+            <a:off x="4209288" y="1818894"/>
+            <a:ext cx="3115177" cy="3220212"/>
           </a:xfrm>
           <a:prstGeom prst="rect">
             <a:avLst/>
@@ -11599,13 +13368,16 @@
           <a:noFill/>
         </p:spPr>
         <p:txBody>
-          <a:bodyPr wrap="square" lIns="12700" rIns="12700" tIns="12700" bIns="12700">
+          <a:bodyPr wrap="square" lIns="76200" rIns="76200" tIns="50800" bIns="50800">
             <a:spAutoFit/>
           </a:bodyPr>
           <a:lstStyle/>
           <a:p>
-            <a:pPr algn="ctr">
-              <a:defRPr sz="1400" b="0">
+            <a:pPr algn="l">
+              <a:spcAft>
+                <a:spcPts val="300"/>
+              </a:spcAft>
+              <a:defRPr sz="2800" b="0">
                 <a:solidFill>
                   <a:srgbClr val="FFFFFF"/>
                 </a:solidFill>
@@ -11615,7 +13387,7 @@
               </a:defRPr>
             </a:pPr>
             <a:r>
-              <a:rPr sz="1400" b="0">
+              <a:rPr sz="2800" b="0">
                 <a:solidFill>
                   <a:srgbClr val="FFFFFF"/>
                 </a:solidFill>
@@ -11623,64 +13395,21 @@
                 <a:ea typeface="Play"/>
                 <a:cs typeface="Play"/>
               </a:rPr>
-              <a:t>Выдумка</a:t>
+              <a:t>Выделить бюджет на интеграцию и поддержку</a:t>
             </a:r>
           </a:p>
         </p:txBody>
       </p:sp>
       <p:sp>
         <p:nvSpPr>
-          <p:cNvPr id="8" name="Document 7"/>
-          <p:cNvSpPr/>
-          <p:nvPr/>
-        </p:nvSpPr>
-        <p:spPr>
-          <a:xfrm>
-            <a:off x="5609335" y="3105226"/>
-            <a:ext cx="950772" cy="1050854"/>
-          </a:xfrm>
-          <a:prstGeom prst="flowChartDocument">
-            <a:avLst/>
-          </a:prstGeom>
-          <a:solidFill>
-            <a:srgbClr val="0077FF"/>
-          </a:solidFill>
-          <a:ln>
-            <a:noFill/>
-          </a:ln>
-        </p:spPr>
-        <p:style>
-          <a:lnRef idx="1">
-            <a:schemeClr val="accent1"/>
-          </a:lnRef>
-          <a:fillRef idx="3">
-            <a:schemeClr val="accent1"/>
-          </a:fillRef>
-          <a:effectRef idx="2">
-            <a:schemeClr val="accent1"/>
-          </a:effectRef>
-          <a:fontRef idx="minor">
-            <a:schemeClr val="lt1"/>
-          </a:fontRef>
-        </p:style>
-        <p:txBody>
-          <a:bodyPr rtlCol="0" anchor="ctr"/>
-          <a:lstStyle/>
-          <a:p>
-            <a:pPr algn="ctr"/>
-          </a:p>
-        </p:txBody>
-      </p:sp>
-      <p:sp>
-        <p:nvSpPr>
-          <p:cNvPr id="9" name="TextBox 8"/>
+          <p:cNvPr id="5" name="card_2"/>
           <p:cNvSpPr txBox="1"/>
           <p:nvPr/>
         </p:nvSpPr>
         <p:spPr>
           <a:xfrm>
-            <a:off x="4249845" y="4406284"/>
-            <a:ext cx="3669753" cy="1100894"/>
+            <a:off x="7881884" y="1818894"/>
+            <a:ext cx="3115177" cy="3220212"/>
           </a:xfrm>
           <a:prstGeom prst="rect">
             <a:avLst/>
@@ -11688,13 +13417,16 @@
           <a:noFill/>
         </p:spPr>
         <p:txBody>
-          <a:bodyPr wrap="square" lIns="12700" rIns="12700" tIns="12700" bIns="12700">
+          <a:bodyPr wrap="square" lIns="76200" rIns="76200" tIns="50800" bIns="50800">
             <a:spAutoFit/>
           </a:bodyPr>
           <a:lstStyle/>
           <a:p>
-            <a:pPr algn="ctr">
-              <a:defRPr sz="1400" b="0">
+            <a:pPr algn="l">
+              <a:spcAft>
+                <a:spcPts val="300"/>
+              </a:spcAft>
+              <a:defRPr sz="2000" b="0">
                 <a:solidFill>
                   <a:srgbClr val="FFFFFF"/>
                 </a:solidFill>
@@ -11704,7 +13436,7 @@
               </a:defRPr>
             </a:pPr>
             <a:r>
-              <a:rPr sz="1400" b="0">
+              <a:rPr sz="2000" b="0">
                 <a:solidFill>
                   <a:srgbClr val="FFFFFF"/>
                 </a:solidFill>
@@ -11712,182 +13444,7 @@
                 <a:ea typeface="Play"/>
                 <a:cs typeface="Play"/>
               </a:rPr>
-              <a:t>Плохой шаблон</a:t>
-            </a:r>
-          </a:p>
-        </p:txBody>
-      </p:sp>
-      <p:sp>
-        <p:nvSpPr>
-          <p:cNvPr id="10" name="Oval 9"/>
-          <p:cNvSpPr/>
-          <p:nvPr/>
-        </p:nvSpPr>
-        <p:spPr>
-          <a:xfrm>
-            <a:off x="9354839" y="3080206"/>
-            <a:ext cx="1100894" cy="1100894"/>
-          </a:xfrm>
-          <a:prstGeom prst="ellipse">
-            <a:avLst/>
-          </a:prstGeom>
-          <a:solidFill>
-            <a:srgbClr val="0077FF"/>
-          </a:solidFill>
-          <a:ln>
-            <a:noFill/>
-          </a:ln>
-        </p:spPr>
-        <p:style>
-          <a:lnRef idx="1">
-            <a:schemeClr val="accent1"/>
-          </a:lnRef>
-          <a:fillRef idx="3">
-            <a:schemeClr val="accent1"/>
-          </a:fillRef>
-          <a:effectRef idx="2">
-            <a:schemeClr val="accent1"/>
-          </a:effectRef>
-          <a:fontRef idx="minor">
-            <a:schemeClr val="lt1"/>
-          </a:fontRef>
-        </p:style>
-        <p:txBody>
-          <a:bodyPr rtlCol="0" anchor="ctr"/>
-          <a:lstStyle/>
-          <a:p>
-            <a:pPr algn="ctr"/>
-          </a:p>
-        </p:txBody>
-      </p:sp>
-      <p:sp>
-        <p:nvSpPr>
-          <p:cNvPr id="11" name="Oval 10"/>
-          <p:cNvSpPr/>
-          <p:nvPr/>
-        </p:nvSpPr>
-        <p:spPr>
-          <a:xfrm>
-            <a:off x="9529982" y="3255348"/>
-            <a:ext cx="750610" cy="750610"/>
-          </a:xfrm>
-          <a:prstGeom prst="ellipse">
-            <a:avLst/>
-          </a:prstGeom>
-          <a:solidFill>
-            <a:srgbClr val="111111"/>
-          </a:solidFill>
-          <a:ln>
-            <a:noFill/>
-          </a:ln>
-        </p:spPr>
-        <p:style>
-          <a:lnRef idx="1">
-            <a:schemeClr val="accent1"/>
-          </a:lnRef>
-          <a:fillRef idx="3">
-            <a:schemeClr val="accent1"/>
-          </a:fillRef>
-          <a:effectRef idx="2">
-            <a:schemeClr val="accent1"/>
-          </a:effectRef>
-          <a:fontRef idx="minor">
-            <a:schemeClr val="lt1"/>
-          </a:fontRef>
-        </p:style>
-        <p:txBody>
-          <a:bodyPr rtlCol="0" anchor="ctr"/>
-          <a:lstStyle/>
-          <a:p>
-            <a:pPr algn="ctr"/>
-          </a:p>
-        </p:txBody>
-      </p:sp>
-      <p:sp>
-        <p:nvSpPr>
-          <p:cNvPr id="12" name="Oval 11"/>
-          <p:cNvSpPr/>
-          <p:nvPr/>
-        </p:nvSpPr>
-        <p:spPr>
-          <a:xfrm>
-            <a:off x="9730144" y="3455511"/>
-            <a:ext cx="350284" cy="350284"/>
-          </a:xfrm>
-          <a:prstGeom prst="ellipse">
-            <a:avLst/>
-          </a:prstGeom>
-          <a:solidFill>
-            <a:srgbClr val="0077FF"/>
-          </a:solidFill>
-          <a:ln>
-            <a:noFill/>
-          </a:ln>
-        </p:spPr>
-        <p:style>
-          <a:lnRef idx="1">
-            <a:schemeClr val="accent1"/>
-          </a:lnRef>
-          <a:fillRef idx="3">
-            <a:schemeClr val="accent1"/>
-          </a:fillRef>
-          <a:effectRef idx="2">
-            <a:schemeClr val="accent1"/>
-          </a:effectRef>
-          <a:fontRef idx="minor">
-            <a:schemeClr val="lt1"/>
-          </a:fontRef>
-        </p:style>
-        <p:txBody>
-          <a:bodyPr rtlCol="0" anchor="ctr"/>
-          <a:lstStyle/>
-          <a:p>
-            <a:pPr algn="ctr"/>
-          </a:p>
-        </p:txBody>
-      </p:sp>
-      <p:sp>
-        <p:nvSpPr>
-          <p:cNvPr id="13" name="TextBox 12"/>
-          <p:cNvSpPr txBox="1"/>
-          <p:nvPr/>
-        </p:nvSpPr>
-        <p:spPr>
-          <a:xfrm>
-            <a:off x="8070410" y="4406284"/>
-            <a:ext cx="3669753" cy="1100894"/>
-          </a:xfrm>
-          <a:prstGeom prst="rect">
-            <a:avLst/>
-          </a:prstGeom>
-          <a:noFill/>
-        </p:spPr>
-        <p:txBody>
-          <a:bodyPr wrap="square" lIns="12700" rIns="12700" tIns="12700" bIns="12700">
-            <a:spAutoFit/>
-          </a:bodyPr>
-          <a:lstStyle/>
-          <a:p>
-            <a:pPr algn="ctr">
-              <a:defRPr sz="1400" b="0">
-                <a:solidFill>
-                  <a:srgbClr val="FFFFFF"/>
-                </a:solidFill>
-                <a:latin typeface="Play"/>
-                <a:ea typeface="Play"/>
-                <a:cs typeface="Play"/>
-              </a:defRPr>
-            </a:pPr>
-            <a:r>
-              <a:rPr sz="1400" b="0">
-                <a:solidFill>
-                  <a:srgbClr val="FFFFFF"/>
-                </a:solidFill>
-                <a:latin typeface="Play"/>
-                <a:ea typeface="Play"/>
-                <a:cs typeface="Play"/>
-              </a:rPr>
-              <a:t>Перегрузка</a:t>
+              <a:t>Согласовать сроки и ответственных за расширение</a:t>
             </a:r>
           </a:p>
         </p:txBody>
@@ -11954,7 +13511,7 @@
                 <a:ea typeface="Play"/>
                 <a:cs typeface="Play"/>
               </a:rPr>
-              <a:t>План</a:t>
+              <a:t>Риски</a:t>
             </a:r>
           </a:p>
         </p:txBody>
@@ -11967,7 +13524,7 @@
         </p:nvSpPr>
         <p:spPr>
           <a:xfrm>
-            <a:off x="429280" y="1664162"/>
+            <a:off x="429280" y="1783080"/>
             <a:ext cx="11310884" cy="1341120"/>
           </a:xfrm>
           <a:prstGeom prst="rect">
@@ -12003,7 +13560,7 @@
                 <a:ea typeface="Play"/>
                 <a:cs typeface="Play"/>
               </a:rPr>
-              <a:t>• Q3 2026: подключение 4 команд, домен и HTTPS</a:t>
+              <a:t>• Модель может выдумать цифры, которые не подтверждены</a:t>
             </a:r>
           </a:p>
           <a:p>
@@ -12029,7 +13586,7 @@
                 <a:ea typeface="Play"/>
                 <a:cs typeface="Play"/>
               </a:rPr>
-              <a:t>• Q4 2026: доступ для всей компании, интеграция с хранилищем</a:t>
+              <a:t>• Неправильный шаблон может привести к некорректной вёрстке</a:t>
             </a:r>
           </a:p>
           <a:p>
@@ -12055,21 +13612,924 @@
                 <a:ea typeface="Play"/>
                 <a:cs typeface="Play"/>
               </a:rPr>
-              <a:t>• Q1 2027: генерация иллюстраций под стиль шаблона</a:t>
+              <a:t>• Нагрузка выше 20 одновременных задач требует внешней очереди</a:t>
+            </a:r>
+          </a:p>
+        </p:txBody>
+      </p:sp>
+      <p:grpSp>
+        <p:nvGrpSpPr>
+          <p:cNvPr id="4" name="icon:builtin-sparkles"/>
+          <p:cNvGrpSpPr/>
+          <p:nvPr/>
+        </p:nvGrpSpPr>
+        <p:grpSpPr>
+          <a:xfrm>
+            <a:off x="1884664" y="3458289"/>
+            <a:ext cx="878252" cy="840303"/>
+            <a:chOff x="1884664" y="3458289"/>
+            <a:chExt cx="878252" cy="840303"/>
+          </a:xfrm>
+        </p:grpSpPr>
+        <p:sp>
+          <p:nvSpPr>
+            <p:cNvPr id="5" name="Freeform 4"/>
+            <p:cNvSpPr/>
+            <p:nvPr/>
+          </p:nvSpPr>
+          <p:spPr>
+            <a:xfrm>
+              <a:off x="1884664" y="3458289"/>
+              <a:ext cx="650557" cy="650557"/>
+            </a:xfrm>
+            <a:custGeom>
+              <a:avLst/>
+              <a:gdLst/>
+              <a:ahLst/>
+              <a:cxnLst/>
+              <a:rect l="l" t="t" r="r" b="b"/>
+              <a:pathLst>
+                <a:path w="650557" h="650557">
+                  <a:moveTo>
+                    <a:pt x="325278" y="0"/>
+                  </a:moveTo>
+                  <a:lnTo>
+                    <a:pt x="335145" y="61098"/>
+                  </a:lnTo>
+                  <a:lnTo>
+                    <a:pt x="348698" y="114498"/>
+                  </a:lnTo>
+                  <a:lnTo>
+                    <a:pt x="366480" y="160742"/>
+                  </a:lnTo>
+                  <a:lnTo>
+                    <a:pt x="389033" y="200371"/>
+                  </a:lnTo>
+                  <a:lnTo>
+                    <a:pt x="416790" y="233767"/>
+                  </a:lnTo>
+                  <a:lnTo>
+                    <a:pt x="450185" y="261524"/>
+                  </a:lnTo>
+                  <a:lnTo>
+                    <a:pt x="489761" y="284022"/>
+                  </a:lnTo>
+                  <a:lnTo>
+                    <a:pt x="536059" y="301858"/>
+                  </a:lnTo>
+                  <a:lnTo>
+                    <a:pt x="589459" y="315466"/>
+                  </a:lnTo>
+                  <a:lnTo>
+                    <a:pt x="650557" y="325278"/>
+                  </a:lnTo>
+                  <a:lnTo>
+                    <a:pt x="589459" y="335145"/>
+                  </a:lnTo>
+                  <a:lnTo>
+                    <a:pt x="536059" y="348698"/>
+                  </a:lnTo>
+                  <a:lnTo>
+                    <a:pt x="489761" y="366480"/>
+                  </a:lnTo>
+                  <a:lnTo>
+                    <a:pt x="450185" y="389033"/>
+                  </a:lnTo>
+                  <a:lnTo>
+                    <a:pt x="416790" y="416790"/>
+                  </a:lnTo>
+                  <a:lnTo>
+                    <a:pt x="389033" y="450185"/>
+                  </a:lnTo>
+                  <a:lnTo>
+                    <a:pt x="366480" y="489761"/>
+                  </a:lnTo>
+                  <a:lnTo>
+                    <a:pt x="348698" y="536059"/>
+                  </a:lnTo>
+                  <a:lnTo>
+                    <a:pt x="335145" y="589513"/>
+                  </a:lnTo>
+                  <a:lnTo>
+                    <a:pt x="325278" y="650557"/>
+                  </a:lnTo>
+                  <a:lnTo>
+                    <a:pt x="315466" y="589513"/>
+                  </a:lnTo>
+                  <a:lnTo>
+                    <a:pt x="301858" y="536059"/>
+                  </a:lnTo>
+                  <a:lnTo>
+                    <a:pt x="284022" y="489761"/>
+                  </a:lnTo>
+                  <a:lnTo>
+                    <a:pt x="261524" y="450185"/>
+                  </a:lnTo>
+                  <a:lnTo>
+                    <a:pt x="233767" y="416790"/>
+                  </a:lnTo>
+                  <a:lnTo>
+                    <a:pt x="200371" y="389033"/>
+                  </a:lnTo>
+                  <a:lnTo>
+                    <a:pt x="160742" y="366534"/>
+                  </a:lnTo>
+                  <a:lnTo>
+                    <a:pt x="114498" y="348698"/>
+                  </a:lnTo>
+                  <a:lnTo>
+                    <a:pt x="61098" y="335091"/>
+                  </a:lnTo>
+                  <a:lnTo>
+                    <a:pt x="0" y="325278"/>
+                  </a:lnTo>
+                  <a:lnTo>
+                    <a:pt x="61098" y="315466"/>
+                  </a:lnTo>
+                  <a:lnTo>
+                    <a:pt x="114498" y="301858"/>
+                  </a:lnTo>
+                  <a:lnTo>
+                    <a:pt x="160742" y="284022"/>
+                  </a:lnTo>
+                  <a:lnTo>
+                    <a:pt x="200371" y="261524"/>
+                  </a:lnTo>
+                  <a:lnTo>
+                    <a:pt x="233767" y="233767"/>
+                  </a:lnTo>
+                  <a:lnTo>
+                    <a:pt x="261524" y="200371"/>
+                  </a:lnTo>
+                  <a:lnTo>
+                    <a:pt x="284022" y="160796"/>
+                  </a:lnTo>
+                  <a:lnTo>
+                    <a:pt x="301858" y="114498"/>
+                  </a:lnTo>
+                  <a:lnTo>
+                    <a:pt x="315466" y="61098"/>
+                  </a:lnTo>
+                  <a:lnTo>
+                    <a:pt x="325278" y="0"/>
+                  </a:lnTo>
+                  <a:close/>
+                </a:path>
+              </a:pathLst>
+            </a:custGeom>
+            <a:noFill/>
+            <a:ln w="108426" cap="rnd">
+              <a:solidFill>
+                <a:srgbClr val="0077FF"/>
+              </a:solidFill>
+              <a:round/>
+            </a:ln>
+            <a:effectLst/>
+          </p:spPr>
+          <p:style>
+            <a:lnRef idx="1">
+              <a:schemeClr val="accent1"/>
+            </a:lnRef>
+            <a:fillRef idx="3">
+              <a:schemeClr val="accent1"/>
+            </a:fillRef>
+            <a:effectRef idx="2">
+              <a:schemeClr val="accent1"/>
+            </a:effectRef>
+            <a:fontRef idx="minor">
+              <a:schemeClr val="lt1"/>
+            </a:fontRef>
+          </p:style>
+          <p:txBody>
+            <a:bodyPr rtlCol="0" anchor="ctr"/>
+            <a:lstStyle/>
+            <a:p>
+              <a:pPr algn="ctr"/>
+            </a:p>
+          </p:txBody>
+        </p:sp>
+        <p:sp>
+          <p:nvSpPr>
+            <p:cNvPr id="6" name="Freeform 5"/>
+            <p:cNvSpPr/>
+            <p:nvPr/>
+          </p:nvSpPr>
+          <p:spPr>
+            <a:xfrm>
+              <a:off x="2524378" y="4054633"/>
+              <a:ext cx="238538" cy="243959"/>
+            </a:xfrm>
+            <a:custGeom>
+              <a:avLst/>
+              <a:gdLst/>
+              <a:ahLst/>
+              <a:cxnLst/>
+              <a:rect l="l" t="t" r="r" b="b"/>
+              <a:pathLst>
+                <a:path w="238538" h="243959">
+                  <a:moveTo>
+                    <a:pt x="119269" y="0"/>
+                  </a:moveTo>
+                  <a:lnTo>
+                    <a:pt x="123172" y="22986"/>
+                  </a:lnTo>
+                  <a:lnTo>
+                    <a:pt x="128540" y="43153"/>
+                  </a:lnTo>
+                  <a:lnTo>
+                    <a:pt x="135479" y="60718"/>
+                  </a:lnTo>
+                  <a:lnTo>
+                    <a:pt x="144099" y="75898"/>
+                  </a:lnTo>
+                  <a:lnTo>
+                    <a:pt x="154508" y="88801"/>
+                  </a:lnTo>
+                  <a:lnTo>
+                    <a:pt x="166868" y="99535"/>
+                  </a:lnTo>
+                  <a:lnTo>
+                    <a:pt x="181343" y="108317"/>
+                  </a:lnTo>
+                  <a:lnTo>
+                    <a:pt x="198041" y="115365"/>
+                  </a:lnTo>
+                  <a:lnTo>
+                    <a:pt x="217069" y="120732"/>
+                  </a:lnTo>
+                  <a:lnTo>
+                    <a:pt x="238538" y="124690"/>
+                  </a:lnTo>
+                  <a:lnTo>
+                    <a:pt x="217069" y="128593"/>
+                  </a:lnTo>
+                  <a:lnTo>
+                    <a:pt x="198041" y="133960"/>
+                  </a:lnTo>
+                  <a:lnTo>
+                    <a:pt x="181343" y="140899"/>
+                  </a:lnTo>
+                  <a:lnTo>
+                    <a:pt x="166868" y="149519"/>
+                  </a:lnTo>
+                  <a:lnTo>
+                    <a:pt x="154508" y="159928"/>
+                  </a:lnTo>
+                  <a:lnTo>
+                    <a:pt x="144099" y="172289"/>
+                  </a:lnTo>
+                  <a:lnTo>
+                    <a:pt x="135479" y="186764"/>
+                  </a:lnTo>
+                  <a:lnTo>
+                    <a:pt x="128540" y="203461"/>
+                  </a:lnTo>
+                  <a:lnTo>
+                    <a:pt x="123172" y="222490"/>
+                  </a:lnTo>
+                  <a:lnTo>
+                    <a:pt x="119269" y="243959"/>
+                  </a:lnTo>
+                  <a:lnTo>
+                    <a:pt x="115366" y="222490"/>
+                  </a:lnTo>
+                  <a:lnTo>
+                    <a:pt x="109999" y="203461"/>
+                  </a:lnTo>
+                  <a:lnTo>
+                    <a:pt x="103059" y="186764"/>
+                  </a:lnTo>
+                  <a:lnTo>
+                    <a:pt x="94439" y="172289"/>
+                  </a:lnTo>
+                  <a:lnTo>
+                    <a:pt x="84031" y="159928"/>
+                  </a:lnTo>
+                  <a:lnTo>
+                    <a:pt x="71670" y="149519"/>
+                  </a:lnTo>
+                  <a:lnTo>
+                    <a:pt x="57195" y="140899"/>
+                  </a:lnTo>
+                  <a:lnTo>
+                    <a:pt x="40497" y="133960"/>
+                  </a:lnTo>
+                  <a:lnTo>
+                    <a:pt x="21469" y="128593"/>
+                  </a:lnTo>
+                  <a:lnTo>
+                    <a:pt x="0" y="124690"/>
+                  </a:lnTo>
+                  <a:lnTo>
+                    <a:pt x="21469" y="120786"/>
+                  </a:lnTo>
+                  <a:lnTo>
+                    <a:pt x="40497" y="115365"/>
+                  </a:lnTo>
+                  <a:lnTo>
+                    <a:pt x="57195" y="108317"/>
+                  </a:lnTo>
+                  <a:lnTo>
+                    <a:pt x="71670" y="99535"/>
+                  </a:lnTo>
+                  <a:lnTo>
+                    <a:pt x="84031" y="88801"/>
+                  </a:lnTo>
+                  <a:lnTo>
+                    <a:pt x="94439" y="75898"/>
+                  </a:lnTo>
+                  <a:lnTo>
+                    <a:pt x="103059" y="60718"/>
+                  </a:lnTo>
+                  <a:lnTo>
+                    <a:pt x="109999" y="43153"/>
+                  </a:lnTo>
+                  <a:lnTo>
+                    <a:pt x="115366" y="22986"/>
+                  </a:lnTo>
+                  <a:lnTo>
+                    <a:pt x="119269" y="0"/>
+                  </a:lnTo>
+                  <a:close/>
+                </a:path>
+              </a:pathLst>
+            </a:custGeom>
+            <a:noFill/>
+            <a:ln w="108426" cap="rnd">
+              <a:solidFill>
+                <a:srgbClr val="0077FF"/>
+              </a:solidFill>
+              <a:round/>
+            </a:ln>
+            <a:effectLst/>
+          </p:spPr>
+          <p:style>
+            <a:lnRef idx="1">
+              <a:schemeClr val="accent1"/>
+            </a:lnRef>
+            <a:fillRef idx="3">
+              <a:schemeClr val="accent1"/>
+            </a:fillRef>
+            <a:effectRef idx="2">
+              <a:schemeClr val="accent1"/>
+            </a:effectRef>
+            <a:fontRef idx="minor">
+              <a:schemeClr val="lt1"/>
+            </a:fontRef>
+          </p:style>
+          <p:txBody>
+            <a:bodyPr rtlCol="0" anchor="ctr"/>
+            <a:lstStyle/>
+            <a:p>
+              <a:pPr algn="ctr"/>
+            </a:p>
+          </p:txBody>
+        </p:sp>
+      </p:grpSp>
+      <p:sp>
+        <p:nvSpPr>
+          <p:cNvPr id="7" name="TextBox 6"/>
+          <p:cNvSpPr txBox="1"/>
+          <p:nvPr/>
+        </p:nvSpPr>
+        <p:spPr>
+          <a:xfrm>
+            <a:off x="429280" y="4752898"/>
+            <a:ext cx="3669753" cy="1144980"/>
+          </a:xfrm>
+          <a:prstGeom prst="rect">
+            <a:avLst/>
+          </a:prstGeom>
+          <a:noFill/>
+        </p:spPr>
+        <p:txBody>
+          <a:bodyPr wrap="square" lIns="12700" rIns="12700" tIns="12700" bIns="12700">
+            <a:spAutoFit/>
+          </a:bodyPr>
+          <a:lstStyle/>
+          <a:p>
+            <a:pPr algn="ctr">
+              <a:defRPr sz="1400" b="0">
+                <a:solidFill>
+                  <a:srgbClr val="FFFFFF"/>
+                </a:solidFill>
+                <a:latin typeface="Play"/>
+                <a:ea typeface="Play"/>
+                <a:cs typeface="Play"/>
+              </a:defRPr>
+            </a:pPr>
+            <a:r>
+              <a:rPr sz="1400" b="0">
+                <a:solidFill>
+                  <a:srgbClr val="FFFFFF"/>
+                </a:solidFill>
+                <a:latin typeface="Play"/>
+                <a:ea typeface="Play"/>
+                <a:cs typeface="Play"/>
+              </a:rPr>
+              <a:t>Модель может выдумать цифры</a:t>
+            </a:r>
+          </a:p>
+        </p:txBody>
+      </p:sp>
+      <p:grpSp>
+        <p:nvGrpSpPr>
+          <p:cNvPr id="8" name="icon:builtin-layout"/>
+          <p:cNvGrpSpPr/>
+          <p:nvPr/>
+        </p:nvGrpSpPr>
+        <p:grpSpPr>
+          <a:xfrm>
+            <a:off x="5596803" y="3458289"/>
+            <a:ext cx="975835" cy="975835"/>
+            <a:chOff x="5596803" y="3458289"/>
+            <a:chExt cx="975835" cy="975835"/>
+          </a:xfrm>
+        </p:grpSpPr>
+        <p:sp>
+          <p:nvSpPr>
+            <p:cNvPr id="9" name="Rounded Rectangle 8"/>
+            <p:cNvSpPr/>
+            <p:nvPr/>
+          </p:nvSpPr>
+          <p:spPr>
+            <a:xfrm>
+              <a:off x="5596803" y="3458289"/>
+              <a:ext cx="975835" cy="975835"/>
+            </a:xfrm>
+            <a:prstGeom prst="roundRect">
+              <a:avLst>
+                <a:gd name="adj" fmla="val 11111"/>
+              </a:avLst>
+            </a:prstGeom>
+            <a:noFill/>
+            <a:ln w="108426" cap="rnd">
+              <a:solidFill>
+                <a:srgbClr val="0077FF"/>
+              </a:solidFill>
+              <a:round/>
+            </a:ln>
+            <a:effectLst/>
+          </p:spPr>
+          <p:style>
+            <a:lnRef idx="1">
+              <a:schemeClr val="accent1"/>
+            </a:lnRef>
+            <a:fillRef idx="3">
+              <a:schemeClr val="accent1"/>
+            </a:fillRef>
+            <a:effectRef idx="2">
+              <a:schemeClr val="accent1"/>
+            </a:effectRef>
+            <a:fontRef idx="minor">
+              <a:schemeClr val="lt1"/>
+            </a:fontRef>
+          </p:style>
+          <p:txBody>
+            <a:bodyPr rtlCol="0" anchor="ctr"/>
+            <a:lstStyle/>
+            <a:p>
+              <a:pPr algn="ctr"/>
+            </a:p>
+          </p:txBody>
+        </p:sp>
+        <p:sp>
+          <p:nvSpPr>
+            <p:cNvPr id="10" name="Freeform 9"/>
+            <p:cNvSpPr/>
+            <p:nvPr/>
+          </p:nvSpPr>
+          <p:spPr>
+            <a:xfrm>
+              <a:off x="5596803" y="3783567"/>
+              <a:ext cx="975835" cy="0"/>
+            </a:xfrm>
+            <a:custGeom>
+              <a:avLst/>
+              <a:gdLst/>
+              <a:ahLst/>
+              <a:cxnLst/>
+              <a:rect l="l" t="t" r="r" b="b"/>
+              <a:pathLst>
+                <a:path w="975835" h="0">
+                  <a:moveTo>
+                    <a:pt x="0" y="0"/>
+                  </a:moveTo>
+                  <a:lnTo>
+                    <a:pt x="975835" y="0"/>
+                  </a:lnTo>
+                </a:path>
+              </a:pathLst>
+            </a:custGeom>
+            <a:noFill/>
+            <a:ln w="108426" cap="rnd">
+              <a:solidFill>
+                <a:srgbClr val="0077FF"/>
+              </a:solidFill>
+              <a:round/>
+            </a:ln>
+            <a:effectLst/>
+          </p:spPr>
+          <p:style>
+            <a:lnRef idx="1">
+              <a:schemeClr val="accent1"/>
+            </a:lnRef>
+            <a:fillRef idx="3">
+              <a:schemeClr val="accent1"/>
+            </a:fillRef>
+            <a:effectRef idx="2">
+              <a:schemeClr val="accent1"/>
+            </a:effectRef>
+            <a:fontRef idx="minor">
+              <a:schemeClr val="lt1"/>
+            </a:fontRef>
+          </p:style>
+          <p:txBody>
+            <a:bodyPr rtlCol="0" anchor="ctr"/>
+            <a:lstStyle/>
+            <a:p>
+              <a:pPr algn="ctr"/>
+            </a:p>
+          </p:txBody>
+        </p:sp>
+        <p:sp>
+          <p:nvSpPr>
+            <p:cNvPr id="11" name="Freeform 10"/>
+            <p:cNvSpPr/>
+            <p:nvPr/>
+          </p:nvSpPr>
+          <p:spPr>
+            <a:xfrm>
+              <a:off x="5922081" y="3783567"/>
+              <a:ext cx="0" cy="650557"/>
+            </a:xfrm>
+            <a:custGeom>
+              <a:avLst/>
+              <a:gdLst/>
+              <a:ahLst/>
+              <a:cxnLst/>
+              <a:rect l="l" t="t" r="r" b="b"/>
+              <a:pathLst>
+                <a:path w="0" h="650557">
+                  <a:moveTo>
+                    <a:pt x="0" y="0"/>
+                  </a:moveTo>
+                  <a:lnTo>
+                    <a:pt x="0" y="650557"/>
+                  </a:lnTo>
+                </a:path>
+              </a:pathLst>
+            </a:custGeom>
+            <a:noFill/>
+            <a:ln w="108426" cap="rnd">
+              <a:solidFill>
+                <a:srgbClr val="0077FF"/>
+              </a:solidFill>
+              <a:round/>
+            </a:ln>
+            <a:effectLst/>
+          </p:spPr>
+          <p:style>
+            <a:lnRef idx="1">
+              <a:schemeClr val="accent1"/>
+            </a:lnRef>
+            <a:fillRef idx="3">
+              <a:schemeClr val="accent1"/>
+            </a:fillRef>
+            <a:effectRef idx="2">
+              <a:schemeClr val="accent1"/>
+            </a:effectRef>
+            <a:fontRef idx="minor">
+              <a:schemeClr val="lt1"/>
+            </a:fontRef>
+          </p:style>
+          <p:txBody>
+            <a:bodyPr rtlCol="0" anchor="ctr"/>
+            <a:lstStyle/>
+            <a:p>
+              <a:pPr algn="ctr"/>
+            </a:p>
+          </p:txBody>
+        </p:sp>
+      </p:grpSp>
+      <p:sp>
+        <p:nvSpPr>
+          <p:cNvPr id="12" name="TextBox 11"/>
+          <p:cNvSpPr txBox="1"/>
+          <p:nvPr/>
+        </p:nvSpPr>
+        <p:spPr>
+          <a:xfrm>
+            <a:off x="4249845" y="4752898"/>
+            <a:ext cx="3669753" cy="1144980"/>
+          </a:xfrm>
+          <a:prstGeom prst="rect">
+            <a:avLst/>
+          </a:prstGeom>
+          <a:noFill/>
+        </p:spPr>
+        <p:txBody>
+          <a:bodyPr wrap="square" lIns="12700" rIns="12700" tIns="12700" bIns="12700">
+            <a:spAutoFit/>
+          </a:bodyPr>
+          <a:lstStyle/>
+          <a:p>
+            <a:pPr algn="ctr">
+              <a:defRPr sz="1400" b="0">
+                <a:solidFill>
+                  <a:srgbClr val="FFFFFF"/>
+                </a:solidFill>
+                <a:latin typeface="Play"/>
+                <a:ea typeface="Play"/>
+                <a:cs typeface="Play"/>
+              </a:defRPr>
+            </a:pPr>
+            <a:r>
+              <a:rPr sz="1400" b="0">
+                <a:solidFill>
+                  <a:srgbClr val="FFFFFF"/>
+                </a:solidFill>
+                <a:latin typeface="Play"/>
+                <a:ea typeface="Play"/>
+                <a:cs typeface="Play"/>
+              </a:rPr>
+              <a:t>Неправильный шаблон</a:t>
+            </a:r>
+          </a:p>
+        </p:txBody>
+      </p:sp>
+      <p:grpSp>
+        <p:nvGrpSpPr>
+          <p:cNvPr id="13" name="icon:builtin-target"/>
+          <p:cNvGrpSpPr/>
+          <p:nvPr/>
+        </p:nvGrpSpPr>
+        <p:grpSpPr>
+          <a:xfrm>
+            <a:off x="9417369" y="3458289"/>
+            <a:ext cx="975835" cy="975835"/>
+            <a:chOff x="9417369" y="3458289"/>
+            <a:chExt cx="975835" cy="975835"/>
+          </a:xfrm>
+        </p:grpSpPr>
+        <p:sp>
+          <p:nvSpPr>
+            <p:cNvPr id="14" name="Oval 13"/>
+            <p:cNvSpPr/>
+            <p:nvPr/>
+          </p:nvSpPr>
+          <p:spPr>
+            <a:xfrm>
+              <a:off x="9417369" y="3458289"/>
+              <a:ext cx="975835" cy="975835"/>
+            </a:xfrm>
+            <a:prstGeom prst="ellipse">
+              <a:avLst/>
+            </a:prstGeom>
+            <a:noFill/>
+            <a:ln w="108426" cap="rnd">
+              <a:solidFill>
+                <a:srgbClr val="0077FF"/>
+              </a:solidFill>
+              <a:round/>
+            </a:ln>
+            <a:effectLst/>
+          </p:spPr>
+          <p:style>
+            <a:lnRef idx="1">
+              <a:schemeClr val="accent1"/>
+            </a:lnRef>
+            <a:fillRef idx="3">
+              <a:schemeClr val="accent1"/>
+            </a:fillRef>
+            <a:effectRef idx="2">
+              <a:schemeClr val="accent1"/>
+            </a:effectRef>
+            <a:fontRef idx="minor">
+              <a:schemeClr val="lt1"/>
+            </a:fontRef>
+          </p:style>
+          <p:txBody>
+            <a:bodyPr rtlCol="0" anchor="ctr"/>
+            <a:lstStyle/>
+            <a:p>
+              <a:pPr algn="ctr"/>
+            </a:p>
+          </p:txBody>
+        </p:sp>
+        <p:sp>
+          <p:nvSpPr>
+            <p:cNvPr id="15" name="Oval 14"/>
+            <p:cNvSpPr/>
+            <p:nvPr/>
+          </p:nvSpPr>
+          <p:spPr>
+            <a:xfrm>
+              <a:off x="9634221" y="3675141"/>
+              <a:ext cx="542130" cy="542130"/>
+            </a:xfrm>
+            <a:prstGeom prst="ellipse">
+              <a:avLst/>
+            </a:prstGeom>
+            <a:noFill/>
+            <a:ln w="108426" cap="rnd">
+              <a:solidFill>
+                <a:srgbClr val="0077FF"/>
+              </a:solidFill>
+              <a:round/>
+            </a:ln>
+            <a:effectLst/>
+          </p:spPr>
+          <p:style>
+            <a:lnRef idx="1">
+              <a:schemeClr val="accent1"/>
+            </a:lnRef>
+            <a:fillRef idx="3">
+              <a:schemeClr val="accent1"/>
+            </a:fillRef>
+            <a:effectRef idx="2">
+              <a:schemeClr val="accent1"/>
+            </a:effectRef>
+            <a:fontRef idx="minor">
+              <a:schemeClr val="lt1"/>
+            </a:fontRef>
+          </p:style>
+          <p:txBody>
+            <a:bodyPr rtlCol="0" anchor="ctr"/>
+            <a:lstStyle/>
+            <a:p>
+              <a:pPr algn="ctr"/>
+            </a:p>
+          </p:txBody>
+        </p:sp>
+        <p:sp>
+          <p:nvSpPr>
+            <p:cNvPr id="16" name="Oval 15"/>
+            <p:cNvSpPr/>
+            <p:nvPr/>
+          </p:nvSpPr>
+          <p:spPr>
+            <a:xfrm>
+              <a:off x="9829388" y="3870308"/>
+              <a:ext cx="151796" cy="151796"/>
+            </a:xfrm>
+            <a:prstGeom prst="ellipse">
+              <a:avLst/>
+            </a:prstGeom>
+            <a:solidFill>
+              <a:srgbClr val="0077FF"/>
+            </a:solidFill>
+            <a:ln>
+              <a:noFill/>
+            </a:ln>
+            <a:effectLst/>
+          </p:spPr>
+          <p:style>
+            <a:lnRef idx="1">
+              <a:schemeClr val="accent1"/>
+            </a:lnRef>
+            <a:fillRef idx="3">
+              <a:schemeClr val="accent1"/>
+            </a:fillRef>
+            <a:effectRef idx="2">
+              <a:schemeClr val="accent1"/>
+            </a:effectRef>
+            <a:fontRef idx="minor">
+              <a:schemeClr val="lt1"/>
+            </a:fontRef>
+          </p:style>
+          <p:txBody>
+            <a:bodyPr rtlCol="0" anchor="ctr"/>
+            <a:lstStyle/>
+            <a:p>
+              <a:pPr algn="ctr"/>
+            </a:p>
+          </p:txBody>
+        </p:sp>
+      </p:grpSp>
+      <p:sp>
+        <p:nvSpPr>
+          <p:cNvPr id="17" name="TextBox 16"/>
+          <p:cNvSpPr txBox="1"/>
+          <p:nvPr/>
+        </p:nvSpPr>
+        <p:spPr>
+          <a:xfrm>
+            <a:off x="8070410" y="4752898"/>
+            <a:ext cx="3669753" cy="1144980"/>
+          </a:xfrm>
+          <a:prstGeom prst="rect">
+            <a:avLst/>
+          </a:prstGeom>
+          <a:noFill/>
+        </p:spPr>
+        <p:txBody>
+          <a:bodyPr wrap="square" lIns="12700" rIns="12700" tIns="12700" bIns="12700">
+            <a:spAutoFit/>
+          </a:bodyPr>
+          <a:lstStyle/>
+          <a:p>
+            <a:pPr algn="ctr">
+              <a:defRPr sz="1400" b="0">
+                <a:solidFill>
+                  <a:srgbClr val="FFFFFF"/>
+                </a:solidFill>
+                <a:latin typeface="Play"/>
+                <a:ea typeface="Play"/>
+                <a:cs typeface="Play"/>
+              </a:defRPr>
+            </a:pPr>
+            <a:r>
+              <a:rPr sz="1400" b="0">
+                <a:solidFill>
+                  <a:srgbClr val="FFFFFF"/>
+                </a:solidFill>
+                <a:latin typeface="Play"/>
+                <a:ea typeface="Play"/>
+                <a:cs typeface="Play"/>
+              </a:rPr>
+              <a:t>Нагрузка &gt;20 задач</a:t>
+            </a:r>
+          </a:p>
+        </p:txBody>
+      </p:sp>
+    </p:spTree>
+  </p:cSld>
+  <p:clrMapOvr>
+    <a:masterClrMapping/>
+  </p:clrMapOvr>
+</p:sld>
+</file>
+
+<file path=ppt/slides/slide38.xml><?xml version="1.0" encoding="utf-8"?>
+<p:sld xmlns:a="http://schemas.openxmlformats.org/drawingml/2006/main" xmlns:p="http://schemas.openxmlformats.org/presentationml/2006/main" xmlns:r="http://schemas.openxmlformats.org/officeDocument/2006/relationships">
+  <p:cSld>
+    <p:spTree>
+      <p:nvGrpSpPr>
+        <p:cNvPr id="1" name=""/>
+        <p:cNvGrpSpPr/>
+        <p:nvPr/>
+      </p:nvGrpSpPr>
+      <p:grpSpPr/>
+      <p:sp>
+        <p:nvSpPr>
+          <p:cNvPr id="2" name="title"/>
+          <p:cNvSpPr txBox="1"/>
+          <p:nvPr/>
+        </p:nvSpPr>
+        <p:spPr>
+          <a:xfrm>
+            <a:off x="429280" y="424715"/>
+            <a:ext cx="7827264" cy="822960"/>
+          </a:xfrm>
+          <a:prstGeom prst="rect">
+            <a:avLst/>
+          </a:prstGeom>
+          <a:noFill/>
+        </p:spPr>
+        <p:txBody>
+          <a:bodyPr wrap="square" lIns="76200" rIns="76200" tIns="50800" bIns="50800">
+            <a:spAutoFit/>
+          </a:bodyPr>
+          <a:lstStyle/>
+          <a:p>
+            <a:pPr algn="l">
+              <a:spcAft>
+                <a:spcPts val="300"/>
+              </a:spcAft>
+              <a:defRPr sz="3200">
+                <a:solidFill>
+                  <a:srgbClr val="FFFFFF"/>
+                </a:solidFill>
+                <a:latin typeface="Play"/>
+                <a:ea typeface="Play"/>
+                <a:cs typeface="Play"/>
+              </a:defRPr>
+            </a:pPr>
+            <a:r>
+              <a:rPr sz="3200">
+                <a:solidFill>
+                  <a:srgbClr val="FFFFFF"/>
+                </a:solidFill>
+                <a:latin typeface="Play"/>
+                <a:ea typeface="Play"/>
+                <a:cs typeface="Play"/>
+              </a:rPr>
+              <a:t>Итоги</a:t>
             </a:r>
           </a:p>
         </p:txBody>
       </p:sp>
       <p:sp>
         <p:nvSpPr>
-          <p:cNvPr id="4" name="Rectangle 3"/>
+          <p:cNvPr id="3" name="stat_0:bar"/>
           <p:cNvSpPr/>
           <p:nvPr/>
         </p:nvSpPr>
         <p:spPr>
           <a:xfrm>
-            <a:off x="429280" y="4207600"/>
-            <a:ext cx="11310884" cy="67230"/>
+            <a:off x="429280" y="1874520"/>
+            <a:ext cx="50800" cy="2230120"/>
           </a:xfrm>
           <a:prstGeom prst="rect">
             <a:avLst/>
@@ -12080,6 +14540,7 @@
           <a:ln>
             <a:noFill/>
           </a:ln>
+          <a:effectLst/>
         </p:spPr>
         <p:style>
           <a:lnRef idx="1">
@@ -12105,16 +14566,94 @@
       </p:sp>
       <p:sp>
         <p:nvSpPr>
-          <p:cNvPr id="5" name="Oval 4"/>
+          <p:cNvPr id="4" name="stat_0"/>
+          <p:cNvSpPr txBox="1"/>
+          <p:nvPr/>
+        </p:nvSpPr>
+        <p:spPr>
+          <a:xfrm>
+            <a:off x="607080" y="1783080"/>
+            <a:ext cx="2310594" cy="2321560"/>
+          </a:xfrm>
+          <a:prstGeom prst="rect">
+            <a:avLst/>
+          </a:prstGeom>
+          <a:noFill/>
+        </p:spPr>
+        <p:txBody>
+          <a:bodyPr wrap="square" lIns="76200" rIns="76200" tIns="0" bIns="0">
+            <a:spAutoFit/>
+          </a:bodyPr>
+          <a:lstStyle/>
+          <a:p>
+            <a:pPr>
+              <a:lnSpc>
+                <a:spcPct val="100000"/>
+              </a:lnSpc>
+              <a:spcAft>
+                <a:spcPts val="200"/>
+              </a:spcAft>
+              <a:defRPr sz="4000" b="1">
+                <a:solidFill>
+                  <a:srgbClr val="0077FF"/>
+                </a:solidFill>
+                <a:latin typeface="Play"/>
+                <a:ea typeface="Play"/>
+                <a:cs typeface="Play"/>
+              </a:defRPr>
+            </a:pPr>
+            <a:r>
+              <a:rPr sz="4000" b="1">
+                <a:solidFill>
+                  <a:srgbClr val="0077FF"/>
+                </a:solidFill>
+                <a:latin typeface="Play"/>
+                <a:ea typeface="Play"/>
+                <a:cs typeface="Play"/>
+              </a:rPr>
+              <a:t>4 мин</a:t>
+            </a:r>
+          </a:p>
+          <a:p>
+            <a:pPr>
+              <a:spcAft>
+                <a:spcPts val="300"/>
+              </a:spcAft>
+              <a:defRPr sz="2400" b="0">
+                <a:solidFill>
+                  <a:srgbClr val="FFFFFF"/>
+                </a:solidFill>
+                <a:latin typeface="Play"/>
+                <a:ea typeface="Play"/>
+                <a:cs typeface="Play"/>
+              </a:defRPr>
+            </a:pPr>
+            <a:r>
+              <a:rPr sz="2400" b="0">
+                <a:solidFill>
+                  <a:srgbClr val="FFFFFF"/>
+                </a:solidFill>
+                <a:latin typeface="Play"/>
+                <a:ea typeface="Play"/>
+                <a:cs typeface="Play"/>
+              </a:rPr>
+              <a:t>Время сборки сократилось с 186 до 4 минут</a:t>
+            </a:r>
+          </a:p>
+        </p:txBody>
+      </p:sp>
+      <p:sp>
+        <p:nvSpPr>
+          <p:cNvPr id="5" name="stat_1:bar"/>
           <p:cNvSpPr/>
           <p:nvPr/>
         </p:nvSpPr>
         <p:spPr>
           <a:xfrm>
-            <a:off x="2067915" y="3994703"/>
-            <a:ext cx="493024" cy="493024"/>
+            <a:off x="3370110" y="1874520"/>
+            <a:ext cx="50800" cy="2230120"/>
           </a:xfrm>
-          <a:prstGeom prst="ellipse">
+          <a:prstGeom prst="rect">
             <a:avLst/>
           </a:prstGeom>
           <a:solidFill>
@@ -12123,6 +14662,7 @@
           <a:ln>
             <a:noFill/>
           </a:ln>
+          <a:effectLst/>
         </p:spPr>
         <p:style>
           <a:lnRef idx="1">
@@ -12148,14 +14688,14 @@
       </p:sp>
       <p:sp>
         <p:nvSpPr>
-          <p:cNvPr id="6" name="TextBox 5"/>
+          <p:cNvPr id="6" name="stat_1"/>
           <p:cNvSpPr txBox="1"/>
           <p:nvPr/>
         </p:nvSpPr>
         <p:spPr>
           <a:xfrm>
-            <a:off x="429280" y="3176732"/>
-            <a:ext cx="5655442" cy="851587"/>
+            <a:off x="3547910" y="1783080"/>
+            <a:ext cx="2310594" cy="2321560"/>
           </a:xfrm>
           <a:prstGeom prst="rect">
             <a:avLst/>
@@ -12163,15 +14703,21 @@
           <a:noFill/>
         </p:spPr>
         <p:txBody>
-          <a:bodyPr wrap="square" lIns="12700" rIns="12700" tIns="12700" bIns="12700">
+          <a:bodyPr wrap="square" lIns="76200" rIns="76200" tIns="0" bIns="0">
             <a:spAutoFit/>
           </a:bodyPr>
           <a:lstStyle/>
           <a:p>
-            <a:pPr algn="ctr">
-              <a:defRPr sz="1400" b="0">
-                <a:solidFill>
-                  <a:srgbClr val="FFFFFF"/>
+            <a:pPr>
+              <a:lnSpc>
+                <a:spcPct val="100000"/>
+              </a:lnSpc>
+              <a:spcAft>
+                <a:spcPts val="200"/>
+              </a:spcAft>
+              <a:defRPr sz="4000" b="1">
+                <a:solidFill>
+                  <a:srgbClr val="0077FF"/>
                 </a:solidFill>
                 <a:latin typeface="Play"/>
                 <a:ea typeface="Play"/>
@@ -12179,31 +14725,57 @@
               </a:defRPr>
             </a:pPr>
             <a:r>
-              <a:rPr sz="1400" b="0">
-                <a:solidFill>
-                  <a:srgbClr val="FFFFFF"/>
+              <a:rPr sz="4000" b="1">
+                <a:solidFill>
+                  <a:srgbClr val="0077FF"/>
                 </a:solidFill>
                 <a:latin typeface="Play"/>
                 <a:ea typeface="Play"/>
                 <a:cs typeface="Play"/>
               </a:rPr>
-              <a:t>Подключение 4 команд</a:t>
+              <a:t>1 день</a:t>
+            </a:r>
+          </a:p>
+          <a:p>
+            <a:pPr>
+              <a:spcAft>
+                <a:spcPts val="300"/>
+              </a:spcAft>
+              <a:defRPr sz="2400" b="0">
+                <a:solidFill>
+                  <a:srgbClr val="FFFFFF"/>
+                </a:solidFill>
+                <a:latin typeface="Play"/>
+                <a:ea typeface="Play"/>
+                <a:cs typeface="Play"/>
+              </a:defRPr>
+            </a:pPr>
+            <a:r>
+              <a:rPr sz="2400" b="0">
+                <a:solidFill>
+                  <a:srgbClr val="FFFFFF"/>
+                </a:solidFill>
+                <a:latin typeface="Play"/>
+                <a:ea typeface="Play"/>
+                <a:cs typeface="Play"/>
+              </a:rPr>
+              <a:t>Первый вариант появился за 1 день вместо 6</a:t>
             </a:r>
           </a:p>
         </p:txBody>
       </p:sp>
       <p:sp>
         <p:nvSpPr>
-          <p:cNvPr id="7" name="Oval 6"/>
+          <p:cNvPr id="7" name="stat_2:bar"/>
           <p:cNvSpPr/>
           <p:nvPr/>
         </p:nvSpPr>
         <p:spPr>
           <a:xfrm>
-            <a:off x="5838209" y="3994703"/>
-            <a:ext cx="493024" cy="493024"/>
+            <a:off x="6310940" y="1874520"/>
+            <a:ext cx="50800" cy="1833880"/>
           </a:xfrm>
-          <a:prstGeom prst="ellipse">
+          <a:prstGeom prst="rect">
             <a:avLst/>
           </a:prstGeom>
           <a:solidFill>
@@ -12212,6 +14784,7 @@
           <a:ln>
             <a:noFill/>
           </a:ln>
+          <a:effectLst/>
         </p:spPr>
         <p:style>
           <a:lnRef idx="1">
@@ -12237,14 +14810,14 @@
       </p:sp>
       <p:sp>
         <p:nvSpPr>
-          <p:cNvPr id="8" name="TextBox 7"/>
+          <p:cNvPr id="8" name="stat_2"/>
           <p:cNvSpPr txBox="1"/>
           <p:nvPr/>
         </p:nvSpPr>
         <p:spPr>
           <a:xfrm>
-            <a:off x="3257001" y="4700624"/>
-            <a:ext cx="5655442" cy="851587"/>
+            <a:off x="6488740" y="1783080"/>
+            <a:ext cx="2310594" cy="1925320"/>
           </a:xfrm>
           <a:prstGeom prst="rect">
             <a:avLst/>
@@ -12252,15 +14825,21 @@
           <a:noFill/>
         </p:spPr>
         <p:txBody>
-          <a:bodyPr wrap="square" lIns="12700" rIns="12700" tIns="12700" bIns="12700">
+          <a:bodyPr wrap="square" lIns="76200" rIns="76200" tIns="0" bIns="0">
             <a:spAutoFit/>
           </a:bodyPr>
           <a:lstStyle/>
           <a:p>
-            <a:pPr algn="ctr">
-              <a:defRPr sz="1400" b="0">
-                <a:solidFill>
-                  <a:srgbClr val="FFFFFF"/>
+            <a:pPr>
+              <a:lnSpc>
+                <a:spcPct val="100000"/>
+              </a:lnSpc>
+              <a:spcAft>
+                <a:spcPts val="200"/>
+              </a:spcAft>
+              <a:defRPr sz="4000" b="1">
+                <a:solidFill>
+                  <a:srgbClr val="0077FF"/>
                 </a:solidFill>
                 <a:latin typeface="Play"/>
                 <a:ea typeface="Play"/>
@@ -12268,31 +14847,57 @@
               </a:defRPr>
             </a:pPr>
             <a:r>
-              <a:rPr sz="1400" b="0">
-                <a:solidFill>
-                  <a:srgbClr val="FFFFFF"/>
+              <a:rPr sz="4000" b="1">
+                <a:solidFill>
+                  <a:srgbClr val="0077FF"/>
                 </a:solidFill>
                 <a:latin typeface="Play"/>
                 <a:ea typeface="Play"/>
                 <a:cs typeface="Play"/>
               </a:rPr>
-              <a:t>Доступ для всей компании</a:t>
+              <a:t>2 из 68</a:t>
+            </a:r>
+          </a:p>
+          <a:p>
+            <a:pPr>
+              <a:spcAft>
+                <a:spcPts val="300"/>
+              </a:spcAft>
+              <a:defRPr sz="2400" b="0">
+                <a:solidFill>
+                  <a:srgbClr val="FFFFFF"/>
+                </a:solidFill>
+                <a:latin typeface="Play"/>
+                <a:ea typeface="Play"/>
+                <a:cs typeface="Play"/>
+              </a:defRPr>
+            </a:pPr>
+            <a:r>
+              <a:rPr sz="2400" b="0">
+                <a:solidFill>
+                  <a:srgbClr val="FFFFFF"/>
+                </a:solidFill>
+                <a:latin typeface="Play"/>
+                <a:ea typeface="Play"/>
+                <a:cs typeface="Play"/>
+              </a:rPr>
+              <a:t>Нарушения стиля уменьшились до 2 из 68</a:t>
             </a:r>
           </a:p>
         </p:txBody>
       </p:sp>
       <p:sp>
         <p:nvSpPr>
-          <p:cNvPr id="9" name="Oval 8"/>
+          <p:cNvPr id="9" name="stat_3:bar"/>
           <p:cNvSpPr/>
           <p:nvPr/>
         </p:nvSpPr>
         <p:spPr>
           <a:xfrm>
-            <a:off x="9608504" y="3994703"/>
-            <a:ext cx="493024" cy="493024"/>
+            <a:off x="9251769" y="1874520"/>
+            <a:ext cx="50800" cy="2230120"/>
           </a:xfrm>
-          <a:prstGeom prst="ellipse">
+          <a:prstGeom prst="rect">
             <a:avLst/>
           </a:prstGeom>
           <a:solidFill>
@@ -12301,6 +14906,7 @@
           <a:ln>
             <a:noFill/>
           </a:ln>
+          <a:effectLst/>
         </p:spPr>
         <p:style>
           <a:lnRef idx="1">
@@ -12326,14 +14932,14 @@
       </p:sp>
       <p:sp>
         <p:nvSpPr>
-          <p:cNvPr id="10" name="TextBox 9"/>
+          <p:cNvPr id="10" name="stat_3"/>
           <p:cNvSpPr txBox="1"/>
           <p:nvPr/>
         </p:nvSpPr>
         <p:spPr>
           <a:xfrm>
-            <a:off x="6084722" y="3176732"/>
-            <a:ext cx="5655442" cy="851587"/>
+            <a:off x="9429569" y="1783080"/>
+            <a:ext cx="2310594" cy="2321560"/>
           </a:xfrm>
           <a:prstGeom prst="rect">
             <a:avLst/>
@@ -12341,15 +14947,21 @@
           <a:noFill/>
         </p:spPr>
         <p:txBody>
-          <a:bodyPr wrap="square" lIns="12700" rIns="12700" tIns="12700" bIns="12700">
+          <a:bodyPr wrap="square" lIns="76200" rIns="76200" tIns="0" bIns="0">
             <a:spAutoFit/>
           </a:bodyPr>
           <a:lstStyle/>
           <a:p>
-            <a:pPr algn="ctr">
-              <a:defRPr sz="1400" b="0">
-                <a:solidFill>
-                  <a:srgbClr val="FFFFFF"/>
+            <a:pPr>
+              <a:lnSpc>
+                <a:spcPct val="100000"/>
+              </a:lnSpc>
+              <a:spcAft>
+                <a:spcPts val="200"/>
+              </a:spcAft>
+              <a:defRPr sz="4000" b="1">
+                <a:solidFill>
+                  <a:srgbClr val="0077FF"/>
                 </a:solidFill>
                 <a:latin typeface="Play"/>
                 <a:ea typeface="Play"/>
@@ -12357,15 +14969,41 @@
               </a:defRPr>
             </a:pPr>
             <a:r>
-              <a:rPr sz="1400" b="0">
-                <a:solidFill>
-                  <a:srgbClr val="FFFFFF"/>
+              <a:rPr sz="4000" b="1">
+                <a:solidFill>
+                  <a:srgbClr val="0077FF"/>
                 </a:solidFill>
                 <a:latin typeface="Play"/>
                 <a:ea typeface="Play"/>
                 <a:cs typeface="Play"/>
               </a:rPr>
-              <a:t>Генерация иллюстраций</a:t>
+              <a:t>38</a:t>
+            </a:r>
+          </a:p>
+          <a:p>
+            <a:pPr>
+              <a:spcAft>
+                <a:spcPts val="300"/>
+              </a:spcAft>
+              <a:defRPr sz="2400" b="0">
+                <a:solidFill>
+                  <a:srgbClr val="FFFFFF"/>
+                </a:solidFill>
+                <a:latin typeface="Play"/>
+                <a:ea typeface="Play"/>
+                <a:cs typeface="Play"/>
+              </a:defRPr>
+            </a:pPr>
+            <a:r>
+              <a:rPr sz="2400" b="0">
+                <a:solidFill>
+                  <a:srgbClr val="FFFFFF"/>
+                </a:solidFill>
+                <a:latin typeface="Play"/>
+                <a:ea typeface="Play"/>
+                <a:cs typeface="Play"/>
+              </a:rPr>
+              <a:t>Дизайнеры закрыли 38 запросов вместо 11 в неделю</a:t>
             </a:r>
           </a:p>
         </p:txBody>
@@ -12378,7 +15016,7 @@
 </p:sld>
 </file>
 
-<file path=ppt/slides/slide38.xml><?xml version="1.0" encoding="utf-8"?>
+<file path=ppt/slides/slide39.xml><?xml version="1.0" encoding="utf-8"?>
 <p:sld xmlns:a="http://schemas.openxmlformats.org/drawingml/2006/main" xmlns:p="http://schemas.openxmlformats.org/presentationml/2006/main" xmlns:r="http://schemas.openxmlformats.org/officeDocument/2006/relationships">
   <p:cSld>
     <p:spTree>
@@ -12461,7 +15099,7 @@
         <p:spPr>
           <a:xfrm>
             <a:off x="300817" y="297715"/>
-            <a:ext cx="11317142" cy="3307176"/>
+            <a:ext cx="11566347" cy="5727164"/>
           </a:xfrm>
           <a:prstGeom prst="roundRect">
             <a:avLst/>
@@ -12542,21 +15180,21 @@
                 <a:ea typeface="Play"/>
                 <a:cs typeface="Play"/>
               </a:rPr>
-              <a:t>Что мы просим решить</a:t>
+              <a:t>Следующие шаги</a:t>
             </a:r>
           </a:p>
         </p:txBody>
       </p:sp>
       <p:sp>
         <p:nvSpPr>
-          <p:cNvPr id="682" name="card_0"/>
+          <p:cNvPr id="682" name="body"/>
           <p:cNvSpPr txBox="1"/>
           <p:nvPr/>
         </p:nvSpPr>
         <p:spPr>
           <a:xfrm>
-            <a:off x="580217" y="1989452"/>
-            <a:ext cx="3331220" cy="1717212"/>
+            <a:off x="427817" y="1783080"/>
+            <a:ext cx="11312347" cy="1341120"/>
           </a:xfrm>
           <a:prstGeom prst="rect">
             <a:avLst/>
@@ -12573,7 +15211,7 @@
               <a:spcAft>
                 <a:spcPts val="300"/>
               </a:spcAft>
-              <a:defRPr sz="2800" b="0">
+              <a:defRPr sz="1600">
                 <a:solidFill>
                   <a:srgbClr val="FFFFFF"/>
                 </a:solidFill>
@@ -12583,7 +15221,7 @@
               </a:defRPr>
             </a:pPr>
             <a:r>
-              <a:rPr sz="2800" b="0">
+              <a:rPr sz="1600">
                 <a:solidFill>
                   <a:srgbClr val="FFFFFF"/>
                 </a:solidFill>
@@ -12591,21 +15229,334 @@
                 <a:ea typeface="Play"/>
                 <a:cs typeface="Play"/>
               </a:rPr>
-              <a:t>Запуск сервиса на всю компанию</a:t>
+              <a:t>• Согласовать бюджет и ресурсы</a:t>
+            </a:r>
+          </a:p>
+          <a:p>
+            <a:pPr algn="l">
+              <a:spcAft>
+                <a:spcPts val="300"/>
+              </a:spcAft>
+              <a:defRPr sz="1600">
+                <a:solidFill>
+                  <a:srgbClr val="FFFFFF"/>
+                </a:solidFill>
+                <a:latin typeface="Play"/>
+                <a:ea typeface="Play"/>
+                <a:cs typeface="Play"/>
+              </a:defRPr>
+            </a:pPr>
+            <a:r>
+              <a:rPr sz="1600">
+                <a:solidFill>
+                  <a:srgbClr val="FFFFFF"/>
+                </a:solidFill>
+                <a:latin typeface="Play"/>
+                <a:ea typeface="Play"/>
+                <a:cs typeface="Play"/>
+              </a:rPr>
+              <a:t>• Интегрировать сервис с корпоративным хранилищем</a:t>
+            </a:r>
+          </a:p>
+          <a:p>
+            <a:pPr algn="l">
+              <a:spcAft>
+                <a:spcPts val="300"/>
+              </a:spcAft>
+              <a:defRPr sz="1600">
+                <a:solidFill>
+                  <a:srgbClr val="FFFFFF"/>
+                </a:solidFill>
+                <a:latin typeface="Play"/>
+                <a:ea typeface="Play"/>
+                <a:cs typeface="Play"/>
+              </a:defRPr>
+            </a:pPr>
+            <a:r>
+              <a:rPr sz="1600">
+                <a:solidFill>
+                  <a:srgbClr val="FFFFFF"/>
+                </a:solidFill>
+                <a:latin typeface="Play"/>
+                <a:ea typeface="Play"/>
+                <a:cs typeface="Play"/>
+              </a:rPr>
+              <a:t>• Расширить команды до 8 в Q3 2026</a:t>
             </a:r>
           </a:p>
         </p:txBody>
       </p:sp>
       <p:sp>
         <p:nvSpPr>
-          <p:cNvPr id="683" name="card_1"/>
+          <p:cNvPr id="683" name="Pentagon 682"/>
+          <p:cNvSpPr/>
+          <p:nvPr/>
+        </p:nvSpPr>
+        <p:spPr>
+          <a:xfrm>
+            <a:off x="427817" y="3455876"/>
+            <a:ext cx="3680283" cy="2281775"/>
+          </a:xfrm>
+          <a:prstGeom prst="homePlate">
+            <a:avLst/>
+          </a:prstGeom>
+          <a:solidFill>
+            <a:srgbClr val="0077FF"/>
+          </a:solidFill>
+          <a:ln>
+            <a:noFill/>
+          </a:ln>
+        </p:spPr>
+        <p:style>
+          <a:lnRef idx="1">
+            <a:schemeClr val="accent1"/>
+          </a:lnRef>
+          <a:fillRef idx="3">
+            <a:schemeClr val="accent1"/>
+          </a:fillRef>
+          <a:effectRef idx="2">
+            <a:schemeClr val="accent1"/>
+          </a:effectRef>
+          <a:fontRef idx="minor">
+            <a:schemeClr val="lt1"/>
+          </a:fontRef>
+        </p:style>
+        <p:txBody>
+          <a:bodyPr rtlCol="0" anchor="ctr" wrap="square" lIns="12700" rIns="12700" tIns="12700" bIns="12700"/>
+          <a:lstStyle/>
+          <a:p>
+            <a:pPr algn="ctr">
+              <a:defRPr sz="1260" b="0">
+                <a:solidFill>
+                  <a:srgbClr val="FFFFFF"/>
+                </a:solidFill>
+                <a:latin typeface="Play"/>
+                <a:ea typeface="Play"/>
+                <a:cs typeface="Play"/>
+              </a:defRPr>
+            </a:pPr>
+            <a:r>
+              <a:rPr sz="1260" b="0">
+                <a:solidFill>
+                  <a:srgbClr val="FFFFFF"/>
+                </a:solidFill>
+                <a:latin typeface="Play"/>
+                <a:ea typeface="Play"/>
+                <a:cs typeface="Play"/>
+              </a:rPr>
+              <a:t>Согласовать бюджет</a:t>
+            </a:r>
+          </a:p>
+        </p:txBody>
+      </p:sp>
+      <p:sp>
+        <p:nvSpPr>
+          <p:cNvPr id="684" name="Chevron 683"/>
+          <p:cNvSpPr/>
+          <p:nvPr/>
+        </p:nvSpPr>
+        <p:spPr>
+          <a:xfrm>
+            <a:off x="4243848" y="3455876"/>
+            <a:ext cx="3680283" cy="2281775"/>
+          </a:xfrm>
+          <a:prstGeom prst="chevron">
+            <a:avLst/>
+          </a:prstGeom>
+          <a:solidFill>
+            <a:srgbClr val="0077FF"/>
+          </a:solidFill>
+          <a:ln>
+            <a:noFill/>
+          </a:ln>
+        </p:spPr>
+        <p:style>
+          <a:lnRef idx="1">
+            <a:schemeClr val="accent1"/>
+          </a:lnRef>
+          <a:fillRef idx="3">
+            <a:schemeClr val="accent1"/>
+          </a:fillRef>
+          <a:effectRef idx="2">
+            <a:schemeClr val="accent1"/>
+          </a:effectRef>
+          <a:fontRef idx="minor">
+            <a:schemeClr val="lt1"/>
+          </a:fontRef>
+        </p:style>
+        <p:txBody>
+          <a:bodyPr rtlCol="0" anchor="ctr" wrap="square" lIns="12700" rIns="12700" tIns="12700" bIns="12700"/>
+          <a:lstStyle/>
+          <a:p>
+            <a:pPr algn="ctr">
+              <a:defRPr sz="1260" b="0">
+                <a:solidFill>
+                  <a:srgbClr val="FFFFFF"/>
+                </a:solidFill>
+                <a:latin typeface="Play"/>
+                <a:ea typeface="Play"/>
+                <a:cs typeface="Play"/>
+              </a:defRPr>
+            </a:pPr>
+            <a:r>
+              <a:rPr sz="1260" b="0">
+                <a:solidFill>
+                  <a:srgbClr val="FFFFFF"/>
+                </a:solidFill>
+                <a:latin typeface="Play"/>
+                <a:ea typeface="Play"/>
+                <a:cs typeface="Play"/>
+              </a:rPr>
+              <a:t>Интеграция с хранилищем</a:t>
+            </a:r>
+          </a:p>
+        </p:txBody>
+      </p:sp>
+      <p:sp>
+        <p:nvSpPr>
+          <p:cNvPr id="685" name="Chevron 684"/>
+          <p:cNvSpPr/>
+          <p:nvPr/>
+        </p:nvSpPr>
+        <p:spPr>
+          <a:xfrm>
+            <a:off x="8059880" y="3455876"/>
+            <a:ext cx="3680283" cy="2281775"/>
+          </a:xfrm>
+          <a:prstGeom prst="chevron">
+            <a:avLst/>
+          </a:prstGeom>
+          <a:solidFill>
+            <a:srgbClr val="0077FF"/>
+          </a:solidFill>
+          <a:ln>
+            <a:noFill/>
+          </a:ln>
+        </p:spPr>
+        <p:style>
+          <a:lnRef idx="1">
+            <a:schemeClr val="accent1"/>
+          </a:lnRef>
+          <a:fillRef idx="3">
+            <a:schemeClr val="accent1"/>
+          </a:fillRef>
+          <a:effectRef idx="2">
+            <a:schemeClr val="accent1"/>
+          </a:effectRef>
+          <a:fontRef idx="minor">
+            <a:schemeClr val="lt1"/>
+          </a:fontRef>
+        </p:style>
+        <p:txBody>
+          <a:bodyPr rtlCol="0" anchor="ctr" wrap="square" lIns="12700" rIns="12700" tIns="12700" bIns="12700"/>
+          <a:lstStyle/>
+          <a:p>
+            <a:pPr algn="ctr">
+              <a:defRPr sz="1260" b="0">
+                <a:solidFill>
+                  <a:srgbClr val="FFFFFF"/>
+                </a:solidFill>
+                <a:latin typeface="Play"/>
+                <a:ea typeface="Play"/>
+                <a:cs typeface="Play"/>
+              </a:defRPr>
+            </a:pPr>
+            <a:r>
+              <a:rPr sz="1260" b="0">
+                <a:solidFill>
+                  <a:srgbClr val="FFFFFF"/>
+                </a:solidFill>
+                <a:latin typeface="Play"/>
+                <a:ea typeface="Play"/>
+                <a:cs typeface="Play"/>
+              </a:rPr>
+              <a:t>Расширить команды</a:t>
+            </a:r>
+          </a:p>
+        </p:txBody>
+      </p:sp>
+    </p:spTree>
+  </p:cSld>
+  <p:clrMapOvr>
+    <a:masterClrMapping/>
+  </p:clrMapOvr>
+</p:sld>
+</file>
+
+<file path=ppt/slides/slide40.xml><?xml version="1.0" encoding="utf-8"?>
+<p:sld xmlns:a="http://schemas.openxmlformats.org/drawingml/2006/main" xmlns:p="http://schemas.openxmlformats.org/presentationml/2006/main" xmlns:r="http://schemas.openxmlformats.org/officeDocument/2006/relationships">
+  <p:cSld>
+    <p:spTree>
+      <p:nvGrpSpPr>
+        <p:cNvPr id="1" name=""/>
+        <p:cNvGrpSpPr/>
+        <p:nvPr/>
+      </p:nvGrpSpPr>
+      <p:grpSpPr/>
+      <p:pic>
+        <p:nvPicPr>
+          <p:cNvPr id="620" name="Google Shape;620;p28"/>
+          <p:cNvPicPr preferRelativeResize="0"/>
+          <p:nvPr/>
+        </p:nvPicPr>
+        <p:blipFill rotWithShape="1">
+          <a:blip r:embed="rId3">
+            <a:alphaModFix/>
+          </a:blip>
+          <a:srcRect b="0" l="0" r="0" t="0"/>
+          <a:stretch/>
+        </p:blipFill>
+        <p:spPr>
+          <a:xfrm>
+            <a:off x="398723" y="6160516"/>
+            <a:ext cx="1857481" cy="292671"/>
+          </a:xfrm>
+          <a:prstGeom prst="rect">
+            <a:avLst/>
+          </a:prstGeom>
+          <a:noFill/>
+          <a:ln>
+            <a:noFill/>
+          </a:ln>
+        </p:spPr>
+      </p:pic>
+      <p:pic>
+        <p:nvPicPr>
+          <p:cNvPr descr=" " id="621" name="Google Shape;621;p28"/>
+          <p:cNvPicPr preferRelativeResize="0"/>
+          <p:nvPr/>
+        </p:nvPicPr>
+        <p:blipFill rotWithShape="1">
+          <a:blip r:embed="rId4">
+            <a:alphaModFix/>
+          </a:blip>
+          <a:srcRect b="0" l="0" r="0" t="0"/>
+          <a:stretch/>
+        </p:blipFill>
+        <p:spPr>
+          <a:xfrm>
+            <a:off x="11093496" y="6238282"/>
+            <a:ext cx="690517" cy="216000"/>
+          </a:xfrm>
+          <a:prstGeom prst="rect">
+            <a:avLst/>
+          </a:prstGeom>
+          <a:noFill/>
+          <a:ln>
+            <a:noFill/>
+          </a:ln>
+        </p:spPr>
+      </p:pic>
+      <p:sp>
+        <p:nvSpPr>
+          <p:cNvPr id="622" name="title"/>
           <p:cNvSpPr txBox="1"/>
           <p:nvPr/>
         </p:nvSpPr>
         <p:spPr>
           <a:xfrm>
-            <a:off x="4369978" y="1989452"/>
-            <a:ext cx="3331220" cy="1717212"/>
+            <a:off x="429280" y="424715"/>
+            <a:ext cx="7827264" cy="822960"/>
           </a:xfrm>
           <a:prstGeom prst="rect">
             <a:avLst/>
@@ -12622,7 +15573,7 @@
               <a:spcAft>
                 <a:spcPts val="300"/>
               </a:spcAft>
-              <a:defRPr sz="2800" b="0">
+              <a:defRPr sz="3200">
                 <a:solidFill>
                   <a:srgbClr val="FFFFFF"/>
                 </a:solidFill>
@@ -12632,7 +15583,7 @@
               </a:defRPr>
             </a:pPr>
             <a:r>
-              <a:rPr sz="2800" b="0">
+              <a:rPr sz="3200">
                 <a:solidFill>
                   <a:srgbClr val="FFFFFF"/>
                 </a:solidFill>
@@ -12640,56 +15591,7 @@
                 <a:ea typeface="Play"/>
                 <a:cs typeface="Play"/>
               </a:rPr>
-              <a:t>Выделение бюджета на поддержку и развитие</a:t>
-            </a:r>
-          </a:p>
-        </p:txBody>
-      </p:sp>
-      <p:sp>
-        <p:nvSpPr>
-          <p:cNvPr id="684" name="card_2"/>
-          <p:cNvSpPr txBox="1"/>
-          <p:nvPr/>
-        </p:nvSpPr>
-        <p:spPr>
-          <a:xfrm>
-            <a:off x="8159739" y="1989452"/>
-            <a:ext cx="3331220" cy="1717212"/>
-          </a:xfrm>
-          <a:prstGeom prst="rect">
-            <a:avLst/>
-          </a:prstGeom>
-          <a:noFill/>
-        </p:spPr>
-        <p:txBody>
-          <a:bodyPr wrap="square" lIns="76200" rIns="76200" tIns="50800" bIns="50800">
-            <a:spAutoFit/>
-          </a:bodyPr>
-          <a:lstStyle/>
-          <a:p>
-            <a:pPr algn="l">
-              <a:spcAft>
-                <a:spcPts val="300"/>
-              </a:spcAft>
-              <a:defRPr sz="2800" b="0">
-                <a:solidFill>
-                  <a:srgbClr val="FFFFFF"/>
-                </a:solidFill>
-                <a:latin typeface="Play"/>
-                <a:ea typeface="Play"/>
-                <a:cs typeface="Play"/>
-              </a:defRPr>
-            </a:pPr>
-            <a:r>
-              <a:rPr sz="2800" b="0">
-                <a:solidFill>
-                  <a:srgbClr val="FFFFFF"/>
-                </a:solidFill>
-                <a:latin typeface="Play"/>
-                <a:ea typeface="Play"/>
-                <a:cs typeface="Play"/>
-              </a:rPr>
-              <a:t>Поддержка интеграции с корпоративными системами</a:t>
+              <a:t>Вопросы и ответы</a:t>
             </a:r>
           </a:p>
         </p:txBody>
@@ -12702,7 +15604,7 @@
 </p:sld>
 </file>
 
-<file path=ppt/slides/slide39.xml><?xml version="1.0" encoding="utf-8"?>
+<file path=ppt/slides/slide41.xml><?xml version="1.0" encoding="utf-8"?>
 <p:sld xmlns:a="http://schemas.openxmlformats.org/drawingml/2006/main" xmlns:p="http://schemas.openxmlformats.org/presentationml/2006/main" xmlns:r="http://schemas.openxmlformats.org/officeDocument/2006/relationships">
   <p:cSld>
     <p:spTree>
@@ -12823,7 +15725,7 @@
         <p:spPr>
           <a:xfrm>
             <a:off x="302280" y="2164394"/>
-            <a:ext cx="8081385" cy="1247140"/>
+            <a:ext cx="11564884" cy="2540741"/>
           </a:xfrm>
           <a:prstGeom prst="roundRect">
             <a:avLst/>
@@ -12869,7 +15771,7 @@
         <p:spPr>
           <a:xfrm>
             <a:off x="429280" y="2291394"/>
-            <a:ext cx="7827385" cy="1018540"/>
+            <a:ext cx="7827385" cy="822960"/>
           </a:xfrm>
           <a:prstGeom prst="rect">
             <a:avLst/>
@@ -12886,7 +15788,7 @@
               <a:spcAft>
                 <a:spcPts val="300"/>
               </a:spcAft>
-              <a:defRPr sz="5400">
+              <a:defRPr sz="4000">
                 <a:solidFill>
                   <a:srgbClr val="FFFFFF"/>
                 </a:solidFill>
@@ -12896,7 +15798,7 @@
               </a:defRPr>
             </a:pPr>
             <a:r>
-              <a:rPr sz="5400">
+              <a:rPr sz="4000">
                 <a:solidFill>
                   <a:srgbClr val="FFFFFF"/>
                 </a:solidFill>
@@ -12904,7 +15806,56 @@
                 <a:ea typeface="Play"/>
                 <a:cs typeface="Play"/>
               </a:rPr>
-              <a:t>Вопросы?</a:t>
+              <a:t>Контактная информация</a:t>
+            </a:r>
+          </a:p>
+        </p:txBody>
+      </p:sp>
+      <p:sp>
+        <p:nvSpPr>
+          <p:cNvPr id="886" name="body"/>
+          <p:cNvSpPr txBox="1"/>
+          <p:nvPr/>
+        </p:nvSpPr>
+        <p:spPr>
+          <a:xfrm>
+            <a:off x="429280" y="4014256"/>
+            <a:ext cx="11310884" cy="563880"/>
+          </a:xfrm>
+          <a:prstGeom prst="rect">
+            <a:avLst/>
+          </a:prstGeom>
+          <a:noFill/>
+        </p:spPr>
+        <p:txBody>
+          <a:bodyPr wrap="square" lIns="76200" rIns="76200" tIns="50800" bIns="50800">
+            <a:spAutoFit/>
+          </a:bodyPr>
+          <a:lstStyle/>
+          <a:p>
+            <a:pPr algn="ctr">
+              <a:spcAft>
+                <a:spcPts val="300"/>
+              </a:spcAft>
+              <a:defRPr sz="2800" b="1">
+                <a:solidFill>
+                  <a:srgbClr val="FFFFFF"/>
+                </a:solidFill>
+                <a:latin typeface="Play"/>
+                <a:ea typeface="Play"/>
+                <a:cs typeface="Play"/>
+              </a:defRPr>
+            </a:pPr>
+            <a:r>
+              <a:rPr sz="2800" b="1">
+                <a:solidFill>
+                  <a:srgbClr val="FFFFFF"/>
+                </a:solidFill>
+                <a:latin typeface="Play"/>
+                <a:ea typeface="Play"/>
+                <a:cs typeface="Play"/>
+              </a:rPr>
+              <a:t>Email: support@example.com</a:t>
             </a:r>
           </a:p>
         </p:txBody>

--- a/samples/VK_WorkSpace_Клиентская_конференция_Шабл__classic.pptx
+++ b/samples/VK_WorkSpace_Клиентская_конференция_Шабл__classic.pptx
@@ -286,6 +286,434 @@
     </p:ext>
   </p:extLst>
 </p:presentation>
+</file>
+
+<file path=ppt/charts/chart1.xml><?xml version="1.0" encoding="utf-8"?>
+<c:chartSpace xmlns:c="http://schemas.openxmlformats.org/drawingml/2006/chart" xmlns:a="http://schemas.openxmlformats.org/drawingml/2006/main" xmlns:r="http://schemas.openxmlformats.org/officeDocument/2006/relationships">
+  <c:date1904 val="0"/>
+  <c:chart>
+    <c:autoTitleDeleted val="1"/>
+    <c:plotArea>
+      <c:barChart>
+        <c:barDir val="col"/>
+        <c:grouping val="clustered"/>
+        <c:ser>
+          <c:idx val="0"/>
+          <c:order val="0"/>
+          <c:tx>
+            <c:strRef>
+              <c:f>Sheet1!$B$1</c:f>
+              <c:strCache>
+                <c:ptCount val="1"/>
+                <c:pt idx="0">
+                  <c:v>Время (мин)</c:v>
+                </c:pt>
+              </c:strCache>
+            </c:strRef>
+          </c:tx>
+          <c:spPr>
+            <a:solidFill>
+              <a:srgbClr val="0077FF"/>
+            </a:solidFill>
+            <a:ln>
+              <a:solidFill>
+                <a:srgbClr val="0077FF"/>
+              </a:solidFill>
+            </a:ln>
+          </c:spPr>
+          <c:cat>
+            <c:strRef>
+              <c:f>Sheet1!$A$2:$A$3</c:f>
+              <c:strCache>
+                <c:ptCount val="2"/>
+                <c:pt idx="0">
+                  <c:v>До</c:v>
+                </c:pt>
+                <c:pt idx="1">
+                  <c:v>После</c:v>
+                </c:pt>
+              </c:strCache>
+            </c:strRef>
+          </c:cat>
+          <c:val>
+            <c:numRef>
+              <c:f>Sheet1!$B$2:$B$3</c:f>
+              <c:numCache>
+                <c:formatCode>General</c:formatCode>
+                <c:ptCount val="2"/>
+                <c:pt idx="0">
+                  <c:v>186.0</c:v>
+                </c:pt>
+                <c:pt idx="1">
+                  <c:v>4.0</c:v>
+                </c:pt>
+              </c:numCache>
+            </c:numRef>
+          </c:val>
+        </c:ser>
+        <c:dLbls>
+          <c:numFmt formatCode="0&quot; мин&quot;" sourceLinked="0"/>
+          <c:txPr>
+            <a:bodyPr wrap="none"/>
+            <a:lstStyle/>
+            <a:p>
+              <a:pPr>
+                <a:defRPr sz="1100" b="0">
+                  <a:solidFill>
+                    <a:srgbClr val="FFFFFF"/>
+                  </a:solidFill>
+                  <a:latin typeface="Play"/>
+                  <a:ea typeface="Play"/>
+                  <a:cs typeface="Play"/>
+                </a:defRPr>
+              </a:pPr>
+            </a:p>
+          </c:txPr>
+          <c:dLblPos val="outEnd"/>
+          <c:showLegendKey val="0"/>
+          <c:showVal val="1"/>
+          <c:showCatName val="0"/>
+          <c:showSerName val="0"/>
+          <c:showPercent val="0"/>
+          <c:showBubbleSize val="0"/>
+          <c:showLeaderLines val="1"/>
+        </c:dLbls>
+        <c:gapWidth val="60"/>
+        <c:axId val="-2068027336"/>
+        <c:axId val="-2113994440"/>
+      </c:barChart>
+      <c:catAx>
+        <c:axId val="-2068027336"/>
+        <c:scaling>
+          <c:orientation val="minMax"/>
+        </c:scaling>
+        <c:delete val="0"/>
+        <c:axPos val="b"/>
+        <c:majorTickMark val="out"/>
+        <c:minorTickMark val="none"/>
+        <c:tickLblPos val="nextTo"/>
+        <c:txPr>
+          <a:bodyPr/>
+          <a:lstStyle/>
+          <a:p>
+            <a:pPr>
+              <a:defRPr sz="1100" b="0">
+                <a:solidFill>
+                  <a:srgbClr val="FFFFFF"/>
+                </a:solidFill>
+                <a:latin typeface="Play"/>
+                <a:ea typeface="Play"/>
+                <a:cs typeface="Play"/>
+              </a:defRPr>
+            </a:pPr>
+          </a:p>
+        </c:txPr>
+        <c:crossAx val="-2113994440"/>
+        <c:crosses val="autoZero"/>
+        <c:auto val="1"/>
+        <c:lblAlgn val="ctr"/>
+        <c:lblOffset val="100"/>
+        <c:noMultiLvlLbl val="0"/>
+      </c:catAx>
+      <c:valAx>
+        <c:axId val="-2113994440"/>
+        <c:scaling/>
+        <c:delete val="0"/>
+        <c:axPos val="l"/>
+        <c:majorGridlines>
+          <c:spPr>
+            <a:ln w="9525">
+              <a:solidFill>
+                <a:srgbClr val="3C3C3C"/>
+              </a:solidFill>
+            </a:ln>
+          </c:spPr>
+        </c:majorGridlines>
+        <c:title>
+          <c:tx>
+            <c:rich>
+              <a:bodyPr rot="0" vert="horz"/>
+              <a:lstStyle/>
+              <a:p>
+                <a:pPr>
+                  <a:defRPr sz="1100" b="0">
+                    <a:solidFill>
+                      <a:srgbClr val="FFFFFF"/>
+                    </a:solidFill>
+                    <a:latin typeface="Play"/>
+                    <a:ea typeface="Play"/>
+                    <a:cs typeface="Play"/>
+                  </a:defRPr>
+                </a:pPr>
+                <a:r>
+                  <a:t>Время (мин), мин</a:t>
+                </a:r>
+              </a:p>
+            </c:rich>
+          </c:tx>
+          <c:layout/>
+          <c:overlay val="0"/>
+        </c:title>
+        <c:majorTickMark val="out"/>
+        <c:minorTickMark val="none"/>
+        <c:tickLblPos val="nextTo"/>
+        <c:txPr>
+          <a:bodyPr/>
+          <a:lstStyle/>
+          <a:p>
+            <a:pPr>
+              <a:defRPr sz="1100" b="0">
+                <a:solidFill>
+                  <a:srgbClr val="FFFFFF"/>
+                </a:solidFill>
+                <a:latin typeface="Play"/>
+                <a:ea typeface="Play"/>
+                <a:cs typeface="Play"/>
+              </a:defRPr>
+            </a:pPr>
+          </a:p>
+        </c:txPr>
+        <c:crossAx val="-2068027336"/>
+        <c:crosses val="autoZero"/>
+      </c:valAx>
+    </c:plotArea>
+    <c:dispBlanksAs val="gap"/>
+  </c:chart>
+  <c:txPr>
+    <a:bodyPr/>
+    <a:lstStyle/>
+    <a:p>
+      <a:pPr>
+        <a:defRPr sz="1200" b="0">
+          <a:solidFill>
+            <a:srgbClr val="FFFFFF"/>
+          </a:solidFill>
+          <a:latin typeface="Play"/>
+          <a:ea typeface="Play"/>
+          <a:cs typeface="Play"/>
+        </a:defRPr>
+      </a:pPr>
+      <a:endParaRPr lang="en-US"/>
+    </a:p>
+  </c:txPr>
+  <c:externalData r:id="rId1">
+    <c:autoUpdate val="0"/>
+  </c:externalData>
+</c:chartSpace>
+</file>
+
+<file path=ppt/charts/chart2.xml><?xml version="1.0" encoding="utf-8"?>
+<c:chartSpace xmlns:c="http://schemas.openxmlformats.org/drawingml/2006/chart" xmlns:a="http://schemas.openxmlformats.org/drawingml/2006/main" xmlns:r="http://schemas.openxmlformats.org/officeDocument/2006/relationships">
+  <c:date1904 val="0"/>
+  <c:chart>
+    <c:autoTitleDeleted val="1"/>
+    <c:plotArea>
+      <c:barChart>
+        <c:barDir val="col"/>
+        <c:grouping val="clustered"/>
+        <c:ser>
+          <c:idx val="0"/>
+          <c:order val="0"/>
+          <c:tx>
+            <c:strRef>
+              <c:f>Sheet1!$B$1</c:f>
+              <c:strCache>
+                <c:ptCount val="1"/>
+                <c:pt idx="0">
+                  <c:v>Нарушения</c:v>
+                </c:pt>
+              </c:strCache>
+            </c:strRef>
+          </c:tx>
+          <c:spPr>
+            <a:solidFill>
+              <a:srgbClr val="0077FF"/>
+            </a:solidFill>
+            <a:ln>
+              <a:solidFill>
+                <a:srgbClr val="0077FF"/>
+              </a:solidFill>
+            </a:ln>
+          </c:spPr>
+          <c:cat>
+            <c:strRef>
+              <c:f>Sheet1!$A$2:$A$3</c:f>
+              <c:strCache>
+                <c:ptCount val="2"/>
+                <c:pt idx="0">
+                  <c:v>До</c:v>
+                </c:pt>
+                <c:pt idx="1">
+                  <c:v>После</c:v>
+                </c:pt>
+              </c:strCache>
+            </c:strRef>
+          </c:cat>
+          <c:val>
+            <c:numRef>
+              <c:f>Sheet1!$B$2:$B$3</c:f>
+              <c:numCache>
+                <c:formatCode>General</c:formatCode>
+                <c:ptCount val="2"/>
+                <c:pt idx="0">
+                  <c:v>19.0</c:v>
+                </c:pt>
+                <c:pt idx="1">
+                  <c:v>2.0</c:v>
+                </c:pt>
+              </c:numCache>
+            </c:numRef>
+          </c:val>
+        </c:ser>
+        <c:dLbls>
+          <c:numFmt formatCode="0&quot; колод&quot;" sourceLinked="0"/>
+          <c:txPr>
+            <a:bodyPr wrap="none"/>
+            <a:lstStyle/>
+            <a:p>
+              <a:pPr>
+                <a:defRPr sz="1100" b="0">
+                  <a:solidFill>
+                    <a:srgbClr val="FFFFFF"/>
+                  </a:solidFill>
+                  <a:latin typeface="Play"/>
+                  <a:ea typeface="Play"/>
+                  <a:cs typeface="Play"/>
+                </a:defRPr>
+              </a:pPr>
+            </a:p>
+          </c:txPr>
+          <c:dLblPos val="outEnd"/>
+          <c:showLegendKey val="0"/>
+          <c:showVal val="1"/>
+          <c:showCatName val="0"/>
+          <c:showSerName val="0"/>
+          <c:showPercent val="0"/>
+          <c:showBubbleSize val="0"/>
+          <c:showLeaderLines val="1"/>
+        </c:dLbls>
+        <c:gapWidth val="60"/>
+        <c:axId val="-2068027336"/>
+        <c:axId val="-2113994440"/>
+      </c:barChart>
+      <c:catAx>
+        <c:axId val="-2068027336"/>
+        <c:scaling>
+          <c:orientation val="minMax"/>
+        </c:scaling>
+        <c:delete val="0"/>
+        <c:axPos val="b"/>
+        <c:majorTickMark val="out"/>
+        <c:minorTickMark val="none"/>
+        <c:tickLblPos val="nextTo"/>
+        <c:txPr>
+          <a:bodyPr/>
+          <a:lstStyle/>
+          <a:p>
+            <a:pPr>
+              <a:defRPr sz="1100" b="0">
+                <a:solidFill>
+                  <a:srgbClr val="FFFFFF"/>
+                </a:solidFill>
+                <a:latin typeface="Play"/>
+                <a:ea typeface="Play"/>
+                <a:cs typeface="Play"/>
+              </a:defRPr>
+            </a:pPr>
+          </a:p>
+        </c:txPr>
+        <c:crossAx val="-2113994440"/>
+        <c:crosses val="autoZero"/>
+        <c:auto val="1"/>
+        <c:lblAlgn val="ctr"/>
+        <c:lblOffset val="100"/>
+        <c:noMultiLvlLbl val="0"/>
+      </c:catAx>
+      <c:valAx>
+        <c:axId val="-2113994440"/>
+        <c:scaling/>
+        <c:delete val="0"/>
+        <c:axPos val="l"/>
+        <c:majorGridlines>
+          <c:spPr>
+            <a:ln w="9525">
+              <a:solidFill>
+                <a:srgbClr val="3C3C3C"/>
+              </a:solidFill>
+            </a:ln>
+          </c:spPr>
+        </c:majorGridlines>
+        <c:title>
+          <c:tx>
+            <c:rich>
+              <a:bodyPr rot="0" vert="horz"/>
+              <a:lstStyle/>
+              <a:p>
+                <a:pPr>
+                  <a:defRPr sz="1100" b="0">
+                    <a:solidFill>
+                      <a:srgbClr val="FFFFFF"/>
+                    </a:solidFill>
+                    <a:latin typeface="Play"/>
+                    <a:ea typeface="Play"/>
+                    <a:cs typeface="Play"/>
+                  </a:defRPr>
+                </a:pPr>
+                <a:r>
+                  <a:t>Нарушения, колод</a:t>
+                </a:r>
+              </a:p>
+            </c:rich>
+          </c:tx>
+          <c:layout/>
+          <c:overlay val="0"/>
+        </c:title>
+        <c:majorTickMark val="out"/>
+        <c:minorTickMark val="none"/>
+        <c:tickLblPos val="nextTo"/>
+        <c:txPr>
+          <a:bodyPr/>
+          <a:lstStyle/>
+          <a:p>
+            <a:pPr>
+              <a:defRPr sz="1100" b="0">
+                <a:solidFill>
+                  <a:srgbClr val="FFFFFF"/>
+                </a:solidFill>
+                <a:latin typeface="Play"/>
+                <a:ea typeface="Play"/>
+                <a:cs typeface="Play"/>
+              </a:defRPr>
+            </a:pPr>
+          </a:p>
+        </c:txPr>
+        <c:crossAx val="-2068027336"/>
+        <c:crosses val="autoZero"/>
+      </c:valAx>
+    </c:plotArea>
+    <c:dispBlanksAs val="gap"/>
+  </c:chart>
+  <c:txPr>
+    <a:bodyPr/>
+    <a:lstStyle/>
+    <a:p>
+      <a:pPr>
+        <a:defRPr sz="1200" b="0">
+          <a:solidFill>
+            <a:srgbClr val="FFFFFF"/>
+          </a:solidFill>
+          <a:latin typeface="Play"/>
+          <a:ea typeface="Play"/>
+          <a:cs typeface="Play"/>
+        </a:defRPr>
+      </a:pPr>
+      <a:endParaRPr lang="en-US"/>
+    </a:p>
+  </c:txPr>
+  <c:externalData r:id="rId1">
+    <c:autoUpdate val="0"/>
+  </c:externalData>
+</c:chartSpace>
 </file>
 
 <file path=ppt/notesMasters/notesMaster1.xml><?xml version="1.0" encoding="utf-8"?>
@@ -9145,7 +9573,7 @@
         <p:spPr>
           <a:xfrm>
             <a:off x="429280" y="2490551"/>
-            <a:ext cx="7827385" cy="1876897"/>
+            <a:ext cx="7827385" cy="1884680"/>
           </a:xfrm>
           <a:prstGeom prst="rect">
             <a:avLst/>
@@ -9162,7 +9590,7 @@
               <a:spcAft>
                 <a:spcPts val="300"/>
               </a:spcAft>
-              <a:defRPr sz="3200" b="0">
+              <a:defRPr sz="5400" b="0">
                 <a:solidFill>
                   <a:srgbClr val="FFFFFF"/>
                 </a:solidFill>
@@ -9172,7 +9600,7 @@
               </a:defRPr>
             </a:pPr>
             <a:r>
-              <a:rPr sz="3200" b="0">
+              <a:rPr sz="5400" b="0">
                 <a:solidFill>
                   <a:srgbClr val="FFFFFF"/>
                 </a:solidFill>
@@ -9180,7 +9608,7 @@
                 <a:ea typeface="Play"/>
                 <a:cs typeface="Play"/>
               </a:rPr>
-              <a:t>Защита инициативы: сервис автоматической вёрстки презентаций</a:t>
+              <a:t>Автоматическая вёрстка презентаций</a:t>
             </a:r>
           </a:p>
         </p:txBody>
@@ -9212,7 +9640,7 @@
         <p:spPr>
           <a:xfrm>
             <a:off x="429280" y="424715"/>
-            <a:ext cx="7827264" cy="822960"/>
+            <a:ext cx="7827264" cy="1183640"/>
           </a:xfrm>
           <a:prstGeom prst="rect">
             <a:avLst/>
@@ -9247,7 +9675,7 @@
                 <a:ea typeface="Play"/>
                 <a:cs typeface="Play"/>
               </a:rPr>
-              <a:t>Контекст и возможность</a:t>
+              <a:t>42 колоды в первом квартале 2026 года</a:t>
             </a:r>
           </a:p>
         </p:txBody>
@@ -9260,8 +9688,8 @@
         </p:nvSpPr>
         <p:spPr>
           <a:xfrm>
-            <a:off x="429280" y="1783080"/>
-            <a:ext cx="11310884" cy="1645920"/>
+            <a:off x="429280" y="1848385"/>
+            <a:ext cx="11310884" cy="1341120"/>
           </a:xfrm>
           <a:prstGeom prst="rect">
             <a:avLst/>
@@ -9296,7 +9724,7 @@
                 <a:ea typeface="Play"/>
                 <a:cs typeface="Play"/>
               </a:rPr>
-              <a:t>• Сборка одной презентации занимает 186 минут</a:t>
+              <a:t>• Средняя сборка 186 мин</a:t>
             </a:r>
           </a:p>
           <a:p>
@@ -9322,7 +9750,7 @@
                 <a:ea typeface="Play"/>
                 <a:cs typeface="Play"/>
               </a:rPr>
-              <a:t>• Правки после ревью добавляют 74 минуты</a:t>
+              <a:t>• 74 мин на правки</a:t>
             </a:r>
           </a:p>
           <a:p>
@@ -9348,33 +9776,7 @@
                 <a:ea typeface="Play"/>
                 <a:cs typeface="Play"/>
               </a:rPr>
-              <a:t>• 19 из 42 колод нарушают фирменный стиль</a:t>
-            </a:r>
-          </a:p>
-          <a:p>
-            <a:pPr algn="l">
-              <a:spcAft>
-                <a:spcPts val="300"/>
-              </a:spcAft>
-              <a:defRPr sz="1600">
-                <a:solidFill>
-                  <a:srgbClr val="FFFFFF"/>
-                </a:solidFill>
-                <a:latin typeface="Play"/>
-                <a:ea typeface="Play"/>
-                <a:cs typeface="Play"/>
-              </a:defRPr>
-            </a:pPr>
-            <a:r>
-              <a:rPr sz="1600">
-                <a:solidFill>
-                  <a:srgbClr val="FFFFFF"/>
-                </a:solidFill>
-                <a:latin typeface="Play"/>
-                <a:ea typeface="Play"/>
-                <a:cs typeface="Play"/>
-              </a:rPr>
-              <a:t>• Дизайн-отдел из 4 человек обслуживает 11 запросов в неделю</a:t>
+              <a:t>• 19 колод нарушили стиль</a:t>
             </a:r>
           </a:p>
         </p:txBody>
@@ -9388,8 +9790,8 @@
           <p:nvPr/>
         </p:nvGraphicFramePr>
         <p:xfrm>
-          <a:off x="429280" y="3600450"/>
-          <a:ext cx="11310884" cy="2297430"/>
+          <a:off x="429280" y="3360955"/>
+          <a:ext cx="11310884" cy="2536924"/>
         </p:xfrm>
         <a:graphic>
           <a:graphicData uri="http://schemas.openxmlformats.org/drawingml/2006/table">
@@ -9398,11 +9800,10 @@
                 <a:tableStyleId>{5C22544A-7EE6-4342-B048-85BDC9FD1C3A}</a:tableStyleId>
               </a:tblPr>
               <a:tblGrid>
-                <a:gridCol w="3770294"/>
-                <a:gridCol w="3770294"/>
-                <a:gridCol w="3770296"/>
+                <a:gridCol w="5655442"/>
+                <a:gridCol w="5655442"/>
               </a:tblGrid>
-              <a:tr h="328204">
+              <a:tr h="507384">
                 <a:tc>
                   <a:txBody>
                     <a:bodyPr/>
@@ -9455,34 +9856,8 @@
                     </a:solidFill>
                   </a:tcPr>
                 </a:tc>
-                <a:tc>
-                  <a:txBody>
-                    <a:bodyPr/>
-                    <a:lstStyle/>
-                    <a:p>
-                      <a:pPr>
-                        <a:defRPr sz="1300" b="1">
-                          <a:solidFill>
-                            <a:srgbClr val="FFFFFF"/>
-                          </a:solidFill>
-                          <a:latin typeface="Play"/>
-                          <a:ea typeface="Play"/>
-                          <a:cs typeface="Play"/>
-                        </a:defRPr>
-                      </a:pPr>
-                      <a:r>
-                        <a:t>Единица</a:t>
-                      </a:r>
-                    </a:p>
-                  </a:txBody>
-                  <a:tcPr>
-                    <a:solidFill>
-                      <a:srgbClr val="0077FF"/>
-                    </a:solidFill>
-                  </a:tcPr>
-                </a:tc>
               </a:tr>
-              <a:tr h="328204">
+              <a:tr h="507384">
                 <a:tc>
                   <a:txBody>
                     <a:bodyPr/>
@@ -9499,7 +9874,61 @@
                         </a:defRPr>
                       </a:pPr>
                       <a:r>
-                        <a:t>Время сборки</a:t>
+                        <a:t>Колоды</a:t>
+                      </a:r>
+                    </a:p>
+                  </a:txBody>
+                  <a:tcPr>
+                    <a:solidFill>
+                      <a:srgbClr val="111111"/>
+                    </a:solidFill>
+                  </a:tcPr>
+                </a:tc>
+                <a:tc>
+                  <a:txBody>
+                    <a:bodyPr/>
+                    <a:lstStyle/>
+                    <a:p>
+                      <a:pPr>
+                        <a:defRPr sz="1300" b="0">
+                          <a:solidFill>
+                            <a:srgbClr val="FFFFFF"/>
+                          </a:solidFill>
+                          <a:latin typeface="Play"/>
+                          <a:ea typeface="Play"/>
+                          <a:cs typeface="Play"/>
+                        </a:defRPr>
+                      </a:pPr>
+                      <a:r>
+                        <a:t>42</a:t>
+                      </a:r>
+                    </a:p>
+                  </a:txBody>
+                  <a:tcPr>
+                    <a:solidFill>
+                      <a:srgbClr val="111111"/>
+                    </a:solidFill>
+                  </a:tcPr>
+                </a:tc>
+              </a:tr>
+              <a:tr h="507384">
+                <a:tc>
+                  <a:txBody>
+                    <a:bodyPr/>
+                    <a:lstStyle/>
+                    <a:p>
+                      <a:pPr>
+                        <a:defRPr sz="1300" b="0">
+                          <a:solidFill>
+                            <a:srgbClr val="FFFFFF"/>
+                          </a:solidFill>
+                          <a:latin typeface="Play"/>
+                          <a:ea typeface="Play"/>
+                          <a:cs typeface="Play"/>
+                        </a:defRPr>
+                      </a:pPr>
+                      <a:r>
+                        <a:t>Средняя сборка (мин)</a:t>
                       </a:r>
                     </a:p>
                   </a:txBody>
@@ -9535,6 +9964,8 @@
                     </a:solidFill>
                   </a:tcPr>
                 </a:tc>
+              </a:tr>
+              <a:tr h="507384">
                 <a:tc>
                   <a:txBody>
                     <a:bodyPr/>
@@ -9551,35 +9982,7 @@
                         </a:defRPr>
                       </a:pPr>
                       <a:r>
-                        <a:t>мин</a:t>
-                      </a:r>
-                    </a:p>
-                  </a:txBody>
-                  <a:tcPr>
-                    <a:solidFill>
-                      <a:srgbClr val="111111"/>
-                    </a:solidFill>
-                  </a:tcPr>
-                </a:tc>
-              </a:tr>
-              <a:tr h="328204">
-                <a:tc>
-                  <a:txBody>
-                    <a:bodyPr/>
-                    <a:lstStyle/>
-                    <a:p>
-                      <a:pPr>
-                        <a:defRPr sz="1300" b="0">
-                          <a:solidFill>
-                            <a:srgbClr val="FFFFFF"/>
-                          </a:solidFill>
-                          <a:latin typeface="Play"/>
-                          <a:ea typeface="Play"/>
-                          <a:cs typeface="Play"/>
-                        </a:defRPr>
-                      </a:pPr>
-                      <a:r>
-                        <a:t>Время правок</a:t>
+                        <a:t>Правки (мин)</a:t>
                       </a:r>
                     </a:p>
                   </a:txBody>
@@ -9615,6 +10018,8 @@
                     </a:solidFill>
                   </a:tcPr>
                 </a:tc>
+              </a:tr>
+              <a:tr h="507388">
                 <a:tc>
                   <a:txBody>
                     <a:bodyPr/>
@@ -9631,35 +10036,7 @@
                         </a:defRPr>
                       </a:pPr>
                       <a:r>
-                        <a:t>мин</a:t>
-                      </a:r>
-                    </a:p>
-                  </a:txBody>
-                  <a:tcPr>
-                    <a:solidFill>
-                      <a:srgbClr val="111111"/>
-                    </a:solidFill>
-                  </a:tcPr>
-                </a:tc>
-              </a:tr>
-              <a:tr h="328204">
-                <a:tc>
-                  <a:txBody>
-                    <a:bodyPr/>
-                    <a:lstStyle/>
-                    <a:p>
-                      <a:pPr>
-                        <a:defRPr sz="1300" b="0">
-                          <a:solidFill>
-                            <a:srgbClr val="FFFFFF"/>
-                          </a:solidFill>
-                          <a:latin typeface="Play"/>
-                          <a:ea typeface="Play"/>
-                          <a:cs typeface="Play"/>
-                        </a:defRPr>
-                      </a:pPr>
-                      <a:r>
-                        <a:t>Нарушения стиля</a:t>
+                        <a:t>Нарушения</a:t>
                       </a:r>
                     </a:p>
                   </a:txBody>
@@ -9685,273 +10062,7 @@
                         </a:defRPr>
                       </a:pPr>
                       <a:r>
-                        <a:t>19/42</a:t>
-                      </a:r>
-                    </a:p>
-                  </a:txBody>
-                  <a:tcPr>
-                    <a:solidFill>
-                      <a:srgbClr val="111111"/>
-                    </a:solidFill>
-                  </a:tcPr>
-                </a:tc>
-                <a:tc>
-                  <a:txBody>
-                    <a:bodyPr/>
-                    <a:lstStyle/>
-                    <a:p>
-                      <a:pPr>
-                        <a:defRPr sz="1300" b="0">
-                          <a:solidFill>
-                            <a:srgbClr val="FFFFFF"/>
-                          </a:solidFill>
-                          <a:latin typeface="Play"/>
-                          <a:ea typeface="Play"/>
-                          <a:cs typeface="Play"/>
-                        </a:defRPr>
-                      </a:pPr>
-                      <a:r>
-                        <a:t>шт</a:t>
-                      </a:r>
-                    </a:p>
-                  </a:txBody>
-                  <a:tcPr>
-                    <a:solidFill>
-                      <a:srgbClr val="111111"/>
-                    </a:solidFill>
-                  </a:tcPr>
-                </a:tc>
-              </a:tr>
-              <a:tr h="328204">
-                <a:tc>
-                  <a:txBody>
-                    <a:bodyPr/>
-                    <a:lstStyle/>
-                    <a:p>
-                      <a:pPr>
-                        <a:defRPr sz="1300" b="0">
-                          <a:solidFill>
-                            <a:srgbClr val="FFFFFF"/>
-                          </a:solidFill>
-                          <a:latin typeface="Play"/>
-                          <a:ea typeface="Play"/>
-                          <a:cs typeface="Play"/>
-                        </a:defRPr>
-                      </a:pPr>
-                      <a:r>
-                        <a:t>Размер команды</a:t>
-                      </a:r>
-                    </a:p>
-                  </a:txBody>
-                  <a:tcPr>
-                    <a:solidFill>
-                      <a:srgbClr val="111111"/>
-                    </a:solidFill>
-                  </a:tcPr>
-                </a:tc>
-                <a:tc>
-                  <a:txBody>
-                    <a:bodyPr/>
-                    <a:lstStyle/>
-                    <a:p>
-                      <a:pPr>
-                        <a:defRPr sz="1300" b="0">
-                          <a:solidFill>
-                            <a:srgbClr val="FFFFFF"/>
-                          </a:solidFill>
-                          <a:latin typeface="Play"/>
-                          <a:ea typeface="Play"/>
-                          <a:cs typeface="Play"/>
-                        </a:defRPr>
-                      </a:pPr>
-                      <a:r>
-                        <a:t>4</a:t>
-                      </a:r>
-                    </a:p>
-                  </a:txBody>
-                  <a:tcPr>
-                    <a:solidFill>
-                      <a:srgbClr val="111111"/>
-                    </a:solidFill>
-                  </a:tcPr>
-                </a:tc>
-                <a:tc>
-                  <a:txBody>
-                    <a:bodyPr/>
-                    <a:lstStyle/>
-                    <a:p>
-                      <a:pPr>
-                        <a:defRPr sz="1300" b="0">
-                          <a:solidFill>
-                            <a:srgbClr val="FFFFFF"/>
-                          </a:solidFill>
-                          <a:latin typeface="Play"/>
-                          <a:ea typeface="Play"/>
-                          <a:cs typeface="Play"/>
-                        </a:defRPr>
-                      </a:pPr>
-                      <a:r>
-                        <a:t>чел</a:t>
-                      </a:r>
-                    </a:p>
-                  </a:txBody>
-                  <a:tcPr>
-                    <a:solidFill>
-                      <a:srgbClr val="111111"/>
-                    </a:solidFill>
-                  </a:tcPr>
-                </a:tc>
-              </a:tr>
-              <a:tr h="328204">
-                <a:tc>
-                  <a:txBody>
-                    <a:bodyPr/>
-                    <a:lstStyle/>
-                    <a:p>
-                      <a:pPr>
-                        <a:defRPr sz="1300" b="0">
-                          <a:solidFill>
-                            <a:srgbClr val="FFFFFF"/>
-                          </a:solidFill>
-                          <a:latin typeface="Play"/>
-                          <a:ea typeface="Play"/>
-                          <a:cs typeface="Play"/>
-                        </a:defRPr>
-                      </a:pPr>
-                      <a:r>
-                        <a:t>Запросы в неделю</a:t>
-                      </a:r>
-                    </a:p>
-                  </a:txBody>
-                  <a:tcPr>
-                    <a:solidFill>
-                      <a:srgbClr val="111111"/>
-                    </a:solidFill>
-                  </a:tcPr>
-                </a:tc>
-                <a:tc>
-                  <a:txBody>
-                    <a:bodyPr/>
-                    <a:lstStyle/>
-                    <a:p>
-                      <a:pPr>
-                        <a:defRPr sz="1300" b="0">
-                          <a:solidFill>
-                            <a:srgbClr val="FFFFFF"/>
-                          </a:solidFill>
-                          <a:latin typeface="Play"/>
-                          <a:ea typeface="Play"/>
-                          <a:cs typeface="Play"/>
-                        </a:defRPr>
-                      </a:pPr>
-                      <a:r>
-                        <a:t>11/27</a:t>
-                      </a:r>
-                    </a:p>
-                  </a:txBody>
-                  <a:tcPr>
-                    <a:solidFill>
-                      <a:srgbClr val="111111"/>
-                    </a:solidFill>
-                  </a:tcPr>
-                </a:tc>
-                <a:tc>
-                  <a:txBody>
-                    <a:bodyPr/>
-                    <a:lstStyle/>
-                    <a:p>
-                      <a:pPr>
-                        <a:defRPr sz="1300" b="0">
-                          <a:solidFill>
-                            <a:srgbClr val="FFFFFF"/>
-                          </a:solidFill>
-                          <a:latin typeface="Play"/>
-                          <a:ea typeface="Play"/>
-                          <a:cs typeface="Play"/>
-                        </a:defRPr>
-                      </a:pPr>
-                      <a:r>
-                        <a:t>запросов</a:t>
-                      </a:r>
-                    </a:p>
-                  </a:txBody>
-                  <a:tcPr>
-                    <a:solidFill>
-                      <a:srgbClr val="111111"/>
-                    </a:solidFill>
-                  </a:tcPr>
-                </a:tc>
-              </a:tr>
-              <a:tr h="328206">
-                <a:tc>
-                  <a:txBody>
-                    <a:bodyPr/>
-                    <a:lstStyle/>
-                    <a:p>
-                      <a:pPr>
-                        <a:defRPr sz="1300" b="0">
-                          <a:solidFill>
-                            <a:srgbClr val="FFFFFF"/>
-                          </a:solidFill>
-                          <a:latin typeface="Play"/>
-                          <a:ea typeface="Play"/>
-                          <a:cs typeface="Play"/>
-                        </a:defRPr>
-                      </a:pPr>
-                      <a:r>
-                        <a:t>Срок ожидания</a:t>
-                      </a:r>
-                    </a:p>
-                  </a:txBody>
-                  <a:tcPr>
-                    <a:solidFill>
-                      <a:srgbClr val="111111"/>
-                    </a:solidFill>
-                  </a:tcPr>
-                </a:tc>
-                <a:tc>
-                  <a:txBody>
-                    <a:bodyPr/>
-                    <a:lstStyle/>
-                    <a:p>
-                      <a:pPr>
-                        <a:defRPr sz="1300" b="0">
-                          <a:solidFill>
-                            <a:srgbClr val="FFFFFF"/>
-                          </a:solidFill>
-                          <a:latin typeface="Play"/>
-                          <a:ea typeface="Play"/>
-                          <a:cs typeface="Play"/>
-                        </a:defRPr>
-                      </a:pPr>
-                      <a:r>
-                        <a:t>6</a:t>
-                      </a:r>
-                    </a:p>
-                  </a:txBody>
-                  <a:tcPr>
-                    <a:solidFill>
-                      <a:srgbClr val="111111"/>
-                    </a:solidFill>
-                  </a:tcPr>
-                </a:tc>
-                <a:tc>
-                  <a:txBody>
-                    <a:bodyPr/>
-                    <a:lstStyle/>
-                    <a:p>
-                      <a:pPr>
-                        <a:defRPr sz="1300" b="0">
-                          <a:solidFill>
-                            <a:srgbClr val="FFFFFF"/>
-                          </a:solidFill>
-                          <a:latin typeface="Play"/>
-                          <a:ea typeface="Play"/>
-                          <a:cs typeface="Play"/>
-                        </a:defRPr>
-                      </a:pPr>
-                      <a:r>
-                        <a:t>дней</a:t>
+                        <a:t>19</a:t>
                       </a:r>
                     </a:p>
                   </a:txBody>
@@ -9993,7 +10104,7 @@
         <p:spPr>
           <a:xfrm>
             <a:off x="429280" y="424715"/>
-            <a:ext cx="7827264" cy="822960"/>
+            <a:ext cx="7827264" cy="1183640"/>
           </a:xfrm>
           <a:prstGeom prst="rect">
             <a:avLst/>
@@ -10028,7 +10139,7 @@
                 <a:ea typeface="Play"/>
                 <a:cs typeface="Play"/>
               </a:rPr>
-              <a:t>Предложение</a:t>
+              <a:t>Сборка одной презентации занимает 186 мин</a:t>
             </a:r>
           </a:p>
         </p:txBody>
@@ -10041,8 +10152,8 @@
         </p:nvSpPr>
         <p:spPr>
           <a:xfrm>
-            <a:off x="429280" y="1783080"/>
-            <a:ext cx="11310884" cy="1645920"/>
+            <a:off x="429280" y="1848385"/>
+            <a:ext cx="11310884" cy="944880"/>
           </a:xfrm>
           <a:prstGeom prst="rect">
             <a:avLst/>
@@ -10077,7 +10188,7 @@
                 <a:ea typeface="Play"/>
                 <a:cs typeface="Play"/>
               </a:rPr>
-              <a:t>• Сервис принимает шаблон pptx и материалы</a:t>
+              <a:t>• 12 слайдов</a:t>
             </a:r>
           </a:p>
           <a:p>
@@ -10103,467 +10214,253 @@
                 <a:ea typeface="Play"/>
                 <a:cs typeface="Play"/>
               </a:rPr>
-              <a:t>• Шаблон преобразуется в дизайн-систему</a:t>
-            </a:r>
-          </a:p>
-          <a:p>
-            <a:pPr algn="l">
-              <a:spcAft>
-                <a:spcPts val="300"/>
-              </a:spcAft>
-              <a:defRPr sz="1600">
-                <a:solidFill>
-                  <a:srgbClr val="FFFFFF"/>
-                </a:solidFill>
-                <a:latin typeface="Play"/>
-                <a:ea typeface="Play"/>
-                <a:cs typeface="Play"/>
-              </a:defRPr>
-            </a:pPr>
-            <a:r>
-              <a:rPr sz="1600">
-                <a:solidFill>
-                  <a:srgbClr val="FFFFFF"/>
-                </a:solidFill>
-                <a:latin typeface="Play"/>
-                <a:ea typeface="Play"/>
-                <a:cs typeface="Play"/>
-              </a:rPr>
-              <a:t>• Автоматически формируется план колоды</a:t>
-            </a:r>
-          </a:p>
-          <a:p>
-            <a:pPr algn="l">
-              <a:spcAft>
-                <a:spcPts val="300"/>
-              </a:spcAft>
-              <a:defRPr sz="1600">
-                <a:solidFill>
-                  <a:srgbClr val="FFFFFF"/>
-                </a:solidFill>
-                <a:latin typeface="Play"/>
-                <a:ea typeface="Play"/>
-                <a:cs typeface="Play"/>
-              </a:defRPr>
-            </a:pPr>
-            <a:r>
-              <a:rPr sz="1600">
-                <a:solidFill>
-                  <a:srgbClr val="FFFFFF"/>
-                </a:solidFill>
-                <a:latin typeface="Play"/>
-                <a:ea typeface="Play"/>
-                <a:cs typeface="Play"/>
-              </a:rPr>
-              <a:t>• Вёрстка выполняется по правилам дизайна</a:t>
-            </a:r>
-          </a:p>
-          <a:p>
-            <a:pPr algn="l">
-              <a:spcAft>
-                <a:spcPts val="300"/>
-              </a:spcAft>
-              <a:defRPr sz="1600">
-                <a:solidFill>
-                  <a:srgbClr val="FFFFFF"/>
-                </a:solidFill>
-                <a:latin typeface="Play"/>
-                <a:ea typeface="Play"/>
-                <a:cs typeface="Play"/>
-              </a:defRPr>
-            </a:pPr>
-            <a:r>
-              <a:rPr sz="1600">
-                <a:solidFill>
-                  <a:srgbClr val="FFFFFF"/>
-                </a:solidFill>
-                <a:latin typeface="Play"/>
-                <a:ea typeface="Play"/>
-                <a:cs typeface="Play"/>
-              </a:rPr>
-              <a:t>• Проводится аудит качества до публикации</a:t>
+              <a:t>• 6 дней ожидания</a:t>
             </a:r>
           </a:p>
         </p:txBody>
       </p:sp>
-      <p:sp>
-        <p:nvSpPr>
-          <p:cNvPr id="4" name="Pentagon 3"/>
-          <p:cNvSpPr/>
+      <p:graphicFrame>
+        <p:nvGraphicFramePr>
+          <p:cNvPr id="4" name="Table 3"/>
+          <p:cNvGraphicFramePr>
+            <a:graphicFrameLocks noGrp="1"/>
+          </p:cNvGraphicFramePr>
           <p:nvPr/>
-        </p:nvSpPr>
-        <p:spPr>
-          <a:xfrm>
-            <a:off x="429280" y="3627253"/>
-            <a:ext cx="11310884" cy="329298"/>
-          </a:xfrm>
-          <a:prstGeom prst="homePlate">
-            <a:avLst/>
-          </a:prstGeom>
-          <a:solidFill>
-            <a:srgbClr val="0077FF"/>
-          </a:solidFill>
-          <a:ln>
-            <a:noFill/>
-          </a:ln>
-        </p:spPr>
-        <p:style>
-          <a:lnRef idx="1">
-            <a:schemeClr val="accent1"/>
-          </a:lnRef>
-          <a:fillRef idx="3">
-            <a:schemeClr val="accent1"/>
-          </a:fillRef>
-          <a:effectRef idx="2">
-            <a:schemeClr val="accent1"/>
-          </a:effectRef>
-          <a:fontRef idx="minor">
-            <a:schemeClr val="lt1"/>
-          </a:fontRef>
-        </p:style>
-        <p:txBody>
-          <a:bodyPr rtlCol="0" anchor="ctr" wrap="square" lIns="12700" rIns="12700" tIns="12700" bIns="12700"/>
-          <a:lstStyle/>
-          <a:p>
-            <a:pPr algn="ctr">
-              <a:defRPr sz="1400" b="0">
-                <a:solidFill>
-                  <a:srgbClr val="FFFFFF"/>
-                </a:solidFill>
-                <a:latin typeface="Play"/>
-                <a:ea typeface="Play"/>
-                <a:cs typeface="Play"/>
-              </a:defRPr>
-            </a:pPr>
-            <a:r>
-              <a:rPr sz="1400" b="0">
-                <a:solidFill>
-                  <a:srgbClr val="FFFFFF"/>
-                </a:solidFill>
-                <a:latin typeface="Play"/>
-                <a:ea typeface="Play"/>
-                <a:cs typeface="Play"/>
-              </a:rPr>
-              <a:t>Загрузить шаблон</a:t>
-            </a:r>
-          </a:p>
-        </p:txBody>
-      </p:sp>
-      <p:sp>
-        <p:nvSpPr>
-          <p:cNvPr id="5" name="Chevron 4"/>
-          <p:cNvSpPr/>
-          <p:nvPr/>
-        </p:nvSpPr>
-        <p:spPr>
-          <a:xfrm>
-            <a:off x="429280" y="4010158"/>
-            <a:ext cx="11310884" cy="329298"/>
-          </a:xfrm>
-          <a:prstGeom prst="chevron">
-            <a:avLst/>
-          </a:prstGeom>
-          <a:solidFill>
-            <a:srgbClr val="0077FF"/>
-          </a:solidFill>
-          <a:ln>
-            <a:noFill/>
-          </a:ln>
-        </p:spPr>
-        <p:style>
-          <a:lnRef idx="1">
-            <a:schemeClr val="accent1"/>
-          </a:lnRef>
-          <a:fillRef idx="3">
-            <a:schemeClr val="accent1"/>
-          </a:fillRef>
-          <a:effectRef idx="2">
-            <a:schemeClr val="accent1"/>
-          </a:effectRef>
-          <a:fontRef idx="minor">
-            <a:schemeClr val="lt1"/>
-          </a:fontRef>
-        </p:style>
-        <p:txBody>
-          <a:bodyPr rtlCol="0" anchor="ctr" wrap="square" lIns="12700" rIns="12700" tIns="12700" bIns="12700"/>
-          <a:lstStyle/>
-          <a:p>
-            <a:pPr algn="ctr">
-              <a:defRPr sz="1400" b="0">
-                <a:solidFill>
-                  <a:srgbClr val="FFFFFF"/>
-                </a:solidFill>
-                <a:latin typeface="Play"/>
-                <a:ea typeface="Play"/>
-                <a:cs typeface="Play"/>
-              </a:defRPr>
-            </a:pPr>
-            <a:r>
-              <a:rPr sz="1400" b="0">
-                <a:solidFill>
-                  <a:srgbClr val="FFFFFF"/>
-                </a:solidFill>
-                <a:latin typeface="Play"/>
-                <a:ea typeface="Play"/>
-                <a:cs typeface="Play"/>
-              </a:rPr>
-              <a:t>Разобрать дизайн-систему</a:t>
-            </a:r>
-          </a:p>
-        </p:txBody>
-      </p:sp>
-      <p:sp>
-        <p:nvSpPr>
-          <p:cNvPr id="6" name="Chevron 5"/>
-          <p:cNvSpPr/>
-          <p:nvPr/>
-        </p:nvSpPr>
-        <p:spPr>
-          <a:xfrm>
-            <a:off x="429280" y="4393063"/>
-            <a:ext cx="11310884" cy="329298"/>
-          </a:xfrm>
-          <a:prstGeom prst="chevron">
-            <a:avLst/>
-          </a:prstGeom>
-          <a:solidFill>
-            <a:srgbClr val="0077FF"/>
-          </a:solidFill>
-          <a:ln>
-            <a:noFill/>
-          </a:ln>
-        </p:spPr>
-        <p:style>
-          <a:lnRef idx="1">
-            <a:schemeClr val="accent1"/>
-          </a:lnRef>
-          <a:fillRef idx="3">
-            <a:schemeClr val="accent1"/>
-          </a:fillRef>
-          <a:effectRef idx="2">
-            <a:schemeClr val="accent1"/>
-          </a:effectRef>
-          <a:fontRef idx="minor">
-            <a:schemeClr val="lt1"/>
-          </a:fontRef>
-        </p:style>
-        <p:txBody>
-          <a:bodyPr rtlCol="0" anchor="ctr" wrap="square" lIns="12700" rIns="12700" tIns="12700" bIns="12700"/>
-          <a:lstStyle/>
-          <a:p>
-            <a:pPr algn="ctr">
-              <a:defRPr sz="1400" b="0">
-                <a:solidFill>
-                  <a:srgbClr val="FFFFFF"/>
-                </a:solidFill>
-                <a:latin typeface="Play"/>
-                <a:ea typeface="Play"/>
-                <a:cs typeface="Play"/>
-              </a:defRPr>
-            </a:pPr>
-            <a:r>
-              <a:rPr sz="1400" b="0">
-                <a:solidFill>
-                  <a:srgbClr val="FFFFFF"/>
-                </a:solidFill>
-                <a:latin typeface="Play"/>
-                <a:ea typeface="Play"/>
-                <a:cs typeface="Play"/>
-              </a:rPr>
-              <a:t>Сформировать план колоды</a:t>
-            </a:r>
-          </a:p>
-        </p:txBody>
-      </p:sp>
-      <p:sp>
-        <p:nvSpPr>
-          <p:cNvPr id="7" name="Chevron 6"/>
-          <p:cNvSpPr/>
-          <p:nvPr/>
-        </p:nvSpPr>
-        <p:spPr>
-          <a:xfrm>
-            <a:off x="429280" y="4775968"/>
-            <a:ext cx="11310884" cy="329298"/>
-          </a:xfrm>
-          <a:prstGeom prst="chevron">
-            <a:avLst/>
-          </a:prstGeom>
-          <a:solidFill>
-            <a:srgbClr val="0077FF"/>
-          </a:solidFill>
-          <a:ln>
-            <a:noFill/>
-          </a:ln>
-        </p:spPr>
-        <p:style>
-          <a:lnRef idx="1">
-            <a:schemeClr val="accent1"/>
-          </a:lnRef>
-          <a:fillRef idx="3">
-            <a:schemeClr val="accent1"/>
-          </a:fillRef>
-          <a:effectRef idx="2">
-            <a:schemeClr val="accent1"/>
-          </a:effectRef>
-          <a:fontRef idx="minor">
-            <a:schemeClr val="lt1"/>
-          </a:fontRef>
-        </p:style>
-        <p:txBody>
-          <a:bodyPr rtlCol="0" anchor="ctr" wrap="square" lIns="12700" rIns="12700" tIns="12700" bIns="12700"/>
-          <a:lstStyle/>
-          <a:p>
-            <a:pPr algn="ctr">
-              <a:defRPr sz="1400" b="0">
-                <a:solidFill>
-                  <a:srgbClr val="FFFFFF"/>
-                </a:solidFill>
-                <a:latin typeface="Play"/>
-                <a:ea typeface="Play"/>
-                <a:cs typeface="Play"/>
-              </a:defRPr>
-            </a:pPr>
-            <a:r>
-              <a:rPr sz="1400" b="0">
-                <a:solidFill>
-                  <a:srgbClr val="FFFFFF"/>
-                </a:solidFill>
-                <a:latin typeface="Play"/>
-                <a:ea typeface="Play"/>
-                <a:cs typeface="Play"/>
-              </a:rPr>
-              <a:t>Автоматически вёрстать</a:t>
-            </a:r>
-          </a:p>
-        </p:txBody>
-      </p:sp>
-      <p:sp>
-        <p:nvSpPr>
-          <p:cNvPr id="8" name="Chevron 7"/>
-          <p:cNvSpPr/>
-          <p:nvPr/>
-        </p:nvSpPr>
-        <p:spPr>
-          <a:xfrm>
-            <a:off x="429280" y="5158873"/>
-            <a:ext cx="11310884" cy="329298"/>
-          </a:xfrm>
-          <a:prstGeom prst="chevron">
-            <a:avLst/>
-          </a:prstGeom>
-          <a:solidFill>
-            <a:srgbClr val="0077FF"/>
-          </a:solidFill>
-          <a:ln>
-            <a:noFill/>
-          </a:ln>
-        </p:spPr>
-        <p:style>
-          <a:lnRef idx="1">
-            <a:schemeClr val="accent1"/>
-          </a:lnRef>
-          <a:fillRef idx="3">
-            <a:schemeClr val="accent1"/>
-          </a:fillRef>
-          <a:effectRef idx="2">
-            <a:schemeClr val="accent1"/>
-          </a:effectRef>
-          <a:fontRef idx="minor">
-            <a:schemeClr val="lt1"/>
-          </a:fontRef>
-        </p:style>
-        <p:txBody>
-          <a:bodyPr rtlCol="0" anchor="ctr" wrap="square" lIns="12700" rIns="12700" tIns="12700" bIns="12700"/>
-          <a:lstStyle/>
-          <a:p>
-            <a:pPr algn="ctr">
-              <a:defRPr sz="1400" b="0">
-                <a:solidFill>
-                  <a:srgbClr val="FFFFFF"/>
-                </a:solidFill>
-                <a:latin typeface="Play"/>
-                <a:ea typeface="Play"/>
-                <a:cs typeface="Play"/>
-              </a:defRPr>
-            </a:pPr>
-            <a:r>
-              <a:rPr sz="1400" b="0">
-                <a:solidFill>
-                  <a:srgbClr val="FFFFFF"/>
-                </a:solidFill>
-                <a:latin typeface="Play"/>
-                <a:ea typeface="Play"/>
-                <a:cs typeface="Play"/>
-              </a:rPr>
-              <a:t>Провести аудит качества</a:t>
-            </a:r>
-          </a:p>
-        </p:txBody>
-      </p:sp>
-      <p:sp>
-        <p:nvSpPr>
-          <p:cNvPr id="9" name="Chevron 8"/>
-          <p:cNvSpPr/>
-          <p:nvPr/>
-        </p:nvSpPr>
-        <p:spPr>
-          <a:xfrm>
-            <a:off x="429280" y="5541778"/>
-            <a:ext cx="11310884" cy="329298"/>
-          </a:xfrm>
-          <a:prstGeom prst="chevron">
-            <a:avLst/>
-          </a:prstGeom>
-          <a:solidFill>
-            <a:srgbClr val="0077FF"/>
-          </a:solidFill>
-          <a:ln>
-            <a:noFill/>
-          </a:ln>
-        </p:spPr>
-        <p:style>
-          <a:lnRef idx="1">
-            <a:schemeClr val="accent1"/>
-          </a:lnRef>
-          <a:fillRef idx="3">
-            <a:schemeClr val="accent1"/>
-          </a:fillRef>
-          <a:effectRef idx="2">
-            <a:schemeClr val="accent1"/>
-          </a:effectRef>
-          <a:fontRef idx="minor">
-            <a:schemeClr val="lt1"/>
-          </a:fontRef>
-        </p:style>
-        <p:txBody>
-          <a:bodyPr rtlCol="0" anchor="ctr" wrap="square" lIns="12700" rIns="12700" tIns="12700" bIns="12700"/>
-          <a:lstStyle/>
-          <a:p>
-            <a:pPr algn="ctr">
-              <a:defRPr sz="1400" b="0">
-                <a:solidFill>
-                  <a:srgbClr val="FFFFFF"/>
-                </a:solidFill>
-                <a:latin typeface="Play"/>
-                <a:ea typeface="Play"/>
-                <a:cs typeface="Play"/>
-              </a:defRPr>
-            </a:pPr>
-            <a:r>
-              <a:rPr sz="1400" b="0">
-                <a:solidFill>
-                  <a:srgbClr val="FFFFFF"/>
-                </a:solidFill>
-                <a:latin typeface="Play"/>
-                <a:ea typeface="Play"/>
-                <a:cs typeface="Play"/>
-              </a:rPr>
-              <a:t>Экспортировать pptx/pdf/html</a:t>
-            </a:r>
-          </a:p>
-        </p:txBody>
-      </p:sp>
+        </p:nvGraphicFramePr>
+        <p:xfrm>
+          <a:off x="429280" y="2964715"/>
+          <a:ext cx="11310884" cy="2933164"/>
+        </p:xfrm>
+        <a:graphic>
+          <a:graphicData uri="http://schemas.openxmlformats.org/drawingml/2006/table">
+            <a:tbl>
+              <a:tblPr firstRow="1" bandRow="1">
+                <a:tableStyleId>{5C22544A-7EE6-4342-B048-85BDC9FD1C3A}</a:tableStyleId>
+              </a:tblPr>
+              <a:tblGrid>
+                <a:gridCol w="5655442"/>
+                <a:gridCol w="5655442"/>
+              </a:tblGrid>
+              <a:tr h="733291">
+                <a:tc>
+                  <a:txBody>
+                    <a:bodyPr/>
+                    <a:lstStyle/>
+                    <a:p>
+                      <a:pPr>
+                        <a:defRPr sz="1300" b="1">
+                          <a:solidFill>
+                            <a:srgbClr val="FFFFFF"/>
+                          </a:solidFill>
+                          <a:latin typeface="Play"/>
+                          <a:ea typeface="Play"/>
+                          <a:cs typeface="Play"/>
+                        </a:defRPr>
+                      </a:pPr>
+                      <a:r>
+                        <a:t>Показатель</a:t>
+                      </a:r>
+                    </a:p>
+                  </a:txBody>
+                  <a:tcPr>
+                    <a:solidFill>
+                      <a:srgbClr val="0077FF"/>
+                    </a:solidFill>
+                  </a:tcPr>
+                </a:tc>
+                <a:tc>
+                  <a:txBody>
+                    <a:bodyPr/>
+                    <a:lstStyle/>
+                    <a:p>
+                      <a:pPr>
+                        <a:defRPr sz="1300" b="1">
+                          <a:solidFill>
+                            <a:srgbClr val="FFFFFF"/>
+                          </a:solidFill>
+                          <a:latin typeface="Play"/>
+                          <a:ea typeface="Play"/>
+                          <a:cs typeface="Play"/>
+                        </a:defRPr>
+                      </a:pPr>
+                      <a:r>
+                        <a:t>Значение</a:t>
+                      </a:r>
+                    </a:p>
+                  </a:txBody>
+                  <a:tcPr>
+                    <a:solidFill>
+                      <a:srgbClr val="0077FF"/>
+                    </a:solidFill>
+                  </a:tcPr>
+                </a:tc>
+              </a:tr>
+              <a:tr h="733291">
+                <a:tc>
+                  <a:txBody>
+                    <a:bodyPr/>
+                    <a:lstStyle/>
+                    <a:p>
+                      <a:pPr>
+                        <a:defRPr sz="1300" b="0">
+                          <a:solidFill>
+                            <a:srgbClr val="FFFFFF"/>
+                          </a:solidFill>
+                          <a:latin typeface="Play"/>
+                          <a:ea typeface="Play"/>
+                          <a:cs typeface="Play"/>
+                        </a:defRPr>
+                      </a:pPr>
+                      <a:r>
+                        <a:t>Слайдов</a:t>
+                      </a:r>
+                    </a:p>
+                  </a:txBody>
+                  <a:tcPr>
+                    <a:solidFill>
+                      <a:srgbClr val="111111"/>
+                    </a:solidFill>
+                  </a:tcPr>
+                </a:tc>
+                <a:tc>
+                  <a:txBody>
+                    <a:bodyPr/>
+                    <a:lstStyle/>
+                    <a:p>
+                      <a:pPr>
+                        <a:defRPr sz="1300" b="0">
+                          <a:solidFill>
+                            <a:srgbClr val="FFFFFF"/>
+                          </a:solidFill>
+                          <a:latin typeface="Play"/>
+                          <a:ea typeface="Play"/>
+                          <a:cs typeface="Play"/>
+                        </a:defRPr>
+                      </a:pPr>
+                      <a:r>
+                        <a:t>12</a:t>
+                      </a:r>
+                    </a:p>
+                  </a:txBody>
+                  <a:tcPr>
+                    <a:solidFill>
+                      <a:srgbClr val="111111"/>
+                    </a:solidFill>
+                  </a:tcPr>
+                </a:tc>
+              </a:tr>
+              <a:tr h="733291">
+                <a:tc>
+                  <a:txBody>
+                    <a:bodyPr/>
+                    <a:lstStyle/>
+                    <a:p>
+                      <a:pPr>
+                        <a:defRPr sz="1300" b="0">
+                          <a:solidFill>
+                            <a:srgbClr val="FFFFFF"/>
+                          </a:solidFill>
+                          <a:latin typeface="Play"/>
+                          <a:ea typeface="Play"/>
+                          <a:cs typeface="Play"/>
+                        </a:defRPr>
+                      </a:pPr>
+                      <a:r>
+                        <a:t>Правки (мин)</a:t>
+                      </a:r>
+                    </a:p>
+                  </a:txBody>
+                  <a:tcPr>
+                    <a:solidFill>
+                      <a:srgbClr val="111111"/>
+                    </a:solidFill>
+                  </a:tcPr>
+                </a:tc>
+                <a:tc>
+                  <a:txBody>
+                    <a:bodyPr/>
+                    <a:lstStyle/>
+                    <a:p>
+                      <a:pPr>
+                        <a:defRPr sz="1300" b="0">
+                          <a:solidFill>
+                            <a:srgbClr val="FFFFFF"/>
+                          </a:solidFill>
+                          <a:latin typeface="Play"/>
+                          <a:ea typeface="Play"/>
+                          <a:cs typeface="Play"/>
+                        </a:defRPr>
+                      </a:pPr>
+                      <a:r>
+                        <a:t>74</a:t>
+                      </a:r>
+                    </a:p>
+                  </a:txBody>
+                  <a:tcPr>
+                    <a:solidFill>
+                      <a:srgbClr val="111111"/>
+                    </a:solidFill>
+                  </a:tcPr>
+                </a:tc>
+              </a:tr>
+              <a:tr h="733291">
+                <a:tc>
+                  <a:txBody>
+                    <a:bodyPr/>
+                    <a:lstStyle/>
+                    <a:p>
+                      <a:pPr>
+                        <a:defRPr sz="1300" b="0">
+                          <a:solidFill>
+                            <a:srgbClr val="FFFFFF"/>
+                          </a:solidFill>
+                          <a:latin typeface="Play"/>
+                          <a:ea typeface="Play"/>
+                          <a:cs typeface="Play"/>
+                        </a:defRPr>
+                      </a:pPr>
+                      <a:r>
+                        <a:t>Ожидание (дней)</a:t>
+                      </a:r>
+                    </a:p>
+                  </a:txBody>
+                  <a:tcPr>
+                    <a:solidFill>
+                      <a:srgbClr val="111111"/>
+                    </a:solidFill>
+                  </a:tcPr>
+                </a:tc>
+                <a:tc>
+                  <a:txBody>
+                    <a:bodyPr/>
+                    <a:lstStyle/>
+                    <a:p>
+                      <a:pPr>
+                        <a:defRPr sz="1300" b="0">
+                          <a:solidFill>
+                            <a:srgbClr val="FFFFFF"/>
+                          </a:solidFill>
+                          <a:latin typeface="Play"/>
+                          <a:ea typeface="Play"/>
+                          <a:cs typeface="Play"/>
+                        </a:defRPr>
+                      </a:pPr>
+                      <a:r>
+                        <a:t>6</a:t>
+                      </a:r>
+                    </a:p>
+                  </a:txBody>
+                  <a:tcPr>
+                    <a:solidFill>
+                      <a:srgbClr val="111111"/>
+                    </a:solidFill>
+                  </a:tcPr>
+                </a:tc>
+              </a:tr>
+            </a:tbl>
+          </a:graphicData>
+        </a:graphic>
+      </p:graphicFrame>
     </p:spTree>
   </p:cSld>
   <p:clrMapOvr>
@@ -10701,7 +10598,7 @@
         <p:spPr>
           <a:xfrm>
             <a:off x="427817" y="424715"/>
-            <a:ext cx="7827264" cy="822960"/>
+            <a:ext cx="7827264" cy="1183640"/>
           </a:xfrm>
           <a:prstGeom prst="rect">
             <a:avLst/>
@@ -10736,38 +10633,52 @@
                 <a:ea typeface="Play"/>
                 <a:cs typeface="Play"/>
               </a:rPr>
-              <a:t>Ожидаемый эффект</a:t>
+              <a:t>Сервис автоматической вёрстки: как это работает</a:t>
             </a:r>
           </a:p>
         </p:txBody>
       </p:sp>
       <p:sp>
         <p:nvSpPr>
-          <p:cNvPr id="682" name="body"/>
-          <p:cNvSpPr txBox="1"/>
+          <p:cNvPr id="682" name="Pentagon 681"/>
+          <p:cNvSpPr/>
           <p:nvPr/>
         </p:nvSpPr>
         <p:spPr>
           <a:xfrm>
-            <a:off x="427817" y="1783080"/>
-            <a:ext cx="11312347" cy="1645920"/>
+            <a:off x="427817" y="1895629"/>
+            <a:ext cx="11312347" cy="580427"/>
           </a:xfrm>
-          <a:prstGeom prst="rect">
+          <a:prstGeom prst="homePlate">
             <a:avLst/>
           </a:prstGeom>
-          <a:noFill/>
+          <a:solidFill>
+            <a:srgbClr val="0077FF"/>
+          </a:solidFill>
+          <a:ln>
+            <a:noFill/>
+          </a:ln>
         </p:spPr>
+        <p:style>
+          <a:lnRef idx="1">
+            <a:schemeClr val="accent1"/>
+          </a:lnRef>
+          <a:fillRef idx="3">
+            <a:schemeClr val="accent1"/>
+          </a:fillRef>
+          <a:effectRef idx="2">
+            <a:schemeClr val="accent1"/>
+          </a:effectRef>
+          <a:fontRef idx="minor">
+            <a:schemeClr val="lt1"/>
+          </a:fontRef>
+        </p:style>
         <p:txBody>
-          <a:bodyPr wrap="square" lIns="76200" rIns="76200" tIns="50800" bIns="50800">
-            <a:spAutoFit/>
-          </a:bodyPr>
+          <a:bodyPr rtlCol="0" anchor="ctr" wrap="square" lIns="12700" rIns="12700" tIns="12700" bIns="12700"/>
           <a:lstStyle/>
           <a:p>
-            <a:pPr algn="l">
-              <a:spcAft>
-                <a:spcPts val="300"/>
-              </a:spcAft>
-              <a:defRPr sz="1600">
+            <a:pPr algn="ctr">
+              <a:defRPr sz="1400" b="0">
                 <a:solidFill>
                   <a:srgbClr val="FFFFFF"/>
                 </a:solidFill>
@@ -10777,7 +10688,7 @@
               </a:defRPr>
             </a:pPr>
             <a:r>
-              <a:rPr sz="1600">
+              <a:rPr sz="1400" b="0">
                 <a:solidFill>
                   <a:srgbClr val="FFFFFF"/>
                 </a:solidFill>
@@ -10785,15 +10696,52 @@
                 <a:ea typeface="Play"/>
                 <a:cs typeface="Play"/>
               </a:rPr>
-              <a:t>• Время сборки колоды сократилось с 186 до 4 минут</a:t>
+              <a:t>Ввод</a:t>
             </a:r>
           </a:p>
+        </p:txBody>
+      </p:sp>
+      <p:sp>
+        <p:nvSpPr>
+          <p:cNvPr id="683" name="Chevron 682"/>
+          <p:cNvSpPr/>
+          <p:nvPr/>
+        </p:nvSpPr>
+        <p:spPr>
+          <a:xfrm>
+            <a:off x="427817" y="2570544"/>
+            <a:ext cx="11312347" cy="580427"/>
+          </a:xfrm>
+          <a:prstGeom prst="chevron">
+            <a:avLst/>
+          </a:prstGeom>
+          <a:solidFill>
+            <a:srgbClr val="0077FF"/>
+          </a:solidFill>
+          <a:ln>
+            <a:noFill/>
+          </a:ln>
+        </p:spPr>
+        <p:style>
+          <a:lnRef idx="1">
+            <a:schemeClr val="accent1"/>
+          </a:lnRef>
+          <a:fillRef idx="3">
+            <a:schemeClr val="accent1"/>
+          </a:fillRef>
+          <a:effectRef idx="2">
+            <a:schemeClr val="accent1"/>
+          </a:effectRef>
+          <a:fontRef idx="minor">
+            <a:schemeClr val="lt1"/>
+          </a:fontRef>
+        </p:style>
+        <p:txBody>
+          <a:bodyPr rtlCol="0" anchor="ctr" wrap="square" lIns="12700" rIns="12700" tIns="12700" bIns="12700"/>
+          <a:lstStyle/>
           <a:p>
-            <a:pPr algn="l">
-              <a:spcAft>
-                <a:spcPts val="300"/>
-              </a:spcAft>
-              <a:defRPr sz="1600">
+            <a:pPr algn="ctr">
+              <a:defRPr sz="1400" b="0">
                 <a:solidFill>
                   <a:srgbClr val="FFFFFF"/>
                 </a:solidFill>
@@ -10803,7 +10751,7 @@
               </a:defRPr>
             </a:pPr>
             <a:r>
-              <a:rPr sz="1600">
+              <a:rPr sz="1400" b="0">
                 <a:solidFill>
                   <a:srgbClr val="FFFFFF"/>
                 </a:solidFill>
@@ -10811,15 +10759,52 @@
                 <a:ea typeface="Play"/>
                 <a:cs typeface="Play"/>
               </a:rPr>
-              <a:t>• Первый готовый вариант появился за 1 день вместо 6</a:t>
+              <a:t>Парсинг</a:t>
             </a:r>
           </a:p>
+        </p:txBody>
+      </p:sp>
+      <p:sp>
+        <p:nvSpPr>
+          <p:cNvPr id="684" name="Chevron 683"/>
+          <p:cNvSpPr/>
+          <p:nvPr/>
+        </p:nvSpPr>
+        <p:spPr>
+          <a:xfrm>
+            <a:off x="427817" y="3245460"/>
+            <a:ext cx="11312347" cy="580427"/>
+          </a:xfrm>
+          <a:prstGeom prst="chevron">
+            <a:avLst/>
+          </a:prstGeom>
+          <a:solidFill>
+            <a:srgbClr val="0077FF"/>
+          </a:solidFill>
+          <a:ln>
+            <a:noFill/>
+          </a:ln>
+        </p:spPr>
+        <p:style>
+          <a:lnRef idx="1">
+            <a:schemeClr val="accent1"/>
+          </a:lnRef>
+          <a:fillRef idx="3">
+            <a:schemeClr val="accent1"/>
+          </a:fillRef>
+          <a:effectRef idx="2">
+            <a:schemeClr val="accent1"/>
+          </a:effectRef>
+          <a:fontRef idx="minor">
+            <a:schemeClr val="lt1"/>
+          </a:fontRef>
+        </p:style>
+        <p:txBody>
+          <a:bodyPr rtlCol="0" anchor="ctr" wrap="square" lIns="12700" rIns="12700" tIns="12700" bIns="12700"/>
+          <a:lstStyle/>
           <a:p>
-            <a:pPr algn="l">
-              <a:spcAft>
-                <a:spcPts val="300"/>
-              </a:spcAft>
-              <a:defRPr sz="1600">
+            <a:pPr algn="ctr">
+              <a:defRPr sz="1400" b="0">
                 <a:solidFill>
                   <a:srgbClr val="FFFFFF"/>
                 </a:solidFill>
@@ -10829,7 +10814,7 @@
               </a:defRPr>
             </a:pPr>
             <a:r>
-              <a:rPr sz="1600">
+              <a:rPr sz="1400" b="0">
                 <a:solidFill>
                   <a:srgbClr val="FFFFFF"/>
                 </a:solidFill>
@@ -10837,15 +10822,52 @@
                 <a:ea typeface="Play"/>
                 <a:cs typeface="Play"/>
               </a:rPr>
-              <a:t>• Нарушения стиля уменьшились до 2 из 68 колод</a:t>
+              <a:t>Дизайн-система</a:t>
             </a:r>
           </a:p>
+        </p:txBody>
+      </p:sp>
+      <p:sp>
+        <p:nvSpPr>
+          <p:cNvPr id="685" name="Chevron 684"/>
+          <p:cNvSpPr/>
+          <p:nvPr/>
+        </p:nvSpPr>
+        <p:spPr>
+          <a:xfrm>
+            <a:off x="427817" y="3920376"/>
+            <a:ext cx="11312347" cy="580427"/>
+          </a:xfrm>
+          <a:prstGeom prst="chevron">
+            <a:avLst/>
+          </a:prstGeom>
+          <a:solidFill>
+            <a:srgbClr val="0077FF"/>
+          </a:solidFill>
+          <a:ln>
+            <a:noFill/>
+          </a:ln>
+        </p:spPr>
+        <p:style>
+          <a:lnRef idx="1">
+            <a:schemeClr val="accent1"/>
+          </a:lnRef>
+          <a:fillRef idx="3">
+            <a:schemeClr val="accent1"/>
+          </a:fillRef>
+          <a:effectRef idx="2">
+            <a:schemeClr val="accent1"/>
+          </a:effectRef>
+          <a:fontRef idx="minor">
+            <a:schemeClr val="lt1"/>
+          </a:fontRef>
+        </p:style>
+        <p:txBody>
+          <a:bodyPr rtlCol="0" anchor="ctr" wrap="square" lIns="12700" rIns="12700" tIns="12700" bIns="12700"/>
+          <a:lstStyle/>
           <a:p>
-            <a:pPr algn="l">
-              <a:spcAft>
-                <a:spcPts val="300"/>
-              </a:spcAft>
-              <a:defRPr sz="1600">
+            <a:pPr algn="ctr">
+              <a:defRPr sz="1400" b="0">
                 <a:solidFill>
                   <a:srgbClr val="FFFFFF"/>
                 </a:solidFill>
@@ -10855,7 +10877,7 @@
               </a:defRPr>
             </a:pPr>
             <a:r>
-              <a:rPr sz="1600">
+              <a:rPr sz="1400" b="0">
                 <a:solidFill>
                   <a:srgbClr val="FFFFFF"/>
                 </a:solidFill>
@@ -10863,438 +10885,137 @@
                 <a:ea typeface="Play"/>
                 <a:cs typeface="Play"/>
               </a:rPr>
-              <a:t>• Дизайнеры закрыли 38 запросов вместо 11 в неделю</a:t>
+              <a:t>Вёрстка</a:t>
             </a:r>
           </a:p>
         </p:txBody>
       </p:sp>
-      <p:graphicFrame>
-        <p:nvGraphicFramePr>
-          <p:cNvPr id="683" name="Table 682"/>
-          <p:cNvGraphicFramePr>
-            <a:graphicFrameLocks noGrp="1"/>
-          </p:cNvGraphicFramePr>
+      <p:sp>
+        <p:nvSpPr>
+          <p:cNvPr id="686" name="Chevron 685"/>
+          <p:cNvSpPr/>
           <p:nvPr/>
-        </p:nvGraphicFramePr>
-        <p:xfrm>
-          <a:off x="427817" y="3600450"/>
-          <a:ext cx="11312347" cy="2297430"/>
-        </p:xfrm>
-        <a:graphic>
-          <a:graphicData uri="http://schemas.openxmlformats.org/drawingml/2006/table">
-            <a:tbl>
-              <a:tblPr firstRow="1" bandRow="1">
-                <a:tableStyleId>{5C22544A-7EE6-4342-B048-85BDC9FD1C3A}</a:tableStyleId>
-              </a:tblPr>
-              <a:tblGrid>
-                <a:gridCol w="3770782"/>
-                <a:gridCol w="3770782"/>
-                <a:gridCol w="3770783"/>
-              </a:tblGrid>
-              <a:tr h="459486">
-                <a:tc>
-                  <a:txBody>
-                    <a:bodyPr/>
-                    <a:lstStyle/>
-                    <a:p>
-                      <a:pPr>
-                        <a:defRPr sz="1300" b="1">
-                          <a:solidFill>
-                            <a:srgbClr val="FFFFFF"/>
-                          </a:solidFill>
-                          <a:latin typeface="Play"/>
-                          <a:ea typeface="Play"/>
-                          <a:cs typeface="Play"/>
-                        </a:defRPr>
-                      </a:pPr>
-                      <a:r>
-                        <a:t>Метрика</a:t>
-                      </a:r>
-                    </a:p>
-                  </a:txBody>
-                  <a:tcPr>
-                    <a:solidFill>
-                      <a:srgbClr val="0077FF"/>
-                    </a:solidFill>
-                  </a:tcPr>
-                </a:tc>
-                <a:tc>
-                  <a:txBody>
-                    <a:bodyPr/>
-                    <a:lstStyle/>
-                    <a:p>
-                      <a:pPr>
-                        <a:defRPr sz="1300" b="1">
-                          <a:solidFill>
-                            <a:srgbClr val="FFFFFF"/>
-                          </a:solidFill>
-                          <a:latin typeface="Play"/>
-                          <a:ea typeface="Play"/>
-                          <a:cs typeface="Play"/>
-                        </a:defRPr>
-                      </a:pPr>
-                      <a:r>
-                        <a:t>До</a:t>
-                      </a:r>
-                    </a:p>
-                  </a:txBody>
-                  <a:tcPr>
-                    <a:solidFill>
-                      <a:srgbClr val="0077FF"/>
-                    </a:solidFill>
-                  </a:tcPr>
-                </a:tc>
-                <a:tc>
-                  <a:txBody>
-                    <a:bodyPr/>
-                    <a:lstStyle/>
-                    <a:p>
-                      <a:pPr>
-                        <a:defRPr sz="1300" b="1">
-                          <a:solidFill>
-                            <a:srgbClr val="FFFFFF"/>
-                          </a:solidFill>
-                          <a:latin typeface="Play"/>
-                          <a:ea typeface="Play"/>
-                          <a:cs typeface="Play"/>
-                        </a:defRPr>
-                      </a:pPr>
-                      <a:r>
-                        <a:t>После</a:t>
-                      </a:r>
-                    </a:p>
-                  </a:txBody>
-                  <a:tcPr>
-                    <a:solidFill>
-                      <a:srgbClr val="0077FF"/>
-                    </a:solidFill>
-                  </a:tcPr>
-                </a:tc>
-              </a:tr>
-              <a:tr h="459486">
-                <a:tc>
-                  <a:txBody>
-                    <a:bodyPr/>
-                    <a:lstStyle/>
-                    <a:p>
-                      <a:pPr>
-                        <a:defRPr sz="1300" b="0">
-                          <a:solidFill>
-                            <a:srgbClr val="FFFFFF"/>
-                          </a:solidFill>
-                          <a:latin typeface="Play"/>
-                          <a:ea typeface="Play"/>
-                          <a:cs typeface="Play"/>
-                        </a:defRPr>
-                      </a:pPr>
-                      <a:r>
-                        <a:t>Время сборки</a:t>
-                      </a:r>
-                    </a:p>
-                  </a:txBody>
-                  <a:tcPr>
-                    <a:solidFill>
-                      <a:srgbClr val="111111"/>
-                    </a:solidFill>
-                  </a:tcPr>
-                </a:tc>
-                <a:tc>
-                  <a:txBody>
-                    <a:bodyPr/>
-                    <a:lstStyle/>
-                    <a:p>
-                      <a:pPr>
-                        <a:defRPr sz="1300" b="0">
-                          <a:solidFill>
-                            <a:srgbClr val="FFFFFF"/>
-                          </a:solidFill>
-                          <a:latin typeface="Play"/>
-                          <a:ea typeface="Play"/>
-                          <a:cs typeface="Play"/>
-                        </a:defRPr>
-                      </a:pPr>
-                      <a:r>
-                        <a:t>186</a:t>
-                      </a:r>
-                    </a:p>
-                  </a:txBody>
-                  <a:tcPr>
-                    <a:solidFill>
-                      <a:srgbClr val="111111"/>
-                    </a:solidFill>
-                  </a:tcPr>
-                </a:tc>
-                <a:tc>
-                  <a:txBody>
-                    <a:bodyPr/>
-                    <a:lstStyle/>
-                    <a:p>
-                      <a:pPr>
-                        <a:defRPr sz="1300" b="0">
-                          <a:solidFill>
-                            <a:srgbClr val="FFFFFF"/>
-                          </a:solidFill>
-                          <a:latin typeface="Play"/>
-                          <a:ea typeface="Play"/>
-                          <a:cs typeface="Play"/>
-                        </a:defRPr>
-                      </a:pPr>
-                      <a:r>
-                        <a:t>4</a:t>
-                      </a:r>
-                    </a:p>
-                  </a:txBody>
-                  <a:tcPr>
-                    <a:solidFill>
-                      <a:srgbClr val="111111"/>
-                    </a:solidFill>
-                  </a:tcPr>
-                </a:tc>
-              </a:tr>
-              <a:tr h="459486">
-                <a:tc>
-                  <a:txBody>
-                    <a:bodyPr/>
-                    <a:lstStyle/>
-                    <a:p>
-                      <a:pPr>
-                        <a:defRPr sz="1300" b="0">
-                          <a:solidFill>
-                            <a:srgbClr val="FFFFFF"/>
-                          </a:solidFill>
-                          <a:latin typeface="Play"/>
-                          <a:ea typeface="Play"/>
-                          <a:cs typeface="Play"/>
-                        </a:defRPr>
-                      </a:pPr>
-                      <a:r>
-                        <a:t>Первый вариант</a:t>
-                      </a:r>
-                    </a:p>
-                  </a:txBody>
-                  <a:tcPr>
-                    <a:solidFill>
-                      <a:srgbClr val="111111"/>
-                    </a:solidFill>
-                  </a:tcPr>
-                </a:tc>
-                <a:tc>
-                  <a:txBody>
-                    <a:bodyPr/>
-                    <a:lstStyle/>
-                    <a:p>
-                      <a:pPr>
-                        <a:defRPr sz="1300" b="0">
-                          <a:solidFill>
-                            <a:srgbClr val="FFFFFF"/>
-                          </a:solidFill>
-                          <a:latin typeface="Play"/>
-                          <a:ea typeface="Play"/>
-                          <a:cs typeface="Play"/>
-                        </a:defRPr>
-                      </a:pPr>
-                      <a:r>
-                        <a:t>6</a:t>
-                      </a:r>
-                    </a:p>
-                  </a:txBody>
-                  <a:tcPr>
-                    <a:solidFill>
-                      <a:srgbClr val="111111"/>
-                    </a:solidFill>
-                  </a:tcPr>
-                </a:tc>
-                <a:tc>
-                  <a:txBody>
-                    <a:bodyPr/>
-                    <a:lstStyle/>
-                    <a:p>
-                      <a:pPr>
-                        <a:defRPr sz="1300" b="0">
-                          <a:solidFill>
-                            <a:srgbClr val="FFFFFF"/>
-                          </a:solidFill>
-                          <a:latin typeface="Play"/>
-                          <a:ea typeface="Play"/>
-                          <a:cs typeface="Play"/>
-                        </a:defRPr>
-                      </a:pPr>
-                      <a:r>
-                        <a:t>1</a:t>
-                      </a:r>
-                    </a:p>
-                  </a:txBody>
-                  <a:tcPr>
-                    <a:solidFill>
-                      <a:srgbClr val="111111"/>
-                    </a:solidFill>
-                  </a:tcPr>
-                </a:tc>
-              </a:tr>
-              <a:tr h="459486">
-                <a:tc>
-                  <a:txBody>
-                    <a:bodyPr/>
-                    <a:lstStyle/>
-                    <a:p>
-                      <a:pPr>
-                        <a:defRPr sz="1300" b="0">
-                          <a:solidFill>
-                            <a:srgbClr val="FFFFFF"/>
-                          </a:solidFill>
-                          <a:latin typeface="Play"/>
-                          <a:ea typeface="Play"/>
-                          <a:cs typeface="Play"/>
-                        </a:defRPr>
-                      </a:pPr>
-                      <a:r>
-                        <a:t>Нарушения стиля</a:t>
-                      </a:r>
-                    </a:p>
-                  </a:txBody>
-                  <a:tcPr>
-                    <a:solidFill>
-                      <a:srgbClr val="111111"/>
-                    </a:solidFill>
-                  </a:tcPr>
-                </a:tc>
-                <a:tc>
-                  <a:txBody>
-                    <a:bodyPr/>
-                    <a:lstStyle/>
-                    <a:p>
-                      <a:pPr>
-                        <a:defRPr sz="1300" b="0">
-                          <a:solidFill>
-                            <a:srgbClr val="FFFFFF"/>
-                          </a:solidFill>
-                          <a:latin typeface="Play"/>
-                          <a:ea typeface="Play"/>
-                          <a:cs typeface="Play"/>
-                        </a:defRPr>
-                      </a:pPr>
-                      <a:r>
-                        <a:t>19/42</a:t>
-                      </a:r>
-                    </a:p>
-                  </a:txBody>
-                  <a:tcPr>
-                    <a:solidFill>
-                      <a:srgbClr val="111111"/>
-                    </a:solidFill>
-                  </a:tcPr>
-                </a:tc>
-                <a:tc>
-                  <a:txBody>
-                    <a:bodyPr/>
-                    <a:lstStyle/>
-                    <a:p>
-                      <a:pPr>
-                        <a:defRPr sz="1300" b="0">
-                          <a:solidFill>
-                            <a:srgbClr val="FFFFFF"/>
-                          </a:solidFill>
-                          <a:latin typeface="Play"/>
-                          <a:ea typeface="Play"/>
-                          <a:cs typeface="Play"/>
-                        </a:defRPr>
-                      </a:pPr>
-                      <a:r>
-                        <a:t>2/68</a:t>
-                      </a:r>
-                    </a:p>
-                  </a:txBody>
-                  <a:tcPr>
-                    <a:solidFill>
-                      <a:srgbClr val="111111"/>
-                    </a:solidFill>
-                  </a:tcPr>
-                </a:tc>
-              </a:tr>
-              <a:tr h="459486">
-                <a:tc>
-                  <a:txBody>
-                    <a:bodyPr/>
-                    <a:lstStyle/>
-                    <a:p>
-                      <a:pPr>
-                        <a:defRPr sz="1300" b="0">
-                          <a:solidFill>
-                            <a:srgbClr val="FFFFFF"/>
-                          </a:solidFill>
-                          <a:latin typeface="Play"/>
-                          <a:ea typeface="Play"/>
-                          <a:cs typeface="Play"/>
-                        </a:defRPr>
-                      </a:pPr>
-                      <a:r>
-                        <a:t>Загрузка дизайнеров</a:t>
-                      </a:r>
-                    </a:p>
-                  </a:txBody>
-                  <a:tcPr>
-                    <a:solidFill>
-                      <a:srgbClr val="111111"/>
-                    </a:solidFill>
-                  </a:tcPr>
-                </a:tc>
-                <a:tc>
-                  <a:txBody>
-                    <a:bodyPr/>
-                    <a:lstStyle/>
-                    <a:p>
-                      <a:pPr>
-                        <a:defRPr sz="1300" b="0">
-                          <a:solidFill>
-                            <a:srgbClr val="FFFFFF"/>
-                          </a:solidFill>
-                          <a:latin typeface="Play"/>
-                          <a:ea typeface="Play"/>
-                          <a:cs typeface="Play"/>
-                        </a:defRPr>
-                      </a:pPr>
-                      <a:r>
-                        <a:t>11/нед</a:t>
-                      </a:r>
-                    </a:p>
-                  </a:txBody>
-                  <a:tcPr>
-                    <a:solidFill>
-                      <a:srgbClr val="111111"/>
-                    </a:solidFill>
-                  </a:tcPr>
-                </a:tc>
-                <a:tc>
-                  <a:txBody>
-                    <a:bodyPr/>
-                    <a:lstStyle/>
-                    <a:p>
-                      <a:pPr>
-                        <a:defRPr sz="1300" b="0">
-                          <a:solidFill>
-                            <a:srgbClr val="FFFFFF"/>
-                          </a:solidFill>
-                          <a:latin typeface="Play"/>
-                          <a:ea typeface="Play"/>
-                          <a:cs typeface="Play"/>
-                        </a:defRPr>
-                      </a:pPr>
-                      <a:r>
-                        <a:t>38/нед</a:t>
-                      </a:r>
-                    </a:p>
-                  </a:txBody>
-                  <a:tcPr>
-                    <a:solidFill>
-                      <a:srgbClr val="111111"/>
-                    </a:solidFill>
-                  </a:tcPr>
-                </a:tc>
-              </a:tr>
-            </a:tbl>
-          </a:graphicData>
-        </a:graphic>
-      </p:graphicFrame>
+        </p:nvSpPr>
+        <p:spPr>
+          <a:xfrm>
+            <a:off x="427817" y="4595291"/>
+            <a:ext cx="11312347" cy="580427"/>
+          </a:xfrm>
+          <a:prstGeom prst="chevron">
+            <a:avLst/>
+          </a:prstGeom>
+          <a:solidFill>
+            <a:srgbClr val="0077FF"/>
+          </a:solidFill>
+          <a:ln>
+            <a:noFill/>
+          </a:ln>
+        </p:spPr>
+        <p:style>
+          <a:lnRef idx="1">
+            <a:schemeClr val="accent1"/>
+          </a:lnRef>
+          <a:fillRef idx="3">
+            <a:schemeClr val="accent1"/>
+          </a:fillRef>
+          <a:effectRef idx="2">
+            <a:schemeClr val="accent1"/>
+          </a:effectRef>
+          <a:fontRef idx="minor">
+            <a:schemeClr val="lt1"/>
+          </a:fontRef>
+        </p:style>
+        <p:txBody>
+          <a:bodyPr rtlCol="0" anchor="ctr" wrap="square" lIns="12700" rIns="12700" tIns="12700" bIns="12700"/>
+          <a:lstStyle/>
+          <a:p>
+            <a:pPr algn="ctr">
+              <a:defRPr sz="1400" b="0">
+                <a:solidFill>
+                  <a:srgbClr val="FFFFFF"/>
+                </a:solidFill>
+                <a:latin typeface="Play"/>
+                <a:ea typeface="Play"/>
+                <a:cs typeface="Play"/>
+              </a:defRPr>
+            </a:pPr>
+            <a:r>
+              <a:rPr sz="1400" b="0">
+                <a:solidFill>
+                  <a:srgbClr val="FFFFFF"/>
+                </a:solidFill>
+                <a:latin typeface="Play"/>
+                <a:ea typeface="Play"/>
+                <a:cs typeface="Play"/>
+              </a:rPr>
+              <a:t>Аудит</a:t>
+            </a:r>
+          </a:p>
+        </p:txBody>
+      </p:sp>
+      <p:sp>
+        <p:nvSpPr>
+          <p:cNvPr id="687" name="Chevron 686"/>
+          <p:cNvSpPr/>
+          <p:nvPr/>
+        </p:nvSpPr>
+        <p:spPr>
+          <a:xfrm>
+            <a:off x="427817" y="5270207"/>
+            <a:ext cx="11312347" cy="580427"/>
+          </a:xfrm>
+          <a:prstGeom prst="chevron">
+            <a:avLst/>
+          </a:prstGeom>
+          <a:solidFill>
+            <a:srgbClr val="0077FF"/>
+          </a:solidFill>
+          <a:ln>
+            <a:noFill/>
+          </a:ln>
+        </p:spPr>
+        <p:style>
+          <a:lnRef idx="1">
+            <a:schemeClr val="accent1"/>
+          </a:lnRef>
+          <a:fillRef idx="3">
+            <a:schemeClr val="accent1"/>
+          </a:fillRef>
+          <a:effectRef idx="2">
+            <a:schemeClr val="accent1"/>
+          </a:effectRef>
+          <a:fontRef idx="minor">
+            <a:schemeClr val="lt1"/>
+          </a:fontRef>
+        </p:style>
+        <p:txBody>
+          <a:bodyPr rtlCol="0" anchor="ctr" wrap="square" lIns="12700" rIns="12700" tIns="12700" bIns="12700"/>
+          <a:lstStyle/>
+          <a:p>
+            <a:pPr algn="ctr">
+              <a:defRPr sz="1400" b="0">
+                <a:solidFill>
+                  <a:srgbClr val="FFFFFF"/>
+                </a:solidFill>
+                <a:latin typeface="Play"/>
+                <a:ea typeface="Play"/>
+                <a:cs typeface="Play"/>
+              </a:defRPr>
+            </a:pPr>
+            <a:r>
+              <a:rPr sz="1400" b="0">
+                <a:solidFill>
+                  <a:srgbClr val="FFFFFF"/>
+                </a:solidFill>
+                <a:latin typeface="Play"/>
+                <a:ea typeface="Play"/>
+                <a:cs typeface="Play"/>
+              </a:rPr>
+              <a:t>Экспорт</a:t>
+            </a:r>
+          </a:p>
+        </p:txBody>
+      </p:sp>
     </p:spTree>
   </p:cSld>
   <p:clrMapOvr>
@@ -11376,7 +11097,7 @@
         <p:spPr>
           <a:xfrm>
             <a:off x="429280" y="424715"/>
-            <a:ext cx="7827264" cy="822960"/>
+            <a:ext cx="7827264" cy="1183640"/>
           </a:xfrm>
           <a:prstGeom prst="rect">
             <a:avLst/>
@@ -11411,21 +11132,450 @@
                 <a:ea typeface="Play"/>
                 <a:cs typeface="Play"/>
               </a:rPr>
-              <a:t>Ресурсы и сроки</a:t>
+              <a:t>Сервис принимает шаблон pptx и материалы</a:t>
             </a:r>
           </a:p>
         </p:txBody>
       </p:sp>
+      <p:grpSp>
+        <p:nvGrpSpPr>
+          <p:cNvPr id="2" name="icon:builtin-palette"/>
+          <p:cNvGrpSpPr/>
+          <p:nvPr/>
+        </p:nvGrpSpPr>
+        <p:grpSpPr>
+          <a:xfrm>
+            <a:off x="502146" y="1896962"/>
+            <a:ext cx="437197" cy="461486"/>
+            <a:chOff x="502146" y="1896962"/>
+            <a:chExt cx="437197" cy="461486"/>
+          </a:xfrm>
+        </p:grpSpPr>
+        <p:sp>
+          <p:nvSpPr>
+            <p:cNvPr id="3" name="Freeform 2"/>
+            <p:cNvSpPr/>
+            <p:nvPr/>
+          </p:nvSpPr>
+          <p:spPr>
+            <a:xfrm>
+              <a:off x="502146" y="1896962"/>
+              <a:ext cx="437197" cy="461486"/>
+            </a:xfrm>
+            <a:custGeom>
+              <a:avLst/>
+              <a:gdLst/>
+              <a:ahLst/>
+              <a:cxnLst/>
+              <a:rect l="l" t="t" r="r" b="b"/>
+              <a:pathLst>
+                <a:path w="437197" h="461486">
+                  <a:moveTo>
+                    <a:pt x="218599" y="24289"/>
+                  </a:moveTo>
+                  <a:lnTo>
+                    <a:pt x="175947" y="28491"/>
+                  </a:lnTo>
+                  <a:lnTo>
+                    <a:pt x="134948" y="40927"/>
+                  </a:lnTo>
+                  <a:lnTo>
+                    <a:pt x="97155" y="61135"/>
+                  </a:lnTo>
+                  <a:lnTo>
+                    <a:pt x="64025" y="88314"/>
+                  </a:lnTo>
+                  <a:lnTo>
+                    <a:pt x="36846" y="121444"/>
+                  </a:lnTo>
+                  <a:lnTo>
+                    <a:pt x="16638" y="159237"/>
+                  </a:lnTo>
+                  <a:lnTo>
+                    <a:pt x="4202" y="200236"/>
+                  </a:lnTo>
+                  <a:lnTo>
+                    <a:pt x="0" y="242888"/>
+                  </a:lnTo>
+                  <a:lnTo>
+                    <a:pt x="4202" y="285539"/>
+                  </a:lnTo>
+                  <a:lnTo>
+                    <a:pt x="16638" y="326538"/>
+                  </a:lnTo>
+                  <a:lnTo>
+                    <a:pt x="36846" y="364331"/>
+                  </a:lnTo>
+                  <a:lnTo>
+                    <a:pt x="64025" y="397461"/>
+                  </a:lnTo>
+                  <a:lnTo>
+                    <a:pt x="97155" y="424640"/>
+                  </a:lnTo>
+                  <a:lnTo>
+                    <a:pt x="134948" y="444848"/>
+                  </a:lnTo>
+                  <a:lnTo>
+                    <a:pt x="175947" y="457284"/>
+                  </a:lnTo>
+                  <a:lnTo>
+                    <a:pt x="218599" y="461486"/>
+                  </a:lnTo>
+                  <a:lnTo>
+                    <a:pt x="226322" y="460928"/>
+                  </a:lnTo>
+                  <a:lnTo>
+                    <a:pt x="233415" y="459276"/>
+                  </a:lnTo>
+                  <a:lnTo>
+                    <a:pt x="239827" y="456629"/>
+                  </a:lnTo>
+                  <a:lnTo>
+                    <a:pt x="245535" y="453082"/>
+                  </a:lnTo>
+                  <a:lnTo>
+                    <a:pt x="250465" y="448735"/>
+                  </a:lnTo>
+                  <a:lnTo>
+                    <a:pt x="254619" y="443658"/>
+                  </a:lnTo>
+                  <a:lnTo>
+                    <a:pt x="257922" y="437926"/>
+                  </a:lnTo>
+                  <a:lnTo>
+                    <a:pt x="260327" y="431635"/>
+                  </a:lnTo>
+                  <a:lnTo>
+                    <a:pt x="261808" y="424883"/>
+                  </a:lnTo>
+                  <a:lnTo>
+                    <a:pt x="262318" y="417767"/>
+                  </a:lnTo>
+                  <a:lnTo>
+                    <a:pt x="262173" y="414196"/>
+                  </a:lnTo>
+                  <a:lnTo>
+                    <a:pt x="261760" y="410771"/>
+                  </a:lnTo>
+                  <a:lnTo>
+                    <a:pt x="261080" y="407492"/>
+                  </a:lnTo>
+                  <a:lnTo>
+                    <a:pt x="260132" y="404359"/>
+                  </a:lnTo>
+                  <a:lnTo>
+                    <a:pt x="258966" y="401372"/>
+                  </a:lnTo>
+                  <a:lnTo>
+                    <a:pt x="257606" y="398530"/>
+                  </a:lnTo>
+                  <a:lnTo>
+                    <a:pt x="256003" y="395834"/>
+                  </a:lnTo>
+                  <a:lnTo>
+                    <a:pt x="254230" y="393283"/>
+                  </a:lnTo>
+                  <a:lnTo>
+                    <a:pt x="252287" y="390879"/>
+                  </a:lnTo>
+                  <a:lnTo>
+                    <a:pt x="250174" y="388620"/>
+                  </a:lnTo>
+                  <a:lnTo>
+                    <a:pt x="248061" y="386288"/>
+                  </a:lnTo>
+                  <a:lnTo>
+                    <a:pt x="246118" y="383714"/>
+                  </a:lnTo>
+                  <a:lnTo>
+                    <a:pt x="244345" y="380945"/>
+                  </a:lnTo>
+                  <a:lnTo>
+                    <a:pt x="242742" y="378006"/>
+                  </a:lnTo>
+                  <a:lnTo>
+                    <a:pt x="241381" y="374970"/>
+                  </a:lnTo>
+                  <a:lnTo>
+                    <a:pt x="240215" y="371836"/>
+                  </a:lnTo>
+                  <a:lnTo>
+                    <a:pt x="239268" y="368679"/>
+                  </a:lnTo>
+                  <a:lnTo>
+                    <a:pt x="238588" y="365546"/>
+                  </a:lnTo>
+                  <a:lnTo>
+                    <a:pt x="238175" y="362461"/>
+                  </a:lnTo>
+                  <a:lnTo>
+                    <a:pt x="238030" y="359474"/>
+                  </a:lnTo>
+                  <a:lnTo>
+                    <a:pt x="238588" y="352357"/>
+                  </a:lnTo>
+                  <a:lnTo>
+                    <a:pt x="240240" y="345605"/>
+                  </a:lnTo>
+                  <a:lnTo>
+                    <a:pt x="242887" y="339314"/>
+                  </a:lnTo>
+                  <a:lnTo>
+                    <a:pt x="246433" y="333582"/>
+                  </a:lnTo>
+                  <a:lnTo>
+                    <a:pt x="250781" y="328505"/>
+                  </a:lnTo>
+                  <a:lnTo>
+                    <a:pt x="255857" y="324158"/>
+                  </a:lnTo>
+                  <a:lnTo>
+                    <a:pt x="261590" y="320612"/>
+                  </a:lnTo>
+                  <a:lnTo>
+                    <a:pt x="267880" y="317964"/>
+                  </a:lnTo>
+                  <a:lnTo>
+                    <a:pt x="274633" y="316312"/>
+                  </a:lnTo>
+                  <a:lnTo>
+                    <a:pt x="281749" y="315754"/>
+                  </a:lnTo>
+                  <a:lnTo>
+                    <a:pt x="315754" y="315754"/>
+                  </a:lnTo>
+                  <a:lnTo>
+                    <a:pt x="339435" y="313422"/>
+                  </a:lnTo>
+                  <a:lnTo>
+                    <a:pt x="362218" y="306500"/>
+                  </a:lnTo>
+                  <a:lnTo>
+                    <a:pt x="383228" y="295278"/>
+                  </a:lnTo>
+                  <a:lnTo>
+                    <a:pt x="401639" y="280195"/>
+                  </a:lnTo>
+                  <a:lnTo>
+                    <a:pt x="416722" y="261784"/>
+                  </a:lnTo>
+                  <a:lnTo>
+                    <a:pt x="427943" y="240774"/>
+                  </a:lnTo>
+                  <a:lnTo>
+                    <a:pt x="434866" y="217992"/>
+                  </a:lnTo>
+                  <a:lnTo>
+                    <a:pt x="437197" y="194310"/>
+                  </a:lnTo>
+                  <a:lnTo>
+                    <a:pt x="434355" y="162905"/>
+                  </a:lnTo>
+                  <a:lnTo>
+                    <a:pt x="426122" y="133054"/>
+                  </a:lnTo>
+                  <a:lnTo>
+                    <a:pt x="412933" y="105219"/>
+                  </a:lnTo>
+                  <a:lnTo>
+                    <a:pt x="395226" y="79740"/>
+                  </a:lnTo>
+                  <a:lnTo>
+                    <a:pt x="373439" y="57079"/>
+                  </a:lnTo>
+                  <a:lnTo>
+                    <a:pt x="348009" y="37623"/>
+                  </a:lnTo>
+                  <a:lnTo>
+                    <a:pt x="319373" y="21763"/>
+                  </a:lnTo>
+                  <a:lnTo>
+                    <a:pt x="287967" y="9958"/>
+                  </a:lnTo>
+                  <a:lnTo>
+                    <a:pt x="254230" y="2550"/>
+                  </a:lnTo>
+                  <a:lnTo>
+                    <a:pt x="218599" y="0"/>
+                  </a:lnTo>
+                  <a:close/>
+                </a:path>
+              </a:pathLst>
+            </a:custGeom>
+            <a:noFill/>
+            <a:ln w="48577" cap="rnd">
+              <a:solidFill>
+                <a:srgbClr val="0077FF"/>
+              </a:solidFill>
+              <a:round/>
+            </a:ln>
+            <a:effectLst/>
+          </p:spPr>
+          <p:style>
+            <a:lnRef idx="1">
+              <a:schemeClr val="accent1"/>
+            </a:lnRef>
+            <a:fillRef idx="3">
+              <a:schemeClr val="accent1"/>
+            </a:fillRef>
+            <a:effectRef idx="2">
+              <a:schemeClr val="accent1"/>
+            </a:effectRef>
+            <a:fontRef idx="minor">
+              <a:schemeClr val="lt1"/>
+            </a:fontRef>
+          </p:style>
+          <p:txBody>
+            <a:bodyPr rtlCol="0" anchor="ctr"/>
+            <a:lstStyle/>
+            <a:p>
+              <a:pPr algn="ctr"/>
+            </a:p>
+          </p:txBody>
+        </p:sp>
+        <p:sp>
+          <p:nvSpPr>
+            <p:cNvPr id="623" name="Oval 622"/>
+            <p:cNvSpPr/>
+            <p:nvPr/>
+          </p:nvSpPr>
+          <p:spPr>
+            <a:xfrm>
+              <a:off x="582299" y="2098559"/>
+              <a:ext cx="58292" cy="58292"/>
+            </a:xfrm>
+            <a:prstGeom prst="ellipse">
+              <a:avLst/>
+            </a:prstGeom>
+            <a:solidFill>
+              <a:srgbClr val="0077FF"/>
+            </a:solidFill>
+            <a:ln>
+              <a:noFill/>
+            </a:ln>
+            <a:effectLst/>
+          </p:spPr>
+          <p:style>
+            <a:lnRef idx="1">
+              <a:schemeClr val="accent1"/>
+            </a:lnRef>
+            <a:fillRef idx="3">
+              <a:schemeClr val="accent1"/>
+            </a:fillRef>
+            <a:effectRef idx="2">
+              <a:schemeClr val="accent1"/>
+            </a:effectRef>
+            <a:fontRef idx="minor">
+              <a:schemeClr val="lt1"/>
+            </a:fontRef>
+          </p:style>
+          <p:txBody>
+            <a:bodyPr rtlCol="0" anchor="ctr"/>
+            <a:lstStyle/>
+            <a:p>
+              <a:pPr algn="ctr"/>
+            </a:p>
+          </p:txBody>
+        </p:sp>
+        <p:sp>
+          <p:nvSpPr>
+            <p:cNvPr id="624" name="Oval 623"/>
+            <p:cNvSpPr/>
+            <p:nvPr/>
+          </p:nvSpPr>
+          <p:spPr>
+            <a:xfrm>
+              <a:off x="643021" y="2001404"/>
+              <a:ext cx="58292" cy="58292"/>
+            </a:xfrm>
+            <a:prstGeom prst="ellipse">
+              <a:avLst/>
+            </a:prstGeom>
+            <a:solidFill>
+              <a:srgbClr val="0077FF"/>
+            </a:solidFill>
+            <a:ln>
+              <a:noFill/>
+            </a:ln>
+            <a:effectLst/>
+          </p:spPr>
+          <p:style>
+            <a:lnRef idx="1">
+              <a:schemeClr val="accent1"/>
+            </a:lnRef>
+            <a:fillRef idx="3">
+              <a:schemeClr val="accent1"/>
+            </a:fillRef>
+            <a:effectRef idx="2">
+              <a:schemeClr val="accent1"/>
+            </a:effectRef>
+            <a:fontRef idx="minor">
+              <a:schemeClr val="lt1"/>
+            </a:fontRef>
+          </p:style>
+          <p:txBody>
+            <a:bodyPr rtlCol="0" anchor="ctr"/>
+            <a:lstStyle/>
+            <a:p>
+              <a:pPr algn="ctr"/>
+            </a:p>
+          </p:txBody>
+        </p:sp>
+        <p:sp>
+          <p:nvSpPr>
+            <p:cNvPr id="625" name="Oval 624"/>
+            <p:cNvSpPr/>
+            <p:nvPr/>
+          </p:nvSpPr>
+          <p:spPr>
+            <a:xfrm>
+              <a:off x="752320" y="2001404"/>
+              <a:ext cx="58292" cy="58292"/>
+            </a:xfrm>
+            <a:prstGeom prst="ellipse">
+              <a:avLst/>
+            </a:prstGeom>
+            <a:solidFill>
+              <a:srgbClr val="0077FF"/>
+            </a:solidFill>
+            <a:ln>
+              <a:noFill/>
+            </a:ln>
+            <a:effectLst/>
+          </p:spPr>
+          <p:style>
+            <a:lnRef idx="1">
+              <a:schemeClr val="accent1"/>
+            </a:lnRef>
+            <a:fillRef idx="3">
+              <a:schemeClr val="accent1"/>
+            </a:fillRef>
+            <a:effectRef idx="2">
+              <a:schemeClr val="accent1"/>
+            </a:effectRef>
+            <a:fontRef idx="minor">
+              <a:schemeClr val="lt1"/>
+            </a:fontRef>
+          </p:style>
+          <p:txBody>
+            <a:bodyPr rtlCol="0" anchor="ctr"/>
+            <a:lstStyle/>
+            <a:p>
+              <a:pPr algn="ctr"/>
+            </a:p>
+          </p:txBody>
+        </p:sp>
+      </p:grpSp>
       <p:sp>
         <p:nvSpPr>
-          <p:cNvPr id="623" name="body"/>
+          <p:cNvPr id="626" name="item_0"/>
           <p:cNvSpPr txBox="1"/>
           <p:nvPr/>
         </p:nvSpPr>
         <p:spPr>
           <a:xfrm>
-            <a:off x="429280" y="1783080"/>
-            <a:ext cx="11310884" cy="1645920"/>
+            <a:off x="1274528" y="1857910"/>
+            <a:ext cx="10465635" cy="865688"/>
           </a:xfrm>
           <a:prstGeom prst="rect">
             <a:avLst/>
@@ -11442,7 +11592,7 @@
               <a:spcAft>
                 <a:spcPts val="300"/>
               </a:spcAft>
-              <a:defRPr sz="2000">
+              <a:defRPr sz="2800">
                 <a:solidFill>
                   <a:srgbClr val="FFFFFF"/>
                 </a:solidFill>
@@ -11452,7 +11602,7 @@
               </a:defRPr>
             </a:pPr>
             <a:r>
-              <a:rPr sz="2000">
+              <a:rPr sz="2800">
                 <a:solidFill>
                   <a:srgbClr val="FFFFFF"/>
                 </a:solidFill>
@@ -11460,15 +11610,219 @@
                 <a:ea typeface="Play"/>
                 <a:cs typeface="Play"/>
               </a:rPr>
-              <a:t>• Сервис работает на 2 vCPU / 2 ГБ RAM</a:t>
+              <a:t>Разбирает дизайн-систему</a:t>
             </a:r>
           </a:p>
+        </p:txBody>
+      </p:sp>
+      <p:grpSp>
+        <p:nvGrpSpPr>
+          <p:cNvPr id="4" name="icon:builtin-next"/>
+          <p:cNvGrpSpPr/>
+          <p:nvPr/>
+        </p:nvGrpSpPr>
+        <p:grpSpPr>
+          <a:xfrm>
+            <a:off x="502146" y="2933625"/>
+            <a:ext cx="437197" cy="437197"/>
+            <a:chOff x="502146" y="2933625"/>
+            <a:chExt cx="437197" cy="437197"/>
+          </a:xfrm>
+        </p:grpSpPr>
+        <p:sp>
+          <p:nvSpPr>
+            <p:cNvPr id="627" name="Oval 626"/>
+            <p:cNvSpPr/>
+            <p:nvPr/>
+          </p:nvSpPr>
+          <p:spPr>
+            <a:xfrm>
+              <a:off x="502146" y="2933625"/>
+              <a:ext cx="437197" cy="437197"/>
+            </a:xfrm>
+            <a:prstGeom prst="ellipse">
+              <a:avLst/>
+            </a:prstGeom>
+            <a:noFill/>
+            <a:ln w="48577" cap="rnd">
+              <a:solidFill>
+                <a:srgbClr val="0077FF"/>
+              </a:solidFill>
+              <a:round/>
+            </a:ln>
+            <a:effectLst/>
+          </p:spPr>
+          <p:style>
+            <a:lnRef idx="1">
+              <a:schemeClr val="accent1"/>
+            </a:lnRef>
+            <a:fillRef idx="3">
+              <a:schemeClr val="accent1"/>
+            </a:fillRef>
+            <a:effectRef idx="2">
+              <a:schemeClr val="accent1"/>
+            </a:effectRef>
+            <a:fontRef idx="minor">
+              <a:schemeClr val="lt1"/>
+            </a:fontRef>
+          </p:style>
+          <p:txBody>
+            <a:bodyPr rtlCol="0" anchor="ctr"/>
+            <a:lstStyle/>
+            <a:p>
+              <a:pPr algn="ctr"/>
+            </a:p>
+          </p:txBody>
+        </p:sp>
+        <p:sp>
+          <p:nvSpPr>
+            <p:cNvPr id="5" name="Freeform 4"/>
+            <p:cNvSpPr/>
+            <p:nvPr/>
+          </p:nvSpPr>
+          <p:spPr>
+            <a:xfrm>
+              <a:off x="623590" y="3152224"/>
+              <a:ext cx="194310" cy="0"/>
+            </a:xfrm>
+            <a:custGeom>
+              <a:avLst/>
+              <a:gdLst/>
+              <a:ahLst/>
+              <a:cxnLst/>
+              <a:rect l="l" t="t" r="r" b="b"/>
+              <a:pathLst>
+                <a:path w="194310" h="0">
+                  <a:moveTo>
+                    <a:pt x="0" y="0"/>
+                  </a:moveTo>
+                  <a:lnTo>
+                    <a:pt x="194310" y="0"/>
+                  </a:lnTo>
+                </a:path>
+              </a:pathLst>
+            </a:custGeom>
+            <a:noFill/>
+            <a:ln w="48577" cap="rnd">
+              <a:solidFill>
+                <a:srgbClr val="0077FF"/>
+              </a:solidFill>
+              <a:round/>
+            </a:ln>
+            <a:effectLst/>
+          </p:spPr>
+          <p:style>
+            <a:lnRef idx="1">
+              <a:schemeClr val="accent1"/>
+            </a:lnRef>
+            <a:fillRef idx="3">
+              <a:schemeClr val="accent1"/>
+            </a:fillRef>
+            <a:effectRef idx="2">
+              <a:schemeClr val="accent1"/>
+            </a:effectRef>
+            <a:fontRef idx="minor">
+              <a:schemeClr val="lt1"/>
+            </a:fontRef>
+          </p:style>
+          <p:txBody>
+            <a:bodyPr rtlCol="0" anchor="ctr"/>
+            <a:lstStyle/>
+            <a:p>
+              <a:pPr algn="ctr"/>
+            </a:p>
+          </p:txBody>
+        </p:sp>
+        <p:sp>
+          <p:nvSpPr>
+            <p:cNvPr id="6" name="Freeform 5"/>
+            <p:cNvSpPr/>
+            <p:nvPr/>
+          </p:nvSpPr>
+          <p:spPr>
+            <a:xfrm>
+              <a:off x="720745" y="3055069"/>
+              <a:ext cx="97155" cy="194310"/>
+            </a:xfrm>
+            <a:custGeom>
+              <a:avLst/>
+              <a:gdLst/>
+              <a:ahLst/>
+              <a:cxnLst/>
+              <a:rect l="l" t="t" r="r" b="b"/>
+              <a:pathLst>
+                <a:path w="97155" h="194310">
+                  <a:moveTo>
+                    <a:pt x="0" y="0"/>
+                  </a:moveTo>
+                  <a:lnTo>
+                    <a:pt x="97155" y="97155"/>
+                  </a:lnTo>
+                  <a:lnTo>
+                    <a:pt x="0" y="194310"/>
+                  </a:lnTo>
+                </a:path>
+              </a:pathLst>
+            </a:custGeom>
+            <a:noFill/>
+            <a:ln w="48577" cap="rnd">
+              <a:solidFill>
+                <a:srgbClr val="0077FF"/>
+              </a:solidFill>
+              <a:round/>
+            </a:ln>
+            <a:effectLst/>
+          </p:spPr>
+          <p:style>
+            <a:lnRef idx="1">
+              <a:schemeClr val="accent1"/>
+            </a:lnRef>
+            <a:fillRef idx="3">
+              <a:schemeClr val="accent1"/>
+            </a:fillRef>
+            <a:effectRef idx="2">
+              <a:schemeClr val="accent1"/>
+            </a:effectRef>
+            <a:fontRef idx="minor">
+              <a:schemeClr val="lt1"/>
+            </a:fontRef>
+          </p:style>
+          <p:txBody>
+            <a:bodyPr rtlCol="0" anchor="ctr"/>
+            <a:lstStyle/>
+            <a:p>
+              <a:pPr algn="ctr"/>
+            </a:p>
+          </p:txBody>
+        </p:sp>
+      </p:grpSp>
+      <p:sp>
+        <p:nvSpPr>
+          <p:cNvPr id="628" name="item_1"/>
+          <p:cNvSpPr txBox="1"/>
+          <p:nvPr/>
+        </p:nvSpPr>
+        <p:spPr>
+          <a:xfrm>
+            <a:off x="1274528" y="2870284"/>
+            <a:ext cx="10465635" cy="865688"/>
+          </a:xfrm>
+          <a:prstGeom prst="rect">
+            <a:avLst/>
+          </a:prstGeom>
+          <a:noFill/>
+        </p:spPr>
+        <p:txBody>
+          <a:bodyPr wrap="square" lIns="76200" rIns="76200" tIns="50800" bIns="50800">
+            <a:spAutoFit/>
+          </a:bodyPr>
+          <a:lstStyle/>
           <a:p>
             <a:pPr algn="l">
               <a:spcAft>
                 <a:spcPts val="300"/>
               </a:spcAft>
-              <a:defRPr sz="2000">
+              <a:defRPr sz="2800">
                 <a:solidFill>
                   <a:srgbClr val="FFFFFF"/>
                 </a:solidFill>
@@ -11478,7 +11832,7 @@
               </a:defRPr>
             </a:pPr>
             <a:r>
-              <a:rPr sz="2000">
+              <a:rPr sz="2800">
                 <a:solidFill>
                   <a:srgbClr val="FFFFFF"/>
                 </a:solidFill>
@@ -11486,15 +11840,218 @@
                 <a:ea typeface="Play"/>
                 <a:cs typeface="Play"/>
               </a:rPr>
-              <a:t>• Инференс gpt-oss-20b стоит 1 400 рублей за 6 недель</a:t>
+              <a:t>Собирает план колоды</a:t>
             </a:r>
           </a:p>
+        </p:txBody>
+      </p:sp>
+      <p:grpSp>
+        <p:nvGrpSpPr>
+          <p:cNvPr id="7" name="icon:builtin-layout"/>
+          <p:cNvGrpSpPr/>
+          <p:nvPr/>
+        </p:nvGrpSpPr>
+        <p:grpSpPr>
+          <a:xfrm>
+            <a:off x="502146" y="3945998"/>
+            <a:ext cx="437197" cy="437197"/>
+            <a:chOff x="502146" y="3945998"/>
+            <a:chExt cx="437197" cy="437197"/>
+          </a:xfrm>
+        </p:grpSpPr>
+        <p:sp>
+          <p:nvSpPr>
+            <p:cNvPr id="629" name="Rounded Rectangle 628"/>
+            <p:cNvSpPr/>
+            <p:nvPr/>
+          </p:nvSpPr>
+          <p:spPr>
+            <a:xfrm>
+              <a:off x="502146" y="3945998"/>
+              <a:ext cx="437197" cy="437197"/>
+            </a:xfrm>
+            <a:prstGeom prst="roundRect">
+              <a:avLst>
+                <a:gd name="adj" fmla="val 11111"/>
+              </a:avLst>
+            </a:prstGeom>
+            <a:noFill/>
+            <a:ln w="48577" cap="rnd">
+              <a:solidFill>
+                <a:srgbClr val="0077FF"/>
+              </a:solidFill>
+              <a:round/>
+            </a:ln>
+            <a:effectLst/>
+          </p:spPr>
+          <p:style>
+            <a:lnRef idx="1">
+              <a:schemeClr val="accent1"/>
+            </a:lnRef>
+            <a:fillRef idx="3">
+              <a:schemeClr val="accent1"/>
+            </a:fillRef>
+            <a:effectRef idx="2">
+              <a:schemeClr val="accent1"/>
+            </a:effectRef>
+            <a:fontRef idx="minor">
+              <a:schemeClr val="lt1"/>
+            </a:fontRef>
+          </p:style>
+          <p:txBody>
+            <a:bodyPr rtlCol="0" anchor="ctr"/>
+            <a:lstStyle/>
+            <a:p>
+              <a:pPr algn="ctr"/>
+            </a:p>
+          </p:txBody>
+        </p:sp>
+        <p:sp>
+          <p:nvSpPr>
+            <p:cNvPr id="8" name="Freeform 7"/>
+            <p:cNvSpPr/>
+            <p:nvPr/>
+          </p:nvSpPr>
+          <p:spPr>
+            <a:xfrm>
+              <a:off x="502146" y="4091730"/>
+              <a:ext cx="437197" cy="0"/>
+            </a:xfrm>
+            <a:custGeom>
+              <a:avLst/>
+              <a:gdLst/>
+              <a:ahLst/>
+              <a:cxnLst/>
+              <a:rect l="l" t="t" r="r" b="b"/>
+              <a:pathLst>
+                <a:path w="437197" h="0">
+                  <a:moveTo>
+                    <a:pt x="0" y="0"/>
+                  </a:moveTo>
+                  <a:lnTo>
+                    <a:pt x="437197" y="0"/>
+                  </a:lnTo>
+                </a:path>
+              </a:pathLst>
+            </a:custGeom>
+            <a:noFill/>
+            <a:ln w="48577" cap="rnd">
+              <a:solidFill>
+                <a:srgbClr val="0077FF"/>
+              </a:solidFill>
+              <a:round/>
+            </a:ln>
+            <a:effectLst/>
+          </p:spPr>
+          <p:style>
+            <a:lnRef idx="1">
+              <a:schemeClr val="accent1"/>
+            </a:lnRef>
+            <a:fillRef idx="3">
+              <a:schemeClr val="accent1"/>
+            </a:fillRef>
+            <a:effectRef idx="2">
+              <a:schemeClr val="accent1"/>
+            </a:effectRef>
+            <a:fontRef idx="minor">
+              <a:schemeClr val="lt1"/>
+            </a:fontRef>
+          </p:style>
+          <p:txBody>
+            <a:bodyPr rtlCol="0" anchor="ctr"/>
+            <a:lstStyle/>
+            <a:p>
+              <a:pPr algn="ctr"/>
+            </a:p>
+          </p:txBody>
+        </p:sp>
+        <p:sp>
+          <p:nvSpPr>
+            <p:cNvPr id="9" name="Freeform 8"/>
+            <p:cNvSpPr/>
+            <p:nvPr/>
+          </p:nvSpPr>
+          <p:spPr>
+            <a:xfrm>
+              <a:off x="647878" y="4091730"/>
+              <a:ext cx="0" cy="291465"/>
+            </a:xfrm>
+            <a:custGeom>
+              <a:avLst/>
+              <a:gdLst/>
+              <a:ahLst/>
+              <a:cxnLst/>
+              <a:rect l="l" t="t" r="r" b="b"/>
+              <a:pathLst>
+                <a:path w="0" h="291465">
+                  <a:moveTo>
+                    <a:pt x="0" y="0"/>
+                  </a:moveTo>
+                  <a:lnTo>
+                    <a:pt x="0" y="291465"/>
+                  </a:lnTo>
+                </a:path>
+              </a:pathLst>
+            </a:custGeom>
+            <a:noFill/>
+            <a:ln w="48577" cap="rnd">
+              <a:solidFill>
+                <a:srgbClr val="0077FF"/>
+              </a:solidFill>
+              <a:round/>
+            </a:ln>
+            <a:effectLst/>
+          </p:spPr>
+          <p:style>
+            <a:lnRef idx="1">
+              <a:schemeClr val="accent1"/>
+            </a:lnRef>
+            <a:fillRef idx="3">
+              <a:schemeClr val="accent1"/>
+            </a:fillRef>
+            <a:effectRef idx="2">
+              <a:schemeClr val="accent1"/>
+            </a:effectRef>
+            <a:fontRef idx="minor">
+              <a:schemeClr val="lt1"/>
+            </a:fontRef>
+          </p:style>
+          <p:txBody>
+            <a:bodyPr rtlCol="0" anchor="ctr"/>
+            <a:lstStyle/>
+            <a:p>
+              <a:pPr algn="ctr"/>
+            </a:p>
+          </p:txBody>
+        </p:sp>
+      </p:grpSp>
+      <p:sp>
+        <p:nvSpPr>
+          <p:cNvPr id="630" name="item_2"/>
+          <p:cNvSpPr txBox="1"/>
+          <p:nvPr/>
+        </p:nvSpPr>
+        <p:spPr>
+          <a:xfrm>
+            <a:off x="1274528" y="3882657"/>
+            <a:ext cx="10465635" cy="865688"/>
+          </a:xfrm>
+          <a:prstGeom prst="rect">
+            <a:avLst/>
+          </a:prstGeom>
+          <a:noFill/>
+        </p:spPr>
+        <p:txBody>
+          <a:bodyPr wrap="square" lIns="76200" rIns="76200" tIns="50800" bIns="50800">
+            <a:spAutoFit/>
+          </a:bodyPr>
+          <a:lstStyle/>
           <a:p>
             <a:pPr algn="l">
               <a:spcAft>
                 <a:spcPts val="300"/>
               </a:spcAft>
-              <a:defRPr sz="2000">
+              <a:defRPr sz="2800">
                 <a:solidFill>
                   <a:srgbClr val="FFFFFF"/>
                 </a:solidFill>
@@ -11504,7 +12061,7 @@
               </a:defRPr>
             </a:pPr>
             <a:r>
-              <a:rPr sz="2000">
+              <a:rPr sz="2800">
                 <a:solidFill>
                   <a:srgbClr val="FFFFFF"/>
                 </a:solidFill>
@@ -11512,107 +12069,140 @@
                 <a:ea typeface="Play"/>
                 <a:cs typeface="Play"/>
               </a:rPr>
-              <a:t>• План запуска: Q3 2026 подключение 4 команд, Q4 2026 доступ компании, Q1 2027 генерация иллюстраций</a:t>
+              <a:t>Вёрстка по системе</a:t>
             </a:r>
           </a:p>
         </p:txBody>
       </p:sp>
+      <p:grpSp>
+        <p:nvGrpSpPr>
+          <p:cNvPr id="10" name="icon:builtin-search"/>
+          <p:cNvGrpSpPr/>
+          <p:nvPr/>
+        </p:nvGrpSpPr>
+        <p:grpSpPr>
+          <a:xfrm>
+            <a:off x="526435" y="4982661"/>
+            <a:ext cx="412908" cy="412908"/>
+            <a:chOff x="526435" y="4982661"/>
+            <a:chExt cx="412908" cy="412908"/>
+          </a:xfrm>
+        </p:grpSpPr>
+        <p:sp>
+          <p:nvSpPr>
+            <p:cNvPr id="631" name="Oval 630"/>
+            <p:cNvSpPr/>
+            <p:nvPr/>
+          </p:nvSpPr>
+          <p:spPr>
+            <a:xfrm>
+              <a:off x="526435" y="4982661"/>
+              <a:ext cx="340042" cy="340042"/>
+            </a:xfrm>
+            <a:prstGeom prst="ellipse">
+              <a:avLst/>
+            </a:prstGeom>
+            <a:noFill/>
+            <a:ln w="48577" cap="rnd">
+              <a:solidFill>
+                <a:srgbClr val="0077FF"/>
+              </a:solidFill>
+              <a:round/>
+            </a:ln>
+            <a:effectLst/>
+          </p:spPr>
+          <p:style>
+            <a:lnRef idx="1">
+              <a:schemeClr val="accent1"/>
+            </a:lnRef>
+            <a:fillRef idx="3">
+              <a:schemeClr val="accent1"/>
+            </a:fillRef>
+            <a:effectRef idx="2">
+              <a:schemeClr val="accent1"/>
+            </a:effectRef>
+            <a:fontRef idx="minor">
+              <a:schemeClr val="lt1"/>
+            </a:fontRef>
+          </p:style>
+          <p:txBody>
+            <a:bodyPr rtlCol="0" anchor="ctr"/>
+            <a:lstStyle/>
+            <a:p>
+              <a:pPr algn="ctr"/>
+            </a:p>
+          </p:txBody>
+        </p:sp>
+        <p:sp>
+          <p:nvSpPr>
+            <p:cNvPr id="11" name="Freeform 10"/>
+            <p:cNvSpPr/>
+            <p:nvPr/>
+          </p:nvSpPr>
+          <p:spPr>
+            <a:xfrm>
+              <a:off x="822757" y="5278983"/>
+              <a:ext cx="116586" cy="116586"/>
+            </a:xfrm>
+            <a:custGeom>
+              <a:avLst/>
+              <a:gdLst/>
+              <a:ahLst/>
+              <a:cxnLst/>
+              <a:rect l="l" t="t" r="r" b="b"/>
+              <a:pathLst>
+                <a:path w="116586" h="116586">
+                  <a:moveTo>
+                    <a:pt x="0" y="0"/>
+                  </a:moveTo>
+                  <a:lnTo>
+                    <a:pt x="116586" y="116586"/>
+                  </a:lnTo>
+                </a:path>
+              </a:pathLst>
+            </a:custGeom>
+            <a:noFill/>
+            <a:ln w="48577" cap="rnd">
+              <a:solidFill>
+                <a:srgbClr val="0077FF"/>
+              </a:solidFill>
+              <a:round/>
+            </a:ln>
+            <a:effectLst/>
+          </p:spPr>
+          <p:style>
+            <a:lnRef idx="1">
+              <a:schemeClr val="accent1"/>
+            </a:lnRef>
+            <a:fillRef idx="3">
+              <a:schemeClr val="accent1"/>
+            </a:fillRef>
+            <a:effectRef idx="2">
+              <a:schemeClr val="accent1"/>
+            </a:effectRef>
+            <a:fontRef idx="minor">
+              <a:schemeClr val="lt1"/>
+            </a:fontRef>
+          </p:style>
+          <p:txBody>
+            <a:bodyPr rtlCol="0" anchor="ctr"/>
+            <a:lstStyle/>
+            <a:p>
+              <a:pPr algn="ctr"/>
+            </a:p>
+          </p:txBody>
+        </p:sp>
+      </p:grpSp>
       <p:sp>
         <p:nvSpPr>
-          <p:cNvPr id="624" name="Rectangle 623"/>
-          <p:cNvSpPr/>
-          <p:nvPr/>
-        </p:nvSpPr>
-        <p:spPr>
-          <a:xfrm>
-            <a:off x="429280" y="4657267"/>
-            <a:ext cx="11310884" cy="68922"/>
-          </a:xfrm>
-          <a:prstGeom prst="rect">
-            <a:avLst/>
-          </a:prstGeom>
-          <a:solidFill>
-            <a:srgbClr val="0077FF"/>
-          </a:solidFill>
-          <a:ln>
-            <a:noFill/>
-          </a:ln>
-        </p:spPr>
-        <p:style>
-          <a:lnRef idx="1">
-            <a:schemeClr val="accent1"/>
-          </a:lnRef>
-          <a:fillRef idx="3">
-            <a:schemeClr val="accent1"/>
-          </a:fillRef>
-          <a:effectRef idx="2">
-            <a:schemeClr val="accent1"/>
-          </a:effectRef>
-          <a:fontRef idx="minor">
-            <a:schemeClr val="lt1"/>
-          </a:fontRef>
-        </p:style>
-        <p:txBody>
-          <a:bodyPr rtlCol="0" anchor="ctr"/>
-          <a:lstStyle/>
-          <a:p>
-            <a:pPr algn="ctr"/>
-          </a:p>
-        </p:txBody>
-      </p:sp>
-      <p:sp>
-        <p:nvSpPr>
-          <p:cNvPr id="625" name="Oval 624"/>
-          <p:cNvSpPr/>
-          <p:nvPr/>
-        </p:nvSpPr>
-        <p:spPr>
-          <a:xfrm>
-            <a:off x="2061710" y="4439011"/>
-            <a:ext cx="505434" cy="505434"/>
-          </a:xfrm>
-          <a:prstGeom prst="ellipse">
-            <a:avLst/>
-          </a:prstGeom>
-          <a:solidFill>
-            <a:srgbClr val="0077FF"/>
-          </a:solidFill>
-          <a:ln>
-            <a:noFill/>
-          </a:ln>
-        </p:spPr>
-        <p:style>
-          <a:lnRef idx="1">
-            <a:schemeClr val="accent1"/>
-          </a:lnRef>
-          <a:fillRef idx="3">
-            <a:schemeClr val="accent1"/>
-          </a:fillRef>
-          <a:effectRef idx="2">
-            <a:schemeClr val="accent1"/>
-          </a:effectRef>
-          <a:fontRef idx="minor">
-            <a:schemeClr val="lt1"/>
-          </a:fontRef>
-        </p:style>
-        <p:txBody>
-          <a:bodyPr rtlCol="0" anchor="ctr"/>
-          <a:lstStyle/>
-          <a:p>
-            <a:pPr algn="ctr"/>
-          </a:p>
-        </p:txBody>
-      </p:sp>
-      <p:sp>
-        <p:nvSpPr>
-          <p:cNvPr id="626" name="TextBox 625"/>
+          <p:cNvPr id="632" name="item_3"/>
           <p:cNvSpPr txBox="1"/>
           <p:nvPr/>
         </p:nvSpPr>
         <p:spPr>
           <a:xfrm>
-            <a:off x="429280" y="3600450"/>
-            <a:ext cx="5655442" cy="873023"/>
+            <a:off x="1274528" y="4895031"/>
+            <a:ext cx="10465635" cy="865688"/>
           </a:xfrm>
           <a:prstGeom prst="rect">
             <a:avLst/>
@@ -11620,13 +12210,16 @@
           <a:noFill/>
         </p:spPr>
         <p:txBody>
-          <a:bodyPr wrap="square" lIns="12700" rIns="12700" tIns="12700" bIns="12700">
+          <a:bodyPr wrap="square" lIns="76200" rIns="76200" tIns="50800" bIns="50800">
             <a:spAutoFit/>
           </a:bodyPr>
           <a:lstStyle/>
           <a:p>
-            <a:pPr algn="ctr">
-              <a:defRPr sz="1400" b="0">
+            <a:pPr algn="l">
+              <a:spcAft>
+                <a:spcPts val="300"/>
+              </a:spcAft>
+              <a:defRPr sz="2800">
                 <a:solidFill>
                   <a:srgbClr val="FFFFFF"/>
                 </a:solidFill>
@@ -11636,7 +12229,7 @@
               </a:defRPr>
             </a:pPr>
             <a:r>
-              <a:rPr sz="1400" b="0">
+              <a:rPr sz="2800">
                 <a:solidFill>
                   <a:srgbClr val="FFFFFF"/>
                 </a:solidFill>
@@ -11644,185 +12237,7 @@
                 <a:ea typeface="Play"/>
                 <a:cs typeface="Play"/>
               </a:rPr>
-              <a:t>Q3 2026: подключение 4 команд</a:t>
-            </a:r>
-          </a:p>
-        </p:txBody>
-      </p:sp>
-      <p:sp>
-        <p:nvSpPr>
-          <p:cNvPr id="627" name="Oval 626"/>
-          <p:cNvSpPr/>
-          <p:nvPr/>
-        </p:nvSpPr>
-        <p:spPr>
-          <a:xfrm>
-            <a:off x="5832004" y="4439011"/>
-            <a:ext cx="505434" cy="505434"/>
-          </a:xfrm>
-          <a:prstGeom prst="ellipse">
-            <a:avLst/>
-          </a:prstGeom>
-          <a:solidFill>
-            <a:srgbClr val="0077FF"/>
-          </a:solidFill>
-          <a:ln>
-            <a:noFill/>
-          </a:ln>
-        </p:spPr>
-        <p:style>
-          <a:lnRef idx="1">
-            <a:schemeClr val="accent1"/>
-          </a:lnRef>
-          <a:fillRef idx="3">
-            <a:schemeClr val="accent1"/>
-          </a:fillRef>
-          <a:effectRef idx="2">
-            <a:schemeClr val="accent1"/>
-          </a:effectRef>
-          <a:fontRef idx="minor">
-            <a:schemeClr val="lt1"/>
-          </a:fontRef>
-        </p:style>
-        <p:txBody>
-          <a:bodyPr rtlCol="0" anchor="ctr"/>
-          <a:lstStyle/>
-          <a:p>
-            <a:pPr algn="ctr"/>
-          </a:p>
-        </p:txBody>
-      </p:sp>
-      <p:sp>
-        <p:nvSpPr>
-          <p:cNvPr id="628" name="TextBox 627"/>
-          <p:cNvSpPr txBox="1"/>
-          <p:nvPr/>
-        </p:nvSpPr>
-        <p:spPr>
-          <a:xfrm>
-            <a:off x="3257001" y="5162702"/>
-            <a:ext cx="5655442" cy="873023"/>
-          </a:xfrm>
-          <a:prstGeom prst="rect">
-            <a:avLst/>
-          </a:prstGeom>
-          <a:noFill/>
-        </p:spPr>
-        <p:txBody>
-          <a:bodyPr wrap="square" lIns="12700" rIns="12700" tIns="12700" bIns="12700">
-            <a:spAutoFit/>
-          </a:bodyPr>
-          <a:lstStyle/>
-          <a:p>
-            <a:pPr algn="ctr">
-              <a:defRPr sz="1400" b="0">
-                <a:solidFill>
-                  <a:srgbClr val="FFFFFF"/>
-                </a:solidFill>
-                <a:latin typeface="Play"/>
-                <a:ea typeface="Play"/>
-                <a:cs typeface="Play"/>
-              </a:defRPr>
-            </a:pPr>
-            <a:r>
-              <a:rPr sz="1400" b="0">
-                <a:solidFill>
-                  <a:srgbClr val="FFFFFF"/>
-                </a:solidFill>
-                <a:latin typeface="Play"/>
-                <a:ea typeface="Play"/>
-                <a:cs typeface="Play"/>
-              </a:rPr>
-              <a:t>Q4 2026: доступ для всей компании</a:t>
-            </a:r>
-          </a:p>
-        </p:txBody>
-      </p:sp>
-      <p:sp>
-        <p:nvSpPr>
-          <p:cNvPr id="629" name="Oval 628"/>
-          <p:cNvSpPr/>
-          <p:nvPr/>
-        </p:nvSpPr>
-        <p:spPr>
-          <a:xfrm>
-            <a:off x="9602299" y="4439011"/>
-            <a:ext cx="505434" cy="505434"/>
-          </a:xfrm>
-          <a:prstGeom prst="ellipse">
-            <a:avLst/>
-          </a:prstGeom>
-          <a:solidFill>
-            <a:srgbClr val="0077FF"/>
-          </a:solidFill>
-          <a:ln>
-            <a:noFill/>
-          </a:ln>
-        </p:spPr>
-        <p:style>
-          <a:lnRef idx="1">
-            <a:schemeClr val="accent1"/>
-          </a:lnRef>
-          <a:fillRef idx="3">
-            <a:schemeClr val="accent1"/>
-          </a:fillRef>
-          <a:effectRef idx="2">
-            <a:schemeClr val="accent1"/>
-          </a:effectRef>
-          <a:fontRef idx="minor">
-            <a:schemeClr val="lt1"/>
-          </a:fontRef>
-        </p:style>
-        <p:txBody>
-          <a:bodyPr rtlCol="0" anchor="ctr"/>
-          <a:lstStyle/>
-          <a:p>
-            <a:pPr algn="ctr"/>
-          </a:p>
-        </p:txBody>
-      </p:sp>
-      <p:sp>
-        <p:nvSpPr>
-          <p:cNvPr id="630" name="TextBox 629"/>
-          <p:cNvSpPr txBox="1"/>
-          <p:nvPr/>
-        </p:nvSpPr>
-        <p:spPr>
-          <a:xfrm>
-            <a:off x="6084722" y="3600450"/>
-            <a:ext cx="5655442" cy="873023"/>
-          </a:xfrm>
-          <a:prstGeom prst="rect">
-            <a:avLst/>
-          </a:prstGeom>
-          <a:noFill/>
-        </p:spPr>
-        <p:txBody>
-          <a:bodyPr wrap="square" lIns="12700" rIns="12700" tIns="12700" bIns="12700">
-            <a:spAutoFit/>
-          </a:bodyPr>
-          <a:lstStyle/>
-          <a:p>
-            <a:pPr algn="ctr">
-              <a:defRPr sz="1400" b="0">
-                <a:solidFill>
-                  <a:srgbClr val="FFFFFF"/>
-                </a:solidFill>
-                <a:latin typeface="Play"/>
-                <a:ea typeface="Play"/>
-                <a:cs typeface="Play"/>
-              </a:defRPr>
-            </a:pPr>
-            <a:r>
-              <a:rPr sz="1400" b="0">
-                <a:solidFill>
-                  <a:srgbClr val="FFFFFF"/>
-                </a:solidFill>
-                <a:latin typeface="Play"/>
-                <a:ea typeface="Play"/>
-                <a:cs typeface="Play"/>
-              </a:rPr>
-              <a:t>Q1 2027: генерация иллюстраций</a:t>
+              <a:t>Аудит качества</a:t>
             </a:r>
           </a:p>
         </p:txBody>
@@ -11854,7 +12269,7 @@
         <p:spPr>
           <a:xfrm>
             <a:off x="429280" y="424715"/>
-            <a:ext cx="7827264" cy="822960"/>
+            <a:ext cx="7827264" cy="1183640"/>
           </a:xfrm>
           <a:prstGeom prst="rect">
             <a:avLst/>
@@ -11889,1352 +12304,29 @@
                 <a:ea typeface="Play"/>
                 <a:cs typeface="Play"/>
               </a:rPr>
-              <a:t>План пилота</a:t>
+              <a:t>Сокращение времени сборки до 4 мин</a:t>
             </a:r>
           </a:p>
         </p:txBody>
       </p:sp>
-      <p:grpSp>
-        <p:nvGrpSpPr>
-          <p:cNvPr id="3" name="icon:builtin-rocket"/>
-          <p:cNvGrpSpPr/>
+      <p:graphicFrame>
+        <p:nvGraphicFramePr>
+          <p:cNvPr id="3" name="Chart 2"/>
+          <p:cNvGraphicFramePr>
+            <a:graphicFrameLocks noGrp="1"/>
+          </p:cNvGraphicFramePr>
           <p:nvPr/>
-        </p:nvGrpSpPr>
-        <p:grpSpPr>
-          <a:xfrm>
-            <a:off x="526435" y="1852254"/>
-            <a:ext cx="392311" cy="416601"/>
-            <a:chOff x="526435" y="1852254"/>
-            <a:chExt cx="392311" cy="416601"/>
-          </a:xfrm>
-        </p:grpSpPr>
-        <p:sp>
-          <p:nvSpPr>
-            <p:cNvPr id="4" name="Freeform 3"/>
-            <p:cNvSpPr/>
-            <p:nvPr/>
-          </p:nvSpPr>
-          <p:spPr>
-            <a:xfrm>
-              <a:off x="623590" y="1852254"/>
-              <a:ext cx="295156" cy="319446"/>
-            </a:xfrm>
-            <a:custGeom>
-              <a:avLst/>
-              <a:gdLst/>
-              <a:ahLst/>
-              <a:cxnLst/>
-              <a:rect l="l" t="t" r="r" b="b"/>
-              <a:pathLst>
-                <a:path w="295156" h="319446">
-                  <a:moveTo>
-                    <a:pt x="145732" y="27981"/>
-                  </a:moveTo>
-                  <a:lnTo>
-                    <a:pt x="167130" y="17804"/>
-                  </a:lnTo>
-                  <a:lnTo>
-                    <a:pt x="187460" y="10298"/>
-                  </a:lnTo>
-                  <a:lnTo>
-                    <a:pt x="206600" y="5125"/>
-                  </a:lnTo>
-                  <a:lnTo>
-                    <a:pt x="224306" y="1943"/>
-                  </a:lnTo>
-                  <a:lnTo>
-                    <a:pt x="240458" y="340"/>
-                  </a:lnTo>
-                  <a:lnTo>
-                    <a:pt x="254861" y="0"/>
-                  </a:lnTo>
-                  <a:lnTo>
-                    <a:pt x="267321" y="510"/>
-                  </a:lnTo>
-                  <a:lnTo>
-                    <a:pt x="277717" y="1554"/>
-                  </a:lnTo>
-                  <a:lnTo>
-                    <a:pt x="285805" y="2744"/>
-                  </a:lnTo>
-                  <a:lnTo>
-                    <a:pt x="291465" y="3692"/>
-                  </a:lnTo>
-                  <a:lnTo>
-                    <a:pt x="292436" y="9351"/>
-                  </a:lnTo>
-                  <a:lnTo>
-                    <a:pt x="293602" y="17439"/>
-                  </a:lnTo>
-                  <a:lnTo>
-                    <a:pt x="294622" y="27835"/>
-                  </a:lnTo>
-                  <a:lnTo>
-                    <a:pt x="295156" y="40295"/>
-                  </a:lnTo>
-                  <a:lnTo>
-                    <a:pt x="294816" y="54698"/>
-                  </a:lnTo>
-                  <a:lnTo>
-                    <a:pt x="293213" y="70850"/>
-                  </a:lnTo>
-                  <a:lnTo>
-                    <a:pt x="290031" y="88557"/>
-                  </a:lnTo>
-                  <a:lnTo>
-                    <a:pt x="284858" y="107696"/>
-                  </a:lnTo>
-                  <a:lnTo>
-                    <a:pt x="277377" y="128026"/>
-                  </a:lnTo>
-                  <a:lnTo>
-                    <a:pt x="267176" y="149424"/>
-                  </a:lnTo>
-                  <a:lnTo>
-                    <a:pt x="97155" y="319446"/>
-                  </a:lnTo>
-                  <a:lnTo>
-                    <a:pt x="0" y="222291"/>
-                  </a:lnTo>
-                  <a:close/>
-                </a:path>
-              </a:pathLst>
-            </a:custGeom>
-            <a:noFill/>
-            <a:ln w="48577" cap="rnd">
-              <a:solidFill>
-                <a:srgbClr val="0077FF"/>
-              </a:solidFill>
-              <a:round/>
-            </a:ln>
-            <a:effectLst/>
-          </p:spPr>
-          <p:style>
-            <a:lnRef idx="1">
-              <a:schemeClr val="accent1"/>
-            </a:lnRef>
-            <a:fillRef idx="3">
-              <a:schemeClr val="accent1"/>
-            </a:fillRef>
-            <a:effectRef idx="2">
-              <a:schemeClr val="accent1"/>
-            </a:effectRef>
-            <a:fontRef idx="minor">
-              <a:schemeClr val="lt1"/>
-            </a:fontRef>
-          </p:style>
-          <p:txBody>
-            <a:bodyPr rtlCol="0" anchor="ctr"/>
-            <a:lstStyle/>
-            <a:p>
-              <a:pPr algn="ctr"/>
-            </a:p>
-          </p:txBody>
-        </p:sp>
-        <p:sp>
-          <p:nvSpPr>
-            <p:cNvPr id="5" name="Freeform 4"/>
-            <p:cNvSpPr/>
-            <p:nvPr/>
-          </p:nvSpPr>
-          <p:spPr>
-            <a:xfrm>
-              <a:off x="550723" y="1977390"/>
-              <a:ext cx="170022" cy="97155"/>
-            </a:xfrm>
-            <a:custGeom>
-              <a:avLst/>
-              <a:gdLst/>
-              <a:ahLst/>
-              <a:cxnLst/>
-              <a:rect l="l" t="t" r="r" b="b"/>
-              <a:pathLst>
-                <a:path w="170022" h="97155">
-                  <a:moveTo>
-                    <a:pt x="72867" y="97155"/>
-                  </a:moveTo>
-                  <a:lnTo>
-                    <a:pt x="0" y="97155"/>
-                  </a:lnTo>
-                  <a:lnTo>
-                    <a:pt x="72867" y="0"/>
-                  </a:lnTo>
-                  <a:lnTo>
-                    <a:pt x="170022" y="0"/>
-                  </a:lnTo>
-                </a:path>
-              </a:pathLst>
-            </a:custGeom>
-            <a:noFill/>
-            <a:ln w="48577" cap="rnd">
-              <a:solidFill>
-                <a:srgbClr val="0077FF"/>
-              </a:solidFill>
-              <a:round/>
-            </a:ln>
-            <a:effectLst/>
-          </p:spPr>
-          <p:style>
-            <a:lnRef idx="1">
-              <a:schemeClr val="accent1"/>
-            </a:lnRef>
-            <a:fillRef idx="3">
-              <a:schemeClr val="accent1"/>
-            </a:fillRef>
-            <a:effectRef idx="2">
-              <a:schemeClr val="accent1"/>
-            </a:effectRef>
-            <a:fontRef idx="minor">
-              <a:schemeClr val="lt1"/>
-            </a:fontRef>
-          </p:style>
-          <p:txBody>
-            <a:bodyPr rtlCol="0" anchor="ctr"/>
-            <a:lstStyle/>
-            <a:p>
-              <a:pPr algn="ctr"/>
-            </a:p>
-          </p:txBody>
-        </p:sp>
-        <p:sp>
-          <p:nvSpPr>
-            <p:cNvPr id="6" name="Freeform 5"/>
-            <p:cNvSpPr/>
-            <p:nvPr/>
-          </p:nvSpPr>
-          <p:spPr>
-            <a:xfrm>
-              <a:off x="720745" y="2074545"/>
-              <a:ext cx="97155" cy="170021"/>
-            </a:xfrm>
-            <a:custGeom>
-              <a:avLst/>
-              <a:gdLst/>
-              <a:ahLst/>
-              <a:cxnLst/>
-              <a:rect l="l" t="t" r="r" b="b"/>
-              <a:pathLst>
-                <a:path w="97155" h="170021">
-                  <a:moveTo>
-                    <a:pt x="0" y="97155"/>
-                  </a:moveTo>
-                  <a:lnTo>
-                    <a:pt x="0" y="170021"/>
-                  </a:lnTo>
-                  <a:lnTo>
-                    <a:pt x="97155" y="97155"/>
-                  </a:lnTo>
-                  <a:lnTo>
-                    <a:pt x="97155" y="0"/>
-                  </a:lnTo>
-                </a:path>
-              </a:pathLst>
-            </a:custGeom>
-            <a:noFill/>
-            <a:ln w="48577" cap="rnd">
-              <a:solidFill>
-                <a:srgbClr val="0077FF"/>
-              </a:solidFill>
-              <a:round/>
-            </a:ln>
-            <a:effectLst/>
-          </p:spPr>
-          <p:style>
-            <a:lnRef idx="1">
-              <a:schemeClr val="accent1"/>
-            </a:lnRef>
-            <a:fillRef idx="3">
-              <a:schemeClr val="accent1"/>
-            </a:fillRef>
-            <a:effectRef idx="2">
-              <a:schemeClr val="accent1"/>
-            </a:effectRef>
-            <a:fontRef idx="minor">
-              <a:schemeClr val="lt1"/>
-            </a:fontRef>
-          </p:style>
-          <p:txBody>
-            <a:bodyPr rtlCol="0" anchor="ctr"/>
-            <a:lstStyle/>
-            <a:p>
-              <a:pPr algn="ctr"/>
-            </a:p>
-          </p:txBody>
-        </p:sp>
-        <p:sp>
-          <p:nvSpPr>
-            <p:cNvPr id="7" name="Oval 6"/>
-            <p:cNvSpPr/>
-            <p:nvPr/>
-          </p:nvSpPr>
-          <p:spPr>
-            <a:xfrm>
-              <a:off x="771751" y="1955530"/>
-              <a:ext cx="68008" cy="68008"/>
-            </a:xfrm>
-            <a:prstGeom prst="ellipse">
-              <a:avLst/>
-            </a:prstGeom>
-            <a:noFill/>
-            <a:ln w="48577" cap="rnd">
-              <a:solidFill>
-                <a:srgbClr val="0077FF"/>
-              </a:solidFill>
-              <a:round/>
-            </a:ln>
-            <a:effectLst/>
-          </p:spPr>
-          <p:style>
-            <a:lnRef idx="1">
-              <a:schemeClr val="accent1"/>
-            </a:lnRef>
-            <a:fillRef idx="3">
-              <a:schemeClr val="accent1"/>
-            </a:fillRef>
-            <a:effectRef idx="2">
-              <a:schemeClr val="accent1"/>
-            </a:effectRef>
-            <a:fontRef idx="minor">
-              <a:schemeClr val="lt1"/>
-            </a:fontRef>
-          </p:style>
-          <p:txBody>
-            <a:bodyPr rtlCol="0" anchor="ctr"/>
-            <a:lstStyle/>
-            <a:p>
-              <a:pPr algn="ctr"/>
-            </a:p>
-          </p:txBody>
-        </p:sp>
-        <p:sp>
-          <p:nvSpPr>
-            <p:cNvPr id="8" name="Freeform 7"/>
-            <p:cNvSpPr/>
-            <p:nvPr/>
-          </p:nvSpPr>
-          <p:spPr>
-            <a:xfrm>
-              <a:off x="526435" y="2183844"/>
-              <a:ext cx="85010" cy="85011"/>
-            </a:xfrm>
-            <a:custGeom>
-              <a:avLst/>
-              <a:gdLst/>
-              <a:ahLst/>
-              <a:cxnLst/>
-              <a:rect l="l" t="t" r="r" b="b"/>
-              <a:pathLst>
-                <a:path w="85010" h="85011">
-                  <a:moveTo>
-                    <a:pt x="60721" y="0"/>
-                  </a:moveTo>
-                  <a:lnTo>
-                    <a:pt x="50156" y="4348"/>
-                  </a:lnTo>
-                  <a:lnTo>
-                    <a:pt x="40416" y="10007"/>
-                  </a:lnTo>
-                  <a:lnTo>
-                    <a:pt x="31526" y="16832"/>
-                  </a:lnTo>
-                  <a:lnTo>
-                    <a:pt x="23608" y="24677"/>
-                  </a:lnTo>
-                  <a:lnTo>
-                    <a:pt x="16710" y="33397"/>
-                  </a:lnTo>
-                  <a:lnTo>
-                    <a:pt x="10881" y="42845"/>
-                  </a:lnTo>
-                  <a:lnTo>
-                    <a:pt x="6217" y="52876"/>
-                  </a:lnTo>
-                  <a:lnTo>
-                    <a:pt x="2817" y="63345"/>
-                  </a:lnTo>
-                  <a:lnTo>
-                    <a:pt x="728" y="74105"/>
-                  </a:lnTo>
-                  <a:lnTo>
-                    <a:pt x="0" y="85011"/>
-                  </a:lnTo>
-                  <a:lnTo>
-                    <a:pt x="10905" y="84306"/>
-                  </a:lnTo>
-                  <a:lnTo>
-                    <a:pt x="21665" y="82193"/>
-                  </a:lnTo>
-                  <a:lnTo>
-                    <a:pt x="32134" y="78768"/>
-                  </a:lnTo>
-                  <a:lnTo>
-                    <a:pt x="42165" y="74129"/>
-                  </a:lnTo>
-                  <a:lnTo>
-                    <a:pt x="51613" y="68300"/>
-                  </a:lnTo>
-                  <a:lnTo>
-                    <a:pt x="60333" y="61402"/>
-                  </a:lnTo>
-                  <a:lnTo>
-                    <a:pt x="68178" y="53459"/>
-                  </a:lnTo>
-                  <a:lnTo>
-                    <a:pt x="75003" y="44594"/>
-                  </a:lnTo>
-                  <a:lnTo>
-                    <a:pt x="80662" y="34830"/>
-                  </a:lnTo>
-                  <a:lnTo>
-                    <a:pt x="85010" y="24289"/>
-                  </a:lnTo>
-                </a:path>
-              </a:pathLst>
-            </a:custGeom>
-            <a:noFill/>
-            <a:ln w="48577" cap="rnd">
-              <a:solidFill>
-                <a:srgbClr val="0077FF"/>
-              </a:solidFill>
-              <a:round/>
-            </a:ln>
-            <a:effectLst/>
-          </p:spPr>
-          <p:style>
-            <a:lnRef idx="1">
-              <a:schemeClr val="accent1"/>
-            </a:lnRef>
-            <a:fillRef idx="3">
-              <a:schemeClr val="accent1"/>
-            </a:fillRef>
-            <a:effectRef idx="2">
-              <a:schemeClr val="accent1"/>
-            </a:effectRef>
-            <a:fontRef idx="minor">
-              <a:schemeClr val="lt1"/>
-            </a:fontRef>
-          </p:style>
-          <p:txBody>
-            <a:bodyPr rtlCol="0" anchor="ctr"/>
-            <a:lstStyle/>
-            <a:p>
-              <a:pPr algn="ctr"/>
-            </a:p>
-          </p:txBody>
-        </p:sp>
-      </p:grpSp>
-      <p:sp>
-        <p:nvSpPr>
-          <p:cNvPr id="9" name="item_0"/>
-          <p:cNvSpPr txBox="1"/>
-          <p:nvPr/>
-        </p:nvSpPr>
-        <p:spPr>
-          <a:xfrm>
-            <a:off x="1274528" y="1792605"/>
-            <a:ext cx="10465635" cy="676275"/>
-          </a:xfrm>
-          <a:prstGeom prst="rect">
-            <a:avLst/>
-          </a:prstGeom>
-          <a:noFill/>
-        </p:spPr>
-        <p:txBody>
-          <a:bodyPr wrap="square" lIns="76200" rIns="76200" tIns="50800" bIns="50800">
-            <a:spAutoFit/>
-          </a:bodyPr>
-          <a:lstStyle/>
-          <a:p>
-            <a:pPr algn="l">
-              <a:spcAft>
-                <a:spcPts val="300"/>
-              </a:spcAft>
-              <a:defRPr sz="2800">
-                <a:solidFill>
-                  <a:srgbClr val="FFFFFF"/>
-                </a:solidFill>
-                <a:latin typeface="Play"/>
-                <a:ea typeface="Play"/>
-                <a:cs typeface="Play"/>
-              </a:defRPr>
-            </a:pPr>
-            <a:r>
-              <a:rPr sz="2800">
-                <a:solidFill>
-                  <a:srgbClr val="FFFFFF"/>
-                </a:solidFill>
-                <a:latin typeface="Play"/>
-                <a:ea typeface="Play"/>
-                <a:cs typeface="Play"/>
-              </a:rPr>
-              <a:t>Пилот длился 6 недель на двух командах</a:t>
-            </a:r>
-          </a:p>
-        </p:txBody>
-      </p:sp>
-      <p:grpSp>
-        <p:nvGrpSpPr>
-          <p:cNvPr id="10" name="icon:builtin-presentation"/>
-          <p:cNvGrpSpPr/>
-          <p:nvPr/>
-        </p:nvGrpSpPr>
-        <p:grpSpPr>
-          <a:xfrm>
-            <a:off x="502146" y="2703195"/>
-            <a:ext cx="437197" cy="388620"/>
-            <a:chOff x="502146" y="2703195"/>
-            <a:chExt cx="437197" cy="388620"/>
-          </a:xfrm>
-        </p:grpSpPr>
-        <p:sp>
-          <p:nvSpPr>
-            <p:cNvPr id="11" name="Rounded Rectangle 10"/>
-            <p:cNvSpPr/>
-            <p:nvPr/>
-          </p:nvSpPr>
-          <p:spPr>
-            <a:xfrm>
-              <a:off x="502146" y="2703195"/>
-              <a:ext cx="437197" cy="291465"/>
-            </a:xfrm>
-            <a:prstGeom prst="roundRect">
-              <a:avLst>
-                <a:gd name="adj" fmla="val 12500"/>
-              </a:avLst>
-            </a:prstGeom>
-            <a:noFill/>
-            <a:ln w="48577" cap="rnd">
-              <a:solidFill>
-                <a:srgbClr val="0077FF"/>
-              </a:solidFill>
-              <a:round/>
-            </a:ln>
-            <a:effectLst/>
-          </p:spPr>
-          <p:style>
-            <a:lnRef idx="1">
-              <a:schemeClr val="accent1"/>
-            </a:lnRef>
-            <a:fillRef idx="3">
-              <a:schemeClr val="accent1"/>
-            </a:fillRef>
-            <a:effectRef idx="2">
-              <a:schemeClr val="accent1"/>
-            </a:effectRef>
-            <a:fontRef idx="minor">
-              <a:schemeClr val="lt1"/>
-            </a:fontRef>
-          </p:style>
-          <p:txBody>
-            <a:bodyPr rtlCol="0" anchor="ctr"/>
-            <a:lstStyle/>
-            <a:p>
-              <a:pPr algn="ctr"/>
-            </a:p>
-          </p:txBody>
-        </p:sp>
-        <p:sp>
-          <p:nvSpPr>
-            <p:cNvPr id="12" name="Freeform 11"/>
-            <p:cNvSpPr/>
-            <p:nvPr/>
-          </p:nvSpPr>
-          <p:spPr>
-            <a:xfrm>
-              <a:off x="720745" y="2994660"/>
-              <a:ext cx="0" cy="97155"/>
-            </a:xfrm>
-            <a:custGeom>
-              <a:avLst/>
-              <a:gdLst/>
-              <a:ahLst/>
-              <a:cxnLst/>
-              <a:rect l="l" t="t" r="r" b="b"/>
-              <a:pathLst>
-                <a:path w="0" h="97155">
-                  <a:moveTo>
-                    <a:pt x="0" y="0"/>
-                  </a:moveTo>
-                  <a:lnTo>
-                    <a:pt x="0" y="97155"/>
-                  </a:lnTo>
-                </a:path>
-              </a:pathLst>
-            </a:custGeom>
-            <a:noFill/>
-            <a:ln w="48577" cap="rnd">
-              <a:solidFill>
-                <a:srgbClr val="0077FF"/>
-              </a:solidFill>
-              <a:round/>
-            </a:ln>
-            <a:effectLst/>
-          </p:spPr>
-          <p:style>
-            <a:lnRef idx="1">
-              <a:schemeClr val="accent1"/>
-            </a:lnRef>
-            <a:fillRef idx="3">
-              <a:schemeClr val="accent1"/>
-            </a:fillRef>
-            <a:effectRef idx="2">
-              <a:schemeClr val="accent1"/>
-            </a:effectRef>
-            <a:fontRef idx="minor">
-              <a:schemeClr val="lt1"/>
-            </a:fontRef>
-          </p:style>
-          <p:txBody>
-            <a:bodyPr rtlCol="0" anchor="ctr"/>
-            <a:lstStyle/>
-            <a:p>
-              <a:pPr algn="ctr"/>
-            </a:p>
-          </p:txBody>
-        </p:sp>
-        <p:sp>
-          <p:nvSpPr>
-            <p:cNvPr id="13" name="Freeform 12"/>
-            <p:cNvSpPr/>
-            <p:nvPr/>
-          </p:nvSpPr>
-          <p:spPr>
-            <a:xfrm>
-              <a:off x="623590" y="3091815"/>
-              <a:ext cx="194310" cy="0"/>
-            </a:xfrm>
-            <a:custGeom>
-              <a:avLst/>
-              <a:gdLst/>
-              <a:ahLst/>
-              <a:cxnLst/>
-              <a:rect l="l" t="t" r="r" b="b"/>
-              <a:pathLst>
-                <a:path w="194310" h="0">
-                  <a:moveTo>
-                    <a:pt x="0" y="0"/>
-                  </a:moveTo>
-                  <a:lnTo>
-                    <a:pt x="194310" y="0"/>
-                  </a:lnTo>
-                </a:path>
-              </a:pathLst>
-            </a:custGeom>
-            <a:noFill/>
-            <a:ln w="48577" cap="rnd">
-              <a:solidFill>
-                <a:srgbClr val="0077FF"/>
-              </a:solidFill>
-              <a:round/>
-            </a:ln>
-            <a:effectLst/>
-          </p:spPr>
-          <p:style>
-            <a:lnRef idx="1">
-              <a:schemeClr val="accent1"/>
-            </a:lnRef>
-            <a:fillRef idx="3">
-              <a:schemeClr val="accent1"/>
-            </a:fillRef>
-            <a:effectRef idx="2">
-              <a:schemeClr val="accent1"/>
-            </a:effectRef>
-            <a:fontRef idx="minor">
-              <a:schemeClr val="lt1"/>
-            </a:fontRef>
-          </p:style>
-          <p:txBody>
-            <a:bodyPr rtlCol="0" anchor="ctr"/>
-            <a:lstStyle/>
-            <a:p>
-              <a:pPr algn="ctr"/>
-            </a:p>
-          </p:txBody>
-        </p:sp>
-        <p:sp>
-          <p:nvSpPr>
-            <p:cNvPr id="14" name="Freeform 13"/>
-            <p:cNvSpPr/>
-            <p:nvPr/>
-          </p:nvSpPr>
-          <p:spPr>
-            <a:xfrm>
-              <a:off x="599301" y="2776061"/>
-              <a:ext cx="242887" cy="121444"/>
-            </a:xfrm>
-            <a:custGeom>
-              <a:avLst/>
-              <a:gdLst/>
-              <a:ahLst/>
-              <a:cxnLst/>
-              <a:rect l="l" t="t" r="r" b="b"/>
-              <a:pathLst>
-                <a:path w="242887" h="121444">
-                  <a:moveTo>
-                    <a:pt x="0" y="121444"/>
-                  </a:moveTo>
-                  <a:lnTo>
-                    <a:pt x="72866" y="48577"/>
-                  </a:lnTo>
-                  <a:lnTo>
-                    <a:pt x="145732" y="97155"/>
-                  </a:lnTo>
-                  <a:lnTo>
-                    <a:pt x="242887" y="0"/>
-                  </a:lnTo>
-                </a:path>
-              </a:pathLst>
-            </a:custGeom>
-            <a:noFill/>
-            <a:ln w="48577" cap="rnd">
-              <a:solidFill>
-                <a:srgbClr val="0077FF"/>
-              </a:solidFill>
-              <a:round/>
-            </a:ln>
-            <a:effectLst/>
-          </p:spPr>
-          <p:style>
-            <a:lnRef idx="1">
-              <a:schemeClr val="accent1"/>
-            </a:lnRef>
-            <a:fillRef idx="3">
-              <a:schemeClr val="accent1"/>
-            </a:fillRef>
-            <a:effectRef idx="2">
-              <a:schemeClr val="accent1"/>
-            </a:effectRef>
-            <a:fontRef idx="minor">
-              <a:schemeClr val="lt1"/>
-            </a:fontRef>
-          </p:style>
-          <p:txBody>
-            <a:bodyPr rtlCol="0" anchor="ctr"/>
-            <a:lstStyle/>
-            <a:p>
-              <a:pPr algn="ctr"/>
-            </a:p>
-          </p:txBody>
-        </p:sp>
-      </p:grpSp>
-      <p:sp>
-        <p:nvSpPr>
-          <p:cNvPr id="15" name="item_1"/>
-          <p:cNvSpPr txBox="1"/>
-          <p:nvPr/>
-        </p:nvSpPr>
-        <p:spPr>
-          <a:xfrm>
-            <a:off x="1274528" y="2615565"/>
-            <a:ext cx="10465635" cy="676275"/>
-          </a:xfrm>
-          <a:prstGeom prst="rect">
-            <a:avLst/>
-          </a:prstGeom>
-          <a:noFill/>
-        </p:spPr>
-        <p:txBody>
-          <a:bodyPr wrap="square" lIns="76200" rIns="76200" tIns="50800" bIns="50800">
-            <a:spAutoFit/>
-          </a:bodyPr>
-          <a:lstStyle/>
-          <a:p>
-            <a:pPr algn="l">
-              <a:spcAft>
-                <a:spcPts val="300"/>
-              </a:spcAft>
-              <a:defRPr sz="2800">
-                <a:solidFill>
-                  <a:srgbClr val="FFFFFF"/>
-                </a:solidFill>
-                <a:latin typeface="Play"/>
-                <a:ea typeface="Play"/>
-                <a:cs typeface="Play"/>
-              </a:defRPr>
-            </a:pPr>
-            <a:r>
-              <a:rPr sz="2800">
-                <a:solidFill>
-                  <a:srgbClr val="FFFFFF"/>
-                </a:solidFill>
-                <a:latin typeface="Play"/>
-                <a:ea typeface="Play"/>
-                <a:cs typeface="Play"/>
-              </a:rPr>
-              <a:t>Собрано 68 презентаций</a:t>
-            </a:r>
-          </a:p>
-        </p:txBody>
-      </p:sp>
-      <p:grpSp>
-        <p:nvGrpSpPr>
-          <p:cNvPr id="16" name="icon:builtin-clock"/>
-          <p:cNvGrpSpPr/>
-          <p:nvPr/>
-        </p:nvGrpSpPr>
-        <p:grpSpPr>
-          <a:xfrm>
-            <a:off x="502146" y="3501866"/>
-            <a:ext cx="437197" cy="437197"/>
-            <a:chOff x="502146" y="3501866"/>
-            <a:chExt cx="437197" cy="437197"/>
-          </a:xfrm>
-        </p:grpSpPr>
-        <p:sp>
-          <p:nvSpPr>
-            <p:cNvPr id="17" name="Oval 16"/>
-            <p:cNvSpPr/>
-            <p:nvPr/>
-          </p:nvSpPr>
-          <p:spPr>
-            <a:xfrm>
-              <a:off x="502146" y="3501866"/>
-              <a:ext cx="437197" cy="437197"/>
-            </a:xfrm>
-            <a:prstGeom prst="ellipse">
-              <a:avLst/>
-            </a:prstGeom>
-            <a:noFill/>
-            <a:ln w="48577" cap="rnd">
-              <a:solidFill>
-                <a:srgbClr val="0077FF"/>
-              </a:solidFill>
-              <a:round/>
-            </a:ln>
-            <a:effectLst/>
-          </p:spPr>
-          <p:style>
-            <a:lnRef idx="1">
-              <a:schemeClr val="accent1"/>
-            </a:lnRef>
-            <a:fillRef idx="3">
-              <a:schemeClr val="accent1"/>
-            </a:fillRef>
-            <a:effectRef idx="2">
-              <a:schemeClr val="accent1"/>
-            </a:effectRef>
-            <a:fontRef idx="minor">
-              <a:schemeClr val="lt1"/>
-            </a:fontRef>
-          </p:style>
-          <p:txBody>
-            <a:bodyPr rtlCol="0" anchor="ctr"/>
-            <a:lstStyle/>
-            <a:p>
-              <a:pPr algn="ctr"/>
-            </a:p>
-          </p:txBody>
-        </p:sp>
-        <p:sp>
-          <p:nvSpPr>
-            <p:cNvPr id="18" name="Freeform 17"/>
-            <p:cNvSpPr/>
-            <p:nvPr/>
-          </p:nvSpPr>
-          <p:spPr>
-            <a:xfrm>
-              <a:off x="720745" y="3599021"/>
-              <a:ext cx="85010" cy="170021"/>
-            </a:xfrm>
-            <a:custGeom>
-              <a:avLst/>
-              <a:gdLst/>
-              <a:ahLst/>
-              <a:cxnLst/>
-              <a:rect l="l" t="t" r="r" b="b"/>
-              <a:pathLst>
-                <a:path w="85010" h="170021">
-                  <a:moveTo>
-                    <a:pt x="0" y="0"/>
-                  </a:moveTo>
-                  <a:lnTo>
-                    <a:pt x="0" y="121444"/>
-                  </a:lnTo>
-                  <a:lnTo>
-                    <a:pt x="85010" y="170021"/>
-                  </a:lnTo>
-                </a:path>
-              </a:pathLst>
-            </a:custGeom>
-            <a:noFill/>
-            <a:ln w="48577" cap="rnd">
-              <a:solidFill>
-                <a:srgbClr val="0077FF"/>
-              </a:solidFill>
-              <a:round/>
-            </a:ln>
-            <a:effectLst/>
-          </p:spPr>
-          <p:style>
-            <a:lnRef idx="1">
-              <a:schemeClr val="accent1"/>
-            </a:lnRef>
-            <a:fillRef idx="3">
-              <a:schemeClr val="accent1"/>
-            </a:fillRef>
-            <a:effectRef idx="2">
-              <a:schemeClr val="accent1"/>
-            </a:effectRef>
-            <a:fontRef idx="minor">
-              <a:schemeClr val="lt1"/>
-            </a:fontRef>
-          </p:style>
-          <p:txBody>
-            <a:bodyPr rtlCol="0" anchor="ctr"/>
-            <a:lstStyle/>
-            <a:p>
-              <a:pPr algn="ctr"/>
-            </a:p>
-          </p:txBody>
-        </p:sp>
-      </p:grpSp>
-      <p:sp>
-        <p:nvSpPr>
-          <p:cNvPr id="19" name="item_2"/>
-          <p:cNvSpPr txBox="1"/>
-          <p:nvPr/>
-        </p:nvSpPr>
-        <p:spPr>
-          <a:xfrm>
-            <a:off x="1274528" y="3438525"/>
-            <a:ext cx="10465635" cy="676275"/>
-          </a:xfrm>
-          <a:prstGeom prst="rect">
-            <a:avLst/>
-          </a:prstGeom>
-          <a:noFill/>
-        </p:spPr>
-        <p:txBody>
-          <a:bodyPr wrap="square" lIns="76200" rIns="76200" tIns="50800" bIns="50800">
-            <a:spAutoFit/>
-          </a:bodyPr>
-          <a:lstStyle/>
-          <a:p>
-            <a:pPr algn="l">
-              <a:spcAft>
-                <a:spcPts val="300"/>
-              </a:spcAft>
-              <a:defRPr sz="2800">
-                <a:solidFill>
-                  <a:srgbClr val="FFFFFF"/>
-                </a:solidFill>
-                <a:latin typeface="Play"/>
-                <a:ea typeface="Play"/>
-                <a:cs typeface="Play"/>
-              </a:defRPr>
-            </a:pPr>
-            <a:r>
-              <a:rPr sz="2800">
-                <a:solidFill>
-                  <a:srgbClr val="FFFFFF"/>
-                </a:solidFill>
-                <a:latin typeface="Play"/>
-                <a:ea typeface="Play"/>
-                <a:cs typeface="Play"/>
-              </a:rPr>
-              <a:t>Среднее время сборки 4 минуты</a:t>
-            </a:r>
-          </a:p>
-        </p:txBody>
-      </p:sp>
-      <p:grpSp>
-        <p:nvGrpSpPr>
-          <p:cNvPr id="20" name="icon:builtin-check"/>
-          <p:cNvGrpSpPr/>
-          <p:nvPr/>
-        </p:nvGrpSpPr>
-        <p:grpSpPr>
-          <a:xfrm>
-            <a:off x="502146" y="4324825"/>
-            <a:ext cx="437197" cy="437197"/>
-            <a:chOff x="502146" y="4324825"/>
-            <a:chExt cx="437197" cy="437197"/>
-          </a:xfrm>
-        </p:grpSpPr>
-        <p:sp>
-          <p:nvSpPr>
-            <p:cNvPr id="21" name="Oval 20"/>
-            <p:cNvSpPr/>
-            <p:nvPr/>
-          </p:nvSpPr>
-          <p:spPr>
-            <a:xfrm>
-              <a:off x="502146" y="4324825"/>
-              <a:ext cx="437197" cy="437197"/>
-            </a:xfrm>
-            <a:prstGeom prst="ellipse">
-              <a:avLst/>
-            </a:prstGeom>
-            <a:noFill/>
-            <a:ln w="48577" cap="rnd">
-              <a:solidFill>
-                <a:srgbClr val="0077FF"/>
-              </a:solidFill>
-              <a:round/>
-            </a:ln>
-            <a:effectLst/>
-          </p:spPr>
-          <p:style>
-            <a:lnRef idx="1">
-              <a:schemeClr val="accent1"/>
-            </a:lnRef>
-            <a:fillRef idx="3">
-              <a:schemeClr val="accent1"/>
-            </a:fillRef>
-            <a:effectRef idx="2">
-              <a:schemeClr val="accent1"/>
-            </a:effectRef>
-            <a:fontRef idx="minor">
-              <a:schemeClr val="lt1"/>
-            </a:fontRef>
-          </p:style>
-          <p:txBody>
-            <a:bodyPr rtlCol="0" anchor="ctr"/>
-            <a:lstStyle/>
-            <a:p>
-              <a:pPr algn="ctr"/>
-            </a:p>
-          </p:txBody>
-        </p:sp>
-        <p:sp>
-          <p:nvSpPr>
-            <p:cNvPr id="22" name="Freeform 21"/>
-            <p:cNvSpPr/>
-            <p:nvPr/>
-          </p:nvSpPr>
-          <p:spPr>
-            <a:xfrm>
-              <a:off x="623590" y="4470557"/>
-              <a:ext cx="194310" cy="145733"/>
-            </a:xfrm>
-            <a:custGeom>
-              <a:avLst/>
-              <a:gdLst/>
-              <a:ahLst/>
-              <a:cxnLst/>
-              <a:rect l="l" t="t" r="r" b="b"/>
-              <a:pathLst>
-                <a:path w="194310" h="145733">
-                  <a:moveTo>
-                    <a:pt x="0" y="72867"/>
-                  </a:moveTo>
-                  <a:lnTo>
-                    <a:pt x="72866" y="145733"/>
-                  </a:lnTo>
-                  <a:lnTo>
-                    <a:pt x="194310" y="0"/>
-                  </a:lnTo>
-                </a:path>
-              </a:pathLst>
-            </a:custGeom>
-            <a:noFill/>
-            <a:ln w="48577" cap="rnd">
-              <a:solidFill>
-                <a:srgbClr val="0077FF"/>
-              </a:solidFill>
-              <a:round/>
-            </a:ln>
-            <a:effectLst/>
-          </p:spPr>
-          <p:style>
-            <a:lnRef idx="1">
-              <a:schemeClr val="accent1"/>
-            </a:lnRef>
-            <a:fillRef idx="3">
-              <a:schemeClr val="accent1"/>
-            </a:fillRef>
-            <a:effectRef idx="2">
-              <a:schemeClr val="accent1"/>
-            </a:effectRef>
-            <a:fontRef idx="minor">
-              <a:schemeClr val="lt1"/>
-            </a:fontRef>
-          </p:style>
-          <p:txBody>
-            <a:bodyPr rtlCol="0" anchor="ctr"/>
-            <a:lstStyle/>
-            <a:p>
-              <a:pPr algn="ctr"/>
-            </a:p>
-          </p:txBody>
-        </p:sp>
-      </p:grpSp>
-      <p:sp>
-        <p:nvSpPr>
-          <p:cNvPr id="23" name="item_3"/>
-          <p:cNvSpPr txBox="1"/>
-          <p:nvPr/>
-        </p:nvSpPr>
-        <p:spPr>
-          <a:xfrm>
-            <a:off x="1274528" y="4261484"/>
-            <a:ext cx="10465635" cy="676275"/>
-          </a:xfrm>
-          <a:prstGeom prst="rect">
-            <a:avLst/>
-          </a:prstGeom>
-          <a:noFill/>
-        </p:spPr>
-        <p:txBody>
-          <a:bodyPr wrap="square" lIns="76200" rIns="76200" tIns="50800" bIns="50800">
-            <a:spAutoFit/>
-          </a:bodyPr>
-          <a:lstStyle/>
-          <a:p>
-            <a:pPr algn="l">
-              <a:spcAft>
-                <a:spcPts val="300"/>
-              </a:spcAft>
-              <a:defRPr sz="2800">
-                <a:solidFill>
-                  <a:srgbClr val="FFFFFF"/>
-                </a:solidFill>
-                <a:latin typeface="Play"/>
-                <a:ea typeface="Play"/>
-                <a:cs typeface="Play"/>
-              </a:defRPr>
-            </a:pPr>
-            <a:r>
-              <a:rPr sz="2800">
-                <a:solidFill>
-                  <a:srgbClr val="FFFFFF"/>
-                </a:solidFill>
-                <a:latin typeface="Play"/>
-                <a:ea typeface="Play"/>
-                <a:cs typeface="Play"/>
-              </a:rPr>
-              <a:t>Первый вариант готов за 1 день</a:t>
-            </a:r>
-          </a:p>
-        </p:txBody>
-      </p:sp>
-      <p:grpSp>
-        <p:nvGrpSpPr>
-          <p:cNvPr id="24" name="icon:builtin-cross"/>
-          <p:cNvGrpSpPr/>
-          <p:nvPr/>
-        </p:nvGrpSpPr>
-        <p:grpSpPr>
-          <a:xfrm>
-            <a:off x="502146" y="5147786"/>
-            <a:ext cx="437197" cy="437197"/>
-            <a:chOff x="502146" y="5147786"/>
-            <a:chExt cx="437197" cy="437197"/>
-          </a:xfrm>
-        </p:grpSpPr>
-        <p:sp>
-          <p:nvSpPr>
-            <p:cNvPr id="25" name="Oval 24"/>
-            <p:cNvSpPr/>
-            <p:nvPr/>
-          </p:nvSpPr>
-          <p:spPr>
-            <a:xfrm>
-              <a:off x="502146" y="5147786"/>
-              <a:ext cx="437197" cy="437197"/>
-            </a:xfrm>
-            <a:prstGeom prst="ellipse">
-              <a:avLst/>
-            </a:prstGeom>
-            <a:noFill/>
-            <a:ln w="48577" cap="rnd">
-              <a:solidFill>
-                <a:srgbClr val="0077FF"/>
-              </a:solidFill>
-              <a:round/>
-            </a:ln>
-            <a:effectLst/>
-          </p:spPr>
-          <p:style>
-            <a:lnRef idx="1">
-              <a:schemeClr val="accent1"/>
-            </a:lnRef>
-            <a:fillRef idx="3">
-              <a:schemeClr val="accent1"/>
-            </a:fillRef>
-            <a:effectRef idx="2">
-              <a:schemeClr val="accent1"/>
-            </a:effectRef>
-            <a:fontRef idx="minor">
-              <a:schemeClr val="lt1"/>
-            </a:fontRef>
-          </p:style>
-          <p:txBody>
-            <a:bodyPr rtlCol="0" anchor="ctr"/>
-            <a:lstStyle/>
-            <a:p>
-              <a:pPr algn="ctr"/>
-            </a:p>
-          </p:txBody>
-        </p:sp>
-        <p:sp>
-          <p:nvSpPr>
-            <p:cNvPr id="26" name="Freeform 25"/>
-            <p:cNvSpPr/>
-            <p:nvPr/>
-          </p:nvSpPr>
-          <p:spPr>
-            <a:xfrm>
-              <a:off x="647878" y="5293518"/>
-              <a:ext cx="145733" cy="145733"/>
-            </a:xfrm>
-            <a:custGeom>
-              <a:avLst/>
-              <a:gdLst/>
-              <a:ahLst/>
-              <a:cxnLst/>
-              <a:rect l="l" t="t" r="r" b="b"/>
-              <a:pathLst>
-                <a:path w="145733" h="145733">
-                  <a:moveTo>
-                    <a:pt x="0" y="0"/>
-                  </a:moveTo>
-                  <a:lnTo>
-                    <a:pt x="145733" y="145733"/>
-                  </a:lnTo>
-                </a:path>
-              </a:pathLst>
-            </a:custGeom>
-            <a:noFill/>
-            <a:ln w="48577" cap="rnd">
-              <a:solidFill>
-                <a:srgbClr val="0077FF"/>
-              </a:solidFill>
-              <a:round/>
-            </a:ln>
-            <a:effectLst/>
-          </p:spPr>
-          <p:style>
-            <a:lnRef idx="1">
-              <a:schemeClr val="accent1"/>
-            </a:lnRef>
-            <a:fillRef idx="3">
-              <a:schemeClr val="accent1"/>
-            </a:fillRef>
-            <a:effectRef idx="2">
-              <a:schemeClr val="accent1"/>
-            </a:effectRef>
-            <a:fontRef idx="minor">
-              <a:schemeClr val="lt1"/>
-            </a:fontRef>
-          </p:style>
-          <p:txBody>
-            <a:bodyPr rtlCol="0" anchor="ctr"/>
-            <a:lstStyle/>
-            <a:p>
-              <a:pPr algn="ctr"/>
-            </a:p>
-          </p:txBody>
-        </p:sp>
-        <p:sp>
-          <p:nvSpPr>
-            <p:cNvPr id="27" name="Freeform 26"/>
-            <p:cNvSpPr/>
-            <p:nvPr/>
-          </p:nvSpPr>
-          <p:spPr>
-            <a:xfrm>
-              <a:off x="647878" y="5293518"/>
-              <a:ext cx="145733" cy="145733"/>
-            </a:xfrm>
-            <a:custGeom>
-              <a:avLst/>
-              <a:gdLst/>
-              <a:ahLst/>
-              <a:cxnLst/>
-              <a:rect l="l" t="t" r="r" b="b"/>
-              <a:pathLst>
-                <a:path w="145733" h="145733">
-                  <a:moveTo>
-                    <a:pt x="145733" y="0"/>
-                  </a:moveTo>
-                  <a:lnTo>
-                    <a:pt x="0" y="145733"/>
-                  </a:lnTo>
-                </a:path>
-              </a:pathLst>
-            </a:custGeom>
-            <a:noFill/>
-            <a:ln w="48577" cap="rnd">
-              <a:solidFill>
-                <a:srgbClr val="0077FF"/>
-              </a:solidFill>
-              <a:round/>
-            </a:ln>
-            <a:effectLst/>
-          </p:spPr>
-          <p:style>
-            <a:lnRef idx="1">
-              <a:schemeClr val="accent1"/>
-            </a:lnRef>
-            <a:fillRef idx="3">
-              <a:schemeClr val="accent1"/>
-            </a:fillRef>
-            <a:effectRef idx="2">
-              <a:schemeClr val="accent1"/>
-            </a:effectRef>
-            <a:fontRef idx="minor">
-              <a:schemeClr val="lt1"/>
-            </a:fontRef>
-          </p:style>
-          <p:txBody>
-            <a:bodyPr rtlCol="0" anchor="ctr"/>
-            <a:lstStyle/>
-            <a:p>
-              <a:pPr algn="ctr"/>
-            </a:p>
-          </p:txBody>
-        </p:sp>
-      </p:grpSp>
-      <p:sp>
-        <p:nvSpPr>
-          <p:cNvPr id="28" name="item_4"/>
-          <p:cNvSpPr txBox="1"/>
-          <p:nvPr/>
-        </p:nvSpPr>
-        <p:spPr>
-          <a:xfrm>
-            <a:off x="1274528" y="5084445"/>
-            <a:ext cx="10465635" cy="676275"/>
-          </a:xfrm>
-          <a:prstGeom prst="rect">
-            <a:avLst/>
-          </a:prstGeom>
-          <a:noFill/>
-        </p:spPr>
-        <p:txBody>
-          <a:bodyPr wrap="square" lIns="76200" rIns="76200" tIns="50800" bIns="50800">
-            <a:spAutoFit/>
-          </a:bodyPr>
-          <a:lstStyle/>
-          <a:p>
-            <a:pPr algn="l">
-              <a:spcAft>
-                <a:spcPts val="300"/>
-              </a:spcAft>
-              <a:defRPr sz="2800">
-                <a:solidFill>
-                  <a:srgbClr val="FFFFFF"/>
-                </a:solidFill>
-                <a:latin typeface="Play"/>
-                <a:ea typeface="Play"/>
-                <a:cs typeface="Play"/>
-              </a:defRPr>
-            </a:pPr>
-            <a:r>
-              <a:rPr sz="2800">
-                <a:solidFill>
-                  <a:srgbClr val="FFFFFF"/>
-                </a:solidFill>
-                <a:latin typeface="Play"/>
-                <a:ea typeface="Play"/>
-                <a:cs typeface="Play"/>
-              </a:rPr>
-              <a:t>Нарушения стиля 2 из 68, исправлены автоматически</a:t>
-            </a:r>
-          </a:p>
-        </p:txBody>
-      </p:sp>
+        </p:nvGraphicFramePr>
+        <p:xfrm>
+          <a:off x="429280" y="1848385"/>
+          <a:ext cx="11310884" cy="4049494"/>
+        </p:xfrm>
+        <a:graphic>
+          <a:graphicData uri="http://schemas.openxmlformats.org/drawingml/2006/chart">
+            <c:chart xmlns:c="http://schemas.openxmlformats.org/drawingml/2006/chart" r:id="rId4"/>
+          </a:graphicData>
+        </a:graphic>
+      </p:graphicFrame>
     </p:spTree>
   </p:cSld>
   <p:clrMapOvr>
@@ -13262,7 +12354,7 @@
         <p:spPr>
           <a:xfrm>
             <a:off x="429280" y="424715"/>
-            <a:ext cx="7827264" cy="822960"/>
+            <a:ext cx="7827264" cy="1183640"/>
           </a:xfrm>
           <a:prstGeom prst="rect">
             <a:avLst/>
@@ -13297,158 +12389,29 @@
                 <a:ea typeface="Play"/>
                 <a:cs typeface="Play"/>
               </a:rPr>
-              <a:t>Что мы просим решить</a:t>
+              <a:t>Нарушений фирменного стиля — 2 из 68</a:t>
             </a:r>
           </a:p>
         </p:txBody>
       </p:sp>
-      <p:sp>
-        <p:nvSpPr>
-          <p:cNvPr id="3" name="card_0"/>
-          <p:cNvSpPr txBox="1"/>
+      <p:graphicFrame>
+        <p:nvGraphicFramePr>
+          <p:cNvPr id="3" name="Chart 2"/>
+          <p:cNvGraphicFramePr>
+            <a:graphicFrameLocks noGrp="1"/>
+          </p:cNvGraphicFramePr>
           <p:nvPr/>
-        </p:nvSpPr>
-        <p:spPr>
-          <a:xfrm>
-            <a:off x="568147" y="1818894"/>
-            <a:ext cx="3115177" cy="3220212"/>
-          </a:xfrm>
-          <a:prstGeom prst="rect">
-            <a:avLst/>
-          </a:prstGeom>
-          <a:noFill/>
-        </p:spPr>
-        <p:txBody>
-          <a:bodyPr wrap="square" lIns="76200" rIns="76200" tIns="50800" bIns="50800">
-            <a:spAutoFit/>
-          </a:bodyPr>
-          <a:lstStyle/>
-          <a:p>
-            <a:pPr algn="l">
-              <a:spcAft>
-                <a:spcPts val="300"/>
-              </a:spcAft>
-              <a:defRPr sz="2800" b="0">
-                <a:solidFill>
-                  <a:srgbClr val="FFFFFF"/>
-                </a:solidFill>
-                <a:latin typeface="Play"/>
-                <a:ea typeface="Play"/>
-                <a:cs typeface="Play"/>
-              </a:defRPr>
-            </a:pPr>
-            <a:r>
-              <a:rPr sz="2800" b="0">
-                <a:solidFill>
-                  <a:srgbClr val="FFFFFF"/>
-                </a:solidFill>
-                <a:latin typeface="Play"/>
-                <a:ea typeface="Play"/>
-                <a:cs typeface="Play"/>
-              </a:rPr>
-              <a:t>Одобрить запуск сервиса на всю компанию</a:t>
-            </a:r>
-          </a:p>
-        </p:txBody>
-      </p:sp>
-      <p:sp>
-        <p:nvSpPr>
-          <p:cNvPr id="4" name="card_1"/>
-          <p:cNvSpPr txBox="1"/>
-          <p:nvPr/>
-        </p:nvSpPr>
-        <p:spPr>
-          <a:xfrm>
-            <a:off x="4209288" y="1818894"/>
-            <a:ext cx="3115177" cy="3220212"/>
-          </a:xfrm>
-          <a:prstGeom prst="rect">
-            <a:avLst/>
-          </a:prstGeom>
-          <a:noFill/>
-        </p:spPr>
-        <p:txBody>
-          <a:bodyPr wrap="square" lIns="76200" rIns="76200" tIns="50800" bIns="50800">
-            <a:spAutoFit/>
-          </a:bodyPr>
-          <a:lstStyle/>
-          <a:p>
-            <a:pPr algn="l">
-              <a:spcAft>
-                <a:spcPts val="300"/>
-              </a:spcAft>
-              <a:defRPr sz="2800" b="0">
-                <a:solidFill>
-                  <a:srgbClr val="FFFFFF"/>
-                </a:solidFill>
-                <a:latin typeface="Play"/>
-                <a:ea typeface="Play"/>
-                <a:cs typeface="Play"/>
-              </a:defRPr>
-            </a:pPr>
-            <a:r>
-              <a:rPr sz="2800" b="0">
-                <a:solidFill>
-                  <a:srgbClr val="FFFFFF"/>
-                </a:solidFill>
-                <a:latin typeface="Play"/>
-                <a:ea typeface="Play"/>
-                <a:cs typeface="Play"/>
-              </a:rPr>
-              <a:t>Выделить бюджет на интеграцию и поддержку</a:t>
-            </a:r>
-          </a:p>
-        </p:txBody>
-      </p:sp>
-      <p:sp>
-        <p:nvSpPr>
-          <p:cNvPr id="5" name="card_2"/>
-          <p:cNvSpPr txBox="1"/>
-          <p:nvPr/>
-        </p:nvSpPr>
-        <p:spPr>
-          <a:xfrm>
-            <a:off x="7881884" y="1818894"/>
-            <a:ext cx="3115177" cy="3220212"/>
-          </a:xfrm>
-          <a:prstGeom prst="rect">
-            <a:avLst/>
-          </a:prstGeom>
-          <a:noFill/>
-        </p:spPr>
-        <p:txBody>
-          <a:bodyPr wrap="square" lIns="76200" rIns="76200" tIns="50800" bIns="50800">
-            <a:spAutoFit/>
-          </a:bodyPr>
-          <a:lstStyle/>
-          <a:p>
-            <a:pPr algn="l">
-              <a:spcAft>
-                <a:spcPts val="300"/>
-              </a:spcAft>
-              <a:defRPr sz="2000" b="0">
-                <a:solidFill>
-                  <a:srgbClr val="FFFFFF"/>
-                </a:solidFill>
-                <a:latin typeface="Play"/>
-                <a:ea typeface="Play"/>
-                <a:cs typeface="Play"/>
-              </a:defRPr>
-            </a:pPr>
-            <a:r>
-              <a:rPr sz="2000" b="0">
-                <a:solidFill>
-                  <a:srgbClr val="FFFFFF"/>
-                </a:solidFill>
-                <a:latin typeface="Play"/>
-                <a:ea typeface="Play"/>
-                <a:cs typeface="Play"/>
-              </a:rPr>
-              <a:t>Согласовать сроки и ответственных за расширение</a:t>
-            </a:r>
-          </a:p>
-        </p:txBody>
-      </p:sp>
+        </p:nvGraphicFramePr>
+        <p:xfrm>
+          <a:off x="429280" y="2431298"/>
+          <a:ext cx="11310884" cy="3466581"/>
+        </p:xfrm>
+        <a:graphic>
+          <a:graphicData uri="http://schemas.openxmlformats.org/drawingml/2006/chart">
+            <c:chart xmlns:c="http://schemas.openxmlformats.org/drawingml/2006/chart" r:id="rId3"/>
+          </a:graphicData>
+        </a:graphic>
+      </p:graphicFrame>
     </p:spTree>
   </p:cSld>
   <p:clrMapOvr>
@@ -13511,948 +12474,199 @@
                 <a:ea typeface="Play"/>
                 <a:cs typeface="Play"/>
               </a:rPr>
-              <a:t>Риски</a:t>
+              <a:t>Ресурсы: 2 vCPU / 2 ГБ RAM</a:t>
             </a:r>
           </a:p>
         </p:txBody>
       </p:sp>
-      <p:sp>
-        <p:nvSpPr>
-          <p:cNvPr id="3" name="body"/>
-          <p:cNvSpPr txBox="1"/>
+      <p:graphicFrame>
+        <p:nvGraphicFramePr>
+          <p:cNvPr id="3" name="Table 2"/>
+          <p:cNvGraphicFramePr>
+            <a:graphicFrameLocks noGrp="1"/>
+          </p:cNvGraphicFramePr>
           <p:nvPr/>
-        </p:nvSpPr>
-        <p:spPr>
-          <a:xfrm>
-            <a:off x="429280" y="1783080"/>
-            <a:ext cx="11310884" cy="1341120"/>
-          </a:xfrm>
-          <a:prstGeom prst="rect">
-            <a:avLst/>
-          </a:prstGeom>
-          <a:noFill/>
-        </p:spPr>
-        <p:txBody>
-          <a:bodyPr wrap="square" lIns="76200" rIns="76200" tIns="50800" bIns="50800">
-            <a:spAutoFit/>
-          </a:bodyPr>
-          <a:lstStyle/>
-          <a:p>
-            <a:pPr algn="l">
-              <a:spcAft>
-                <a:spcPts val="300"/>
-              </a:spcAft>
-              <a:defRPr sz="1600">
-                <a:solidFill>
-                  <a:srgbClr val="FFFFFF"/>
-                </a:solidFill>
-                <a:latin typeface="Play"/>
-                <a:ea typeface="Play"/>
-                <a:cs typeface="Play"/>
-              </a:defRPr>
-            </a:pPr>
-            <a:r>
-              <a:rPr sz="1600">
-                <a:solidFill>
-                  <a:srgbClr val="FFFFFF"/>
-                </a:solidFill>
-                <a:latin typeface="Play"/>
-                <a:ea typeface="Play"/>
-                <a:cs typeface="Play"/>
-              </a:rPr>
-              <a:t>• Модель может выдумать цифры, которые не подтверждены</a:t>
-            </a:r>
-          </a:p>
-          <a:p>
-            <a:pPr algn="l">
-              <a:spcAft>
-                <a:spcPts val="300"/>
-              </a:spcAft>
-              <a:defRPr sz="1600">
-                <a:solidFill>
-                  <a:srgbClr val="FFFFFF"/>
-                </a:solidFill>
-                <a:latin typeface="Play"/>
-                <a:ea typeface="Play"/>
-                <a:cs typeface="Play"/>
-              </a:defRPr>
-            </a:pPr>
-            <a:r>
-              <a:rPr sz="1600">
-                <a:solidFill>
-                  <a:srgbClr val="FFFFFF"/>
-                </a:solidFill>
-                <a:latin typeface="Play"/>
-                <a:ea typeface="Play"/>
-                <a:cs typeface="Play"/>
-              </a:rPr>
-              <a:t>• Неправильный шаблон может привести к некорректной вёрстке</a:t>
-            </a:r>
-          </a:p>
-          <a:p>
-            <a:pPr algn="l">
-              <a:spcAft>
-                <a:spcPts val="300"/>
-              </a:spcAft>
-              <a:defRPr sz="1600">
-                <a:solidFill>
-                  <a:srgbClr val="FFFFFF"/>
-                </a:solidFill>
-                <a:latin typeface="Play"/>
-                <a:ea typeface="Play"/>
-                <a:cs typeface="Play"/>
-              </a:defRPr>
-            </a:pPr>
-            <a:r>
-              <a:rPr sz="1600">
-                <a:solidFill>
-                  <a:srgbClr val="FFFFFF"/>
-                </a:solidFill>
-                <a:latin typeface="Play"/>
-                <a:ea typeface="Play"/>
-                <a:cs typeface="Play"/>
-              </a:rPr>
-              <a:t>• Нагрузка выше 20 одновременных задач требует внешней очереди</a:t>
-            </a:r>
-          </a:p>
-        </p:txBody>
-      </p:sp>
-      <p:grpSp>
-        <p:nvGrpSpPr>
-          <p:cNvPr id="4" name="icon:builtin-sparkles"/>
-          <p:cNvGrpSpPr/>
-          <p:nvPr/>
-        </p:nvGrpSpPr>
-        <p:grpSpPr>
-          <a:xfrm>
-            <a:off x="1884664" y="3458289"/>
-            <a:ext cx="878252" cy="840303"/>
-            <a:chOff x="1884664" y="3458289"/>
-            <a:chExt cx="878252" cy="840303"/>
-          </a:xfrm>
-        </p:grpSpPr>
-        <p:sp>
-          <p:nvSpPr>
-            <p:cNvPr id="5" name="Freeform 4"/>
-            <p:cNvSpPr/>
-            <p:nvPr/>
-          </p:nvSpPr>
-          <p:spPr>
-            <a:xfrm>
-              <a:off x="1884664" y="3458289"/>
-              <a:ext cx="650557" cy="650557"/>
-            </a:xfrm>
-            <a:custGeom>
-              <a:avLst/>
-              <a:gdLst/>
-              <a:ahLst/>
-              <a:cxnLst/>
-              <a:rect l="l" t="t" r="r" b="b"/>
-              <a:pathLst>
-                <a:path w="650557" h="650557">
-                  <a:moveTo>
-                    <a:pt x="325278" y="0"/>
-                  </a:moveTo>
-                  <a:lnTo>
-                    <a:pt x="335145" y="61098"/>
-                  </a:lnTo>
-                  <a:lnTo>
-                    <a:pt x="348698" y="114498"/>
-                  </a:lnTo>
-                  <a:lnTo>
-                    <a:pt x="366480" y="160742"/>
-                  </a:lnTo>
-                  <a:lnTo>
-                    <a:pt x="389033" y="200371"/>
-                  </a:lnTo>
-                  <a:lnTo>
-                    <a:pt x="416790" y="233767"/>
-                  </a:lnTo>
-                  <a:lnTo>
-                    <a:pt x="450185" y="261524"/>
-                  </a:lnTo>
-                  <a:lnTo>
-                    <a:pt x="489761" y="284022"/>
-                  </a:lnTo>
-                  <a:lnTo>
-                    <a:pt x="536059" y="301858"/>
-                  </a:lnTo>
-                  <a:lnTo>
-                    <a:pt x="589459" y="315466"/>
-                  </a:lnTo>
-                  <a:lnTo>
-                    <a:pt x="650557" y="325278"/>
-                  </a:lnTo>
-                  <a:lnTo>
-                    <a:pt x="589459" y="335145"/>
-                  </a:lnTo>
-                  <a:lnTo>
-                    <a:pt x="536059" y="348698"/>
-                  </a:lnTo>
-                  <a:lnTo>
-                    <a:pt x="489761" y="366480"/>
-                  </a:lnTo>
-                  <a:lnTo>
-                    <a:pt x="450185" y="389033"/>
-                  </a:lnTo>
-                  <a:lnTo>
-                    <a:pt x="416790" y="416790"/>
-                  </a:lnTo>
-                  <a:lnTo>
-                    <a:pt x="389033" y="450185"/>
-                  </a:lnTo>
-                  <a:lnTo>
-                    <a:pt x="366480" y="489761"/>
-                  </a:lnTo>
-                  <a:lnTo>
-                    <a:pt x="348698" y="536059"/>
-                  </a:lnTo>
-                  <a:lnTo>
-                    <a:pt x="335145" y="589513"/>
-                  </a:lnTo>
-                  <a:lnTo>
-                    <a:pt x="325278" y="650557"/>
-                  </a:lnTo>
-                  <a:lnTo>
-                    <a:pt x="315466" y="589513"/>
-                  </a:lnTo>
-                  <a:lnTo>
-                    <a:pt x="301858" y="536059"/>
-                  </a:lnTo>
-                  <a:lnTo>
-                    <a:pt x="284022" y="489761"/>
-                  </a:lnTo>
-                  <a:lnTo>
-                    <a:pt x="261524" y="450185"/>
-                  </a:lnTo>
-                  <a:lnTo>
-                    <a:pt x="233767" y="416790"/>
-                  </a:lnTo>
-                  <a:lnTo>
-                    <a:pt x="200371" y="389033"/>
-                  </a:lnTo>
-                  <a:lnTo>
-                    <a:pt x="160742" y="366534"/>
-                  </a:lnTo>
-                  <a:lnTo>
-                    <a:pt x="114498" y="348698"/>
-                  </a:lnTo>
-                  <a:lnTo>
-                    <a:pt x="61098" y="335091"/>
-                  </a:lnTo>
-                  <a:lnTo>
-                    <a:pt x="0" y="325278"/>
-                  </a:lnTo>
-                  <a:lnTo>
-                    <a:pt x="61098" y="315466"/>
-                  </a:lnTo>
-                  <a:lnTo>
-                    <a:pt x="114498" y="301858"/>
-                  </a:lnTo>
-                  <a:lnTo>
-                    <a:pt x="160742" y="284022"/>
-                  </a:lnTo>
-                  <a:lnTo>
-                    <a:pt x="200371" y="261524"/>
-                  </a:lnTo>
-                  <a:lnTo>
-                    <a:pt x="233767" y="233767"/>
-                  </a:lnTo>
-                  <a:lnTo>
-                    <a:pt x="261524" y="200371"/>
-                  </a:lnTo>
-                  <a:lnTo>
-                    <a:pt x="284022" y="160796"/>
-                  </a:lnTo>
-                  <a:lnTo>
-                    <a:pt x="301858" y="114498"/>
-                  </a:lnTo>
-                  <a:lnTo>
-                    <a:pt x="315466" y="61098"/>
-                  </a:lnTo>
-                  <a:lnTo>
-                    <a:pt x="325278" y="0"/>
-                  </a:lnTo>
-                  <a:close/>
-                </a:path>
-              </a:pathLst>
-            </a:custGeom>
-            <a:noFill/>
-            <a:ln w="108426" cap="rnd">
-              <a:solidFill>
-                <a:srgbClr val="0077FF"/>
-              </a:solidFill>
-              <a:round/>
-            </a:ln>
-            <a:effectLst/>
-          </p:spPr>
-          <p:style>
-            <a:lnRef idx="1">
-              <a:schemeClr val="accent1"/>
-            </a:lnRef>
-            <a:fillRef idx="3">
-              <a:schemeClr val="accent1"/>
-            </a:fillRef>
-            <a:effectRef idx="2">
-              <a:schemeClr val="accent1"/>
-            </a:effectRef>
-            <a:fontRef idx="minor">
-              <a:schemeClr val="lt1"/>
-            </a:fontRef>
-          </p:style>
-          <p:txBody>
-            <a:bodyPr rtlCol="0" anchor="ctr"/>
-            <a:lstStyle/>
-            <a:p>
-              <a:pPr algn="ctr"/>
-            </a:p>
-          </p:txBody>
-        </p:sp>
-        <p:sp>
-          <p:nvSpPr>
-            <p:cNvPr id="6" name="Freeform 5"/>
-            <p:cNvSpPr/>
-            <p:nvPr/>
-          </p:nvSpPr>
-          <p:spPr>
-            <a:xfrm>
-              <a:off x="2524378" y="4054633"/>
-              <a:ext cx="238538" cy="243959"/>
-            </a:xfrm>
-            <a:custGeom>
-              <a:avLst/>
-              <a:gdLst/>
-              <a:ahLst/>
-              <a:cxnLst/>
-              <a:rect l="l" t="t" r="r" b="b"/>
-              <a:pathLst>
-                <a:path w="238538" h="243959">
-                  <a:moveTo>
-                    <a:pt x="119269" y="0"/>
-                  </a:moveTo>
-                  <a:lnTo>
-                    <a:pt x="123172" y="22986"/>
-                  </a:lnTo>
-                  <a:lnTo>
-                    <a:pt x="128540" y="43153"/>
-                  </a:lnTo>
-                  <a:lnTo>
-                    <a:pt x="135479" y="60718"/>
-                  </a:lnTo>
-                  <a:lnTo>
-                    <a:pt x="144099" y="75898"/>
-                  </a:lnTo>
-                  <a:lnTo>
-                    <a:pt x="154508" y="88801"/>
-                  </a:lnTo>
-                  <a:lnTo>
-                    <a:pt x="166868" y="99535"/>
-                  </a:lnTo>
-                  <a:lnTo>
-                    <a:pt x="181343" y="108317"/>
-                  </a:lnTo>
-                  <a:lnTo>
-                    <a:pt x="198041" y="115365"/>
-                  </a:lnTo>
-                  <a:lnTo>
-                    <a:pt x="217069" y="120732"/>
-                  </a:lnTo>
-                  <a:lnTo>
-                    <a:pt x="238538" y="124690"/>
-                  </a:lnTo>
-                  <a:lnTo>
-                    <a:pt x="217069" y="128593"/>
-                  </a:lnTo>
-                  <a:lnTo>
-                    <a:pt x="198041" y="133960"/>
-                  </a:lnTo>
-                  <a:lnTo>
-                    <a:pt x="181343" y="140899"/>
-                  </a:lnTo>
-                  <a:lnTo>
-                    <a:pt x="166868" y="149519"/>
-                  </a:lnTo>
-                  <a:lnTo>
-                    <a:pt x="154508" y="159928"/>
-                  </a:lnTo>
-                  <a:lnTo>
-                    <a:pt x="144099" y="172289"/>
-                  </a:lnTo>
-                  <a:lnTo>
-                    <a:pt x="135479" y="186764"/>
-                  </a:lnTo>
-                  <a:lnTo>
-                    <a:pt x="128540" y="203461"/>
-                  </a:lnTo>
-                  <a:lnTo>
-                    <a:pt x="123172" y="222490"/>
-                  </a:lnTo>
-                  <a:lnTo>
-                    <a:pt x="119269" y="243959"/>
-                  </a:lnTo>
-                  <a:lnTo>
-                    <a:pt x="115366" y="222490"/>
-                  </a:lnTo>
-                  <a:lnTo>
-                    <a:pt x="109999" y="203461"/>
-                  </a:lnTo>
-                  <a:lnTo>
-                    <a:pt x="103059" y="186764"/>
-                  </a:lnTo>
-                  <a:lnTo>
-                    <a:pt x="94439" y="172289"/>
-                  </a:lnTo>
-                  <a:lnTo>
-                    <a:pt x="84031" y="159928"/>
-                  </a:lnTo>
-                  <a:lnTo>
-                    <a:pt x="71670" y="149519"/>
-                  </a:lnTo>
-                  <a:lnTo>
-                    <a:pt x="57195" y="140899"/>
-                  </a:lnTo>
-                  <a:lnTo>
-                    <a:pt x="40497" y="133960"/>
-                  </a:lnTo>
-                  <a:lnTo>
-                    <a:pt x="21469" y="128593"/>
-                  </a:lnTo>
-                  <a:lnTo>
-                    <a:pt x="0" y="124690"/>
-                  </a:lnTo>
-                  <a:lnTo>
-                    <a:pt x="21469" y="120786"/>
-                  </a:lnTo>
-                  <a:lnTo>
-                    <a:pt x="40497" y="115365"/>
-                  </a:lnTo>
-                  <a:lnTo>
-                    <a:pt x="57195" y="108317"/>
-                  </a:lnTo>
-                  <a:lnTo>
-                    <a:pt x="71670" y="99535"/>
-                  </a:lnTo>
-                  <a:lnTo>
-                    <a:pt x="84031" y="88801"/>
-                  </a:lnTo>
-                  <a:lnTo>
-                    <a:pt x="94439" y="75898"/>
-                  </a:lnTo>
-                  <a:lnTo>
-                    <a:pt x="103059" y="60718"/>
-                  </a:lnTo>
-                  <a:lnTo>
-                    <a:pt x="109999" y="43153"/>
-                  </a:lnTo>
-                  <a:lnTo>
-                    <a:pt x="115366" y="22986"/>
-                  </a:lnTo>
-                  <a:lnTo>
-                    <a:pt x="119269" y="0"/>
-                  </a:lnTo>
-                  <a:close/>
-                </a:path>
-              </a:pathLst>
-            </a:custGeom>
-            <a:noFill/>
-            <a:ln w="108426" cap="rnd">
-              <a:solidFill>
-                <a:srgbClr val="0077FF"/>
-              </a:solidFill>
-              <a:round/>
-            </a:ln>
-            <a:effectLst/>
-          </p:spPr>
-          <p:style>
-            <a:lnRef idx="1">
-              <a:schemeClr val="accent1"/>
-            </a:lnRef>
-            <a:fillRef idx="3">
-              <a:schemeClr val="accent1"/>
-            </a:fillRef>
-            <a:effectRef idx="2">
-              <a:schemeClr val="accent1"/>
-            </a:effectRef>
-            <a:fontRef idx="minor">
-              <a:schemeClr val="lt1"/>
-            </a:fontRef>
-          </p:style>
-          <p:txBody>
-            <a:bodyPr rtlCol="0" anchor="ctr"/>
-            <a:lstStyle/>
-            <a:p>
-              <a:pPr algn="ctr"/>
-            </a:p>
-          </p:txBody>
-        </p:sp>
-      </p:grpSp>
-      <p:sp>
-        <p:nvSpPr>
-          <p:cNvPr id="7" name="TextBox 6"/>
-          <p:cNvSpPr txBox="1"/>
-          <p:nvPr/>
-        </p:nvSpPr>
-        <p:spPr>
-          <a:xfrm>
-            <a:off x="429280" y="4752898"/>
-            <a:ext cx="3669753" cy="1144980"/>
-          </a:xfrm>
-          <a:prstGeom prst="rect">
-            <a:avLst/>
-          </a:prstGeom>
-          <a:noFill/>
-        </p:spPr>
-        <p:txBody>
-          <a:bodyPr wrap="square" lIns="12700" rIns="12700" tIns="12700" bIns="12700">
-            <a:spAutoFit/>
-          </a:bodyPr>
-          <a:lstStyle/>
-          <a:p>
-            <a:pPr algn="ctr">
-              <a:defRPr sz="1400" b="0">
-                <a:solidFill>
-                  <a:srgbClr val="FFFFFF"/>
-                </a:solidFill>
-                <a:latin typeface="Play"/>
-                <a:ea typeface="Play"/>
-                <a:cs typeface="Play"/>
-              </a:defRPr>
-            </a:pPr>
-            <a:r>
-              <a:rPr sz="1400" b="0">
-                <a:solidFill>
-                  <a:srgbClr val="FFFFFF"/>
-                </a:solidFill>
-                <a:latin typeface="Play"/>
-                <a:ea typeface="Play"/>
-                <a:cs typeface="Play"/>
-              </a:rPr>
-              <a:t>Модель может выдумать цифры</a:t>
-            </a:r>
-          </a:p>
-        </p:txBody>
-      </p:sp>
-      <p:grpSp>
-        <p:nvGrpSpPr>
-          <p:cNvPr id="8" name="icon:builtin-layout"/>
-          <p:cNvGrpSpPr/>
-          <p:nvPr/>
-        </p:nvGrpSpPr>
-        <p:grpSpPr>
-          <a:xfrm>
-            <a:off x="5596803" y="3458289"/>
-            <a:ext cx="975835" cy="975835"/>
-            <a:chOff x="5596803" y="3458289"/>
-            <a:chExt cx="975835" cy="975835"/>
-          </a:xfrm>
-        </p:grpSpPr>
-        <p:sp>
-          <p:nvSpPr>
-            <p:cNvPr id="9" name="Rounded Rectangle 8"/>
-            <p:cNvSpPr/>
-            <p:nvPr/>
-          </p:nvSpPr>
-          <p:spPr>
-            <a:xfrm>
-              <a:off x="5596803" y="3458289"/>
-              <a:ext cx="975835" cy="975835"/>
-            </a:xfrm>
-            <a:prstGeom prst="roundRect">
-              <a:avLst>
-                <a:gd name="adj" fmla="val 11111"/>
-              </a:avLst>
-            </a:prstGeom>
-            <a:noFill/>
-            <a:ln w="108426" cap="rnd">
-              <a:solidFill>
-                <a:srgbClr val="0077FF"/>
-              </a:solidFill>
-              <a:round/>
-            </a:ln>
-            <a:effectLst/>
-          </p:spPr>
-          <p:style>
-            <a:lnRef idx="1">
-              <a:schemeClr val="accent1"/>
-            </a:lnRef>
-            <a:fillRef idx="3">
-              <a:schemeClr val="accent1"/>
-            </a:fillRef>
-            <a:effectRef idx="2">
-              <a:schemeClr val="accent1"/>
-            </a:effectRef>
-            <a:fontRef idx="minor">
-              <a:schemeClr val="lt1"/>
-            </a:fontRef>
-          </p:style>
-          <p:txBody>
-            <a:bodyPr rtlCol="0" anchor="ctr"/>
-            <a:lstStyle/>
-            <a:p>
-              <a:pPr algn="ctr"/>
-            </a:p>
-          </p:txBody>
-        </p:sp>
-        <p:sp>
-          <p:nvSpPr>
-            <p:cNvPr id="10" name="Freeform 9"/>
-            <p:cNvSpPr/>
-            <p:nvPr/>
-          </p:nvSpPr>
-          <p:spPr>
-            <a:xfrm>
-              <a:off x="5596803" y="3783567"/>
-              <a:ext cx="975835" cy="0"/>
-            </a:xfrm>
-            <a:custGeom>
-              <a:avLst/>
-              <a:gdLst/>
-              <a:ahLst/>
-              <a:cxnLst/>
-              <a:rect l="l" t="t" r="r" b="b"/>
-              <a:pathLst>
-                <a:path w="975835" h="0">
-                  <a:moveTo>
-                    <a:pt x="0" y="0"/>
-                  </a:moveTo>
-                  <a:lnTo>
-                    <a:pt x="975835" y="0"/>
-                  </a:lnTo>
-                </a:path>
-              </a:pathLst>
-            </a:custGeom>
-            <a:noFill/>
-            <a:ln w="108426" cap="rnd">
-              <a:solidFill>
-                <a:srgbClr val="0077FF"/>
-              </a:solidFill>
-              <a:round/>
-            </a:ln>
-            <a:effectLst/>
-          </p:spPr>
-          <p:style>
-            <a:lnRef idx="1">
-              <a:schemeClr val="accent1"/>
-            </a:lnRef>
-            <a:fillRef idx="3">
-              <a:schemeClr val="accent1"/>
-            </a:fillRef>
-            <a:effectRef idx="2">
-              <a:schemeClr val="accent1"/>
-            </a:effectRef>
-            <a:fontRef idx="minor">
-              <a:schemeClr val="lt1"/>
-            </a:fontRef>
-          </p:style>
-          <p:txBody>
-            <a:bodyPr rtlCol="0" anchor="ctr"/>
-            <a:lstStyle/>
-            <a:p>
-              <a:pPr algn="ctr"/>
-            </a:p>
-          </p:txBody>
-        </p:sp>
-        <p:sp>
-          <p:nvSpPr>
-            <p:cNvPr id="11" name="Freeform 10"/>
-            <p:cNvSpPr/>
-            <p:nvPr/>
-          </p:nvSpPr>
-          <p:spPr>
-            <a:xfrm>
-              <a:off x="5922081" y="3783567"/>
-              <a:ext cx="0" cy="650557"/>
-            </a:xfrm>
-            <a:custGeom>
-              <a:avLst/>
-              <a:gdLst/>
-              <a:ahLst/>
-              <a:cxnLst/>
-              <a:rect l="l" t="t" r="r" b="b"/>
-              <a:pathLst>
-                <a:path w="0" h="650557">
-                  <a:moveTo>
-                    <a:pt x="0" y="0"/>
-                  </a:moveTo>
-                  <a:lnTo>
-                    <a:pt x="0" y="650557"/>
-                  </a:lnTo>
-                </a:path>
-              </a:pathLst>
-            </a:custGeom>
-            <a:noFill/>
-            <a:ln w="108426" cap="rnd">
-              <a:solidFill>
-                <a:srgbClr val="0077FF"/>
-              </a:solidFill>
-              <a:round/>
-            </a:ln>
-            <a:effectLst/>
-          </p:spPr>
-          <p:style>
-            <a:lnRef idx="1">
-              <a:schemeClr val="accent1"/>
-            </a:lnRef>
-            <a:fillRef idx="3">
-              <a:schemeClr val="accent1"/>
-            </a:fillRef>
-            <a:effectRef idx="2">
-              <a:schemeClr val="accent1"/>
-            </a:effectRef>
-            <a:fontRef idx="minor">
-              <a:schemeClr val="lt1"/>
-            </a:fontRef>
-          </p:style>
-          <p:txBody>
-            <a:bodyPr rtlCol="0" anchor="ctr"/>
-            <a:lstStyle/>
-            <a:p>
-              <a:pPr algn="ctr"/>
-            </a:p>
-          </p:txBody>
-        </p:sp>
-      </p:grpSp>
-      <p:sp>
-        <p:nvSpPr>
-          <p:cNvPr id="12" name="TextBox 11"/>
-          <p:cNvSpPr txBox="1"/>
-          <p:nvPr/>
-        </p:nvSpPr>
-        <p:spPr>
-          <a:xfrm>
-            <a:off x="4249845" y="4752898"/>
-            <a:ext cx="3669753" cy="1144980"/>
-          </a:xfrm>
-          <a:prstGeom prst="rect">
-            <a:avLst/>
-          </a:prstGeom>
-          <a:noFill/>
-        </p:spPr>
-        <p:txBody>
-          <a:bodyPr wrap="square" lIns="12700" rIns="12700" tIns="12700" bIns="12700">
-            <a:spAutoFit/>
-          </a:bodyPr>
-          <a:lstStyle/>
-          <a:p>
-            <a:pPr algn="ctr">
-              <a:defRPr sz="1400" b="0">
-                <a:solidFill>
-                  <a:srgbClr val="FFFFFF"/>
-                </a:solidFill>
-                <a:latin typeface="Play"/>
-                <a:ea typeface="Play"/>
-                <a:cs typeface="Play"/>
-              </a:defRPr>
-            </a:pPr>
-            <a:r>
-              <a:rPr sz="1400" b="0">
-                <a:solidFill>
-                  <a:srgbClr val="FFFFFF"/>
-                </a:solidFill>
-                <a:latin typeface="Play"/>
-                <a:ea typeface="Play"/>
-                <a:cs typeface="Play"/>
-              </a:rPr>
-              <a:t>Неправильный шаблон</a:t>
-            </a:r>
-          </a:p>
-        </p:txBody>
-      </p:sp>
-      <p:grpSp>
-        <p:nvGrpSpPr>
-          <p:cNvPr id="13" name="icon:builtin-target"/>
-          <p:cNvGrpSpPr/>
-          <p:nvPr/>
-        </p:nvGrpSpPr>
-        <p:grpSpPr>
-          <a:xfrm>
-            <a:off x="9417369" y="3458289"/>
-            <a:ext cx="975835" cy="975835"/>
-            <a:chOff x="9417369" y="3458289"/>
-            <a:chExt cx="975835" cy="975835"/>
-          </a:xfrm>
-        </p:grpSpPr>
-        <p:sp>
-          <p:nvSpPr>
-            <p:cNvPr id="14" name="Oval 13"/>
-            <p:cNvSpPr/>
-            <p:nvPr/>
-          </p:nvSpPr>
-          <p:spPr>
-            <a:xfrm>
-              <a:off x="9417369" y="3458289"/>
-              <a:ext cx="975835" cy="975835"/>
-            </a:xfrm>
-            <a:prstGeom prst="ellipse">
-              <a:avLst/>
-            </a:prstGeom>
-            <a:noFill/>
-            <a:ln w="108426" cap="rnd">
-              <a:solidFill>
-                <a:srgbClr val="0077FF"/>
-              </a:solidFill>
-              <a:round/>
-            </a:ln>
-            <a:effectLst/>
-          </p:spPr>
-          <p:style>
-            <a:lnRef idx="1">
-              <a:schemeClr val="accent1"/>
-            </a:lnRef>
-            <a:fillRef idx="3">
-              <a:schemeClr val="accent1"/>
-            </a:fillRef>
-            <a:effectRef idx="2">
-              <a:schemeClr val="accent1"/>
-            </a:effectRef>
-            <a:fontRef idx="minor">
-              <a:schemeClr val="lt1"/>
-            </a:fontRef>
-          </p:style>
-          <p:txBody>
-            <a:bodyPr rtlCol="0" anchor="ctr"/>
-            <a:lstStyle/>
-            <a:p>
-              <a:pPr algn="ctr"/>
-            </a:p>
-          </p:txBody>
-        </p:sp>
-        <p:sp>
-          <p:nvSpPr>
-            <p:cNvPr id="15" name="Oval 14"/>
-            <p:cNvSpPr/>
-            <p:nvPr/>
-          </p:nvSpPr>
-          <p:spPr>
-            <a:xfrm>
-              <a:off x="9634221" y="3675141"/>
-              <a:ext cx="542130" cy="542130"/>
-            </a:xfrm>
-            <a:prstGeom prst="ellipse">
-              <a:avLst/>
-            </a:prstGeom>
-            <a:noFill/>
-            <a:ln w="108426" cap="rnd">
-              <a:solidFill>
-                <a:srgbClr val="0077FF"/>
-              </a:solidFill>
-              <a:round/>
-            </a:ln>
-            <a:effectLst/>
-          </p:spPr>
-          <p:style>
-            <a:lnRef idx="1">
-              <a:schemeClr val="accent1"/>
-            </a:lnRef>
-            <a:fillRef idx="3">
-              <a:schemeClr val="accent1"/>
-            </a:fillRef>
-            <a:effectRef idx="2">
-              <a:schemeClr val="accent1"/>
-            </a:effectRef>
-            <a:fontRef idx="minor">
-              <a:schemeClr val="lt1"/>
-            </a:fontRef>
-          </p:style>
-          <p:txBody>
-            <a:bodyPr rtlCol="0" anchor="ctr"/>
-            <a:lstStyle/>
-            <a:p>
-              <a:pPr algn="ctr"/>
-            </a:p>
-          </p:txBody>
-        </p:sp>
-        <p:sp>
-          <p:nvSpPr>
-            <p:cNvPr id="16" name="Oval 15"/>
-            <p:cNvSpPr/>
-            <p:nvPr/>
-          </p:nvSpPr>
-          <p:spPr>
-            <a:xfrm>
-              <a:off x="9829388" y="3870308"/>
-              <a:ext cx="151796" cy="151796"/>
-            </a:xfrm>
-            <a:prstGeom prst="ellipse">
-              <a:avLst/>
-            </a:prstGeom>
-            <a:solidFill>
-              <a:srgbClr val="0077FF"/>
-            </a:solidFill>
-            <a:ln>
-              <a:noFill/>
-            </a:ln>
-            <a:effectLst/>
-          </p:spPr>
-          <p:style>
-            <a:lnRef idx="1">
-              <a:schemeClr val="accent1"/>
-            </a:lnRef>
-            <a:fillRef idx="3">
-              <a:schemeClr val="accent1"/>
-            </a:fillRef>
-            <a:effectRef idx="2">
-              <a:schemeClr val="accent1"/>
-            </a:effectRef>
-            <a:fontRef idx="minor">
-              <a:schemeClr val="lt1"/>
-            </a:fontRef>
-          </p:style>
-          <p:txBody>
-            <a:bodyPr rtlCol="0" anchor="ctr"/>
-            <a:lstStyle/>
-            <a:p>
-              <a:pPr algn="ctr"/>
-            </a:p>
-          </p:txBody>
-        </p:sp>
-      </p:grpSp>
-      <p:sp>
-        <p:nvSpPr>
-          <p:cNvPr id="17" name="TextBox 16"/>
-          <p:cNvSpPr txBox="1"/>
-          <p:nvPr/>
-        </p:nvSpPr>
-        <p:spPr>
-          <a:xfrm>
-            <a:off x="8070410" y="4752898"/>
-            <a:ext cx="3669753" cy="1144980"/>
-          </a:xfrm>
-          <a:prstGeom prst="rect">
-            <a:avLst/>
-          </a:prstGeom>
-          <a:noFill/>
-        </p:spPr>
-        <p:txBody>
-          <a:bodyPr wrap="square" lIns="12700" rIns="12700" tIns="12700" bIns="12700">
-            <a:spAutoFit/>
-          </a:bodyPr>
-          <a:lstStyle/>
-          <a:p>
-            <a:pPr algn="ctr">
-              <a:defRPr sz="1400" b="0">
-                <a:solidFill>
-                  <a:srgbClr val="FFFFFF"/>
-                </a:solidFill>
-                <a:latin typeface="Play"/>
-                <a:ea typeface="Play"/>
-                <a:cs typeface="Play"/>
-              </a:defRPr>
-            </a:pPr>
-            <a:r>
-              <a:rPr sz="1400" b="0">
-                <a:solidFill>
-                  <a:srgbClr val="FFFFFF"/>
-                </a:solidFill>
-                <a:latin typeface="Play"/>
-                <a:ea typeface="Play"/>
-                <a:cs typeface="Play"/>
-              </a:rPr>
-              <a:t>Нагрузка &gt;20 задач</a:t>
-            </a:r>
-          </a:p>
-        </p:txBody>
-      </p:sp>
+        </p:nvGraphicFramePr>
+        <p:xfrm>
+          <a:off x="429280" y="1783079"/>
+          <a:ext cx="11310884" cy="4114800"/>
+        </p:xfrm>
+        <a:graphic>
+          <a:graphicData uri="http://schemas.openxmlformats.org/drawingml/2006/table">
+            <a:tbl>
+              <a:tblPr firstRow="1" bandRow="1">
+                <a:tableStyleId>{5C22544A-7EE6-4342-B048-85BDC9FD1C3A}</a:tableStyleId>
+              </a:tblPr>
+              <a:tblGrid>
+                <a:gridCol w="5655442"/>
+                <a:gridCol w="5655442"/>
+              </a:tblGrid>
+              <a:tr h="1371600">
+                <a:tc>
+                  <a:txBody>
+                    <a:bodyPr/>
+                    <a:lstStyle/>
+                    <a:p>
+                      <a:pPr>
+                        <a:defRPr sz="1300" b="1">
+                          <a:solidFill>
+                            <a:srgbClr val="FFFFFF"/>
+                          </a:solidFill>
+                          <a:latin typeface="Play"/>
+                          <a:ea typeface="Play"/>
+                          <a:cs typeface="Play"/>
+                        </a:defRPr>
+                      </a:pPr>
+                      <a:r>
+                        <a:t>Ресурс</a:t>
+                      </a:r>
+                    </a:p>
+                  </a:txBody>
+                  <a:tcPr>
+                    <a:solidFill>
+                      <a:srgbClr val="0077FF"/>
+                    </a:solidFill>
+                  </a:tcPr>
+                </a:tc>
+                <a:tc>
+                  <a:txBody>
+                    <a:bodyPr/>
+                    <a:lstStyle/>
+                    <a:p>
+                      <a:pPr>
+                        <a:defRPr sz="1300" b="1">
+                          <a:solidFill>
+                            <a:srgbClr val="FFFFFF"/>
+                          </a:solidFill>
+                          <a:latin typeface="Play"/>
+                          <a:ea typeface="Play"/>
+                          <a:cs typeface="Play"/>
+                        </a:defRPr>
+                      </a:pPr>
+                      <a:r>
+                        <a:t>Значение</a:t>
+                      </a:r>
+                    </a:p>
+                  </a:txBody>
+                  <a:tcPr>
+                    <a:solidFill>
+                      <a:srgbClr val="0077FF"/>
+                    </a:solidFill>
+                  </a:tcPr>
+                </a:tc>
+              </a:tr>
+              <a:tr h="1371600">
+                <a:tc>
+                  <a:txBody>
+                    <a:bodyPr/>
+                    <a:lstStyle/>
+                    <a:p>
+                      <a:pPr>
+                        <a:defRPr sz="1300" b="0">
+                          <a:solidFill>
+                            <a:srgbClr val="FFFFFF"/>
+                          </a:solidFill>
+                          <a:latin typeface="Play"/>
+                          <a:ea typeface="Play"/>
+                          <a:cs typeface="Play"/>
+                        </a:defRPr>
+                      </a:pPr>
+                      <a:r>
+                        <a:t>CPU</a:t>
+                      </a:r>
+                    </a:p>
+                  </a:txBody>
+                  <a:tcPr>
+                    <a:solidFill>
+                      <a:srgbClr val="111111"/>
+                    </a:solidFill>
+                  </a:tcPr>
+                </a:tc>
+                <a:tc>
+                  <a:txBody>
+                    <a:bodyPr/>
+                    <a:lstStyle/>
+                    <a:p>
+                      <a:pPr>
+                        <a:defRPr sz="1300" b="0">
+                          <a:solidFill>
+                            <a:srgbClr val="FFFFFF"/>
+                          </a:solidFill>
+                          <a:latin typeface="Play"/>
+                          <a:ea typeface="Play"/>
+                          <a:cs typeface="Play"/>
+                        </a:defRPr>
+                      </a:pPr>
+                      <a:r>
+                        <a:t>2 vCPU</a:t>
+                      </a:r>
+                    </a:p>
+                  </a:txBody>
+                  <a:tcPr>
+                    <a:solidFill>
+                      <a:srgbClr val="111111"/>
+                    </a:solidFill>
+                  </a:tcPr>
+                </a:tc>
+              </a:tr>
+              <a:tr h="1371600">
+                <a:tc>
+                  <a:txBody>
+                    <a:bodyPr/>
+                    <a:lstStyle/>
+                    <a:p>
+                      <a:pPr>
+                        <a:defRPr sz="1300" b="0">
+                          <a:solidFill>
+                            <a:srgbClr val="FFFFFF"/>
+                          </a:solidFill>
+                          <a:latin typeface="Play"/>
+                          <a:ea typeface="Play"/>
+                          <a:cs typeface="Play"/>
+                        </a:defRPr>
+                      </a:pPr>
+                      <a:r>
+                        <a:t>RAM</a:t>
+                      </a:r>
+                    </a:p>
+                  </a:txBody>
+                  <a:tcPr>
+                    <a:solidFill>
+                      <a:srgbClr val="111111"/>
+                    </a:solidFill>
+                  </a:tcPr>
+                </a:tc>
+                <a:tc>
+                  <a:txBody>
+                    <a:bodyPr/>
+                    <a:lstStyle/>
+                    <a:p>
+                      <a:pPr>
+                        <a:defRPr sz="1300" b="0">
+                          <a:solidFill>
+                            <a:srgbClr val="FFFFFF"/>
+                          </a:solidFill>
+                          <a:latin typeface="Play"/>
+                          <a:ea typeface="Play"/>
+                          <a:cs typeface="Play"/>
+                        </a:defRPr>
+                      </a:pPr>
+                      <a:r>
+                        <a:t>2 ГБ</a:t>
+                      </a:r>
+                    </a:p>
+                  </a:txBody>
+                  <a:tcPr>
+                    <a:solidFill>
+                      <a:srgbClr val="111111"/>
+                    </a:solidFill>
+                  </a:tcPr>
+                </a:tc>
+              </a:tr>
+            </a:tbl>
+          </a:graphicData>
+        </a:graphic>
+      </p:graphicFrame>
     </p:spTree>
   </p:cSld>
   <p:clrMapOvr>
@@ -14480,7 +12694,7 @@
         <p:spPr>
           <a:xfrm>
             <a:off x="429280" y="424715"/>
-            <a:ext cx="7827264" cy="822960"/>
+            <a:ext cx="7827264" cy="1183640"/>
           </a:xfrm>
           <a:prstGeom prst="rect">
             <a:avLst/>
@@ -14515,499 +12729,145 @@
                 <a:ea typeface="Play"/>
                 <a:cs typeface="Play"/>
               </a:rPr>
-              <a:t>Итоги</a:t>
+              <a:t>Стоимость инференса за 6 недель — 1 400 руб</a:t>
             </a:r>
           </a:p>
         </p:txBody>
       </p:sp>
-      <p:sp>
-        <p:nvSpPr>
-          <p:cNvPr id="3" name="stat_0:bar"/>
-          <p:cNvSpPr/>
+      <p:graphicFrame>
+        <p:nvGraphicFramePr>
+          <p:cNvPr id="3" name="Table 2"/>
+          <p:cNvGraphicFramePr>
+            <a:graphicFrameLocks noGrp="1"/>
+          </p:cNvGraphicFramePr>
           <p:nvPr/>
-        </p:nvSpPr>
-        <p:spPr>
-          <a:xfrm>
-            <a:off x="429280" y="1874520"/>
-            <a:ext cx="50800" cy="2230120"/>
-          </a:xfrm>
-          <a:prstGeom prst="rect">
-            <a:avLst/>
-          </a:prstGeom>
-          <a:solidFill>
-            <a:srgbClr val="0077FF"/>
-          </a:solidFill>
-          <a:ln>
-            <a:noFill/>
-          </a:ln>
-          <a:effectLst/>
-        </p:spPr>
-        <p:style>
-          <a:lnRef idx="1">
-            <a:schemeClr val="accent1"/>
-          </a:lnRef>
-          <a:fillRef idx="3">
-            <a:schemeClr val="accent1"/>
-          </a:fillRef>
-          <a:effectRef idx="2">
-            <a:schemeClr val="accent1"/>
-          </a:effectRef>
-          <a:fontRef idx="minor">
-            <a:schemeClr val="lt1"/>
-          </a:fontRef>
-        </p:style>
-        <p:txBody>
-          <a:bodyPr rtlCol="0" anchor="ctr"/>
-          <a:lstStyle/>
-          <a:p>
-            <a:pPr algn="ctr"/>
-          </a:p>
-        </p:txBody>
-      </p:sp>
-      <p:sp>
-        <p:nvSpPr>
-          <p:cNvPr id="4" name="stat_0"/>
-          <p:cNvSpPr txBox="1"/>
-          <p:nvPr/>
-        </p:nvSpPr>
-        <p:spPr>
-          <a:xfrm>
-            <a:off x="607080" y="1783080"/>
-            <a:ext cx="2310594" cy="2321560"/>
-          </a:xfrm>
-          <a:prstGeom prst="rect">
-            <a:avLst/>
-          </a:prstGeom>
-          <a:noFill/>
-        </p:spPr>
-        <p:txBody>
-          <a:bodyPr wrap="square" lIns="76200" rIns="76200" tIns="0" bIns="0">
-            <a:spAutoFit/>
-          </a:bodyPr>
-          <a:lstStyle/>
-          <a:p>
-            <a:pPr>
-              <a:lnSpc>
-                <a:spcPct val="100000"/>
-              </a:lnSpc>
-              <a:spcAft>
-                <a:spcPts val="200"/>
-              </a:spcAft>
-              <a:defRPr sz="4000" b="1">
-                <a:solidFill>
-                  <a:srgbClr val="0077FF"/>
-                </a:solidFill>
-                <a:latin typeface="Play"/>
-                <a:ea typeface="Play"/>
-                <a:cs typeface="Play"/>
-              </a:defRPr>
-            </a:pPr>
-            <a:r>
-              <a:rPr sz="4000" b="1">
-                <a:solidFill>
-                  <a:srgbClr val="0077FF"/>
-                </a:solidFill>
-                <a:latin typeface="Play"/>
-                <a:ea typeface="Play"/>
-                <a:cs typeface="Play"/>
-              </a:rPr>
-              <a:t>4 мин</a:t>
-            </a:r>
-          </a:p>
-          <a:p>
-            <a:pPr>
-              <a:spcAft>
-                <a:spcPts val="300"/>
-              </a:spcAft>
-              <a:defRPr sz="2400" b="0">
-                <a:solidFill>
-                  <a:srgbClr val="FFFFFF"/>
-                </a:solidFill>
-                <a:latin typeface="Play"/>
-                <a:ea typeface="Play"/>
-                <a:cs typeface="Play"/>
-              </a:defRPr>
-            </a:pPr>
-            <a:r>
-              <a:rPr sz="2400" b="0">
-                <a:solidFill>
-                  <a:srgbClr val="FFFFFF"/>
-                </a:solidFill>
-                <a:latin typeface="Play"/>
-                <a:ea typeface="Play"/>
-                <a:cs typeface="Play"/>
-              </a:rPr>
-              <a:t>Время сборки сократилось с 186 до 4 минут</a:t>
-            </a:r>
-          </a:p>
-        </p:txBody>
-      </p:sp>
-      <p:sp>
-        <p:nvSpPr>
-          <p:cNvPr id="5" name="stat_1:bar"/>
-          <p:cNvSpPr/>
-          <p:nvPr/>
-        </p:nvSpPr>
-        <p:spPr>
-          <a:xfrm>
-            <a:off x="3370110" y="1874520"/>
-            <a:ext cx="50800" cy="2230120"/>
-          </a:xfrm>
-          <a:prstGeom prst="rect">
-            <a:avLst/>
-          </a:prstGeom>
-          <a:solidFill>
-            <a:srgbClr val="0077FF"/>
-          </a:solidFill>
-          <a:ln>
-            <a:noFill/>
-          </a:ln>
-          <a:effectLst/>
-        </p:spPr>
-        <p:style>
-          <a:lnRef idx="1">
-            <a:schemeClr val="accent1"/>
-          </a:lnRef>
-          <a:fillRef idx="3">
-            <a:schemeClr val="accent1"/>
-          </a:fillRef>
-          <a:effectRef idx="2">
-            <a:schemeClr val="accent1"/>
-          </a:effectRef>
-          <a:fontRef idx="minor">
-            <a:schemeClr val="lt1"/>
-          </a:fontRef>
-        </p:style>
-        <p:txBody>
-          <a:bodyPr rtlCol="0" anchor="ctr"/>
-          <a:lstStyle/>
-          <a:p>
-            <a:pPr algn="ctr"/>
-          </a:p>
-        </p:txBody>
-      </p:sp>
-      <p:sp>
-        <p:nvSpPr>
-          <p:cNvPr id="6" name="stat_1"/>
-          <p:cNvSpPr txBox="1"/>
-          <p:nvPr/>
-        </p:nvSpPr>
-        <p:spPr>
-          <a:xfrm>
-            <a:off x="3547910" y="1783080"/>
-            <a:ext cx="2310594" cy="2321560"/>
-          </a:xfrm>
-          <a:prstGeom prst="rect">
-            <a:avLst/>
-          </a:prstGeom>
-          <a:noFill/>
-        </p:spPr>
-        <p:txBody>
-          <a:bodyPr wrap="square" lIns="76200" rIns="76200" tIns="0" bIns="0">
-            <a:spAutoFit/>
-          </a:bodyPr>
-          <a:lstStyle/>
-          <a:p>
-            <a:pPr>
-              <a:lnSpc>
-                <a:spcPct val="100000"/>
-              </a:lnSpc>
-              <a:spcAft>
-                <a:spcPts val="200"/>
-              </a:spcAft>
-              <a:defRPr sz="4000" b="1">
-                <a:solidFill>
-                  <a:srgbClr val="0077FF"/>
-                </a:solidFill>
-                <a:latin typeface="Play"/>
-                <a:ea typeface="Play"/>
-                <a:cs typeface="Play"/>
-              </a:defRPr>
-            </a:pPr>
-            <a:r>
-              <a:rPr sz="4000" b="1">
-                <a:solidFill>
-                  <a:srgbClr val="0077FF"/>
-                </a:solidFill>
-                <a:latin typeface="Play"/>
-                <a:ea typeface="Play"/>
-                <a:cs typeface="Play"/>
-              </a:rPr>
-              <a:t>1 день</a:t>
-            </a:r>
-          </a:p>
-          <a:p>
-            <a:pPr>
-              <a:spcAft>
-                <a:spcPts val="300"/>
-              </a:spcAft>
-              <a:defRPr sz="2400" b="0">
-                <a:solidFill>
-                  <a:srgbClr val="FFFFFF"/>
-                </a:solidFill>
-                <a:latin typeface="Play"/>
-                <a:ea typeface="Play"/>
-                <a:cs typeface="Play"/>
-              </a:defRPr>
-            </a:pPr>
-            <a:r>
-              <a:rPr sz="2400" b="0">
-                <a:solidFill>
-                  <a:srgbClr val="FFFFFF"/>
-                </a:solidFill>
-                <a:latin typeface="Play"/>
-                <a:ea typeface="Play"/>
-                <a:cs typeface="Play"/>
-              </a:rPr>
-              <a:t>Первый вариант появился за 1 день вместо 6</a:t>
-            </a:r>
-          </a:p>
-        </p:txBody>
-      </p:sp>
-      <p:sp>
-        <p:nvSpPr>
-          <p:cNvPr id="7" name="stat_2:bar"/>
-          <p:cNvSpPr/>
-          <p:nvPr/>
-        </p:nvSpPr>
-        <p:spPr>
-          <a:xfrm>
-            <a:off x="6310940" y="1874520"/>
-            <a:ext cx="50800" cy="1833880"/>
-          </a:xfrm>
-          <a:prstGeom prst="rect">
-            <a:avLst/>
-          </a:prstGeom>
-          <a:solidFill>
-            <a:srgbClr val="0077FF"/>
-          </a:solidFill>
-          <a:ln>
-            <a:noFill/>
-          </a:ln>
-          <a:effectLst/>
-        </p:spPr>
-        <p:style>
-          <a:lnRef idx="1">
-            <a:schemeClr val="accent1"/>
-          </a:lnRef>
-          <a:fillRef idx="3">
-            <a:schemeClr val="accent1"/>
-          </a:fillRef>
-          <a:effectRef idx="2">
-            <a:schemeClr val="accent1"/>
-          </a:effectRef>
-          <a:fontRef idx="minor">
-            <a:schemeClr val="lt1"/>
-          </a:fontRef>
-        </p:style>
-        <p:txBody>
-          <a:bodyPr rtlCol="0" anchor="ctr"/>
-          <a:lstStyle/>
-          <a:p>
-            <a:pPr algn="ctr"/>
-          </a:p>
-        </p:txBody>
-      </p:sp>
-      <p:sp>
-        <p:nvSpPr>
-          <p:cNvPr id="8" name="stat_2"/>
-          <p:cNvSpPr txBox="1"/>
-          <p:nvPr/>
-        </p:nvSpPr>
-        <p:spPr>
-          <a:xfrm>
-            <a:off x="6488740" y="1783080"/>
-            <a:ext cx="2310594" cy="1925320"/>
-          </a:xfrm>
-          <a:prstGeom prst="rect">
-            <a:avLst/>
-          </a:prstGeom>
-          <a:noFill/>
-        </p:spPr>
-        <p:txBody>
-          <a:bodyPr wrap="square" lIns="76200" rIns="76200" tIns="0" bIns="0">
-            <a:spAutoFit/>
-          </a:bodyPr>
-          <a:lstStyle/>
-          <a:p>
-            <a:pPr>
-              <a:lnSpc>
-                <a:spcPct val="100000"/>
-              </a:lnSpc>
-              <a:spcAft>
-                <a:spcPts val="200"/>
-              </a:spcAft>
-              <a:defRPr sz="4000" b="1">
-                <a:solidFill>
-                  <a:srgbClr val="0077FF"/>
-                </a:solidFill>
-                <a:latin typeface="Play"/>
-                <a:ea typeface="Play"/>
-                <a:cs typeface="Play"/>
-              </a:defRPr>
-            </a:pPr>
-            <a:r>
-              <a:rPr sz="4000" b="1">
-                <a:solidFill>
-                  <a:srgbClr val="0077FF"/>
-                </a:solidFill>
-                <a:latin typeface="Play"/>
-                <a:ea typeface="Play"/>
-                <a:cs typeface="Play"/>
-              </a:rPr>
-              <a:t>2 из 68</a:t>
-            </a:r>
-          </a:p>
-          <a:p>
-            <a:pPr>
-              <a:spcAft>
-                <a:spcPts val="300"/>
-              </a:spcAft>
-              <a:defRPr sz="2400" b="0">
-                <a:solidFill>
-                  <a:srgbClr val="FFFFFF"/>
-                </a:solidFill>
-                <a:latin typeface="Play"/>
-                <a:ea typeface="Play"/>
-                <a:cs typeface="Play"/>
-              </a:defRPr>
-            </a:pPr>
-            <a:r>
-              <a:rPr sz="2400" b="0">
-                <a:solidFill>
-                  <a:srgbClr val="FFFFFF"/>
-                </a:solidFill>
-                <a:latin typeface="Play"/>
-                <a:ea typeface="Play"/>
-                <a:cs typeface="Play"/>
-              </a:rPr>
-              <a:t>Нарушения стиля уменьшились до 2 из 68</a:t>
-            </a:r>
-          </a:p>
-        </p:txBody>
-      </p:sp>
-      <p:sp>
-        <p:nvSpPr>
-          <p:cNvPr id="9" name="stat_3:bar"/>
-          <p:cNvSpPr/>
-          <p:nvPr/>
-        </p:nvSpPr>
-        <p:spPr>
-          <a:xfrm>
-            <a:off x="9251769" y="1874520"/>
-            <a:ext cx="50800" cy="2230120"/>
-          </a:xfrm>
-          <a:prstGeom prst="rect">
-            <a:avLst/>
-          </a:prstGeom>
-          <a:solidFill>
-            <a:srgbClr val="0077FF"/>
-          </a:solidFill>
-          <a:ln>
-            <a:noFill/>
-          </a:ln>
-          <a:effectLst/>
-        </p:spPr>
-        <p:style>
-          <a:lnRef idx="1">
-            <a:schemeClr val="accent1"/>
-          </a:lnRef>
-          <a:fillRef idx="3">
-            <a:schemeClr val="accent1"/>
-          </a:fillRef>
-          <a:effectRef idx="2">
-            <a:schemeClr val="accent1"/>
-          </a:effectRef>
-          <a:fontRef idx="minor">
-            <a:schemeClr val="lt1"/>
-          </a:fontRef>
-        </p:style>
-        <p:txBody>
-          <a:bodyPr rtlCol="0" anchor="ctr"/>
-          <a:lstStyle/>
-          <a:p>
-            <a:pPr algn="ctr"/>
-          </a:p>
-        </p:txBody>
-      </p:sp>
-      <p:sp>
-        <p:nvSpPr>
-          <p:cNvPr id="10" name="stat_3"/>
-          <p:cNvSpPr txBox="1"/>
-          <p:nvPr/>
-        </p:nvSpPr>
-        <p:spPr>
-          <a:xfrm>
-            <a:off x="9429569" y="1783080"/>
-            <a:ext cx="2310594" cy="2321560"/>
-          </a:xfrm>
-          <a:prstGeom prst="rect">
-            <a:avLst/>
-          </a:prstGeom>
-          <a:noFill/>
-        </p:spPr>
-        <p:txBody>
-          <a:bodyPr wrap="square" lIns="76200" rIns="76200" tIns="0" bIns="0">
-            <a:spAutoFit/>
-          </a:bodyPr>
-          <a:lstStyle/>
-          <a:p>
-            <a:pPr>
-              <a:lnSpc>
-                <a:spcPct val="100000"/>
-              </a:lnSpc>
-              <a:spcAft>
-                <a:spcPts val="200"/>
-              </a:spcAft>
-              <a:defRPr sz="4000" b="1">
-                <a:solidFill>
-                  <a:srgbClr val="0077FF"/>
-                </a:solidFill>
-                <a:latin typeface="Play"/>
-                <a:ea typeface="Play"/>
-                <a:cs typeface="Play"/>
-              </a:defRPr>
-            </a:pPr>
-            <a:r>
-              <a:rPr sz="4000" b="1">
-                <a:solidFill>
-                  <a:srgbClr val="0077FF"/>
-                </a:solidFill>
-                <a:latin typeface="Play"/>
-                <a:ea typeface="Play"/>
-                <a:cs typeface="Play"/>
-              </a:rPr>
-              <a:t>38</a:t>
-            </a:r>
-          </a:p>
-          <a:p>
-            <a:pPr>
-              <a:spcAft>
-                <a:spcPts val="300"/>
-              </a:spcAft>
-              <a:defRPr sz="2400" b="0">
-                <a:solidFill>
-                  <a:srgbClr val="FFFFFF"/>
-                </a:solidFill>
-                <a:latin typeface="Play"/>
-                <a:ea typeface="Play"/>
-                <a:cs typeface="Play"/>
-              </a:defRPr>
-            </a:pPr>
-            <a:r>
-              <a:rPr sz="2400" b="0">
-                <a:solidFill>
-                  <a:srgbClr val="FFFFFF"/>
-                </a:solidFill>
-                <a:latin typeface="Play"/>
-                <a:ea typeface="Play"/>
-                <a:cs typeface="Play"/>
-              </a:rPr>
-              <a:t>Дизайнеры закрыли 38 запросов вместо 11 в неделю</a:t>
-            </a:r>
-          </a:p>
-        </p:txBody>
-      </p:sp>
+        </p:nvGraphicFramePr>
+        <p:xfrm>
+          <a:off x="429280" y="1848385"/>
+          <a:ext cx="11310884" cy="4049494"/>
+        </p:xfrm>
+        <a:graphic>
+          <a:graphicData uri="http://schemas.openxmlformats.org/drawingml/2006/table">
+            <a:tbl>
+              <a:tblPr firstRow="1" bandRow="1">
+                <a:tableStyleId>{5C22544A-7EE6-4342-B048-85BDC9FD1C3A}</a:tableStyleId>
+              </a:tblPr>
+              <a:tblGrid>
+                <a:gridCol w="5655442"/>
+                <a:gridCol w="5655442"/>
+              </a:tblGrid>
+              <a:tr h="2024747">
+                <a:tc>
+                  <a:txBody>
+                    <a:bodyPr/>
+                    <a:lstStyle/>
+                    <a:p>
+                      <a:pPr>
+                        <a:defRPr sz="1300" b="1">
+                          <a:solidFill>
+                            <a:srgbClr val="FFFFFF"/>
+                          </a:solidFill>
+                          <a:latin typeface="Play"/>
+                          <a:ea typeface="Play"/>
+                          <a:cs typeface="Play"/>
+                        </a:defRPr>
+                      </a:pPr>
+                      <a:r>
+                        <a:t>Показатель</a:t>
+                      </a:r>
+                    </a:p>
+                  </a:txBody>
+                  <a:tcPr>
+                    <a:solidFill>
+                      <a:srgbClr val="0077FF"/>
+                    </a:solidFill>
+                  </a:tcPr>
+                </a:tc>
+                <a:tc>
+                  <a:txBody>
+                    <a:bodyPr/>
+                    <a:lstStyle/>
+                    <a:p>
+                      <a:pPr>
+                        <a:defRPr sz="1300" b="1">
+                          <a:solidFill>
+                            <a:srgbClr val="FFFFFF"/>
+                          </a:solidFill>
+                          <a:latin typeface="Play"/>
+                          <a:ea typeface="Play"/>
+                          <a:cs typeface="Play"/>
+                        </a:defRPr>
+                      </a:pPr>
+                      <a:r>
+                        <a:t>Значение</a:t>
+                      </a:r>
+                    </a:p>
+                  </a:txBody>
+                  <a:tcPr>
+                    <a:solidFill>
+                      <a:srgbClr val="0077FF"/>
+                    </a:solidFill>
+                  </a:tcPr>
+                </a:tc>
+              </a:tr>
+              <a:tr h="2024747">
+                <a:tc>
+                  <a:txBody>
+                    <a:bodyPr/>
+                    <a:lstStyle/>
+                    <a:p>
+                      <a:pPr>
+                        <a:defRPr sz="1300" b="0">
+                          <a:solidFill>
+                            <a:srgbClr val="FFFFFF"/>
+                          </a:solidFill>
+                          <a:latin typeface="Play"/>
+                          <a:ea typeface="Play"/>
+                          <a:cs typeface="Play"/>
+                        </a:defRPr>
+                      </a:pPr>
+                      <a:r>
+                        <a:t>Инференс</a:t>
+                      </a:r>
+                    </a:p>
+                  </a:txBody>
+                  <a:tcPr>
+                    <a:solidFill>
+                      <a:srgbClr val="111111"/>
+                    </a:solidFill>
+                  </a:tcPr>
+                </a:tc>
+                <a:tc>
+                  <a:txBody>
+                    <a:bodyPr/>
+                    <a:lstStyle/>
+                    <a:p>
+                      <a:pPr>
+                        <a:defRPr sz="1300" b="0">
+                          <a:solidFill>
+                            <a:srgbClr val="FFFFFF"/>
+                          </a:solidFill>
+                          <a:latin typeface="Play"/>
+                          <a:ea typeface="Play"/>
+                          <a:cs typeface="Play"/>
+                        </a:defRPr>
+                      </a:pPr>
+                      <a:r>
+                        <a:t>1 400 руб.</a:t>
+                      </a:r>
+                    </a:p>
+                  </a:txBody>
+                  <a:tcPr>
+                    <a:solidFill>
+                      <a:srgbClr val="111111"/>
+                    </a:solidFill>
+                  </a:tcPr>
+                </a:tc>
+              </a:tr>
+            </a:tbl>
+          </a:graphicData>
+        </a:graphic>
+      </p:graphicFrame>
     </p:spTree>
   </p:cSld>
   <p:clrMapOvr>
@@ -15099,7 +12959,7 @@
         <p:spPr>
           <a:xfrm>
             <a:off x="300817" y="297715"/>
-            <a:ext cx="11566347" cy="5727164"/>
+            <a:ext cx="11566347" cy="4285347"/>
           </a:xfrm>
           <a:prstGeom prst="roundRect">
             <a:avLst/>
@@ -15145,7 +13005,7 @@
         <p:spPr>
           <a:xfrm>
             <a:off x="427817" y="424715"/>
-            <a:ext cx="7827264" cy="822960"/>
+            <a:ext cx="7827264" cy="1183640"/>
           </a:xfrm>
           <a:prstGeom prst="rect">
             <a:avLst/>
@@ -15180,21 +13040,226 @@
                 <a:ea typeface="Play"/>
                 <a:cs typeface="Play"/>
               </a:rPr>
-              <a:t>Следующие шаги</a:t>
+              <a:t>Нагрузка выше 20 задач: главный риск</a:t>
             </a:r>
           </a:p>
         </p:txBody>
       </p:sp>
+      <p:grpSp>
+        <p:nvGrpSpPr>
+          <p:cNvPr id="2" name="icon:builtin-layers"/>
+          <p:cNvGrpSpPr/>
+          <p:nvPr/>
+        </p:nvGrpSpPr>
+        <p:grpSpPr>
+          <a:xfrm>
+            <a:off x="500683" y="1921251"/>
+            <a:ext cx="437197" cy="437197"/>
+            <a:chOff x="500683" y="1921251"/>
+            <a:chExt cx="437197" cy="437197"/>
+          </a:xfrm>
+        </p:grpSpPr>
+        <p:sp>
+          <p:nvSpPr>
+            <p:cNvPr id="3" name="Freeform 2"/>
+            <p:cNvSpPr/>
+            <p:nvPr/>
+          </p:nvSpPr>
+          <p:spPr>
+            <a:xfrm>
+              <a:off x="500683" y="1921251"/>
+              <a:ext cx="437197" cy="242887"/>
+            </a:xfrm>
+            <a:custGeom>
+              <a:avLst/>
+              <a:gdLst/>
+              <a:ahLst/>
+              <a:cxnLst/>
+              <a:rect l="l" t="t" r="r" b="b"/>
+              <a:pathLst>
+                <a:path w="437197" h="242887">
+                  <a:moveTo>
+                    <a:pt x="218599" y="0"/>
+                  </a:moveTo>
+                  <a:lnTo>
+                    <a:pt x="437197" y="121444"/>
+                  </a:lnTo>
+                  <a:lnTo>
+                    <a:pt x="218599" y="242887"/>
+                  </a:lnTo>
+                  <a:lnTo>
+                    <a:pt x="0" y="121444"/>
+                  </a:lnTo>
+                  <a:close/>
+                </a:path>
+              </a:pathLst>
+            </a:custGeom>
+            <a:noFill/>
+            <a:ln w="48577" cap="rnd">
+              <a:solidFill>
+                <a:srgbClr val="0077FF"/>
+              </a:solidFill>
+              <a:round/>
+            </a:ln>
+            <a:effectLst/>
+          </p:spPr>
+          <p:style>
+            <a:lnRef idx="1">
+              <a:schemeClr val="accent1"/>
+            </a:lnRef>
+            <a:fillRef idx="3">
+              <a:schemeClr val="accent1"/>
+            </a:fillRef>
+            <a:effectRef idx="2">
+              <a:schemeClr val="accent1"/>
+            </a:effectRef>
+            <a:fontRef idx="minor">
+              <a:schemeClr val="lt1"/>
+            </a:fontRef>
+          </p:style>
+          <p:txBody>
+            <a:bodyPr rtlCol="0" anchor="ctr"/>
+            <a:lstStyle/>
+            <a:p>
+              <a:pPr algn="ctr"/>
+            </a:p>
+          </p:txBody>
+        </p:sp>
+        <p:sp>
+          <p:nvSpPr>
+            <p:cNvPr id="4" name="Freeform 3"/>
+            <p:cNvSpPr/>
+            <p:nvPr/>
+          </p:nvSpPr>
+          <p:spPr>
+            <a:xfrm>
+              <a:off x="500683" y="2139850"/>
+              <a:ext cx="437197" cy="121443"/>
+            </a:xfrm>
+            <a:custGeom>
+              <a:avLst/>
+              <a:gdLst/>
+              <a:ahLst/>
+              <a:cxnLst/>
+              <a:rect l="l" t="t" r="r" b="b"/>
+              <a:pathLst>
+                <a:path w="437197" h="121443">
+                  <a:moveTo>
+                    <a:pt x="0" y="0"/>
+                  </a:moveTo>
+                  <a:lnTo>
+                    <a:pt x="218599" y="121443"/>
+                  </a:lnTo>
+                  <a:lnTo>
+                    <a:pt x="437197" y="0"/>
+                  </a:lnTo>
+                </a:path>
+              </a:pathLst>
+            </a:custGeom>
+            <a:noFill/>
+            <a:ln w="48577" cap="rnd">
+              <a:solidFill>
+                <a:srgbClr val="0077FF"/>
+              </a:solidFill>
+              <a:round/>
+            </a:ln>
+            <a:effectLst/>
+          </p:spPr>
+          <p:style>
+            <a:lnRef idx="1">
+              <a:schemeClr val="accent1"/>
+            </a:lnRef>
+            <a:fillRef idx="3">
+              <a:schemeClr val="accent1"/>
+            </a:fillRef>
+            <a:effectRef idx="2">
+              <a:schemeClr val="accent1"/>
+            </a:effectRef>
+            <a:fontRef idx="minor">
+              <a:schemeClr val="lt1"/>
+            </a:fontRef>
+          </p:style>
+          <p:txBody>
+            <a:bodyPr rtlCol="0" anchor="ctr"/>
+            <a:lstStyle/>
+            <a:p>
+              <a:pPr algn="ctr"/>
+            </a:p>
+          </p:txBody>
+        </p:sp>
+        <p:sp>
+          <p:nvSpPr>
+            <p:cNvPr id="5" name="Freeform 4"/>
+            <p:cNvSpPr/>
+            <p:nvPr/>
+          </p:nvSpPr>
+          <p:spPr>
+            <a:xfrm>
+              <a:off x="500683" y="2237005"/>
+              <a:ext cx="437197" cy="121443"/>
+            </a:xfrm>
+            <a:custGeom>
+              <a:avLst/>
+              <a:gdLst/>
+              <a:ahLst/>
+              <a:cxnLst/>
+              <a:rect l="l" t="t" r="r" b="b"/>
+              <a:pathLst>
+                <a:path w="437197" h="121443">
+                  <a:moveTo>
+                    <a:pt x="0" y="0"/>
+                  </a:moveTo>
+                  <a:lnTo>
+                    <a:pt x="218599" y="121443"/>
+                  </a:lnTo>
+                  <a:lnTo>
+                    <a:pt x="437197" y="0"/>
+                  </a:lnTo>
+                </a:path>
+              </a:pathLst>
+            </a:custGeom>
+            <a:noFill/>
+            <a:ln w="48577" cap="rnd">
+              <a:solidFill>
+                <a:srgbClr val="0077FF"/>
+              </a:solidFill>
+              <a:round/>
+            </a:ln>
+            <a:effectLst/>
+          </p:spPr>
+          <p:style>
+            <a:lnRef idx="1">
+              <a:schemeClr val="accent1"/>
+            </a:lnRef>
+            <a:fillRef idx="3">
+              <a:schemeClr val="accent1"/>
+            </a:fillRef>
+            <a:effectRef idx="2">
+              <a:schemeClr val="accent1"/>
+            </a:effectRef>
+            <a:fontRef idx="minor">
+              <a:schemeClr val="lt1"/>
+            </a:fontRef>
+          </p:style>
+          <p:txBody>
+            <a:bodyPr rtlCol="0" anchor="ctr"/>
+            <a:lstStyle/>
+            <a:p>
+              <a:pPr algn="ctr"/>
+            </a:p>
+          </p:txBody>
+        </p:sp>
+      </p:grpSp>
       <p:sp>
         <p:nvSpPr>
-          <p:cNvPr id="682" name="body"/>
+          <p:cNvPr id="682" name="item_0"/>
           <p:cNvSpPr txBox="1"/>
           <p:nvPr/>
         </p:nvSpPr>
         <p:spPr>
           <a:xfrm>
-            <a:off x="427817" y="1783080"/>
-            <a:ext cx="11312347" cy="1341120"/>
+            <a:off x="1273065" y="1857910"/>
+            <a:ext cx="10467098" cy="1878062"/>
           </a:xfrm>
           <a:prstGeom prst="rect">
             <a:avLst/>
@@ -15211,7 +13276,7 @@
               <a:spcAft>
                 <a:spcPts val="300"/>
               </a:spcAft>
-              <a:defRPr sz="1600">
+              <a:defRPr sz="2800">
                 <a:solidFill>
                   <a:srgbClr val="FFFFFF"/>
                 </a:solidFill>
@@ -15221,7 +13286,7 @@
               </a:defRPr>
             </a:pPr>
             <a:r>
-              <a:rPr sz="1600">
+              <a:rPr sz="2800">
                 <a:solidFill>
                   <a:srgbClr val="FFFFFF"/>
                 </a:solidFill>
@@ -15229,15 +13294,407 @@
                 <a:ea typeface="Play"/>
                 <a:cs typeface="Play"/>
               </a:rPr>
-              <a:t>• Согласовать бюджет и ресурсы</a:t>
+              <a:t>Требуется внешняя очередь</a:t>
             </a:r>
           </a:p>
+        </p:txBody>
+      </p:sp>
+      <p:grpSp>
+        <p:nvGrpSpPr>
+          <p:cNvPr id="6" name="icon:builtin-sparkles"/>
+          <p:cNvGrpSpPr/>
+          <p:nvPr/>
+        </p:nvGrpSpPr>
+        <p:grpSpPr>
+          <a:xfrm>
+            <a:off x="549260" y="3945998"/>
+            <a:ext cx="393478" cy="376475"/>
+            <a:chOff x="549260" y="3945998"/>
+            <a:chExt cx="393478" cy="376475"/>
+          </a:xfrm>
+        </p:grpSpPr>
+        <p:sp>
+          <p:nvSpPr>
+            <p:cNvPr id="7" name="Freeform 6"/>
+            <p:cNvSpPr/>
+            <p:nvPr/>
+          </p:nvSpPr>
+          <p:spPr>
+            <a:xfrm>
+              <a:off x="549260" y="3945998"/>
+              <a:ext cx="291465" cy="291465"/>
+            </a:xfrm>
+            <a:custGeom>
+              <a:avLst/>
+              <a:gdLst/>
+              <a:ahLst/>
+              <a:cxnLst/>
+              <a:rect l="l" t="t" r="r" b="b"/>
+              <a:pathLst>
+                <a:path w="291465" h="291465">
+                  <a:moveTo>
+                    <a:pt x="145733" y="0"/>
+                  </a:moveTo>
+                  <a:lnTo>
+                    <a:pt x="150153" y="27373"/>
+                  </a:lnTo>
+                  <a:lnTo>
+                    <a:pt x="156225" y="51298"/>
+                  </a:lnTo>
+                  <a:lnTo>
+                    <a:pt x="164192" y="72016"/>
+                  </a:lnTo>
+                  <a:lnTo>
+                    <a:pt x="174296" y="89771"/>
+                  </a:lnTo>
+                  <a:lnTo>
+                    <a:pt x="186732" y="104733"/>
+                  </a:lnTo>
+                  <a:lnTo>
+                    <a:pt x="201694" y="117169"/>
+                  </a:lnTo>
+                  <a:lnTo>
+                    <a:pt x="219425" y="127249"/>
+                  </a:lnTo>
+                  <a:lnTo>
+                    <a:pt x="240167" y="135240"/>
+                  </a:lnTo>
+                  <a:lnTo>
+                    <a:pt x="264092" y="141336"/>
+                  </a:lnTo>
+                  <a:lnTo>
+                    <a:pt x="291465" y="145732"/>
+                  </a:lnTo>
+                  <a:lnTo>
+                    <a:pt x="264092" y="150153"/>
+                  </a:lnTo>
+                  <a:lnTo>
+                    <a:pt x="240167" y="156225"/>
+                  </a:lnTo>
+                  <a:lnTo>
+                    <a:pt x="219425" y="164192"/>
+                  </a:lnTo>
+                  <a:lnTo>
+                    <a:pt x="201694" y="174296"/>
+                  </a:lnTo>
+                  <a:lnTo>
+                    <a:pt x="186732" y="186732"/>
+                  </a:lnTo>
+                  <a:lnTo>
+                    <a:pt x="174296" y="201694"/>
+                  </a:lnTo>
+                  <a:lnTo>
+                    <a:pt x="164192" y="219424"/>
+                  </a:lnTo>
+                  <a:lnTo>
+                    <a:pt x="156225" y="240167"/>
+                  </a:lnTo>
+                  <a:lnTo>
+                    <a:pt x="150153" y="264116"/>
+                  </a:lnTo>
+                  <a:lnTo>
+                    <a:pt x="145733" y="291465"/>
+                  </a:lnTo>
+                  <a:lnTo>
+                    <a:pt x="141336" y="264116"/>
+                  </a:lnTo>
+                  <a:lnTo>
+                    <a:pt x="135240" y="240167"/>
+                  </a:lnTo>
+                  <a:lnTo>
+                    <a:pt x="127249" y="219424"/>
+                  </a:lnTo>
+                  <a:lnTo>
+                    <a:pt x="117169" y="201694"/>
+                  </a:lnTo>
+                  <a:lnTo>
+                    <a:pt x="104733" y="186732"/>
+                  </a:lnTo>
+                  <a:lnTo>
+                    <a:pt x="89771" y="174296"/>
+                  </a:lnTo>
+                  <a:lnTo>
+                    <a:pt x="72016" y="164216"/>
+                  </a:lnTo>
+                  <a:lnTo>
+                    <a:pt x="51298" y="156225"/>
+                  </a:lnTo>
+                  <a:lnTo>
+                    <a:pt x="27374" y="150129"/>
+                  </a:lnTo>
+                  <a:lnTo>
+                    <a:pt x="0" y="145732"/>
+                  </a:lnTo>
+                  <a:lnTo>
+                    <a:pt x="27374" y="141336"/>
+                  </a:lnTo>
+                  <a:lnTo>
+                    <a:pt x="51298" y="135240"/>
+                  </a:lnTo>
+                  <a:lnTo>
+                    <a:pt x="72016" y="127249"/>
+                  </a:lnTo>
+                  <a:lnTo>
+                    <a:pt x="89771" y="117169"/>
+                  </a:lnTo>
+                  <a:lnTo>
+                    <a:pt x="104733" y="104733"/>
+                  </a:lnTo>
+                  <a:lnTo>
+                    <a:pt x="117169" y="89771"/>
+                  </a:lnTo>
+                  <a:lnTo>
+                    <a:pt x="127249" y="72040"/>
+                  </a:lnTo>
+                  <a:lnTo>
+                    <a:pt x="135240" y="51298"/>
+                  </a:lnTo>
+                  <a:lnTo>
+                    <a:pt x="141336" y="27373"/>
+                  </a:lnTo>
+                  <a:lnTo>
+                    <a:pt x="145733" y="0"/>
+                  </a:lnTo>
+                  <a:close/>
+                </a:path>
+              </a:pathLst>
+            </a:custGeom>
+            <a:noFill/>
+            <a:ln w="48577" cap="rnd">
+              <a:solidFill>
+                <a:srgbClr val="0077FF"/>
+              </a:solidFill>
+              <a:round/>
+            </a:ln>
+            <a:effectLst/>
+          </p:spPr>
+          <p:style>
+            <a:lnRef idx="1">
+              <a:schemeClr val="accent1"/>
+            </a:lnRef>
+            <a:fillRef idx="3">
+              <a:schemeClr val="accent1"/>
+            </a:fillRef>
+            <a:effectRef idx="2">
+              <a:schemeClr val="accent1"/>
+            </a:effectRef>
+            <a:fontRef idx="minor">
+              <a:schemeClr val="lt1"/>
+            </a:fontRef>
+          </p:style>
+          <p:txBody>
+            <a:bodyPr rtlCol="0" anchor="ctr"/>
+            <a:lstStyle/>
+            <a:p>
+              <a:pPr algn="ctr"/>
+            </a:p>
+          </p:txBody>
+        </p:sp>
+        <p:sp>
+          <p:nvSpPr>
+            <p:cNvPr id="8" name="Freeform 7"/>
+            <p:cNvSpPr/>
+            <p:nvPr/>
+          </p:nvSpPr>
+          <p:spPr>
+            <a:xfrm>
+              <a:off x="835868" y="4213174"/>
+              <a:ext cx="106870" cy="109299"/>
+            </a:xfrm>
+            <a:custGeom>
+              <a:avLst/>
+              <a:gdLst/>
+              <a:ahLst/>
+              <a:cxnLst/>
+              <a:rect l="l" t="t" r="r" b="b"/>
+              <a:pathLst>
+                <a:path w="106870" h="109299">
+                  <a:moveTo>
+                    <a:pt x="53435" y="0"/>
+                  </a:moveTo>
+                  <a:lnTo>
+                    <a:pt x="55184" y="10298"/>
+                  </a:lnTo>
+                  <a:lnTo>
+                    <a:pt x="57588" y="19334"/>
+                  </a:lnTo>
+                  <a:lnTo>
+                    <a:pt x="60697" y="27203"/>
+                  </a:lnTo>
+                  <a:lnTo>
+                    <a:pt x="64559" y="34004"/>
+                  </a:lnTo>
+                  <a:lnTo>
+                    <a:pt x="69222" y="39785"/>
+                  </a:lnTo>
+                  <a:lnTo>
+                    <a:pt x="74760" y="44594"/>
+                  </a:lnTo>
+                  <a:lnTo>
+                    <a:pt x="81245" y="48529"/>
+                  </a:lnTo>
+                  <a:lnTo>
+                    <a:pt x="88726" y="51686"/>
+                  </a:lnTo>
+                  <a:lnTo>
+                    <a:pt x="97252" y="54091"/>
+                  </a:lnTo>
+                  <a:lnTo>
+                    <a:pt x="106870" y="55864"/>
+                  </a:lnTo>
+                  <a:lnTo>
+                    <a:pt x="97252" y="57613"/>
+                  </a:lnTo>
+                  <a:lnTo>
+                    <a:pt x="88726" y="60018"/>
+                  </a:lnTo>
+                  <a:lnTo>
+                    <a:pt x="81245" y="63126"/>
+                  </a:lnTo>
+                  <a:lnTo>
+                    <a:pt x="74760" y="66988"/>
+                  </a:lnTo>
+                  <a:lnTo>
+                    <a:pt x="69222" y="71652"/>
+                  </a:lnTo>
+                  <a:lnTo>
+                    <a:pt x="64559" y="77190"/>
+                  </a:lnTo>
+                  <a:lnTo>
+                    <a:pt x="60697" y="83675"/>
+                  </a:lnTo>
+                  <a:lnTo>
+                    <a:pt x="57588" y="91156"/>
+                  </a:lnTo>
+                  <a:lnTo>
+                    <a:pt x="55184" y="99681"/>
+                  </a:lnTo>
+                  <a:lnTo>
+                    <a:pt x="53435" y="109299"/>
+                  </a:lnTo>
+                  <a:lnTo>
+                    <a:pt x="51686" y="99681"/>
+                  </a:lnTo>
+                  <a:lnTo>
+                    <a:pt x="49281" y="91156"/>
+                  </a:lnTo>
+                  <a:lnTo>
+                    <a:pt x="46172" y="83675"/>
+                  </a:lnTo>
+                  <a:lnTo>
+                    <a:pt x="42311" y="77190"/>
+                  </a:lnTo>
+                  <a:lnTo>
+                    <a:pt x="37647" y="71652"/>
+                  </a:lnTo>
+                  <a:lnTo>
+                    <a:pt x="32109" y="66988"/>
+                  </a:lnTo>
+                  <a:lnTo>
+                    <a:pt x="25624" y="63126"/>
+                  </a:lnTo>
+                  <a:lnTo>
+                    <a:pt x="18143" y="60018"/>
+                  </a:lnTo>
+                  <a:lnTo>
+                    <a:pt x="9618" y="57613"/>
+                  </a:lnTo>
+                  <a:lnTo>
+                    <a:pt x="0" y="55864"/>
+                  </a:lnTo>
+                  <a:lnTo>
+                    <a:pt x="9618" y="54115"/>
+                  </a:lnTo>
+                  <a:lnTo>
+                    <a:pt x="18143" y="51686"/>
+                  </a:lnTo>
+                  <a:lnTo>
+                    <a:pt x="25624" y="48529"/>
+                  </a:lnTo>
+                  <a:lnTo>
+                    <a:pt x="32109" y="44594"/>
+                  </a:lnTo>
+                  <a:lnTo>
+                    <a:pt x="37647" y="39785"/>
+                  </a:lnTo>
+                  <a:lnTo>
+                    <a:pt x="42311" y="34004"/>
+                  </a:lnTo>
+                  <a:lnTo>
+                    <a:pt x="46172" y="27203"/>
+                  </a:lnTo>
+                  <a:lnTo>
+                    <a:pt x="49281" y="19334"/>
+                  </a:lnTo>
+                  <a:lnTo>
+                    <a:pt x="51686" y="10298"/>
+                  </a:lnTo>
+                  <a:lnTo>
+                    <a:pt x="53435" y="0"/>
+                  </a:lnTo>
+                  <a:close/>
+                </a:path>
+              </a:pathLst>
+            </a:custGeom>
+            <a:noFill/>
+            <a:ln w="48577" cap="rnd">
+              <a:solidFill>
+                <a:srgbClr val="0077FF"/>
+              </a:solidFill>
+              <a:round/>
+            </a:ln>
+            <a:effectLst/>
+          </p:spPr>
+          <p:style>
+            <a:lnRef idx="1">
+              <a:schemeClr val="accent1"/>
+            </a:lnRef>
+            <a:fillRef idx="3">
+              <a:schemeClr val="accent1"/>
+            </a:fillRef>
+            <a:effectRef idx="2">
+              <a:schemeClr val="accent1"/>
+            </a:effectRef>
+            <a:fontRef idx="minor">
+              <a:schemeClr val="lt1"/>
+            </a:fontRef>
+          </p:style>
+          <p:txBody>
+            <a:bodyPr rtlCol="0" anchor="ctr"/>
+            <a:lstStyle/>
+            <a:p>
+              <a:pPr algn="ctr"/>
+            </a:p>
+          </p:txBody>
+        </p:sp>
+      </p:grpSp>
+      <p:sp>
+        <p:nvSpPr>
+          <p:cNvPr id="683" name="item_1"/>
+          <p:cNvSpPr txBox="1"/>
+          <p:nvPr/>
+        </p:nvSpPr>
+        <p:spPr>
+          <a:xfrm>
+            <a:off x="1273065" y="3882657"/>
+            <a:ext cx="10467098" cy="1878062"/>
+          </a:xfrm>
+          <a:prstGeom prst="rect">
+            <a:avLst/>
+          </a:prstGeom>
+          <a:noFill/>
+        </p:spPr>
+        <p:txBody>
+          <a:bodyPr wrap="square" lIns="76200" rIns="76200" tIns="50800" bIns="50800">
+            <a:spAutoFit/>
+          </a:bodyPr>
+          <a:lstStyle/>
           <a:p>
             <a:pPr algn="l">
               <a:spcAft>
                 <a:spcPts val="300"/>
               </a:spcAft>
-              <a:defRPr sz="1600">
+              <a:defRPr sz="2800">
                 <a:solidFill>
                   <a:srgbClr val="FFFFFF"/>
                 </a:solidFill>
@@ -15247,7 +13704,7 @@
               </a:defRPr>
             </a:pPr>
             <a:r>
-              <a:rPr sz="1600">
+              <a:rPr sz="2800">
                 <a:solidFill>
                   <a:srgbClr val="FFFFFF"/>
                 </a:solidFill>
@@ -15255,222 +13712,7 @@
                 <a:ea typeface="Play"/>
                 <a:cs typeface="Play"/>
               </a:rPr>
-              <a:t>• Интегрировать сервис с корпоративным хранилищем</a:t>
-            </a:r>
-          </a:p>
-          <a:p>
-            <a:pPr algn="l">
-              <a:spcAft>
-                <a:spcPts val="300"/>
-              </a:spcAft>
-              <a:defRPr sz="1600">
-                <a:solidFill>
-                  <a:srgbClr val="FFFFFF"/>
-                </a:solidFill>
-                <a:latin typeface="Play"/>
-                <a:ea typeface="Play"/>
-                <a:cs typeface="Play"/>
-              </a:defRPr>
-            </a:pPr>
-            <a:r>
-              <a:rPr sz="1600">
-                <a:solidFill>
-                  <a:srgbClr val="FFFFFF"/>
-                </a:solidFill>
-                <a:latin typeface="Play"/>
-                <a:ea typeface="Play"/>
-                <a:cs typeface="Play"/>
-              </a:rPr>
-              <a:t>• Расширить команды до 8 в Q3 2026</a:t>
-            </a:r>
-          </a:p>
-        </p:txBody>
-      </p:sp>
-      <p:sp>
-        <p:nvSpPr>
-          <p:cNvPr id="683" name="Pentagon 682"/>
-          <p:cNvSpPr/>
-          <p:nvPr/>
-        </p:nvSpPr>
-        <p:spPr>
-          <a:xfrm>
-            <a:off x="427817" y="3455876"/>
-            <a:ext cx="3680283" cy="2281775"/>
-          </a:xfrm>
-          <a:prstGeom prst="homePlate">
-            <a:avLst/>
-          </a:prstGeom>
-          <a:solidFill>
-            <a:srgbClr val="0077FF"/>
-          </a:solidFill>
-          <a:ln>
-            <a:noFill/>
-          </a:ln>
-        </p:spPr>
-        <p:style>
-          <a:lnRef idx="1">
-            <a:schemeClr val="accent1"/>
-          </a:lnRef>
-          <a:fillRef idx="3">
-            <a:schemeClr val="accent1"/>
-          </a:fillRef>
-          <a:effectRef idx="2">
-            <a:schemeClr val="accent1"/>
-          </a:effectRef>
-          <a:fontRef idx="minor">
-            <a:schemeClr val="lt1"/>
-          </a:fontRef>
-        </p:style>
-        <p:txBody>
-          <a:bodyPr rtlCol="0" anchor="ctr" wrap="square" lIns="12700" rIns="12700" tIns="12700" bIns="12700"/>
-          <a:lstStyle/>
-          <a:p>
-            <a:pPr algn="ctr">
-              <a:defRPr sz="1260" b="0">
-                <a:solidFill>
-                  <a:srgbClr val="FFFFFF"/>
-                </a:solidFill>
-                <a:latin typeface="Play"/>
-                <a:ea typeface="Play"/>
-                <a:cs typeface="Play"/>
-              </a:defRPr>
-            </a:pPr>
-            <a:r>
-              <a:rPr sz="1260" b="0">
-                <a:solidFill>
-                  <a:srgbClr val="FFFFFF"/>
-                </a:solidFill>
-                <a:latin typeface="Play"/>
-                <a:ea typeface="Play"/>
-                <a:cs typeface="Play"/>
-              </a:rPr>
-              <a:t>Согласовать бюджет</a:t>
-            </a:r>
-          </a:p>
-        </p:txBody>
-      </p:sp>
-      <p:sp>
-        <p:nvSpPr>
-          <p:cNvPr id="684" name="Chevron 683"/>
-          <p:cNvSpPr/>
-          <p:nvPr/>
-        </p:nvSpPr>
-        <p:spPr>
-          <a:xfrm>
-            <a:off x="4243848" y="3455876"/>
-            <a:ext cx="3680283" cy="2281775"/>
-          </a:xfrm>
-          <a:prstGeom prst="chevron">
-            <a:avLst/>
-          </a:prstGeom>
-          <a:solidFill>
-            <a:srgbClr val="0077FF"/>
-          </a:solidFill>
-          <a:ln>
-            <a:noFill/>
-          </a:ln>
-        </p:spPr>
-        <p:style>
-          <a:lnRef idx="1">
-            <a:schemeClr val="accent1"/>
-          </a:lnRef>
-          <a:fillRef idx="3">
-            <a:schemeClr val="accent1"/>
-          </a:fillRef>
-          <a:effectRef idx="2">
-            <a:schemeClr val="accent1"/>
-          </a:effectRef>
-          <a:fontRef idx="minor">
-            <a:schemeClr val="lt1"/>
-          </a:fontRef>
-        </p:style>
-        <p:txBody>
-          <a:bodyPr rtlCol="0" anchor="ctr" wrap="square" lIns="12700" rIns="12700" tIns="12700" bIns="12700"/>
-          <a:lstStyle/>
-          <a:p>
-            <a:pPr algn="ctr">
-              <a:defRPr sz="1260" b="0">
-                <a:solidFill>
-                  <a:srgbClr val="FFFFFF"/>
-                </a:solidFill>
-                <a:latin typeface="Play"/>
-                <a:ea typeface="Play"/>
-                <a:cs typeface="Play"/>
-              </a:defRPr>
-            </a:pPr>
-            <a:r>
-              <a:rPr sz="1260" b="0">
-                <a:solidFill>
-                  <a:srgbClr val="FFFFFF"/>
-                </a:solidFill>
-                <a:latin typeface="Play"/>
-                <a:ea typeface="Play"/>
-                <a:cs typeface="Play"/>
-              </a:rPr>
-              <a:t>Интеграция с хранилищем</a:t>
-            </a:r>
-          </a:p>
-        </p:txBody>
-      </p:sp>
-      <p:sp>
-        <p:nvSpPr>
-          <p:cNvPr id="685" name="Chevron 684"/>
-          <p:cNvSpPr/>
-          <p:nvPr/>
-        </p:nvSpPr>
-        <p:spPr>
-          <a:xfrm>
-            <a:off x="8059880" y="3455876"/>
-            <a:ext cx="3680283" cy="2281775"/>
-          </a:xfrm>
-          <a:prstGeom prst="chevron">
-            <a:avLst/>
-          </a:prstGeom>
-          <a:solidFill>
-            <a:srgbClr val="0077FF"/>
-          </a:solidFill>
-          <a:ln>
-            <a:noFill/>
-          </a:ln>
-        </p:spPr>
-        <p:style>
-          <a:lnRef idx="1">
-            <a:schemeClr val="accent1"/>
-          </a:lnRef>
-          <a:fillRef idx="3">
-            <a:schemeClr val="accent1"/>
-          </a:fillRef>
-          <a:effectRef idx="2">
-            <a:schemeClr val="accent1"/>
-          </a:effectRef>
-          <a:fontRef idx="minor">
-            <a:schemeClr val="lt1"/>
-          </a:fontRef>
-        </p:style>
-        <p:txBody>
-          <a:bodyPr rtlCol="0" anchor="ctr" wrap="square" lIns="12700" rIns="12700" tIns="12700" bIns="12700"/>
-          <a:lstStyle/>
-          <a:p>
-            <a:pPr algn="ctr">
-              <a:defRPr sz="1260" b="0">
-                <a:solidFill>
-                  <a:srgbClr val="FFFFFF"/>
-                </a:solidFill>
-                <a:latin typeface="Play"/>
-                <a:ea typeface="Play"/>
-                <a:cs typeface="Play"/>
-              </a:defRPr>
-            </a:pPr>
-            <a:r>
-              <a:rPr sz="1260" b="0">
-                <a:solidFill>
-                  <a:srgbClr val="FFFFFF"/>
-                </a:solidFill>
-                <a:latin typeface="Play"/>
-                <a:ea typeface="Play"/>
-                <a:cs typeface="Play"/>
-              </a:rPr>
-              <a:t>Расширить команды</a:t>
+              <a:t>Модель может выдумать цифры</a:t>
             </a:r>
           </a:p>
         </p:txBody>
@@ -15591,11 +13833,199 @@
                 <a:ea typeface="Play"/>
                 <a:cs typeface="Play"/>
               </a:rPr>
-              <a:t>Вопросы и ответы</a:t>
+              <a:t>Пилот: 6 недель, 68 колод</a:t>
             </a:r>
           </a:p>
         </p:txBody>
       </p:sp>
+      <p:graphicFrame>
+        <p:nvGraphicFramePr>
+          <p:cNvPr id="623" name="Table 622"/>
+          <p:cNvGraphicFramePr>
+            <a:graphicFrameLocks noGrp="1"/>
+          </p:cNvGraphicFramePr>
+          <p:nvPr/>
+        </p:nvGraphicFramePr>
+        <p:xfrm>
+          <a:off x="429280" y="1783079"/>
+          <a:ext cx="11310884" cy="4114800"/>
+        </p:xfrm>
+        <a:graphic>
+          <a:graphicData uri="http://schemas.openxmlformats.org/drawingml/2006/table">
+            <a:tbl>
+              <a:tblPr firstRow="1" bandRow="1">
+                <a:tableStyleId>{5C22544A-7EE6-4342-B048-85BDC9FD1C3A}</a:tableStyleId>
+              </a:tblPr>
+              <a:tblGrid>
+                <a:gridCol w="5655442"/>
+                <a:gridCol w="5655442"/>
+              </a:tblGrid>
+              <a:tr h="1371600">
+                <a:tc>
+                  <a:txBody>
+                    <a:bodyPr/>
+                    <a:lstStyle/>
+                    <a:p>
+                      <a:pPr>
+                        <a:defRPr sz="1300" b="1">
+                          <a:solidFill>
+                            <a:srgbClr val="FFFFFF"/>
+                          </a:solidFill>
+                          <a:latin typeface="Play"/>
+                          <a:ea typeface="Play"/>
+                          <a:cs typeface="Play"/>
+                        </a:defRPr>
+                      </a:pPr>
+                      <a:r>
+                        <a:t>Показатель</a:t>
+                      </a:r>
+                    </a:p>
+                  </a:txBody>
+                  <a:tcPr>
+                    <a:solidFill>
+                      <a:srgbClr val="0077FF"/>
+                    </a:solidFill>
+                  </a:tcPr>
+                </a:tc>
+                <a:tc>
+                  <a:txBody>
+                    <a:bodyPr/>
+                    <a:lstStyle/>
+                    <a:p>
+                      <a:pPr>
+                        <a:defRPr sz="1300" b="1">
+                          <a:solidFill>
+                            <a:srgbClr val="FFFFFF"/>
+                          </a:solidFill>
+                          <a:latin typeface="Play"/>
+                          <a:ea typeface="Play"/>
+                          <a:cs typeface="Play"/>
+                        </a:defRPr>
+                      </a:pPr>
+                      <a:r>
+                        <a:t>Значение</a:t>
+                      </a:r>
+                    </a:p>
+                  </a:txBody>
+                  <a:tcPr>
+                    <a:solidFill>
+                      <a:srgbClr val="0077FF"/>
+                    </a:solidFill>
+                  </a:tcPr>
+                </a:tc>
+              </a:tr>
+              <a:tr h="1371600">
+                <a:tc>
+                  <a:txBody>
+                    <a:bodyPr/>
+                    <a:lstStyle/>
+                    <a:p>
+                      <a:pPr>
+                        <a:defRPr sz="1300" b="0">
+                          <a:solidFill>
+                            <a:srgbClr val="FFFFFF"/>
+                          </a:solidFill>
+                          <a:latin typeface="Play"/>
+                          <a:ea typeface="Play"/>
+                          <a:cs typeface="Play"/>
+                        </a:defRPr>
+                      </a:pPr>
+                      <a:r>
+                        <a:t>Длительность</a:t>
+                      </a:r>
+                    </a:p>
+                  </a:txBody>
+                  <a:tcPr>
+                    <a:solidFill>
+                      <a:srgbClr val="111111"/>
+                    </a:solidFill>
+                  </a:tcPr>
+                </a:tc>
+                <a:tc>
+                  <a:txBody>
+                    <a:bodyPr/>
+                    <a:lstStyle/>
+                    <a:p>
+                      <a:pPr>
+                        <a:defRPr sz="1300" b="0">
+                          <a:solidFill>
+                            <a:srgbClr val="FFFFFF"/>
+                          </a:solidFill>
+                          <a:latin typeface="Play"/>
+                          <a:ea typeface="Play"/>
+                          <a:cs typeface="Play"/>
+                        </a:defRPr>
+                      </a:pPr>
+                      <a:r>
+                        <a:t>6 недель</a:t>
+                      </a:r>
+                    </a:p>
+                  </a:txBody>
+                  <a:tcPr>
+                    <a:solidFill>
+                      <a:srgbClr val="111111"/>
+                    </a:solidFill>
+                  </a:tcPr>
+                </a:tc>
+              </a:tr>
+              <a:tr h="1371600">
+                <a:tc>
+                  <a:txBody>
+                    <a:bodyPr/>
+                    <a:lstStyle/>
+                    <a:p>
+                      <a:pPr>
+                        <a:defRPr sz="1300" b="0">
+                          <a:solidFill>
+                            <a:srgbClr val="FFFFFF"/>
+                          </a:solidFill>
+                          <a:latin typeface="Play"/>
+                          <a:ea typeface="Play"/>
+                          <a:cs typeface="Play"/>
+                        </a:defRPr>
+                      </a:pPr>
+                      <a:r>
+                        <a:t>Колоды</a:t>
+                      </a:r>
+                    </a:p>
+                  </a:txBody>
+                  <a:tcPr>
+                    <a:solidFill>
+                      <a:srgbClr val="111111"/>
+                    </a:solidFill>
+                  </a:tcPr>
+                </a:tc>
+                <a:tc>
+                  <a:txBody>
+                    <a:bodyPr/>
+                    <a:lstStyle/>
+                    <a:p>
+                      <a:pPr>
+                        <a:defRPr sz="1300" b="0">
+                          <a:solidFill>
+                            <a:srgbClr val="FFFFFF"/>
+                          </a:solidFill>
+                          <a:latin typeface="Play"/>
+                          <a:ea typeface="Play"/>
+                          <a:cs typeface="Play"/>
+                        </a:defRPr>
+                      </a:pPr>
+                      <a:r>
+                        <a:t>68</a:t>
+                      </a:r>
+                    </a:p>
+                  </a:txBody>
+                  <a:tcPr>
+                    <a:solidFill>
+                      <a:srgbClr val="111111"/>
+                    </a:solidFill>
+                  </a:tcPr>
+                </a:tc>
+              </a:tr>
+            </a:tbl>
+          </a:graphicData>
+        </a:graphic>
+      </p:graphicFrame>
     </p:spTree>
   </p:cSld>
   <p:clrMapOvr>
@@ -15724,8 +14154,8 @@
         </p:nvSpPr>
         <p:spPr>
           <a:xfrm>
-            <a:off x="302280" y="2164394"/>
-            <a:ext cx="11564884" cy="2540741"/>
+            <a:off x="300817" y="297715"/>
+            <a:ext cx="11566347" cy="3377993"/>
           </a:xfrm>
           <a:prstGeom prst="roundRect">
             <a:avLst/>
@@ -15770,8 +14200,8 @@
         </p:nvSpPr>
         <p:spPr>
           <a:xfrm>
-            <a:off x="429280" y="2291394"/>
-            <a:ext cx="7827385" cy="822960"/>
+            <a:off x="427817" y="424715"/>
+            <a:ext cx="11312347" cy="1018540"/>
           </a:xfrm>
           <a:prstGeom prst="rect">
             <a:avLst/>
@@ -15788,7 +14218,7 @@
               <a:spcAft>
                 <a:spcPts val="300"/>
               </a:spcAft>
-              <a:defRPr sz="4000">
+              <a:defRPr sz="5400">
                 <a:solidFill>
                   <a:srgbClr val="FFFFFF"/>
                 </a:solidFill>
@@ -15798,7 +14228,7 @@
               </a:defRPr>
             </a:pPr>
             <a:r>
-              <a:rPr sz="4000">
+              <a:rPr sz="5400">
                 <a:solidFill>
                   <a:srgbClr val="FFFFFF"/>
                 </a:solidFill>
@@ -15806,7 +14236,7 @@
                 <a:ea typeface="Play"/>
                 <a:cs typeface="Play"/>
               </a:rPr>
-              <a:t>Контактная информация</a:t>
+              <a:t>Решение о полном запуске</a:t>
             </a:r>
           </a:p>
         </p:txBody>
@@ -15819,8 +14249,8 @@
         </p:nvSpPr>
         <p:spPr>
           <a:xfrm>
-            <a:off x="429280" y="4014256"/>
-            <a:ext cx="11310884" cy="563880"/>
+            <a:off x="427817" y="2258389"/>
+            <a:ext cx="11312347" cy="1290320"/>
           </a:xfrm>
           <a:prstGeom prst="rect">
             <a:avLst/>
@@ -15833,11 +14263,11 @@
           </a:bodyPr>
           <a:lstStyle/>
           <a:p>
-            <a:pPr algn="ctr">
+            <a:pPr algn="l">
               <a:spcAft>
                 <a:spcPts val="300"/>
               </a:spcAft>
-              <a:defRPr sz="2800" b="1">
+              <a:defRPr sz="2400" b="1">
                 <a:solidFill>
                   <a:srgbClr val="FFFFFF"/>
                 </a:solidFill>
@@ -15847,7 +14277,7 @@
               </a:defRPr>
             </a:pPr>
             <a:r>
-              <a:rPr sz="2800" b="1">
+              <a:rPr sz="2400" b="1">
                 <a:solidFill>
                   <a:srgbClr val="FFFFFF"/>
                 </a:solidFill>
@@ -15855,7 +14285,59 @@
                 <a:ea typeface="Play"/>
                 <a:cs typeface="Play"/>
               </a:rPr>
-              <a:t>Email: support@example.com</a:t>
+              <a:t>• Третий квартал 2026 подключение 4 команд</a:t>
+            </a:r>
+          </a:p>
+          <a:p>
+            <a:pPr algn="l">
+              <a:spcAft>
+                <a:spcPts val="300"/>
+              </a:spcAft>
+              <a:defRPr sz="2400" b="1">
+                <a:solidFill>
+                  <a:srgbClr val="FFFFFF"/>
+                </a:solidFill>
+                <a:latin typeface="Play"/>
+                <a:ea typeface="Play"/>
+                <a:cs typeface="Play"/>
+              </a:defRPr>
+            </a:pPr>
+            <a:r>
+              <a:rPr sz="2400" b="1">
+                <a:solidFill>
+                  <a:srgbClr val="FFFFFF"/>
+                </a:solidFill>
+                <a:latin typeface="Play"/>
+                <a:ea typeface="Play"/>
+                <a:cs typeface="Play"/>
+              </a:rPr>
+              <a:t>• Четвертый квартал 2026 доступ для всей компании</a:t>
+            </a:r>
+          </a:p>
+          <a:p>
+            <a:pPr algn="l">
+              <a:spcAft>
+                <a:spcPts val="300"/>
+              </a:spcAft>
+              <a:defRPr sz="2400" b="1">
+                <a:solidFill>
+                  <a:srgbClr val="FFFFFF"/>
+                </a:solidFill>
+                <a:latin typeface="Play"/>
+                <a:ea typeface="Play"/>
+                <a:cs typeface="Play"/>
+              </a:defRPr>
+            </a:pPr>
+            <a:r>
+              <a:rPr sz="2400" b="1">
+                <a:solidFill>
+                  <a:srgbClr val="FFFFFF"/>
+                </a:solidFill>
+                <a:latin typeface="Play"/>
+                <a:ea typeface="Play"/>
+                <a:cs typeface="Play"/>
+              </a:rPr>
+              <a:t>• Первый квартал 2027 генерация иллюстраций</a:t>
             </a:r>
           </a:p>
         </p:txBody>
